--- a/Subgroups/ASX/InstantiationReview/ASX-Instantiation-Findings.pptx
+++ b/Subgroups/ASX/InstantiationReview/ASX-Instantiation-Findings.pptx
@@ -17,6 +17,7 @@
     <p:sldId id="265" r:id="rId16"/>
     <p:sldId id="266" r:id="rId17"/>
     <p:sldId id="267" r:id="rId18"/>
+    <p:sldId id="268" r:id="rId19"/>
   </p:sldIdLst>
   <p:sldSz cx="12191695" cy="6858000" type="screen4x3"/>
   <p:notesSz cx="6858000" cy="9144000"/>
@@ -3409,11 +3410,11 @@
                 <a:spcPts val="200"/>
               </a:spcBef>
               <a:spcAft>
-                <a:spcPts val="800"/>
+                <a:spcPts val="1200"/>
               </a:spcAft>
             </a:pPr>
             <a:r>
-              <a:rPr sz="1550" b="1" i="0">
+              <a:rPr sz="1650" b="1" i="0">
                 <a:solidFill>
                   <a:srgbClr val="333333"/>
                 </a:solidFill>
@@ -3428,74 +3429,17 @@
                 <a:spcPts val="200"/>
               </a:spcBef>
               <a:spcAft>
-                <a:spcPts val="800"/>
+                <a:spcPts val="1200"/>
               </a:spcAft>
             </a:pPr>
             <a:r>
-              <a:rPr sz="1550" b="0" i="0">
+              <a:rPr sz="1650" b="1" i="0">
                 <a:solidFill>
                   <a:srgbClr val="333333"/>
                 </a:solidFill>
                 <a:latin typeface="Calibri"/>
               </a:rPr>
-              <a:t>CASEVAC needs message patterns none of the current examples cover:</a:t>
-            </a:r>
-          </a:p>
-          <a:p>
-            <a:pPr lvl="1">
-              <a:spcBef>
-                <a:spcPts val="200"/>
-              </a:spcBef>
-              <a:spcAft>
-                <a:spcPts val="800"/>
-              </a:spcAft>
-            </a:pPr>
-            <a:r>
-              <a:rPr sz="1550" b="0" i="0">
-                <a:solidFill>
-                  <a:srgbClr val="333333"/>
-                </a:solidFill>
-                <a:latin typeface="Calibri"/>
-              </a:rPr>
-              <a:t>      -  machine-to-machine route hand-off (scout -&gt; transport)</a:t>
-            </a:r>
-          </a:p>
-          <a:p>
-            <a:pPr lvl="1">
-              <a:spcBef>
-                <a:spcPts val="200"/>
-              </a:spcBef>
-              <a:spcAft>
-                <a:spcPts val="800"/>
-              </a:spcAft>
-            </a:pPr>
-            <a:r>
-              <a:rPr sz="1550" b="0" i="0">
-                <a:solidFill>
-                  <a:srgbClr val="333333"/>
-                </a:solidFill>
-                <a:latin typeface="Calibri"/>
-              </a:rPr>
-              <a:t>      -  'explainable reasons' report (why the route changed / mission could not complete)</a:t>
-            </a:r>
-          </a:p>
-          <a:p>
-            <a:pPr lvl="1">
-              <a:spcBef>
-                <a:spcPts val="200"/>
-              </a:spcBef>
-              <a:spcAft>
-                <a:spcPts val="800"/>
-              </a:spcAft>
-            </a:pPr>
-            <a:r>
-              <a:rPr sz="1550" b="0" i="0">
-                <a:solidFill>
-                  <a:srgbClr val="333333"/>
-                </a:solidFill>
-                <a:latin typeface="Calibri"/>
-              </a:rPr>
-              <a:t>      -  on-the-loop status and position updates</a:t>
+              <a:t>CASEVAC: walked end-to-end in this review - surfaces two gaps with no element (next slide).</a:t>
             </a:r>
           </a:p>
           <a:p>
@@ -3504,11 +3448,11 @@
                 <a:spcPts val="200"/>
               </a:spcBef>
               <a:spcAft>
-                <a:spcPts val="800"/>
+                <a:spcPts val="1200"/>
               </a:spcAft>
             </a:pPr>
             <a:r>
-              <a:rPr sz="1550" b="0" i="0">
+              <a:rPr sz="1650" b="0" i="0">
                 <a:solidFill>
                   <a:srgbClr val="333333"/>
                 </a:solidFill>
@@ -3523,11 +3467,11 @@
                 <a:spcPts val="200"/>
               </a:spcBef>
               <a:spcAft>
-                <a:spcPts val="800"/>
+                <a:spcPts val="1200"/>
               </a:spcAft>
             </a:pPr>
             <a:r>
-              <a:rPr sz="1550" b="0" i="0">
+              <a:rPr sz="1650" b="0" i="0">
                 <a:solidFill>
                   <a:srgbClr val="333333"/>
                 </a:solidFill>
@@ -3697,7 +3641,7 @@
                 </a:solidFill>
                 <a:latin typeface="Calibri"/>
               </a:rPr>
-              <a:t>Decisions for the sub-group</a:t>
+              <a:t>CASEVAC walk: two gaps with no element</a:t>
             </a:r>
           </a:p>
         </p:txBody>
@@ -3710,8 +3654,42 @@
         </p:nvSpPr>
         <p:spPr>
           <a:xfrm>
-            <a:off x="640080" y="1645920"/>
-            <a:ext cx="10972800" cy="4709160"/>
+            <a:off x="548640" y="914400"/>
+            <a:ext cx="10972800" cy="320040"/>
+          </a:xfrm>
+          <a:prstGeom prst="rect">
+            <a:avLst/>
+          </a:prstGeom>
+          <a:noFill/>
+        </p:spPr>
+        <p:txBody>
+          <a:bodyPr wrap="square">
+            <a:spAutoFit/>
+          </a:bodyPr>
+          <a:lstStyle/>
+          <a:p>
+            <a:r>
+              <a:rPr sz="1300" b="0" i="1">
+                <a:solidFill>
+                  <a:srgbClr val="2E869A"/>
+                </a:solidFill>
+                <a:latin typeface="Calibri"/>
+              </a:rPr>
+              <a:t>The flagship contributed scenario</a:t>
+            </a:r>
+          </a:p>
+        </p:txBody>
+      </p:sp>
+      <p:sp>
+        <p:nvSpPr>
+          <p:cNvPr id="5" name="TextBox 4"/>
+          <p:cNvSpPr txBox="1"/>
+          <p:nvPr/>
+        </p:nvSpPr>
+        <p:spPr>
+          <a:xfrm>
+            <a:off x="640080" y="1417320"/>
+            <a:ext cx="10972800" cy="777240"/>
           </a:xfrm>
           <a:prstGeom prst="rect">
             <a:avLst/>
@@ -3729,54 +3707,174 @@
                 <a:spcPts val="200"/>
               </a:spcBef>
               <a:spcAft>
-                <a:spcPts val="1200"/>
+                <a:spcPts val="600"/>
               </a:spcAft>
             </a:pPr>
             <a:r>
-              <a:rPr sz="1600" b="1" i="0">
-                <a:solidFill>
-                  <a:srgbClr val="2E869A"/>
-                </a:solidFill>
-                <a:latin typeface="Calibri"/>
-              </a:rPr>
-              <a:t>Q-A  </a:t>
-            </a:r>
-            <a:r>
-              <a:rPr sz="1600" b="0" i="0">
+              <a:rPr sz="1400" b="0" i="0">
                 <a:solidFill>
                   <a:srgbClr val="333333"/>
                 </a:solidFill>
                 <a:latin typeface="Calibri"/>
               </a:rPr>
-              <a:t>UAV/robot typing: a role on the existing Platform tree, or a parallel Robot tree?</a:t>
-            </a:r>
-          </a:p>
+              <a:t>Walked end-to-end: Initialization -&gt; tasking Order -&gt; robot-to-robot route hand-off -&gt; status/threat Reports -&gt; explainable-reasons Report.</a:t>
+            </a:r>
+          </a:p>
+        </p:txBody>
+      </p:sp>
+      <p:sp>
+        <p:nvSpPr>
+          <p:cNvPr id="6" name="Rounded Rectangle 5"/>
+          <p:cNvSpPr/>
+          <p:nvPr/>
+        </p:nvSpPr>
+        <p:spPr>
+          <a:xfrm>
+            <a:off x="731520" y="2240280"/>
+            <a:ext cx="5257800" cy="1600200"/>
+          </a:xfrm>
+          <a:prstGeom prst="roundRect">
+            <a:avLst/>
+          </a:prstGeom>
+          <a:solidFill>
+            <a:srgbClr val="C0392B"/>
+          </a:solidFill>
+          <a:ln>
+            <a:noFill/>
+          </a:ln>
+        </p:spPr>
+        <p:style>
+          <a:lnRef idx="1">
+            <a:schemeClr val="accent1"/>
+          </a:lnRef>
+          <a:fillRef idx="3">
+            <a:schemeClr val="accent1"/>
+          </a:fillRef>
+          <a:effectRef idx="2">
+            <a:schemeClr val="accent1"/>
+          </a:effectRef>
+          <a:fontRef idx="minor">
+            <a:schemeClr val="lt1"/>
+          </a:fontRef>
+        </p:style>
+        <p:txBody>
+          <a:bodyPr rtlCol="0" anchor="ctr" wrap="square"/>
+          <a:lstStyle/>
+          <a:p>
+            <a:pPr algn="ctr"/>
+            <a:r>
+              <a:rPr sz="1300" b="1" i="0">
+                <a:solidFill>
+                  <a:srgbClr val="FFFFFF"/>
+                </a:solidFill>
+                <a:latin typeface="Calibri"/>
+              </a:rPr>
+              <a:t>X1  -  No robot-to-robot content
+Scout cannot hand a verified safe Route to the transport UGV (envelope addressing exists; a content type does not)</a:t>
+            </a:r>
+          </a:p>
+        </p:txBody>
+      </p:sp>
+      <p:sp>
+        <p:nvSpPr>
+          <p:cNvPr id="7" name="Rounded Rectangle 6"/>
+          <p:cNvSpPr/>
+          <p:nvPr/>
+        </p:nvSpPr>
+        <p:spPr>
+          <a:xfrm>
+            <a:off x="6217920" y="2240280"/>
+            <a:ext cx="5257800" cy="1600200"/>
+          </a:xfrm>
+          <a:prstGeom prst="roundRect">
+            <a:avLst/>
+          </a:prstGeom>
+          <a:solidFill>
+            <a:srgbClr val="C0392B"/>
+          </a:solidFill>
+          <a:ln>
+            <a:noFill/>
+          </a:ln>
+        </p:spPr>
+        <p:style>
+          <a:lnRef idx="1">
+            <a:schemeClr val="accent1"/>
+          </a:lnRef>
+          <a:fillRef idx="3">
+            <a:schemeClr val="accent1"/>
+          </a:fillRef>
+          <a:effectRef idx="2">
+            <a:schemeClr val="accent1"/>
+          </a:effectRef>
+          <a:fontRef idx="minor">
+            <a:schemeClr val="lt1"/>
+          </a:fontRef>
+        </p:style>
+        <p:txBody>
+          <a:bodyPr rtlCol="0" anchor="ctr" wrap="square"/>
+          <a:lstStyle/>
+          <a:p>
+            <a:pPr algn="ctr"/>
+            <a:r>
+              <a:rPr sz="1300" b="1" i="0">
+                <a:solidFill>
+                  <a:srgbClr val="FFFFFF"/>
+                </a:solidFill>
+                <a:latin typeface="Calibri"/>
+              </a:rPr>
+              <a:t>X2  -  No rationale report
+Systems can report WHAT (TaskStatus) but not WHY a route changed or a mission failed</a:t>
+            </a:r>
+          </a:p>
+        </p:txBody>
+      </p:sp>
+      <p:sp>
+        <p:nvSpPr>
+          <p:cNvPr id="8" name="TextBox 7"/>
+          <p:cNvSpPr txBox="1"/>
+          <p:nvPr/>
+        </p:nvSpPr>
+        <p:spPr>
+          <a:xfrm>
+            <a:off x="640080" y="4114800"/>
+            <a:ext cx="10972800" cy="2240280"/>
+          </a:xfrm>
+          <a:prstGeom prst="rect">
+            <a:avLst/>
+          </a:prstGeom>
+          <a:noFill/>
+        </p:spPr>
+        <p:txBody>
+          <a:bodyPr wrap="square">
+            <a:spAutoFit/>
+          </a:bodyPr>
+          <a:lstStyle/>
           <a:p>
             <a:pPr>
               <a:spcBef>
                 <a:spcPts val="200"/>
               </a:spcBef>
               <a:spcAft>
-                <a:spcPts val="1200"/>
+                <a:spcPts val="900"/>
               </a:spcAft>
             </a:pPr>
             <a:r>
-              <a:rPr sz="1600" b="1" i="0">
+              <a:rPr sz="1400" b="1" i="0">
                 <a:solidFill>
                   <a:srgbClr val="2E869A"/>
                 </a:solidFill>
                 <a:latin typeface="Calibri"/>
               </a:rPr>
-              <a:t>Q-B  </a:t>
-            </a:r>
-            <a:r>
-              <a:rPr sz="1600" b="0" i="0">
+              <a:t>Decision (Q-G):  </a:t>
+            </a:r>
+            <a:r>
+              <a:rPr sz="1400" b="0" i="0">
                 <a:solidFill>
                   <a:srgbClr val="333333"/>
                 </a:solidFill>
                 <a:latin typeface="Calibri"/>
               </a:rPr>
-              <a:t>Swarm: derive from CollectiveEntity (ActorEntity) so it can be tasked.</a:t>
+              <a:t>define a robot-to-robot coordination content type (safe-route advertisement) and the issuing-authority model.</a:t>
             </a:r>
           </a:p>
           <a:p>
@@ -3785,26 +3883,26 @@
                 <a:spcPts val="200"/>
               </a:spcBef>
               <a:spcAft>
-                <a:spcPts val="1200"/>
+                <a:spcPts val="900"/>
               </a:spcAft>
             </a:pPr>
             <a:r>
-              <a:rPr sz="1600" b="1" i="0">
+              <a:rPr sz="1400" b="1" i="0">
                 <a:solidFill>
                   <a:srgbClr val="2E869A"/>
                 </a:solidFill>
                 <a:latin typeface="Calibri"/>
               </a:rPr>
-              <a:t>Q-C  </a:t>
-            </a:r>
-            <a:r>
-              <a:rPr sz="1600" b="0" i="0">
+              <a:t>Decision (Q-H):  </a:t>
+            </a:r>
+            <a:r>
+              <a:rPr sz="1400" b="0" i="0">
                 <a:solidFill>
                   <a:srgbClr val="333333"/>
                 </a:solidFill>
                 <a:latin typeface="Calibri"/>
               </a:rPr>
-              <a:t>Sensor: entity, class, or attribute - choose one model and apply it everywhere.</a:t>
+              <a:t>add a rationale/explanation ReportContent so systems can report why, not just what.</a:t>
             </a:r>
           </a:p>
           <a:p>
@@ -3813,89 +3911,33 @@
                 <a:spcPts val="200"/>
               </a:spcBef>
               <a:spcAft>
-                <a:spcPts val="1200"/>
+                <a:spcPts val="900"/>
               </a:spcAft>
             </a:pPr>
             <a:r>
-              <a:rPr sz="1600" b="1" i="0">
-                <a:solidFill>
-                  <a:srgbClr val="2E869A"/>
-                </a:solidFill>
-                <a:latin typeface="Calibri"/>
-              </a:rPr>
-              <a:t>Q-D  </a:t>
-            </a:r>
-            <a:r>
-              <a:rPr sz="1600" b="0" i="0">
+              <a:rPr sz="1400" b="1" i="0">
+                <a:solidFill>
+                  <a:srgbClr val="2E7D32"/>
+                </a:solidFill>
+                <a:latin typeface="Calibri"/>
+              </a:rPr>
+              <a:t>Checked:  </a:t>
+            </a:r>
+            <a:r>
+              <a:rPr sz="1400" b="0" i="0">
                 <a:solidFill>
                   <a:srgbClr val="333333"/>
                 </a:solidFill>
                 <a:latin typeface="Calibri"/>
               </a:rPr>
-              <a:t>Autonomy: choose one normative vocabulary.</a:t>
-            </a:r>
-          </a:p>
-          <a:p>
-            <a:pPr>
-              <a:spcBef>
-                <a:spcPts val="200"/>
-              </a:spcBef>
-              <a:spcAft>
-                <a:spcPts val="1200"/>
-              </a:spcAft>
-            </a:pPr>
-            <a:r>
-              <a:rPr sz="1600" b="1" i="0">
-                <a:solidFill>
-                  <a:srgbClr val="2E869A"/>
-                </a:solidFill>
-                <a:latin typeface="Calibri"/>
-              </a:rPr>
-              <a:t>Q-E  </a:t>
-            </a:r>
-            <a:r>
-              <a:rPr sz="1600" b="0" i="0">
-                <a:solidFill>
-                  <a:srgbClr val="333333"/>
-                </a:solidFill>
-                <a:latin typeface="Calibri"/>
-              </a:rPr>
-              <a:t>Define inline entity definition for newly-observed entities in reports.</a:t>
-            </a:r>
-          </a:p>
-          <a:p>
-            <a:pPr>
-              <a:spcBef>
-                <a:spcPts val="200"/>
-              </a:spcBef>
-              <a:spcAft>
-                <a:spcPts val="1200"/>
-              </a:spcAft>
-            </a:pPr>
-            <a:r>
-              <a:rPr sz="1600" b="1" i="0">
-                <a:solidFill>
-                  <a:srgbClr val="2E869A"/>
-                </a:solidFill>
-                <a:latin typeface="Calibri"/>
-              </a:rPr>
-              <a:t>Q-F  </a:t>
-            </a:r>
-            <a:r>
-              <a:rPr sz="1600" b="0" i="0">
-                <a:solidFill>
-                  <a:srgbClr val="333333"/>
-                </a:solidFill>
-                <a:latin typeface="Calibri"/>
-              </a:rPr>
-              <a:t>MediaReference identity, and separate media-format from sensor-modality.</a:t>
-            </a:r>
-          </a:p>
-        </p:txBody>
-      </p:sp>
-      <p:sp>
-        <p:nvSpPr>
-          <p:cNvPr id="5" name="TextBox 4"/>
+              <a:t>Route, phased planning (PlanBody/PlanPhase), and position reporting already exist - not gaps.</a:t>
+            </a:r>
+          </a:p>
+        </p:txBody>
+      </p:sp>
+      <p:sp>
+        <p:nvSpPr>
+          <p:cNvPr id="9" name="TextBox 8"/>
           <p:cNvSpPr txBox="1"/>
           <p:nvPr/>
         </p:nvSpPr>
@@ -3929,7 +3971,7 @@
       </p:sp>
       <p:sp>
         <p:nvSpPr>
-          <p:cNvPr id="6" name="TextBox 5"/>
+          <p:cNvPr id="10" name="TextBox 9"/>
           <p:cNvSpPr txBox="1"/>
           <p:nvPr/>
         </p:nvSpPr>
@@ -4052,7 +4094,7 @@
                 </a:solidFill>
                 <a:latin typeface="Calibri"/>
               </a:rPr>
-              <a:t>Recommended next steps</a:t>
+              <a:t>Decisions for the sub-group</a:t>
             </a:r>
           </a:p>
         </p:txBody>
@@ -4065,8 +4107,8 @@
         </p:nvSpPr>
         <p:spPr>
           <a:xfrm>
-            <a:off x="640080" y="1645920"/>
-            <a:ext cx="10972800" cy="4709160"/>
+            <a:off x="640080" y="1554480"/>
+            <a:ext cx="10972800" cy="4754880"/>
           </a:xfrm>
           <a:prstGeom prst="rect">
             <a:avLst/>
@@ -4084,17 +4126,26 @@
                 <a:spcPts val="200"/>
               </a:spcBef>
               <a:spcAft>
-                <a:spcPts val="1300"/>
+                <a:spcPts val="900"/>
               </a:spcAft>
             </a:pPr>
             <a:r>
-              <a:rPr sz="1700" b="1" i="0">
+              <a:rPr sz="1400" b="1" i="0">
+                <a:solidFill>
+                  <a:srgbClr val="2E869A"/>
+                </a:solidFill>
+                <a:latin typeface="Calibri"/>
+              </a:rPr>
+              <a:t>Q-A  </a:t>
+            </a:r>
+            <a:r>
+              <a:rPr sz="1400" b="0" i="0">
                 <a:solidFill>
                   <a:srgbClr val="333333"/>
                 </a:solidFill>
                 <a:latin typeface="Calibri"/>
               </a:rPr>
-              <a:t>Settle the two entity-typing decisions (Q-A, Q-B) - this unblocks Initialization.</a:t>
+              <a:t>UAV/robot typing: a role on the existing Platform tree, or a parallel Robot tree?</a:t>
             </a:r>
           </a:p>
           <a:p>
@@ -4103,17 +4154,26 @@
                 <a:spcPts val="200"/>
               </a:spcBef>
               <a:spcAft>
-                <a:spcPts val="1300"/>
+                <a:spcPts val="900"/>
               </a:spcAft>
             </a:pPr>
             <a:r>
-              <a:rPr sz="1700" b="0" i="0">
+              <a:rPr sz="1400" b="1" i="0">
+                <a:solidFill>
+                  <a:srgbClr val="2E869A"/>
+                </a:solidFill>
+                <a:latin typeface="Calibri"/>
+              </a:rPr>
+              <a:t>Q-B  </a:t>
+            </a:r>
+            <a:r>
+              <a:rPr sz="1400" b="0" i="0">
                 <a:solidFill>
                   <a:srgbClr val="333333"/>
                 </a:solidFill>
                 <a:latin typeface="Calibri"/>
               </a:rPr>
-              <a:t>Complete the Initialization instantiations (drafts provided for the 3 named scenarios).</a:t>
+              <a:t>Swarm: derive from CollectiveEntity (ActorEntity) so it can be tasked.</a:t>
             </a:r>
           </a:p>
           <a:p>
@@ -4122,17 +4182,26 @@
                 <a:spcPts val="200"/>
               </a:spcBef>
               <a:spcAft>
-                <a:spcPts val="1300"/>
+                <a:spcPts val="900"/>
               </a:spcAft>
             </a:pPr>
             <a:r>
-              <a:rPr sz="1700" b="0" i="0">
+              <a:rPr sz="1400" b="1" i="0">
+                <a:solidFill>
+                  <a:srgbClr val="2E869A"/>
+                </a:solidFill>
+                <a:latin typeface="Calibri"/>
+              </a:rPr>
+              <a:t>Q-C  </a:t>
+            </a:r>
+            <a:r>
+              <a:rPr sz="1400" b="0" i="0">
                 <a:solidFill>
                   <a:srgbClr val="333333"/>
                 </a:solidFill>
                 <a:latin typeface="Calibri"/>
               </a:rPr>
-              <a:t>Walk CASEVAC end-to-end to exercise coordination and explainability.</a:t>
+              <a:t>Sensor: entity, class, or attribute - choose one model and apply it everywhere.</a:t>
             </a:r>
           </a:p>
           <a:p>
@@ -4141,17 +4210,26 @@
                 <a:spcPts val="200"/>
               </a:spcBef>
               <a:spcAft>
-                <a:spcPts val="1300"/>
+                <a:spcPts val="900"/>
               </a:spcAft>
             </a:pPr>
             <a:r>
-              <a:rPr sz="1700" b="0" i="0">
+              <a:rPr sz="1400" b="1" i="0">
+                <a:solidFill>
+                  <a:srgbClr val="2E869A"/>
+                </a:solidFill>
+                <a:latin typeface="Calibri"/>
+              </a:rPr>
+              <a:t>Q-D  </a:t>
+            </a:r>
+            <a:r>
+              <a:rPr sz="1400" b="0" i="0">
                 <a:solidFill>
                   <a:srgbClr val="333333"/>
                 </a:solidFill>
                 <a:latin typeface="Calibri"/>
               </a:rPr>
-              <a:t>Reconcile the OWL model with the June spreadsheet decisions; fix the typos.</a:t>
+              <a:t>Autonomy: choose one normative vocabulary.</a:t>
             </a:r>
           </a:p>
           <a:p>
@@ -4160,17 +4238,110 @@
                 <a:spcPts val="200"/>
               </a:spcBef>
               <a:spcAft>
-                <a:spcPts val="1300"/>
+                <a:spcPts val="900"/>
               </a:spcAft>
             </a:pPr>
             <a:r>
-              <a:rPr sz="1700" b="0" i="0">
+              <a:rPr sz="1400" b="1" i="0">
+                <a:solidFill>
+                  <a:srgbClr val="2E869A"/>
+                </a:solidFill>
+                <a:latin typeface="Calibri"/>
+              </a:rPr>
+              <a:t>Q-E  </a:t>
+            </a:r>
+            <a:r>
+              <a:rPr sz="1400" b="0" i="0">
                 <a:solidFill>
                   <a:srgbClr val="333333"/>
                 </a:solidFill>
                 <a:latin typeface="Calibri"/>
               </a:rPr>
-              <a:t>Optional: adopt the diff-able (.xml) workbooks so edits can be reviewed and merged in git.</a:t>
+              <a:t>Define inline entity definition for newly-observed entities in reports.</a:t>
+            </a:r>
+          </a:p>
+          <a:p>
+            <a:pPr>
+              <a:spcBef>
+                <a:spcPts val="200"/>
+              </a:spcBef>
+              <a:spcAft>
+                <a:spcPts val="900"/>
+              </a:spcAft>
+            </a:pPr>
+            <a:r>
+              <a:rPr sz="1400" b="1" i="0">
+                <a:solidFill>
+                  <a:srgbClr val="2E869A"/>
+                </a:solidFill>
+                <a:latin typeface="Calibri"/>
+              </a:rPr>
+              <a:t>Q-F  </a:t>
+            </a:r>
+            <a:r>
+              <a:rPr sz="1400" b="0" i="0">
+                <a:solidFill>
+                  <a:srgbClr val="333333"/>
+                </a:solidFill>
+                <a:latin typeface="Calibri"/>
+              </a:rPr>
+              <a:t>MediaReference identity, and separate media-format from sensor-modality.</a:t>
+            </a:r>
+          </a:p>
+          <a:p>
+            <a:pPr>
+              <a:spcBef>
+                <a:spcPts val="200"/>
+              </a:spcBef>
+              <a:spcAft>
+                <a:spcPts val="900"/>
+              </a:spcAft>
+            </a:pPr>
+            <a:r>
+              <a:rPr sz="1400" b="1" i="0">
+                <a:solidFill>
+                  <a:srgbClr val="2E869A"/>
+                </a:solidFill>
+                <a:latin typeface="Calibri"/>
+              </a:rPr>
+              <a:t>Q-G  </a:t>
+            </a:r>
+            <a:r>
+              <a:rPr sz="1400" b="0" i="0">
+                <a:solidFill>
+                  <a:srgbClr val="333333"/>
+                </a:solidFill>
+                <a:latin typeface="Calibri"/>
+              </a:rPr>
+              <a:t>Robot-to-robot coordination content type + issuing authority (from CASEVAC).</a:t>
+            </a:r>
+          </a:p>
+          <a:p>
+            <a:pPr>
+              <a:spcBef>
+                <a:spcPts val="200"/>
+              </a:spcBef>
+              <a:spcAft>
+                <a:spcPts val="900"/>
+              </a:spcAft>
+            </a:pPr>
+            <a:r>
+              <a:rPr sz="1400" b="1" i="0">
+                <a:solidFill>
+                  <a:srgbClr val="2E869A"/>
+                </a:solidFill>
+                <a:latin typeface="Calibri"/>
+              </a:rPr>
+              <a:t>Q-H  </a:t>
+            </a:r>
+            <a:r>
+              <a:rPr sz="1400" b="0" i="0">
+                <a:solidFill>
+                  <a:srgbClr val="333333"/>
+                </a:solidFill>
+                <a:latin typeface="Calibri"/>
+              </a:rPr>
+              <a:t>Rationale/explanation ReportContent - report why, not just what (from CASEVAC).</a:t>
             </a:r>
           </a:p>
         </p:txBody>
@@ -4240,6 +4411,288 @@
                 <a:latin typeface="Calibri"/>
               </a:rPr>
               <a:t>12</a:t>
+            </a:r>
+          </a:p>
+        </p:txBody>
+      </p:sp>
+    </p:spTree>
+  </p:cSld>
+  <p:clrMapOvr>
+    <a:masterClrMapping/>
+  </p:clrMapOvr>
+</p:sld>
+</file>
+
+<file path=ppt/slides/slide13.xml><?xml version="1.0" encoding="utf-8"?>
+<p:sld xmlns:a="http://schemas.openxmlformats.org/drawingml/2006/main" xmlns:p="http://schemas.openxmlformats.org/presentationml/2006/main" xmlns:r="http://schemas.openxmlformats.org/officeDocument/2006/relationships">
+  <p:cSld>
+    <p:spTree>
+      <p:nvGrpSpPr>
+        <p:cNvPr id="1" name=""/>
+        <p:cNvGrpSpPr/>
+        <p:nvPr/>
+      </p:nvGrpSpPr>
+      <p:grpSpPr/>
+      <p:sp>
+        <p:nvSpPr>
+          <p:cNvPr id="2" name="Rectangle 1"/>
+          <p:cNvSpPr/>
+          <p:nvPr/>
+        </p:nvSpPr>
+        <p:spPr>
+          <a:xfrm>
+            <a:off x="548640" y="1170432"/>
+            <a:ext cx="2011680" cy="38100"/>
+          </a:xfrm>
+          <a:prstGeom prst="rect">
+            <a:avLst/>
+          </a:prstGeom>
+          <a:solidFill>
+            <a:srgbClr val="2E869A"/>
+          </a:solidFill>
+          <a:ln>
+            <a:noFill/>
+          </a:ln>
+        </p:spPr>
+        <p:style>
+          <a:lnRef idx="1">
+            <a:schemeClr val="accent1"/>
+          </a:lnRef>
+          <a:fillRef idx="3">
+            <a:schemeClr val="accent1"/>
+          </a:fillRef>
+          <a:effectRef idx="2">
+            <a:schemeClr val="accent1"/>
+          </a:effectRef>
+          <a:fontRef idx="minor">
+            <a:schemeClr val="lt1"/>
+          </a:fontRef>
+        </p:style>
+        <p:txBody>
+          <a:bodyPr rtlCol="0" anchor="ctr"/>
+          <a:lstStyle/>
+          <a:p>
+            <a:pPr algn="ctr"/>
+          </a:p>
+        </p:txBody>
+      </p:sp>
+      <p:sp>
+        <p:nvSpPr>
+          <p:cNvPr id="3" name="TextBox 2"/>
+          <p:cNvSpPr txBox="1"/>
+          <p:nvPr/>
+        </p:nvSpPr>
+        <p:spPr>
+          <a:xfrm>
+            <a:off x="502920" y="411480"/>
+            <a:ext cx="11155680" cy="822960"/>
+          </a:xfrm>
+          <a:prstGeom prst="rect">
+            <a:avLst/>
+          </a:prstGeom>
+          <a:noFill/>
+        </p:spPr>
+        <p:txBody>
+          <a:bodyPr wrap="square">
+            <a:spAutoFit/>
+          </a:bodyPr>
+          <a:lstStyle/>
+          <a:p>
+            <a:r>
+              <a:rPr sz="3000" b="1" i="0">
+                <a:solidFill>
+                  <a:srgbClr val="1F3A5F"/>
+                </a:solidFill>
+                <a:latin typeface="Calibri"/>
+              </a:rPr>
+              <a:t>Recommended next steps</a:t>
+            </a:r>
+          </a:p>
+        </p:txBody>
+      </p:sp>
+      <p:sp>
+        <p:nvSpPr>
+          <p:cNvPr id="4" name="TextBox 3"/>
+          <p:cNvSpPr txBox="1"/>
+          <p:nvPr/>
+        </p:nvSpPr>
+        <p:spPr>
+          <a:xfrm>
+            <a:off x="640080" y="1645920"/>
+            <a:ext cx="10972800" cy="4709160"/>
+          </a:xfrm>
+          <a:prstGeom prst="rect">
+            <a:avLst/>
+          </a:prstGeom>
+          <a:noFill/>
+        </p:spPr>
+        <p:txBody>
+          <a:bodyPr wrap="square">
+            <a:spAutoFit/>
+          </a:bodyPr>
+          <a:lstStyle/>
+          <a:p>
+            <a:pPr>
+              <a:spcBef>
+                <a:spcPts val="200"/>
+              </a:spcBef>
+              <a:spcAft>
+                <a:spcPts val="1200"/>
+              </a:spcAft>
+            </a:pPr>
+            <a:r>
+              <a:rPr sz="1650" b="1" i="0">
+                <a:solidFill>
+                  <a:srgbClr val="333333"/>
+                </a:solidFill>
+                <a:latin typeface="Calibri"/>
+              </a:rPr>
+              <a:t>Settle the two entity-typing decisions (Q-A, Q-B) - this unblocks Initialization.</a:t>
+            </a:r>
+          </a:p>
+          <a:p>
+            <a:pPr>
+              <a:spcBef>
+                <a:spcPts val="200"/>
+              </a:spcBef>
+              <a:spcAft>
+                <a:spcPts val="1200"/>
+              </a:spcAft>
+            </a:pPr>
+            <a:r>
+              <a:rPr sz="1650" b="0" i="0">
+                <a:solidFill>
+                  <a:srgbClr val="333333"/>
+                </a:solidFill>
+                <a:latin typeface="Calibri"/>
+              </a:rPr>
+              <a:t>Complete the Initialization instantiations (drafts provided for the 3 named scenarios).</a:t>
+            </a:r>
+          </a:p>
+          <a:p>
+            <a:pPr>
+              <a:spcBef>
+                <a:spcPts val="200"/>
+              </a:spcBef>
+              <a:spcAft>
+                <a:spcPts val="1200"/>
+              </a:spcAft>
+            </a:pPr>
+            <a:r>
+              <a:rPr sz="1650" b="0" i="0">
+                <a:solidFill>
+                  <a:srgbClr val="333333"/>
+                </a:solidFill>
+                <a:latin typeface="Calibri"/>
+              </a:rPr>
+              <a:t>Add the two CASEVAC content types (Q-G robot-to-robot, Q-H rationale) - both are explicit scenario requirements.</a:t>
+            </a:r>
+          </a:p>
+          <a:p>
+            <a:pPr>
+              <a:spcBef>
+                <a:spcPts val="200"/>
+              </a:spcBef>
+              <a:spcAft>
+                <a:spcPts val="1200"/>
+              </a:spcAft>
+            </a:pPr>
+            <a:r>
+              <a:rPr sz="1650" b="0" i="0">
+                <a:solidFill>
+                  <a:srgbClr val="333333"/>
+                </a:solidFill>
+                <a:latin typeface="Calibri"/>
+              </a:rPr>
+              <a:t>Reconcile the OWL model with the June spreadsheet decisions; fix the typos.</a:t>
+            </a:r>
+          </a:p>
+          <a:p>
+            <a:pPr>
+              <a:spcBef>
+                <a:spcPts val="200"/>
+              </a:spcBef>
+              <a:spcAft>
+                <a:spcPts val="1200"/>
+              </a:spcAft>
+            </a:pPr>
+            <a:r>
+              <a:rPr sz="1650" b="0" i="0">
+                <a:solidFill>
+                  <a:srgbClr val="333333"/>
+                </a:solidFill>
+                <a:latin typeface="Calibri"/>
+              </a:rPr>
+              <a:t>Optional: adopt the diff-able (.xml) workbooks so edits can be reviewed and merged in git.</a:t>
+            </a:r>
+          </a:p>
+        </p:txBody>
+      </p:sp>
+      <p:sp>
+        <p:nvSpPr>
+          <p:cNvPr id="5" name="TextBox 4"/>
+          <p:cNvSpPr txBox="1"/>
+          <p:nvPr/>
+        </p:nvSpPr>
+        <p:spPr>
+          <a:xfrm>
+            <a:off x="502920" y="6419088"/>
+            <a:ext cx="11155680" cy="320040"/>
+          </a:xfrm>
+          <a:prstGeom prst="rect">
+            <a:avLst/>
+          </a:prstGeom>
+          <a:noFill/>
+        </p:spPr>
+        <p:txBody>
+          <a:bodyPr wrap="square">
+            <a:spAutoFit/>
+          </a:bodyPr>
+          <a:lstStyle/>
+          <a:p>
+            <a:r>
+              <a:rPr sz="900" b="0" i="0">
+                <a:solidFill>
+                  <a:srgbClr val="666666"/>
+                </a:solidFill>
+                <a:latin typeface="Calibri"/>
+              </a:rPr>
+              <a:t>C2SIM ASX Sub-group   |   Hyssos   |   July 2026</a:t>
+            </a:r>
+          </a:p>
+        </p:txBody>
+      </p:sp>
+      <p:sp>
+        <p:nvSpPr>
+          <p:cNvPr id="6" name="TextBox 5"/>
+          <p:cNvSpPr txBox="1"/>
+          <p:nvPr/>
+        </p:nvSpPr>
+        <p:spPr>
+          <a:xfrm>
+            <a:off x="11338560" y="6419088"/>
+            <a:ext cx="640080" cy="320040"/>
+          </a:xfrm>
+          <a:prstGeom prst="rect">
+            <a:avLst/>
+          </a:prstGeom>
+          <a:noFill/>
+        </p:spPr>
+        <p:txBody>
+          <a:bodyPr wrap="square">
+            <a:spAutoFit/>
+          </a:bodyPr>
+          <a:lstStyle/>
+          <a:p>
+            <a:pPr algn="r"/>
+            <a:r>
+              <a:rPr sz="900" b="0" i="0">
+                <a:solidFill>
+                  <a:srgbClr val="666666"/>
+                </a:solidFill>
+                <a:latin typeface="Calibri"/>
+              </a:rPr>
+              <a:t>13</a:t>
             </a:r>
           </a:p>
         </p:txBody>
@@ -4448,7 +4901,7 @@
                 </a:solidFill>
                 <a:latin typeface="Calibri"/>
               </a:rPr>
-              <a:t>This review focused on Initialization (which had zero worked examples) and cross-checked the OWL model against the spreadsheets.</a:t>
+              <a:t>This review focused on Initialization (which had zero worked examples) and the CASEVAC scenario, and cross-checked the OWL model against the spreadsheets.</a:t>
             </a:r>
           </a:p>
           <a:p>
@@ -4730,7 +5183,7 @@
                 </a:solidFill>
                 <a:latin typeface="Calibri"/>
               </a:rPr>
-              <a:t>CASEVAC - the one human-authored contributed scenario - has no messages of any type yet.</a:t>
+              <a:t>CASEVAC - the one human-authored contributed scenario - had no messages of any type (now walked in this review).</a:t>
             </a:r>
           </a:p>
           <a:p>

--- a/Subgroups/ASX/InstantiationReview/ASX-Instantiation-Findings.pptx
+++ b/Subgroups/ASX/InstantiationReview/ASX-Instantiation-Findings.pptx
@@ -3452,13 +3452,13 @@
               </a:spcAft>
             </a:pPr>
             <a:r>
-              <a:rPr sz="1650" b="0" i="0">
+              <a:rPr sz="1650" b="1" i="0">
                 <a:solidFill>
                   <a:srgbClr val="333333"/>
                 </a:solidFill>
                 <a:latin typeface="Calibri"/>
               </a:rPr>
-              <a:t>Non-video sensors (CBRN, EW/jammer, GPR, thermal): no reports; SensorType enum incomplete.</a:t>
+              <a:t>Non-video sensors (CBRN, EW, GPR): walked - the media-based report model does not generalize; non-imaging sensors have no measurement type (Y1/Y5).</a:t>
             </a:r>
           </a:p>
           <a:p>
@@ -4107,7 +4107,7 @@
         </p:nvSpPr>
         <p:spPr>
           <a:xfrm>
-            <a:off x="640080" y="1554480"/>
+            <a:off x="640080" y="1463040"/>
             <a:ext cx="10972800" cy="4754880"/>
           </a:xfrm>
           <a:prstGeom prst="rect">
@@ -4126,11 +4126,11 @@
                 <a:spcPts val="200"/>
               </a:spcBef>
               <a:spcAft>
-                <a:spcPts val="900"/>
+                <a:spcPts val="800"/>
               </a:spcAft>
             </a:pPr>
             <a:r>
-              <a:rPr sz="1400" b="1" i="0">
+              <a:rPr sz="1300" b="1" i="0">
                 <a:solidFill>
                   <a:srgbClr val="2E869A"/>
                 </a:solidFill>
@@ -4139,7 +4139,7 @@
               <a:t>Q-A  </a:t>
             </a:r>
             <a:r>
-              <a:rPr sz="1400" b="0" i="0">
+              <a:rPr sz="1300" b="0" i="0">
                 <a:solidFill>
                   <a:srgbClr val="333333"/>
                 </a:solidFill>
@@ -4154,11 +4154,11 @@
                 <a:spcPts val="200"/>
               </a:spcBef>
               <a:spcAft>
-                <a:spcPts val="900"/>
+                <a:spcPts val="800"/>
               </a:spcAft>
             </a:pPr>
             <a:r>
-              <a:rPr sz="1400" b="1" i="0">
+              <a:rPr sz="1300" b="1" i="0">
                 <a:solidFill>
                   <a:srgbClr val="2E869A"/>
                 </a:solidFill>
@@ -4167,7 +4167,7 @@
               <a:t>Q-B  </a:t>
             </a:r>
             <a:r>
-              <a:rPr sz="1400" b="0" i="0">
+              <a:rPr sz="1300" b="0" i="0">
                 <a:solidFill>
                   <a:srgbClr val="333333"/>
                 </a:solidFill>
@@ -4182,11 +4182,11 @@
                 <a:spcPts val="200"/>
               </a:spcBef>
               <a:spcAft>
-                <a:spcPts val="900"/>
+                <a:spcPts val="800"/>
               </a:spcAft>
             </a:pPr>
             <a:r>
-              <a:rPr sz="1400" b="1" i="0">
+              <a:rPr sz="1300" b="1" i="0">
                 <a:solidFill>
                   <a:srgbClr val="2E869A"/>
                 </a:solidFill>
@@ -4195,7 +4195,7 @@
               <a:t>Q-C  </a:t>
             </a:r>
             <a:r>
-              <a:rPr sz="1400" b="0" i="0">
+              <a:rPr sz="1300" b="0" i="0">
                 <a:solidFill>
                   <a:srgbClr val="333333"/>
                 </a:solidFill>
@@ -4210,11 +4210,11 @@
                 <a:spcPts val="200"/>
               </a:spcBef>
               <a:spcAft>
-                <a:spcPts val="900"/>
+                <a:spcPts val="800"/>
               </a:spcAft>
             </a:pPr>
             <a:r>
-              <a:rPr sz="1400" b="1" i="0">
+              <a:rPr sz="1300" b="1" i="0">
                 <a:solidFill>
                   <a:srgbClr val="2E869A"/>
                 </a:solidFill>
@@ -4223,7 +4223,7 @@
               <a:t>Q-D  </a:t>
             </a:r>
             <a:r>
-              <a:rPr sz="1400" b="0" i="0">
+              <a:rPr sz="1300" b="0" i="0">
                 <a:solidFill>
                   <a:srgbClr val="333333"/>
                 </a:solidFill>
@@ -4238,11 +4238,11 @@
                 <a:spcPts val="200"/>
               </a:spcBef>
               <a:spcAft>
-                <a:spcPts val="900"/>
+                <a:spcPts val="800"/>
               </a:spcAft>
             </a:pPr>
             <a:r>
-              <a:rPr sz="1400" b="1" i="0">
+              <a:rPr sz="1300" b="1" i="0">
                 <a:solidFill>
                   <a:srgbClr val="2E869A"/>
                 </a:solidFill>
@@ -4251,7 +4251,7 @@
               <a:t>Q-E  </a:t>
             </a:r>
             <a:r>
-              <a:rPr sz="1400" b="0" i="0">
+              <a:rPr sz="1300" b="0" i="0">
                 <a:solidFill>
                   <a:srgbClr val="333333"/>
                 </a:solidFill>
@@ -4266,11 +4266,11 @@
                 <a:spcPts val="200"/>
               </a:spcBef>
               <a:spcAft>
-                <a:spcPts val="900"/>
+                <a:spcPts val="800"/>
               </a:spcAft>
             </a:pPr>
             <a:r>
-              <a:rPr sz="1400" b="1" i="0">
+              <a:rPr sz="1300" b="1" i="0">
                 <a:solidFill>
                   <a:srgbClr val="2E869A"/>
                 </a:solidFill>
@@ -4279,7 +4279,7 @@
               <a:t>Q-F  </a:t>
             </a:r>
             <a:r>
-              <a:rPr sz="1400" b="0" i="0">
+              <a:rPr sz="1300" b="0" i="0">
                 <a:solidFill>
                   <a:srgbClr val="333333"/>
                 </a:solidFill>
@@ -4294,11 +4294,11 @@
                 <a:spcPts val="200"/>
               </a:spcBef>
               <a:spcAft>
-                <a:spcPts val="900"/>
+                <a:spcPts val="800"/>
               </a:spcAft>
             </a:pPr>
             <a:r>
-              <a:rPr sz="1400" b="1" i="0">
+              <a:rPr sz="1300" b="1" i="0">
                 <a:solidFill>
                   <a:srgbClr val="2E869A"/>
                 </a:solidFill>
@@ -4307,7 +4307,7 @@
               <a:t>Q-G  </a:t>
             </a:r>
             <a:r>
-              <a:rPr sz="1400" b="0" i="0">
+              <a:rPr sz="1300" b="0" i="0">
                 <a:solidFill>
                   <a:srgbClr val="333333"/>
                 </a:solidFill>
@@ -4322,11 +4322,11 @@
                 <a:spcPts val="200"/>
               </a:spcBef>
               <a:spcAft>
-                <a:spcPts val="900"/>
+                <a:spcPts val="800"/>
               </a:spcAft>
             </a:pPr>
             <a:r>
-              <a:rPr sz="1400" b="1" i="0">
+              <a:rPr sz="1300" b="1" i="0">
                 <a:solidFill>
                   <a:srgbClr val="2E869A"/>
                 </a:solidFill>
@@ -4335,13 +4335,41 @@
               <a:t>Q-H  </a:t>
             </a:r>
             <a:r>
-              <a:rPr sz="1400" b="0" i="0">
+              <a:rPr sz="1300" b="0" i="0">
                 <a:solidFill>
                   <a:srgbClr val="333333"/>
                 </a:solidFill>
                 <a:latin typeface="Calibri"/>
               </a:rPr>
               <a:t>Rationale/explanation ReportContent - report why, not just what (from CASEVAC).</a:t>
+            </a:r>
+          </a:p>
+          <a:p>
+            <a:pPr>
+              <a:spcBef>
+                <a:spcPts val="200"/>
+              </a:spcBef>
+              <a:spcAft>
+                <a:spcPts val="800"/>
+              </a:spcAft>
+            </a:pPr>
+            <a:r>
+              <a:rPr sz="1300" b="1" i="0">
+                <a:solidFill>
+                  <a:srgbClr val="2E869A"/>
+                </a:solidFill>
+                <a:latin typeface="Calibri"/>
+              </a:rPr>
+              <a:t>Q-I  </a:t>
+            </a:r>
+            <a:r>
+              <a:rPr sz="1300" b="0" i="0">
+                <a:solidFill>
+                  <a:srgbClr val="333333"/>
+                </a:solidFill>
+                <a:latin typeface="Calibri"/>
+              </a:rPr>
+              <a:t>Media-independent sensor-reading (value+unit+modality) + complete SensorType taxonomy (non-video walk).</a:t>
             </a:r>
           </a:p>
         </p:txBody>

--- a/Subgroups/ASX/InstantiationReview/ASX-Instantiation-Findings.pptx
+++ b/Subgroups/ASX/InstantiationReview/ASX-Instantiation-Findings.pptx
@@ -7448,8 +7448,8 @@
         </p:nvSpPr>
         <p:spPr>
           <a:xfrm>
-            <a:off x="640080" y="4937760"/>
-            <a:ext cx="10972800" cy="1417319"/>
+            <a:off x="640080" y="4846320"/>
+            <a:ext cx="10972800" cy="1508760"/>
           </a:xfrm>
           <a:prstGeom prst="rect">
             <a:avLst/>
@@ -7467,17 +7467,36 @@
                 <a:spcPts val="200"/>
               </a:spcBef>
               <a:spcAft>
-                <a:spcPts val="800"/>
+                <a:spcPts val="600"/>
               </a:spcAft>
             </a:pPr>
             <a:r>
-              <a:rPr sz="1500" b="0" i="0">
+              <a:rPr sz="1350" b="0" i="0">
                 <a:solidFill>
                   <a:srgbClr val="333333"/>
                 </a:solidFill>
                 <a:latin typeface="Calibri"/>
               </a:rPr>
               <a:t>A swarm is exactly what orders are addressed to and what sends reports - it must be an ActorEntity.</a:t>
+            </a:r>
+          </a:p>
+          <a:p>
+            <a:pPr lvl="1">
+              <a:spcBef>
+                <a:spcPts val="200"/>
+              </a:spcBef>
+              <a:spcAft>
+                <a:spcPts val="600"/>
+              </a:spcAft>
+            </a:pPr>
+            <a:r>
+              <a:rPr sz="1350" b="0" i="0">
+                <a:solidFill>
+                  <a:srgbClr val="333333"/>
+                </a:solidFill>
+                <a:latin typeface="Calibri"/>
+              </a:rPr>
+              <a:t>      -  Once fixed, membership and command already exist in base C2SIM (hasSubordinate, hasCommandRelation); the residual swarm needs are small.</a:t>
             </a:r>
           </a:p>
           <a:p>
@@ -7486,11 +7505,11 @@
                 <a:spcPts val="200"/>
               </a:spcBef>
               <a:spcAft>
-                <a:spcPts val="800"/>
+                <a:spcPts val="600"/>
               </a:spcAft>
             </a:pPr>
             <a:r>
-              <a:rPr sz="1500" b="1" i="0">
+              <a:rPr sz="1350" b="1" i="0">
                 <a:solidFill>
                   <a:srgbClr val="2E869A"/>
                 </a:solidFill>
@@ -7499,7 +7518,7 @@
               <a:t>Decision (Q-B):  </a:t>
             </a:r>
             <a:r>
-              <a:rPr sz="1500" b="0" i="0">
+              <a:rPr sz="1350" b="0" i="0">
                 <a:solidFill>
                   <a:srgbClr val="333333"/>
                 </a:solidFill>

--- a/Subgroups/ASX/InstantiationReview/ASX-Instantiation-Findings.pptx
+++ b/Subgroups/ASX/InstantiationReview/ASX-Instantiation-Findings.pptx
@@ -18,6 +18,8 @@
     <p:sldId id="266" r:id="rId17"/>
     <p:sldId id="267" r:id="rId18"/>
     <p:sldId id="268" r:id="rId19"/>
+    <p:sldId id="269" r:id="rId20"/>
+    <p:sldId id="270" r:id="rId21"/>
   </p:sldIdLst>
   <p:sldSz cx="12191695" cy="6858000" type="screen4x3"/>
   <p:notesSz cx="6858000" cy="9144000"/>
@@ -3477,7 +3479,7 @@
                 </a:solidFill>
                 <a:latin typeface="Calibri"/>
               </a:rPr>
-              <a:t>8 of 10 MUTT scenarios have no instantiations.</a:t>
+              <a:t>Task/effect scenarios: Fire Support walked (autonomous engagement); logistics, engineering, rescue still open.</a:t>
             </a:r>
           </a:p>
         </p:txBody>
@@ -4094,7 +4096,7 @@
                 </a:solidFill>
                 <a:latin typeface="Calibri"/>
               </a:rPr>
-              <a:t>Decisions for the sub-group</a:t>
+              <a:t>Fire Support: autonomous engagement authority</a:t>
             </a:r>
           </a:p>
         </p:txBody>
@@ -4107,8 +4109,95 @@
         </p:nvSpPr>
         <p:spPr>
           <a:xfrm>
-            <a:off x="640080" y="1463040"/>
-            <a:ext cx="10972800" cy="4754880"/>
+            <a:off x="548640" y="914400"/>
+            <a:ext cx="10972800" cy="320040"/>
+          </a:xfrm>
+          <a:prstGeom prst="rect">
+            <a:avLst/>
+          </a:prstGeom>
+          <a:noFill/>
+        </p:spPr>
+        <p:txBody>
+          <a:bodyPr wrap="square">
+            <a:spAutoFit/>
+          </a:bodyPr>
+          <a:lstStyle/>
+          <a:p>
+            <a:r>
+              <a:rPr sz="1300" b="0" i="1">
+                <a:solidFill>
+                  <a:srgbClr val="2E869A"/>
+                </a:solidFill>
+                <a:latin typeface="Calibri"/>
+              </a:rPr>
+              <a:t>The task/effect axis</a:t>
+            </a:r>
+          </a:p>
+        </p:txBody>
+      </p:sp>
+      <p:sp>
+        <p:nvSpPr>
+          <p:cNvPr id="5" name="Rounded Rectangle 4"/>
+          <p:cNvSpPr/>
+          <p:nvPr/>
+        </p:nvSpPr>
+        <p:spPr>
+          <a:xfrm>
+            <a:off x="731520" y="1783080"/>
+            <a:ext cx="10744200" cy="1463040"/>
+          </a:xfrm>
+          <a:prstGeom prst="roundRect">
+            <a:avLst/>
+          </a:prstGeom>
+          <a:solidFill>
+            <a:srgbClr val="C0392B"/>
+          </a:solidFill>
+          <a:ln>
+            <a:noFill/>
+          </a:ln>
+        </p:spPr>
+        <p:style>
+          <a:lnRef idx="1">
+            <a:schemeClr val="accent1"/>
+          </a:lnRef>
+          <a:fillRef idx="3">
+            <a:schemeClr val="accent1"/>
+          </a:fillRef>
+          <a:effectRef idx="2">
+            <a:schemeClr val="accent1"/>
+          </a:effectRef>
+          <a:fontRef idx="minor">
+            <a:schemeClr val="lt1"/>
+          </a:fontRef>
+        </p:style>
+        <p:txBody>
+          <a:bodyPr rtlCol="0" anchor="ctr" wrap="square"/>
+          <a:lstStyle/>
+          <a:p>
+            <a:pPr algn="ctr"/>
+            <a:r>
+              <a:rPr sz="1500" b="1" i="0">
+                <a:solidFill>
+                  <a:srgbClr val="FFFFFF"/>
+                </a:solidFill>
+                <a:latin typeface="Calibri"/>
+              </a:rPr>
+              <a:t>W1  -  No link between autonomy level and permission to engage
+The standard can say WHAT effect, WHICH ROE, and WHO authorized the order - but not whether a FullAuto system may take a lethal action without a human in / on the loop.</a:t>
+            </a:r>
+          </a:p>
+        </p:txBody>
+      </p:sp>
+      <p:sp>
+        <p:nvSpPr>
+          <p:cNvPr id="6" name="TextBox 5"/>
+          <p:cNvSpPr txBox="1"/>
+          <p:nvPr/>
+        </p:nvSpPr>
+        <p:spPr>
+          <a:xfrm>
+            <a:off x="640080" y="3474720"/>
+            <a:ext cx="10972800" cy="2880360"/>
           </a:xfrm>
           <a:prstGeom prst="rect">
             <a:avLst/>
@@ -4126,26 +4215,26 @@
                 <a:spcPts val="200"/>
               </a:spcBef>
               <a:spcAft>
-                <a:spcPts val="800"/>
+                <a:spcPts val="1100"/>
               </a:spcAft>
             </a:pPr>
             <a:r>
-              <a:rPr sz="1300" b="1" i="0">
-                <a:solidFill>
-                  <a:srgbClr val="2E869A"/>
-                </a:solidFill>
-                <a:latin typeface="Calibri"/>
-              </a:rPr>
-              <a:t>Q-A  </a:t>
-            </a:r>
-            <a:r>
-              <a:rPr sz="1300" b="0" i="0">
+              <a:rPr sz="1450" b="1" i="0">
+                <a:solidFill>
+                  <a:srgbClr val="2E7D32"/>
+                </a:solidFill>
+                <a:latin typeface="Calibri"/>
+              </a:rPr>
+              <a:t>Checked - already exist (not gaps):  </a:t>
+            </a:r>
+            <a:r>
+              <a:rPr sz="1450" b="0" i="0">
                 <a:solidFill>
                   <a:srgbClr val="333333"/>
                 </a:solidFill>
                 <a:latin typeface="Calibri"/>
               </a:rPr>
-              <a:t>UAV/robot typing: a role on the existing Platform tree, or a parallel Robot tree?</a:t>
+              <a:t>rules of engagement (RuleOfEngagement, WeaponROECode - LOX), order authorization (AuthorizationHeader), desired effect (DesiredEffectCode), target (hasAffectedEntity).</a:t>
             </a:r>
           </a:p>
           <a:p>
@@ -4154,26 +4243,26 @@
                 <a:spcPts val="200"/>
               </a:spcBef>
               <a:spcAft>
-                <a:spcPts val="800"/>
+                <a:spcPts val="1100"/>
               </a:spcAft>
             </a:pPr>
             <a:r>
-              <a:rPr sz="1300" b="1" i="0">
-                <a:solidFill>
-                  <a:srgbClr val="2E869A"/>
-                </a:solidFill>
-                <a:latin typeface="Calibri"/>
-              </a:rPr>
-              <a:t>Q-B  </a:t>
-            </a:r>
-            <a:r>
-              <a:rPr sz="1300" b="0" i="0">
+              <a:rPr sz="1450" b="1" i="0">
+                <a:solidFill>
+                  <a:srgbClr val="C87F0A"/>
+                </a:solidFill>
+                <a:latin typeface="Calibri"/>
+              </a:rPr>
+              <a:t>Also gaps:  </a:t>
+            </a:r>
+            <a:r>
+              <a:rPr sz="1450" b="0" i="0">
                 <a:solidFill>
                   <a:srgbClr val="333333"/>
                 </a:solidFill>
                 <a:latin typeface="Calibri"/>
               </a:rPr>
-              <a:t>Swarm: derive from CollectiveEntity (ActorEntity) so it can be tasked.</a:t>
+              <a:t>W2 weapon/munition not typed; W3 no battle-damage / effect-achieved report (TaskStatus = the task ran, not the target destroyed).</a:t>
             </a:r>
           </a:p>
           <a:p>
@@ -4182,201 +4271,33 @@
                 <a:spcPts val="200"/>
               </a:spcBef>
               <a:spcAft>
-                <a:spcPts val="800"/>
+                <a:spcPts val="1100"/>
               </a:spcAft>
             </a:pPr>
             <a:r>
-              <a:rPr sz="1300" b="1" i="0">
+              <a:rPr sz="1450" b="1" i="0">
                 <a:solidFill>
                   <a:srgbClr val="2E869A"/>
                 </a:solidFill>
                 <a:latin typeface="Calibri"/>
               </a:rPr>
-              <a:t>Q-C  </a:t>
-            </a:r>
-            <a:r>
-              <a:rPr sz="1300" b="0" i="0">
+              <a:t>Decision (Q-K):  </a:t>
+            </a:r>
+            <a:r>
+              <a:rPr sz="1450" b="0" i="0">
                 <a:solidFill>
                   <a:srgbClr val="333333"/>
                 </a:solidFill>
                 <a:latin typeface="Calibri"/>
               </a:rPr>
-              <a:t>Sensor: entity, class, or attribute - choose one model and apply it everywhere.</a:t>
-            </a:r>
-          </a:p>
-          <a:p>
-            <a:pPr>
-              <a:spcBef>
-                <a:spcPts val="200"/>
-              </a:spcBef>
-              <a:spcAft>
-                <a:spcPts val="800"/>
-              </a:spcAft>
-            </a:pPr>
-            <a:r>
-              <a:rPr sz="1300" b="1" i="0">
-                <a:solidFill>
-                  <a:srgbClr val="2E869A"/>
-                </a:solidFill>
-                <a:latin typeface="Calibri"/>
-              </a:rPr>
-              <a:t>Q-D  </a:t>
-            </a:r>
-            <a:r>
-              <a:rPr sz="1300" b="0" i="0">
-                <a:solidFill>
-                  <a:srgbClr val="333333"/>
-                </a:solidFill>
-                <a:latin typeface="Calibri"/>
-              </a:rPr>
-              <a:t>Autonomy: choose one normative vocabulary.</a:t>
-            </a:r>
-          </a:p>
-          <a:p>
-            <a:pPr>
-              <a:spcBef>
-                <a:spcPts val="200"/>
-              </a:spcBef>
-              <a:spcAft>
-                <a:spcPts val="800"/>
-              </a:spcAft>
-            </a:pPr>
-            <a:r>
-              <a:rPr sz="1300" b="1" i="0">
-                <a:solidFill>
-                  <a:srgbClr val="2E869A"/>
-                </a:solidFill>
-                <a:latin typeface="Calibri"/>
-              </a:rPr>
-              <a:t>Q-E  </a:t>
-            </a:r>
-            <a:r>
-              <a:rPr sz="1300" b="0" i="0">
-                <a:solidFill>
-                  <a:srgbClr val="333333"/>
-                </a:solidFill>
-                <a:latin typeface="Calibri"/>
-              </a:rPr>
-              <a:t>Define inline entity definition for newly-observed entities in reports.</a:t>
-            </a:r>
-          </a:p>
-          <a:p>
-            <a:pPr>
-              <a:spcBef>
-                <a:spcPts val="200"/>
-              </a:spcBef>
-              <a:spcAft>
-                <a:spcPts val="800"/>
-              </a:spcAft>
-            </a:pPr>
-            <a:r>
-              <a:rPr sz="1300" b="1" i="0">
-                <a:solidFill>
-                  <a:srgbClr val="2E869A"/>
-                </a:solidFill>
-                <a:latin typeface="Calibri"/>
-              </a:rPr>
-              <a:t>Q-F  </a:t>
-            </a:r>
-            <a:r>
-              <a:rPr sz="1300" b="0" i="0">
-                <a:solidFill>
-                  <a:srgbClr val="333333"/>
-                </a:solidFill>
-                <a:latin typeface="Calibri"/>
-              </a:rPr>
-              <a:t>MediaReference identity, and separate media-format from sensor-modality.</a:t>
-            </a:r>
-          </a:p>
-          <a:p>
-            <a:pPr>
-              <a:spcBef>
-                <a:spcPts val="200"/>
-              </a:spcBef>
-              <a:spcAft>
-                <a:spcPts val="800"/>
-              </a:spcAft>
-            </a:pPr>
-            <a:r>
-              <a:rPr sz="1300" b="1" i="0">
-                <a:solidFill>
-                  <a:srgbClr val="2E869A"/>
-                </a:solidFill>
-                <a:latin typeface="Calibri"/>
-              </a:rPr>
-              <a:t>Q-G  </a:t>
-            </a:r>
-            <a:r>
-              <a:rPr sz="1300" b="0" i="0">
-                <a:solidFill>
-                  <a:srgbClr val="333333"/>
-                </a:solidFill>
-                <a:latin typeface="Calibri"/>
-              </a:rPr>
-              <a:t>Robot-to-robot coordination content type + issuing authority (from CASEVAC).</a:t>
-            </a:r>
-          </a:p>
-          <a:p>
-            <a:pPr>
-              <a:spcBef>
-                <a:spcPts val="200"/>
-              </a:spcBef>
-              <a:spcAft>
-                <a:spcPts val="800"/>
-              </a:spcAft>
-            </a:pPr>
-            <a:r>
-              <a:rPr sz="1300" b="1" i="0">
-                <a:solidFill>
-                  <a:srgbClr val="2E869A"/>
-                </a:solidFill>
-                <a:latin typeface="Calibri"/>
-              </a:rPr>
-              <a:t>Q-H  </a:t>
-            </a:r>
-            <a:r>
-              <a:rPr sz="1300" b="0" i="0">
-                <a:solidFill>
-                  <a:srgbClr val="333333"/>
-                </a:solidFill>
-                <a:latin typeface="Calibri"/>
-              </a:rPr>
-              <a:t>Rationale/explanation ReportContent - report why, not just what (from CASEVAC).</a:t>
-            </a:r>
-          </a:p>
-          <a:p>
-            <a:pPr>
-              <a:spcBef>
-                <a:spcPts val="200"/>
-              </a:spcBef>
-              <a:spcAft>
-                <a:spcPts val="800"/>
-              </a:spcAft>
-            </a:pPr>
-            <a:r>
-              <a:rPr sz="1300" b="1" i="0">
-                <a:solidFill>
-                  <a:srgbClr val="2E869A"/>
-                </a:solidFill>
-                <a:latin typeface="Calibri"/>
-              </a:rPr>
-              <a:t>Q-I  </a:t>
-            </a:r>
-            <a:r>
-              <a:rPr sz="1300" b="0" i="0">
-                <a:solidFill>
-                  <a:srgbClr val="333333"/>
-                </a:solidFill>
-                <a:latin typeface="Calibri"/>
-              </a:rPr>
-              <a:t>Media-independent sensor-reading (value+unit+modality) + complete SensorType taxonomy (non-video walk).</a:t>
-            </a:r>
-          </a:p>
-        </p:txBody>
-      </p:sp>
-      <p:sp>
-        <p:nvSpPr>
-          <p:cNvPr id="5" name="TextBox 4"/>
+              <a:t>model engagement authority as a function of autonomy level - may this system take this action unsupervised?</a:t>
+            </a:r>
+          </a:p>
+        </p:txBody>
+      </p:sp>
+      <p:sp>
+        <p:nvSpPr>
+          <p:cNvPr id="7" name="TextBox 6"/>
           <p:cNvSpPr txBox="1"/>
           <p:nvPr/>
         </p:nvSpPr>
@@ -4410,7 +4331,7 @@
       </p:sp>
       <p:sp>
         <p:nvSpPr>
-          <p:cNvPr id="6" name="TextBox 5"/>
+          <p:cNvPr id="8" name="TextBox 7"/>
           <p:cNvSpPr txBox="1"/>
           <p:nvPr/>
         </p:nvSpPr>
@@ -4533,6 +4454,688 @@
                 </a:solidFill>
                 <a:latin typeface="Calibri"/>
               </a:rPr>
+              <a:t>Decisions (1/2): model structure</a:t>
+            </a:r>
+          </a:p>
+        </p:txBody>
+      </p:sp>
+      <p:sp>
+        <p:nvSpPr>
+          <p:cNvPr id="4" name="TextBox 3"/>
+          <p:cNvSpPr txBox="1"/>
+          <p:nvPr/>
+        </p:nvSpPr>
+        <p:spPr>
+          <a:xfrm>
+            <a:off x="640080" y="1737360"/>
+            <a:ext cx="10972800" cy="4617720"/>
+          </a:xfrm>
+          <a:prstGeom prst="rect">
+            <a:avLst/>
+          </a:prstGeom>
+          <a:noFill/>
+        </p:spPr>
+        <p:txBody>
+          <a:bodyPr wrap="square">
+            <a:spAutoFit/>
+          </a:bodyPr>
+          <a:lstStyle/>
+          <a:p>
+            <a:pPr>
+              <a:spcBef>
+                <a:spcPts val="200"/>
+              </a:spcBef>
+              <a:spcAft>
+                <a:spcPts val="1800"/>
+              </a:spcAft>
+            </a:pPr>
+            <a:r>
+              <a:rPr sz="1800" b="1" i="0">
+                <a:solidFill>
+                  <a:srgbClr val="2E869A"/>
+                </a:solidFill>
+                <a:latin typeface="Calibri"/>
+              </a:rPr>
+              <a:t>Q-A  </a:t>
+            </a:r>
+            <a:r>
+              <a:rPr sz="1800" b="0" i="0">
+                <a:solidFill>
+                  <a:srgbClr val="333333"/>
+                </a:solidFill>
+                <a:latin typeface="Calibri"/>
+              </a:rPr>
+              <a:t>UAV/robot typing: a role on the existing Platform tree, or a parallel Robot tree?</a:t>
+            </a:r>
+          </a:p>
+          <a:p>
+            <a:pPr>
+              <a:spcBef>
+                <a:spcPts val="200"/>
+              </a:spcBef>
+              <a:spcAft>
+                <a:spcPts val="1800"/>
+              </a:spcAft>
+            </a:pPr>
+            <a:r>
+              <a:rPr sz="1800" b="1" i="0">
+                <a:solidFill>
+                  <a:srgbClr val="2E869A"/>
+                </a:solidFill>
+                <a:latin typeface="Calibri"/>
+              </a:rPr>
+              <a:t>Q-B  </a:t>
+            </a:r>
+            <a:r>
+              <a:rPr sz="1800" b="0" i="0">
+                <a:solidFill>
+                  <a:srgbClr val="333333"/>
+                </a:solidFill>
+                <a:latin typeface="Calibri"/>
+              </a:rPr>
+              <a:t>Swarm: derive from CollectiveEntity (ActorEntity) so it can be tasked.</a:t>
+            </a:r>
+          </a:p>
+          <a:p>
+            <a:pPr>
+              <a:spcBef>
+                <a:spcPts val="200"/>
+              </a:spcBef>
+              <a:spcAft>
+                <a:spcPts val="1800"/>
+              </a:spcAft>
+            </a:pPr>
+            <a:r>
+              <a:rPr sz="1800" b="1" i="0">
+                <a:solidFill>
+                  <a:srgbClr val="2E869A"/>
+                </a:solidFill>
+                <a:latin typeface="Calibri"/>
+              </a:rPr>
+              <a:t>Q-C  </a:t>
+            </a:r>
+            <a:r>
+              <a:rPr sz="1800" b="0" i="0">
+                <a:solidFill>
+                  <a:srgbClr val="333333"/>
+                </a:solidFill>
+                <a:latin typeface="Calibri"/>
+              </a:rPr>
+              <a:t>Sensor: entity, class, or attribute - choose one model and apply it everywhere.</a:t>
+            </a:r>
+          </a:p>
+          <a:p>
+            <a:pPr>
+              <a:spcBef>
+                <a:spcPts val="200"/>
+              </a:spcBef>
+              <a:spcAft>
+                <a:spcPts val="1800"/>
+              </a:spcAft>
+            </a:pPr>
+            <a:r>
+              <a:rPr sz="1800" b="1" i="0">
+                <a:solidFill>
+                  <a:srgbClr val="2E869A"/>
+                </a:solidFill>
+                <a:latin typeface="Calibri"/>
+              </a:rPr>
+              <a:t>Q-D  </a:t>
+            </a:r>
+            <a:r>
+              <a:rPr sz="1800" b="0" i="0">
+                <a:solidFill>
+                  <a:srgbClr val="333333"/>
+                </a:solidFill>
+                <a:latin typeface="Calibri"/>
+              </a:rPr>
+              <a:t>Autonomy: choose one normative vocabulary.</a:t>
+            </a:r>
+          </a:p>
+        </p:txBody>
+      </p:sp>
+      <p:sp>
+        <p:nvSpPr>
+          <p:cNvPr id="5" name="TextBox 4"/>
+          <p:cNvSpPr txBox="1"/>
+          <p:nvPr/>
+        </p:nvSpPr>
+        <p:spPr>
+          <a:xfrm>
+            <a:off x="502920" y="6419088"/>
+            <a:ext cx="11155680" cy="320040"/>
+          </a:xfrm>
+          <a:prstGeom prst="rect">
+            <a:avLst/>
+          </a:prstGeom>
+          <a:noFill/>
+        </p:spPr>
+        <p:txBody>
+          <a:bodyPr wrap="square">
+            <a:spAutoFit/>
+          </a:bodyPr>
+          <a:lstStyle/>
+          <a:p>
+            <a:r>
+              <a:rPr sz="900" b="0" i="0">
+                <a:solidFill>
+                  <a:srgbClr val="666666"/>
+                </a:solidFill>
+                <a:latin typeface="Calibri"/>
+              </a:rPr>
+              <a:t>C2SIM ASX Sub-group   |   Hyssos   |   July 2026</a:t>
+            </a:r>
+          </a:p>
+        </p:txBody>
+      </p:sp>
+      <p:sp>
+        <p:nvSpPr>
+          <p:cNvPr id="6" name="TextBox 5"/>
+          <p:cNvSpPr txBox="1"/>
+          <p:nvPr/>
+        </p:nvSpPr>
+        <p:spPr>
+          <a:xfrm>
+            <a:off x="11338560" y="6419088"/>
+            <a:ext cx="640080" cy="320040"/>
+          </a:xfrm>
+          <a:prstGeom prst="rect">
+            <a:avLst/>
+          </a:prstGeom>
+          <a:noFill/>
+        </p:spPr>
+        <p:txBody>
+          <a:bodyPr wrap="square">
+            <a:spAutoFit/>
+          </a:bodyPr>
+          <a:lstStyle/>
+          <a:p>
+            <a:pPr algn="r"/>
+            <a:r>
+              <a:rPr sz="900" b="0" i="0">
+                <a:solidFill>
+                  <a:srgbClr val="666666"/>
+                </a:solidFill>
+                <a:latin typeface="Calibri"/>
+              </a:rPr>
+              <a:t>13</a:t>
+            </a:r>
+          </a:p>
+        </p:txBody>
+      </p:sp>
+    </p:spTree>
+  </p:cSld>
+  <p:clrMapOvr>
+    <a:masterClrMapping/>
+  </p:clrMapOvr>
+</p:sld>
+</file>
+
+<file path=ppt/slides/slide14.xml><?xml version="1.0" encoding="utf-8"?>
+<p:sld xmlns:a="http://schemas.openxmlformats.org/drawingml/2006/main" xmlns:p="http://schemas.openxmlformats.org/presentationml/2006/main" xmlns:r="http://schemas.openxmlformats.org/officeDocument/2006/relationships">
+  <p:cSld>
+    <p:spTree>
+      <p:nvGrpSpPr>
+        <p:cNvPr id="1" name=""/>
+        <p:cNvGrpSpPr/>
+        <p:nvPr/>
+      </p:nvGrpSpPr>
+      <p:grpSpPr/>
+      <p:sp>
+        <p:nvSpPr>
+          <p:cNvPr id="2" name="Rectangle 1"/>
+          <p:cNvSpPr/>
+          <p:nvPr/>
+        </p:nvSpPr>
+        <p:spPr>
+          <a:xfrm>
+            <a:off x="548640" y="1170432"/>
+            <a:ext cx="2011680" cy="38100"/>
+          </a:xfrm>
+          <a:prstGeom prst="rect">
+            <a:avLst/>
+          </a:prstGeom>
+          <a:solidFill>
+            <a:srgbClr val="2E869A"/>
+          </a:solidFill>
+          <a:ln>
+            <a:noFill/>
+          </a:ln>
+        </p:spPr>
+        <p:style>
+          <a:lnRef idx="1">
+            <a:schemeClr val="accent1"/>
+          </a:lnRef>
+          <a:fillRef idx="3">
+            <a:schemeClr val="accent1"/>
+          </a:fillRef>
+          <a:effectRef idx="2">
+            <a:schemeClr val="accent1"/>
+          </a:effectRef>
+          <a:fontRef idx="minor">
+            <a:schemeClr val="lt1"/>
+          </a:fontRef>
+        </p:style>
+        <p:txBody>
+          <a:bodyPr rtlCol="0" anchor="ctr"/>
+          <a:lstStyle/>
+          <a:p>
+            <a:pPr algn="ctr"/>
+          </a:p>
+        </p:txBody>
+      </p:sp>
+      <p:sp>
+        <p:nvSpPr>
+          <p:cNvPr id="3" name="TextBox 2"/>
+          <p:cNvSpPr txBox="1"/>
+          <p:nvPr/>
+        </p:nvSpPr>
+        <p:spPr>
+          <a:xfrm>
+            <a:off x="502920" y="411480"/>
+            <a:ext cx="11155680" cy="822960"/>
+          </a:xfrm>
+          <a:prstGeom prst="rect">
+            <a:avLst/>
+          </a:prstGeom>
+          <a:noFill/>
+        </p:spPr>
+        <p:txBody>
+          <a:bodyPr wrap="square">
+            <a:spAutoFit/>
+          </a:bodyPr>
+          <a:lstStyle/>
+          <a:p>
+            <a:r>
+              <a:rPr sz="3000" b="1" i="0">
+                <a:solidFill>
+                  <a:srgbClr val="1F3A5F"/>
+                </a:solidFill>
+                <a:latin typeface="Calibri"/>
+              </a:rPr>
+              <a:t>Decisions (2/2): new content types needed</a:t>
+            </a:r>
+          </a:p>
+        </p:txBody>
+      </p:sp>
+      <p:sp>
+        <p:nvSpPr>
+          <p:cNvPr id="4" name="TextBox 3"/>
+          <p:cNvSpPr txBox="1"/>
+          <p:nvPr/>
+        </p:nvSpPr>
+        <p:spPr>
+          <a:xfrm>
+            <a:off x="640080" y="1554480"/>
+            <a:ext cx="10972800" cy="4754880"/>
+          </a:xfrm>
+          <a:prstGeom prst="rect">
+            <a:avLst/>
+          </a:prstGeom>
+          <a:noFill/>
+        </p:spPr>
+        <p:txBody>
+          <a:bodyPr wrap="square">
+            <a:spAutoFit/>
+          </a:bodyPr>
+          <a:lstStyle/>
+          <a:p>
+            <a:pPr>
+              <a:spcBef>
+                <a:spcPts val="200"/>
+              </a:spcBef>
+              <a:spcAft>
+                <a:spcPts val="1000"/>
+              </a:spcAft>
+            </a:pPr>
+            <a:r>
+              <a:rPr sz="1500" b="1" i="0">
+                <a:solidFill>
+                  <a:srgbClr val="2E869A"/>
+                </a:solidFill>
+                <a:latin typeface="Calibri"/>
+              </a:rPr>
+              <a:t>Q-E  </a:t>
+            </a:r>
+            <a:r>
+              <a:rPr sz="1500" b="0" i="0">
+                <a:solidFill>
+                  <a:srgbClr val="333333"/>
+                </a:solidFill>
+                <a:latin typeface="Calibri"/>
+              </a:rPr>
+              <a:t>Inline entity definition for newly-observed entities in reports.</a:t>
+            </a:r>
+          </a:p>
+          <a:p>
+            <a:pPr>
+              <a:spcBef>
+                <a:spcPts val="200"/>
+              </a:spcBef>
+              <a:spcAft>
+                <a:spcPts val="1000"/>
+              </a:spcAft>
+            </a:pPr>
+            <a:r>
+              <a:rPr sz="1500" b="1" i="0">
+                <a:solidFill>
+                  <a:srgbClr val="2E869A"/>
+                </a:solidFill>
+                <a:latin typeface="Calibri"/>
+              </a:rPr>
+              <a:t>Q-F  </a:t>
+            </a:r>
+            <a:r>
+              <a:rPr sz="1500" b="0" i="0">
+                <a:solidFill>
+                  <a:srgbClr val="333333"/>
+                </a:solidFill>
+                <a:latin typeface="Calibri"/>
+              </a:rPr>
+              <a:t>MediaReference identity; separate media-format from sensor-modality.</a:t>
+            </a:r>
+          </a:p>
+          <a:p>
+            <a:pPr>
+              <a:spcBef>
+                <a:spcPts val="200"/>
+              </a:spcBef>
+              <a:spcAft>
+                <a:spcPts val="1000"/>
+              </a:spcAft>
+            </a:pPr>
+            <a:r>
+              <a:rPr sz="1500" b="1" i="0">
+                <a:solidFill>
+                  <a:srgbClr val="2E869A"/>
+                </a:solidFill>
+                <a:latin typeface="Calibri"/>
+              </a:rPr>
+              <a:t>Q-G  </a:t>
+            </a:r>
+            <a:r>
+              <a:rPr sz="1500" b="0" i="0">
+                <a:solidFill>
+                  <a:srgbClr val="333333"/>
+                </a:solidFill>
+                <a:latin typeface="Calibri"/>
+              </a:rPr>
+              <a:t>Robot-to-robot coordination content type + issuing authority (CASEVAC).</a:t>
+            </a:r>
+          </a:p>
+          <a:p>
+            <a:pPr>
+              <a:spcBef>
+                <a:spcPts val="200"/>
+              </a:spcBef>
+              <a:spcAft>
+                <a:spcPts val="1000"/>
+              </a:spcAft>
+            </a:pPr>
+            <a:r>
+              <a:rPr sz="1500" b="1" i="0">
+                <a:solidFill>
+                  <a:srgbClr val="2E869A"/>
+                </a:solidFill>
+                <a:latin typeface="Calibri"/>
+              </a:rPr>
+              <a:t>Q-H  </a:t>
+            </a:r>
+            <a:r>
+              <a:rPr sz="1500" b="0" i="0">
+                <a:solidFill>
+                  <a:srgbClr val="333333"/>
+                </a:solidFill>
+                <a:latin typeface="Calibri"/>
+              </a:rPr>
+              <a:t>Rationale/explanation ReportContent - report why, not just what (CASEVAC).</a:t>
+            </a:r>
+          </a:p>
+          <a:p>
+            <a:pPr>
+              <a:spcBef>
+                <a:spcPts val="200"/>
+              </a:spcBef>
+              <a:spcAft>
+                <a:spcPts val="1000"/>
+              </a:spcAft>
+            </a:pPr>
+            <a:r>
+              <a:rPr sz="1500" b="1" i="0">
+                <a:solidFill>
+                  <a:srgbClr val="2E869A"/>
+                </a:solidFill>
+                <a:latin typeface="Calibri"/>
+              </a:rPr>
+              <a:t>Q-I  </a:t>
+            </a:r>
+            <a:r>
+              <a:rPr sz="1500" b="0" i="0">
+                <a:solidFill>
+                  <a:srgbClr val="333333"/>
+                </a:solidFill>
+                <a:latin typeface="Calibri"/>
+              </a:rPr>
+              <a:t>Media-independent sensor-reading (value+unit+modality) + full SensorType taxonomy.</a:t>
+            </a:r>
+          </a:p>
+          <a:p>
+            <a:pPr>
+              <a:spcBef>
+                <a:spcPts val="200"/>
+              </a:spcBef>
+              <a:spcAft>
+                <a:spcPts val="1000"/>
+              </a:spcAft>
+            </a:pPr>
+            <a:r>
+              <a:rPr sz="1500" b="1" i="0">
+                <a:solidFill>
+                  <a:srgbClr val="2E869A"/>
+                </a:solidFill>
+                <a:latin typeface="Calibri"/>
+              </a:rPr>
+              <a:t>Q-J  </a:t>
+            </a:r>
+            <a:r>
+              <a:rPr sz="1500" b="0" i="0">
+                <a:solidFill>
+                  <a:srgbClr val="333333"/>
+                </a:solidFill>
+                <a:latin typeface="Calibri"/>
+              </a:rPr>
+              <a:t>Swarm residuals: network params, leader role, aggregation, member lifecycle.</a:t>
+            </a:r>
+          </a:p>
+          <a:p>
+            <a:pPr>
+              <a:spcBef>
+                <a:spcPts val="200"/>
+              </a:spcBef>
+              <a:spcAft>
+                <a:spcPts val="1000"/>
+              </a:spcAft>
+            </a:pPr>
+            <a:r>
+              <a:rPr sz="1500" b="1" i="0">
+                <a:solidFill>
+                  <a:srgbClr val="2E869A"/>
+                </a:solidFill>
+                <a:latin typeface="Calibri"/>
+              </a:rPr>
+              <a:t>Q-K  </a:t>
+            </a:r>
+            <a:r>
+              <a:rPr sz="1500" b="0" i="0">
+                <a:solidFill>
+                  <a:srgbClr val="333333"/>
+                </a:solidFill>
+                <a:latin typeface="Calibri"/>
+              </a:rPr>
+              <a:t>Engagement authority as a function of autonomy level (Fire Support).</a:t>
+            </a:r>
+          </a:p>
+        </p:txBody>
+      </p:sp>
+      <p:sp>
+        <p:nvSpPr>
+          <p:cNvPr id="5" name="TextBox 4"/>
+          <p:cNvSpPr txBox="1"/>
+          <p:nvPr/>
+        </p:nvSpPr>
+        <p:spPr>
+          <a:xfrm>
+            <a:off x="502920" y="6419088"/>
+            <a:ext cx="11155680" cy="320040"/>
+          </a:xfrm>
+          <a:prstGeom prst="rect">
+            <a:avLst/>
+          </a:prstGeom>
+          <a:noFill/>
+        </p:spPr>
+        <p:txBody>
+          <a:bodyPr wrap="square">
+            <a:spAutoFit/>
+          </a:bodyPr>
+          <a:lstStyle/>
+          <a:p>
+            <a:r>
+              <a:rPr sz="900" b="0" i="0">
+                <a:solidFill>
+                  <a:srgbClr val="666666"/>
+                </a:solidFill>
+                <a:latin typeface="Calibri"/>
+              </a:rPr>
+              <a:t>C2SIM ASX Sub-group   |   Hyssos   |   July 2026</a:t>
+            </a:r>
+          </a:p>
+        </p:txBody>
+      </p:sp>
+      <p:sp>
+        <p:nvSpPr>
+          <p:cNvPr id="6" name="TextBox 5"/>
+          <p:cNvSpPr txBox="1"/>
+          <p:nvPr/>
+        </p:nvSpPr>
+        <p:spPr>
+          <a:xfrm>
+            <a:off x="11338560" y="6419088"/>
+            <a:ext cx="640080" cy="320040"/>
+          </a:xfrm>
+          <a:prstGeom prst="rect">
+            <a:avLst/>
+          </a:prstGeom>
+          <a:noFill/>
+        </p:spPr>
+        <p:txBody>
+          <a:bodyPr wrap="square">
+            <a:spAutoFit/>
+          </a:bodyPr>
+          <a:lstStyle/>
+          <a:p>
+            <a:pPr algn="r"/>
+            <a:r>
+              <a:rPr sz="900" b="0" i="0">
+                <a:solidFill>
+                  <a:srgbClr val="666666"/>
+                </a:solidFill>
+                <a:latin typeface="Calibri"/>
+              </a:rPr>
+              <a:t>14</a:t>
+            </a:r>
+          </a:p>
+        </p:txBody>
+      </p:sp>
+    </p:spTree>
+  </p:cSld>
+  <p:clrMapOvr>
+    <a:masterClrMapping/>
+  </p:clrMapOvr>
+</p:sld>
+</file>
+
+<file path=ppt/slides/slide15.xml><?xml version="1.0" encoding="utf-8"?>
+<p:sld xmlns:a="http://schemas.openxmlformats.org/drawingml/2006/main" xmlns:p="http://schemas.openxmlformats.org/presentationml/2006/main" xmlns:r="http://schemas.openxmlformats.org/officeDocument/2006/relationships">
+  <p:cSld>
+    <p:spTree>
+      <p:nvGrpSpPr>
+        <p:cNvPr id="1" name=""/>
+        <p:cNvGrpSpPr/>
+        <p:nvPr/>
+      </p:nvGrpSpPr>
+      <p:grpSpPr/>
+      <p:sp>
+        <p:nvSpPr>
+          <p:cNvPr id="2" name="Rectangle 1"/>
+          <p:cNvSpPr/>
+          <p:nvPr/>
+        </p:nvSpPr>
+        <p:spPr>
+          <a:xfrm>
+            <a:off x="548640" y="1170432"/>
+            <a:ext cx="2011680" cy="38100"/>
+          </a:xfrm>
+          <a:prstGeom prst="rect">
+            <a:avLst/>
+          </a:prstGeom>
+          <a:solidFill>
+            <a:srgbClr val="2E869A"/>
+          </a:solidFill>
+          <a:ln>
+            <a:noFill/>
+          </a:ln>
+        </p:spPr>
+        <p:style>
+          <a:lnRef idx="1">
+            <a:schemeClr val="accent1"/>
+          </a:lnRef>
+          <a:fillRef idx="3">
+            <a:schemeClr val="accent1"/>
+          </a:fillRef>
+          <a:effectRef idx="2">
+            <a:schemeClr val="accent1"/>
+          </a:effectRef>
+          <a:fontRef idx="minor">
+            <a:schemeClr val="lt1"/>
+          </a:fontRef>
+        </p:style>
+        <p:txBody>
+          <a:bodyPr rtlCol="0" anchor="ctr"/>
+          <a:lstStyle/>
+          <a:p>
+            <a:pPr algn="ctr"/>
+          </a:p>
+        </p:txBody>
+      </p:sp>
+      <p:sp>
+        <p:nvSpPr>
+          <p:cNvPr id="3" name="TextBox 2"/>
+          <p:cNvSpPr txBox="1"/>
+          <p:nvPr/>
+        </p:nvSpPr>
+        <p:spPr>
+          <a:xfrm>
+            <a:off x="502920" y="411480"/>
+            <a:ext cx="11155680" cy="822960"/>
+          </a:xfrm>
+          <a:prstGeom prst="rect">
+            <a:avLst/>
+          </a:prstGeom>
+          <a:noFill/>
+        </p:spPr>
+        <p:txBody>
+          <a:bodyPr wrap="square">
+            <a:spAutoFit/>
+          </a:bodyPr>
+          <a:lstStyle/>
+          <a:p>
+            <a:r>
+              <a:rPr sz="3000" b="1" i="0">
+                <a:solidFill>
+                  <a:srgbClr val="1F3A5F"/>
+                </a:solidFill>
+                <a:latin typeface="Calibri"/>
+              </a:rPr>
               <a:t>Recommended next steps</a:t>
             </a:r>
           </a:p>
@@ -4720,7 +5323,7 @@
                 </a:solidFill>
                 <a:latin typeface="Calibri"/>
               </a:rPr>
-              <a:t>13</a:t>
+              <a:t>15</a:t>
             </a:r>
           </a:p>
         </p:txBody>

--- a/Subgroups/ASX/InstantiationReview/ASX-Instantiation-Findings.pptx
+++ b/Subgroups/ASX/InstantiationReview/ASX-Instantiation-Findings.pptx
@@ -20,6 +20,7 @@
     <p:sldId id="268" r:id="rId19"/>
     <p:sldId id="269" r:id="rId20"/>
     <p:sldId id="270" r:id="rId21"/>
+    <p:sldId id="271" r:id="rId22"/>
   </p:sldIdLst>
   <p:sldSz cx="12191695" cy="6858000" type="screen4x3"/>
   <p:notesSz cx="6858000" cy="9144000"/>
@@ -3479,7 +3480,7 @@
                 </a:solidFill>
                 <a:latin typeface="Calibri"/>
               </a:rPr>
-              <a:t>Task/effect scenarios: Fire Support walked (autonomous engagement); logistics, engineering, rescue still open.</a:t>
+              <a:t>Task/effect scenarios: engagement, delivery, manipulation, rescue walked - the gap is consistent (task verbs + payload/effector typing).</a:t>
             </a:r>
           </a:p>
         </p:txBody>
@@ -4454,7 +4455,7 @@
                 </a:solidFill>
                 <a:latin typeface="Calibri"/>
               </a:rPr>
-              <a:t>Decisions (1/2): model structure</a:t>
+              <a:t>The task/effect axis distills to two gaps</a:t>
             </a:r>
           </a:p>
         </p:txBody>
@@ -4467,8 +4468,148 @@
         </p:nvSpPr>
         <p:spPr>
           <a:xfrm>
-            <a:off x="640080" y="1737360"/>
-            <a:ext cx="10972800" cy="4617720"/>
+            <a:off x="548640" y="914400"/>
+            <a:ext cx="10972800" cy="320040"/>
+          </a:xfrm>
+          <a:prstGeom prst="rect">
+            <a:avLst/>
+          </a:prstGeom>
+          <a:noFill/>
+        </p:spPr>
+        <p:txBody>
+          <a:bodyPr wrap="square">
+            <a:spAutoFit/>
+          </a:bodyPr>
+          <a:lstStyle/>
+          <a:p>
+            <a:r>
+              <a:rPr sz="1300" b="0" i="1">
+                <a:solidFill>
+                  <a:srgbClr val="2E869A"/>
+                </a:solidFill>
+                <a:latin typeface="Calibri"/>
+              </a:rPr>
+              <a:t>Across engagement, delivery, manipulation, rescue</a:t>
+            </a:r>
+          </a:p>
+        </p:txBody>
+      </p:sp>
+      <p:sp>
+        <p:nvSpPr>
+          <p:cNvPr id="5" name="Rounded Rectangle 4"/>
+          <p:cNvSpPr/>
+          <p:nvPr/>
+        </p:nvSpPr>
+        <p:spPr>
+          <a:xfrm>
+            <a:off x="731520" y="1828800"/>
+            <a:ext cx="5257800" cy="1600200"/>
+          </a:xfrm>
+          <a:prstGeom prst="roundRect">
+            <a:avLst/>
+          </a:prstGeom>
+          <a:solidFill>
+            <a:srgbClr val="1F3A5F"/>
+          </a:solidFill>
+          <a:ln>
+            <a:noFill/>
+          </a:ln>
+        </p:spPr>
+        <p:style>
+          <a:lnRef idx="1">
+            <a:schemeClr val="accent1"/>
+          </a:lnRef>
+          <a:fillRef idx="3">
+            <a:schemeClr val="accent1"/>
+          </a:fillRef>
+          <a:effectRef idx="2">
+            <a:schemeClr val="accent1"/>
+          </a:effectRef>
+          <a:fontRef idx="minor">
+            <a:schemeClr val="lt1"/>
+          </a:fontRef>
+        </p:style>
+        <p:txBody>
+          <a:bodyPr rtlCol="0" anchor="ctr" wrap="square"/>
+          <a:lstStyle/>
+          <a:p>
+            <a:pPr algn="ctr"/>
+            <a:r>
+              <a:rPr sz="1400" b="1" i="0">
+                <a:solidFill>
+                  <a:srgbClr val="FFFFFF"/>
+                </a:solidFill>
+                <a:latin typeface="Calibri"/>
+              </a:rPr>
+              <a:t>1.  Task verbs
+No vocabulary for what systems DO: deliver, dig / clear / emplace, recover / rescue (engage uncertain).</a:t>
+            </a:r>
+          </a:p>
+        </p:txBody>
+      </p:sp>
+      <p:sp>
+        <p:nvSpPr>
+          <p:cNvPr id="6" name="Rounded Rectangle 5"/>
+          <p:cNvSpPr/>
+          <p:nvPr/>
+        </p:nvSpPr>
+        <p:spPr>
+          <a:xfrm>
+            <a:off x="6217920" y="1828800"/>
+            <a:ext cx="5257800" cy="1600200"/>
+          </a:xfrm>
+          <a:prstGeom prst="roundRect">
+            <a:avLst/>
+          </a:prstGeom>
+          <a:solidFill>
+            <a:srgbClr val="1F3A5F"/>
+          </a:solidFill>
+          <a:ln>
+            <a:noFill/>
+          </a:ln>
+        </p:spPr>
+        <p:style>
+          <a:lnRef idx="1">
+            <a:schemeClr val="accent1"/>
+          </a:lnRef>
+          <a:fillRef idx="3">
+            <a:schemeClr val="accent1"/>
+          </a:fillRef>
+          <a:effectRef idx="2">
+            <a:schemeClr val="accent1"/>
+          </a:effectRef>
+          <a:fontRef idx="minor">
+            <a:schemeClr val="lt1"/>
+          </a:fontRef>
+        </p:style>
+        <p:txBody>
+          <a:bodyPr rtlCol="0" anchor="ctr" wrap="square"/>
+          <a:lstStyle/>
+          <a:p>
+            <a:pPr algn="ctr"/>
+            <a:r>
+              <a:rPr sz="1400" b="1" i="0">
+                <a:solidFill>
+                  <a:srgbClr val="FFFFFF"/>
+                </a:solidFill>
+                <a:latin typeface="Calibri"/>
+              </a:rPr>
+              <a:t>2.  Payload / effector / weapon typing
+Cargo (L1), manipulator (E2), weapon (W2) are one gap: no typed thing carried or wielded.</a:t>
+            </a:r>
+          </a:p>
+        </p:txBody>
+      </p:sp>
+      <p:sp>
+        <p:nvSpPr>
+          <p:cNvPr id="7" name="TextBox 6"/>
+          <p:cNvSpPr txBox="1"/>
+          <p:nvPr/>
+        </p:nvSpPr>
+        <p:spPr>
+          <a:xfrm>
+            <a:off x="640080" y="3703320"/>
+            <a:ext cx="10972800" cy="2651760"/>
           </a:xfrm>
           <a:prstGeom prst="rect">
             <a:avLst/>
@@ -4486,26 +4627,26 @@
                 <a:spcPts val="200"/>
               </a:spcBef>
               <a:spcAft>
-                <a:spcPts val="1800"/>
+                <a:spcPts val="1200"/>
               </a:spcAft>
             </a:pPr>
             <a:r>
-              <a:rPr sz="1800" b="1" i="0">
-                <a:solidFill>
-                  <a:srgbClr val="2E869A"/>
-                </a:solidFill>
-                <a:latin typeface="Calibri"/>
-              </a:rPr>
-              <a:t>Q-A  </a:t>
-            </a:r>
-            <a:r>
-              <a:rPr sz="1800" b="0" i="0">
+              <a:rPr sz="1500" b="1" i="0">
+                <a:solidFill>
+                  <a:srgbClr val="2E7D32"/>
+                </a:solidFill>
+                <a:latin typeface="Calibri"/>
+              </a:rPr>
+              <a:t>Already there (checked):  </a:t>
+            </a:r>
+            <a:r>
+              <a:rPr sz="1500" b="0" i="0">
                 <a:solidFill>
                   <a:srgbClr val="333333"/>
                 </a:solidFill>
                 <a:latin typeface="Calibri"/>
               </a:rPr>
-              <a:t>UAV/robot typing: a role on the existing Platform tree, or a parallel Robot tree?</a:t>
+              <a:t>effects (DesiredEffectCode), targets (hasAffectedEntity), resources + quantities, ROE, authorization, and platform types (Vehicle / Aircraft / SurfaceVessel).</a:t>
             </a:r>
           </a:p>
           <a:p>
@@ -4514,89 +4655,33 @@
                 <a:spcPts val="200"/>
               </a:spcBef>
               <a:spcAft>
-                <a:spcPts val="1800"/>
+                <a:spcPts val="1200"/>
               </a:spcAft>
             </a:pPr>
             <a:r>
-              <a:rPr sz="1800" b="1" i="0">
+              <a:rPr sz="1500" b="1" i="0">
                 <a:solidFill>
                   <a:srgbClr val="2E869A"/>
                 </a:solidFill>
                 <a:latin typeface="Calibri"/>
               </a:rPr>
-              <a:t>Q-B  </a:t>
-            </a:r>
-            <a:r>
-              <a:rPr sz="1800" b="0" i="0">
+              <a:t>Decision (Q-L):  </a:t>
+            </a:r>
+            <a:r>
+              <a:rPr sz="1500" b="0" i="0">
                 <a:solidFill>
                   <a:srgbClr val="333333"/>
                 </a:solidFill>
                 <a:latin typeface="Calibri"/>
               </a:rPr>
-              <a:t>Swarm: derive from CollectiveEntity (ActorEntity) so it can be tasked.</a:t>
-            </a:r>
-          </a:p>
-          <a:p>
-            <a:pPr>
-              <a:spcBef>
-                <a:spcPts val="200"/>
-              </a:spcBef>
-              <a:spcAft>
-                <a:spcPts val="1800"/>
-              </a:spcAft>
-            </a:pPr>
-            <a:r>
-              <a:rPr sz="1800" b="1" i="0">
-                <a:solidFill>
-                  <a:srgbClr val="2E869A"/>
-                </a:solidFill>
-                <a:latin typeface="Calibri"/>
-              </a:rPr>
-              <a:t>Q-C  </a:t>
-            </a:r>
-            <a:r>
-              <a:rPr sz="1800" b="0" i="0">
-                <a:solidFill>
-                  <a:srgbClr val="333333"/>
-                </a:solidFill>
-                <a:latin typeface="Calibri"/>
-              </a:rPr>
-              <a:t>Sensor: entity, class, or attribute - choose one model and apply it everywhere.</a:t>
-            </a:r>
-          </a:p>
-          <a:p>
-            <a:pPr>
-              <a:spcBef>
-                <a:spcPts val="200"/>
-              </a:spcBef>
-              <a:spcAft>
-                <a:spcPts val="1800"/>
-              </a:spcAft>
-            </a:pPr>
-            <a:r>
-              <a:rPr sz="1800" b="1" i="0">
-                <a:solidFill>
-                  <a:srgbClr val="2E869A"/>
-                </a:solidFill>
-                <a:latin typeface="Calibri"/>
-              </a:rPr>
-              <a:t>Q-D  </a:t>
-            </a:r>
-            <a:r>
-              <a:rPr sz="1800" b="0" i="0">
-                <a:solidFill>
-                  <a:srgbClr val="333333"/>
-                </a:solidFill>
-                <a:latin typeface="Calibri"/>
-              </a:rPr>
-              <a:t>Autonomy: choose one normative vocabulary.</a:t>
-            </a:r>
-          </a:p>
-        </p:txBody>
-      </p:sp>
-      <p:sp>
-        <p:nvSpPr>
-          <p:cNvPr id="5" name="TextBox 4"/>
+              <a:t>define the task-verb vocabulary and the typed payload / effector / weapon - that is the whole axis.</a:t>
+            </a:r>
+          </a:p>
+        </p:txBody>
+      </p:sp>
+      <p:sp>
+        <p:nvSpPr>
+          <p:cNvPr id="8" name="TextBox 7"/>
           <p:cNvSpPr txBox="1"/>
           <p:nvPr/>
         </p:nvSpPr>
@@ -4630,7 +4715,7 @@
       </p:sp>
       <p:sp>
         <p:nvSpPr>
-          <p:cNvPr id="6" name="TextBox 5"/>
+          <p:cNvPr id="9" name="TextBox 8"/>
           <p:cNvSpPr txBox="1"/>
           <p:nvPr/>
         </p:nvSpPr>
@@ -4753,7 +4838,7 @@
                 </a:solidFill>
                 <a:latin typeface="Calibri"/>
               </a:rPr>
-              <a:t>Decisions (2/2): new content types needed</a:t>
+              <a:t>Decisions (1/2): model structure</a:t>
             </a:r>
           </a:p>
         </p:txBody>
@@ -4766,8 +4851,8 @@
         </p:nvSpPr>
         <p:spPr>
           <a:xfrm>
-            <a:off x="640080" y="1554480"/>
-            <a:ext cx="10972800" cy="4754880"/>
+            <a:off x="640080" y="1737360"/>
+            <a:ext cx="10972800" cy="4617720"/>
           </a:xfrm>
           <a:prstGeom prst="rect">
             <a:avLst/>
@@ -4785,26 +4870,26 @@
                 <a:spcPts val="200"/>
               </a:spcBef>
               <a:spcAft>
-                <a:spcPts val="1000"/>
+                <a:spcPts val="1800"/>
               </a:spcAft>
             </a:pPr>
             <a:r>
-              <a:rPr sz="1500" b="1" i="0">
+              <a:rPr sz="1800" b="1" i="0">
                 <a:solidFill>
                   <a:srgbClr val="2E869A"/>
                 </a:solidFill>
                 <a:latin typeface="Calibri"/>
               </a:rPr>
-              <a:t>Q-E  </a:t>
-            </a:r>
-            <a:r>
-              <a:rPr sz="1500" b="0" i="0">
+              <a:t>Q-A  </a:t>
+            </a:r>
+            <a:r>
+              <a:rPr sz="1800" b="0" i="0">
                 <a:solidFill>
                   <a:srgbClr val="333333"/>
                 </a:solidFill>
                 <a:latin typeface="Calibri"/>
               </a:rPr>
-              <a:t>Inline entity definition for newly-observed entities in reports.</a:t>
+              <a:t>UAV/robot typing: a role on the existing Platform tree, or a parallel Robot tree?</a:t>
             </a:r>
           </a:p>
           <a:p>
@@ -4813,26 +4898,26 @@
                 <a:spcPts val="200"/>
               </a:spcBef>
               <a:spcAft>
-                <a:spcPts val="1000"/>
+                <a:spcPts val="1800"/>
               </a:spcAft>
             </a:pPr>
             <a:r>
-              <a:rPr sz="1500" b="1" i="0">
+              <a:rPr sz="1800" b="1" i="0">
                 <a:solidFill>
                   <a:srgbClr val="2E869A"/>
                 </a:solidFill>
                 <a:latin typeface="Calibri"/>
               </a:rPr>
-              <a:t>Q-F  </a:t>
-            </a:r>
-            <a:r>
-              <a:rPr sz="1500" b="0" i="0">
+              <a:t>Q-B  </a:t>
+            </a:r>
+            <a:r>
+              <a:rPr sz="1800" b="0" i="0">
                 <a:solidFill>
                   <a:srgbClr val="333333"/>
                 </a:solidFill>
                 <a:latin typeface="Calibri"/>
               </a:rPr>
-              <a:t>MediaReference identity; separate media-format from sensor-modality.</a:t>
+              <a:t>Swarm: derive from CollectiveEntity (ActorEntity) so it can be tasked.</a:t>
             </a:r>
           </a:p>
           <a:p>
@@ -4841,26 +4926,26 @@
                 <a:spcPts val="200"/>
               </a:spcBef>
               <a:spcAft>
-                <a:spcPts val="1000"/>
+                <a:spcPts val="1800"/>
               </a:spcAft>
             </a:pPr>
             <a:r>
-              <a:rPr sz="1500" b="1" i="0">
+              <a:rPr sz="1800" b="1" i="0">
                 <a:solidFill>
                   <a:srgbClr val="2E869A"/>
                 </a:solidFill>
                 <a:latin typeface="Calibri"/>
               </a:rPr>
-              <a:t>Q-G  </a:t>
-            </a:r>
-            <a:r>
-              <a:rPr sz="1500" b="0" i="0">
+              <a:t>Q-C  </a:t>
+            </a:r>
+            <a:r>
+              <a:rPr sz="1800" b="0" i="0">
                 <a:solidFill>
                   <a:srgbClr val="333333"/>
                 </a:solidFill>
                 <a:latin typeface="Calibri"/>
               </a:rPr>
-              <a:t>Robot-to-robot coordination content type + issuing authority (CASEVAC).</a:t>
+              <a:t>Sensor: entity, class, or attribute - choose one model and apply it everywhere.</a:t>
             </a:r>
           </a:p>
           <a:p>
@@ -4869,110 +4954,26 @@
                 <a:spcPts val="200"/>
               </a:spcBef>
               <a:spcAft>
-                <a:spcPts val="1000"/>
+                <a:spcPts val="1800"/>
               </a:spcAft>
             </a:pPr>
             <a:r>
-              <a:rPr sz="1500" b="1" i="0">
+              <a:rPr sz="1800" b="1" i="0">
                 <a:solidFill>
                   <a:srgbClr val="2E869A"/>
                 </a:solidFill>
                 <a:latin typeface="Calibri"/>
               </a:rPr>
-              <a:t>Q-H  </a:t>
-            </a:r>
-            <a:r>
-              <a:rPr sz="1500" b="0" i="0">
+              <a:t>Q-D  </a:t>
+            </a:r>
+            <a:r>
+              <a:rPr sz="1800" b="0" i="0">
                 <a:solidFill>
                   <a:srgbClr val="333333"/>
                 </a:solidFill>
                 <a:latin typeface="Calibri"/>
               </a:rPr>
-              <a:t>Rationale/explanation ReportContent - report why, not just what (CASEVAC).</a:t>
-            </a:r>
-          </a:p>
-          <a:p>
-            <a:pPr>
-              <a:spcBef>
-                <a:spcPts val="200"/>
-              </a:spcBef>
-              <a:spcAft>
-                <a:spcPts val="1000"/>
-              </a:spcAft>
-            </a:pPr>
-            <a:r>
-              <a:rPr sz="1500" b="1" i="0">
-                <a:solidFill>
-                  <a:srgbClr val="2E869A"/>
-                </a:solidFill>
-                <a:latin typeface="Calibri"/>
-              </a:rPr>
-              <a:t>Q-I  </a:t>
-            </a:r>
-            <a:r>
-              <a:rPr sz="1500" b="0" i="0">
-                <a:solidFill>
-                  <a:srgbClr val="333333"/>
-                </a:solidFill>
-                <a:latin typeface="Calibri"/>
-              </a:rPr>
-              <a:t>Media-independent sensor-reading (value+unit+modality) + full SensorType taxonomy.</a:t>
-            </a:r>
-          </a:p>
-          <a:p>
-            <a:pPr>
-              <a:spcBef>
-                <a:spcPts val="200"/>
-              </a:spcBef>
-              <a:spcAft>
-                <a:spcPts val="1000"/>
-              </a:spcAft>
-            </a:pPr>
-            <a:r>
-              <a:rPr sz="1500" b="1" i="0">
-                <a:solidFill>
-                  <a:srgbClr val="2E869A"/>
-                </a:solidFill>
-                <a:latin typeface="Calibri"/>
-              </a:rPr>
-              <a:t>Q-J  </a:t>
-            </a:r>
-            <a:r>
-              <a:rPr sz="1500" b="0" i="0">
-                <a:solidFill>
-                  <a:srgbClr val="333333"/>
-                </a:solidFill>
-                <a:latin typeface="Calibri"/>
-              </a:rPr>
-              <a:t>Swarm residuals: network params, leader role, aggregation, member lifecycle.</a:t>
-            </a:r>
-          </a:p>
-          <a:p>
-            <a:pPr>
-              <a:spcBef>
-                <a:spcPts val="200"/>
-              </a:spcBef>
-              <a:spcAft>
-                <a:spcPts val="1000"/>
-              </a:spcAft>
-            </a:pPr>
-            <a:r>
-              <a:rPr sz="1500" b="1" i="0">
-                <a:solidFill>
-                  <a:srgbClr val="2E869A"/>
-                </a:solidFill>
-                <a:latin typeface="Calibri"/>
-              </a:rPr>
-              <a:t>Q-K  </a:t>
-            </a:r>
-            <a:r>
-              <a:rPr sz="1500" b="0" i="0">
-                <a:solidFill>
-                  <a:srgbClr val="333333"/>
-                </a:solidFill>
-                <a:latin typeface="Calibri"/>
-              </a:rPr>
-              <a:t>Engagement authority as a function of autonomy level (Fire Support).</a:t>
+              <a:t>Autonomy: choose one normative vocabulary.</a:t>
             </a:r>
           </a:p>
         </p:txBody>
@@ -5136,6 +5137,417 @@
                 </a:solidFill>
                 <a:latin typeface="Calibri"/>
               </a:rPr>
+              <a:t>Decisions (2/2): new content types needed</a:t>
+            </a:r>
+          </a:p>
+        </p:txBody>
+      </p:sp>
+      <p:sp>
+        <p:nvSpPr>
+          <p:cNvPr id="4" name="TextBox 3"/>
+          <p:cNvSpPr txBox="1"/>
+          <p:nvPr/>
+        </p:nvSpPr>
+        <p:spPr>
+          <a:xfrm>
+            <a:off x="640080" y="1508760"/>
+            <a:ext cx="10972800" cy="4754880"/>
+          </a:xfrm>
+          <a:prstGeom prst="rect">
+            <a:avLst/>
+          </a:prstGeom>
+          <a:noFill/>
+        </p:spPr>
+        <p:txBody>
+          <a:bodyPr wrap="square">
+            <a:spAutoFit/>
+          </a:bodyPr>
+          <a:lstStyle/>
+          <a:p>
+            <a:pPr>
+              <a:spcBef>
+                <a:spcPts val="200"/>
+              </a:spcBef>
+              <a:spcAft>
+                <a:spcPts val="900"/>
+              </a:spcAft>
+            </a:pPr>
+            <a:r>
+              <a:rPr sz="1400" b="1" i="0">
+                <a:solidFill>
+                  <a:srgbClr val="2E869A"/>
+                </a:solidFill>
+                <a:latin typeface="Calibri"/>
+              </a:rPr>
+              <a:t>Q-E  </a:t>
+            </a:r>
+            <a:r>
+              <a:rPr sz="1400" b="0" i="0">
+                <a:solidFill>
+                  <a:srgbClr val="333333"/>
+                </a:solidFill>
+                <a:latin typeface="Calibri"/>
+              </a:rPr>
+              <a:t>Inline entity definition for newly-observed entities in reports.</a:t>
+            </a:r>
+          </a:p>
+          <a:p>
+            <a:pPr>
+              <a:spcBef>
+                <a:spcPts val="200"/>
+              </a:spcBef>
+              <a:spcAft>
+                <a:spcPts val="900"/>
+              </a:spcAft>
+            </a:pPr>
+            <a:r>
+              <a:rPr sz="1400" b="1" i="0">
+                <a:solidFill>
+                  <a:srgbClr val="2E869A"/>
+                </a:solidFill>
+                <a:latin typeface="Calibri"/>
+              </a:rPr>
+              <a:t>Q-F  </a:t>
+            </a:r>
+            <a:r>
+              <a:rPr sz="1400" b="0" i="0">
+                <a:solidFill>
+                  <a:srgbClr val="333333"/>
+                </a:solidFill>
+                <a:latin typeface="Calibri"/>
+              </a:rPr>
+              <a:t>MediaReference identity; separate media-format from sensor-modality.</a:t>
+            </a:r>
+          </a:p>
+          <a:p>
+            <a:pPr>
+              <a:spcBef>
+                <a:spcPts val="200"/>
+              </a:spcBef>
+              <a:spcAft>
+                <a:spcPts val="900"/>
+              </a:spcAft>
+            </a:pPr>
+            <a:r>
+              <a:rPr sz="1400" b="1" i="0">
+                <a:solidFill>
+                  <a:srgbClr val="2E869A"/>
+                </a:solidFill>
+                <a:latin typeface="Calibri"/>
+              </a:rPr>
+              <a:t>Q-G  </a:t>
+            </a:r>
+            <a:r>
+              <a:rPr sz="1400" b="0" i="0">
+                <a:solidFill>
+                  <a:srgbClr val="333333"/>
+                </a:solidFill>
+                <a:latin typeface="Calibri"/>
+              </a:rPr>
+              <a:t>Robot-to-robot coordination content type + issuing authority (CASEVAC).</a:t>
+            </a:r>
+          </a:p>
+          <a:p>
+            <a:pPr>
+              <a:spcBef>
+                <a:spcPts val="200"/>
+              </a:spcBef>
+              <a:spcAft>
+                <a:spcPts val="900"/>
+              </a:spcAft>
+            </a:pPr>
+            <a:r>
+              <a:rPr sz="1400" b="1" i="0">
+                <a:solidFill>
+                  <a:srgbClr val="2E869A"/>
+                </a:solidFill>
+                <a:latin typeface="Calibri"/>
+              </a:rPr>
+              <a:t>Q-H  </a:t>
+            </a:r>
+            <a:r>
+              <a:rPr sz="1400" b="0" i="0">
+                <a:solidFill>
+                  <a:srgbClr val="333333"/>
+                </a:solidFill>
+                <a:latin typeface="Calibri"/>
+              </a:rPr>
+              <a:t>Rationale/explanation ReportContent - report why, not just what (CASEVAC).</a:t>
+            </a:r>
+          </a:p>
+          <a:p>
+            <a:pPr>
+              <a:spcBef>
+                <a:spcPts val="200"/>
+              </a:spcBef>
+              <a:spcAft>
+                <a:spcPts val="900"/>
+              </a:spcAft>
+            </a:pPr>
+            <a:r>
+              <a:rPr sz="1400" b="1" i="0">
+                <a:solidFill>
+                  <a:srgbClr val="2E869A"/>
+                </a:solidFill>
+                <a:latin typeface="Calibri"/>
+              </a:rPr>
+              <a:t>Q-I  </a:t>
+            </a:r>
+            <a:r>
+              <a:rPr sz="1400" b="0" i="0">
+                <a:solidFill>
+                  <a:srgbClr val="333333"/>
+                </a:solidFill>
+                <a:latin typeface="Calibri"/>
+              </a:rPr>
+              <a:t>Media-independent sensor-reading (value+unit+modality) + full SensorType taxonomy.</a:t>
+            </a:r>
+          </a:p>
+          <a:p>
+            <a:pPr>
+              <a:spcBef>
+                <a:spcPts val="200"/>
+              </a:spcBef>
+              <a:spcAft>
+                <a:spcPts val="900"/>
+              </a:spcAft>
+            </a:pPr>
+            <a:r>
+              <a:rPr sz="1400" b="1" i="0">
+                <a:solidFill>
+                  <a:srgbClr val="2E869A"/>
+                </a:solidFill>
+                <a:latin typeface="Calibri"/>
+              </a:rPr>
+              <a:t>Q-J  </a:t>
+            </a:r>
+            <a:r>
+              <a:rPr sz="1400" b="0" i="0">
+                <a:solidFill>
+                  <a:srgbClr val="333333"/>
+                </a:solidFill>
+                <a:latin typeface="Calibri"/>
+              </a:rPr>
+              <a:t>Swarm residuals: network params, leader role, aggregation, member lifecycle.</a:t>
+            </a:r>
+          </a:p>
+          <a:p>
+            <a:pPr>
+              <a:spcBef>
+                <a:spcPts val="200"/>
+              </a:spcBef>
+              <a:spcAft>
+                <a:spcPts val="900"/>
+              </a:spcAft>
+            </a:pPr>
+            <a:r>
+              <a:rPr sz="1400" b="1" i="0">
+                <a:solidFill>
+                  <a:srgbClr val="2E869A"/>
+                </a:solidFill>
+                <a:latin typeface="Calibri"/>
+              </a:rPr>
+              <a:t>Q-K  </a:t>
+            </a:r>
+            <a:r>
+              <a:rPr sz="1400" b="0" i="0">
+                <a:solidFill>
+                  <a:srgbClr val="333333"/>
+                </a:solidFill>
+                <a:latin typeface="Calibri"/>
+              </a:rPr>
+              <a:t>Engagement authority as a function of autonomy level (Fire Support).</a:t>
+            </a:r>
+          </a:p>
+          <a:p>
+            <a:pPr>
+              <a:spcBef>
+                <a:spcPts val="200"/>
+              </a:spcBef>
+              <a:spcAft>
+                <a:spcPts val="900"/>
+              </a:spcAft>
+            </a:pPr>
+            <a:r>
+              <a:rPr sz="1400" b="1" i="0">
+                <a:solidFill>
+                  <a:srgbClr val="2E869A"/>
+                </a:solidFill>
+                <a:latin typeface="Calibri"/>
+              </a:rPr>
+              <a:t>Q-L  </a:t>
+            </a:r>
+            <a:r>
+              <a:rPr sz="1400" b="0" i="0">
+                <a:solidFill>
+                  <a:srgbClr val="333333"/>
+                </a:solidFill>
+                <a:latin typeface="Calibri"/>
+              </a:rPr>
+              <a:t>Task-verb vocabulary (deliver, manipulate, recover) + typed payload/effector/weapon.</a:t>
+            </a:r>
+          </a:p>
+        </p:txBody>
+      </p:sp>
+      <p:sp>
+        <p:nvSpPr>
+          <p:cNvPr id="5" name="TextBox 4"/>
+          <p:cNvSpPr txBox="1"/>
+          <p:nvPr/>
+        </p:nvSpPr>
+        <p:spPr>
+          <a:xfrm>
+            <a:off x="502920" y="6419088"/>
+            <a:ext cx="11155680" cy="320040"/>
+          </a:xfrm>
+          <a:prstGeom prst="rect">
+            <a:avLst/>
+          </a:prstGeom>
+          <a:noFill/>
+        </p:spPr>
+        <p:txBody>
+          <a:bodyPr wrap="square">
+            <a:spAutoFit/>
+          </a:bodyPr>
+          <a:lstStyle/>
+          <a:p>
+            <a:r>
+              <a:rPr sz="900" b="0" i="0">
+                <a:solidFill>
+                  <a:srgbClr val="666666"/>
+                </a:solidFill>
+                <a:latin typeface="Calibri"/>
+              </a:rPr>
+              <a:t>C2SIM ASX Sub-group   |   Hyssos   |   July 2026</a:t>
+            </a:r>
+          </a:p>
+        </p:txBody>
+      </p:sp>
+      <p:sp>
+        <p:nvSpPr>
+          <p:cNvPr id="6" name="TextBox 5"/>
+          <p:cNvSpPr txBox="1"/>
+          <p:nvPr/>
+        </p:nvSpPr>
+        <p:spPr>
+          <a:xfrm>
+            <a:off x="11338560" y="6419088"/>
+            <a:ext cx="640080" cy="320040"/>
+          </a:xfrm>
+          <a:prstGeom prst="rect">
+            <a:avLst/>
+          </a:prstGeom>
+          <a:noFill/>
+        </p:spPr>
+        <p:txBody>
+          <a:bodyPr wrap="square">
+            <a:spAutoFit/>
+          </a:bodyPr>
+          <a:lstStyle/>
+          <a:p>
+            <a:pPr algn="r"/>
+            <a:r>
+              <a:rPr sz="900" b="0" i="0">
+                <a:solidFill>
+                  <a:srgbClr val="666666"/>
+                </a:solidFill>
+                <a:latin typeface="Calibri"/>
+              </a:rPr>
+              <a:t>15</a:t>
+            </a:r>
+          </a:p>
+        </p:txBody>
+      </p:sp>
+    </p:spTree>
+  </p:cSld>
+  <p:clrMapOvr>
+    <a:masterClrMapping/>
+  </p:clrMapOvr>
+</p:sld>
+</file>
+
+<file path=ppt/slides/slide16.xml><?xml version="1.0" encoding="utf-8"?>
+<p:sld xmlns:a="http://schemas.openxmlformats.org/drawingml/2006/main" xmlns:p="http://schemas.openxmlformats.org/presentationml/2006/main" xmlns:r="http://schemas.openxmlformats.org/officeDocument/2006/relationships">
+  <p:cSld>
+    <p:spTree>
+      <p:nvGrpSpPr>
+        <p:cNvPr id="1" name=""/>
+        <p:cNvGrpSpPr/>
+        <p:nvPr/>
+      </p:nvGrpSpPr>
+      <p:grpSpPr/>
+      <p:sp>
+        <p:nvSpPr>
+          <p:cNvPr id="2" name="Rectangle 1"/>
+          <p:cNvSpPr/>
+          <p:nvPr/>
+        </p:nvSpPr>
+        <p:spPr>
+          <a:xfrm>
+            <a:off x="548640" y="1170432"/>
+            <a:ext cx="2011680" cy="38100"/>
+          </a:xfrm>
+          <a:prstGeom prst="rect">
+            <a:avLst/>
+          </a:prstGeom>
+          <a:solidFill>
+            <a:srgbClr val="2E869A"/>
+          </a:solidFill>
+          <a:ln>
+            <a:noFill/>
+          </a:ln>
+        </p:spPr>
+        <p:style>
+          <a:lnRef idx="1">
+            <a:schemeClr val="accent1"/>
+          </a:lnRef>
+          <a:fillRef idx="3">
+            <a:schemeClr val="accent1"/>
+          </a:fillRef>
+          <a:effectRef idx="2">
+            <a:schemeClr val="accent1"/>
+          </a:effectRef>
+          <a:fontRef idx="minor">
+            <a:schemeClr val="lt1"/>
+          </a:fontRef>
+        </p:style>
+        <p:txBody>
+          <a:bodyPr rtlCol="0" anchor="ctr"/>
+          <a:lstStyle/>
+          <a:p>
+            <a:pPr algn="ctr"/>
+          </a:p>
+        </p:txBody>
+      </p:sp>
+      <p:sp>
+        <p:nvSpPr>
+          <p:cNvPr id="3" name="TextBox 2"/>
+          <p:cNvSpPr txBox="1"/>
+          <p:nvPr/>
+        </p:nvSpPr>
+        <p:spPr>
+          <a:xfrm>
+            <a:off x="502920" y="411480"/>
+            <a:ext cx="11155680" cy="822960"/>
+          </a:xfrm>
+          <a:prstGeom prst="rect">
+            <a:avLst/>
+          </a:prstGeom>
+          <a:noFill/>
+        </p:spPr>
+        <p:txBody>
+          <a:bodyPr wrap="square">
+            <a:spAutoFit/>
+          </a:bodyPr>
+          <a:lstStyle/>
+          <a:p>
+            <a:r>
+              <a:rPr sz="3000" b="1" i="0">
+                <a:solidFill>
+                  <a:srgbClr val="1F3A5F"/>
+                </a:solidFill>
+                <a:latin typeface="Calibri"/>
+              </a:rPr>
               <a:t>Recommended next steps</a:t>
             </a:r>
           </a:p>
@@ -5323,7 +5735,7 @@
                 </a:solidFill>
                 <a:latin typeface="Calibri"/>
               </a:rPr>
-              <a:t>15</a:t>
+              <a:t>16</a:t>
             </a:r>
           </a:p>
         </p:txBody>

--- a/Subgroups/ASX/InstantiationReview/ASX-Instantiation-Findings.pptx
+++ b/Subgroups/ASX/InstantiationReview/ASX-Instantiation-Findings.pptx
@@ -21,6 +21,7 @@
     <p:sldId id="269" r:id="rId20"/>
     <p:sldId id="270" r:id="rId21"/>
     <p:sldId id="271" r:id="rId22"/>
+    <p:sldId id="272" r:id="rId23"/>
   </p:sldIdLst>
   <p:sldSz cx="12191695" cy="6858000" type="screen4x3"/>
   <p:notesSz cx="6858000" cy="9144000"/>
@@ -3483,6 +3484,25 @@
               <a:t>Task/effect scenarios: engagement, delivery, manipulation, rescue walked - the gap is consistent (task verbs + payload/effector typing).</a:t>
             </a:r>
           </a:p>
+          <a:p>
+            <a:pPr>
+              <a:spcBef>
+                <a:spcPts val="200"/>
+              </a:spcBef>
+              <a:spcAft>
+                <a:spcPts val="1200"/>
+              </a:spcAft>
+            </a:pPr>
+            <a:r>
+              <a:rPr sz="1650" b="0" i="0">
+                <a:solidFill>
+                  <a:srgbClr val="333333"/>
+                </a:solidFill>
+                <a:latin typeface="Calibri"/>
+              </a:rPr>
+              <a:t>Redundancy pass (route-clearance, companion, urban): confirmed - plus one new finding, N1 (an area cannot be the subject of a task/report).</a:t>
+            </a:r>
+          </a:p>
         </p:txBody>
       </p:sp>
       <p:sp>
@@ -4608,8 +4628,8 @@
         </p:nvSpPr>
         <p:spPr>
           <a:xfrm>
-            <a:off x="640080" y="3703320"/>
-            <a:ext cx="10972800" cy="2651760"/>
+            <a:off x="640080" y="3657600"/>
+            <a:ext cx="10972800" cy="2697480"/>
           </a:xfrm>
           <a:prstGeom prst="rect">
             <a:avLst/>
@@ -4627,11 +4647,11 @@
                 <a:spcPts val="200"/>
               </a:spcBef>
               <a:spcAft>
-                <a:spcPts val="1200"/>
+                <a:spcPts val="900"/>
               </a:spcAft>
             </a:pPr>
             <a:r>
-              <a:rPr sz="1500" b="1" i="0">
+              <a:rPr sz="1400" b="1" i="0">
                 <a:solidFill>
                   <a:srgbClr val="2E7D32"/>
                 </a:solidFill>
@@ -4640,7 +4660,7 @@
               <a:t>Already there (checked):  </a:t>
             </a:r>
             <a:r>
-              <a:rPr sz="1500" b="0" i="0">
+              <a:rPr sz="1400" b="0" i="0">
                 <a:solidFill>
                   <a:srgbClr val="333333"/>
                 </a:solidFill>
@@ -4655,11 +4675,39 @@
                 <a:spcPts val="200"/>
               </a:spcBef>
               <a:spcAft>
-                <a:spcPts val="1200"/>
+                <a:spcPts val="900"/>
               </a:spcAft>
             </a:pPr>
             <a:r>
-              <a:rPr sz="1500" b="1" i="0">
+              <a:rPr sz="1400" b="1" i="0">
+                <a:solidFill>
+                  <a:srgbClr val="C87F0A"/>
+                </a:solidFill>
+                <a:latin typeface="Calibri"/>
+              </a:rPr>
+              <a:t>Also (N1):  </a:t>
+            </a:r>
+            <a:r>
+              <a:rPr sz="1400" b="0" i="0">
+                <a:solidFill>
+                  <a:srgbClr val="333333"/>
+                </a:solidFill>
+                <a:latin typeface="Calibri"/>
+              </a:rPr>
+              <a:t>an area cannot be the subject of a task or report - no hasAffectedArea, no area-state (cleared/contaminated). See Q-M.</a:t>
+            </a:r>
+          </a:p>
+          <a:p>
+            <a:pPr>
+              <a:spcBef>
+                <a:spcPts val="200"/>
+              </a:spcBef>
+              <a:spcAft>
+                <a:spcPts val="900"/>
+              </a:spcAft>
+            </a:pPr>
+            <a:r>
+              <a:rPr sz="1400" b="1" i="0">
                 <a:solidFill>
                   <a:srgbClr val="2E869A"/>
                 </a:solidFill>
@@ -4668,7 +4716,7 @@
               <a:t>Decision (Q-L):  </a:t>
             </a:r>
             <a:r>
-              <a:rPr sz="1500" b="0" i="0">
+              <a:rPr sz="1400" b="0" i="0">
                 <a:solidFill>
                   <a:srgbClr val="333333"/>
                 </a:solidFill>
@@ -5150,7 +5198,7 @@
         </p:nvSpPr>
         <p:spPr>
           <a:xfrm>
-            <a:off x="640080" y="1508760"/>
+            <a:off x="640080" y="1463040"/>
             <a:ext cx="10972800" cy="4754880"/>
           </a:xfrm>
           <a:prstGeom prst="rect">
@@ -5169,11 +5217,11 @@
                 <a:spcPts val="200"/>
               </a:spcBef>
               <a:spcAft>
-                <a:spcPts val="900"/>
+                <a:spcPts val="800"/>
               </a:spcAft>
             </a:pPr>
             <a:r>
-              <a:rPr sz="1400" b="1" i="0">
+              <a:rPr sz="1350" b="1" i="0">
                 <a:solidFill>
                   <a:srgbClr val="2E869A"/>
                 </a:solidFill>
@@ -5182,7 +5230,7 @@
               <a:t>Q-E  </a:t>
             </a:r>
             <a:r>
-              <a:rPr sz="1400" b="0" i="0">
+              <a:rPr sz="1350" b="0" i="0">
                 <a:solidFill>
                   <a:srgbClr val="333333"/>
                 </a:solidFill>
@@ -5197,11 +5245,11 @@
                 <a:spcPts val="200"/>
               </a:spcBef>
               <a:spcAft>
-                <a:spcPts val="900"/>
+                <a:spcPts val="800"/>
               </a:spcAft>
             </a:pPr>
             <a:r>
-              <a:rPr sz="1400" b="1" i="0">
+              <a:rPr sz="1350" b="1" i="0">
                 <a:solidFill>
                   <a:srgbClr val="2E869A"/>
                 </a:solidFill>
@@ -5210,7 +5258,7 @@
               <a:t>Q-F  </a:t>
             </a:r>
             <a:r>
-              <a:rPr sz="1400" b="0" i="0">
+              <a:rPr sz="1350" b="0" i="0">
                 <a:solidFill>
                   <a:srgbClr val="333333"/>
                 </a:solidFill>
@@ -5225,11 +5273,11 @@
                 <a:spcPts val="200"/>
               </a:spcBef>
               <a:spcAft>
-                <a:spcPts val="900"/>
+                <a:spcPts val="800"/>
               </a:spcAft>
             </a:pPr>
             <a:r>
-              <a:rPr sz="1400" b="1" i="0">
+              <a:rPr sz="1350" b="1" i="0">
                 <a:solidFill>
                   <a:srgbClr val="2E869A"/>
                 </a:solidFill>
@@ -5238,7 +5286,7 @@
               <a:t>Q-G  </a:t>
             </a:r>
             <a:r>
-              <a:rPr sz="1400" b="0" i="0">
+              <a:rPr sz="1350" b="0" i="0">
                 <a:solidFill>
                   <a:srgbClr val="333333"/>
                 </a:solidFill>
@@ -5253,11 +5301,11 @@
                 <a:spcPts val="200"/>
               </a:spcBef>
               <a:spcAft>
-                <a:spcPts val="900"/>
+                <a:spcPts val="800"/>
               </a:spcAft>
             </a:pPr>
             <a:r>
-              <a:rPr sz="1400" b="1" i="0">
+              <a:rPr sz="1350" b="1" i="0">
                 <a:solidFill>
                   <a:srgbClr val="2E869A"/>
                 </a:solidFill>
@@ -5266,7 +5314,7 @@
               <a:t>Q-H  </a:t>
             </a:r>
             <a:r>
-              <a:rPr sz="1400" b="0" i="0">
+              <a:rPr sz="1350" b="0" i="0">
                 <a:solidFill>
                   <a:srgbClr val="333333"/>
                 </a:solidFill>
@@ -5281,11 +5329,11 @@
                 <a:spcPts val="200"/>
               </a:spcBef>
               <a:spcAft>
-                <a:spcPts val="900"/>
+                <a:spcPts val="800"/>
               </a:spcAft>
             </a:pPr>
             <a:r>
-              <a:rPr sz="1400" b="1" i="0">
+              <a:rPr sz="1350" b="1" i="0">
                 <a:solidFill>
                   <a:srgbClr val="2E869A"/>
                 </a:solidFill>
@@ -5294,7 +5342,7 @@
               <a:t>Q-I  </a:t>
             </a:r>
             <a:r>
-              <a:rPr sz="1400" b="0" i="0">
+              <a:rPr sz="1350" b="0" i="0">
                 <a:solidFill>
                   <a:srgbClr val="333333"/>
                 </a:solidFill>
@@ -5309,11 +5357,11 @@
                 <a:spcPts val="200"/>
               </a:spcBef>
               <a:spcAft>
-                <a:spcPts val="900"/>
+                <a:spcPts val="800"/>
               </a:spcAft>
             </a:pPr>
             <a:r>
-              <a:rPr sz="1400" b="1" i="0">
+              <a:rPr sz="1350" b="1" i="0">
                 <a:solidFill>
                   <a:srgbClr val="2E869A"/>
                 </a:solidFill>
@@ -5322,7 +5370,7 @@
               <a:t>Q-J  </a:t>
             </a:r>
             <a:r>
-              <a:rPr sz="1400" b="0" i="0">
+              <a:rPr sz="1350" b="0" i="0">
                 <a:solidFill>
                   <a:srgbClr val="333333"/>
                 </a:solidFill>
@@ -5337,11 +5385,11 @@
                 <a:spcPts val="200"/>
               </a:spcBef>
               <a:spcAft>
-                <a:spcPts val="900"/>
+                <a:spcPts val="800"/>
               </a:spcAft>
             </a:pPr>
             <a:r>
-              <a:rPr sz="1400" b="1" i="0">
+              <a:rPr sz="1350" b="1" i="0">
                 <a:solidFill>
                   <a:srgbClr val="2E869A"/>
                 </a:solidFill>
@@ -5350,7 +5398,7 @@
               <a:t>Q-K  </a:t>
             </a:r>
             <a:r>
-              <a:rPr sz="1400" b="0" i="0">
+              <a:rPr sz="1350" b="0" i="0">
                 <a:solidFill>
                   <a:srgbClr val="333333"/>
                 </a:solidFill>
@@ -5365,11 +5413,11 @@
                 <a:spcPts val="200"/>
               </a:spcBef>
               <a:spcAft>
-                <a:spcPts val="900"/>
+                <a:spcPts val="800"/>
               </a:spcAft>
             </a:pPr>
             <a:r>
-              <a:rPr sz="1400" b="1" i="0">
+              <a:rPr sz="1350" b="1" i="0">
                 <a:solidFill>
                   <a:srgbClr val="2E869A"/>
                 </a:solidFill>
@@ -5378,13 +5426,41 @@
               <a:t>Q-L  </a:t>
             </a:r>
             <a:r>
-              <a:rPr sz="1400" b="0" i="0">
+              <a:rPr sz="1350" b="0" i="0">
                 <a:solidFill>
                   <a:srgbClr val="333333"/>
                 </a:solidFill>
                 <a:latin typeface="Calibri"/>
               </a:rPr>
               <a:t>Task-verb vocabulary (deliver, manipulate, recover) + typed payload/effector/weapon.</a:t>
+            </a:r>
+          </a:p>
+          <a:p>
+            <a:pPr>
+              <a:spcBef>
+                <a:spcPts val="200"/>
+              </a:spcBef>
+              <a:spcAft>
+                <a:spcPts val="800"/>
+              </a:spcAft>
+            </a:pPr>
+            <a:r>
+              <a:rPr sz="1350" b="1" i="0">
+                <a:solidFill>
+                  <a:srgbClr val="2E869A"/>
+                </a:solidFill>
+                <a:latin typeface="Calibri"/>
+              </a:rPr>
+              <a:t>Q-M  </a:t>
+            </a:r>
+            <a:r>
+              <a:rPr sz="1350" b="0" i="0">
+                <a:solidFill>
+                  <a:srgbClr val="333333"/>
+                </a:solidFill>
+                <a:latin typeface="Calibri"/>
+              </a:rPr>
+              <a:t>Let an area be the subject of a task/report (hasAffectedArea + area-state).</a:t>
             </a:r>
           </a:p>
         </p:txBody>
@@ -5548,6 +5624,330 @@
                 </a:solidFill>
                 <a:latin typeface="Calibri"/>
               </a:rPr>
+              <a:t>Proposed fixes</a:t>
+            </a:r>
+          </a:p>
+        </p:txBody>
+      </p:sp>
+      <p:sp>
+        <p:nvSpPr>
+          <p:cNvPr id="4" name="TextBox 3"/>
+          <p:cNvSpPr txBox="1"/>
+          <p:nvPr/>
+        </p:nvSpPr>
+        <p:spPr>
+          <a:xfrm>
+            <a:off x="548640" y="914400"/>
+            <a:ext cx="10972800" cy="320040"/>
+          </a:xfrm>
+          <a:prstGeom prst="rect">
+            <a:avLst/>
+          </a:prstGeom>
+          <a:noFill/>
+        </p:spPr>
+        <p:txBody>
+          <a:bodyPr wrap="square">
+            <a:spAutoFit/>
+          </a:bodyPr>
+          <a:lstStyle/>
+          <a:p>
+            <a:r>
+              <a:rPr sz="1300" b="0" i="1">
+                <a:solidFill>
+                  <a:srgbClr val="2E869A"/>
+                </a:solidFill>
+                <a:latin typeface="Calibri"/>
+              </a:rPr>
+              <a:t>Pending group buy-in - nothing applied to the model</a:t>
+            </a:r>
+          </a:p>
+        </p:txBody>
+      </p:sp>
+      <p:sp>
+        <p:nvSpPr>
+          <p:cNvPr id="5" name="TextBox 4"/>
+          <p:cNvSpPr txBox="1"/>
+          <p:nvPr/>
+        </p:nvSpPr>
+        <p:spPr>
+          <a:xfrm>
+            <a:off x="640080" y="1554480"/>
+            <a:ext cx="10972800" cy="4754880"/>
+          </a:xfrm>
+          <a:prstGeom prst="rect">
+            <a:avLst/>
+          </a:prstGeom>
+          <a:noFill/>
+        </p:spPr>
+        <p:txBody>
+          <a:bodyPr wrap="square">
+            <a:spAutoFit/>
+          </a:bodyPr>
+          <a:lstStyle/>
+          <a:p>
+            <a:pPr>
+              <a:spcBef>
+                <a:spcPts val="200"/>
+              </a:spcBef>
+              <a:spcAft>
+                <a:spcPts val="1300"/>
+              </a:spcAft>
+            </a:pPr>
+            <a:r>
+              <a:rPr sz="1400" b="1" i="0">
+                <a:solidFill>
+                  <a:srgbClr val="2E7D32"/>
+                </a:solidFill>
+                <a:latin typeface="Calibri"/>
+              </a:rPr>
+              <a:t>Safe corrections (unambiguous):  </a:t>
+            </a:r>
+            <a:r>
+              <a:rPr sz="1400" b="0" i="0">
+                <a:solidFill>
+                  <a:srgbClr val="333333"/>
+                </a:solidFill>
+                <a:latin typeface="Calibri"/>
+              </a:rPr>
+              <a:t>class typo CollecticeRoboticSystem -&gt; Collective (O1); versionInfo Extrension -&gt; Extension (O2); file CSIM_ASX -&gt; C2SIM_ASX (O3); hasStartTime UUIDBase -&gt; TimeInstant (M7); unify namespace label ASX / C2SIM_ASX (M8).</a:t>
+            </a:r>
+          </a:p>
+          <a:p>
+            <a:pPr>
+              <a:spcBef>
+                <a:spcPts val="200"/>
+              </a:spcBef>
+              <a:spcAft>
+                <a:spcPts val="1300"/>
+              </a:spcAft>
+            </a:pPr>
+            <a:r>
+              <a:rPr sz="1400" b="1" i="0">
+                <a:solidFill>
+                  <a:srgbClr val="C87F0A"/>
+                </a:solidFill>
+                <a:latin typeface="Calibri"/>
+              </a:rPr>
+              <a:t>Structural (decide first):  </a:t>
+            </a:r>
+            <a:r>
+              <a:rPr sz="1400" b="0" i="0">
+                <a:solidFill>
+                  <a:srgbClr val="333333"/>
+                </a:solidFill>
+                <a:latin typeface="Calibri"/>
+              </a:rPr>
+              <a:t>UAV/robot typing (Q-A); Swarm -&gt; CollectiveEntity so it is taskable (Q-B); one sensor model (Q-C); one autonomy vocabulary (Q-D).</a:t>
+            </a:r>
+          </a:p>
+          <a:p>
+            <a:pPr>
+              <a:spcBef>
+                <a:spcPts val="200"/>
+              </a:spcBef>
+              <a:spcAft>
+                <a:spcPts val="1300"/>
+              </a:spcAft>
+            </a:pPr>
+            <a:r>
+              <a:rPr sz="1400" b="1" i="0">
+                <a:solidFill>
+                  <a:srgbClr val="2E869A"/>
+                </a:solidFill>
+                <a:latin typeface="Calibri"/>
+              </a:rPr>
+              <a:t>New content (design):  </a:t>
+            </a:r>
+            <a:r>
+              <a:rPr sz="1400" b="0" i="0">
+                <a:solidFill>
+                  <a:srgbClr val="333333"/>
+                </a:solidFill>
+                <a:latin typeface="Calibri"/>
+              </a:rPr>
+              <a:t>inline entity def (Q-E), MediaReference (Q-F), robot-to-robot (Q-G), rationale report (Q-H), sensor-reading (Q-I), swarm residuals (Q-J), engagement authority (Q-K), task verbs + payload (Q-L), area subject (Q-M).</a:t>
+            </a:r>
+          </a:p>
+          <a:p>
+            <a:pPr>
+              <a:spcBef>
+                <a:spcPts val="200"/>
+              </a:spcBef>
+              <a:spcAft>
+                <a:spcPts val="1300"/>
+              </a:spcAft>
+            </a:pPr>
+            <a:r>
+              <a:rPr sz="1400" b="1" i="0">
+                <a:solidFill>
+                  <a:srgbClr val="333333"/>
+                </a:solidFill>
+                <a:latin typeface="Calibri"/>
+              </a:rPr>
+              <a:t>Nothing here is applied to the model - all items are proposals for group buy-in.</a:t>
+            </a:r>
+          </a:p>
+        </p:txBody>
+      </p:sp>
+      <p:sp>
+        <p:nvSpPr>
+          <p:cNvPr id="6" name="TextBox 5"/>
+          <p:cNvSpPr txBox="1"/>
+          <p:nvPr/>
+        </p:nvSpPr>
+        <p:spPr>
+          <a:xfrm>
+            <a:off x="502920" y="6419088"/>
+            <a:ext cx="11155680" cy="320040"/>
+          </a:xfrm>
+          <a:prstGeom prst="rect">
+            <a:avLst/>
+          </a:prstGeom>
+          <a:noFill/>
+        </p:spPr>
+        <p:txBody>
+          <a:bodyPr wrap="square">
+            <a:spAutoFit/>
+          </a:bodyPr>
+          <a:lstStyle/>
+          <a:p>
+            <a:r>
+              <a:rPr sz="900" b="0" i="0">
+                <a:solidFill>
+                  <a:srgbClr val="666666"/>
+                </a:solidFill>
+                <a:latin typeface="Calibri"/>
+              </a:rPr>
+              <a:t>C2SIM ASX Sub-group   |   Hyssos   |   July 2026</a:t>
+            </a:r>
+          </a:p>
+        </p:txBody>
+      </p:sp>
+      <p:sp>
+        <p:nvSpPr>
+          <p:cNvPr id="7" name="TextBox 6"/>
+          <p:cNvSpPr txBox="1"/>
+          <p:nvPr/>
+        </p:nvSpPr>
+        <p:spPr>
+          <a:xfrm>
+            <a:off x="11338560" y="6419088"/>
+            <a:ext cx="640080" cy="320040"/>
+          </a:xfrm>
+          <a:prstGeom prst="rect">
+            <a:avLst/>
+          </a:prstGeom>
+          <a:noFill/>
+        </p:spPr>
+        <p:txBody>
+          <a:bodyPr wrap="square">
+            <a:spAutoFit/>
+          </a:bodyPr>
+          <a:lstStyle/>
+          <a:p>
+            <a:pPr algn="r"/>
+            <a:r>
+              <a:rPr sz="900" b="0" i="0">
+                <a:solidFill>
+                  <a:srgbClr val="666666"/>
+                </a:solidFill>
+                <a:latin typeface="Calibri"/>
+              </a:rPr>
+              <a:t>16</a:t>
+            </a:r>
+          </a:p>
+        </p:txBody>
+      </p:sp>
+    </p:spTree>
+  </p:cSld>
+  <p:clrMapOvr>
+    <a:masterClrMapping/>
+  </p:clrMapOvr>
+</p:sld>
+</file>
+
+<file path=ppt/slides/slide17.xml><?xml version="1.0" encoding="utf-8"?>
+<p:sld xmlns:a="http://schemas.openxmlformats.org/drawingml/2006/main" xmlns:p="http://schemas.openxmlformats.org/presentationml/2006/main" xmlns:r="http://schemas.openxmlformats.org/officeDocument/2006/relationships">
+  <p:cSld>
+    <p:spTree>
+      <p:nvGrpSpPr>
+        <p:cNvPr id="1" name=""/>
+        <p:cNvGrpSpPr/>
+        <p:nvPr/>
+      </p:nvGrpSpPr>
+      <p:grpSpPr/>
+      <p:sp>
+        <p:nvSpPr>
+          <p:cNvPr id="2" name="Rectangle 1"/>
+          <p:cNvSpPr/>
+          <p:nvPr/>
+        </p:nvSpPr>
+        <p:spPr>
+          <a:xfrm>
+            <a:off x="548640" y="1170432"/>
+            <a:ext cx="2011680" cy="38100"/>
+          </a:xfrm>
+          <a:prstGeom prst="rect">
+            <a:avLst/>
+          </a:prstGeom>
+          <a:solidFill>
+            <a:srgbClr val="2E869A"/>
+          </a:solidFill>
+          <a:ln>
+            <a:noFill/>
+          </a:ln>
+        </p:spPr>
+        <p:style>
+          <a:lnRef idx="1">
+            <a:schemeClr val="accent1"/>
+          </a:lnRef>
+          <a:fillRef idx="3">
+            <a:schemeClr val="accent1"/>
+          </a:fillRef>
+          <a:effectRef idx="2">
+            <a:schemeClr val="accent1"/>
+          </a:effectRef>
+          <a:fontRef idx="minor">
+            <a:schemeClr val="lt1"/>
+          </a:fontRef>
+        </p:style>
+        <p:txBody>
+          <a:bodyPr rtlCol="0" anchor="ctr"/>
+          <a:lstStyle/>
+          <a:p>
+            <a:pPr algn="ctr"/>
+          </a:p>
+        </p:txBody>
+      </p:sp>
+      <p:sp>
+        <p:nvSpPr>
+          <p:cNvPr id="3" name="TextBox 2"/>
+          <p:cNvSpPr txBox="1"/>
+          <p:nvPr/>
+        </p:nvSpPr>
+        <p:spPr>
+          <a:xfrm>
+            <a:off x="502920" y="411480"/>
+            <a:ext cx="11155680" cy="822960"/>
+          </a:xfrm>
+          <a:prstGeom prst="rect">
+            <a:avLst/>
+          </a:prstGeom>
+          <a:noFill/>
+        </p:spPr>
+        <p:txBody>
+          <a:bodyPr wrap="square">
+            <a:spAutoFit/>
+          </a:bodyPr>
+          <a:lstStyle/>
+          <a:p>
+            <a:r>
+              <a:rPr sz="3000" b="1" i="0">
+                <a:solidFill>
+                  <a:srgbClr val="1F3A5F"/>
+                </a:solidFill>
+                <a:latin typeface="Calibri"/>
+              </a:rPr>
               <a:t>Recommended next steps</a:t>
             </a:r>
           </a:p>
@@ -5735,7 +6135,7 @@
                 </a:solidFill>
                 <a:latin typeface="Calibri"/>
               </a:rPr>
-              <a:t>16</a:t>
+              <a:t>17</a:t>
             </a:r>
           </a:p>
         </p:txBody>

--- a/Subgroups/ASX/InstantiationReview/ASX-Instantiation-Findings.pptx
+++ b/Subgroups/ASX/InstantiationReview/ASX-Instantiation-Findings.pptx
@@ -22,6 +22,8 @@
     <p:sldId id="270" r:id="rId21"/>
     <p:sldId id="271" r:id="rId22"/>
     <p:sldId id="272" r:id="rId23"/>
+    <p:sldId id="273" r:id="rId24"/>
+    <p:sldId id="274" r:id="rId25"/>
   </p:sldIdLst>
   <p:sldSz cx="12191695" cy="6858000" type="screen4x3"/>
   <p:notesSz cx="6858000" cy="9144000"/>
@@ -3395,7 +3397,7 @@
         </p:nvSpPr>
         <p:spPr>
           <a:xfrm>
-            <a:off x="640080" y="1554480"/>
+            <a:off x="640080" y="1463040"/>
             <a:ext cx="10972800" cy="4754880"/>
           </a:xfrm>
           <a:prstGeom prst="rect">
@@ -3414,11 +3416,11 @@
                 <a:spcPts val="200"/>
               </a:spcBef>
               <a:spcAft>
-                <a:spcPts val="1200"/>
+                <a:spcPts val="800"/>
               </a:spcAft>
             </a:pPr>
             <a:r>
-              <a:rPr sz="1650" b="1" i="0">
+              <a:rPr sz="1450" b="1" i="0">
                 <a:solidFill>
                   <a:srgbClr val="333333"/>
                 </a:solidFill>
@@ -3433,11 +3435,11 @@
                 <a:spcPts val="200"/>
               </a:spcBef>
               <a:spcAft>
-                <a:spcPts val="1200"/>
+                <a:spcPts val="800"/>
               </a:spcAft>
             </a:pPr>
             <a:r>
-              <a:rPr sz="1650" b="1" i="0">
+              <a:rPr sz="1450" b="1" i="0">
                 <a:solidFill>
                   <a:srgbClr val="333333"/>
                 </a:solidFill>
@@ -3452,11 +3454,11 @@
                 <a:spcPts val="200"/>
               </a:spcBef>
               <a:spcAft>
-                <a:spcPts val="1200"/>
+                <a:spcPts val="800"/>
               </a:spcAft>
             </a:pPr>
             <a:r>
-              <a:rPr sz="1650" b="1" i="0">
+              <a:rPr sz="1450" b="1" i="0">
                 <a:solidFill>
                   <a:srgbClr val="333333"/>
                 </a:solidFill>
@@ -3471,11 +3473,11 @@
                 <a:spcPts val="200"/>
               </a:spcBef>
               <a:spcAft>
-                <a:spcPts val="1200"/>
+                <a:spcPts val="800"/>
               </a:spcAft>
             </a:pPr>
             <a:r>
-              <a:rPr sz="1650" b="0" i="0">
+              <a:rPr sz="1450" b="0" i="0">
                 <a:solidFill>
                   <a:srgbClr val="333333"/>
                 </a:solidFill>
@@ -3490,17 +3492,36 @@
                 <a:spcPts val="200"/>
               </a:spcBef>
               <a:spcAft>
-                <a:spcPts val="1200"/>
+                <a:spcPts val="800"/>
               </a:spcAft>
             </a:pPr>
             <a:r>
-              <a:rPr sz="1650" b="0" i="0">
+              <a:rPr sz="1450" b="0" i="0">
                 <a:solidFill>
                   <a:srgbClr val="333333"/>
                 </a:solidFill>
                 <a:latin typeface="Calibri"/>
               </a:rPr>
               <a:t>Redundancy pass (route-clearance, companion, urban): confirmed - plus one new finding, N1 (an area cannot be the subject of a task/report).</a:t>
+            </a:r>
+          </a:p>
+          <a:p>
+            <a:pPr>
+              <a:spcBef>
+                <a:spcPts val="200"/>
+              </a:spcBef>
+              <a:spcAft>
+                <a:spcPts val="800"/>
+              </a:spcAft>
+            </a:pPr>
+            <a:r>
+              <a:rPr sz="1450" b="0" i="0">
+                <a:solidFill>
+                  <a:srgbClr val="333333"/>
+                </a:solidFill>
+                <a:latin typeface="Calibri"/>
+              </a:rPr>
+              <a:t>Sourced scenarios (subterranean, maritime MCM, sustainment): integrated from the scenario-sourcing session - corroborate P1/X1/N2/Y and add G1-G10 (incl. a generic Detection Report).</a:t>
             </a:r>
           </a:p>
         </p:txBody>
@@ -4886,7 +4907,7 @@
                 </a:solidFill>
                 <a:latin typeface="Calibri"/>
               </a:rPr>
-              <a:t>Decisions (1/2): model structure</a:t>
+              <a:t>Integrated from the scenario-sourcing session</a:t>
             </a:r>
           </a:p>
         </p:txBody>
@@ -4899,8 +4920,42 @@
         </p:nvSpPr>
         <p:spPr>
           <a:xfrm>
-            <a:off x="640080" y="1737360"/>
-            <a:ext cx="10972800" cy="4617720"/>
+            <a:off x="548640" y="914400"/>
+            <a:ext cx="10972800" cy="320040"/>
+          </a:xfrm>
+          <a:prstGeom prst="rect">
+            <a:avLst/>
+          </a:prstGeom>
+          <a:noFill/>
+        </p:spPr>
+        <p:txBody>
+          <a:bodyPr wrap="square">
+            <a:spAutoFit/>
+          </a:bodyPr>
+          <a:lstStyle/>
+          <a:p>
+            <a:r>
+              <a:rPr sz="1300" b="0" i="1">
+                <a:solidFill>
+                  <a:srgbClr val="2E869A"/>
+                </a:solidFill>
+                <a:latin typeface="Calibri"/>
+              </a:rPr>
+              <a:t>SubT (subterranean) + Cooperative MCM (maritime) + Sustainment</a:t>
+            </a:r>
+          </a:p>
+        </p:txBody>
+      </p:sp>
+      <p:sp>
+        <p:nvSpPr>
+          <p:cNvPr id="5" name="TextBox 4"/>
+          <p:cNvSpPr txBox="1"/>
+          <p:nvPr/>
+        </p:nvSpPr>
+        <p:spPr>
+          <a:xfrm>
+            <a:off x="640080" y="1600200"/>
+            <a:ext cx="10972800" cy="4754880"/>
           </a:xfrm>
           <a:prstGeom prst="rect">
             <a:avLst/>
@@ -4918,26 +4973,26 @@
                 <a:spcPts val="200"/>
               </a:spcBef>
               <a:spcAft>
-                <a:spcPts val="1800"/>
+                <a:spcPts val="1300"/>
               </a:spcAft>
             </a:pPr>
             <a:r>
-              <a:rPr sz="1800" b="1" i="0">
-                <a:solidFill>
-                  <a:srgbClr val="2E869A"/>
-                </a:solidFill>
-                <a:latin typeface="Calibri"/>
-              </a:rPr>
-              <a:t>Q-A  </a:t>
-            </a:r>
-            <a:r>
-              <a:rPr sz="1800" b="0" i="0">
+              <a:rPr sz="1500" b="1" i="0">
+                <a:solidFill>
+                  <a:srgbClr val="2E7D32"/>
+                </a:solidFill>
+                <a:latin typeface="Calibri"/>
+              </a:rPr>
+              <a:t>Corroborated (fresh domains):  </a:t>
+            </a:r>
+            <a:r>
+              <a:rPr sz="1500" b="0" i="0">
                 <a:solidFill>
                   <a:srgbClr val="333333"/>
                 </a:solidFill>
                 <a:latin typeface="Calibri"/>
               </a:rPr>
-              <a:t>UAV/robot typing: a role on the existing Platform tree, or a parallel Robot tree?</a:t>
+              <a:t>platform typing P1, robot-to-robot X1 (-&gt; cross-cueing), persistent tasking N2, and the sensor-report problem Y1.</a:t>
             </a:r>
           </a:p>
           <a:p>
@@ -4946,26 +5001,26 @@
                 <a:spcPts val="200"/>
               </a:spcBef>
               <a:spcAft>
-                <a:spcPts val="1800"/>
+                <a:spcPts val="1300"/>
               </a:spcAft>
             </a:pPr>
             <a:r>
-              <a:rPr sz="1800" b="1" i="0">
+              <a:rPr sz="1500" b="1" i="0">
                 <a:solidFill>
                   <a:srgbClr val="2E869A"/>
                 </a:solidFill>
                 <a:latin typeface="Calibri"/>
               </a:rPr>
-              <a:t>Q-B  </a:t>
-            </a:r>
-            <a:r>
-              <a:rPr sz="1800" b="0" i="0">
+              <a:t>Best contribution (G4):  </a:t>
+            </a:r>
+            <a:r>
+              <a:rPr sz="1500" b="0" i="0">
                 <a:solidFill>
                   <a:srgbClr val="333333"/>
                 </a:solidFill>
                 <a:latin typeface="Calibri"/>
               </a:rPr>
-              <a:t>Swarm: derive from CollectiveEntity (ActorEntity) so it can be tasked.</a:t>
+              <a:t>one generic Detection Report (confidence + error-bound + false-positive) subsumes Video/CBRN/EW/GPR/naval-mine and resolves the whole Y-series.</a:t>
             </a:r>
           </a:p>
           <a:p>
@@ -4974,26 +5029,26 @@
                 <a:spcPts val="200"/>
               </a:spcBef>
               <a:spcAft>
-                <a:spcPts val="1800"/>
+                <a:spcPts val="1300"/>
               </a:spcAft>
             </a:pPr>
             <a:r>
-              <a:rPr sz="1800" b="1" i="0">
-                <a:solidFill>
-                  <a:srgbClr val="2E869A"/>
-                </a:solidFill>
-                <a:latin typeface="Calibri"/>
-              </a:rPr>
-              <a:t>Q-C  </a:t>
-            </a:r>
-            <a:r>
-              <a:rPr sz="1800" b="0" i="0">
+              <a:rPr sz="1500" b="1" i="0">
+                <a:solidFill>
+                  <a:srgbClr val="C87F0A"/>
+                </a:solidFill>
+                <a:latin typeface="Calibri"/>
+              </a:rPr>
+              <a:t>New gaps:  </a:t>
+            </a:r>
+            <a:r>
+              <a:rPr sz="1500" b="0" i="0">
                 <a:solidFill>
                   <a:srgbClr val="333333"/>
                 </a:solidFill>
                 <a:latin typeface="Calibri"/>
               </a:rPr>
-              <a:t>Sensor: entity, class, or attribute - choose one model and apply it everywhere.</a:t>
+              <a:t>Explore/Search-Area order (G2); denied-comms operation + deployable relay (G1); decoy behavior (G8); maritime cross-cue with a shared track (G3).</a:t>
             </a:r>
           </a:p>
           <a:p>
@@ -5002,33 +5057,24 @@
                 <a:spcPts val="200"/>
               </a:spcBef>
               <a:spcAft>
-                <a:spcPts val="1800"/>
+                <a:spcPts val="1300"/>
               </a:spcAft>
             </a:pPr>
             <a:r>
-              <a:rPr sz="1800" b="1" i="0">
-                <a:solidFill>
-                  <a:srgbClr val="2E869A"/>
-                </a:solidFill>
-                <a:latin typeface="Calibri"/>
-              </a:rPr>
-              <a:t>Q-D  </a:t>
-            </a:r>
-            <a:r>
-              <a:rPr sz="1800" b="0" i="0">
-                <a:solidFill>
-                  <a:srgbClr val="333333"/>
-                </a:solidFill>
-                <a:latin typeface="Calibri"/>
-              </a:rPr>
-              <a:t>Autonomy: choose one normative vocabulary.</a:t>
-            </a:r>
-          </a:p>
-        </p:txBody>
-      </p:sp>
-      <p:sp>
-        <p:nvSpPr>
-          <p:cNvPr id="5" name="TextBox 4"/>
+              <a:rPr sz="1500" b="0" i="0">
+                <a:solidFill>
+                  <a:srgbClr val="666666"/>
+                </a:solidFill>
+                <a:latin typeface="Calibri"/>
+              </a:rPr>
+              <a:t>Neutral-actor framing is mostly covered (NeutralSide exists). Still un-extracted: counter-UAS swarm, human-machine teaming, SAR.</a:t>
+            </a:r>
+          </a:p>
+        </p:txBody>
+      </p:sp>
+      <p:sp>
+        <p:nvSpPr>
+          <p:cNvPr id="6" name="TextBox 5"/>
           <p:cNvSpPr txBox="1"/>
           <p:nvPr/>
         </p:nvSpPr>
@@ -5062,7 +5108,7 @@
       </p:sp>
       <p:sp>
         <p:nvSpPr>
-          <p:cNvPr id="6" name="TextBox 5"/>
+          <p:cNvPr id="7" name="TextBox 6"/>
           <p:cNvSpPr txBox="1"/>
           <p:nvPr/>
         </p:nvSpPr>
@@ -5185,7 +5231,7 @@
                 </a:solidFill>
                 <a:latin typeface="Calibri"/>
               </a:rPr>
-              <a:t>Decisions (2/2): new content types needed</a:t>
+              <a:t>Decisions (1/2): model structure</a:t>
             </a:r>
           </a:p>
         </p:txBody>
@@ -5198,8 +5244,8 @@
         </p:nvSpPr>
         <p:spPr>
           <a:xfrm>
-            <a:off x="640080" y="1463040"/>
-            <a:ext cx="10972800" cy="4754880"/>
+            <a:off x="640080" y="1737360"/>
+            <a:ext cx="10972800" cy="4617720"/>
           </a:xfrm>
           <a:prstGeom prst="rect">
             <a:avLst/>
@@ -5217,26 +5263,26 @@
                 <a:spcPts val="200"/>
               </a:spcBef>
               <a:spcAft>
-                <a:spcPts val="800"/>
+                <a:spcPts val="1800"/>
               </a:spcAft>
             </a:pPr>
             <a:r>
-              <a:rPr sz="1350" b="1" i="0">
+              <a:rPr sz="1800" b="1" i="0">
                 <a:solidFill>
                   <a:srgbClr val="2E869A"/>
                 </a:solidFill>
                 <a:latin typeface="Calibri"/>
               </a:rPr>
-              <a:t>Q-E  </a:t>
-            </a:r>
-            <a:r>
-              <a:rPr sz="1350" b="0" i="0">
+              <a:t>Q-A  </a:t>
+            </a:r>
+            <a:r>
+              <a:rPr sz="1800" b="0" i="0">
                 <a:solidFill>
                   <a:srgbClr val="333333"/>
                 </a:solidFill>
                 <a:latin typeface="Calibri"/>
               </a:rPr>
-              <a:t>Inline entity definition for newly-observed entities in reports.</a:t>
+              <a:t>UAV/robot typing: a role on the existing Platform tree, or a parallel Robot tree?</a:t>
             </a:r>
           </a:p>
           <a:p>
@@ -5245,26 +5291,26 @@
                 <a:spcPts val="200"/>
               </a:spcBef>
               <a:spcAft>
-                <a:spcPts val="800"/>
+                <a:spcPts val="1800"/>
               </a:spcAft>
             </a:pPr>
             <a:r>
-              <a:rPr sz="1350" b="1" i="0">
+              <a:rPr sz="1800" b="1" i="0">
                 <a:solidFill>
                   <a:srgbClr val="2E869A"/>
                 </a:solidFill>
                 <a:latin typeface="Calibri"/>
               </a:rPr>
-              <a:t>Q-F  </a:t>
-            </a:r>
-            <a:r>
-              <a:rPr sz="1350" b="0" i="0">
+              <a:t>Q-B  </a:t>
+            </a:r>
+            <a:r>
+              <a:rPr sz="1800" b="0" i="0">
                 <a:solidFill>
                   <a:srgbClr val="333333"/>
                 </a:solidFill>
                 <a:latin typeface="Calibri"/>
               </a:rPr>
-              <a:t>MediaReference identity; separate media-format from sensor-modality.</a:t>
+              <a:t>Swarm: derive from CollectiveEntity (ActorEntity) so it can be tasked.</a:t>
             </a:r>
           </a:p>
           <a:p>
@@ -5273,26 +5319,26 @@
                 <a:spcPts val="200"/>
               </a:spcBef>
               <a:spcAft>
-                <a:spcPts val="800"/>
+                <a:spcPts val="1800"/>
               </a:spcAft>
             </a:pPr>
             <a:r>
-              <a:rPr sz="1350" b="1" i="0">
+              <a:rPr sz="1800" b="1" i="0">
                 <a:solidFill>
                   <a:srgbClr val="2E869A"/>
                 </a:solidFill>
                 <a:latin typeface="Calibri"/>
               </a:rPr>
-              <a:t>Q-G  </a:t>
-            </a:r>
-            <a:r>
-              <a:rPr sz="1350" b="0" i="0">
+              <a:t>Q-C  </a:t>
+            </a:r>
+            <a:r>
+              <a:rPr sz="1800" b="0" i="0">
                 <a:solidFill>
                   <a:srgbClr val="333333"/>
                 </a:solidFill>
                 <a:latin typeface="Calibri"/>
               </a:rPr>
-              <a:t>Robot-to-robot coordination content type + issuing authority (CASEVAC).</a:t>
+              <a:t>Sensor: entity, class, or attribute - choose one model and apply it everywhere.</a:t>
             </a:r>
           </a:p>
           <a:p>
@@ -5301,166 +5347,26 @@
                 <a:spcPts val="200"/>
               </a:spcBef>
               <a:spcAft>
-                <a:spcPts val="800"/>
+                <a:spcPts val="1800"/>
               </a:spcAft>
             </a:pPr>
             <a:r>
-              <a:rPr sz="1350" b="1" i="0">
+              <a:rPr sz="1800" b="1" i="0">
                 <a:solidFill>
                   <a:srgbClr val="2E869A"/>
                 </a:solidFill>
                 <a:latin typeface="Calibri"/>
               </a:rPr>
-              <a:t>Q-H  </a:t>
-            </a:r>
-            <a:r>
-              <a:rPr sz="1350" b="0" i="0">
+              <a:t>Q-D  </a:t>
+            </a:r>
+            <a:r>
+              <a:rPr sz="1800" b="0" i="0">
                 <a:solidFill>
                   <a:srgbClr val="333333"/>
                 </a:solidFill>
                 <a:latin typeface="Calibri"/>
               </a:rPr>
-              <a:t>Rationale/explanation ReportContent - report why, not just what (CASEVAC).</a:t>
-            </a:r>
-          </a:p>
-          <a:p>
-            <a:pPr>
-              <a:spcBef>
-                <a:spcPts val="200"/>
-              </a:spcBef>
-              <a:spcAft>
-                <a:spcPts val="800"/>
-              </a:spcAft>
-            </a:pPr>
-            <a:r>
-              <a:rPr sz="1350" b="1" i="0">
-                <a:solidFill>
-                  <a:srgbClr val="2E869A"/>
-                </a:solidFill>
-                <a:latin typeface="Calibri"/>
-              </a:rPr>
-              <a:t>Q-I  </a:t>
-            </a:r>
-            <a:r>
-              <a:rPr sz="1350" b="0" i="0">
-                <a:solidFill>
-                  <a:srgbClr val="333333"/>
-                </a:solidFill>
-                <a:latin typeface="Calibri"/>
-              </a:rPr>
-              <a:t>Media-independent sensor-reading (value+unit+modality) + full SensorType taxonomy.</a:t>
-            </a:r>
-          </a:p>
-          <a:p>
-            <a:pPr>
-              <a:spcBef>
-                <a:spcPts val="200"/>
-              </a:spcBef>
-              <a:spcAft>
-                <a:spcPts val="800"/>
-              </a:spcAft>
-            </a:pPr>
-            <a:r>
-              <a:rPr sz="1350" b="1" i="0">
-                <a:solidFill>
-                  <a:srgbClr val="2E869A"/>
-                </a:solidFill>
-                <a:latin typeface="Calibri"/>
-              </a:rPr>
-              <a:t>Q-J  </a:t>
-            </a:r>
-            <a:r>
-              <a:rPr sz="1350" b="0" i="0">
-                <a:solidFill>
-                  <a:srgbClr val="333333"/>
-                </a:solidFill>
-                <a:latin typeface="Calibri"/>
-              </a:rPr>
-              <a:t>Swarm residuals: network params, leader role, aggregation, member lifecycle.</a:t>
-            </a:r>
-          </a:p>
-          <a:p>
-            <a:pPr>
-              <a:spcBef>
-                <a:spcPts val="200"/>
-              </a:spcBef>
-              <a:spcAft>
-                <a:spcPts val="800"/>
-              </a:spcAft>
-            </a:pPr>
-            <a:r>
-              <a:rPr sz="1350" b="1" i="0">
-                <a:solidFill>
-                  <a:srgbClr val="2E869A"/>
-                </a:solidFill>
-                <a:latin typeface="Calibri"/>
-              </a:rPr>
-              <a:t>Q-K  </a:t>
-            </a:r>
-            <a:r>
-              <a:rPr sz="1350" b="0" i="0">
-                <a:solidFill>
-                  <a:srgbClr val="333333"/>
-                </a:solidFill>
-                <a:latin typeface="Calibri"/>
-              </a:rPr>
-              <a:t>Engagement authority as a function of autonomy level (Fire Support).</a:t>
-            </a:r>
-          </a:p>
-          <a:p>
-            <a:pPr>
-              <a:spcBef>
-                <a:spcPts val="200"/>
-              </a:spcBef>
-              <a:spcAft>
-                <a:spcPts val="800"/>
-              </a:spcAft>
-            </a:pPr>
-            <a:r>
-              <a:rPr sz="1350" b="1" i="0">
-                <a:solidFill>
-                  <a:srgbClr val="2E869A"/>
-                </a:solidFill>
-                <a:latin typeface="Calibri"/>
-              </a:rPr>
-              <a:t>Q-L  </a:t>
-            </a:r>
-            <a:r>
-              <a:rPr sz="1350" b="0" i="0">
-                <a:solidFill>
-                  <a:srgbClr val="333333"/>
-                </a:solidFill>
-                <a:latin typeface="Calibri"/>
-              </a:rPr>
-              <a:t>Task-verb vocabulary (deliver, manipulate, recover) + typed payload/effector/weapon.</a:t>
-            </a:r>
-          </a:p>
-          <a:p>
-            <a:pPr>
-              <a:spcBef>
-                <a:spcPts val="200"/>
-              </a:spcBef>
-              <a:spcAft>
-                <a:spcPts val="800"/>
-              </a:spcAft>
-            </a:pPr>
-            <a:r>
-              <a:rPr sz="1350" b="1" i="0">
-                <a:solidFill>
-                  <a:srgbClr val="2E869A"/>
-                </a:solidFill>
-                <a:latin typeface="Calibri"/>
-              </a:rPr>
-              <a:t>Q-M  </a:t>
-            </a:r>
-            <a:r>
-              <a:rPr sz="1350" b="0" i="0">
-                <a:solidFill>
-                  <a:srgbClr val="333333"/>
-                </a:solidFill>
-                <a:latin typeface="Calibri"/>
-              </a:rPr>
-              <a:t>Let an area be the subject of a task/report (hasAffectedArea + area-state).</a:t>
+              <a:t>Autonomy: choose one normative vocabulary.</a:t>
             </a:r>
           </a:p>
         </p:txBody>
@@ -5624,7 +5530,7 @@
                 </a:solidFill>
                 <a:latin typeface="Calibri"/>
               </a:rPr>
-              <a:t>Proposed fixes</a:t>
+              <a:t>Decisions (2/3): new content types needed</a:t>
             </a:r>
           </a:p>
         </p:txBody>
@@ -5637,41 +5543,7 @@
         </p:nvSpPr>
         <p:spPr>
           <a:xfrm>
-            <a:off x="548640" y="914400"/>
-            <a:ext cx="10972800" cy="320040"/>
-          </a:xfrm>
-          <a:prstGeom prst="rect">
-            <a:avLst/>
-          </a:prstGeom>
-          <a:noFill/>
-        </p:spPr>
-        <p:txBody>
-          <a:bodyPr wrap="square">
-            <a:spAutoFit/>
-          </a:bodyPr>
-          <a:lstStyle/>
-          <a:p>
-            <a:r>
-              <a:rPr sz="1300" b="0" i="1">
-                <a:solidFill>
-                  <a:srgbClr val="2E869A"/>
-                </a:solidFill>
-                <a:latin typeface="Calibri"/>
-              </a:rPr>
-              <a:t>Pending group buy-in - nothing applied to the model</a:t>
-            </a:r>
-          </a:p>
-        </p:txBody>
-      </p:sp>
-      <p:sp>
-        <p:nvSpPr>
-          <p:cNvPr id="5" name="TextBox 4"/>
-          <p:cNvSpPr txBox="1"/>
-          <p:nvPr/>
-        </p:nvSpPr>
-        <p:spPr>
-          <a:xfrm>
-            <a:off x="640080" y="1554480"/>
+            <a:off x="640080" y="1463040"/>
             <a:ext cx="10972800" cy="4754880"/>
           </a:xfrm>
           <a:prstGeom prst="rect">
@@ -5690,26 +5562,26 @@
                 <a:spcPts val="200"/>
               </a:spcBef>
               <a:spcAft>
-                <a:spcPts val="1300"/>
+                <a:spcPts val="800"/>
               </a:spcAft>
             </a:pPr>
             <a:r>
-              <a:rPr sz="1400" b="1" i="0">
-                <a:solidFill>
-                  <a:srgbClr val="2E7D32"/>
-                </a:solidFill>
-                <a:latin typeface="Calibri"/>
-              </a:rPr>
-              <a:t>Safe corrections (unambiguous):  </a:t>
-            </a:r>
-            <a:r>
-              <a:rPr sz="1400" b="0" i="0">
+              <a:rPr sz="1350" b="1" i="0">
+                <a:solidFill>
+                  <a:srgbClr val="2E869A"/>
+                </a:solidFill>
+                <a:latin typeface="Calibri"/>
+              </a:rPr>
+              <a:t>Q-E  </a:t>
+            </a:r>
+            <a:r>
+              <a:rPr sz="1350" b="0" i="0">
                 <a:solidFill>
                   <a:srgbClr val="333333"/>
                 </a:solidFill>
                 <a:latin typeface="Calibri"/>
               </a:rPr>
-              <a:t>class typo CollecticeRoboticSystem -&gt; Collective (O1); versionInfo Extrension -&gt; Extension (O2); file CSIM_ASX -&gt; C2SIM_ASX (O3); hasStartTime UUIDBase -&gt; TimeInstant (M7); unify namespace label ASX / C2SIM_ASX (M8).</a:t>
+              <a:t>Inline entity definition for newly-observed entities in reports.</a:t>
             </a:r>
           </a:p>
           <a:p>
@@ -5718,26 +5590,26 @@
                 <a:spcPts val="200"/>
               </a:spcBef>
               <a:spcAft>
-                <a:spcPts val="1300"/>
+                <a:spcPts val="800"/>
               </a:spcAft>
             </a:pPr>
             <a:r>
-              <a:rPr sz="1400" b="1" i="0">
-                <a:solidFill>
-                  <a:srgbClr val="C87F0A"/>
-                </a:solidFill>
-                <a:latin typeface="Calibri"/>
-              </a:rPr>
-              <a:t>Structural (decide first):  </a:t>
-            </a:r>
-            <a:r>
-              <a:rPr sz="1400" b="0" i="0">
+              <a:rPr sz="1350" b="1" i="0">
+                <a:solidFill>
+                  <a:srgbClr val="2E869A"/>
+                </a:solidFill>
+                <a:latin typeface="Calibri"/>
+              </a:rPr>
+              <a:t>Q-F  </a:t>
+            </a:r>
+            <a:r>
+              <a:rPr sz="1350" b="0" i="0">
                 <a:solidFill>
                   <a:srgbClr val="333333"/>
                 </a:solidFill>
                 <a:latin typeface="Calibri"/>
               </a:rPr>
-              <a:t>UAV/robot typing (Q-A); Swarm -&gt; CollectiveEntity so it is taskable (Q-B); one sensor model (Q-C); one autonomy vocabulary (Q-D).</a:t>
+              <a:t>MediaReference identity; separate media-format from sensor-modality.</a:t>
             </a:r>
           </a:p>
           <a:p>
@@ -5746,26 +5618,26 @@
                 <a:spcPts val="200"/>
               </a:spcBef>
               <a:spcAft>
-                <a:spcPts val="1300"/>
+                <a:spcPts val="800"/>
               </a:spcAft>
             </a:pPr>
             <a:r>
-              <a:rPr sz="1400" b="1" i="0">
+              <a:rPr sz="1350" b="1" i="0">
                 <a:solidFill>
                   <a:srgbClr val="2E869A"/>
                 </a:solidFill>
                 <a:latin typeface="Calibri"/>
               </a:rPr>
-              <a:t>New content (design):  </a:t>
-            </a:r>
-            <a:r>
-              <a:rPr sz="1400" b="0" i="0">
+              <a:t>Q-G  </a:t>
+            </a:r>
+            <a:r>
+              <a:rPr sz="1350" b="0" i="0">
                 <a:solidFill>
                   <a:srgbClr val="333333"/>
                 </a:solidFill>
                 <a:latin typeface="Calibri"/>
               </a:rPr>
-              <a:t>inline entity def (Q-E), MediaReference (Q-F), robot-to-robot (Q-G), rationale report (Q-H), sensor-reading (Q-I), swarm residuals (Q-J), engagement authority (Q-K), task verbs + payload (Q-L), area subject (Q-M).</a:t>
+              <a:t>Robot-to-robot coordination content type + issuing authority (CASEVAC).</a:t>
             </a:r>
           </a:p>
           <a:p>
@@ -5774,24 +5646,173 @@
                 <a:spcPts val="200"/>
               </a:spcBef>
               <a:spcAft>
-                <a:spcPts val="1300"/>
+                <a:spcPts val="800"/>
               </a:spcAft>
             </a:pPr>
             <a:r>
-              <a:rPr sz="1400" b="1" i="0">
+              <a:rPr sz="1350" b="1" i="0">
+                <a:solidFill>
+                  <a:srgbClr val="2E869A"/>
+                </a:solidFill>
+                <a:latin typeface="Calibri"/>
+              </a:rPr>
+              <a:t>Q-H  </a:t>
+            </a:r>
+            <a:r>
+              <a:rPr sz="1350" b="0" i="0">
                 <a:solidFill>
                   <a:srgbClr val="333333"/>
                 </a:solidFill>
                 <a:latin typeface="Calibri"/>
               </a:rPr>
-              <a:t>Nothing here is applied to the model - all items are proposals for group buy-in.</a:t>
-            </a:r>
-          </a:p>
-        </p:txBody>
-      </p:sp>
-      <p:sp>
-        <p:nvSpPr>
-          <p:cNvPr id="6" name="TextBox 5"/>
+              <a:t>Rationale/explanation ReportContent - report why, not just what (CASEVAC).</a:t>
+            </a:r>
+          </a:p>
+          <a:p>
+            <a:pPr>
+              <a:spcBef>
+                <a:spcPts val="200"/>
+              </a:spcBef>
+              <a:spcAft>
+                <a:spcPts val="800"/>
+              </a:spcAft>
+            </a:pPr>
+            <a:r>
+              <a:rPr sz="1350" b="1" i="0">
+                <a:solidFill>
+                  <a:srgbClr val="2E869A"/>
+                </a:solidFill>
+                <a:latin typeface="Calibri"/>
+              </a:rPr>
+              <a:t>Q-I  </a:t>
+            </a:r>
+            <a:r>
+              <a:rPr sz="1350" b="0" i="0">
+                <a:solidFill>
+                  <a:srgbClr val="333333"/>
+                </a:solidFill>
+                <a:latin typeface="Calibri"/>
+              </a:rPr>
+              <a:t>Media-independent sensor-reading (value+unit+modality) + full SensorType taxonomy.</a:t>
+            </a:r>
+          </a:p>
+          <a:p>
+            <a:pPr>
+              <a:spcBef>
+                <a:spcPts val="200"/>
+              </a:spcBef>
+              <a:spcAft>
+                <a:spcPts val="800"/>
+              </a:spcAft>
+            </a:pPr>
+            <a:r>
+              <a:rPr sz="1350" b="1" i="0">
+                <a:solidFill>
+                  <a:srgbClr val="2E869A"/>
+                </a:solidFill>
+                <a:latin typeface="Calibri"/>
+              </a:rPr>
+              <a:t>Q-J  </a:t>
+            </a:r>
+            <a:r>
+              <a:rPr sz="1350" b="0" i="0">
+                <a:solidFill>
+                  <a:srgbClr val="333333"/>
+                </a:solidFill>
+                <a:latin typeface="Calibri"/>
+              </a:rPr>
+              <a:t>Swarm residuals: network params, leader role, aggregation, member lifecycle.</a:t>
+            </a:r>
+          </a:p>
+          <a:p>
+            <a:pPr>
+              <a:spcBef>
+                <a:spcPts val="200"/>
+              </a:spcBef>
+              <a:spcAft>
+                <a:spcPts val="800"/>
+              </a:spcAft>
+            </a:pPr>
+            <a:r>
+              <a:rPr sz="1350" b="1" i="0">
+                <a:solidFill>
+                  <a:srgbClr val="2E869A"/>
+                </a:solidFill>
+                <a:latin typeface="Calibri"/>
+              </a:rPr>
+              <a:t>Q-K  </a:t>
+            </a:r>
+            <a:r>
+              <a:rPr sz="1350" b="0" i="0">
+                <a:solidFill>
+                  <a:srgbClr val="333333"/>
+                </a:solidFill>
+                <a:latin typeface="Calibri"/>
+              </a:rPr>
+              <a:t>Engagement authority as a function of autonomy level (Fire Support).</a:t>
+            </a:r>
+          </a:p>
+          <a:p>
+            <a:pPr>
+              <a:spcBef>
+                <a:spcPts val="200"/>
+              </a:spcBef>
+              <a:spcAft>
+                <a:spcPts val="800"/>
+              </a:spcAft>
+            </a:pPr>
+            <a:r>
+              <a:rPr sz="1350" b="1" i="0">
+                <a:solidFill>
+                  <a:srgbClr val="2E869A"/>
+                </a:solidFill>
+                <a:latin typeface="Calibri"/>
+              </a:rPr>
+              <a:t>Q-L  </a:t>
+            </a:r>
+            <a:r>
+              <a:rPr sz="1350" b="0" i="0">
+                <a:solidFill>
+                  <a:srgbClr val="333333"/>
+                </a:solidFill>
+                <a:latin typeface="Calibri"/>
+              </a:rPr>
+              <a:t>Task-verb vocabulary (deliver, manipulate, recover) + typed payload/effector/weapon.</a:t>
+            </a:r>
+          </a:p>
+          <a:p>
+            <a:pPr>
+              <a:spcBef>
+                <a:spcPts val="200"/>
+              </a:spcBef>
+              <a:spcAft>
+                <a:spcPts val="800"/>
+              </a:spcAft>
+            </a:pPr>
+            <a:r>
+              <a:rPr sz="1350" b="1" i="0">
+                <a:solidFill>
+                  <a:srgbClr val="2E869A"/>
+                </a:solidFill>
+                <a:latin typeface="Calibri"/>
+              </a:rPr>
+              <a:t>Q-M  </a:t>
+            </a:r>
+            <a:r>
+              <a:rPr sz="1350" b="0" i="0">
+                <a:solidFill>
+                  <a:srgbClr val="333333"/>
+                </a:solidFill>
+                <a:latin typeface="Calibri"/>
+              </a:rPr>
+              <a:t>Let an area be the subject of a task/report (hasAffectedArea + area-state).</a:t>
+            </a:r>
+          </a:p>
+        </p:txBody>
+      </p:sp>
+      <p:sp>
+        <p:nvSpPr>
+          <p:cNvPr id="5" name="TextBox 4"/>
           <p:cNvSpPr txBox="1"/>
           <p:nvPr/>
         </p:nvSpPr>
@@ -5825,7 +5846,7 @@
       </p:sp>
       <p:sp>
         <p:nvSpPr>
-          <p:cNvPr id="7" name="TextBox 6"/>
+          <p:cNvPr id="6" name="TextBox 5"/>
           <p:cNvSpPr txBox="1"/>
           <p:nvPr/>
         </p:nvSpPr>
@@ -5948,6 +5969,685 @@
                 </a:solidFill>
                 <a:latin typeface="Calibri"/>
               </a:rPr>
+              <a:t>Decisions (3/3): from the sourced scenarios</a:t>
+            </a:r>
+          </a:p>
+        </p:txBody>
+      </p:sp>
+      <p:sp>
+        <p:nvSpPr>
+          <p:cNvPr id="4" name="TextBox 3"/>
+          <p:cNvSpPr txBox="1"/>
+          <p:nvPr/>
+        </p:nvSpPr>
+        <p:spPr>
+          <a:xfrm>
+            <a:off x="640080" y="1554480"/>
+            <a:ext cx="10972800" cy="4754880"/>
+          </a:xfrm>
+          <a:prstGeom prst="rect">
+            <a:avLst/>
+          </a:prstGeom>
+          <a:noFill/>
+        </p:spPr>
+        <p:txBody>
+          <a:bodyPr wrap="square">
+            <a:spAutoFit/>
+          </a:bodyPr>
+          <a:lstStyle/>
+          <a:p>
+            <a:pPr>
+              <a:spcBef>
+                <a:spcPts val="200"/>
+              </a:spcBef>
+              <a:spcAft>
+                <a:spcPts val="1100"/>
+              </a:spcAft>
+            </a:pPr>
+            <a:r>
+              <a:rPr sz="1500" b="1" i="0">
+                <a:solidFill>
+                  <a:srgbClr val="2E869A"/>
+                </a:solidFill>
+                <a:latin typeface="Calibri"/>
+              </a:rPr>
+              <a:t>Q-N  </a:t>
+            </a:r>
+            <a:r>
+              <a:rPr sz="1500" b="0" i="0">
+                <a:solidFill>
+                  <a:srgbClr val="333333"/>
+                </a:solidFill>
+                <a:latin typeface="Calibri"/>
+              </a:rPr>
+              <a:t>Explore / Search-Area order with a coverage goal (distinct from Patrol).</a:t>
+            </a:r>
+          </a:p>
+          <a:p>
+            <a:pPr>
+              <a:spcBef>
+                <a:spcPts val="200"/>
+              </a:spcBef>
+              <a:spcAft>
+                <a:spcPts val="1100"/>
+              </a:spcAft>
+            </a:pPr>
+            <a:r>
+              <a:rPr sz="1500" b="1" i="0">
+                <a:solidFill>
+                  <a:srgbClr val="2E869A"/>
+                </a:solidFill>
+                <a:latin typeface="Calibri"/>
+              </a:rPr>
+              <a:t>Q-O  </a:t>
+            </a:r>
+            <a:r>
+              <a:rPr sz="1500" b="0" i="0">
+                <a:solidFill>
+                  <a:srgbClr val="333333"/>
+                </a:solidFill>
+                <a:latin typeface="Calibri"/>
+              </a:rPr>
+              <a:t>Denied-comms operating mode + deployable comms-relay entity/behavior.</a:t>
+            </a:r>
+          </a:p>
+          <a:p>
+            <a:pPr>
+              <a:spcBef>
+                <a:spcPts val="200"/>
+              </a:spcBef>
+              <a:spcAft>
+                <a:spcPts val="1100"/>
+              </a:spcAft>
+            </a:pPr>
+            <a:r>
+              <a:rPr sz="1500" b="1" i="0">
+                <a:solidFill>
+                  <a:srgbClr val="2E869A"/>
+                </a:solidFill>
+                <a:latin typeface="Calibri"/>
+              </a:rPr>
+              <a:t>Q-P  </a:t>
+            </a:r>
+            <a:r>
+              <a:rPr sz="1500" b="0" i="0">
+                <a:solidFill>
+                  <a:srgbClr val="333333"/>
+                </a:solidFill>
+                <a:latin typeface="Calibri"/>
+              </a:rPr>
+              <a:t>Cross-cueing: system-to-system tasking + shared classified track/contact (extends Q-G).</a:t>
+            </a:r>
+          </a:p>
+          <a:p>
+            <a:pPr>
+              <a:spcBef>
+                <a:spcPts val="200"/>
+              </a:spcBef>
+              <a:spcAft>
+                <a:spcPts val="1100"/>
+              </a:spcAft>
+            </a:pPr>
+            <a:r>
+              <a:rPr sz="1500" b="1" i="0">
+                <a:solidFill>
+                  <a:srgbClr val="2E869A"/>
+                </a:solidFill>
+                <a:latin typeface="Calibri"/>
+              </a:rPr>
+              <a:t>Q-Q  </a:t>
+            </a:r>
+            <a:r>
+              <a:rPr sz="1500" b="0" i="0">
+                <a:solidFill>
+                  <a:srgbClr val="333333"/>
+                </a:solidFill>
+                <a:latin typeface="Calibri"/>
+              </a:rPr>
+              <a:t>One generic Detection Report (confidence + error-bound + false-positive) - resolves the Y-series (extends Q-I).</a:t>
+            </a:r>
+          </a:p>
+          <a:p>
+            <a:pPr>
+              <a:spcBef>
+                <a:spcPts val="200"/>
+              </a:spcBef>
+              <a:spcAft>
+                <a:spcPts val="1100"/>
+              </a:spcAft>
+            </a:pPr>
+            <a:r>
+              <a:rPr sz="1500" b="1" i="0">
+                <a:solidFill>
+                  <a:srgbClr val="2E869A"/>
+                </a:solidFill>
+                <a:latin typeface="Calibri"/>
+              </a:rPr>
+              <a:t>Q-R  </a:t>
+            </a:r>
+            <a:r>
+              <a:rPr sz="1500" b="0" i="0">
+                <a:solidFill>
+                  <a:srgbClr val="333333"/>
+                </a:solidFill>
+                <a:latin typeface="Calibri"/>
+              </a:rPr>
+              <a:t>Platform locomotion/role subtypes: wheeled/tracked/legged UGV; detector/neutralizer USV (extends Q-A).</a:t>
+            </a:r>
+          </a:p>
+          <a:p>
+            <a:pPr>
+              <a:spcBef>
+                <a:spcPts val="200"/>
+              </a:spcBef>
+              <a:spcAft>
+                <a:spcPts val="1100"/>
+              </a:spcAft>
+            </a:pPr>
+            <a:r>
+              <a:rPr sz="1500" b="1" i="0">
+                <a:solidFill>
+                  <a:srgbClr val="2E869A"/>
+                </a:solidFill>
+                <a:latin typeface="Calibri"/>
+              </a:rPr>
+              <a:t>Q-S  </a:t>
+            </a:r>
+            <a:r>
+              <a:rPr sz="1500" b="0" i="0">
+                <a:solidFill>
+                  <a:srgbClr val="333333"/>
+                </a:solidFill>
+                <a:latin typeface="Calibri"/>
+              </a:rPr>
+              <a:t>Decoy/deception behavior + threat-aware order annotations.</a:t>
+            </a:r>
+          </a:p>
+        </p:txBody>
+      </p:sp>
+      <p:sp>
+        <p:nvSpPr>
+          <p:cNvPr id="5" name="TextBox 4"/>
+          <p:cNvSpPr txBox="1"/>
+          <p:nvPr/>
+        </p:nvSpPr>
+        <p:spPr>
+          <a:xfrm>
+            <a:off x="502920" y="6419088"/>
+            <a:ext cx="11155680" cy="320040"/>
+          </a:xfrm>
+          <a:prstGeom prst="rect">
+            <a:avLst/>
+          </a:prstGeom>
+          <a:noFill/>
+        </p:spPr>
+        <p:txBody>
+          <a:bodyPr wrap="square">
+            <a:spAutoFit/>
+          </a:bodyPr>
+          <a:lstStyle/>
+          <a:p>
+            <a:r>
+              <a:rPr sz="900" b="0" i="0">
+                <a:solidFill>
+                  <a:srgbClr val="666666"/>
+                </a:solidFill>
+                <a:latin typeface="Calibri"/>
+              </a:rPr>
+              <a:t>C2SIM ASX Sub-group   |   Hyssos   |   July 2026</a:t>
+            </a:r>
+          </a:p>
+        </p:txBody>
+      </p:sp>
+      <p:sp>
+        <p:nvSpPr>
+          <p:cNvPr id="6" name="TextBox 5"/>
+          <p:cNvSpPr txBox="1"/>
+          <p:nvPr/>
+        </p:nvSpPr>
+        <p:spPr>
+          <a:xfrm>
+            <a:off x="11338560" y="6419088"/>
+            <a:ext cx="640080" cy="320040"/>
+          </a:xfrm>
+          <a:prstGeom prst="rect">
+            <a:avLst/>
+          </a:prstGeom>
+          <a:noFill/>
+        </p:spPr>
+        <p:txBody>
+          <a:bodyPr wrap="square">
+            <a:spAutoFit/>
+          </a:bodyPr>
+          <a:lstStyle/>
+          <a:p>
+            <a:pPr algn="r"/>
+            <a:r>
+              <a:rPr sz="900" b="0" i="0">
+                <a:solidFill>
+                  <a:srgbClr val="666666"/>
+                </a:solidFill>
+                <a:latin typeface="Calibri"/>
+              </a:rPr>
+              <a:t>17</a:t>
+            </a:r>
+          </a:p>
+        </p:txBody>
+      </p:sp>
+    </p:spTree>
+  </p:cSld>
+  <p:clrMapOvr>
+    <a:masterClrMapping/>
+  </p:clrMapOvr>
+</p:sld>
+</file>
+
+<file path=ppt/slides/slide18.xml><?xml version="1.0" encoding="utf-8"?>
+<p:sld xmlns:a="http://schemas.openxmlformats.org/drawingml/2006/main" xmlns:p="http://schemas.openxmlformats.org/presentationml/2006/main" xmlns:r="http://schemas.openxmlformats.org/officeDocument/2006/relationships">
+  <p:cSld>
+    <p:spTree>
+      <p:nvGrpSpPr>
+        <p:cNvPr id="1" name=""/>
+        <p:cNvGrpSpPr/>
+        <p:nvPr/>
+      </p:nvGrpSpPr>
+      <p:grpSpPr/>
+      <p:sp>
+        <p:nvSpPr>
+          <p:cNvPr id="2" name="Rectangle 1"/>
+          <p:cNvSpPr/>
+          <p:nvPr/>
+        </p:nvSpPr>
+        <p:spPr>
+          <a:xfrm>
+            <a:off x="548640" y="1170432"/>
+            <a:ext cx="2011680" cy="38100"/>
+          </a:xfrm>
+          <a:prstGeom prst="rect">
+            <a:avLst/>
+          </a:prstGeom>
+          <a:solidFill>
+            <a:srgbClr val="2E869A"/>
+          </a:solidFill>
+          <a:ln>
+            <a:noFill/>
+          </a:ln>
+        </p:spPr>
+        <p:style>
+          <a:lnRef idx="1">
+            <a:schemeClr val="accent1"/>
+          </a:lnRef>
+          <a:fillRef idx="3">
+            <a:schemeClr val="accent1"/>
+          </a:fillRef>
+          <a:effectRef idx="2">
+            <a:schemeClr val="accent1"/>
+          </a:effectRef>
+          <a:fontRef idx="minor">
+            <a:schemeClr val="lt1"/>
+          </a:fontRef>
+        </p:style>
+        <p:txBody>
+          <a:bodyPr rtlCol="0" anchor="ctr"/>
+          <a:lstStyle/>
+          <a:p>
+            <a:pPr algn="ctr"/>
+          </a:p>
+        </p:txBody>
+      </p:sp>
+      <p:sp>
+        <p:nvSpPr>
+          <p:cNvPr id="3" name="TextBox 2"/>
+          <p:cNvSpPr txBox="1"/>
+          <p:nvPr/>
+        </p:nvSpPr>
+        <p:spPr>
+          <a:xfrm>
+            <a:off x="502920" y="411480"/>
+            <a:ext cx="11155680" cy="822960"/>
+          </a:xfrm>
+          <a:prstGeom prst="rect">
+            <a:avLst/>
+          </a:prstGeom>
+          <a:noFill/>
+        </p:spPr>
+        <p:txBody>
+          <a:bodyPr wrap="square">
+            <a:spAutoFit/>
+          </a:bodyPr>
+          <a:lstStyle/>
+          <a:p>
+            <a:r>
+              <a:rPr sz="3000" b="1" i="0">
+                <a:solidFill>
+                  <a:srgbClr val="1F3A5F"/>
+                </a:solidFill>
+                <a:latin typeface="Calibri"/>
+              </a:rPr>
+              <a:t>Proposed fixes</a:t>
+            </a:r>
+          </a:p>
+        </p:txBody>
+      </p:sp>
+      <p:sp>
+        <p:nvSpPr>
+          <p:cNvPr id="4" name="TextBox 3"/>
+          <p:cNvSpPr txBox="1"/>
+          <p:nvPr/>
+        </p:nvSpPr>
+        <p:spPr>
+          <a:xfrm>
+            <a:off x="548640" y="914400"/>
+            <a:ext cx="10972800" cy="320040"/>
+          </a:xfrm>
+          <a:prstGeom prst="rect">
+            <a:avLst/>
+          </a:prstGeom>
+          <a:noFill/>
+        </p:spPr>
+        <p:txBody>
+          <a:bodyPr wrap="square">
+            <a:spAutoFit/>
+          </a:bodyPr>
+          <a:lstStyle/>
+          <a:p>
+            <a:r>
+              <a:rPr sz="1300" b="0" i="1">
+                <a:solidFill>
+                  <a:srgbClr val="2E869A"/>
+                </a:solidFill>
+                <a:latin typeface="Calibri"/>
+              </a:rPr>
+              <a:t>Pending group buy-in - nothing applied to the model</a:t>
+            </a:r>
+          </a:p>
+        </p:txBody>
+      </p:sp>
+      <p:sp>
+        <p:nvSpPr>
+          <p:cNvPr id="5" name="TextBox 4"/>
+          <p:cNvSpPr txBox="1"/>
+          <p:nvPr/>
+        </p:nvSpPr>
+        <p:spPr>
+          <a:xfrm>
+            <a:off x="640080" y="1554480"/>
+            <a:ext cx="10972800" cy="4754880"/>
+          </a:xfrm>
+          <a:prstGeom prst="rect">
+            <a:avLst/>
+          </a:prstGeom>
+          <a:noFill/>
+        </p:spPr>
+        <p:txBody>
+          <a:bodyPr wrap="square">
+            <a:spAutoFit/>
+          </a:bodyPr>
+          <a:lstStyle/>
+          <a:p>
+            <a:pPr>
+              <a:spcBef>
+                <a:spcPts val="200"/>
+              </a:spcBef>
+              <a:spcAft>
+                <a:spcPts val="1300"/>
+              </a:spcAft>
+            </a:pPr>
+            <a:r>
+              <a:rPr sz="1400" b="1" i="0">
+                <a:solidFill>
+                  <a:srgbClr val="2E7D32"/>
+                </a:solidFill>
+                <a:latin typeface="Calibri"/>
+              </a:rPr>
+              <a:t>Safe corrections (unambiguous):  </a:t>
+            </a:r>
+            <a:r>
+              <a:rPr sz="1400" b="0" i="0">
+                <a:solidFill>
+                  <a:srgbClr val="333333"/>
+                </a:solidFill>
+                <a:latin typeface="Calibri"/>
+              </a:rPr>
+              <a:t>class typo CollecticeRoboticSystem -&gt; Collective (O1); versionInfo Extrension -&gt; Extension (O2); file CSIM_ASX -&gt; C2SIM_ASX (O3); hasStartTime UUIDBase -&gt; TimeInstant (M7); unify namespace label ASX / C2SIM_ASX (M8).</a:t>
+            </a:r>
+          </a:p>
+          <a:p>
+            <a:pPr>
+              <a:spcBef>
+                <a:spcPts val="200"/>
+              </a:spcBef>
+              <a:spcAft>
+                <a:spcPts val="1300"/>
+              </a:spcAft>
+            </a:pPr>
+            <a:r>
+              <a:rPr sz="1400" b="1" i="0">
+                <a:solidFill>
+                  <a:srgbClr val="C87F0A"/>
+                </a:solidFill>
+                <a:latin typeface="Calibri"/>
+              </a:rPr>
+              <a:t>Structural (decide first):  </a:t>
+            </a:r>
+            <a:r>
+              <a:rPr sz="1400" b="0" i="0">
+                <a:solidFill>
+                  <a:srgbClr val="333333"/>
+                </a:solidFill>
+                <a:latin typeface="Calibri"/>
+              </a:rPr>
+              <a:t>UAV/robot typing (Q-A); Swarm -&gt; CollectiveEntity so it is taskable (Q-B); one sensor model (Q-C); one autonomy vocabulary (Q-D).</a:t>
+            </a:r>
+          </a:p>
+          <a:p>
+            <a:pPr>
+              <a:spcBef>
+                <a:spcPts val="200"/>
+              </a:spcBef>
+              <a:spcAft>
+                <a:spcPts val="1300"/>
+              </a:spcAft>
+            </a:pPr>
+            <a:r>
+              <a:rPr sz="1400" b="1" i="0">
+                <a:solidFill>
+                  <a:srgbClr val="2E869A"/>
+                </a:solidFill>
+                <a:latin typeface="Calibri"/>
+              </a:rPr>
+              <a:t>New content (design):  </a:t>
+            </a:r>
+            <a:r>
+              <a:rPr sz="1400" b="0" i="0">
+                <a:solidFill>
+                  <a:srgbClr val="333333"/>
+                </a:solidFill>
+                <a:latin typeface="Calibri"/>
+              </a:rPr>
+              <a:t>inline entity def (Q-E), MediaReference (Q-F), robot-to-robot + cross-cue (Q-G/Q-P), rationale report (Q-H), generic detection report (Q-I/Q-Q), swarm residuals (Q-J), engagement authority (Q-K), task verbs + payload (Q-L), area subject (Q-M), explore order (Q-N), denied-comms/relay (Q-O), locomotion subtypes (Q-R), decoy/threat-aware (Q-S).</a:t>
+            </a:r>
+          </a:p>
+          <a:p>
+            <a:pPr>
+              <a:spcBef>
+                <a:spcPts val="200"/>
+              </a:spcBef>
+              <a:spcAft>
+                <a:spcPts val="1300"/>
+              </a:spcAft>
+            </a:pPr>
+            <a:r>
+              <a:rPr sz="1400" b="1" i="0">
+                <a:solidFill>
+                  <a:srgbClr val="333333"/>
+                </a:solidFill>
+                <a:latin typeface="Calibri"/>
+              </a:rPr>
+              <a:t>Nothing here is applied to the model - all items are proposals for group buy-in.</a:t>
+            </a:r>
+          </a:p>
+        </p:txBody>
+      </p:sp>
+      <p:sp>
+        <p:nvSpPr>
+          <p:cNvPr id="6" name="TextBox 5"/>
+          <p:cNvSpPr txBox="1"/>
+          <p:nvPr/>
+        </p:nvSpPr>
+        <p:spPr>
+          <a:xfrm>
+            <a:off x="502920" y="6419088"/>
+            <a:ext cx="11155680" cy="320040"/>
+          </a:xfrm>
+          <a:prstGeom prst="rect">
+            <a:avLst/>
+          </a:prstGeom>
+          <a:noFill/>
+        </p:spPr>
+        <p:txBody>
+          <a:bodyPr wrap="square">
+            <a:spAutoFit/>
+          </a:bodyPr>
+          <a:lstStyle/>
+          <a:p>
+            <a:r>
+              <a:rPr sz="900" b="0" i="0">
+                <a:solidFill>
+                  <a:srgbClr val="666666"/>
+                </a:solidFill>
+                <a:latin typeface="Calibri"/>
+              </a:rPr>
+              <a:t>C2SIM ASX Sub-group   |   Hyssos   |   July 2026</a:t>
+            </a:r>
+          </a:p>
+        </p:txBody>
+      </p:sp>
+      <p:sp>
+        <p:nvSpPr>
+          <p:cNvPr id="7" name="TextBox 6"/>
+          <p:cNvSpPr txBox="1"/>
+          <p:nvPr/>
+        </p:nvSpPr>
+        <p:spPr>
+          <a:xfrm>
+            <a:off x="11338560" y="6419088"/>
+            <a:ext cx="640080" cy="320040"/>
+          </a:xfrm>
+          <a:prstGeom prst="rect">
+            <a:avLst/>
+          </a:prstGeom>
+          <a:noFill/>
+        </p:spPr>
+        <p:txBody>
+          <a:bodyPr wrap="square">
+            <a:spAutoFit/>
+          </a:bodyPr>
+          <a:lstStyle/>
+          <a:p>
+            <a:pPr algn="r"/>
+            <a:r>
+              <a:rPr sz="900" b="0" i="0">
+                <a:solidFill>
+                  <a:srgbClr val="666666"/>
+                </a:solidFill>
+                <a:latin typeface="Calibri"/>
+              </a:rPr>
+              <a:t>18</a:t>
+            </a:r>
+          </a:p>
+        </p:txBody>
+      </p:sp>
+    </p:spTree>
+  </p:cSld>
+  <p:clrMapOvr>
+    <a:masterClrMapping/>
+  </p:clrMapOvr>
+</p:sld>
+</file>
+
+<file path=ppt/slides/slide19.xml><?xml version="1.0" encoding="utf-8"?>
+<p:sld xmlns:a="http://schemas.openxmlformats.org/drawingml/2006/main" xmlns:p="http://schemas.openxmlformats.org/presentationml/2006/main" xmlns:r="http://schemas.openxmlformats.org/officeDocument/2006/relationships">
+  <p:cSld>
+    <p:spTree>
+      <p:nvGrpSpPr>
+        <p:cNvPr id="1" name=""/>
+        <p:cNvGrpSpPr/>
+        <p:nvPr/>
+      </p:nvGrpSpPr>
+      <p:grpSpPr/>
+      <p:sp>
+        <p:nvSpPr>
+          <p:cNvPr id="2" name="Rectangle 1"/>
+          <p:cNvSpPr/>
+          <p:nvPr/>
+        </p:nvSpPr>
+        <p:spPr>
+          <a:xfrm>
+            <a:off x="548640" y="1170432"/>
+            <a:ext cx="2011680" cy="38100"/>
+          </a:xfrm>
+          <a:prstGeom prst="rect">
+            <a:avLst/>
+          </a:prstGeom>
+          <a:solidFill>
+            <a:srgbClr val="2E869A"/>
+          </a:solidFill>
+          <a:ln>
+            <a:noFill/>
+          </a:ln>
+        </p:spPr>
+        <p:style>
+          <a:lnRef idx="1">
+            <a:schemeClr val="accent1"/>
+          </a:lnRef>
+          <a:fillRef idx="3">
+            <a:schemeClr val="accent1"/>
+          </a:fillRef>
+          <a:effectRef idx="2">
+            <a:schemeClr val="accent1"/>
+          </a:effectRef>
+          <a:fontRef idx="minor">
+            <a:schemeClr val="lt1"/>
+          </a:fontRef>
+        </p:style>
+        <p:txBody>
+          <a:bodyPr rtlCol="0" anchor="ctr"/>
+          <a:lstStyle/>
+          <a:p>
+            <a:pPr algn="ctr"/>
+          </a:p>
+        </p:txBody>
+      </p:sp>
+      <p:sp>
+        <p:nvSpPr>
+          <p:cNvPr id="3" name="TextBox 2"/>
+          <p:cNvSpPr txBox="1"/>
+          <p:nvPr/>
+        </p:nvSpPr>
+        <p:spPr>
+          <a:xfrm>
+            <a:off x="502920" y="411480"/>
+            <a:ext cx="11155680" cy="822960"/>
+          </a:xfrm>
+          <a:prstGeom prst="rect">
+            <a:avLst/>
+          </a:prstGeom>
+          <a:noFill/>
+        </p:spPr>
+        <p:txBody>
+          <a:bodyPr wrap="square">
+            <a:spAutoFit/>
+          </a:bodyPr>
+          <a:lstStyle/>
+          <a:p>
+            <a:r>
+              <a:rPr sz="3000" b="1" i="0">
+                <a:solidFill>
+                  <a:srgbClr val="1F3A5F"/>
+                </a:solidFill>
+                <a:latin typeface="Calibri"/>
+              </a:rPr>
               <a:t>Recommended next steps</a:t>
             </a:r>
           </a:p>
@@ -6135,7 +6835,7 @@
                 </a:solidFill>
                 <a:latin typeface="Calibri"/>
               </a:rPr>
-              <a:t>17</a:t>
+              <a:t>19</a:t>
             </a:r>
           </a:p>
         </p:txBody>

--- a/Subgroups/ASX/InstantiationReview/ASX-Instantiation-Findings.pptx
+++ b/Subgroups/ASX/InstantiationReview/ASX-Instantiation-Findings.pptx
@@ -5048,7 +5048,7 @@
                 </a:solidFill>
                 <a:latin typeface="Calibri"/>
               </a:rPr>
-              <a:t>Explore/Search-Area order (G2); denied-comms operation + deployable relay (G1); decoy behavior (G8); maritime cross-cue with a shared track (G3).</a:t>
+              <a:t>Explore/Search-Area order (G2); denied-comms + relay (G1); decoy (G8); maritime cross-cue with a shared track (G3); environment conditions (G11); formation geometry (G12).</a:t>
             </a:r>
           </a:p>
           <a:p>
@@ -5982,7 +5982,7 @@
         </p:nvSpPr>
         <p:spPr>
           <a:xfrm>
-            <a:off x="640080" y="1554480"/>
+            <a:off x="640080" y="1463040"/>
             <a:ext cx="10972800" cy="4754880"/>
           </a:xfrm>
           <a:prstGeom prst="rect">
@@ -6001,11 +6001,11 @@
                 <a:spcPts val="200"/>
               </a:spcBef>
               <a:spcAft>
-                <a:spcPts val="1100"/>
+                <a:spcPts val="800"/>
               </a:spcAft>
             </a:pPr>
             <a:r>
-              <a:rPr sz="1500" b="1" i="0">
+              <a:rPr sz="1350" b="1" i="0">
                 <a:solidFill>
                   <a:srgbClr val="2E869A"/>
                 </a:solidFill>
@@ -6014,7 +6014,7 @@
               <a:t>Q-N  </a:t>
             </a:r>
             <a:r>
-              <a:rPr sz="1500" b="0" i="0">
+              <a:rPr sz="1350" b="0" i="0">
                 <a:solidFill>
                   <a:srgbClr val="333333"/>
                 </a:solidFill>
@@ -6029,11 +6029,11 @@
                 <a:spcPts val="200"/>
               </a:spcBef>
               <a:spcAft>
-                <a:spcPts val="1100"/>
+                <a:spcPts val="800"/>
               </a:spcAft>
             </a:pPr>
             <a:r>
-              <a:rPr sz="1500" b="1" i="0">
+              <a:rPr sz="1350" b="1" i="0">
                 <a:solidFill>
                   <a:srgbClr val="2E869A"/>
                 </a:solidFill>
@@ -6042,7 +6042,7 @@
               <a:t>Q-O  </a:t>
             </a:r>
             <a:r>
-              <a:rPr sz="1500" b="0" i="0">
+              <a:rPr sz="1350" b="0" i="0">
                 <a:solidFill>
                   <a:srgbClr val="333333"/>
                 </a:solidFill>
@@ -6057,11 +6057,11 @@
                 <a:spcPts val="200"/>
               </a:spcBef>
               <a:spcAft>
-                <a:spcPts val="1100"/>
+                <a:spcPts val="800"/>
               </a:spcAft>
             </a:pPr>
             <a:r>
-              <a:rPr sz="1500" b="1" i="0">
+              <a:rPr sz="1350" b="1" i="0">
                 <a:solidFill>
                   <a:srgbClr val="2E869A"/>
                 </a:solidFill>
@@ -6070,7 +6070,7 @@
               <a:t>Q-P  </a:t>
             </a:r>
             <a:r>
-              <a:rPr sz="1500" b="0" i="0">
+              <a:rPr sz="1350" b="0" i="0">
                 <a:solidFill>
                   <a:srgbClr val="333333"/>
                 </a:solidFill>
@@ -6085,11 +6085,11 @@
                 <a:spcPts val="200"/>
               </a:spcBef>
               <a:spcAft>
-                <a:spcPts val="1100"/>
+                <a:spcPts val="800"/>
               </a:spcAft>
             </a:pPr>
             <a:r>
-              <a:rPr sz="1500" b="1" i="0">
+              <a:rPr sz="1350" b="1" i="0">
                 <a:solidFill>
                   <a:srgbClr val="2E869A"/>
                 </a:solidFill>
@@ -6098,7 +6098,7 @@
               <a:t>Q-Q  </a:t>
             </a:r>
             <a:r>
-              <a:rPr sz="1500" b="0" i="0">
+              <a:rPr sz="1350" b="0" i="0">
                 <a:solidFill>
                   <a:srgbClr val="333333"/>
                 </a:solidFill>
@@ -6113,11 +6113,11 @@
                 <a:spcPts val="200"/>
               </a:spcBef>
               <a:spcAft>
-                <a:spcPts val="1100"/>
+                <a:spcPts val="800"/>
               </a:spcAft>
             </a:pPr>
             <a:r>
-              <a:rPr sz="1500" b="1" i="0">
+              <a:rPr sz="1350" b="1" i="0">
                 <a:solidFill>
                   <a:srgbClr val="2E869A"/>
                 </a:solidFill>
@@ -6126,7 +6126,7 @@
               <a:t>Q-R  </a:t>
             </a:r>
             <a:r>
-              <a:rPr sz="1500" b="0" i="0">
+              <a:rPr sz="1350" b="0" i="0">
                 <a:solidFill>
                   <a:srgbClr val="333333"/>
                 </a:solidFill>
@@ -6141,11 +6141,11 @@
                 <a:spcPts val="200"/>
               </a:spcBef>
               <a:spcAft>
-                <a:spcPts val="1100"/>
+                <a:spcPts val="800"/>
               </a:spcAft>
             </a:pPr>
             <a:r>
-              <a:rPr sz="1500" b="1" i="0">
+              <a:rPr sz="1350" b="1" i="0">
                 <a:solidFill>
                   <a:srgbClr val="2E869A"/>
                 </a:solidFill>
@@ -6154,13 +6154,69 @@
               <a:t>Q-S  </a:t>
             </a:r>
             <a:r>
-              <a:rPr sz="1500" b="0" i="0">
+              <a:rPr sz="1350" b="0" i="0">
                 <a:solidFill>
                   <a:srgbClr val="333333"/>
                 </a:solidFill>
                 <a:latin typeface="Calibri"/>
               </a:rPr>
               <a:t>Decoy/deception behavior + threat-aware order annotations.</a:t>
+            </a:r>
+          </a:p>
+          <a:p>
+            <a:pPr>
+              <a:spcBef>
+                <a:spcPts val="200"/>
+              </a:spcBef>
+              <a:spcAft>
+                <a:spcPts val="800"/>
+              </a:spcAft>
+            </a:pPr>
+            <a:r>
+              <a:rPr sz="1350" b="1" i="0">
+                <a:solidFill>
+                  <a:srgbClr val="2E869A"/>
+                </a:solidFill>
+                <a:latin typeface="Calibri"/>
+              </a:rPr>
+              <a:t>Q-T  </a:t>
+            </a:r>
+            <a:r>
+              <a:rPr sz="1350" b="0" i="0">
+                <a:solidFill>
+                  <a:srgbClr val="333333"/>
+                </a:solidFill>
+                <a:latin typeface="Calibri"/>
+              </a:rPr>
+              <a:t>Operating-environment condition attributes (GPS-denied, illumination, sea-state, terrain).</a:t>
+            </a:r>
+          </a:p>
+          <a:p>
+            <a:pPr>
+              <a:spcBef>
+                <a:spcPts val="200"/>
+              </a:spcBef>
+              <a:spcAft>
+                <a:spcPts val="800"/>
+              </a:spcAft>
+            </a:pPr>
+            <a:r>
+              <a:rPr sz="1350" b="1" i="0">
+                <a:solidFill>
+                  <a:srgbClr val="2E869A"/>
+                </a:solidFill>
+                <a:latin typeface="Calibri"/>
+              </a:rPr>
+              <a:t>Q-U  </a:t>
+            </a:r>
+            <a:r>
+              <a:rPr sz="1350" b="0" i="0">
+                <a:solidFill>
+                  <a:srgbClr val="333333"/>
+                </a:solidFill>
+                <a:latin typeface="Calibri"/>
+              </a:rPr>
+              <a:t>Formation / relative-geometry construct (orbit, convoy spacing) beyond single RelativeLocation.</a:t>
             </a:r>
           </a:p>
         </p:txBody>
@@ -6465,7 +6521,7 @@
                 </a:solidFill>
                 <a:latin typeface="Calibri"/>
               </a:rPr>
-              <a:t>inline entity def (Q-E), MediaReference (Q-F), robot-to-robot + cross-cue (Q-G/Q-P), rationale report (Q-H), generic detection report (Q-I/Q-Q), swarm residuals (Q-J), engagement authority (Q-K), task verbs + payload (Q-L), area subject (Q-M), explore order (Q-N), denied-comms/relay (Q-O), locomotion subtypes (Q-R), decoy/threat-aware (Q-S).</a:t>
+              <a:t>inline entity def (Q-E), MediaReference (Q-F), robot-to-robot + cross-cue (Q-G/Q-P), rationale report (Q-H), generic detection report (Q-I/Q-Q), swarm residuals (Q-J), engagement authority (Q-K), task verbs + payload (Q-L), area subject (Q-M), explore order (Q-N), denied-comms/relay (Q-O), locomotion subtypes (Q-R), decoy/threat-aware (Q-S), environment conditions (Q-T), formation geometry (Q-U).</a:t>
             </a:r>
           </a:p>
           <a:p>

--- a/Subgroups/ASX/InstantiationReview/ASX-Instantiation-Findings.pptx
+++ b/Subgroups/ASX/InstantiationReview/ASX-Instantiation-Findings.pptx
@@ -24,6 +24,7 @@
     <p:sldId id="272" r:id="rId23"/>
     <p:sldId id="273" r:id="rId24"/>
     <p:sldId id="274" r:id="rId25"/>
+    <p:sldId id="275" r:id="rId26"/>
   </p:sldIdLst>
   <p:sldSz cx="12191695" cy="6858000" type="screen4x3"/>
   <p:notesSz cx="6858000" cy="9144000"/>
@@ -5231,7 +5232,7 @@
                 </a:solidFill>
                 <a:latin typeface="Calibri"/>
               </a:rPr>
-              <a:t>Decisions (1/2): model structure</a:t>
+              <a:t>Validation: the gaps are now evidenced</a:t>
             </a:r>
           </a:p>
         </p:txBody>
@@ -5244,8 +5245,42 @@
         </p:nvSpPr>
         <p:spPr>
           <a:xfrm>
-            <a:off x="640080" y="1737360"/>
-            <a:ext cx="10972800" cy="4617720"/>
+            <a:off x="548640" y="914400"/>
+            <a:ext cx="10972800" cy="320040"/>
+          </a:xfrm>
+          <a:prstGeom prst="rect">
+            <a:avLst/>
+          </a:prstGeom>
+          <a:noFill/>
+        </p:spPr>
+        <p:txBody>
+          <a:bodyPr wrap="square">
+            <a:spAutoFit/>
+          </a:bodyPr>
+          <a:lstStyle/>
+          <a:p>
+            <a:r>
+              <a:rPr sz="1300" b="0" i="1">
+                <a:solidFill>
+                  <a:srgbClr val="2E869A"/>
+                </a:solidFill>
+                <a:latin typeface="Calibri"/>
+              </a:rPr>
+              <a:t>Nine sourced missions closed the document holes</a:t>
+            </a:r>
+          </a:p>
+        </p:txBody>
+      </p:sp>
+      <p:sp>
+        <p:nvSpPr>
+          <p:cNvPr id="5" name="TextBox 4"/>
+          <p:cNvSpPr txBox="1"/>
+          <p:nvPr/>
+        </p:nvSpPr>
+        <p:spPr>
+          <a:xfrm>
+            <a:off x="640080" y="1600200"/>
+            <a:ext cx="10972800" cy="4754880"/>
           </a:xfrm>
           <a:prstGeom prst="rect">
             <a:avLst/>
@@ -5263,26 +5298,26 @@
                 <a:spcPts val="200"/>
               </a:spcBef>
               <a:spcAft>
-                <a:spcPts val="1800"/>
+                <a:spcPts val="1200"/>
               </a:spcAft>
             </a:pPr>
             <a:r>
-              <a:rPr sz="1800" b="1" i="0">
-                <a:solidFill>
-                  <a:srgbClr val="2E869A"/>
-                </a:solidFill>
-                <a:latin typeface="Calibri"/>
-              </a:rPr>
-              <a:t>Q-A  </a:t>
-            </a:r>
-            <a:r>
-              <a:rPr sz="1800" b="0" i="0">
+              <a:rPr sz="1450" b="1" i="0">
+                <a:solidFill>
+                  <a:srgbClr val="2E7D32"/>
+                </a:solidFill>
+                <a:latin typeface="Calibri"/>
+              </a:rPr>
+              <a:t>Now grounded by a real mission:  </a:t>
+            </a:r>
+            <a:r>
+              <a:rPr sz="1450" b="0" i="0">
                 <a:solidFill>
                   <a:srgbClr val="333333"/>
                 </a:solidFill>
                 <a:latin typeface="Calibri"/>
               </a:rPr>
-              <a:t>UAV/robot typing: a role on the existing Platform tree, or a parallel Robot tree?</a:t>
+              <a:t>explainability (Agrawal DroneResponse), CBRN (UGV-CBRN), EW (UAV emitter geolocation), persistence (MDARS) - all previously asserted-but-untested.</a:t>
             </a:r>
           </a:p>
           <a:p>
@@ -5291,26 +5326,26 @@
                 <a:spcPts val="200"/>
               </a:spcBef>
               <a:spcAft>
-                <a:spcPts val="1800"/>
+                <a:spcPts val="1200"/>
               </a:spcAft>
             </a:pPr>
             <a:r>
-              <a:rPr sz="1800" b="1" i="0">
+              <a:rPr sz="1450" b="1" i="0">
                 <a:solidFill>
                   <a:srgbClr val="2E869A"/>
                 </a:solidFill>
                 <a:latin typeface="Calibri"/>
               </a:rPr>
-              <a:t>Q-B  </a:t>
-            </a:r>
-            <a:r>
-              <a:rPr sz="1800" b="0" i="0">
+              <a:t>Prior art, not invention (Q-Q):  </a:t>
+            </a:r>
+            <a:r>
+              <a:rPr sz="1450" b="0" i="0">
                 <a:solidFill>
                   <a:srgbClr val="333333"/>
                 </a:solidFill>
                 <a:latin typeface="Calibri"/>
               </a:rPr>
-              <a:t>Swarm: derive from CollectiveEntity (ActorEntity) so it can be tasked.</a:t>
+              <a:t>the measurement report flagged as missing already existed in C2SIM's BML lineage - WhoMeasuredType {value, unit, phenomenon, sensor, time, place}. Re-adopt it.</a:t>
             </a:r>
           </a:p>
           <a:p>
@@ -5319,26 +5354,26 @@
                 <a:spcPts val="200"/>
               </a:spcBef>
               <a:spcAft>
-                <a:spcPts val="1800"/>
+                <a:spcPts val="1200"/>
               </a:spcAft>
             </a:pPr>
             <a:r>
-              <a:rPr sz="1800" b="1" i="0">
-                <a:solidFill>
-                  <a:srgbClr val="2E869A"/>
-                </a:solidFill>
-                <a:latin typeface="Calibri"/>
-              </a:rPr>
-              <a:t>Q-C  </a:t>
-            </a:r>
-            <a:r>
-              <a:rPr sz="1800" b="0" i="0">
+              <a:rPr sz="1450" b="1" i="0">
+                <a:solidFill>
+                  <a:srgbClr val="C87F0A"/>
+                </a:solidFill>
+                <a:latin typeface="Calibri"/>
+              </a:rPr>
+              <a:t>Concrete schemas:  </a:t>
+            </a:r>
+            <a:r>
+              <a:rPr sz="1450" b="0" i="0">
                 <a:solidFill>
                   <a:srgbClr val="333333"/>
                 </a:solidFill>
                 <a:latin typeface="Calibri"/>
               </a:rPr>
-              <a:t>Sensor: entity, class, or attribute - choose one model and apply it everywhere.</a:t>
+              <a:t>explanation report {event, action, reasoning, confidence} (Q-H); area map w/ per-cell value+variance (Q-M/Q-Q); on-the-loop verbs configure/suspend/ack/override (Q-K).</a:t>
             </a:r>
           </a:p>
           <a:p>
@@ -5347,33 +5382,24 @@
                 <a:spcPts val="200"/>
               </a:spcBef>
               <a:spcAft>
-                <a:spcPts val="1800"/>
+                <a:spcPts val="1200"/>
               </a:spcAft>
             </a:pPr>
             <a:r>
-              <a:rPr sz="1800" b="1" i="0">
-                <a:solidFill>
-                  <a:srgbClr val="2E869A"/>
-                </a:solidFill>
-                <a:latin typeface="Calibri"/>
-              </a:rPr>
-              <a:t>Q-D  </a:t>
-            </a:r>
-            <a:r>
-              <a:rPr sz="1800" b="0" i="0">
-                <a:solidFill>
-                  <a:srgbClr val="333333"/>
-                </a:solidFill>
-                <a:latin typeface="Calibri"/>
-              </a:rPr>
-              <a:t>Autonomy: choose one normative vocabulary.</a:t>
-            </a:r>
-          </a:p>
-        </p:txBody>
-      </p:sp>
-      <p:sp>
-        <p:nvSpPr>
-          <p:cNvPr id="5" name="TextBox 4"/>
+              <a:rPr sz="1450" b="0" i="0">
+                <a:solidFill>
+                  <a:srgbClr val="666666"/>
+                </a:solidFill>
+                <a:latin typeface="Calibri"/>
+              </a:rPr>
+              <a:t>New: capability self-report (G13/Q-V) and collective-task decomposition + report aggregation (Z1), from BML MUM-T tasking.</a:t>
+            </a:r>
+          </a:p>
+        </p:txBody>
+      </p:sp>
+      <p:sp>
+        <p:nvSpPr>
+          <p:cNvPr id="6" name="TextBox 5"/>
           <p:cNvSpPr txBox="1"/>
           <p:nvPr/>
         </p:nvSpPr>
@@ -5407,7 +5433,7 @@
       </p:sp>
       <p:sp>
         <p:nvSpPr>
-          <p:cNvPr id="6" name="TextBox 5"/>
+          <p:cNvPr id="7" name="TextBox 6"/>
           <p:cNvSpPr txBox="1"/>
           <p:nvPr/>
         </p:nvSpPr>
@@ -5530,7 +5556,7 @@
                 </a:solidFill>
                 <a:latin typeface="Calibri"/>
               </a:rPr>
-              <a:t>Decisions (2/3): new content types needed</a:t>
+              <a:t>Decisions (1/2): model structure</a:t>
             </a:r>
           </a:p>
         </p:txBody>
@@ -5543,8 +5569,8 @@
         </p:nvSpPr>
         <p:spPr>
           <a:xfrm>
-            <a:off x="640080" y="1463040"/>
-            <a:ext cx="10972800" cy="4754880"/>
+            <a:off x="640080" y="1737360"/>
+            <a:ext cx="10972800" cy="4617720"/>
           </a:xfrm>
           <a:prstGeom prst="rect">
             <a:avLst/>
@@ -5562,26 +5588,26 @@
                 <a:spcPts val="200"/>
               </a:spcBef>
               <a:spcAft>
-                <a:spcPts val="800"/>
+                <a:spcPts val="1800"/>
               </a:spcAft>
             </a:pPr>
             <a:r>
-              <a:rPr sz="1350" b="1" i="0">
+              <a:rPr sz="1800" b="1" i="0">
                 <a:solidFill>
                   <a:srgbClr val="2E869A"/>
                 </a:solidFill>
                 <a:latin typeface="Calibri"/>
               </a:rPr>
-              <a:t>Q-E  </a:t>
-            </a:r>
-            <a:r>
-              <a:rPr sz="1350" b="0" i="0">
+              <a:t>Q-A  </a:t>
+            </a:r>
+            <a:r>
+              <a:rPr sz="1800" b="0" i="0">
                 <a:solidFill>
                   <a:srgbClr val="333333"/>
                 </a:solidFill>
                 <a:latin typeface="Calibri"/>
               </a:rPr>
-              <a:t>Inline entity definition for newly-observed entities in reports.</a:t>
+              <a:t>UAV/robot typing: a role on the existing Platform tree, or a parallel Robot tree?</a:t>
             </a:r>
           </a:p>
           <a:p>
@@ -5590,26 +5616,26 @@
                 <a:spcPts val="200"/>
               </a:spcBef>
               <a:spcAft>
-                <a:spcPts val="800"/>
+                <a:spcPts val="1800"/>
               </a:spcAft>
             </a:pPr>
             <a:r>
-              <a:rPr sz="1350" b="1" i="0">
+              <a:rPr sz="1800" b="1" i="0">
                 <a:solidFill>
                   <a:srgbClr val="2E869A"/>
                 </a:solidFill>
                 <a:latin typeface="Calibri"/>
               </a:rPr>
-              <a:t>Q-F  </a:t>
-            </a:r>
-            <a:r>
-              <a:rPr sz="1350" b="0" i="0">
+              <a:t>Q-B  </a:t>
+            </a:r>
+            <a:r>
+              <a:rPr sz="1800" b="0" i="0">
                 <a:solidFill>
                   <a:srgbClr val="333333"/>
                 </a:solidFill>
                 <a:latin typeface="Calibri"/>
               </a:rPr>
-              <a:t>MediaReference identity; separate media-format from sensor-modality.</a:t>
+              <a:t>Swarm: derive from CollectiveEntity (ActorEntity) so it can be tasked.</a:t>
             </a:r>
           </a:p>
           <a:p>
@@ -5618,26 +5644,26 @@
                 <a:spcPts val="200"/>
               </a:spcBef>
               <a:spcAft>
-                <a:spcPts val="800"/>
+                <a:spcPts val="1800"/>
               </a:spcAft>
             </a:pPr>
             <a:r>
-              <a:rPr sz="1350" b="1" i="0">
+              <a:rPr sz="1800" b="1" i="0">
                 <a:solidFill>
                   <a:srgbClr val="2E869A"/>
                 </a:solidFill>
                 <a:latin typeface="Calibri"/>
               </a:rPr>
-              <a:t>Q-G  </a:t>
-            </a:r>
-            <a:r>
-              <a:rPr sz="1350" b="0" i="0">
+              <a:t>Q-C  </a:t>
+            </a:r>
+            <a:r>
+              <a:rPr sz="1800" b="0" i="0">
                 <a:solidFill>
                   <a:srgbClr val="333333"/>
                 </a:solidFill>
                 <a:latin typeface="Calibri"/>
               </a:rPr>
-              <a:t>Robot-to-robot coordination content type + issuing authority (CASEVAC).</a:t>
+              <a:t>Sensor: entity, class, or attribute - choose one model and apply it everywhere.</a:t>
             </a:r>
           </a:p>
           <a:p>
@@ -5646,166 +5672,26 @@
                 <a:spcPts val="200"/>
               </a:spcBef>
               <a:spcAft>
-                <a:spcPts val="800"/>
+                <a:spcPts val="1800"/>
               </a:spcAft>
             </a:pPr>
             <a:r>
-              <a:rPr sz="1350" b="1" i="0">
+              <a:rPr sz="1800" b="1" i="0">
                 <a:solidFill>
                   <a:srgbClr val="2E869A"/>
                 </a:solidFill>
                 <a:latin typeface="Calibri"/>
               </a:rPr>
-              <a:t>Q-H  </a:t>
-            </a:r>
-            <a:r>
-              <a:rPr sz="1350" b="0" i="0">
+              <a:t>Q-D  </a:t>
+            </a:r>
+            <a:r>
+              <a:rPr sz="1800" b="0" i="0">
                 <a:solidFill>
                   <a:srgbClr val="333333"/>
                 </a:solidFill>
                 <a:latin typeface="Calibri"/>
               </a:rPr>
-              <a:t>Rationale/explanation ReportContent - report why, not just what (CASEVAC).</a:t>
-            </a:r>
-          </a:p>
-          <a:p>
-            <a:pPr>
-              <a:spcBef>
-                <a:spcPts val="200"/>
-              </a:spcBef>
-              <a:spcAft>
-                <a:spcPts val="800"/>
-              </a:spcAft>
-            </a:pPr>
-            <a:r>
-              <a:rPr sz="1350" b="1" i="0">
-                <a:solidFill>
-                  <a:srgbClr val="2E869A"/>
-                </a:solidFill>
-                <a:latin typeface="Calibri"/>
-              </a:rPr>
-              <a:t>Q-I  </a:t>
-            </a:r>
-            <a:r>
-              <a:rPr sz="1350" b="0" i="0">
-                <a:solidFill>
-                  <a:srgbClr val="333333"/>
-                </a:solidFill>
-                <a:latin typeface="Calibri"/>
-              </a:rPr>
-              <a:t>Media-independent sensor-reading (value+unit+modality) + full SensorType taxonomy.</a:t>
-            </a:r>
-          </a:p>
-          <a:p>
-            <a:pPr>
-              <a:spcBef>
-                <a:spcPts val="200"/>
-              </a:spcBef>
-              <a:spcAft>
-                <a:spcPts val="800"/>
-              </a:spcAft>
-            </a:pPr>
-            <a:r>
-              <a:rPr sz="1350" b="1" i="0">
-                <a:solidFill>
-                  <a:srgbClr val="2E869A"/>
-                </a:solidFill>
-                <a:latin typeface="Calibri"/>
-              </a:rPr>
-              <a:t>Q-J  </a:t>
-            </a:r>
-            <a:r>
-              <a:rPr sz="1350" b="0" i="0">
-                <a:solidFill>
-                  <a:srgbClr val="333333"/>
-                </a:solidFill>
-                <a:latin typeface="Calibri"/>
-              </a:rPr>
-              <a:t>Swarm residuals: network params, leader role, aggregation, member lifecycle.</a:t>
-            </a:r>
-          </a:p>
-          <a:p>
-            <a:pPr>
-              <a:spcBef>
-                <a:spcPts val="200"/>
-              </a:spcBef>
-              <a:spcAft>
-                <a:spcPts val="800"/>
-              </a:spcAft>
-            </a:pPr>
-            <a:r>
-              <a:rPr sz="1350" b="1" i="0">
-                <a:solidFill>
-                  <a:srgbClr val="2E869A"/>
-                </a:solidFill>
-                <a:latin typeface="Calibri"/>
-              </a:rPr>
-              <a:t>Q-K  </a:t>
-            </a:r>
-            <a:r>
-              <a:rPr sz="1350" b="0" i="0">
-                <a:solidFill>
-                  <a:srgbClr val="333333"/>
-                </a:solidFill>
-                <a:latin typeface="Calibri"/>
-              </a:rPr>
-              <a:t>Engagement authority as a function of autonomy level (Fire Support).</a:t>
-            </a:r>
-          </a:p>
-          <a:p>
-            <a:pPr>
-              <a:spcBef>
-                <a:spcPts val="200"/>
-              </a:spcBef>
-              <a:spcAft>
-                <a:spcPts val="800"/>
-              </a:spcAft>
-            </a:pPr>
-            <a:r>
-              <a:rPr sz="1350" b="1" i="0">
-                <a:solidFill>
-                  <a:srgbClr val="2E869A"/>
-                </a:solidFill>
-                <a:latin typeface="Calibri"/>
-              </a:rPr>
-              <a:t>Q-L  </a:t>
-            </a:r>
-            <a:r>
-              <a:rPr sz="1350" b="0" i="0">
-                <a:solidFill>
-                  <a:srgbClr val="333333"/>
-                </a:solidFill>
-                <a:latin typeface="Calibri"/>
-              </a:rPr>
-              <a:t>Task-verb vocabulary (deliver, manipulate, recover) + typed payload/effector/weapon.</a:t>
-            </a:r>
-          </a:p>
-          <a:p>
-            <a:pPr>
-              <a:spcBef>
-                <a:spcPts val="200"/>
-              </a:spcBef>
-              <a:spcAft>
-                <a:spcPts val="800"/>
-              </a:spcAft>
-            </a:pPr>
-            <a:r>
-              <a:rPr sz="1350" b="1" i="0">
-                <a:solidFill>
-                  <a:srgbClr val="2E869A"/>
-                </a:solidFill>
-                <a:latin typeface="Calibri"/>
-              </a:rPr>
-              <a:t>Q-M  </a:t>
-            </a:r>
-            <a:r>
-              <a:rPr sz="1350" b="0" i="0">
-                <a:solidFill>
-                  <a:srgbClr val="333333"/>
-                </a:solidFill>
-                <a:latin typeface="Calibri"/>
-              </a:rPr>
-              <a:t>Let an area be the subject of a task/report (hasAffectedArea + area-state).</a:t>
+              <a:t>Autonomy: choose one normative vocabulary.</a:t>
             </a:r>
           </a:p>
         </p:txBody>
@@ -5969,7 +5855,7 @@
                 </a:solidFill>
                 <a:latin typeface="Calibri"/>
               </a:rPr>
-              <a:t>Decisions (3/3): from the sourced scenarios</a:t>
+              <a:t>Decisions (2/3): new content types needed</a:t>
             </a:r>
           </a:p>
         </p:txBody>
@@ -6011,7 +5897,7 @@
                 </a:solidFill>
                 <a:latin typeface="Calibri"/>
               </a:rPr>
-              <a:t>Q-N  </a:t>
+              <a:t>Q-E  </a:t>
             </a:r>
             <a:r>
               <a:rPr sz="1350" b="0" i="0">
@@ -6020,7 +5906,7 @@
                 </a:solidFill>
                 <a:latin typeface="Calibri"/>
               </a:rPr>
-              <a:t>Explore / Search-Area order with a coverage goal (distinct from Patrol).</a:t>
+              <a:t>Inline entity definition for newly-observed entities in reports.</a:t>
             </a:r>
           </a:p>
           <a:p>
@@ -6039,7 +5925,7 @@
                 </a:solidFill>
                 <a:latin typeface="Calibri"/>
               </a:rPr>
-              <a:t>Q-O  </a:t>
+              <a:t>Q-F  </a:t>
             </a:r>
             <a:r>
               <a:rPr sz="1350" b="0" i="0">
@@ -6048,7 +5934,7 @@
                 </a:solidFill>
                 <a:latin typeface="Calibri"/>
               </a:rPr>
-              <a:t>Denied-comms operating mode + deployable comms-relay entity/behavior.</a:t>
+              <a:t>MediaReference identity; separate media-format from sensor-modality.</a:t>
             </a:r>
           </a:p>
           <a:p>
@@ -6067,7 +5953,7 @@
                 </a:solidFill>
                 <a:latin typeface="Calibri"/>
               </a:rPr>
-              <a:t>Q-P  </a:t>
+              <a:t>Q-G  </a:t>
             </a:r>
             <a:r>
               <a:rPr sz="1350" b="0" i="0">
@@ -6076,7 +5962,7 @@
                 </a:solidFill>
                 <a:latin typeface="Calibri"/>
               </a:rPr>
-              <a:t>Cross-cueing: system-to-system tasking + shared classified track/contact (extends Q-G).</a:t>
+              <a:t>Robot-to-robot coordination content type + issuing authority (CASEVAC).</a:t>
             </a:r>
           </a:p>
           <a:p>
@@ -6095,7 +5981,7 @@
                 </a:solidFill>
                 <a:latin typeface="Calibri"/>
               </a:rPr>
-              <a:t>Q-Q  </a:t>
+              <a:t>Q-H  </a:t>
             </a:r>
             <a:r>
               <a:rPr sz="1350" b="0" i="0">
@@ -6104,7 +5990,7 @@
                 </a:solidFill>
                 <a:latin typeface="Calibri"/>
               </a:rPr>
-              <a:t>One generic Detection Report (confidence + error-bound + false-positive) - resolves the Y-series (extends Q-I).</a:t>
+              <a:t>Rationale/explanation ReportContent - report why, not just what (CASEVAC).</a:t>
             </a:r>
           </a:p>
           <a:p>
@@ -6123,7 +6009,7 @@
                 </a:solidFill>
                 <a:latin typeface="Calibri"/>
               </a:rPr>
-              <a:t>Q-R  </a:t>
+              <a:t>Q-I  </a:t>
             </a:r>
             <a:r>
               <a:rPr sz="1350" b="0" i="0">
@@ -6132,7 +6018,7 @@
                 </a:solidFill>
                 <a:latin typeface="Calibri"/>
               </a:rPr>
-              <a:t>Platform locomotion/role subtypes: wheeled/tracked/legged UGV; detector/neutralizer USV (extends Q-A).</a:t>
+              <a:t>Media-independent sensor-reading (value+unit+modality) + full SensorType taxonomy.</a:t>
             </a:r>
           </a:p>
           <a:p>
@@ -6151,7 +6037,7 @@
                 </a:solidFill>
                 <a:latin typeface="Calibri"/>
               </a:rPr>
-              <a:t>Q-S  </a:t>
+              <a:t>Q-J  </a:t>
             </a:r>
             <a:r>
               <a:rPr sz="1350" b="0" i="0">
@@ -6160,7 +6046,7 @@
                 </a:solidFill>
                 <a:latin typeface="Calibri"/>
               </a:rPr>
-              <a:t>Decoy/deception behavior + threat-aware order annotations.</a:t>
+              <a:t>Swarm residuals: network params, leader role, aggregation, member lifecycle.</a:t>
             </a:r>
           </a:p>
           <a:p>
@@ -6179,7 +6065,7 @@
                 </a:solidFill>
                 <a:latin typeface="Calibri"/>
               </a:rPr>
-              <a:t>Q-T  </a:t>
+              <a:t>Q-K  </a:t>
             </a:r>
             <a:r>
               <a:rPr sz="1350" b="0" i="0">
@@ -6188,7 +6074,7 @@
                 </a:solidFill>
                 <a:latin typeface="Calibri"/>
               </a:rPr>
-              <a:t>Operating-environment condition attributes (GPS-denied, illumination, sea-state, terrain).</a:t>
+              <a:t>Engagement authority as a function of autonomy level (Fire Support).</a:t>
             </a:r>
           </a:p>
           <a:p>
@@ -6207,7 +6093,7 @@
                 </a:solidFill>
                 <a:latin typeface="Calibri"/>
               </a:rPr>
-              <a:t>Q-U  </a:t>
+              <a:t>Q-L  </a:t>
             </a:r>
             <a:r>
               <a:rPr sz="1350" b="0" i="0">
@@ -6216,7 +6102,35 @@
                 </a:solidFill>
                 <a:latin typeface="Calibri"/>
               </a:rPr>
-              <a:t>Formation / relative-geometry construct (orbit, convoy spacing) beyond single RelativeLocation.</a:t>
+              <a:t>Task-verb vocabulary (deliver, manipulate, recover) + typed payload/effector/weapon.</a:t>
+            </a:r>
+          </a:p>
+          <a:p>
+            <a:pPr>
+              <a:spcBef>
+                <a:spcPts val="200"/>
+              </a:spcBef>
+              <a:spcAft>
+                <a:spcPts val="800"/>
+              </a:spcAft>
+            </a:pPr>
+            <a:r>
+              <a:rPr sz="1350" b="1" i="0">
+                <a:solidFill>
+                  <a:srgbClr val="2E869A"/>
+                </a:solidFill>
+                <a:latin typeface="Calibri"/>
+              </a:rPr>
+              <a:t>Q-M  </a:t>
+            </a:r>
+            <a:r>
+              <a:rPr sz="1350" b="0" i="0">
+                <a:solidFill>
+                  <a:srgbClr val="333333"/>
+                </a:solidFill>
+                <a:latin typeface="Calibri"/>
+              </a:rPr>
+              <a:t>Let an area be the subject of a task/report (hasAffectedArea + area-state).</a:t>
             </a:r>
           </a:p>
         </p:txBody>
@@ -6380,7 +6294,7 @@
                 </a:solidFill>
                 <a:latin typeface="Calibri"/>
               </a:rPr>
-              <a:t>Proposed fixes</a:t>
+              <a:t>Decisions (3/3): from the sourced scenarios</a:t>
             </a:r>
           </a:p>
         </p:txBody>
@@ -6393,41 +6307,7 @@
         </p:nvSpPr>
         <p:spPr>
           <a:xfrm>
-            <a:off x="548640" y="914400"/>
-            <a:ext cx="10972800" cy="320040"/>
-          </a:xfrm>
-          <a:prstGeom prst="rect">
-            <a:avLst/>
-          </a:prstGeom>
-          <a:noFill/>
-        </p:spPr>
-        <p:txBody>
-          <a:bodyPr wrap="square">
-            <a:spAutoFit/>
-          </a:bodyPr>
-          <a:lstStyle/>
-          <a:p>
-            <a:r>
-              <a:rPr sz="1300" b="0" i="1">
-                <a:solidFill>
-                  <a:srgbClr val="2E869A"/>
-                </a:solidFill>
-                <a:latin typeface="Calibri"/>
-              </a:rPr>
-              <a:t>Pending group buy-in - nothing applied to the model</a:t>
-            </a:r>
-          </a:p>
-        </p:txBody>
-      </p:sp>
-      <p:sp>
-        <p:nvSpPr>
-          <p:cNvPr id="5" name="TextBox 4"/>
-          <p:cNvSpPr txBox="1"/>
-          <p:nvPr/>
-        </p:nvSpPr>
-        <p:spPr>
-          <a:xfrm>
-            <a:off x="640080" y="1554480"/>
+            <a:off x="640080" y="1417320"/>
             <a:ext cx="10972800" cy="4754880"/>
           </a:xfrm>
           <a:prstGeom prst="rect">
@@ -6446,26 +6326,26 @@
                 <a:spcPts val="200"/>
               </a:spcBef>
               <a:spcAft>
-                <a:spcPts val="1300"/>
+                <a:spcPts val="700"/>
               </a:spcAft>
             </a:pPr>
             <a:r>
-              <a:rPr sz="1400" b="1" i="0">
-                <a:solidFill>
-                  <a:srgbClr val="2E7D32"/>
-                </a:solidFill>
-                <a:latin typeface="Calibri"/>
-              </a:rPr>
-              <a:t>Safe corrections (unambiguous):  </a:t>
-            </a:r>
-            <a:r>
-              <a:rPr sz="1400" b="0" i="0">
+              <a:rPr sz="1300" b="1" i="0">
+                <a:solidFill>
+                  <a:srgbClr val="2E869A"/>
+                </a:solidFill>
+                <a:latin typeface="Calibri"/>
+              </a:rPr>
+              <a:t>Q-N  </a:t>
+            </a:r>
+            <a:r>
+              <a:rPr sz="1300" b="0" i="0">
                 <a:solidFill>
                   <a:srgbClr val="333333"/>
                 </a:solidFill>
                 <a:latin typeface="Calibri"/>
               </a:rPr>
-              <a:t>class typo CollecticeRoboticSystem -&gt; Collective (O1); versionInfo Extrension -&gt; Extension (O2); file CSIM_ASX -&gt; C2SIM_ASX (O3); hasStartTime UUIDBase -&gt; TimeInstant (M7); unify namespace label ASX / C2SIM_ASX (M8).</a:t>
+              <a:t>Explore / Search-Area order with a coverage goal (distinct from Patrol).</a:t>
             </a:r>
           </a:p>
           <a:p>
@@ -6474,26 +6354,26 @@
                 <a:spcPts val="200"/>
               </a:spcBef>
               <a:spcAft>
-                <a:spcPts val="1300"/>
+                <a:spcPts val="700"/>
               </a:spcAft>
             </a:pPr>
             <a:r>
-              <a:rPr sz="1400" b="1" i="0">
-                <a:solidFill>
-                  <a:srgbClr val="C87F0A"/>
-                </a:solidFill>
-                <a:latin typeface="Calibri"/>
-              </a:rPr>
-              <a:t>Structural (decide first):  </a:t>
-            </a:r>
-            <a:r>
-              <a:rPr sz="1400" b="0" i="0">
+              <a:rPr sz="1300" b="1" i="0">
+                <a:solidFill>
+                  <a:srgbClr val="2E869A"/>
+                </a:solidFill>
+                <a:latin typeface="Calibri"/>
+              </a:rPr>
+              <a:t>Q-O  </a:t>
+            </a:r>
+            <a:r>
+              <a:rPr sz="1300" b="0" i="0">
                 <a:solidFill>
                   <a:srgbClr val="333333"/>
                 </a:solidFill>
                 <a:latin typeface="Calibri"/>
               </a:rPr>
-              <a:t>UAV/robot typing (Q-A); Swarm -&gt; CollectiveEntity so it is taskable (Q-B); one sensor model (Q-C); one autonomy vocabulary (Q-D).</a:t>
+              <a:t>Denied-comms operating mode + deployable comms-relay entity/behavior.</a:t>
             </a:r>
           </a:p>
           <a:p>
@@ -6502,26 +6382,26 @@
                 <a:spcPts val="200"/>
               </a:spcBef>
               <a:spcAft>
-                <a:spcPts val="1300"/>
+                <a:spcPts val="700"/>
               </a:spcAft>
             </a:pPr>
             <a:r>
-              <a:rPr sz="1400" b="1" i="0">
+              <a:rPr sz="1300" b="1" i="0">
                 <a:solidFill>
                   <a:srgbClr val="2E869A"/>
                 </a:solidFill>
                 <a:latin typeface="Calibri"/>
               </a:rPr>
-              <a:t>New content (design):  </a:t>
-            </a:r>
-            <a:r>
-              <a:rPr sz="1400" b="0" i="0">
+              <a:t>Q-P  </a:t>
+            </a:r>
+            <a:r>
+              <a:rPr sz="1300" b="0" i="0">
                 <a:solidFill>
                   <a:srgbClr val="333333"/>
                 </a:solidFill>
                 <a:latin typeface="Calibri"/>
               </a:rPr>
-              <a:t>inline entity def (Q-E), MediaReference (Q-F), robot-to-robot + cross-cue (Q-G/Q-P), rationale report (Q-H), generic detection report (Q-I/Q-Q), swarm residuals (Q-J), engagement authority (Q-K), task verbs + payload (Q-L), area subject (Q-M), explore order (Q-N), denied-comms/relay (Q-O), locomotion subtypes (Q-R), decoy/threat-aware (Q-S), environment conditions (Q-T), formation geometry (Q-U).</a:t>
+              <a:t>Cross-cueing: system-to-system tasking + shared classified track/contact (extends Q-G).</a:t>
             </a:r>
           </a:p>
           <a:p>
@@ -6530,24 +6410,173 @@
                 <a:spcPts val="200"/>
               </a:spcBef>
               <a:spcAft>
-                <a:spcPts val="1300"/>
+                <a:spcPts val="700"/>
               </a:spcAft>
             </a:pPr>
             <a:r>
-              <a:rPr sz="1400" b="1" i="0">
+              <a:rPr sz="1300" b="1" i="0">
+                <a:solidFill>
+                  <a:srgbClr val="2E869A"/>
+                </a:solidFill>
+                <a:latin typeface="Calibri"/>
+              </a:rPr>
+              <a:t>Q-Q  </a:t>
+            </a:r>
+            <a:r>
+              <a:rPr sz="1300" b="0" i="0">
                 <a:solidFill>
                   <a:srgbClr val="333333"/>
                 </a:solidFill>
                 <a:latin typeface="Calibri"/>
               </a:rPr>
-              <a:t>Nothing here is applied to the model - all items are proposals for group buy-in.</a:t>
-            </a:r>
-          </a:p>
-        </p:txBody>
-      </p:sp>
-      <p:sp>
-        <p:nvSpPr>
-          <p:cNvPr id="6" name="TextBox 5"/>
+              <a:t>One generic Detection Report (confidence + error-bound + false-positive) - resolves the Y-series (extends Q-I).</a:t>
+            </a:r>
+          </a:p>
+          <a:p>
+            <a:pPr>
+              <a:spcBef>
+                <a:spcPts val="200"/>
+              </a:spcBef>
+              <a:spcAft>
+                <a:spcPts val="700"/>
+              </a:spcAft>
+            </a:pPr>
+            <a:r>
+              <a:rPr sz="1300" b="1" i="0">
+                <a:solidFill>
+                  <a:srgbClr val="2E869A"/>
+                </a:solidFill>
+                <a:latin typeface="Calibri"/>
+              </a:rPr>
+              <a:t>Q-R  </a:t>
+            </a:r>
+            <a:r>
+              <a:rPr sz="1300" b="0" i="0">
+                <a:solidFill>
+                  <a:srgbClr val="333333"/>
+                </a:solidFill>
+                <a:latin typeface="Calibri"/>
+              </a:rPr>
+              <a:t>Platform locomotion/role subtypes: wheeled/tracked/legged UGV; detector/neutralizer USV (extends Q-A).</a:t>
+            </a:r>
+          </a:p>
+          <a:p>
+            <a:pPr>
+              <a:spcBef>
+                <a:spcPts val="200"/>
+              </a:spcBef>
+              <a:spcAft>
+                <a:spcPts val="700"/>
+              </a:spcAft>
+            </a:pPr>
+            <a:r>
+              <a:rPr sz="1300" b="1" i="0">
+                <a:solidFill>
+                  <a:srgbClr val="2E869A"/>
+                </a:solidFill>
+                <a:latin typeface="Calibri"/>
+              </a:rPr>
+              <a:t>Q-S  </a:t>
+            </a:r>
+            <a:r>
+              <a:rPr sz="1300" b="0" i="0">
+                <a:solidFill>
+                  <a:srgbClr val="333333"/>
+                </a:solidFill>
+                <a:latin typeface="Calibri"/>
+              </a:rPr>
+              <a:t>Decoy/deception behavior + threat-aware order annotations.</a:t>
+            </a:r>
+          </a:p>
+          <a:p>
+            <a:pPr>
+              <a:spcBef>
+                <a:spcPts val="200"/>
+              </a:spcBef>
+              <a:spcAft>
+                <a:spcPts val="700"/>
+              </a:spcAft>
+            </a:pPr>
+            <a:r>
+              <a:rPr sz="1300" b="1" i="0">
+                <a:solidFill>
+                  <a:srgbClr val="2E869A"/>
+                </a:solidFill>
+                <a:latin typeface="Calibri"/>
+              </a:rPr>
+              <a:t>Q-T  </a:t>
+            </a:r>
+            <a:r>
+              <a:rPr sz="1300" b="0" i="0">
+                <a:solidFill>
+                  <a:srgbClr val="333333"/>
+                </a:solidFill>
+                <a:latin typeface="Calibri"/>
+              </a:rPr>
+              <a:t>Operating-environment condition attributes (GPS-denied, illumination, sea-state, terrain).</a:t>
+            </a:r>
+          </a:p>
+          <a:p>
+            <a:pPr>
+              <a:spcBef>
+                <a:spcPts val="200"/>
+              </a:spcBef>
+              <a:spcAft>
+                <a:spcPts val="700"/>
+              </a:spcAft>
+            </a:pPr>
+            <a:r>
+              <a:rPr sz="1300" b="1" i="0">
+                <a:solidFill>
+                  <a:srgbClr val="2E869A"/>
+                </a:solidFill>
+                <a:latin typeface="Calibri"/>
+              </a:rPr>
+              <a:t>Q-U  </a:t>
+            </a:r>
+            <a:r>
+              <a:rPr sz="1300" b="0" i="0">
+                <a:solidFill>
+                  <a:srgbClr val="333333"/>
+                </a:solidFill>
+                <a:latin typeface="Calibri"/>
+              </a:rPr>
+              <a:t>Formation / relative-geometry construct (orbit, convoy spacing) beyond single RelativeLocation.</a:t>
+            </a:r>
+          </a:p>
+          <a:p>
+            <a:pPr>
+              <a:spcBef>
+                <a:spcPts val="200"/>
+              </a:spcBef>
+              <a:spcAft>
+                <a:spcPts val="700"/>
+              </a:spcAft>
+            </a:pPr>
+            <a:r>
+              <a:rPr sz="1300" b="1" i="0">
+                <a:solidFill>
+                  <a:srgbClr val="2E869A"/>
+                </a:solidFill>
+                <a:latin typeface="Calibri"/>
+              </a:rPr>
+              <a:t>Q-V  </a:t>
+            </a:r>
+            <a:r>
+              <a:rPr sz="1300" b="0" i="0">
+                <a:solidFill>
+                  <a:srgbClr val="333333"/>
+                </a:solidFill>
+                <a:latin typeface="Calibri"/>
+              </a:rPr>
+              <a:t>Capability self-report (robot declares mounted equipment; assign by capability) - BML WhoHoldingType.</a:t>
+            </a:r>
+          </a:p>
+        </p:txBody>
+      </p:sp>
+      <p:sp>
+        <p:nvSpPr>
+          <p:cNvPr id="5" name="TextBox 4"/>
           <p:cNvSpPr txBox="1"/>
           <p:nvPr/>
         </p:nvSpPr>
@@ -6581,7 +6610,7 @@
       </p:sp>
       <p:sp>
         <p:nvSpPr>
-          <p:cNvPr id="7" name="TextBox 6"/>
+          <p:cNvPr id="6" name="TextBox 5"/>
           <p:cNvSpPr txBox="1"/>
           <p:nvPr/>
         </p:nvSpPr>
@@ -6704,7 +6733,7 @@
                 </a:solidFill>
                 <a:latin typeface="Calibri"/>
               </a:rPr>
-              <a:t>Recommended next steps</a:t>
+              <a:t>Proposed fixes</a:t>
             </a:r>
           </a:p>
         </p:txBody>
@@ -6717,8 +6746,42 @@
         </p:nvSpPr>
         <p:spPr>
           <a:xfrm>
-            <a:off x="640080" y="1645920"/>
-            <a:ext cx="10972800" cy="4709160"/>
+            <a:off x="548640" y="914400"/>
+            <a:ext cx="10972800" cy="320040"/>
+          </a:xfrm>
+          <a:prstGeom prst="rect">
+            <a:avLst/>
+          </a:prstGeom>
+          <a:noFill/>
+        </p:spPr>
+        <p:txBody>
+          <a:bodyPr wrap="square">
+            <a:spAutoFit/>
+          </a:bodyPr>
+          <a:lstStyle/>
+          <a:p>
+            <a:r>
+              <a:rPr sz="1300" b="0" i="1">
+                <a:solidFill>
+                  <a:srgbClr val="2E869A"/>
+                </a:solidFill>
+                <a:latin typeface="Calibri"/>
+              </a:rPr>
+              <a:t>Pending group buy-in - nothing applied to the model</a:t>
+            </a:r>
+          </a:p>
+        </p:txBody>
+      </p:sp>
+      <p:sp>
+        <p:nvSpPr>
+          <p:cNvPr id="5" name="TextBox 4"/>
+          <p:cNvSpPr txBox="1"/>
+          <p:nvPr/>
+        </p:nvSpPr>
+        <p:spPr>
+          <a:xfrm>
+            <a:off x="640080" y="1554480"/>
+            <a:ext cx="10972800" cy="4754880"/>
           </a:xfrm>
           <a:prstGeom prst="rect">
             <a:avLst/>
@@ -6736,17 +6799,26 @@
                 <a:spcPts val="200"/>
               </a:spcBef>
               <a:spcAft>
-                <a:spcPts val="1200"/>
+                <a:spcPts val="1300"/>
               </a:spcAft>
             </a:pPr>
             <a:r>
-              <a:rPr sz="1650" b="1" i="0">
+              <a:rPr sz="1400" b="1" i="0">
+                <a:solidFill>
+                  <a:srgbClr val="2E7D32"/>
+                </a:solidFill>
+                <a:latin typeface="Calibri"/>
+              </a:rPr>
+              <a:t>Safe corrections (unambiguous):  </a:t>
+            </a:r>
+            <a:r>
+              <a:rPr sz="1400" b="0" i="0">
                 <a:solidFill>
                   <a:srgbClr val="333333"/>
                 </a:solidFill>
                 <a:latin typeface="Calibri"/>
               </a:rPr>
-              <a:t>Settle the two entity-typing decisions (Q-A, Q-B) - this unblocks Initialization.</a:t>
+              <a:t>class typo CollecticeRoboticSystem -&gt; Collective (O1); versionInfo Extrension -&gt; Extension (O2); file CSIM_ASX -&gt; C2SIM_ASX (O3); hasStartTime UUIDBase -&gt; TimeInstant (M7); unify namespace label ASX / C2SIM_ASX (M8).</a:t>
             </a:r>
           </a:p>
           <a:p>
@@ -6755,17 +6827,26 @@
                 <a:spcPts val="200"/>
               </a:spcBef>
               <a:spcAft>
-                <a:spcPts val="1200"/>
+                <a:spcPts val="1300"/>
               </a:spcAft>
             </a:pPr>
             <a:r>
-              <a:rPr sz="1650" b="0" i="0">
+              <a:rPr sz="1400" b="1" i="0">
+                <a:solidFill>
+                  <a:srgbClr val="C87F0A"/>
+                </a:solidFill>
+                <a:latin typeface="Calibri"/>
+              </a:rPr>
+              <a:t>Structural (decide first):  </a:t>
+            </a:r>
+            <a:r>
+              <a:rPr sz="1400" b="0" i="0">
                 <a:solidFill>
                   <a:srgbClr val="333333"/>
                 </a:solidFill>
                 <a:latin typeface="Calibri"/>
               </a:rPr>
-              <a:t>Complete the Initialization instantiations (drafts provided for the 3 named scenarios).</a:t>
+              <a:t>UAV/robot typing (Q-A); Swarm -&gt; CollectiveEntity so it is taskable (Q-B); one sensor model (Q-C); one autonomy vocabulary (Q-D).</a:t>
             </a:r>
           </a:p>
           <a:p>
@@ -6774,17 +6855,26 @@
                 <a:spcPts val="200"/>
               </a:spcBef>
               <a:spcAft>
-                <a:spcPts val="1200"/>
+                <a:spcPts val="1300"/>
               </a:spcAft>
             </a:pPr>
             <a:r>
-              <a:rPr sz="1650" b="0" i="0">
+              <a:rPr sz="1400" b="1" i="0">
+                <a:solidFill>
+                  <a:srgbClr val="2E869A"/>
+                </a:solidFill>
+                <a:latin typeface="Calibri"/>
+              </a:rPr>
+              <a:t>New content (design):  </a:t>
+            </a:r>
+            <a:r>
+              <a:rPr sz="1400" b="0" i="0">
                 <a:solidFill>
                   <a:srgbClr val="333333"/>
                 </a:solidFill>
                 <a:latin typeface="Calibri"/>
               </a:rPr>
-              <a:t>Add the two CASEVAC content types (Q-G robot-to-robot, Q-H rationale) - both are explicit scenario requirements.</a:t>
+              <a:t>inline entity def (Q-E), MediaReference (Q-F), robot-to-robot + cross-cue (Q-G/Q-P), rationale report (Q-H), generic detection report (Q-I/Q-Q), swarm residuals (Q-J), engagement authority (Q-K), task verbs + payload (Q-L), area subject (Q-M), explore order (Q-N), denied-comms/relay (Q-O), locomotion subtypes (Q-R), decoy/threat-aware (Q-S), environment conditions (Q-T), formation geometry (Q-U).</a:t>
             </a:r>
           </a:p>
           <a:p>
@@ -6793,43 +6883,24 @@
                 <a:spcPts val="200"/>
               </a:spcBef>
               <a:spcAft>
-                <a:spcPts val="1200"/>
+                <a:spcPts val="1300"/>
               </a:spcAft>
             </a:pPr>
             <a:r>
-              <a:rPr sz="1650" b="0" i="0">
+              <a:rPr sz="1400" b="1" i="0">
                 <a:solidFill>
                   <a:srgbClr val="333333"/>
                 </a:solidFill>
                 <a:latin typeface="Calibri"/>
               </a:rPr>
-              <a:t>Reconcile the OWL model with the June spreadsheet decisions; fix the typos.</a:t>
-            </a:r>
-          </a:p>
-          <a:p>
-            <a:pPr>
-              <a:spcBef>
-                <a:spcPts val="200"/>
-              </a:spcBef>
-              <a:spcAft>
-                <a:spcPts val="1200"/>
-              </a:spcAft>
-            </a:pPr>
-            <a:r>
-              <a:rPr sz="1650" b="0" i="0">
-                <a:solidFill>
-                  <a:srgbClr val="333333"/>
-                </a:solidFill>
-                <a:latin typeface="Calibri"/>
-              </a:rPr>
-              <a:t>Optional: adopt the diff-able (.xml) workbooks so edits can be reviewed and merged in git.</a:t>
-            </a:r>
-          </a:p>
-        </p:txBody>
-      </p:sp>
-      <p:sp>
-        <p:nvSpPr>
-          <p:cNvPr id="5" name="TextBox 4"/>
+              <a:t>Nothing here is applied to the model - all items are proposals for group buy-in.</a:t>
+            </a:r>
+          </a:p>
+        </p:txBody>
+      </p:sp>
+      <p:sp>
+        <p:nvSpPr>
+          <p:cNvPr id="6" name="TextBox 5"/>
           <p:cNvSpPr txBox="1"/>
           <p:nvPr/>
         </p:nvSpPr>
@@ -6863,7 +6934,7 @@
       </p:sp>
       <p:sp>
         <p:nvSpPr>
-          <p:cNvPr id="6" name="TextBox 5"/>
+          <p:cNvPr id="7" name="TextBox 6"/>
           <p:cNvSpPr txBox="1"/>
           <p:nvPr/>
         </p:nvSpPr>
@@ -7189,6 +7260,288 @@
                 <a:latin typeface="Calibri"/>
               </a:rPr>
               <a:t>2</a:t>
+            </a:r>
+          </a:p>
+        </p:txBody>
+      </p:sp>
+    </p:spTree>
+  </p:cSld>
+  <p:clrMapOvr>
+    <a:masterClrMapping/>
+  </p:clrMapOvr>
+</p:sld>
+</file>
+
+<file path=ppt/slides/slide20.xml><?xml version="1.0" encoding="utf-8"?>
+<p:sld xmlns:a="http://schemas.openxmlformats.org/drawingml/2006/main" xmlns:p="http://schemas.openxmlformats.org/presentationml/2006/main" xmlns:r="http://schemas.openxmlformats.org/officeDocument/2006/relationships">
+  <p:cSld>
+    <p:spTree>
+      <p:nvGrpSpPr>
+        <p:cNvPr id="1" name=""/>
+        <p:cNvGrpSpPr/>
+        <p:nvPr/>
+      </p:nvGrpSpPr>
+      <p:grpSpPr/>
+      <p:sp>
+        <p:nvSpPr>
+          <p:cNvPr id="2" name="Rectangle 1"/>
+          <p:cNvSpPr/>
+          <p:nvPr/>
+        </p:nvSpPr>
+        <p:spPr>
+          <a:xfrm>
+            <a:off x="548640" y="1170432"/>
+            <a:ext cx="2011680" cy="38100"/>
+          </a:xfrm>
+          <a:prstGeom prst="rect">
+            <a:avLst/>
+          </a:prstGeom>
+          <a:solidFill>
+            <a:srgbClr val="2E869A"/>
+          </a:solidFill>
+          <a:ln>
+            <a:noFill/>
+          </a:ln>
+        </p:spPr>
+        <p:style>
+          <a:lnRef idx="1">
+            <a:schemeClr val="accent1"/>
+          </a:lnRef>
+          <a:fillRef idx="3">
+            <a:schemeClr val="accent1"/>
+          </a:fillRef>
+          <a:effectRef idx="2">
+            <a:schemeClr val="accent1"/>
+          </a:effectRef>
+          <a:fontRef idx="minor">
+            <a:schemeClr val="lt1"/>
+          </a:fontRef>
+        </p:style>
+        <p:txBody>
+          <a:bodyPr rtlCol="0" anchor="ctr"/>
+          <a:lstStyle/>
+          <a:p>
+            <a:pPr algn="ctr"/>
+          </a:p>
+        </p:txBody>
+      </p:sp>
+      <p:sp>
+        <p:nvSpPr>
+          <p:cNvPr id="3" name="TextBox 2"/>
+          <p:cNvSpPr txBox="1"/>
+          <p:nvPr/>
+        </p:nvSpPr>
+        <p:spPr>
+          <a:xfrm>
+            <a:off x="502920" y="411480"/>
+            <a:ext cx="11155680" cy="822960"/>
+          </a:xfrm>
+          <a:prstGeom prst="rect">
+            <a:avLst/>
+          </a:prstGeom>
+          <a:noFill/>
+        </p:spPr>
+        <p:txBody>
+          <a:bodyPr wrap="square">
+            <a:spAutoFit/>
+          </a:bodyPr>
+          <a:lstStyle/>
+          <a:p>
+            <a:r>
+              <a:rPr sz="3000" b="1" i="0">
+                <a:solidFill>
+                  <a:srgbClr val="1F3A5F"/>
+                </a:solidFill>
+                <a:latin typeface="Calibri"/>
+              </a:rPr>
+              <a:t>Recommended next steps</a:t>
+            </a:r>
+          </a:p>
+        </p:txBody>
+      </p:sp>
+      <p:sp>
+        <p:nvSpPr>
+          <p:cNvPr id="4" name="TextBox 3"/>
+          <p:cNvSpPr txBox="1"/>
+          <p:nvPr/>
+        </p:nvSpPr>
+        <p:spPr>
+          <a:xfrm>
+            <a:off x="640080" y="1645920"/>
+            <a:ext cx="10972800" cy="4709160"/>
+          </a:xfrm>
+          <a:prstGeom prst="rect">
+            <a:avLst/>
+          </a:prstGeom>
+          <a:noFill/>
+        </p:spPr>
+        <p:txBody>
+          <a:bodyPr wrap="square">
+            <a:spAutoFit/>
+          </a:bodyPr>
+          <a:lstStyle/>
+          <a:p>
+            <a:pPr>
+              <a:spcBef>
+                <a:spcPts val="200"/>
+              </a:spcBef>
+              <a:spcAft>
+                <a:spcPts val="1200"/>
+              </a:spcAft>
+            </a:pPr>
+            <a:r>
+              <a:rPr sz="1650" b="1" i="0">
+                <a:solidFill>
+                  <a:srgbClr val="333333"/>
+                </a:solidFill>
+                <a:latin typeface="Calibri"/>
+              </a:rPr>
+              <a:t>Settle the two entity-typing decisions (Q-A, Q-B) - this unblocks Initialization.</a:t>
+            </a:r>
+          </a:p>
+          <a:p>
+            <a:pPr>
+              <a:spcBef>
+                <a:spcPts val="200"/>
+              </a:spcBef>
+              <a:spcAft>
+                <a:spcPts val="1200"/>
+              </a:spcAft>
+            </a:pPr>
+            <a:r>
+              <a:rPr sz="1650" b="0" i="0">
+                <a:solidFill>
+                  <a:srgbClr val="333333"/>
+                </a:solidFill>
+                <a:latin typeface="Calibri"/>
+              </a:rPr>
+              <a:t>Complete the Initialization instantiations (drafts provided for the 3 named scenarios).</a:t>
+            </a:r>
+          </a:p>
+          <a:p>
+            <a:pPr>
+              <a:spcBef>
+                <a:spcPts val="200"/>
+              </a:spcBef>
+              <a:spcAft>
+                <a:spcPts val="1200"/>
+              </a:spcAft>
+            </a:pPr>
+            <a:r>
+              <a:rPr sz="1650" b="0" i="0">
+                <a:solidFill>
+                  <a:srgbClr val="333333"/>
+                </a:solidFill>
+                <a:latin typeface="Calibri"/>
+              </a:rPr>
+              <a:t>Add the two CASEVAC content types (Q-G robot-to-robot, Q-H rationale) - both are explicit scenario requirements.</a:t>
+            </a:r>
+          </a:p>
+          <a:p>
+            <a:pPr>
+              <a:spcBef>
+                <a:spcPts val="200"/>
+              </a:spcBef>
+              <a:spcAft>
+                <a:spcPts val="1200"/>
+              </a:spcAft>
+            </a:pPr>
+            <a:r>
+              <a:rPr sz="1650" b="0" i="0">
+                <a:solidFill>
+                  <a:srgbClr val="333333"/>
+                </a:solidFill>
+                <a:latin typeface="Calibri"/>
+              </a:rPr>
+              <a:t>Reconcile the OWL model with the June spreadsheet decisions; fix the typos.</a:t>
+            </a:r>
+          </a:p>
+          <a:p>
+            <a:pPr>
+              <a:spcBef>
+                <a:spcPts val="200"/>
+              </a:spcBef>
+              <a:spcAft>
+                <a:spcPts val="1200"/>
+              </a:spcAft>
+            </a:pPr>
+            <a:r>
+              <a:rPr sz="1650" b="0" i="0">
+                <a:solidFill>
+                  <a:srgbClr val="333333"/>
+                </a:solidFill>
+                <a:latin typeface="Calibri"/>
+              </a:rPr>
+              <a:t>Optional: adopt the diff-able (.xml) workbooks so edits can be reviewed and merged in git.</a:t>
+            </a:r>
+          </a:p>
+        </p:txBody>
+      </p:sp>
+      <p:sp>
+        <p:nvSpPr>
+          <p:cNvPr id="5" name="TextBox 4"/>
+          <p:cNvSpPr txBox="1"/>
+          <p:nvPr/>
+        </p:nvSpPr>
+        <p:spPr>
+          <a:xfrm>
+            <a:off x="502920" y="6419088"/>
+            <a:ext cx="11155680" cy="320040"/>
+          </a:xfrm>
+          <a:prstGeom prst="rect">
+            <a:avLst/>
+          </a:prstGeom>
+          <a:noFill/>
+        </p:spPr>
+        <p:txBody>
+          <a:bodyPr wrap="square">
+            <a:spAutoFit/>
+          </a:bodyPr>
+          <a:lstStyle/>
+          <a:p>
+            <a:r>
+              <a:rPr sz="900" b="0" i="0">
+                <a:solidFill>
+                  <a:srgbClr val="666666"/>
+                </a:solidFill>
+                <a:latin typeface="Calibri"/>
+              </a:rPr>
+              <a:t>C2SIM ASX Sub-group   |   Hyssos   |   July 2026</a:t>
+            </a:r>
+          </a:p>
+        </p:txBody>
+      </p:sp>
+      <p:sp>
+        <p:nvSpPr>
+          <p:cNvPr id="6" name="TextBox 5"/>
+          <p:cNvSpPr txBox="1"/>
+          <p:nvPr/>
+        </p:nvSpPr>
+        <p:spPr>
+          <a:xfrm>
+            <a:off x="11338560" y="6419088"/>
+            <a:ext cx="640080" cy="320040"/>
+          </a:xfrm>
+          <a:prstGeom prst="rect">
+            <a:avLst/>
+          </a:prstGeom>
+          <a:noFill/>
+        </p:spPr>
+        <p:txBody>
+          <a:bodyPr wrap="square">
+            <a:spAutoFit/>
+          </a:bodyPr>
+          <a:lstStyle/>
+          <a:p>
+            <a:pPr algn="r"/>
+            <a:r>
+              <a:rPr sz="900" b="0" i="0">
+                <a:solidFill>
+                  <a:srgbClr val="666666"/>
+                </a:solidFill>
+                <a:latin typeface="Calibri"/>
+              </a:rPr>
+              <a:t>20</a:t>
             </a:r>
           </a:p>
         </p:txBody>

--- a/Subgroups/ASX/InstantiationReview/ASX-Instantiation-Findings.pptx
+++ b/Subgroups/ASX/InstantiationReview/ASX-Instantiation-Findings.pptx
@@ -3484,7 +3484,7 @@
                 </a:solidFill>
                 <a:latin typeface="Calibri"/>
               </a:rPr>
-              <a:t>Task/effect scenarios: engagement, delivery, manipulation, rescue walked - the gap is consistent (task verbs + payload/effector typing).</a:t>
+              <a:t>Task/effect scenarios: engagement, delivery, manipulation, rescue walked - the gap is mainly payload/effector/weapon typing (most task verbs already exist in LOX).</a:t>
             </a:r>
           </a:p>
           <a:p>
@@ -4277,7 +4277,7 @@
                 </a:solidFill>
                 <a:latin typeface="Calibri"/>
               </a:rPr>
-              <a:t>rules of engagement (RuleOfEngagement, WeaponROECode - LOX), order authorization (AuthorizationHeader), desired effect (DesiredEffectCode), target (hasAffectedEntity).</a:t>
+              <a:t>rules of engagement (RuleOfEngagement, WeaponRuleOfEngagementCode - LOX), order authorization (AuthorizationHeader), desired effect (DesiredEffectCode), target (hasAffectedEntity), and the engage/attack verbs (lox#ENGAGE / lox#ATTACK).</a:t>
             </a:r>
           </a:p>
           <a:p>
@@ -4497,7 +4497,7 @@
                 </a:solidFill>
                 <a:latin typeface="Calibri"/>
               </a:rPr>
-              <a:t>The task/effect axis distills to two gaps</a:t>
+              <a:t>The task/effect axis is mostly already there</a:t>
             </a:r>
           </a:p>
         </p:txBody>
@@ -4531,7 +4531,7 @@
                 </a:solidFill>
                 <a:latin typeface="Calibri"/>
               </a:rPr>
-              <a:t>Across engagement, delivery, manipulation, rescue</a:t>
+              <a:t>Across engagement, delivery, manipulation, rescue, search</a:t>
             </a:r>
           </a:p>
         </p:txBody>
@@ -4545,6 +4545,59 @@
         <p:spPr>
           <a:xfrm>
             <a:off x="731520" y="1828800"/>
+            <a:ext cx="5257800" cy="1600200"/>
+          </a:xfrm>
+          <a:prstGeom prst="roundRect">
+            <a:avLst/>
+          </a:prstGeom>
+          <a:solidFill>
+            <a:srgbClr val="2E7D32"/>
+          </a:solidFill>
+          <a:ln>
+            <a:noFill/>
+          </a:ln>
+        </p:spPr>
+        <p:style>
+          <a:lnRef idx="1">
+            <a:schemeClr val="accent1"/>
+          </a:lnRef>
+          <a:fillRef idx="3">
+            <a:schemeClr val="accent1"/>
+          </a:fillRef>
+          <a:effectRef idx="2">
+            <a:schemeClr val="accent1"/>
+          </a:effectRef>
+          <a:fontRef idx="minor">
+            <a:schemeClr val="lt1"/>
+          </a:fontRef>
+        </p:style>
+        <p:txBody>
+          <a:bodyPr rtlCol="0" anchor="ctr" wrap="square"/>
+          <a:lstStyle/>
+          <a:p>
+            <a:pPr algn="ctr"/>
+            <a:r>
+              <a:rPr sz="1300" b="1" i="0">
+                <a:solidFill>
+                  <a:srgbClr val="FFFFFF"/>
+                </a:solidFill>
+                <a:latin typeface="Calibri"/>
+              </a:rPr>
+              <a:t>Action verbs already exist
+LOX has 445 TaskActionCode verbs - ENGAGE, ATTACK, BREACH, CONSTR, CLROBS, MINLAY, TRANS, RESUPL, RESCUE, RECOVR, NTRCOM, ESCRT, RECCE, PATROL. Not a missing-verb problem.</a:t>
+            </a:r>
+          </a:p>
+        </p:txBody>
+      </p:sp>
+      <p:sp>
+        <p:nvSpPr>
+          <p:cNvPr id="6" name="Rounded Rectangle 5"/>
+          <p:cNvSpPr/>
+          <p:nvPr/>
+        </p:nvSpPr>
+        <p:spPr>
+          <a:xfrm>
+            <a:off x="6217920" y="1828800"/>
             <a:ext cx="5257800" cy="1600200"/>
           </a:xfrm>
           <a:prstGeom prst="roundRect">
@@ -4577,66 +4630,13 @@
           <a:p>
             <a:pPr algn="ctr"/>
             <a:r>
-              <a:rPr sz="1400" b="1" i="0">
+              <a:rPr sz="1300" b="1" i="0">
                 <a:solidFill>
                   <a:srgbClr val="FFFFFF"/>
                 </a:solidFill>
                 <a:latin typeface="Calibri"/>
               </a:rPr>
-              <a:t>1.  Task verbs
-No vocabulary for what systems DO: deliver, dig / clear / emplace, recover / rescue (engage uncertain).</a:t>
-            </a:r>
-          </a:p>
-        </p:txBody>
-      </p:sp>
-      <p:sp>
-        <p:nvSpPr>
-          <p:cNvPr id="6" name="Rounded Rectangle 5"/>
-          <p:cNvSpPr/>
-          <p:nvPr/>
-        </p:nvSpPr>
-        <p:spPr>
-          <a:xfrm>
-            <a:off x="6217920" y="1828800"/>
-            <a:ext cx="5257800" cy="1600200"/>
-          </a:xfrm>
-          <a:prstGeom prst="roundRect">
-            <a:avLst/>
-          </a:prstGeom>
-          <a:solidFill>
-            <a:srgbClr val="1F3A5F"/>
-          </a:solidFill>
-          <a:ln>
-            <a:noFill/>
-          </a:ln>
-        </p:spPr>
-        <p:style>
-          <a:lnRef idx="1">
-            <a:schemeClr val="accent1"/>
-          </a:lnRef>
-          <a:fillRef idx="3">
-            <a:schemeClr val="accent1"/>
-          </a:fillRef>
-          <a:effectRef idx="2">
-            <a:schemeClr val="accent1"/>
-          </a:effectRef>
-          <a:fontRef idx="minor">
-            <a:schemeClr val="lt1"/>
-          </a:fontRef>
-        </p:style>
-        <p:txBody>
-          <a:bodyPr rtlCol="0" anchor="ctr" wrap="square"/>
-          <a:lstStyle/>
-          <a:p>
-            <a:pPr algn="ctr"/>
-            <a:r>
-              <a:rPr sz="1400" b="1" i="0">
-                <a:solidFill>
-                  <a:srgbClr val="FFFFFF"/>
-                </a:solidFill>
-                <a:latin typeface="Calibri"/>
-              </a:rPr>
-              <a:t>2.  Payload / effector / weapon typing
+              <a:t>The real gap: payload / effector / weapon typing
 Cargo (L1), manipulator (E2), weapon (W2) are one gap: no typed thing carried or wielded.</a:t>
             </a:r>
           </a:p>
@@ -4679,7 +4679,7 @@
                 </a:solidFill>
                 <a:latin typeface="Calibri"/>
               </a:rPr>
-              <a:t>Already there (checked):  </a:t>
+              <a:t>Also already there (checked):  </a:t>
             </a:r>
             <a:r>
               <a:rPr sz="1400" b="0" i="0">
@@ -4688,7 +4688,7 @@
                 </a:solidFill>
                 <a:latin typeface="Calibri"/>
               </a:rPr>
-              <a:t>effects (DesiredEffectCode), targets (hasAffectedEntity), resources + quantities, ROE, authorization, and platform types (Vehicle / Aircraft / SurfaceVessel).</a:t>
+              <a:t>effects (DesiredEffectCode), targets (hasAffectedEntity), resources + quantities, ROE, authorization, platform types (Vehicle / Aircraft / SurfaceVessel).</a:t>
             </a:r>
           </a:p>
           <a:p>
@@ -4707,7 +4707,7 @@
                 </a:solidFill>
                 <a:latin typeface="Calibri"/>
               </a:rPr>
-              <a:t>Also (N1):  </a:t>
+              <a:t>Small residuals:  </a:t>
             </a:r>
             <a:r>
               <a:rPr sz="1400" b="0" i="0">
@@ -4716,7 +4716,7 @@
                 </a:solidFill>
                 <a:latin typeface="Calibri"/>
               </a:rPr>
-              <a:t>an area cannot be the subject of a task or report - no hasAffectedArea, no area-state (cleared/contaminated). See Q-M.</a:t>
+              <a:t>an area cannot be a task/report subject (N1 / Q-M); an area-coverage exploration goal (G2); a general tow/salvage; a decoy role.</a:t>
             </a:r>
           </a:p>
           <a:p>
@@ -4744,7 +4744,7 @@
                 </a:solidFill>
                 <a:latin typeface="Calibri"/>
               </a:rPr>
-              <a:t>define the task-verb vocabulary and the typed payload / effector / weapon - that is the whole axis.</a:t>
+              <a:t>add the typed payload / effector / weapon - the verbs are already in LOX.</a:t>
             </a:r>
           </a:p>
         </p:txBody>
@@ -5049,7 +5049,7 @@
                 </a:solidFill>
                 <a:latin typeface="Calibri"/>
               </a:rPr>
-              <a:t>Explore/Search-Area order (G2); denied-comms + relay (G1); decoy (G8); maritime cross-cue with a shared track (G3); environment conditions (G11); formation geometry (G12).</a:t>
+              <a:t>area-coverage/exploration goal (G2, search verbs exist); denied-comms + relay (G1); decoy role (G8, deception verbs exist); maritime cross-cue with a shared track (G3); environment conditions (G11); formation geometry (G12).</a:t>
             </a:r>
           </a:p>
           <a:p>
@@ -5068,7 +5068,7 @@
                 </a:solidFill>
                 <a:latin typeface="Calibri"/>
               </a:rPr>
-              <a:t>Neutral-actor framing is mostly covered (NeutralSide exists). Still un-extracted: counter-UAS swarm, human-machine teaming, SAR.</a:t>
+              <a:t>Neutral-actor framing is mostly covered (NeutralSide affiliation individual + smx#ANT hostility value). Counter-UAS, human-machine teaming, and SAR were all extracted in the later validation pass.</a:t>
             </a:r>
           </a:p>
         </p:txBody>
@@ -5556,7 +5556,7 @@
                 </a:solidFill>
                 <a:latin typeface="Calibri"/>
               </a:rPr>
-              <a:t>Decisions (1/2): model structure</a:t>
+              <a:t>Decisions (1/3): model structure</a:t>
             </a:r>
           </a:p>
         </p:txBody>
@@ -6102,7 +6102,7 @@
                 </a:solidFill>
                 <a:latin typeface="Calibri"/>
               </a:rPr>
-              <a:t>Task-verb vocabulary (deliver, manipulate, recover) + typed payload/effector/weapon.</a:t>
+              <a:t>Typed payload/effector/weapon (the action verbs already exist in LOX; only tow/salvage is a residual).</a:t>
             </a:r>
           </a:p>
           <a:p>
@@ -6345,7 +6345,7 @@
                 </a:solidFill>
                 <a:latin typeface="Calibri"/>
               </a:rPr>
-              <a:t>Explore / Search-Area order with a coverage goal (distinct from Patrol).</a:t>
+              <a:t>Area-coverage / exploration goal (explore-until-covered) - search verbs already exist.</a:t>
             </a:r>
           </a:p>
           <a:p>
@@ -9543,7 +9543,7 @@
                 </a:solidFill>
                 <a:latin typeface="Calibri"/>
               </a:rPr>
-              <a:t>CollectiveRoboticSystem</a:t>
+              <a:t>CollecticeRoboticSystem</a:t>
             </a:r>
           </a:p>
         </p:txBody>

--- a/Subgroups/ASX/InstantiationReview/ASX-Instantiation-Findings.pptx
+++ b/Subgroups/ASX/InstantiationReview/ASX-Instantiation-Findings.pptx
@@ -4226,7 +4226,7 @@
                 <a:latin typeface="Calibri"/>
               </a:rPr>
               <a:t>W1  -  No link between autonomy level and permission to engage
-The standard can say WHAT effect, WHICH ROE, and WHO authorized the order - but not whether a FullAuto system may take a lethal action without a human in / on the loop.</a:t>
+The standard can say WHAT effect and WHICH ROE - but not WHO (which commander) authorized the engagement, nor whether a FullAuto system may take a lethal action without a human in / on the loop.</a:t>
             </a:r>
           </a:p>
         </p:txBody>
@@ -4277,7 +4277,35 @@
                 </a:solidFill>
                 <a:latin typeface="Calibri"/>
               </a:rPr>
-              <a:t>rules of engagement (RuleOfEngagement, WeaponRuleOfEngagementCode - LOX), order authorization (AuthorizationHeader), desired effect (DesiredEffectCode), target (hasAffectedEntity), and the engage/attack verbs (lox#ENGAGE / lox#ATTACK).</a:t>
+              <a:t>rules of engagement (RuleOfEngagement, WeaponRuleOfEngagementCode - LOX), desired effect (DesiredEffectCode), target (hasAffectedEntity), and the engage/attack verbs (lox#ENGAGE / lox#ATTACK).</a:t>
+            </a:r>
+          </a:p>
+          <a:p>
+            <a:pPr>
+              <a:spcBef>
+                <a:spcPts val="200"/>
+              </a:spcBef>
+              <a:spcAft>
+                <a:spcPts val="1100"/>
+              </a:spcAft>
+            </a:pPr>
+            <a:r>
+              <a:rPr sz="1450" b="1" i="0">
+                <a:solidFill>
+                  <a:srgbClr val="C87F0A"/>
+                </a:solidFill>
+                <a:latin typeface="Calibri"/>
+              </a:rPr>
+              <a:t>Note:  </a:t>
+            </a:r>
+            <a:r>
+              <a:rPr sz="1450" b="0" i="0">
+                <a:solidFill>
+                  <a:srgbClr val="333333"/>
+                </a:solidFill>
+                <a:latin typeface="Calibri"/>
+              </a:rPr>
+              <a:t>AuthorizationHeader is message-sender authentication, not command authorization of fires - so who-approved-the-engagement is part of W1, not covered.</a:t>
             </a:r>
           </a:p>
           <a:p>
@@ -4584,7 +4612,7 @@
                 <a:latin typeface="Calibri"/>
               </a:rPr>
               <a:t>Action verbs already exist
-LOX has 445 TaskActionCode verbs - ENGAGE, ATTACK, BREACH, CONSTR, CLROBS, MINLAY, TRANS, RESUPL, RESCUE, RECOVR, NTRCOM, ESCRT, RECCE, PATROL. Not a missing-verb problem.</a:t>
+LOX has 446 TaskActionCode verbs - ENGAGE, ATTACK, BREACH, CONSTR, CLROBS, MINLAY, TRANS, RESUPL, RESCUE, RECOVR, NTRCOM, ESCRT, RECCE, PATROL. Not a missing-verb problem.</a:t>
             </a:r>
           </a:p>
         </p:txBody>
@@ -4688,7 +4716,7 @@
                 </a:solidFill>
                 <a:latin typeface="Calibri"/>
               </a:rPr>
-              <a:t>effects (DesiredEffectCode), targets (hasAffectedEntity), resources + quantities, ROE, authorization, platform types (Vehicle / Aircraft / SurfaceVessel).</a:t>
+              <a:t>effects (DesiredEffectCode), targets (hasAffectedEntity), resources + quantities, ROE, platform types (Vehicle / Aircraft / SurfaceVessel).</a:t>
             </a:r>
           </a:p>
           <a:p>
@@ -5049,7 +5077,7 @@
                 </a:solidFill>
                 <a:latin typeface="Calibri"/>
               </a:rPr>
-              <a:t>area-coverage/exploration goal (G2, search verbs exist); denied-comms + relay (G1); decoy role (G8, deception verbs exist); maritime cross-cue with a shared track (G3); environment conditions (G11); formation geometry (G12).</a:t>
+              <a:t>area-coverage/exploration goal (G2, search verbs exist); denied-comms mode + relay entity (G1, the relay verb COMREL exists); decoy role (G8, deception verbs exist); maritime cross-cue with a shared track (G3); environment conditions (G11); formation geometry (G12).</a:t>
             </a:r>
           </a:p>
           <a:p>
@@ -5068,7 +5096,7 @@
                 </a:solidFill>
                 <a:latin typeface="Calibri"/>
               </a:rPr>
-              <a:t>Neutral-actor framing is mostly covered (NeutralSide affiliation individual + smx#ANT hostility value). Counter-UAS, human-machine teaming, and SAR were all extracted in the later validation pass.</a:t>
+              <a:t>Neutral-actor framing is mostly covered (smx#NEUTRL hostility value; an untyped NeutralSide individual also exists). Counter-UAS, human-machine teaming, and SAR were all extracted in the later validation pass.</a:t>
             </a:r>
           </a:p>
         </p:txBody>
@@ -6373,7 +6401,7 @@
                 </a:solidFill>
                 <a:latin typeface="Calibri"/>
               </a:rPr>
-              <a:t>Denied-comms operating mode + deployable comms-relay entity/behavior.</a:t>
+              <a:t>Denied-comms operating mode + deployable relay entity (the relay verb lox#COMREL already exists).</a:t>
             </a:r>
           </a:p>
           <a:p>
@@ -6874,7 +6902,7 @@
                 </a:solidFill>
                 <a:latin typeface="Calibri"/>
               </a:rPr>
-              <a:t>inline entity def (Q-E), MediaReference (Q-F), robot-to-robot + cross-cue (Q-G/Q-P), rationale report (Q-H), generic detection report (Q-I/Q-Q), swarm residuals (Q-J), engagement authority (Q-K), task verbs + payload (Q-L), area subject (Q-M), explore order (Q-N), denied-comms/relay (Q-O), locomotion subtypes (Q-R), decoy/threat-aware (Q-S), environment conditions (Q-T), formation geometry (Q-U).</a:t>
+              <a:t>inline entity def (Q-E), MediaReference (Q-F), robot-to-robot + cross-cue (Q-G/Q-P), rationale report (Q-H), generic detection report (Q-I/Q-Q), swarm residuals (Q-J), engagement authority (Q-K), payload/effector/weapon typing (Q-L), area subject (Q-M), explore order (Q-N), denied-comms/relay (Q-O), locomotion subtypes (Q-R), decoy/threat-aware (Q-S), environment conditions (Q-T), formation geometry (Q-U).</a:t>
             </a:r>
           </a:p>
           <a:p>
@@ -9175,7 +9203,7 @@
                 </a:solidFill>
                 <a:latin typeface="Calibri"/>
               </a:rPr>
-              <a:t>Two disjoint sibling trees under ActorEntity model the same real drone.</a:t>
+              <a:t>Two parallel sibling trees under ActorEntity model the same real drone.</a:t>
             </a:r>
           </a:p>
           <a:p>
@@ -10020,7 +10048,7 @@
                 </a:solidFill>
                 <a:latin typeface="Calibri"/>
               </a:rPr>
-              <a:t>      -  Once fixed, membership and command already exist in base C2SIM (hasSubordinate, hasCommandRelation); the residual swarm needs are small.</a:t>
+              <a:t>      -  Once fixed, membership and command already exist in the base standard (C2SIM hasSubordinate, SMX hasCommandRelation); the residual swarm needs are small.</a:t>
             </a:r>
           </a:p>
           <a:p>

--- a/Subgroups/ASX/InstantiationReview/ASX-Instantiation-Findings.pptx
+++ b/Subgroups/ASX/InstantiationReview/ASX-Instantiation-Findings.pptx
@@ -25,6 +25,8 @@
     <p:sldId id="273" r:id="rId24"/>
     <p:sldId id="274" r:id="rId25"/>
     <p:sldId id="275" r:id="rId26"/>
+    <p:sldId id="276" r:id="rId27"/>
+    <p:sldId id="277" r:id="rId28"/>
   </p:sldIdLst>
   <p:sldSz cx="12191695" cy="6858000" type="screen4x3"/>
   <p:notesSz cx="6858000" cy="9144000"/>
@@ -3385,7 +3387,7 @@
                 </a:solidFill>
                 <a:latin typeface="Calibri"/>
               </a:rPr>
-              <a:t>Biggest coverage gaps</a:t>
+              <a:t>Open items in the current instantiations</a:t>
             </a:r>
           </a:p>
         </p:txBody>
@@ -3398,8 +3400,42 @@
         </p:nvSpPr>
         <p:spPr>
           <a:xfrm>
-            <a:off x="640080" y="1463040"/>
-            <a:ext cx="10972800" cy="4754880"/>
+            <a:off x="548640" y="914400"/>
+            <a:ext cx="10972800" cy="320040"/>
+          </a:xfrm>
+          <a:prstGeom prst="rect">
+            <a:avLst/>
+          </a:prstGeom>
+          <a:noFill/>
+        </p:spPr>
+        <p:txBody>
+          <a:bodyPr wrap="square">
+            <a:spAutoFit/>
+          </a:bodyPr>
+          <a:lstStyle/>
+          <a:p>
+            <a:r>
+              <a:rPr sz="1300" b="0" i="1">
+                <a:solidFill>
+                  <a:srgbClr val="2E869A"/>
+                </a:solidFill>
+                <a:latin typeface="Calibri"/>
+              </a:rPr>
+              <a:t>small things to tidy as the model firms up</a:t>
+            </a:r>
+          </a:p>
+        </p:txBody>
+      </p:sp>
+      <p:sp>
+        <p:nvSpPr>
+          <p:cNvPr id="5" name="TextBox 4"/>
+          <p:cNvSpPr txBox="1"/>
+          <p:nvPr/>
+        </p:nvSpPr>
+        <p:spPr>
+          <a:xfrm>
+            <a:off x="640080" y="1645920"/>
+            <a:ext cx="10972800" cy="4709160"/>
           </a:xfrm>
           <a:prstGeom prst="rect">
             <a:avLst/>
@@ -3417,17 +3453,26 @@
                 <a:spcPts val="200"/>
               </a:spcBef>
               <a:spcAft>
-                <a:spcPts val="800"/>
+                <a:spcPts val="1300"/>
               </a:spcAft>
             </a:pPr>
             <a:r>
-              <a:rPr sz="1450" b="1" i="0">
+              <a:rPr sz="1500" b="1" i="0">
+                <a:solidFill>
+                  <a:srgbClr val="C87F0A"/>
+                </a:solidFill>
+                <a:latin typeface="Calibri"/>
+              </a:rPr>
+              <a:t>M1:  </a:t>
+            </a:r>
+            <a:r>
+              <a:rPr sz="1500" b="0" i="0">
                 <a:solidFill>
                   <a:srgbClr val="333333"/>
                 </a:solidFill>
                 <a:latin typeface="Calibri"/>
               </a:rPr>
-              <a:t>Initialization: 0 of 3 named scenarios were instantiated (now drafted in this review).</a:t>
+              <a:t>actorReference is a string, but it needs to define an entity not yet in the database - an inline entity-definition mechanism for observed entities is still to be added.</a:t>
             </a:r>
           </a:p>
           <a:p>
@@ -3436,17 +3481,26 @@
                 <a:spcPts val="200"/>
               </a:spcBef>
               <a:spcAft>
-                <a:spcPts val="800"/>
+                <a:spcPts val="1300"/>
               </a:spcAft>
             </a:pPr>
             <a:r>
-              <a:rPr sz="1450" b="1" i="0">
+              <a:rPr sz="1500" b="1" i="0">
+                <a:solidFill>
+                  <a:srgbClr val="C87F0A"/>
+                </a:solidFill>
+                <a:latin typeface="Calibri"/>
+              </a:rPr>
+              <a:t>M5:  </a:t>
+            </a:r>
+            <a:r>
+              <a:rPr sz="1500" b="0" i="0">
                 <a:solidFill>
                   <a:srgbClr val="333333"/>
                 </a:solidFill>
                 <a:latin typeface="Calibri"/>
               </a:rPr>
-              <a:t>CASEVAC: walked end-to-end in this review - surfaces two gaps with no element (next slide).</a:t>
+              <a:t>MediaTypeCode mixes media format (Video/Audio/Image/Document) with sensor modality (a note asks it to also cover 'thermal scan') - worth separating.</a:t>
             </a:r>
           </a:p>
           <a:p>
@@ -3455,17 +3509,26 @@
                 <a:spcPts val="200"/>
               </a:spcBef>
               <a:spcAft>
-                <a:spcPts val="800"/>
+                <a:spcPts val="1300"/>
               </a:spcAft>
             </a:pPr>
             <a:r>
-              <a:rPr sz="1450" b="1" i="0">
+              <a:rPr sz="1500" b="1" i="0">
+                <a:solidFill>
+                  <a:srgbClr val="C87F0A"/>
+                </a:solidFill>
+                <a:latin typeface="Calibri"/>
+              </a:rPr>
+              <a:t>M7:  </a:t>
+            </a:r>
+            <a:r>
+              <a:rPr sz="1500" b="0" i="0">
                 <a:solidFill>
                   <a:srgbClr val="333333"/>
                 </a:solidFill>
                 <a:latin typeface="Calibri"/>
               </a:rPr>
-              <a:t>Non-video sensors (CBRN, EW, GPR): walked - the media-based report model does not generalize; non-imaging sensors have no measurement type (Y1/Y5).</a:t>
+              <a:t>in an Order sheet hasStartTime is typed UUIDBase while hasEndTime is TimeInstant - looks like a copy/paste slip.</a:t>
             </a:r>
           </a:p>
           <a:p>
@@ -3474,62 +3537,33 @@
                 <a:spcPts val="200"/>
               </a:spcBef>
               <a:spcAft>
-                <a:spcPts val="800"/>
+                <a:spcPts val="1300"/>
               </a:spcAft>
             </a:pPr>
             <a:r>
-              <a:rPr sz="1450" b="0" i="0">
+              <a:rPr sz="1500" b="1" i="0">
+                <a:solidFill>
+                  <a:srgbClr val="C87F0A"/>
+                </a:solidFill>
+                <a:latin typeface="Calibri"/>
+              </a:rPr>
+              <a:t>Typos:  </a:t>
+            </a:r>
+            <a:r>
+              <a:rPr sz="1500" b="0" i="0">
                 <a:solidFill>
                   <a:srgbClr val="333333"/>
                 </a:solidFill>
                 <a:latin typeface="Calibri"/>
               </a:rPr>
-              <a:t>Task/effect scenarios: engagement, delivery, manipulation, rescue walked - the gap is mainly payload/effector/weapon typing (most task verbs already exist in LOX).</a:t>
-            </a:r>
-          </a:p>
-          <a:p>
-            <a:pPr>
-              <a:spcBef>
-                <a:spcPts val="200"/>
-              </a:spcBef>
-              <a:spcAft>
-                <a:spcPts val="800"/>
-              </a:spcAft>
-            </a:pPr>
-            <a:r>
-              <a:rPr sz="1450" b="0" i="0">
-                <a:solidFill>
-                  <a:srgbClr val="333333"/>
-                </a:solidFill>
-                <a:latin typeface="Calibri"/>
-              </a:rPr>
-              <a:t>Redundancy pass (route-clearance, companion, urban): confirmed - plus one new finding, N1 (an area cannot be the subject of a task/report).</a:t>
-            </a:r>
-          </a:p>
-          <a:p>
-            <a:pPr>
-              <a:spcBef>
-                <a:spcPts val="200"/>
-              </a:spcBef>
-              <a:spcAft>
-                <a:spcPts val="800"/>
-              </a:spcAft>
-            </a:pPr>
-            <a:r>
-              <a:rPr sz="1450" b="0" i="0">
-                <a:solidFill>
-                  <a:srgbClr val="333333"/>
-                </a:solidFill>
-                <a:latin typeface="Calibri"/>
-              </a:rPr>
-              <a:t>Sourced scenarios (subterranean, maritime MCM, sustainment): integrated from the scenario-sourcing session - corroborate P1/X1/N2/Y and add G1-G10 (incl. a generic Detection Report).</a:t>
-            </a:r>
-          </a:p>
-        </p:txBody>
-      </p:sp>
-      <p:sp>
-        <p:nvSpPr>
-          <p:cNvPr id="5" name="TextBox 4"/>
+              <a:t>class 'CollecticeRoboticSystem' (should be 'CollectiveRoboticSystem') and versionInfo 'Extrension' - both still in v0.0.3; easiest to fix before messages are built on them.</a:t>
+            </a:r>
+          </a:p>
+        </p:txBody>
+      </p:sp>
+      <p:sp>
+        <p:nvSpPr>
+          <p:cNvPr id="6" name="TextBox 5"/>
           <p:cNvSpPr txBox="1"/>
           <p:nvPr/>
         </p:nvSpPr>
@@ -3563,7 +3597,7 @@
       </p:sp>
       <p:sp>
         <p:nvSpPr>
-          <p:cNvPr id="6" name="TextBox 5"/>
+          <p:cNvPr id="7" name="TextBox 6"/>
           <p:cNvSpPr txBox="1"/>
           <p:nvPr/>
         </p:nvSpPr>
@@ -3686,7 +3720,7 @@
                 </a:solidFill>
                 <a:latin typeface="Calibri"/>
               </a:rPr>
-              <a:t>CASEVAC walk: two gaps with no element</a:t>
+              <a:t>Coverage: what is still to instantiate</a:t>
             </a:r>
           </a:p>
         </p:txBody>
@@ -3699,42 +3733,8 @@
         </p:nvSpPr>
         <p:spPr>
           <a:xfrm>
-            <a:off x="548640" y="914400"/>
-            <a:ext cx="10972800" cy="320040"/>
-          </a:xfrm>
-          <a:prstGeom prst="rect">
-            <a:avLst/>
-          </a:prstGeom>
-          <a:noFill/>
-        </p:spPr>
-        <p:txBody>
-          <a:bodyPr wrap="square">
-            <a:spAutoFit/>
-          </a:bodyPr>
-          <a:lstStyle/>
-          <a:p>
-            <a:r>
-              <a:rPr sz="1300" b="0" i="1">
-                <a:solidFill>
-                  <a:srgbClr val="2E869A"/>
-                </a:solidFill>
-                <a:latin typeface="Calibri"/>
-              </a:rPr>
-              <a:t>The flagship contributed scenario</a:t>
-            </a:r>
-          </a:p>
-        </p:txBody>
-      </p:sp>
-      <p:sp>
-        <p:nvSpPr>
-          <p:cNvPr id="5" name="TextBox 4"/>
-          <p:cNvSpPr txBox="1"/>
-          <p:nvPr/>
-        </p:nvSpPr>
-        <p:spPr>
-          <a:xfrm>
-            <a:off x="640080" y="1417320"/>
-            <a:ext cx="10972800" cy="777240"/>
+            <a:off x="640080" y="1463040"/>
+            <a:ext cx="10972800" cy="4754880"/>
           </a:xfrm>
           <a:prstGeom prst="rect">
             <a:avLst/>
@@ -3752,174 +3752,36 @@
                 <a:spcPts val="200"/>
               </a:spcBef>
               <a:spcAft>
-                <a:spcPts val="600"/>
+                <a:spcPts val="800"/>
               </a:spcAft>
             </a:pPr>
             <a:r>
-              <a:rPr sz="1400" b="0" i="0">
+              <a:rPr sz="1450" b="1" i="0">
                 <a:solidFill>
                   <a:srgbClr val="333333"/>
                 </a:solidFill>
                 <a:latin typeface="Calibri"/>
               </a:rPr>
-              <a:t>Walked end-to-end: Initialization -&gt; tasking Order -&gt; robot-to-robot route hand-off -&gt; status/threat Reports -&gt; explainable-reasons Report.</a:t>
-            </a:r>
-          </a:p>
-        </p:txBody>
-      </p:sp>
-      <p:sp>
-        <p:nvSpPr>
-          <p:cNvPr id="6" name="Rounded Rectangle 5"/>
-          <p:cNvSpPr/>
-          <p:nvPr/>
-        </p:nvSpPr>
-        <p:spPr>
-          <a:xfrm>
-            <a:off x="731520" y="2240280"/>
-            <a:ext cx="5257800" cy="1600200"/>
-          </a:xfrm>
-          <a:prstGeom prst="roundRect">
-            <a:avLst/>
-          </a:prstGeom>
-          <a:solidFill>
-            <a:srgbClr val="C0392B"/>
-          </a:solidFill>
-          <a:ln>
-            <a:noFill/>
-          </a:ln>
-        </p:spPr>
-        <p:style>
-          <a:lnRef idx="1">
-            <a:schemeClr val="accent1"/>
-          </a:lnRef>
-          <a:fillRef idx="3">
-            <a:schemeClr val="accent1"/>
-          </a:fillRef>
-          <a:effectRef idx="2">
-            <a:schemeClr val="accent1"/>
-          </a:effectRef>
-          <a:fontRef idx="minor">
-            <a:schemeClr val="lt1"/>
-          </a:fontRef>
-        </p:style>
-        <p:txBody>
-          <a:bodyPr rtlCol="0" anchor="ctr" wrap="square"/>
-          <a:lstStyle/>
-          <a:p>
-            <a:pPr algn="ctr"/>
-            <a:r>
-              <a:rPr sz="1300" b="1" i="0">
-                <a:solidFill>
-                  <a:srgbClr val="FFFFFF"/>
-                </a:solidFill>
-                <a:latin typeface="Calibri"/>
-              </a:rPr>
-              <a:t>X1  -  No robot-to-robot content
-Scout cannot hand a verified safe Route to the transport UGV (envelope addressing exists; a content type does not)</a:t>
-            </a:r>
-          </a:p>
-        </p:txBody>
-      </p:sp>
-      <p:sp>
-        <p:nvSpPr>
-          <p:cNvPr id="7" name="Rounded Rectangle 6"/>
-          <p:cNvSpPr/>
-          <p:nvPr/>
-        </p:nvSpPr>
-        <p:spPr>
-          <a:xfrm>
-            <a:off x="6217920" y="2240280"/>
-            <a:ext cx="5257800" cy="1600200"/>
-          </a:xfrm>
-          <a:prstGeom prst="roundRect">
-            <a:avLst/>
-          </a:prstGeom>
-          <a:solidFill>
-            <a:srgbClr val="C0392B"/>
-          </a:solidFill>
-          <a:ln>
-            <a:noFill/>
-          </a:ln>
-        </p:spPr>
-        <p:style>
-          <a:lnRef idx="1">
-            <a:schemeClr val="accent1"/>
-          </a:lnRef>
-          <a:fillRef idx="3">
-            <a:schemeClr val="accent1"/>
-          </a:fillRef>
-          <a:effectRef idx="2">
-            <a:schemeClr val="accent1"/>
-          </a:effectRef>
-          <a:fontRef idx="minor">
-            <a:schemeClr val="lt1"/>
-          </a:fontRef>
-        </p:style>
-        <p:txBody>
-          <a:bodyPr rtlCol="0" anchor="ctr" wrap="square"/>
-          <a:lstStyle/>
-          <a:p>
-            <a:pPr algn="ctr"/>
-            <a:r>
-              <a:rPr sz="1300" b="1" i="0">
-                <a:solidFill>
-                  <a:srgbClr val="FFFFFF"/>
-                </a:solidFill>
-                <a:latin typeface="Calibri"/>
-              </a:rPr>
-              <a:t>X2  -  No rationale report
-Systems can report WHAT (TaskStatus) but not WHY a route changed or a mission failed</a:t>
-            </a:r>
-          </a:p>
-        </p:txBody>
-      </p:sp>
-      <p:sp>
-        <p:nvSpPr>
-          <p:cNvPr id="8" name="TextBox 7"/>
-          <p:cNvSpPr txBox="1"/>
-          <p:nvPr/>
-        </p:nvSpPr>
-        <p:spPr>
-          <a:xfrm>
-            <a:off x="640080" y="4114800"/>
-            <a:ext cx="10972800" cy="2240280"/>
-          </a:xfrm>
-          <a:prstGeom prst="rect">
-            <a:avLst/>
-          </a:prstGeom>
-          <a:noFill/>
-        </p:spPr>
-        <p:txBody>
-          <a:bodyPr wrap="square">
-            <a:spAutoFit/>
-          </a:bodyPr>
-          <a:lstStyle/>
+              <a:t>Initialization: 0 of 3 named scenarios were instantiated (now drafted in this review).</a:t>
+            </a:r>
+          </a:p>
           <a:p>
             <a:pPr>
               <a:spcBef>
                 <a:spcPts val="200"/>
               </a:spcBef>
               <a:spcAft>
-                <a:spcPts val="900"/>
+                <a:spcPts val="800"/>
               </a:spcAft>
             </a:pPr>
             <a:r>
-              <a:rPr sz="1400" b="1" i="0">
-                <a:solidFill>
-                  <a:srgbClr val="2E869A"/>
-                </a:solidFill>
-                <a:latin typeface="Calibri"/>
-              </a:rPr>
-              <a:t>Decision (Q-G):  </a:t>
-            </a:r>
-            <a:r>
-              <a:rPr sz="1400" b="0" i="0">
+              <a:rPr sz="1450" b="1" i="0">
                 <a:solidFill>
                   <a:srgbClr val="333333"/>
                 </a:solidFill>
                 <a:latin typeface="Calibri"/>
               </a:rPr>
-              <a:t>define a robot-to-robot coordination content type (safe-route advertisement) and the issuing-authority model.</a:t>
+              <a:t>CASEVAC: walked end-to-end in this review - surfaces two gaps with no element (next slide).</a:t>
             </a:r>
           </a:p>
           <a:p>
@@ -3928,26 +3790,17 @@
                 <a:spcPts val="200"/>
               </a:spcBef>
               <a:spcAft>
-                <a:spcPts val="900"/>
+                <a:spcPts val="800"/>
               </a:spcAft>
             </a:pPr>
             <a:r>
-              <a:rPr sz="1400" b="1" i="0">
-                <a:solidFill>
-                  <a:srgbClr val="2E869A"/>
-                </a:solidFill>
-                <a:latin typeface="Calibri"/>
-              </a:rPr>
-              <a:t>Decision (Q-H):  </a:t>
-            </a:r>
-            <a:r>
-              <a:rPr sz="1400" b="0" i="0">
+              <a:rPr sz="1450" b="1" i="0">
                 <a:solidFill>
                   <a:srgbClr val="333333"/>
                 </a:solidFill>
                 <a:latin typeface="Calibri"/>
               </a:rPr>
-              <a:t>add a rationale/explanation ReportContent so systems can report why, not just what.</a:t>
+              <a:t>Non-video sensors (CBRN, EW, GPR): walked - the media-based report model does not generalize; non-imaging sensors have no measurement type (Y1/Y5).</a:t>
             </a:r>
           </a:p>
           <a:p>
@@ -3956,33 +3809,62 @@
                 <a:spcPts val="200"/>
               </a:spcBef>
               <a:spcAft>
-                <a:spcPts val="900"/>
+                <a:spcPts val="800"/>
               </a:spcAft>
             </a:pPr>
             <a:r>
-              <a:rPr sz="1400" b="1" i="0">
-                <a:solidFill>
-                  <a:srgbClr val="2E7D32"/>
-                </a:solidFill>
-                <a:latin typeface="Calibri"/>
-              </a:rPr>
-              <a:t>Checked:  </a:t>
-            </a:r>
-            <a:r>
-              <a:rPr sz="1400" b="0" i="0">
+              <a:rPr sz="1450" b="0" i="0">
                 <a:solidFill>
                   <a:srgbClr val="333333"/>
                 </a:solidFill>
                 <a:latin typeface="Calibri"/>
               </a:rPr>
-              <a:t>Route, phased planning (PlanBody/PlanPhase), and position reporting already exist - not gaps.</a:t>
-            </a:r>
-          </a:p>
-        </p:txBody>
-      </p:sp>
-      <p:sp>
-        <p:nvSpPr>
-          <p:cNvPr id="9" name="TextBox 8"/>
+              <a:t>Task/effect scenarios: engagement, delivery, manipulation, rescue walked - the gap is mainly payload/effector/weapon typing (most task verbs already exist in LOX).</a:t>
+            </a:r>
+          </a:p>
+          <a:p>
+            <a:pPr>
+              <a:spcBef>
+                <a:spcPts val="200"/>
+              </a:spcBef>
+              <a:spcAft>
+                <a:spcPts val="800"/>
+              </a:spcAft>
+            </a:pPr>
+            <a:r>
+              <a:rPr sz="1450" b="0" i="0">
+                <a:solidFill>
+                  <a:srgbClr val="333333"/>
+                </a:solidFill>
+                <a:latin typeface="Calibri"/>
+              </a:rPr>
+              <a:t>Redundancy pass (route-clearance, companion, urban): confirmed - plus one new finding, N1 (an area cannot be the subject of a task/report).</a:t>
+            </a:r>
+          </a:p>
+          <a:p>
+            <a:pPr>
+              <a:spcBef>
+                <a:spcPts val="200"/>
+              </a:spcBef>
+              <a:spcAft>
+                <a:spcPts val="800"/>
+              </a:spcAft>
+            </a:pPr>
+            <a:r>
+              <a:rPr sz="1450" b="0" i="0">
+                <a:solidFill>
+                  <a:srgbClr val="333333"/>
+                </a:solidFill>
+                <a:latin typeface="Calibri"/>
+              </a:rPr>
+              <a:t>Sourced scenarios (subterranean, maritime MCM, sustainment): integrated from the scenario-sourcing session - corroborate P1/X1/N2/Y and add G1-G10 (incl. a generic Detection Report).</a:t>
+            </a:r>
+          </a:p>
+        </p:txBody>
+      </p:sp>
+      <p:sp>
+        <p:nvSpPr>
+          <p:cNvPr id="5" name="TextBox 4"/>
           <p:cNvSpPr txBox="1"/>
           <p:nvPr/>
         </p:nvSpPr>
@@ -4016,7 +3898,7 @@
       </p:sp>
       <p:sp>
         <p:nvSpPr>
-          <p:cNvPr id="10" name="TextBox 9"/>
+          <p:cNvPr id="6" name="TextBox 5"/>
           <p:cNvSpPr txBox="1"/>
           <p:nvPr/>
         </p:nvSpPr>
@@ -4139,7 +4021,7 @@
                 </a:solidFill>
                 <a:latin typeface="Calibri"/>
               </a:rPr>
-              <a:t>Fire Support: autonomous engagement authority</a:t>
+              <a:t>CASEVAC walk: two gaps with no element</a:t>
             </a:r>
           </a:p>
         </p:txBody>
@@ -4173,21 +4055,63 @@
                 </a:solidFill>
                 <a:latin typeface="Calibri"/>
               </a:rPr>
-              <a:t>The task/effect axis</a:t>
-            </a:r>
-          </a:p>
-        </p:txBody>
-      </p:sp>
-      <p:sp>
-        <p:nvSpPr>
-          <p:cNvPr id="5" name="Rounded Rectangle 4"/>
+              <a:t>The flagship contributed scenario</a:t>
+            </a:r>
+          </a:p>
+        </p:txBody>
+      </p:sp>
+      <p:sp>
+        <p:nvSpPr>
+          <p:cNvPr id="5" name="TextBox 4"/>
+          <p:cNvSpPr txBox="1"/>
+          <p:nvPr/>
+        </p:nvSpPr>
+        <p:spPr>
+          <a:xfrm>
+            <a:off x="640080" y="1417320"/>
+            <a:ext cx="10972800" cy="777240"/>
+          </a:xfrm>
+          <a:prstGeom prst="rect">
+            <a:avLst/>
+          </a:prstGeom>
+          <a:noFill/>
+        </p:spPr>
+        <p:txBody>
+          <a:bodyPr wrap="square">
+            <a:spAutoFit/>
+          </a:bodyPr>
+          <a:lstStyle/>
+          <a:p>
+            <a:pPr>
+              <a:spcBef>
+                <a:spcPts val="200"/>
+              </a:spcBef>
+              <a:spcAft>
+                <a:spcPts val="600"/>
+              </a:spcAft>
+            </a:pPr>
+            <a:r>
+              <a:rPr sz="1400" b="0" i="0">
+                <a:solidFill>
+                  <a:srgbClr val="333333"/>
+                </a:solidFill>
+                <a:latin typeface="Calibri"/>
+              </a:rPr>
+              <a:t>Walked end-to-end: Initialization -&gt; tasking Order -&gt; robot-to-robot route hand-off -&gt; status/threat Reports -&gt; explainable-reasons Report.</a:t>
+            </a:r>
+          </a:p>
+        </p:txBody>
+      </p:sp>
+      <p:sp>
+        <p:nvSpPr>
+          <p:cNvPr id="6" name="Rounded Rectangle 5"/>
           <p:cNvSpPr/>
           <p:nvPr/>
         </p:nvSpPr>
         <p:spPr>
           <a:xfrm>
-            <a:off x="731520" y="1783080"/>
-            <a:ext cx="10744200" cy="1463040"/>
+            <a:off x="731520" y="2240280"/>
+            <a:ext cx="5257800" cy="1600200"/>
           </a:xfrm>
           <a:prstGeom prst="roundRect">
             <a:avLst/>
@@ -4219,28 +4143,81 @@
           <a:p>
             <a:pPr algn="ctr"/>
             <a:r>
-              <a:rPr sz="1500" b="1" i="0">
+              <a:rPr sz="1300" b="1" i="0">
                 <a:solidFill>
                   <a:srgbClr val="FFFFFF"/>
                 </a:solidFill>
                 <a:latin typeface="Calibri"/>
               </a:rPr>
-              <a:t>W1  -  No link between autonomy level and permission to engage
-The standard can say WHAT effect and WHICH ROE - but not WHO (which commander) authorized the engagement, nor whether a FullAuto system may take a lethal action without a human in / on the loop.</a:t>
-            </a:r>
-          </a:p>
-        </p:txBody>
-      </p:sp>
-      <p:sp>
-        <p:nvSpPr>
-          <p:cNvPr id="6" name="TextBox 5"/>
+              <a:t>X1  -  No robot-to-robot content
+Scout cannot hand a verified safe Route to the transport UGV (envelope addressing exists; a content type does not)</a:t>
+            </a:r>
+          </a:p>
+        </p:txBody>
+      </p:sp>
+      <p:sp>
+        <p:nvSpPr>
+          <p:cNvPr id="7" name="Rounded Rectangle 6"/>
+          <p:cNvSpPr/>
+          <p:nvPr/>
+        </p:nvSpPr>
+        <p:spPr>
+          <a:xfrm>
+            <a:off x="6217920" y="2240280"/>
+            <a:ext cx="5257800" cy="1600200"/>
+          </a:xfrm>
+          <a:prstGeom prst="roundRect">
+            <a:avLst/>
+          </a:prstGeom>
+          <a:solidFill>
+            <a:srgbClr val="C0392B"/>
+          </a:solidFill>
+          <a:ln>
+            <a:noFill/>
+          </a:ln>
+        </p:spPr>
+        <p:style>
+          <a:lnRef idx="1">
+            <a:schemeClr val="accent1"/>
+          </a:lnRef>
+          <a:fillRef idx="3">
+            <a:schemeClr val="accent1"/>
+          </a:fillRef>
+          <a:effectRef idx="2">
+            <a:schemeClr val="accent1"/>
+          </a:effectRef>
+          <a:fontRef idx="minor">
+            <a:schemeClr val="lt1"/>
+          </a:fontRef>
+        </p:style>
+        <p:txBody>
+          <a:bodyPr rtlCol="0" anchor="ctr" wrap="square"/>
+          <a:lstStyle/>
+          <a:p>
+            <a:pPr algn="ctr"/>
+            <a:r>
+              <a:rPr sz="1300" b="1" i="0">
+                <a:solidFill>
+                  <a:srgbClr val="FFFFFF"/>
+                </a:solidFill>
+                <a:latin typeface="Calibri"/>
+              </a:rPr>
+              <a:t>X2  -  No rationale report
+Systems can report WHAT (TaskStatus) but not WHY a route changed or a mission failed</a:t>
+            </a:r>
+          </a:p>
+        </p:txBody>
+      </p:sp>
+      <p:sp>
+        <p:nvSpPr>
+          <p:cNvPr id="8" name="TextBox 7"/>
           <p:cNvSpPr txBox="1"/>
           <p:nvPr/>
         </p:nvSpPr>
         <p:spPr>
           <a:xfrm>
-            <a:off x="640080" y="3474720"/>
-            <a:ext cx="10972800" cy="2880360"/>
+            <a:off x="640080" y="4114800"/>
+            <a:ext cx="10972800" cy="2240280"/>
           </a:xfrm>
           <a:prstGeom prst="rect">
             <a:avLst/>
@@ -4258,26 +4235,26 @@
                 <a:spcPts val="200"/>
               </a:spcBef>
               <a:spcAft>
-                <a:spcPts val="1100"/>
+                <a:spcPts val="900"/>
               </a:spcAft>
             </a:pPr>
             <a:r>
-              <a:rPr sz="1450" b="1" i="0">
-                <a:solidFill>
-                  <a:srgbClr val="2E7D32"/>
-                </a:solidFill>
-                <a:latin typeface="Calibri"/>
-              </a:rPr>
-              <a:t>Checked - already exist (not gaps):  </a:t>
-            </a:r>
-            <a:r>
-              <a:rPr sz="1450" b="0" i="0">
+              <a:rPr sz="1400" b="1" i="0">
+                <a:solidFill>
+                  <a:srgbClr val="2E869A"/>
+                </a:solidFill>
+                <a:latin typeface="Calibri"/>
+              </a:rPr>
+              <a:t>Decision (Q-G):  </a:t>
+            </a:r>
+            <a:r>
+              <a:rPr sz="1400" b="0" i="0">
                 <a:solidFill>
                   <a:srgbClr val="333333"/>
                 </a:solidFill>
                 <a:latin typeface="Calibri"/>
               </a:rPr>
-              <a:t>rules of engagement (RuleOfEngagement, WeaponRuleOfEngagementCode - LOX), desired effect (DesiredEffectCode), target (hasAffectedEntity), and the engage/attack verbs (lox#ENGAGE / lox#ATTACK).</a:t>
+              <a:t>define a robot-to-robot coordination content type (safe-route advertisement) and the issuing-authority model.</a:t>
             </a:r>
           </a:p>
           <a:p>
@@ -4286,26 +4263,26 @@
                 <a:spcPts val="200"/>
               </a:spcBef>
               <a:spcAft>
-                <a:spcPts val="1100"/>
+                <a:spcPts val="900"/>
               </a:spcAft>
             </a:pPr>
             <a:r>
-              <a:rPr sz="1450" b="1" i="0">
-                <a:solidFill>
-                  <a:srgbClr val="C87F0A"/>
-                </a:solidFill>
-                <a:latin typeface="Calibri"/>
-              </a:rPr>
-              <a:t>Note:  </a:t>
-            </a:r>
-            <a:r>
-              <a:rPr sz="1450" b="0" i="0">
+              <a:rPr sz="1400" b="1" i="0">
+                <a:solidFill>
+                  <a:srgbClr val="2E869A"/>
+                </a:solidFill>
+                <a:latin typeface="Calibri"/>
+              </a:rPr>
+              <a:t>Decision (Q-H):  </a:t>
+            </a:r>
+            <a:r>
+              <a:rPr sz="1400" b="0" i="0">
                 <a:solidFill>
                   <a:srgbClr val="333333"/>
                 </a:solidFill>
                 <a:latin typeface="Calibri"/>
               </a:rPr>
-              <a:t>AuthorizationHeader is message-sender authentication, not command authorization of fires - so who-approved-the-engagement is part of W1, not covered.</a:t>
+              <a:t>add a rationale/explanation ReportContent so systems can report why, not just what.</a:t>
             </a:r>
           </a:p>
           <a:p>
@@ -4314,61 +4291,33 @@
                 <a:spcPts val="200"/>
               </a:spcBef>
               <a:spcAft>
-                <a:spcPts val="1100"/>
+                <a:spcPts val="900"/>
               </a:spcAft>
             </a:pPr>
             <a:r>
-              <a:rPr sz="1450" b="1" i="0">
-                <a:solidFill>
-                  <a:srgbClr val="C87F0A"/>
-                </a:solidFill>
-                <a:latin typeface="Calibri"/>
-              </a:rPr>
-              <a:t>Also gaps:  </a:t>
-            </a:r>
-            <a:r>
-              <a:rPr sz="1450" b="0" i="0">
+              <a:rPr sz="1400" b="1" i="0">
+                <a:solidFill>
+                  <a:srgbClr val="2E7D32"/>
+                </a:solidFill>
+                <a:latin typeface="Calibri"/>
+              </a:rPr>
+              <a:t>Checked:  </a:t>
+            </a:r>
+            <a:r>
+              <a:rPr sz="1400" b="0" i="0">
                 <a:solidFill>
                   <a:srgbClr val="333333"/>
                 </a:solidFill>
                 <a:latin typeface="Calibri"/>
               </a:rPr>
-              <a:t>W2 weapon/munition not typed; W3 no battle-damage / effect-achieved report (TaskStatus = the task ran, not the target destroyed).</a:t>
-            </a:r>
-          </a:p>
-          <a:p>
-            <a:pPr>
-              <a:spcBef>
-                <a:spcPts val="200"/>
-              </a:spcBef>
-              <a:spcAft>
-                <a:spcPts val="1100"/>
-              </a:spcAft>
-            </a:pPr>
-            <a:r>
-              <a:rPr sz="1450" b="1" i="0">
-                <a:solidFill>
-                  <a:srgbClr val="2E869A"/>
-                </a:solidFill>
-                <a:latin typeface="Calibri"/>
-              </a:rPr>
-              <a:t>Decision (Q-K):  </a:t>
-            </a:r>
-            <a:r>
-              <a:rPr sz="1450" b="0" i="0">
-                <a:solidFill>
-                  <a:srgbClr val="333333"/>
-                </a:solidFill>
-                <a:latin typeface="Calibri"/>
-              </a:rPr>
-              <a:t>model engagement authority as a function of autonomy level - may this system take this action unsupervised?</a:t>
-            </a:r>
-          </a:p>
-        </p:txBody>
-      </p:sp>
-      <p:sp>
-        <p:nvSpPr>
-          <p:cNvPr id="7" name="TextBox 6"/>
+              <a:t>Route, phased planning (PlanBody/PlanPhase), and position reporting already exist - not gaps.</a:t>
+            </a:r>
+          </a:p>
+        </p:txBody>
+      </p:sp>
+      <p:sp>
+        <p:nvSpPr>
+          <p:cNvPr id="9" name="TextBox 8"/>
           <p:cNvSpPr txBox="1"/>
           <p:nvPr/>
         </p:nvSpPr>
@@ -4402,7 +4351,7 @@
       </p:sp>
       <p:sp>
         <p:nvSpPr>
-          <p:cNvPr id="8" name="TextBox 7"/>
+          <p:cNvPr id="10" name="TextBox 9"/>
           <p:cNvSpPr txBox="1"/>
           <p:nvPr/>
         </p:nvSpPr>
@@ -4525,7 +4474,7 @@
                 </a:solidFill>
                 <a:latin typeface="Calibri"/>
               </a:rPr>
-              <a:t>The task/effect axis is mostly already there</a:t>
+              <a:t>Fire Support: autonomous engagement authority</a:t>
             </a:r>
           </a:p>
         </p:txBody>
@@ -4559,7 +4508,7 @@
                 </a:solidFill>
                 <a:latin typeface="Calibri"/>
               </a:rPr>
-              <a:t>Across engagement, delivery, manipulation, rescue, search</a:t>
+              <a:t>The task/effect axis</a:t>
             </a:r>
           </a:p>
         </p:txBody>
@@ -4572,14 +4521,14 @@
         </p:nvSpPr>
         <p:spPr>
           <a:xfrm>
-            <a:off x="731520" y="1828800"/>
-            <a:ext cx="5257800" cy="1600200"/>
+            <a:off x="731520" y="1783080"/>
+            <a:ext cx="10744200" cy="1463040"/>
           </a:xfrm>
           <a:prstGeom prst="roundRect">
             <a:avLst/>
           </a:prstGeom>
           <a:solidFill>
-            <a:srgbClr val="2E7D32"/>
+            <a:srgbClr val="C0392B"/>
           </a:solidFill>
           <a:ln>
             <a:noFill/>
@@ -4605,81 +4554,28 @@
           <a:p>
             <a:pPr algn="ctr"/>
             <a:r>
-              <a:rPr sz="1300" b="1" i="0">
+              <a:rPr sz="1500" b="1" i="0">
                 <a:solidFill>
                   <a:srgbClr val="FFFFFF"/>
                 </a:solidFill>
                 <a:latin typeface="Calibri"/>
               </a:rPr>
-              <a:t>Action verbs already exist
-LOX has 446 TaskActionCode verbs - ENGAGE, ATTACK, BREACH, CONSTR, CLROBS, MINLAY, TRANS, RESUPL, RESCUE, RECOVR, NTRCOM, ESCRT, RECCE, PATROL. Not a missing-verb problem.</a:t>
-            </a:r>
-          </a:p>
-        </p:txBody>
-      </p:sp>
-      <p:sp>
-        <p:nvSpPr>
-          <p:cNvPr id="6" name="Rounded Rectangle 5"/>
-          <p:cNvSpPr/>
-          <p:nvPr/>
-        </p:nvSpPr>
-        <p:spPr>
-          <a:xfrm>
-            <a:off x="6217920" y="1828800"/>
-            <a:ext cx="5257800" cy="1600200"/>
-          </a:xfrm>
-          <a:prstGeom prst="roundRect">
-            <a:avLst/>
-          </a:prstGeom>
-          <a:solidFill>
-            <a:srgbClr val="1F3A5F"/>
-          </a:solidFill>
-          <a:ln>
-            <a:noFill/>
-          </a:ln>
-        </p:spPr>
-        <p:style>
-          <a:lnRef idx="1">
-            <a:schemeClr val="accent1"/>
-          </a:lnRef>
-          <a:fillRef idx="3">
-            <a:schemeClr val="accent1"/>
-          </a:fillRef>
-          <a:effectRef idx="2">
-            <a:schemeClr val="accent1"/>
-          </a:effectRef>
-          <a:fontRef idx="minor">
-            <a:schemeClr val="lt1"/>
-          </a:fontRef>
-        </p:style>
-        <p:txBody>
-          <a:bodyPr rtlCol="0" anchor="ctr" wrap="square"/>
-          <a:lstStyle/>
-          <a:p>
-            <a:pPr algn="ctr"/>
-            <a:r>
-              <a:rPr sz="1300" b="1" i="0">
-                <a:solidFill>
-                  <a:srgbClr val="FFFFFF"/>
-                </a:solidFill>
-                <a:latin typeface="Calibri"/>
-              </a:rPr>
-              <a:t>The real gap: payload / effector / weapon typing
-Cargo (L1), manipulator (E2), weapon (W2) are one gap: no typed thing carried or wielded.</a:t>
-            </a:r>
-          </a:p>
-        </p:txBody>
-      </p:sp>
-      <p:sp>
-        <p:nvSpPr>
-          <p:cNvPr id="7" name="TextBox 6"/>
+              <a:t>W1  -  No link between autonomy level and permission to engage
+The standard can say WHAT effect and WHICH ROE - but not WHO (which commander) authorized the engagement, nor whether a FullAuto system may take a lethal action without a human in / on the loop.</a:t>
+            </a:r>
+          </a:p>
+        </p:txBody>
+      </p:sp>
+      <p:sp>
+        <p:nvSpPr>
+          <p:cNvPr id="6" name="TextBox 5"/>
           <p:cNvSpPr txBox="1"/>
           <p:nvPr/>
         </p:nvSpPr>
         <p:spPr>
           <a:xfrm>
-            <a:off x="640080" y="3657600"/>
-            <a:ext cx="10972800" cy="2697480"/>
+            <a:off x="640080" y="3474720"/>
+            <a:ext cx="10972800" cy="2880360"/>
           </a:xfrm>
           <a:prstGeom prst="rect">
             <a:avLst/>
@@ -4697,26 +4593,26 @@
                 <a:spcPts val="200"/>
               </a:spcBef>
               <a:spcAft>
-                <a:spcPts val="900"/>
+                <a:spcPts val="1100"/>
               </a:spcAft>
             </a:pPr>
             <a:r>
-              <a:rPr sz="1400" b="1" i="0">
+              <a:rPr sz="1450" b="1" i="0">
                 <a:solidFill>
                   <a:srgbClr val="2E7D32"/>
                 </a:solidFill>
                 <a:latin typeface="Calibri"/>
               </a:rPr>
-              <a:t>Also already there (checked):  </a:t>
-            </a:r>
-            <a:r>
-              <a:rPr sz="1400" b="0" i="0">
+              <a:t>Checked - already exist (not gaps):  </a:t>
+            </a:r>
+            <a:r>
+              <a:rPr sz="1450" b="0" i="0">
                 <a:solidFill>
                   <a:srgbClr val="333333"/>
                 </a:solidFill>
                 <a:latin typeface="Calibri"/>
               </a:rPr>
-              <a:t>effects (DesiredEffectCode), targets (hasAffectedEntity), resources + quantities, ROE, platform types (Vehicle / Aircraft / SurfaceVessel).</a:t>
+              <a:t>rules of engagement (RuleOfEngagement, WeaponRuleOfEngagementCode - LOX), desired effect (DesiredEffectCode), target (hasAffectedEntity), and the engage/attack verbs (lox#ENGAGE / lox#ATTACK).</a:t>
             </a:r>
           </a:p>
           <a:p>
@@ -4725,26 +4621,26 @@
                 <a:spcPts val="200"/>
               </a:spcBef>
               <a:spcAft>
-                <a:spcPts val="900"/>
+                <a:spcPts val="1100"/>
               </a:spcAft>
             </a:pPr>
             <a:r>
-              <a:rPr sz="1400" b="1" i="0">
+              <a:rPr sz="1450" b="1" i="0">
                 <a:solidFill>
                   <a:srgbClr val="C87F0A"/>
                 </a:solidFill>
                 <a:latin typeface="Calibri"/>
               </a:rPr>
-              <a:t>Small residuals:  </a:t>
-            </a:r>
-            <a:r>
-              <a:rPr sz="1400" b="0" i="0">
+              <a:t>Note:  </a:t>
+            </a:r>
+            <a:r>
+              <a:rPr sz="1450" b="0" i="0">
                 <a:solidFill>
                   <a:srgbClr val="333333"/>
                 </a:solidFill>
                 <a:latin typeface="Calibri"/>
               </a:rPr>
-              <a:t>an area cannot be a task/report subject (N1 / Q-M); an area-coverage exploration goal (G2); a general tow/salvage; a decoy role.</a:t>
+              <a:t>AuthorizationHeader is message-sender authentication, not command authorization of fires - so who-approved-the-engagement is part of W1, not covered.</a:t>
             </a:r>
           </a:p>
           <a:p>
@@ -4753,33 +4649,61 @@
                 <a:spcPts val="200"/>
               </a:spcBef>
               <a:spcAft>
-                <a:spcPts val="900"/>
+                <a:spcPts val="1100"/>
               </a:spcAft>
             </a:pPr>
             <a:r>
-              <a:rPr sz="1400" b="1" i="0">
+              <a:rPr sz="1450" b="1" i="0">
+                <a:solidFill>
+                  <a:srgbClr val="C87F0A"/>
+                </a:solidFill>
+                <a:latin typeface="Calibri"/>
+              </a:rPr>
+              <a:t>Also gaps:  </a:t>
+            </a:r>
+            <a:r>
+              <a:rPr sz="1450" b="0" i="0">
+                <a:solidFill>
+                  <a:srgbClr val="333333"/>
+                </a:solidFill>
+                <a:latin typeface="Calibri"/>
+              </a:rPr>
+              <a:t>W2 weapon/munition not typed; W3 no battle-damage / effect-achieved report (TaskStatus = the task ran, not the target destroyed).</a:t>
+            </a:r>
+          </a:p>
+          <a:p>
+            <a:pPr>
+              <a:spcBef>
+                <a:spcPts val="200"/>
+              </a:spcBef>
+              <a:spcAft>
+                <a:spcPts val="1100"/>
+              </a:spcAft>
+            </a:pPr>
+            <a:r>
+              <a:rPr sz="1450" b="1" i="0">
                 <a:solidFill>
                   <a:srgbClr val="2E869A"/>
                 </a:solidFill>
                 <a:latin typeface="Calibri"/>
               </a:rPr>
-              <a:t>Decision (Q-L):  </a:t>
-            </a:r>
-            <a:r>
-              <a:rPr sz="1400" b="0" i="0">
+              <a:t>Decision (Q-K):  </a:t>
+            </a:r>
+            <a:r>
+              <a:rPr sz="1450" b="0" i="0">
                 <a:solidFill>
                   <a:srgbClr val="333333"/>
                 </a:solidFill>
                 <a:latin typeface="Calibri"/>
               </a:rPr>
-              <a:t>add the typed payload / effector / weapon - the verbs are already in LOX.</a:t>
-            </a:r>
-          </a:p>
-        </p:txBody>
-      </p:sp>
-      <p:sp>
-        <p:nvSpPr>
-          <p:cNvPr id="8" name="TextBox 7"/>
+              <a:t>model engagement authority as a function of autonomy level - may this system take this action unsupervised?</a:t>
+            </a:r>
+          </a:p>
+        </p:txBody>
+      </p:sp>
+      <p:sp>
+        <p:nvSpPr>
+          <p:cNvPr id="7" name="TextBox 6"/>
           <p:cNvSpPr txBox="1"/>
           <p:nvPr/>
         </p:nvSpPr>
@@ -4813,7 +4737,7 @@
       </p:sp>
       <p:sp>
         <p:nvSpPr>
-          <p:cNvPr id="9" name="TextBox 8"/>
+          <p:cNvPr id="8" name="TextBox 7"/>
           <p:cNvSpPr txBox="1"/>
           <p:nvPr/>
         </p:nvSpPr>
@@ -4936,7 +4860,7 @@
                 </a:solidFill>
                 <a:latin typeface="Calibri"/>
               </a:rPr>
-              <a:t>Integrated from the scenario-sourcing session</a:t>
+              <a:t>The task/effect axis is mostly already there</a:t>
             </a:r>
           </a:p>
         </p:txBody>
@@ -4970,21 +4894,127 @@
                 </a:solidFill>
                 <a:latin typeface="Calibri"/>
               </a:rPr>
-              <a:t>SubT (subterranean) + Cooperative MCM (maritime) + Sustainment</a:t>
-            </a:r>
-          </a:p>
-        </p:txBody>
-      </p:sp>
-      <p:sp>
-        <p:nvSpPr>
-          <p:cNvPr id="5" name="TextBox 4"/>
+              <a:t>Across engagement, delivery, manipulation, rescue, search</a:t>
+            </a:r>
+          </a:p>
+        </p:txBody>
+      </p:sp>
+      <p:sp>
+        <p:nvSpPr>
+          <p:cNvPr id="5" name="Rounded Rectangle 4"/>
+          <p:cNvSpPr/>
+          <p:nvPr/>
+        </p:nvSpPr>
+        <p:spPr>
+          <a:xfrm>
+            <a:off x="731520" y="1828800"/>
+            <a:ext cx="5257800" cy="1600200"/>
+          </a:xfrm>
+          <a:prstGeom prst="roundRect">
+            <a:avLst/>
+          </a:prstGeom>
+          <a:solidFill>
+            <a:srgbClr val="2E7D32"/>
+          </a:solidFill>
+          <a:ln>
+            <a:noFill/>
+          </a:ln>
+        </p:spPr>
+        <p:style>
+          <a:lnRef idx="1">
+            <a:schemeClr val="accent1"/>
+          </a:lnRef>
+          <a:fillRef idx="3">
+            <a:schemeClr val="accent1"/>
+          </a:fillRef>
+          <a:effectRef idx="2">
+            <a:schemeClr val="accent1"/>
+          </a:effectRef>
+          <a:fontRef idx="minor">
+            <a:schemeClr val="lt1"/>
+          </a:fontRef>
+        </p:style>
+        <p:txBody>
+          <a:bodyPr rtlCol="0" anchor="ctr" wrap="square"/>
+          <a:lstStyle/>
+          <a:p>
+            <a:pPr algn="ctr"/>
+            <a:r>
+              <a:rPr sz="1300" b="1" i="0">
+                <a:solidFill>
+                  <a:srgbClr val="FFFFFF"/>
+                </a:solidFill>
+                <a:latin typeface="Calibri"/>
+              </a:rPr>
+              <a:t>Action verbs already exist
+LOX has 446 TaskActionCode verbs - ENGAGE, ATTACK, BREACH, CONSTR, CLROBS, MINLAY, TRANS, RESUPL, RESCUE, RECOVR, NTRCOM, ESCRT, RECCE, PATROL. Not a missing-verb problem.</a:t>
+            </a:r>
+          </a:p>
+        </p:txBody>
+      </p:sp>
+      <p:sp>
+        <p:nvSpPr>
+          <p:cNvPr id="6" name="Rounded Rectangle 5"/>
+          <p:cNvSpPr/>
+          <p:nvPr/>
+        </p:nvSpPr>
+        <p:spPr>
+          <a:xfrm>
+            <a:off x="6217920" y="1828800"/>
+            <a:ext cx="5257800" cy="1600200"/>
+          </a:xfrm>
+          <a:prstGeom prst="roundRect">
+            <a:avLst/>
+          </a:prstGeom>
+          <a:solidFill>
+            <a:srgbClr val="1F3A5F"/>
+          </a:solidFill>
+          <a:ln>
+            <a:noFill/>
+          </a:ln>
+        </p:spPr>
+        <p:style>
+          <a:lnRef idx="1">
+            <a:schemeClr val="accent1"/>
+          </a:lnRef>
+          <a:fillRef idx="3">
+            <a:schemeClr val="accent1"/>
+          </a:fillRef>
+          <a:effectRef idx="2">
+            <a:schemeClr val="accent1"/>
+          </a:effectRef>
+          <a:fontRef idx="minor">
+            <a:schemeClr val="lt1"/>
+          </a:fontRef>
+        </p:style>
+        <p:txBody>
+          <a:bodyPr rtlCol="0" anchor="ctr" wrap="square"/>
+          <a:lstStyle/>
+          <a:p>
+            <a:pPr algn="ctr"/>
+            <a:r>
+              <a:rPr sz="1300" b="1" i="0">
+                <a:solidFill>
+                  <a:srgbClr val="FFFFFF"/>
+                </a:solidFill>
+                <a:latin typeface="Calibri"/>
+              </a:rPr>
+              <a:t>The real gap: payload / effector / weapon typing
+Cargo (L1), manipulator (E2), weapon (W2) are one gap: no typed thing carried or wielded.</a:t>
+            </a:r>
+          </a:p>
+        </p:txBody>
+      </p:sp>
+      <p:sp>
+        <p:nvSpPr>
+          <p:cNvPr id="7" name="TextBox 6"/>
           <p:cNvSpPr txBox="1"/>
           <p:nvPr/>
         </p:nvSpPr>
         <p:spPr>
           <a:xfrm>
-            <a:off x="640080" y="1600200"/>
-            <a:ext cx="10972800" cy="4754880"/>
+            <a:off x="640080" y="3657600"/>
+            <a:ext cx="10972800" cy="2697480"/>
           </a:xfrm>
           <a:prstGeom prst="rect">
             <a:avLst/>
@@ -5002,26 +5032,26 @@
                 <a:spcPts val="200"/>
               </a:spcBef>
               <a:spcAft>
-                <a:spcPts val="1300"/>
+                <a:spcPts val="900"/>
               </a:spcAft>
             </a:pPr>
             <a:r>
-              <a:rPr sz="1500" b="1" i="0">
+              <a:rPr sz="1400" b="1" i="0">
                 <a:solidFill>
                   <a:srgbClr val="2E7D32"/>
                 </a:solidFill>
                 <a:latin typeface="Calibri"/>
               </a:rPr>
-              <a:t>Corroborated (fresh domains):  </a:t>
-            </a:r>
-            <a:r>
-              <a:rPr sz="1500" b="0" i="0">
+              <a:t>Also already there (checked):  </a:t>
+            </a:r>
+            <a:r>
+              <a:rPr sz="1400" b="0" i="0">
                 <a:solidFill>
                   <a:srgbClr val="333333"/>
                 </a:solidFill>
                 <a:latin typeface="Calibri"/>
               </a:rPr>
-              <a:t>platform typing P1, robot-to-robot X1 (-&gt; cross-cueing), persistent tasking N2, and the sensor-report problem Y1.</a:t>
+              <a:t>effects (DesiredEffectCode), targets (hasAffectedEntity), resources + quantities, ROE, platform types (Vehicle / Aircraft / SurfaceVessel).</a:t>
             </a:r>
           </a:p>
           <a:p>
@@ -5030,26 +5060,26 @@
                 <a:spcPts val="200"/>
               </a:spcBef>
               <a:spcAft>
-                <a:spcPts val="1300"/>
+                <a:spcPts val="900"/>
               </a:spcAft>
             </a:pPr>
             <a:r>
-              <a:rPr sz="1500" b="1" i="0">
-                <a:solidFill>
-                  <a:srgbClr val="2E869A"/>
-                </a:solidFill>
-                <a:latin typeface="Calibri"/>
-              </a:rPr>
-              <a:t>Best contribution (G4):  </a:t>
-            </a:r>
-            <a:r>
-              <a:rPr sz="1500" b="0" i="0">
+              <a:rPr sz="1400" b="1" i="0">
+                <a:solidFill>
+                  <a:srgbClr val="C87F0A"/>
+                </a:solidFill>
+                <a:latin typeface="Calibri"/>
+              </a:rPr>
+              <a:t>Small residuals:  </a:t>
+            </a:r>
+            <a:r>
+              <a:rPr sz="1400" b="0" i="0">
                 <a:solidFill>
                   <a:srgbClr val="333333"/>
                 </a:solidFill>
                 <a:latin typeface="Calibri"/>
               </a:rPr>
-              <a:t>one generic Detection Report (confidence + error-bound + false-positive) subsumes Video/CBRN/EW/GPR/naval-mine and resolves the whole Y-series.</a:t>
+              <a:t>an area cannot be a task/report subject (N1 / Q-M); an area-coverage exploration goal (G2); a general tow/salvage; a decoy role.</a:t>
             </a:r>
           </a:p>
           <a:p>
@@ -5058,52 +5088,33 @@
                 <a:spcPts val="200"/>
               </a:spcBef>
               <a:spcAft>
-                <a:spcPts val="1300"/>
+                <a:spcPts val="900"/>
               </a:spcAft>
             </a:pPr>
             <a:r>
-              <a:rPr sz="1500" b="1" i="0">
-                <a:solidFill>
-                  <a:srgbClr val="C87F0A"/>
-                </a:solidFill>
-                <a:latin typeface="Calibri"/>
-              </a:rPr>
-              <a:t>New gaps:  </a:t>
-            </a:r>
-            <a:r>
-              <a:rPr sz="1500" b="0" i="0">
+              <a:rPr sz="1400" b="1" i="0">
+                <a:solidFill>
+                  <a:srgbClr val="2E869A"/>
+                </a:solidFill>
+                <a:latin typeface="Calibri"/>
+              </a:rPr>
+              <a:t>Decision (Q-L):  </a:t>
+            </a:r>
+            <a:r>
+              <a:rPr sz="1400" b="0" i="0">
                 <a:solidFill>
                   <a:srgbClr val="333333"/>
                 </a:solidFill>
                 <a:latin typeface="Calibri"/>
               </a:rPr>
-              <a:t>area-coverage/exploration goal (G2, search verbs exist); denied-comms mode + relay entity (G1, the relay verb COMREL exists); decoy role (G8, deception verbs exist); maritime cross-cue with a shared track (G3); environment conditions (G11); formation geometry (G12).</a:t>
-            </a:r>
-          </a:p>
-          <a:p>
-            <a:pPr>
-              <a:spcBef>
-                <a:spcPts val="200"/>
-              </a:spcBef>
-              <a:spcAft>
-                <a:spcPts val="1300"/>
-              </a:spcAft>
-            </a:pPr>
-            <a:r>
-              <a:rPr sz="1500" b="0" i="0">
-                <a:solidFill>
-                  <a:srgbClr val="666666"/>
-                </a:solidFill>
-                <a:latin typeface="Calibri"/>
-              </a:rPr>
-              <a:t>Neutral-actor framing is mostly covered (smx#NEUTRL hostility value; an untyped NeutralSide individual also exists). Counter-UAS, human-machine teaming, and SAR were all extracted in the later validation pass.</a:t>
-            </a:r>
-          </a:p>
-        </p:txBody>
-      </p:sp>
-      <p:sp>
-        <p:nvSpPr>
-          <p:cNvPr id="6" name="TextBox 5"/>
+              <a:t>add the typed payload / effector / weapon - the verbs are already in LOX.</a:t>
+            </a:r>
+          </a:p>
+        </p:txBody>
+      </p:sp>
+      <p:sp>
+        <p:nvSpPr>
+          <p:cNvPr id="8" name="TextBox 7"/>
           <p:cNvSpPr txBox="1"/>
           <p:nvPr/>
         </p:nvSpPr>
@@ -5137,7 +5148,7 @@
       </p:sp>
       <p:sp>
         <p:nvSpPr>
-          <p:cNvPr id="7" name="TextBox 6"/>
+          <p:cNvPr id="9" name="TextBox 8"/>
           <p:cNvSpPr txBox="1"/>
           <p:nvPr/>
         </p:nvSpPr>
@@ -5260,7 +5271,7 @@
                 </a:solidFill>
                 <a:latin typeface="Calibri"/>
               </a:rPr>
-              <a:t>Validation: the gaps are now evidenced</a:t>
+              <a:t>Integrated from the scenario-sourcing session</a:t>
             </a:r>
           </a:p>
         </p:txBody>
@@ -5294,7 +5305,7 @@
                 </a:solidFill>
                 <a:latin typeface="Calibri"/>
               </a:rPr>
-              <a:t>Nine sourced missions closed the document holes</a:t>
+              <a:t>SubT (subterranean) + Cooperative MCM (maritime) + Sustainment</a:t>
             </a:r>
           </a:p>
         </p:txBody>
@@ -5326,26 +5337,26 @@
                 <a:spcPts val="200"/>
               </a:spcBef>
               <a:spcAft>
-                <a:spcPts val="1200"/>
+                <a:spcPts val="1300"/>
               </a:spcAft>
             </a:pPr>
             <a:r>
-              <a:rPr sz="1450" b="1" i="0">
+              <a:rPr sz="1500" b="1" i="0">
                 <a:solidFill>
                   <a:srgbClr val="2E7D32"/>
                 </a:solidFill>
                 <a:latin typeface="Calibri"/>
               </a:rPr>
-              <a:t>Now grounded by a real mission:  </a:t>
-            </a:r>
-            <a:r>
-              <a:rPr sz="1450" b="0" i="0">
+              <a:t>Corroborated (fresh domains):  </a:t>
+            </a:r>
+            <a:r>
+              <a:rPr sz="1500" b="0" i="0">
                 <a:solidFill>
                   <a:srgbClr val="333333"/>
                 </a:solidFill>
                 <a:latin typeface="Calibri"/>
               </a:rPr>
-              <a:t>explainability (Agrawal DroneResponse), CBRN (UGV-CBRN), EW (UAV emitter geolocation), persistence (MDARS) - all previously asserted-but-untested.</a:t>
+              <a:t>platform typing P1, robot-to-robot X1 (-&gt; cross-cueing), persistent tasking N2, and the sensor-report problem Y1.</a:t>
             </a:r>
           </a:p>
           <a:p>
@@ -5354,26 +5365,26 @@
                 <a:spcPts val="200"/>
               </a:spcBef>
               <a:spcAft>
-                <a:spcPts val="1200"/>
+                <a:spcPts val="1300"/>
               </a:spcAft>
             </a:pPr>
             <a:r>
-              <a:rPr sz="1450" b="1" i="0">
+              <a:rPr sz="1500" b="1" i="0">
                 <a:solidFill>
                   <a:srgbClr val="2E869A"/>
                 </a:solidFill>
                 <a:latin typeface="Calibri"/>
               </a:rPr>
-              <a:t>Prior art, not invention (Q-Q):  </a:t>
-            </a:r>
-            <a:r>
-              <a:rPr sz="1450" b="0" i="0">
+              <a:t>Best contribution (G4):  </a:t>
+            </a:r>
+            <a:r>
+              <a:rPr sz="1500" b="0" i="0">
                 <a:solidFill>
                   <a:srgbClr val="333333"/>
                 </a:solidFill>
                 <a:latin typeface="Calibri"/>
               </a:rPr>
-              <a:t>the measurement report flagged as missing already existed in C2SIM's BML lineage - WhoMeasuredType {value, unit, phenomenon, sensor, time, place}. Re-adopt it.</a:t>
+              <a:t>one generic Detection Report (confidence + error-bound + false-positive) subsumes Video/CBRN/EW/GPR/naval-mine and resolves the whole Y-series.</a:t>
             </a:r>
           </a:p>
           <a:p>
@@ -5382,26 +5393,26 @@
                 <a:spcPts val="200"/>
               </a:spcBef>
               <a:spcAft>
-                <a:spcPts val="1200"/>
+                <a:spcPts val="1300"/>
               </a:spcAft>
             </a:pPr>
             <a:r>
-              <a:rPr sz="1450" b="1" i="0">
+              <a:rPr sz="1500" b="1" i="0">
                 <a:solidFill>
                   <a:srgbClr val="C87F0A"/>
                 </a:solidFill>
                 <a:latin typeface="Calibri"/>
               </a:rPr>
-              <a:t>Concrete schemas:  </a:t>
-            </a:r>
-            <a:r>
-              <a:rPr sz="1450" b="0" i="0">
+              <a:t>New gaps:  </a:t>
+            </a:r>
+            <a:r>
+              <a:rPr sz="1500" b="0" i="0">
                 <a:solidFill>
                   <a:srgbClr val="333333"/>
                 </a:solidFill>
                 <a:latin typeface="Calibri"/>
               </a:rPr>
-              <a:t>explanation report {event, action, reasoning, confidence} (Q-H); area map w/ per-cell value+variance (Q-M/Q-Q); on-the-loop verbs configure/suspend/ack/override (Q-K).</a:t>
+              <a:t>area-coverage/exploration goal (G2, search verbs exist); denied-comms mode + relay entity (G1, the relay verb COMREL exists); decoy role (G8, deception verbs exist); maritime cross-cue with a shared track (G3); environment conditions (G11); formation geometry (G12).</a:t>
             </a:r>
           </a:p>
           <a:p>
@@ -5410,17 +5421,17 @@
                 <a:spcPts val="200"/>
               </a:spcBef>
               <a:spcAft>
-                <a:spcPts val="1200"/>
+                <a:spcPts val="1300"/>
               </a:spcAft>
             </a:pPr>
             <a:r>
-              <a:rPr sz="1450" b="0" i="0">
+              <a:rPr sz="1500" b="0" i="0">
                 <a:solidFill>
                   <a:srgbClr val="666666"/>
                 </a:solidFill>
                 <a:latin typeface="Calibri"/>
               </a:rPr>
-              <a:t>New: capability self-report (G13/Q-V) and collective-task decomposition + report aggregation (Z1), from BML MUM-T tasking.</a:t>
+              <a:t>Neutral-actor framing is mostly covered (smx#NEUTRL hostility value; an untyped NeutralSide individual also exists). Counter-UAS, human-machine teaming, and SAR were all extracted in the later validation pass.</a:t>
             </a:r>
           </a:p>
         </p:txBody>
@@ -5584,7 +5595,7 @@
                 </a:solidFill>
                 <a:latin typeface="Calibri"/>
               </a:rPr>
-              <a:t>Decisions (1/3): model structure</a:t>
+              <a:t>Validation: the gaps are now evidenced</a:t>
             </a:r>
           </a:p>
         </p:txBody>
@@ -5597,8 +5608,42 @@
         </p:nvSpPr>
         <p:spPr>
           <a:xfrm>
-            <a:off x="640080" y="1737360"/>
-            <a:ext cx="10972800" cy="4617720"/>
+            <a:off x="548640" y="914400"/>
+            <a:ext cx="10972800" cy="320040"/>
+          </a:xfrm>
+          <a:prstGeom prst="rect">
+            <a:avLst/>
+          </a:prstGeom>
+          <a:noFill/>
+        </p:spPr>
+        <p:txBody>
+          <a:bodyPr wrap="square">
+            <a:spAutoFit/>
+          </a:bodyPr>
+          <a:lstStyle/>
+          <a:p>
+            <a:r>
+              <a:rPr sz="1300" b="0" i="1">
+                <a:solidFill>
+                  <a:srgbClr val="2E869A"/>
+                </a:solidFill>
+                <a:latin typeface="Calibri"/>
+              </a:rPr>
+              <a:t>Nine sourced missions closed the document holes</a:t>
+            </a:r>
+          </a:p>
+        </p:txBody>
+      </p:sp>
+      <p:sp>
+        <p:nvSpPr>
+          <p:cNvPr id="5" name="TextBox 4"/>
+          <p:cNvSpPr txBox="1"/>
+          <p:nvPr/>
+        </p:nvSpPr>
+        <p:spPr>
+          <a:xfrm>
+            <a:off x="640080" y="1600200"/>
+            <a:ext cx="10972800" cy="4754880"/>
           </a:xfrm>
           <a:prstGeom prst="rect">
             <a:avLst/>
@@ -5616,26 +5661,26 @@
                 <a:spcPts val="200"/>
               </a:spcBef>
               <a:spcAft>
-                <a:spcPts val="1800"/>
+                <a:spcPts val="1200"/>
               </a:spcAft>
             </a:pPr>
             <a:r>
-              <a:rPr sz="1800" b="1" i="0">
-                <a:solidFill>
-                  <a:srgbClr val="2E869A"/>
-                </a:solidFill>
-                <a:latin typeface="Calibri"/>
-              </a:rPr>
-              <a:t>Q-A  </a:t>
-            </a:r>
-            <a:r>
-              <a:rPr sz="1800" b="0" i="0">
+              <a:rPr sz="1450" b="1" i="0">
+                <a:solidFill>
+                  <a:srgbClr val="2E7D32"/>
+                </a:solidFill>
+                <a:latin typeface="Calibri"/>
+              </a:rPr>
+              <a:t>Now grounded by a real mission:  </a:t>
+            </a:r>
+            <a:r>
+              <a:rPr sz="1450" b="0" i="0">
                 <a:solidFill>
                   <a:srgbClr val="333333"/>
                 </a:solidFill>
                 <a:latin typeface="Calibri"/>
               </a:rPr>
-              <a:t>UAV/robot typing: a role on the existing Platform tree, or a parallel Robot tree?</a:t>
+              <a:t>explainability (Agrawal DroneResponse), CBRN (UGV-CBRN), EW (UAV emitter geolocation), persistence (MDARS) - all previously asserted-but-untested.</a:t>
             </a:r>
           </a:p>
           <a:p>
@@ -5644,26 +5689,26 @@
                 <a:spcPts val="200"/>
               </a:spcBef>
               <a:spcAft>
-                <a:spcPts val="1800"/>
+                <a:spcPts val="1200"/>
               </a:spcAft>
             </a:pPr>
             <a:r>
-              <a:rPr sz="1800" b="1" i="0">
+              <a:rPr sz="1450" b="1" i="0">
                 <a:solidFill>
                   <a:srgbClr val="2E869A"/>
                 </a:solidFill>
                 <a:latin typeface="Calibri"/>
               </a:rPr>
-              <a:t>Q-B  </a:t>
-            </a:r>
-            <a:r>
-              <a:rPr sz="1800" b="0" i="0">
+              <a:t>Prior art, not invention (Q-Q):  </a:t>
+            </a:r>
+            <a:r>
+              <a:rPr sz="1450" b="0" i="0">
                 <a:solidFill>
                   <a:srgbClr val="333333"/>
                 </a:solidFill>
                 <a:latin typeface="Calibri"/>
               </a:rPr>
-              <a:t>Swarm: derive from CollectiveEntity (ActorEntity) so it can be tasked.</a:t>
+              <a:t>the measurement report flagged as missing already existed in C2SIM's BML lineage - WhoMeasuredType {value, unit, phenomenon, sensor, time, place}. Re-adopt it.</a:t>
             </a:r>
           </a:p>
           <a:p>
@@ -5672,26 +5717,26 @@
                 <a:spcPts val="200"/>
               </a:spcBef>
               <a:spcAft>
-                <a:spcPts val="1800"/>
+                <a:spcPts val="1200"/>
               </a:spcAft>
             </a:pPr>
             <a:r>
-              <a:rPr sz="1800" b="1" i="0">
-                <a:solidFill>
-                  <a:srgbClr val="2E869A"/>
-                </a:solidFill>
-                <a:latin typeface="Calibri"/>
-              </a:rPr>
-              <a:t>Q-C  </a:t>
-            </a:r>
-            <a:r>
-              <a:rPr sz="1800" b="0" i="0">
+              <a:rPr sz="1450" b="1" i="0">
+                <a:solidFill>
+                  <a:srgbClr val="C87F0A"/>
+                </a:solidFill>
+                <a:latin typeface="Calibri"/>
+              </a:rPr>
+              <a:t>Concrete schemas:  </a:t>
+            </a:r>
+            <a:r>
+              <a:rPr sz="1450" b="0" i="0">
                 <a:solidFill>
                   <a:srgbClr val="333333"/>
                 </a:solidFill>
                 <a:latin typeface="Calibri"/>
               </a:rPr>
-              <a:t>Sensor: entity, class, or attribute - choose one model and apply it everywhere.</a:t>
+              <a:t>explanation report {event, action, reasoning, confidence} (Q-H); area map w/ per-cell value+variance (Q-M/Q-Q); on-the-loop verbs configure/suspend/ack/override (Q-K).</a:t>
             </a:r>
           </a:p>
           <a:p>
@@ -5700,33 +5745,24 @@
                 <a:spcPts val="200"/>
               </a:spcBef>
               <a:spcAft>
-                <a:spcPts val="1800"/>
+                <a:spcPts val="1200"/>
               </a:spcAft>
             </a:pPr>
             <a:r>
-              <a:rPr sz="1800" b="1" i="0">
-                <a:solidFill>
-                  <a:srgbClr val="2E869A"/>
-                </a:solidFill>
-                <a:latin typeface="Calibri"/>
-              </a:rPr>
-              <a:t>Q-D  </a:t>
-            </a:r>
-            <a:r>
-              <a:rPr sz="1800" b="0" i="0">
-                <a:solidFill>
-                  <a:srgbClr val="333333"/>
-                </a:solidFill>
-                <a:latin typeface="Calibri"/>
-              </a:rPr>
-              <a:t>Autonomy: choose one normative vocabulary.</a:t>
-            </a:r>
-          </a:p>
-        </p:txBody>
-      </p:sp>
-      <p:sp>
-        <p:nvSpPr>
-          <p:cNvPr id="5" name="TextBox 4"/>
+              <a:rPr sz="1450" b="0" i="0">
+                <a:solidFill>
+                  <a:srgbClr val="666666"/>
+                </a:solidFill>
+                <a:latin typeface="Calibri"/>
+              </a:rPr>
+              <a:t>New: capability self-report (G13/Q-V) and collective-task decomposition + report aggregation (Z1), from BML MUM-T tasking.</a:t>
+            </a:r>
+          </a:p>
+        </p:txBody>
+      </p:sp>
+      <p:sp>
+        <p:nvSpPr>
+          <p:cNvPr id="6" name="TextBox 5"/>
           <p:cNvSpPr txBox="1"/>
           <p:nvPr/>
         </p:nvSpPr>
@@ -5760,7 +5796,7 @@
       </p:sp>
       <p:sp>
         <p:nvSpPr>
-          <p:cNvPr id="6" name="TextBox 5"/>
+          <p:cNvPr id="7" name="TextBox 6"/>
           <p:cNvSpPr txBox="1"/>
           <p:nvPr/>
         </p:nvSpPr>
@@ -5883,7 +5919,7 @@
                 </a:solidFill>
                 <a:latin typeface="Calibri"/>
               </a:rPr>
-              <a:t>Decisions (2/3): new content types needed</a:t>
+              <a:t>Where the OWL is now (v0.0.3)</a:t>
             </a:r>
           </a:p>
         </p:txBody>
@@ -5896,8 +5932,42 @@
         </p:nvSpPr>
         <p:spPr>
           <a:xfrm>
-            <a:off x="640080" y="1463040"/>
-            <a:ext cx="10972800" cy="4754880"/>
+            <a:off x="548640" y="914400"/>
+            <a:ext cx="10972800" cy="320040"/>
+          </a:xfrm>
+          <a:prstGeom prst="rect">
+            <a:avLst/>
+          </a:prstGeom>
+          <a:noFill/>
+        </p:spPr>
+        <p:txBody>
+          <a:bodyPr wrap="square">
+            <a:spAutoFit/>
+          </a:bodyPr>
+          <a:lstStyle/>
+          <a:p>
+            <a:r>
+              <a:rPr sz="1300" b="0" i="1">
+                <a:solidFill>
+                  <a:srgbClr val="2E869A"/>
+                </a:solidFill>
+                <a:latin typeface="Calibri"/>
+              </a:rPr>
+              <a:t>Michael's update - the model is moving</a:t>
+            </a:r>
+          </a:p>
+        </p:txBody>
+      </p:sp>
+      <p:sp>
+        <p:nvSpPr>
+          <p:cNvPr id="5" name="TextBox 4"/>
+          <p:cNvSpPr txBox="1"/>
+          <p:nvPr/>
+        </p:nvSpPr>
+        <p:spPr>
+          <a:xfrm>
+            <a:off x="640080" y="1645920"/>
+            <a:ext cx="10972800" cy="4709160"/>
           </a:xfrm>
           <a:prstGeom prst="rect">
             <a:avLst/>
@@ -5915,26 +5985,26 @@
                 <a:spcPts val="200"/>
               </a:spcBef>
               <a:spcAft>
-                <a:spcPts val="800"/>
+                <a:spcPts val="1300"/>
               </a:spcAft>
             </a:pPr>
             <a:r>
-              <a:rPr sz="1350" b="1" i="0">
-                <a:solidFill>
-                  <a:srgbClr val="2E869A"/>
-                </a:solidFill>
-                <a:latin typeface="Calibri"/>
-              </a:rPr>
-              <a:t>Q-E  </a:t>
-            </a:r>
-            <a:r>
-              <a:rPr sz="1350" b="0" i="0">
+              <a:rPr sz="1500" b="1" i="0">
+                <a:solidFill>
+                  <a:srgbClr val="2E7D32"/>
+                </a:solidFill>
+                <a:latin typeface="Calibri"/>
+              </a:rPr>
+              <a:t>Started (good):  </a:t>
+            </a:r>
+            <a:r>
+              <a:rPr sz="1500" b="0" i="0">
                 <a:solidFill>
                   <a:srgbClr val="333333"/>
                 </a:solidFill>
                 <a:latin typeface="Calibri"/>
               </a:rPr>
-              <a:t>Inline entity definition for newly-observed entities in reports.</a:t>
+              <a:t>v0.0.3 begins the attribute layer (first datatype properties - v0.0.1 had none; plus further object properties) and folds the Video Detection Report into the OWL (MediaReference, MediaTypeCode, SensorObservation, VideoDetectionReportContent) + an AutonomyLevelCode model.</a:t>
             </a:r>
           </a:p>
           <a:p>
@@ -5943,26 +6013,26 @@
                 <a:spcPts val="200"/>
               </a:spcBef>
               <a:spcAft>
-                <a:spcPts val="800"/>
+                <a:spcPts val="1300"/>
               </a:spcAft>
             </a:pPr>
             <a:r>
-              <a:rPr sz="1350" b="1" i="0">
-                <a:solidFill>
-                  <a:srgbClr val="2E869A"/>
-                </a:solidFill>
-                <a:latin typeface="Calibri"/>
-              </a:rPr>
-              <a:t>Q-F  </a:t>
-            </a:r>
-            <a:r>
-              <a:rPr sz="1350" b="0" i="0">
+              <a:rPr sz="1500" b="1" i="0">
+                <a:solidFill>
+                  <a:srgbClr val="C87F0A"/>
+                </a:solidFill>
+                <a:latin typeface="Calibri"/>
+              </a:rPr>
+              <a:t>Brings a decision to a head:  </a:t>
+            </a:r>
+            <a:r>
+              <a:rPr sz="1500" b="0" i="0">
                 <a:solidFill>
                   <a:srgbClr val="333333"/>
                 </a:solidFill>
                 <a:latin typeface="Calibri"/>
               </a:rPr>
-              <a:t>MediaReference identity; separate media-format from sensor-modality.</a:t>
+              <a:t>P1 is now in the model, not yet settled - v0.0.3 declares both UAV/UGV (under Robot) and UnmannedAerial/Ground/Maritime/UnderwaterVehicle (under SMX Vehicle), so the group still picks one; the maritime ones sit under Vehicle rather than SurfaceVessel/SubsurfaceVessel.</a:t>
             </a:r>
           </a:p>
           <a:p>
@@ -5971,201 +6041,33 @@
                 <a:spcPts val="200"/>
               </a:spcBef>
               <a:spcAft>
-                <a:spcPts val="800"/>
+                <a:spcPts val="1300"/>
               </a:spcAft>
             </a:pPr>
             <a:r>
-              <a:rPr sz="1350" b="1" i="0">
+              <a:rPr sz="1500" b="1" i="0">
                 <a:solidFill>
                   <a:srgbClr val="2E869A"/>
                 </a:solidFill>
                 <a:latin typeface="Calibri"/>
               </a:rPr>
-              <a:t>Q-G  </a:t>
-            </a:r>
-            <a:r>
-              <a:rPr sz="1350" b="0" i="0">
+              <a:t>Still to define:  </a:t>
+            </a:r>
+            <a:r>
+              <a:rPr sz="1500" b="0" i="0">
                 <a:solidFill>
                   <a:srgbClr val="333333"/>
                 </a:solidFill>
                 <a:latin typeface="Calibri"/>
               </a:rPr>
-              <a:t>Robot-to-robot coordination content type + issuing authority (CASEVAC).</a:t>
-            </a:r>
-          </a:p>
-          <a:p>
-            <a:pPr>
-              <a:spcBef>
-                <a:spcPts val="200"/>
-              </a:spcBef>
-              <a:spcAft>
-                <a:spcPts val="800"/>
-              </a:spcAft>
-            </a:pPr>
-            <a:r>
-              <a:rPr sz="1350" b="1" i="0">
-                <a:solidFill>
-                  <a:srgbClr val="2E869A"/>
-                </a:solidFill>
-                <a:latin typeface="Calibri"/>
-              </a:rPr>
-              <a:t>Q-H  </a:t>
-            </a:r>
-            <a:r>
-              <a:rPr sz="1350" b="0" i="0">
-                <a:solidFill>
-                  <a:srgbClr val="333333"/>
-                </a:solidFill>
-                <a:latin typeface="Calibri"/>
-              </a:rPr>
-              <a:t>Rationale/explanation ReportContent - report why, not just what (CASEVAC).</a:t>
-            </a:r>
-          </a:p>
-          <a:p>
-            <a:pPr>
-              <a:spcBef>
-                <a:spcPts val="200"/>
-              </a:spcBef>
-              <a:spcAft>
-                <a:spcPts val="800"/>
-              </a:spcAft>
-            </a:pPr>
-            <a:r>
-              <a:rPr sz="1350" b="1" i="0">
-                <a:solidFill>
-                  <a:srgbClr val="2E869A"/>
-                </a:solidFill>
-                <a:latin typeface="Calibri"/>
-              </a:rPr>
-              <a:t>Q-I  </a:t>
-            </a:r>
-            <a:r>
-              <a:rPr sz="1350" b="0" i="0">
-                <a:solidFill>
-                  <a:srgbClr val="333333"/>
-                </a:solidFill>
-                <a:latin typeface="Calibri"/>
-              </a:rPr>
-              <a:t>Media-independent sensor-reading (value+unit+modality) + full SensorType taxonomy.</a:t>
-            </a:r>
-          </a:p>
-          <a:p>
-            <a:pPr>
-              <a:spcBef>
-                <a:spcPts val="200"/>
-              </a:spcBef>
-              <a:spcAft>
-                <a:spcPts val="800"/>
-              </a:spcAft>
-            </a:pPr>
-            <a:r>
-              <a:rPr sz="1350" b="1" i="0">
-                <a:solidFill>
-                  <a:srgbClr val="2E869A"/>
-                </a:solidFill>
-                <a:latin typeface="Calibri"/>
-              </a:rPr>
-              <a:t>Q-J  </a:t>
-            </a:r>
-            <a:r>
-              <a:rPr sz="1350" b="0" i="0">
-                <a:solidFill>
-                  <a:srgbClr val="333333"/>
-                </a:solidFill>
-                <a:latin typeface="Calibri"/>
-              </a:rPr>
-              <a:t>Swarm residuals: network params, leader role, aggregation, member lifecycle.</a:t>
-            </a:r>
-          </a:p>
-          <a:p>
-            <a:pPr>
-              <a:spcBef>
-                <a:spcPts val="200"/>
-              </a:spcBef>
-              <a:spcAft>
-                <a:spcPts val="800"/>
-              </a:spcAft>
-            </a:pPr>
-            <a:r>
-              <a:rPr sz="1350" b="1" i="0">
-                <a:solidFill>
-                  <a:srgbClr val="2E869A"/>
-                </a:solidFill>
-                <a:latin typeface="Calibri"/>
-              </a:rPr>
-              <a:t>Q-K  </a:t>
-            </a:r>
-            <a:r>
-              <a:rPr sz="1350" b="0" i="0">
-                <a:solidFill>
-                  <a:srgbClr val="333333"/>
-                </a:solidFill>
-                <a:latin typeface="Calibri"/>
-              </a:rPr>
-              <a:t>Engagement authority as a function of autonomy level (Fire Support).</a:t>
-            </a:r>
-          </a:p>
-          <a:p>
-            <a:pPr>
-              <a:spcBef>
-                <a:spcPts val="200"/>
-              </a:spcBef>
-              <a:spcAft>
-                <a:spcPts val="800"/>
-              </a:spcAft>
-            </a:pPr>
-            <a:r>
-              <a:rPr sz="1350" b="1" i="0">
-                <a:solidFill>
-                  <a:srgbClr val="2E869A"/>
-                </a:solidFill>
-                <a:latin typeface="Calibri"/>
-              </a:rPr>
-              <a:t>Q-L  </a:t>
-            </a:r>
-            <a:r>
-              <a:rPr sz="1350" b="0" i="0">
-                <a:solidFill>
-                  <a:srgbClr val="333333"/>
-                </a:solidFill>
-                <a:latin typeface="Calibri"/>
-              </a:rPr>
-              <a:t>Typed payload/effector/weapon (the action verbs already exist in LOX; only tow/salvage is a residual).</a:t>
-            </a:r>
-          </a:p>
-          <a:p>
-            <a:pPr>
-              <a:spcBef>
-                <a:spcPts val="200"/>
-              </a:spcBef>
-              <a:spcAft>
-                <a:spcPts val="800"/>
-              </a:spcAft>
-            </a:pPr>
-            <a:r>
-              <a:rPr sz="1350" b="1" i="0">
-                <a:solidFill>
-                  <a:srgbClr val="2E869A"/>
-                </a:solidFill>
-                <a:latin typeface="Calibri"/>
-              </a:rPr>
-              <a:t>Q-M  </a:t>
-            </a:r>
-            <a:r>
-              <a:rPr sz="1350" b="0" i="0">
-                <a:solidFill>
-                  <a:srgbClr val="333333"/>
-                </a:solidFill>
-                <a:latin typeface="Calibri"/>
-              </a:rPr>
-              <a:t>Let an area be the subject of a task/report (hasAffectedArea + area-state).</a:t>
-            </a:r>
-          </a:p>
-        </p:txBody>
-      </p:sp>
-      <p:sp>
-        <p:nvSpPr>
-          <p:cNvPr id="5" name="TextBox 4"/>
+              <a:t>the broader attribute set, a taskable collective (Swarm was removed; CollecticeRoboticSystem still non-actor), the generic Detection Report, and the rationale / robot-to-robot / area content - plus the two typos.</a:t>
+            </a:r>
+          </a:p>
+        </p:txBody>
+      </p:sp>
+      <p:sp>
+        <p:nvSpPr>
+          <p:cNvPr id="6" name="TextBox 5"/>
           <p:cNvSpPr txBox="1"/>
           <p:nvPr/>
         </p:nvSpPr>
@@ -6199,7 +6101,7 @@
       </p:sp>
       <p:sp>
         <p:nvSpPr>
-          <p:cNvPr id="6" name="TextBox 5"/>
+          <p:cNvPr id="7" name="TextBox 6"/>
           <p:cNvSpPr txBox="1"/>
           <p:nvPr/>
         </p:nvSpPr>
@@ -6322,7 +6224,7 @@
                 </a:solidFill>
                 <a:latin typeface="Calibri"/>
               </a:rPr>
-              <a:t>Decisions (3/3): from the sourced scenarios</a:t>
+              <a:t>Decisions (1/3): model structure</a:t>
             </a:r>
           </a:p>
         </p:txBody>
@@ -6335,8 +6237,8 @@
         </p:nvSpPr>
         <p:spPr>
           <a:xfrm>
-            <a:off x="640080" y="1417320"/>
-            <a:ext cx="10972800" cy="4754880"/>
+            <a:off x="640080" y="1737360"/>
+            <a:ext cx="10972800" cy="4617720"/>
           </a:xfrm>
           <a:prstGeom prst="rect">
             <a:avLst/>
@@ -6354,26 +6256,26 @@
                 <a:spcPts val="200"/>
               </a:spcBef>
               <a:spcAft>
-                <a:spcPts val="700"/>
+                <a:spcPts val="1800"/>
               </a:spcAft>
             </a:pPr>
             <a:r>
-              <a:rPr sz="1300" b="1" i="0">
+              <a:rPr sz="1800" b="1" i="0">
                 <a:solidFill>
                   <a:srgbClr val="2E869A"/>
                 </a:solidFill>
                 <a:latin typeface="Calibri"/>
               </a:rPr>
-              <a:t>Q-N  </a:t>
-            </a:r>
-            <a:r>
-              <a:rPr sz="1300" b="0" i="0">
+              <a:t>Q-A  </a:t>
+            </a:r>
+            <a:r>
+              <a:rPr sz="1800" b="0" i="0">
                 <a:solidFill>
                   <a:srgbClr val="333333"/>
                 </a:solidFill>
                 <a:latin typeface="Calibri"/>
               </a:rPr>
-              <a:t>Area-coverage / exploration goal (explore-until-covered) - search verbs already exist.</a:t>
+              <a:t>UAV/robot typing: a role on the existing Platform tree, or a parallel Robot tree?</a:t>
             </a:r>
           </a:p>
           <a:p>
@@ -6382,26 +6284,26 @@
                 <a:spcPts val="200"/>
               </a:spcBef>
               <a:spcAft>
-                <a:spcPts val="700"/>
+                <a:spcPts val="1800"/>
               </a:spcAft>
             </a:pPr>
             <a:r>
-              <a:rPr sz="1300" b="1" i="0">
+              <a:rPr sz="1800" b="1" i="0">
                 <a:solidFill>
                   <a:srgbClr val="2E869A"/>
                 </a:solidFill>
                 <a:latin typeface="Calibri"/>
               </a:rPr>
-              <a:t>Q-O  </a:t>
-            </a:r>
-            <a:r>
-              <a:rPr sz="1300" b="0" i="0">
+              <a:t>Q-B  </a:t>
+            </a:r>
+            <a:r>
+              <a:rPr sz="1800" b="0" i="0">
                 <a:solidFill>
                   <a:srgbClr val="333333"/>
                 </a:solidFill>
                 <a:latin typeface="Calibri"/>
               </a:rPr>
-              <a:t>Denied-comms operating mode + deployable relay entity (the relay verb lox#COMREL already exists).</a:t>
+              <a:t>Swarm: derive from CollectiveEntity (ActorEntity) so it can be tasked.</a:t>
             </a:r>
           </a:p>
           <a:p>
@@ -6410,26 +6312,26 @@
                 <a:spcPts val="200"/>
               </a:spcBef>
               <a:spcAft>
-                <a:spcPts val="700"/>
+                <a:spcPts val="1800"/>
               </a:spcAft>
             </a:pPr>
             <a:r>
-              <a:rPr sz="1300" b="1" i="0">
+              <a:rPr sz="1800" b="1" i="0">
                 <a:solidFill>
                   <a:srgbClr val="2E869A"/>
                 </a:solidFill>
                 <a:latin typeface="Calibri"/>
               </a:rPr>
-              <a:t>Q-P  </a:t>
-            </a:r>
-            <a:r>
-              <a:rPr sz="1300" b="0" i="0">
+              <a:t>Q-C  </a:t>
+            </a:r>
+            <a:r>
+              <a:rPr sz="1800" b="0" i="0">
                 <a:solidFill>
                   <a:srgbClr val="333333"/>
                 </a:solidFill>
                 <a:latin typeface="Calibri"/>
               </a:rPr>
-              <a:t>Cross-cueing: system-to-system tasking + shared classified track/contact (extends Q-G).</a:t>
+              <a:t>Sensor: entity, class, or attribute - choose one model and apply it everywhere.</a:t>
             </a:r>
           </a:p>
           <a:p>
@@ -6438,166 +6340,26 @@
                 <a:spcPts val="200"/>
               </a:spcBef>
               <a:spcAft>
-                <a:spcPts val="700"/>
+                <a:spcPts val="1800"/>
               </a:spcAft>
             </a:pPr>
             <a:r>
-              <a:rPr sz="1300" b="1" i="0">
+              <a:rPr sz="1800" b="1" i="0">
                 <a:solidFill>
                   <a:srgbClr val="2E869A"/>
                 </a:solidFill>
                 <a:latin typeface="Calibri"/>
               </a:rPr>
-              <a:t>Q-Q  </a:t>
-            </a:r>
-            <a:r>
-              <a:rPr sz="1300" b="0" i="0">
+              <a:t>Q-D  </a:t>
+            </a:r>
+            <a:r>
+              <a:rPr sz="1800" b="0" i="0">
                 <a:solidFill>
                   <a:srgbClr val="333333"/>
                 </a:solidFill>
                 <a:latin typeface="Calibri"/>
               </a:rPr>
-              <a:t>One generic Detection Report (confidence + error-bound + false-positive) - resolves the Y-series (extends Q-I).</a:t>
-            </a:r>
-          </a:p>
-          <a:p>
-            <a:pPr>
-              <a:spcBef>
-                <a:spcPts val="200"/>
-              </a:spcBef>
-              <a:spcAft>
-                <a:spcPts val="700"/>
-              </a:spcAft>
-            </a:pPr>
-            <a:r>
-              <a:rPr sz="1300" b="1" i="0">
-                <a:solidFill>
-                  <a:srgbClr val="2E869A"/>
-                </a:solidFill>
-                <a:latin typeface="Calibri"/>
-              </a:rPr>
-              <a:t>Q-R  </a:t>
-            </a:r>
-            <a:r>
-              <a:rPr sz="1300" b="0" i="0">
-                <a:solidFill>
-                  <a:srgbClr val="333333"/>
-                </a:solidFill>
-                <a:latin typeface="Calibri"/>
-              </a:rPr>
-              <a:t>Platform locomotion/role subtypes: wheeled/tracked/legged UGV; detector/neutralizer USV (extends Q-A).</a:t>
-            </a:r>
-          </a:p>
-          <a:p>
-            <a:pPr>
-              <a:spcBef>
-                <a:spcPts val="200"/>
-              </a:spcBef>
-              <a:spcAft>
-                <a:spcPts val="700"/>
-              </a:spcAft>
-            </a:pPr>
-            <a:r>
-              <a:rPr sz="1300" b="1" i="0">
-                <a:solidFill>
-                  <a:srgbClr val="2E869A"/>
-                </a:solidFill>
-                <a:latin typeface="Calibri"/>
-              </a:rPr>
-              <a:t>Q-S  </a:t>
-            </a:r>
-            <a:r>
-              <a:rPr sz="1300" b="0" i="0">
-                <a:solidFill>
-                  <a:srgbClr val="333333"/>
-                </a:solidFill>
-                <a:latin typeface="Calibri"/>
-              </a:rPr>
-              <a:t>Decoy/deception behavior + threat-aware order annotations.</a:t>
-            </a:r>
-          </a:p>
-          <a:p>
-            <a:pPr>
-              <a:spcBef>
-                <a:spcPts val="200"/>
-              </a:spcBef>
-              <a:spcAft>
-                <a:spcPts val="700"/>
-              </a:spcAft>
-            </a:pPr>
-            <a:r>
-              <a:rPr sz="1300" b="1" i="0">
-                <a:solidFill>
-                  <a:srgbClr val="2E869A"/>
-                </a:solidFill>
-                <a:latin typeface="Calibri"/>
-              </a:rPr>
-              <a:t>Q-T  </a:t>
-            </a:r>
-            <a:r>
-              <a:rPr sz="1300" b="0" i="0">
-                <a:solidFill>
-                  <a:srgbClr val="333333"/>
-                </a:solidFill>
-                <a:latin typeface="Calibri"/>
-              </a:rPr>
-              <a:t>Operating-environment condition attributes (GPS-denied, illumination, sea-state, terrain).</a:t>
-            </a:r>
-          </a:p>
-          <a:p>
-            <a:pPr>
-              <a:spcBef>
-                <a:spcPts val="200"/>
-              </a:spcBef>
-              <a:spcAft>
-                <a:spcPts val="700"/>
-              </a:spcAft>
-            </a:pPr>
-            <a:r>
-              <a:rPr sz="1300" b="1" i="0">
-                <a:solidFill>
-                  <a:srgbClr val="2E869A"/>
-                </a:solidFill>
-                <a:latin typeface="Calibri"/>
-              </a:rPr>
-              <a:t>Q-U  </a:t>
-            </a:r>
-            <a:r>
-              <a:rPr sz="1300" b="0" i="0">
-                <a:solidFill>
-                  <a:srgbClr val="333333"/>
-                </a:solidFill>
-                <a:latin typeface="Calibri"/>
-              </a:rPr>
-              <a:t>Formation / relative-geometry construct (orbit, convoy spacing) beyond single RelativeLocation.</a:t>
-            </a:r>
-          </a:p>
-          <a:p>
-            <a:pPr>
-              <a:spcBef>
-                <a:spcPts val="200"/>
-              </a:spcBef>
-              <a:spcAft>
-                <a:spcPts val="700"/>
-              </a:spcAft>
-            </a:pPr>
-            <a:r>
-              <a:rPr sz="1300" b="1" i="0">
-                <a:solidFill>
-                  <a:srgbClr val="2E869A"/>
-                </a:solidFill>
-                <a:latin typeface="Calibri"/>
-              </a:rPr>
-              <a:t>Q-V  </a:t>
-            </a:r>
-            <a:r>
-              <a:rPr sz="1300" b="0" i="0">
-                <a:solidFill>
-                  <a:srgbClr val="333333"/>
-                </a:solidFill>
-                <a:latin typeface="Calibri"/>
-              </a:rPr>
-              <a:t>Capability self-report (robot declares mounted equipment; assign by capability) - BML WhoHoldingType.</a:t>
+              <a:t>Autonomy: choose one normative vocabulary.</a:t>
             </a:r>
           </a:p>
         </p:txBody>
@@ -6761,7 +6523,7 @@
                 </a:solidFill>
                 <a:latin typeface="Calibri"/>
               </a:rPr>
-              <a:t>Proposed fixes</a:t>
+              <a:t>Decisions (2/3): new content types needed</a:t>
             </a:r>
           </a:p>
         </p:txBody>
@@ -6774,41 +6536,7 @@
         </p:nvSpPr>
         <p:spPr>
           <a:xfrm>
-            <a:off x="548640" y="914400"/>
-            <a:ext cx="10972800" cy="320040"/>
-          </a:xfrm>
-          <a:prstGeom prst="rect">
-            <a:avLst/>
-          </a:prstGeom>
-          <a:noFill/>
-        </p:spPr>
-        <p:txBody>
-          <a:bodyPr wrap="square">
-            <a:spAutoFit/>
-          </a:bodyPr>
-          <a:lstStyle/>
-          <a:p>
-            <a:r>
-              <a:rPr sz="1300" b="0" i="1">
-                <a:solidFill>
-                  <a:srgbClr val="2E869A"/>
-                </a:solidFill>
-                <a:latin typeface="Calibri"/>
-              </a:rPr>
-              <a:t>Pending group buy-in - nothing applied to the model</a:t>
-            </a:r>
-          </a:p>
-        </p:txBody>
-      </p:sp>
-      <p:sp>
-        <p:nvSpPr>
-          <p:cNvPr id="5" name="TextBox 4"/>
-          <p:cNvSpPr txBox="1"/>
-          <p:nvPr/>
-        </p:nvSpPr>
-        <p:spPr>
-          <a:xfrm>
-            <a:off x="640080" y="1554480"/>
+            <a:off x="640080" y="1463040"/>
             <a:ext cx="10972800" cy="4754880"/>
           </a:xfrm>
           <a:prstGeom prst="rect">
@@ -6827,26 +6555,26 @@
                 <a:spcPts val="200"/>
               </a:spcBef>
               <a:spcAft>
-                <a:spcPts val="1300"/>
+                <a:spcPts val="800"/>
               </a:spcAft>
             </a:pPr>
             <a:r>
-              <a:rPr sz="1400" b="1" i="0">
-                <a:solidFill>
-                  <a:srgbClr val="2E7D32"/>
-                </a:solidFill>
-                <a:latin typeface="Calibri"/>
-              </a:rPr>
-              <a:t>Safe corrections (unambiguous):  </a:t>
-            </a:r>
-            <a:r>
-              <a:rPr sz="1400" b="0" i="0">
+              <a:rPr sz="1350" b="1" i="0">
+                <a:solidFill>
+                  <a:srgbClr val="2E869A"/>
+                </a:solidFill>
+                <a:latin typeface="Calibri"/>
+              </a:rPr>
+              <a:t>Q-E  </a:t>
+            </a:r>
+            <a:r>
+              <a:rPr sz="1350" b="0" i="0">
                 <a:solidFill>
                   <a:srgbClr val="333333"/>
                 </a:solidFill>
                 <a:latin typeface="Calibri"/>
               </a:rPr>
-              <a:t>class typo CollecticeRoboticSystem -&gt; Collective (O1); versionInfo Extrension -&gt; Extension (O2); file CSIM_ASX -&gt; C2SIM_ASX (O3); hasStartTime UUIDBase -&gt; TimeInstant (M7); unify namespace label ASX / C2SIM_ASX (M8).</a:t>
+              <a:t>Inline entity definition for newly-observed entities in reports.</a:t>
             </a:r>
           </a:p>
           <a:p>
@@ -6855,26 +6583,26 @@
                 <a:spcPts val="200"/>
               </a:spcBef>
               <a:spcAft>
-                <a:spcPts val="1300"/>
+                <a:spcPts val="800"/>
               </a:spcAft>
             </a:pPr>
             <a:r>
-              <a:rPr sz="1400" b="1" i="0">
-                <a:solidFill>
-                  <a:srgbClr val="C87F0A"/>
-                </a:solidFill>
-                <a:latin typeface="Calibri"/>
-              </a:rPr>
-              <a:t>Structural (decide first):  </a:t>
-            </a:r>
-            <a:r>
-              <a:rPr sz="1400" b="0" i="0">
+              <a:rPr sz="1350" b="1" i="0">
+                <a:solidFill>
+                  <a:srgbClr val="2E869A"/>
+                </a:solidFill>
+                <a:latin typeface="Calibri"/>
+              </a:rPr>
+              <a:t>Q-F  </a:t>
+            </a:r>
+            <a:r>
+              <a:rPr sz="1350" b="0" i="0">
                 <a:solidFill>
                   <a:srgbClr val="333333"/>
                 </a:solidFill>
                 <a:latin typeface="Calibri"/>
               </a:rPr>
-              <a:t>UAV/robot typing (Q-A); Swarm -&gt; CollectiveEntity so it is taskable (Q-B); one sensor model (Q-C); one autonomy vocabulary (Q-D).</a:t>
+              <a:t>MediaReference identity; separate media-format from sensor-modality.</a:t>
             </a:r>
           </a:p>
           <a:p>
@@ -6883,26 +6611,26 @@
                 <a:spcPts val="200"/>
               </a:spcBef>
               <a:spcAft>
-                <a:spcPts val="1300"/>
+                <a:spcPts val="800"/>
               </a:spcAft>
             </a:pPr>
             <a:r>
-              <a:rPr sz="1400" b="1" i="0">
+              <a:rPr sz="1350" b="1" i="0">
                 <a:solidFill>
                   <a:srgbClr val="2E869A"/>
                 </a:solidFill>
                 <a:latin typeface="Calibri"/>
               </a:rPr>
-              <a:t>New content (design):  </a:t>
-            </a:r>
-            <a:r>
-              <a:rPr sz="1400" b="0" i="0">
+              <a:t>Q-G  </a:t>
+            </a:r>
+            <a:r>
+              <a:rPr sz="1350" b="0" i="0">
                 <a:solidFill>
                   <a:srgbClr val="333333"/>
                 </a:solidFill>
                 <a:latin typeface="Calibri"/>
               </a:rPr>
-              <a:t>inline entity def (Q-E), MediaReference (Q-F), robot-to-robot + cross-cue (Q-G/Q-P), rationale report (Q-H), generic detection report (Q-I/Q-Q), swarm residuals (Q-J), engagement authority (Q-K), payload/effector/weapon typing (Q-L), area subject (Q-M), explore order (Q-N), denied-comms/relay (Q-O), locomotion subtypes (Q-R), decoy/threat-aware (Q-S), environment conditions (Q-T), formation geometry (Q-U).</a:t>
+              <a:t>Robot-to-robot coordination content type + issuing authority (CASEVAC).</a:t>
             </a:r>
           </a:p>
           <a:p>
@@ -6911,24 +6639,173 @@
                 <a:spcPts val="200"/>
               </a:spcBef>
               <a:spcAft>
-                <a:spcPts val="1300"/>
+                <a:spcPts val="800"/>
               </a:spcAft>
             </a:pPr>
             <a:r>
-              <a:rPr sz="1400" b="1" i="0">
+              <a:rPr sz="1350" b="1" i="0">
+                <a:solidFill>
+                  <a:srgbClr val="2E869A"/>
+                </a:solidFill>
+                <a:latin typeface="Calibri"/>
+              </a:rPr>
+              <a:t>Q-H  </a:t>
+            </a:r>
+            <a:r>
+              <a:rPr sz="1350" b="0" i="0">
                 <a:solidFill>
                   <a:srgbClr val="333333"/>
                 </a:solidFill>
                 <a:latin typeface="Calibri"/>
               </a:rPr>
-              <a:t>Nothing here is applied to the model - all items are proposals for group buy-in.</a:t>
-            </a:r>
-          </a:p>
-        </p:txBody>
-      </p:sp>
-      <p:sp>
-        <p:nvSpPr>
-          <p:cNvPr id="6" name="TextBox 5"/>
+              <a:t>Rationale/explanation ReportContent - report why, not just what (CASEVAC).</a:t>
+            </a:r>
+          </a:p>
+          <a:p>
+            <a:pPr>
+              <a:spcBef>
+                <a:spcPts val="200"/>
+              </a:spcBef>
+              <a:spcAft>
+                <a:spcPts val="800"/>
+              </a:spcAft>
+            </a:pPr>
+            <a:r>
+              <a:rPr sz="1350" b="1" i="0">
+                <a:solidFill>
+                  <a:srgbClr val="2E869A"/>
+                </a:solidFill>
+                <a:latin typeface="Calibri"/>
+              </a:rPr>
+              <a:t>Q-I  </a:t>
+            </a:r>
+            <a:r>
+              <a:rPr sz="1350" b="0" i="0">
+                <a:solidFill>
+                  <a:srgbClr val="333333"/>
+                </a:solidFill>
+                <a:latin typeface="Calibri"/>
+              </a:rPr>
+              <a:t>Media-independent sensor-reading (value+unit+modality) + full SensorType taxonomy.</a:t>
+            </a:r>
+          </a:p>
+          <a:p>
+            <a:pPr>
+              <a:spcBef>
+                <a:spcPts val="200"/>
+              </a:spcBef>
+              <a:spcAft>
+                <a:spcPts val="800"/>
+              </a:spcAft>
+            </a:pPr>
+            <a:r>
+              <a:rPr sz="1350" b="1" i="0">
+                <a:solidFill>
+                  <a:srgbClr val="2E869A"/>
+                </a:solidFill>
+                <a:latin typeface="Calibri"/>
+              </a:rPr>
+              <a:t>Q-J  </a:t>
+            </a:r>
+            <a:r>
+              <a:rPr sz="1350" b="0" i="0">
+                <a:solidFill>
+                  <a:srgbClr val="333333"/>
+                </a:solidFill>
+                <a:latin typeface="Calibri"/>
+              </a:rPr>
+              <a:t>Swarm residuals: network params, leader role, aggregation, member lifecycle.</a:t>
+            </a:r>
+          </a:p>
+          <a:p>
+            <a:pPr>
+              <a:spcBef>
+                <a:spcPts val="200"/>
+              </a:spcBef>
+              <a:spcAft>
+                <a:spcPts val="800"/>
+              </a:spcAft>
+            </a:pPr>
+            <a:r>
+              <a:rPr sz="1350" b="1" i="0">
+                <a:solidFill>
+                  <a:srgbClr val="2E869A"/>
+                </a:solidFill>
+                <a:latin typeface="Calibri"/>
+              </a:rPr>
+              <a:t>Q-K  </a:t>
+            </a:r>
+            <a:r>
+              <a:rPr sz="1350" b="0" i="0">
+                <a:solidFill>
+                  <a:srgbClr val="333333"/>
+                </a:solidFill>
+                <a:latin typeface="Calibri"/>
+              </a:rPr>
+              <a:t>Engagement authority as a function of autonomy level (Fire Support).</a:t>
+            </a:r>
+          </a:p>
+          <a:p>
+            <a:pPr>
+              <a:spcBef>
+                <a:spcPts val="200"/>
+              </a:spcBef>
+              <a:spcAft>
+                <a:spcPts val="800"/>
+              </a:spcAft>
+            </a:pPr>
+            <a:r>
+              <a:rPr sz="1350" b="1" i="0">
+                <a:solidFill>
+                  <a:srgbClr val="2E869A"/>
+                </a:solidFill>
+                <a:latin typeface="Calibri"/>
+              </a:rPr>
+              <a:t>Q-L  </a:t>
+            </a:r>
+            <a:r>
+              <a:rPr sz="1350" b="0" i="0">
+                <a:solidFill>
+                  <a:srgbClr val="333333"/>
+                </a:solidFill>
+                <a:latin typeface="Calibri"/>
+              </a:rPr>
+              <a:t>Typed payload/effector/weapon (the action verbs already exist in LOX; only tow/salvage is a residual).</a:t>
+            </a:r>
+          </a:p>
+          <a:p>
+            <a:pPr>
+              <a:spcBef>
+                <a:spcPts val="200"/>
+              </a:spcBef>
+              <a:spcAft>
+                <a:spcPts val="800"/>
+              </a:spcAft>
+            </a:pPr>
+            <a:r>
+              <a:rPr sz="1350" b="1" i="0">
+                <a:solidFill>
+                  <a:srgbClr val="2E869A"/>
+                </a:solidFill>
+                <a:latin typeface="Calibri"/>
+              </a:rPr>
+              <a:t>Q-M  </a:t>
+            </a:r>
+            <a:r>
+              <a:rPr sz="1350" b="0" i="0">
+                <a:solidFill>
+                  <a:srgbClr val="333333"/>
+                </a:solidFill>
+                <a:latin typeface="Calibri"/>
+              </a:rPr>
+              <a:t>Let an area be the subject of a task/report (hasAffectedArea + area-state).</a:t>
+            </a:r>
+          </a:p>
+        </p:txBody>
+      </p:sp>
+      <p:sp>
+        <p:nvSpPr>
+          <p:cNvPr id="5" name="TextBox 4"/>
           <p:cNvSpPr txBox="1"/>
           <p:nvPr/>
         </p:nvSpPr>
@@ -6962,7 +6839,7 @@
       </p:sp>
       <p:sp>
         <p:nvSpPr>
-          <p:cNvPr id="7" name="TextBox 6"/>
+          <p:cNvPr id="6" name="TextBox 5"/>
           <p:cNvSpPr txBox="1"/>
           <p:nvPr/>
         </p:nvSpPr>
@@ -7151,11 +7028,11 @@
                 <a:spcPts val="200"/>
               </a:spcBef>
               <a:spcAft>
-                <a:spcPts val="1400"/>
+                <a:spcPts val="1300"/>
               </a:spcAft>
             </a:pPr>
             <a:r>
-              <a:rPr sz="1800" b="0" i="0">
+              <a:rPr sz="1700" b="0" i="0">
                 <a:solidFill>
                   <a:srgbClr val="333333"/>
                 </a:solidFill>
@@ -7170,17 +7047,17 @@
                 <a:spcPts val="200"/>
               </a:spcBef>
               <a:spcAft>
-                <a:spcPts val="1400"/>
+                <a:spcPts val="1300"/>
               </a:spcAft>
             </a:pPr>
             <a:r>
-              <a:rPr sz="1800" b="0" i="0">
+              <a:rPr sz="1700" b="0" i="0">
                 <a:solidFill>
                   <a:srgbClr val="333333"/>
                 </a:solidFill>
                 <a:latin typeface="Calibri"/>
               </a:rPr>
-              <a:t>Where a proposed element cannot be instantiated cleanly, a concrete problem surfaces - that is the signal we want.</a:t>
+              <a:t>The ASX model is an early work-in-progress (v0.0.x) and the message instances are still being put in place - instantiation is how we build those instances and surface what is still to be defined.</a:t>
             </a:r>
           </a:p>
           <a:p>
@@ -7189,17 +7066,17 @@
                 <a:spcPts val="200"/>
               </a:spcBef>
               <a:spcAft>
-                <a:spcPts val="1400"/>
+                <a:spcPts val="1300"/>
               </a:spcAft>
             </a:pPr>
             <a:r>
-              <a:rPr sz="1800" b="0" i="0">
+              <a:rPr sz="1700" b="0" i="0">
                 <a:solidFill>
                   <a:srgbClr val="333333"/>
                 </a:solidFill>
                 <a:latin typeface="Calibri"/>
               </a:rPr>
-              <a:t>This review focused on Initialization (which had zero worked examples) and the CASEVAC scenario, and cross-checked the OWL model against the spreadsheets.</a:t>
+              <a:t>Where a proposed element is not yet defined enough to instantiate cleanly, that marks a concrete thing to specify next - not a defect.</a:t>
             </a:r>
           </a:p>
           <a:p>
@@ -7208,17 +7085,17 @@
                 <a:spcPts val="200"/>
               </a:spcBef>
               <a:spcAft>
-                <a:spcPts val="1400"/>
+                <a:spcPts val="1300"/>
               </a:spcAft>
             </a:pPr>
             <a:r>
-              <a:rPr sz="1800" b="0" i="0">
+              <a:rPr sz="1700" b="0" i="0">
                 <a:solidFill>
                   <a:srgbClr val="333333"/>
                 </a:solidFill>
                 <a:latin typeface="Calibri"/>
               </a:rPr>
-              <a:t>Findings are framed as decisions for the group, not as objections to the approach - the approach is working.</a:t>
+              <a:t>Everything here is decisions and to-define items for the group; the approach is working.</a:t>
             </a:r>
           </a:p>
         </p:txBody>
@@ -7382,6 +7259,769 @@
                 </a:solidFill>
                 <a:latin typeface="Calibri"/>
               </a:rPr>
+              <a:t>Decisions (3/3): from the sourced scenarios</a:t>
+            </a:r>
+          </a:p>
+        </p:txBody>
+      </p:sp>
+      <p:sp>
+        <p:nvSpPr>
+          <p:cNvPr id="4" name="TextBox 3"/>
+          <p:cNvSpPr txBox="1"/>
+          <p:nvPr/>
+        </p:nvSpPr>
+        <p:spPr>
+          <a:xfrm>
+            <a:off x="640080" y="1417320"/>
+            <a:ext cx="10972800" cy="4754880"/>
+          </a:xfrm>
+          <a:prstGeom prst="rect">
+            <a:avLst/>
+          </a:prstGeom>
+          <a:noFill/>
+        </p:spPr>
+        <p:txBody>
+          <a:bodyPr wrap="square">
+            <a:spAutoFit/>
+          </a:bodyPr>
+          <a:lstStyle/>
+          <a:p>
+            <a:pPr>
+              <a:spcBef>
+                <a:spcPts val="200"/>
+              </a:spcBef>
+              <a:spcAft>
+                <a:spcPts val="700"/>
+              </a:spcAft>
+            </a:pPr>
+            <a:r>
+              <a:rPr sz="1300" b="1" i="0">
+                <a:solidFill>
+                  <a:srgbClr val="2E869A"/>
+                </a:solidFill>
+                <a:latin typeface="Calibri"/>
+              </a:rPr>
+              <a:t>Q-N  </a:t>
+            </a:r>
+            <a:r>
+              <a:rPr sz="1300" b="0" i="0">
+                <a:solidFill>
+                  <a:srgbClr val="333333"/>
+                </a:solidFill>
+                <a:latin typeface="Calibri"/>
+              </a:rPr>
+              <a:t>Area-coverage / exploration goal (explore-until-covered) - search verbs already exist.</a:t>
+            </a:r>
+          </a:p>
+          <a:p>
+            <a:pPr>
+              <a:spcBef>
+                <a:spcPts val="200"/>
+              </a:spcBef>
+              <a:spcAft>
+                <a:spcPts val="700"/>
+              </a:spcAft>
+            </a:pPr>
+            <a:r>
+              <a:rPr sz="1300" b="1" i="0">
+                <a:solidFill>
+                  <a:srgbClr val="2E869A"/>
+                </a:solidFill>
+                <a:latin typeface="Calibri"/>
+              </a:rPr>
+              <a:t>Q-O  </a:t>
+            </a:r>
+            <a:r>
+              <a:rPr sz="1300" b="0" i="0">
+                <a:solidFill>
+                  <a:srgbClr val="333333"/>
+                </a:solidFill>
+                <a:latin typeface="Calibri"/>
+              </a:rPr>
+              <a:t>Denied-comms operating mode + deployable relay entity (the relay verb lox#COMREL already exists).</a:t>
+            </a:r>
+          </a:p>
+          <a:p>
+            <a:pPr>
+              <a:spcBef>
+                <a:spcPts val="200"/>
+              </a:spcBef>
+              <a:spcAft>
+                <a:spcPts val="700"/>
+              </a:spcAft>
+            </a:pPr>
+            <a:r>
+              <a:rPr sz="1300" b="1" i="0">
+                <a:solidFill>
+                  <a:srgbClr val="2E869A"/>
+                </a:solidFill>
+                <a:latin typeface="Calibri"/>
+              </a:rPr>
+              <a:t>Q-P  </a:t>
+            </a:r>
+            <a:r>
+              <a:rPr sz="1300" b="0" i="0">
+                <a:solidFill>
+                  <a:srgbClr val="333333"/>
+                </a:solidFill>
+                <a:latin typeface="Calibri"/>
+              </a:rPr>
+              <a:t>Cross-cueing: system-to-system tasking + shared classified track/contact (extends Q-G).</a:t>
+            </a:r>
+          </a:p>
+          <a:p>
+            <a:pPr>
+              <a:spcBef>
+                <a:spcPts val="200"/>
+              </a:spcBef>
+              <a:spcAft>
+                <a:spcPts val="700"/>
+              </a:spcAft>
+            </a:pPr>
+            <a:r>
+              <a:rPr sz="1300" b="1" i="0">
+                <a:solidFill>
+                  <a:srgbClr val="2E869A"/>
+                </a:solidFill>
+                <a:latin typeface="Calibri"/>
+              </a:rPr>
+              <a:t>Q-Q  </a:t>
+            </a:r>
+            <a:r>
+              <a:rPr sz="1300" b="0" i="0">
+                <a:solidFill>
+                  <a:srgbClr val="333333"/>
+                </a:solidFill>
+                <a:latin typeface="Calibri"/>
+              </a:rPr>
+              <a:t>One generic Detection Report (confidence + error-bound + false-positive) - resolves the Y-series (extends Q-I).</a:t>
+            </a:r>
+          </a:p>
+          <a:p>
+            <a:pPr>
+              <a:spcBef>
+                <a:spcPts val="200"/>
+              </a:spcBef>
+              <a:spcAft>
+                <a:spcPts val="700"/>
+              </a:spcAft>
+            </a:pPr>
+            <a:r>
+              <a:rPr sz="1300" b="1" i="0">
+                <a:solidFill>
+                  <a:srgbClr val="2E869A"/>
+                </a:solidFill>
+                <a:latin typeface="Calibri"/>
+              </a:rPr>
+              <a:t>Q-R  </a:t>
+            </a:r>
+            <a:r>
+              <a:rPr sz="1300" b="0" i="0">
+                <a:solidFill>
+                  <a:srgbClr val="333333"/>
+                </a:solidFill>
+                <a:latin typeface="Calibri"/>
+              </a:rPr>
+              <a:t>Platform locomotion/role subtypes: wheeled/tracked/legged UGV; detector/neutralizer USV (extends Q-A).</a:t>
+            </a:r>
+          </a:p>
+          <a:p>
+            <a:pPr>
+              <a:spcBef>
+                <a:spcPts val="200"/>
+              </a:spcBef>
+              <a:spcAft>
+                <a:spcPts val="700"/>
+              </a:spcAft>
+            </a:pPr>
+            <a:r>
+              <a:rPr sz="1300" b="1" i="0">
+                <a:solidFill>
+                  <a:srgbClr val="2E869A"/>
+                </a:solidFill>
+                <a:latin typeface="Calibri"/>
+              </a:rPr>
+              <a:t>Q-S  </a:t>
+            </a:r>
+            <a:r>
+              <a:rPr sz="1300" b="0" i="0">
+                <a:solidFill>
+                  <a:srgbClr val="333333"/>
+                </a:solidFill>
+                <a:latin typeface="Calibri"/>
+              </a:rPr>
+              <a:t>Decoy/deception behavior + threat-aware order annotations.</a:t>
+            </a:r>
+          </a:p>
+          <a:p>
+            <a:pPr>
+              <a:spcBef>
+                <a:spcPts val="200"/>
+              </a:spcBef>
+              <a:spcAft>
+                <a:spcPts val="700"/>
+              </a:spcAft>
+            </a:pPr>
+            <a:r>
+              <a:rPr sz="1300" b="1" i="0">
+                <a:solidFill>
+                  <a:srgbClr val="2E869A"/>
+                </a:solidFill>
+                <a:latin typeface="Calibri"/>
+              </a:rPr>
+              <a:t>Q-T  </a:t>
+            </a:r>
+            <a:r>
+              <a:rPr sz="1300" b="0" i="0">
+                <a:solidFill>
+                  <a:srgbClr val="333333"/>
+                </a:solidFill>
+                <a:latin typeface="Calibri"/>
+              </a:rPr>
+              <a:t>Operating-environment condition attributes (GPS-denied, illumination, sea-state, terrain).</a:t>
+            </a:r>
+          </a:p>
+          <a:p>
+            <a:pPr>
+              <a:spcBef>
+                <a:spcPts val="200"/>
+              </a:spcBef>
+              <a:spcAft>
+                <a:spcPts val="700"/>
+              </a:spcAft>
+            </a:pPr>
+            <a:r>
+              <a:rPr sz="1300" b="1" i="0">
+                <a:solidFill>
+                  <a:srgbClr val="2E869A"/>
+                </a:solidFill>
+                <a:latin typeface="Calibri"/>
+              </a:rPr>
+              <a:t>Q-U  </a:t>
+            </a:r>
+            <a:r>
+              <a:rPr sz="1300" b="0" i="0">
+                <a:solidFill>
+                  <a:srgbClr val="333333"/>
+                </a:solidFill>
+                <a:latin typeface="Calibri"/>
+              </a:rPr>
+              <a:t>Formation / relative-geometry construct (orbit, convoy spacing) beyond single RelativeLocation.</a:t>
+            </a:r>
+          </a:p>
+          <a:p>
+            <a:pPr>
+              <a:spcBef>
+                <a:spcPts val="200"/>
+              </a:spcBef>
+              <a:spcAft>
+                <a:spcPts val="700"/>
+              </a:spcAft>
+            </a:pPr>
+            <a:r>
+              <a:rPr sz="1300" b="1" i="0">
+                <a:solidFill>
+                  <a:srgbClr val="2E869A"/>
+                </a:solidFill>
+                <a:latin typeface="Calibri"/>
+              </a:rPr>
+              <a:t>Q-V  </a:t>
+            </a:r>
+            <a:r>
+              <a:rPr sz="1300" b="0" i="0">
+                <a:solidFill>
+                  <a:srgbClr val="333333"/>
+                </a:solidFill>
+                <a:latin typeface="Calibri"/>
+              </a:rPr>
+              <a:t>Capability self-report (robot declares mounted equipment; assign by capability) - BML WhoHoldingType.</a:t>
+            </a:r>
+          </a:p>
+        </p:txBody>
+      </p:sp>
+      <p:sp>
+        <p:nvSpPr>
+          <p:cNvPr id="5" name="TextBox 4"/>
+          <p:cNvSpPr txBox="1"/>
+          <p:nvPr/>
+        </p:nvSpPr>
+        <p:spPr>
+          <a:xfrm>
+            <a:off x="502920" y="6419088"/>
+            <a:ext cx="11155680" cy="320040"/>
+          </a:xfrm>
+          <a:prstGeom prst="rect">
+            <a:avLst/>
+          </a:prstGeom>
+          <a:noFill/>
+        </p:spPr>
+        <p:txBody>
+          <a:bodyPr wrap="square">
+            <a:spAutoFit/>
+          </a:bodyPr>
+          <a:lstStyle/>
+          <a:p>
+            <a:r>
+              <a:rPr sz="900" b="0" i="0">
+                <a:solidFill>
+                  <a:srgbClr val="666666"/>
+                </a:solidFill>
+                <a:latin typeface="Calibri"/>
+              </a:rPr>
+              <a:t>C2SIM ASX Sub-group   |   Hyssos   |   July 2026</a:t>
+            </a:r>
+          </a:p>
+        </p:txBody>
+      </p:sp>
+      <p:sp>
+        <p:nvSpPr>
+          <p:cNvPr id="6" name="TextBox 5"/>
+          <p:cNvSpPr txBox="1"/>
+          <p:nvPr/>
+        </p:nvSpPr>
+        <p:spPr>
+          <a:xfrm>
+            <a:off x="11338560" y="6419088"/>
+            <a:ext cx="640080" cy="320040"/>
+          </a:xfrm>
+          <a:prstGeom prst="rect">
+            <a:avLst/>
+          </a:prstGeom>
+          <a:noFill/>
+        </p:spPr>
+        <p:txBody>
+          <a:bodyPr wrap="square">
+            <a:spAutoFit/>
+          </a:bodyPr>
+          <a:lstStyle/>
+          <a:p>
+            <a:pPr algn="r"/>
+            <a:r>
+              <a:rPr sz="900" b="0" i="0">
+                <a:solidFill>
+                  <a:srgbClr val="666666"/>
+                </a:solidFill>
+                <a:latin typeface="Calibri"/>
+              </a:rPr>
+              <a:t>20</a:t>
+            </a:r>
+          </a:p>
+        </p:txBody>
+      </p:sp>
+    </p:spTree>
+  </p:cSld>
+  <p:clrMapOvr>
+    <a:masterClrMapping/>
+  </p:clrMapOvr>
+</p:sld>
+</file>
+
+<file path=ppt/slides/slide21.xml><?xml version="1.0" encoding="utf-8"?>
+<p:sld xmlns:a="http://schemas.openxmlformats.org/drawingml/2006/main" xmlns:p="http://schemas.openxmlformats.org/presentationml/2006/main" xmlns:r="http://schemas.openxmlformats.org/officeDocument/2006/relationships">
+  <p:cSld>
+    <p:spTree>
+      <p:nvGrpSpPr>
+        <p:cNvPr id="1" name=""/>
+        <p:cNvGrpSpPr/>
+        <p:nvPr/>
+      </p:nvGrpSpPr>
+      <p:grpSpPr/>
+      <p:sp>
+        <p:nvSpPr>
+          <p:cNvPr id="2" name="Rectangle 1"/>
+          <p:cNvSpPr/>
+          <p:nvPr/>
+        </p:nvSpPr>
+        <p:spPr>
+          <a:xfrm>
+            <a:off x="548640" y="1170432"/>
+            <a:ext cx="2011680" cy="38100"/>
+          </a:xfrm>
+          <a:prstGeom prst="rect">
+            <a:avLst/>
+          </a:prstGeom>
+          <a:solidFill>
+            <a:srgbClr val="2E869A"/>
+          </a:solidFill>
+          <a:ln>
+            <a:noFill/>
+          </a:ln>
+        </p:spPr>
+        <p:style>
+          <a:lnRef idx="1">
+            <a:schemeClr val="accent1"/>
+          </a:lnRef>
+          <a:fillRef idx="3">
+            <a:schemeClr val="accent1"/>
+          </a:fillRef>
+          <a:effectRef idx="2">
+            <a:schemeClr val="accent1"/>
+          </a:effectRef>
+          <a:fontRef idx="minor">
+            <a:schemeClr val="lt1"/>
+          </a:fontRef>
+        </p:style>
+        <p:txBody>
+          <a:bodyPr rtlCol="0" anchor="ctr"/>
+          <a:lstStyle/>
+          <a:p>
+            <a:pPr algn="ctr"/>
+          </a:p>
+        </p:txBody>
+      </p:sp>
+      <p:sp>
+        <p:nvSpPr>
+          <p:cNvPr id="3" name="TextBox 2"/>
+          <p:cNvSpPr txBox="1"/>
+          <p:nvPr/>
+        </p:nvSpPr>
+        <p:spPr>
+          <a:xfrm>
+            <a:off x="502920" y="411480"/>
+            <a:ext cx="11155680" cy="822960"/>
+          </a:xfrm>
+          <a:prstGeom prst="rect">
+            <a:avLst/>
+          </a:prstGeom>
+          <a:noFill/>
+        </p:spPr>
+        <p:txBody>
+          <a:bodyPr wrap="square">
+            <a:spAutoFit/>
+          </a:bodyPr>
+          <a:lstStyle/>
+          <a:p>
+            <a:r>
+              <a:rPr sz="3000" b="1" i="0">
+                <a:solidFill>
+                  <a:srgbClr val="1F3A5F"/>
+                </a:solidFill>
+                <a:latin typeface="Calibri"/>
+              </a:rPr>
+              <a:t>Proposed refinements</a:t>
+            </a:r>
+          </a:p>
+        </p:txBody>
+      </p:sp>
+      <p:sp>
+        <p:nvSpPr>
+          <p:cNvPr id="4" name="TextBox 3"/>
+          <p:cNvSpPr txBox="1"/>
+          <p:nvPr/>
+        </p:nvSpPr>
+        <p:spPr>
+          <a:xfrm>
+            <a:off x="548640" y="914400"/>
+            <a:ext cx="10972800" cy="320040"/>
+          </a:xfrm>
+          <a:prstGeom prst="rect">
+            <a:avLst/>
+          </a:prstGeom>
+          <a:noFill/>
+        </p:spPr>
+        <p:txBody>
+          <a:bodyPr wrap="square">
+            <a:spAutoFit/>
+          </a:bodyPr>
+          <a:lstStyle/>
+          <a:p>
+            <a:r>
+              <a:rPr sz="1300" b="0" i="1">
+                <a:solidFill>
+                  <a:srgbClr val="2E869A"/>
+                </a:solidFill>
+                <a:latin typeface="Calibri"/>
+              </a:rPr>
+              <a:t>Pending group buy-in - nothing applied to the model</a:t>
+            </a:r>
+          </a:p>
+        </p:txBody>
+      </p:sp>
+      <p:sp>
+        <p:nvSpPr>
+          <p:cNvPr id="5" name="TextBox 4"/>
+          <p:cNvSpPr txBox="1"/>
+          <p:nvPr/>
+        </p:nvSpPr>
+        <p:spPr>
+          <a:xfrm>
+            <a:off x="640080" y="1554480"/>
+            <a:ext cx="10972800" cy="4754880"/>
+          </a:xfrm>
+          <a:prstGeom prst="rect">
+            <a:avLst/>
+          </a:prstGeom>
+          <a:noFill/>
+        </p:spPr>
+        <p:txBody>
+          <a:bodyPr wrap="square">
+            <a:spAutoFit/>
+          </a:bodyPr>
+          <a:lstStyle/>
+          <a:p>
+            <a:pPr>
+              <a:spcBef>
+                <a:spcPts val="200"/>
+              </a:spcBef>
+              <a:spcAft>
+                <a:spcPts val="1300"/>
+              </a:spcAft>
+            </a:pPr>
+            <a:r>
+              <a:rPr sz="1400" b="1" i="0">
+                <a:solidFill>
+                  <a:srgbClr val="2E7D32"/>
+                </a:solidFill>
+                <a:latin typeface="Calibri"/>
+              </a:rPr>
+              <a:t>Safe corrections (unambiguous):  </a:t>
+            </a:r>
+            <a:r>
+              <a:rPr sz="1400" b="0" i="0">
+                <a:solidFill>
+                  <a:srgbClr val="333333"/>
+                </a:solidFill>
+                <a:latin typeface="Calibri"/>
+              </a:rPr>
+              <a:t>class typo CollecticeRoboticSystem -&gt; CollectiveRoboticSystem (O1); versionInfo Extrension -&gt; Extension (O2); file CSIM_ASX -&gt; C2SIM_ASX (O3); hasStartTime UUIDBase -&gt; TimeInstant (M7); unify namespace label ASX / C2SIM_ASX (M8).</a:t>
+            </a:r>
+          </a:p>
+          <a:p>
+            <a:pPr>
+              <a:spcBef>
+                <a:spcPts val="200"/>
+              </a:spcBef>
+              <a:spcAft>
+                <a:spcPts val="1300"/>
+              </a:spcAft>
+            </a:pPr>
+            <a:r>
+              <a:rPr sz="1400" b="1" i="0">
+                <a:solidFill>
+                  <a:srgbClr val="C87F0A"/>
+                </a:solidFill>
+                <a:latin typeface="Calibri"/>
+              </a:rPr>
+              <a:t>Structural (decide first):  </a:t>
+            </a:r>
+            <a:r>
+              <a:rPr sz="1400" b="0" i="0">
+                <a:solidFill>
+                  <a:srgbClr val="333333"/>
+                </a:solidFill>
+                <a:latin typeface="Calibri"/>
+              </a:rPr>
+              <a:t>UAV/robot typing (Q-A); Swarm -&gt; CollectiveEntity so it is taskable (Q-B); one sensor model (Q-C); one autonomy vocabulary (Q-D).</a:t>
+            </a:r>
+          </a:p>
+          <a:p>
+            <a:pPr>
+              <a:spcBef>
+                <a:spcPts val="200"/>
+              </a:spcBef>
+              <a:spcAft>
+                <a:spcPts val="1300"/>
+              </a:spcAft>
+            </a:pPr>
+            <a:r>
+              <a:rPr sz="1400" b="1" i="0">
+                <a:solidFill>
+                  <a:srgbClr val="2E869A"/>
+                </a:solidFill>
+                <a:latin typeface="Calibri"/>
+              </a:rPr>
+              <a:t>New content (design):  </a:t>
+            </a:r>
+            <a:r>
+              <a:rPr sz="1400" b="0" i="0">
+                <a:solidFill>
+                  <a:srgbClr val="333333"/>
+                </a:solidFill>
+                <a:latin typeface="Calibri"/>
+              </a:rPr>
+              <a:t>inline entity def (Q-E), MediaReference (Q-F), robot-to-robot + cross-cue (Q-G/Q-P), rationale report (Q-H), generic detection report (Q-I/Q-Q), swarm residuals (Q-J), engagement authority (Q-K), payload/effector/weapon typing (Q-L), area subject (Q-M), explore order (Q-N), denied-comms/relay (Q-O), locomotion subtypes (Q-R), decoy/threat-aware (Q-S), environment conditions (Q-T), formation geometry (Q-U).</a:t>
+            </a:r>
+          </a:p>
+          <a:p>
+            <a:pPr>
+              <a:spcBef>
+                <a:spcPts val="200"/>
+              </a:spcBef>
+              <a:spcAft>
+                <a:spcPts val="1300"/>
+              </a:spcAft>
+            </a:pPr>
+            <a:r>
+              <a:rPr sz="1400" b="1" i="0">
+                <a:solidFill>
+                  <a:srgbClr val="333333"/>
+                </a:solidFill>
+                <a:latin typeface="Calibri"/>
+              </a:rPr>
+              <a:t>Nothing here is applied to the model - all items are proposals for group buy-in.</a:t>
+            </a:r>
+          </a:p>
+        </p:txBody>
+      </p:sp>
+      <p:sp>
+        <p:nvSpPr>
+          <p:cNvPr id="6" name="TextBox 5"/>
+          <p:cNvSpPr txBox="1"/>
+          <p:nvPr/>
+        </p:nvSpPr>
+        <p:spPr>
+          <a:xfrm>
+            <a:off x="502920" y="6419088"/>
+            <a:ext cx="11155680" cy="320040"/>
+          </a:xfrm>
+          <a:prstGeom prst="rect">
+            <a:avLst/>
+          </a:prstGeom>
+          <a:noFill/>
+        </p:spPr>
+        <p:txBody>
+          <a:bodyPr wrap="square">
+            <a:spAutoFit/>
+          </a:bodyPr>
+          <a:lstStyle/>
+          <a:p>
+            <a:r>
+              <a:rPr sz="900" b="0" i="0">
+                <a:solidFill>
+                  <a:srgbClr val="666666"/>
+                </a:solidFill>
+                <a:latin typeface="Calibri"/>
+              </a:rPr>
+              <a:t>C2SIM ASX Sub-group   |   Hyssos   |   July 2026</a:t>
+            </a:r>
+          </a:p>
+        </p:txBody>
+      </p:sp>
+      <p:sp>
+        <p:nvSpPr>
+          <p:cNvPr id="7" name="TextBox 6"/>
+          <p:cNvSpPr txBox="1"/>
+          <p:nvPr/>
+        </p:nvSpPr>
+        <p:spPr>
+          <a:xfrm>
+            <a:off x="11338560" y="6419088"/>
+            <a:ext cx="640080" cy="320040"/>
+          </a:xfrm>
+          <a:prstGeom prst="rect">
+            <a:avLst/>
+          </a:prstGeom>
+          <a:noFill/>
+        </p:spPr>
+        <p:txBody>
+          <a:bodyPr wrap="square">
+            <a:spAutoFit/>
+          </a:bodyPr>
+          <a:lstStyle/>
+          <a:p>
+            <a:pPr algn="r"/>
+            <a:r>
+              <a:rPr sz="900" b="0" i="0">
+                <a:solidFill>
+                  <a:srgbClr val="666666"/>
+                </a:solidFill>
+                <a:latin typeface="Calibri"/>
+              </a:rPr>
+              <a:t>21</a:t>
+            </a:r>
+          </a:p>
+        </p:txBody>
+      </p:sp>
+    </p:spTree>
+  </p:cSld>
+  <p:clrMapOvr>
+    <a:masterClrMapping/>
+  </p:clrMapOvr>
+</p:sld>
+</file>
+
+<file path=ppt/slides/slide22.xml><?xml version="1.0" encoding="utf-8"?>
+<p:sld xmlns:a="http://schemas.openxmlformats.org/drawingml/2006/main" xmlns:p="http://schemas.openxmlformats.org/presentationml/2006/main" xmlns:r="http://schemas.openxmlformats.org/officeDocument/2006/relationships">
+  <p:cSld>
+    <p:spTree>
+      <p:nvGrpSpPr>
+        <p:cNvPr id="1" name=""/>
+        <p:cNvGrpSpPr/>
+        <p:nvPr/>
+      </p:nvGrpSpPr>
+      <p:grpSpPr/>
+      <p:sp>
+        <p:nvSpPr>
+          <p:cNvPr id="2" name="Rectangle 1"/>
+          <p:cNvSpPr/>
+          <p:nvPr/>
+        </p:nvSpPr>
+        <p:spPr>
+          <a:xfrm>
+            <a:off x="548640" y="1170432"/>
+            <a:ext cx="2011680" cy="38100"/>
+          </a:xfrm>
+          <a:prstGeom prst="rect">
+            <a:avLst/>
+          </a:prstGeom>
+          <a:solidFill>
+            <a:srgbClr val="2E869A"/>
+          </a:solidFill>
+          <a:ln>
+            <a:noFill/>
+          </a:ln>
+        </p:spPr>
+        <p:style>
+          <a:lnRef idx="1">
+            <a:schemeClr val="accent1"/>
+          </a:lnRef>
+          <a:fillRef idx="3">
+            <a:schemeClr val="accent1"/>
+          </a:fillRef>
+          <a:effectRef idx="2">
+            <a:schemeClr val="accent1"/>
+          </a:effectRef>
+          <a:fontRef idx="minor">
+            <a:schemeClr val="lt1"/>
+          </a:fontRef>
+        </p:style>
+        <p:txBody>
+          <a:bodyPr rtlCol="0" anchor="ctr"/>
+          <a:lstStyle/>
+          <a:p>
+            <a:pPr algn="ctr"/>
+          </a:p>
+        </p:txBody>
+      </p:sp>
+      <p:sp>
+        <p:nvSpPr>
+          <p:cNvPr id="3" name="TextBox 2"/>
+          <p:cNvSpPr txBox="1"/>
+          <p:nvPr/>
+        </p:nvSpPr>
+        <p:spPr>
+          <a:xfrm>
+            <a:off x="502920" y="411480"/>
+            <a:ext cx="11155680" cy="822960"/>
+          </a:xfrm>
+          <a:prstGeom prst="rect">
+            <a:avLst/>
+          </a:prstGeom>
+          <a:noFill/>
+        </p:spPr>
+        <p:txBody>
+          <a:bodyPr wrap="square">
+            <a:spAutoFit/>
+          </a:bodyPr>
+          <a:lstStyle/>
+          <a:p>
+            <a:r>
+              <a:rPr sz="3000" b="1" i="0">
+                <a:solidFill>
+                  <a:srgbClr val="1F3A5F"/>
+                </a:solidFill>
+                <a:latin typeface="Calibri"/>
+              </a:rPr>
               <a:t>Recommended next steps</a:t>
             </a:r>
           </a:p>
@@ -7569,7 +8209,7 @@
                 </a:solidFill>
                 <a:latin typeface="Calibri"/>
               </a:rPr>
-              <a:t>20</a:t>
+              <a:t>22</a:t>
             </a:r>
           </a:p>
         </p:txBody>
@@ -7677,7 +8317,41 @@
         </p:nvSpPr>
         <p:spPr>
           <a:xfrm>
-            <a:off x="640080" y="1554480"/>
+            <a:off x="548640" y="914400"/>
+            <a:ext cx="10972800" cy="320040"/>
+          </a:xfrm>
+          <a:prstGeom prst="rect">
+            <a:avLst/>
+          </a:prstGeom>
+          <a:noFill/>
+        </p:spPr>
+        <p:txBody>
+          <a:bodyPr wrap="square">
+            <a:spAutoFit/>
+          </a:bodyPr>
+          <a:lstStyle/>
+          <a:p>
+            <a:r>
+              <a:rPr sz="1300" b="0" i="1">
+                <a:solidFill>
+                  <a:srgbClr val="2E869A"/>
+                </a:solidFill>
+                <a:latin typeface="Calibri"/>
+              </a:rPr>
+              <a:t>From 4 worked messages to ~33 - this review is the bulk of that</a:t>
+            </a:r>
+          </a:p>
+        </p:txBody>
+      </p:sp>
+      <p:sp>
+        <p:nvSpPr>
+          <p:cNvPr id="5" name="TextBox 4"/>
+          <p:cNvSpPr txBox="1"/>
+          <p:nvPr/>
+        </p:nvSpPr>
+        <p:spPr>
+          <a:xfrm>
+            <a:off x="640080" y="1600200"/>
             <a:ext cx="10972800" cy="4754880"/>
           </a:xfrm>
           <a:prstGeom prst="rect">
@@ -7696,17 +8370,17 @@
                 <a:spcPts val="200"/>
               </a:spcBef>
               <a:spcAft>
-                <a:spcPts val="1200"/>
+                <a:spcPts val="900"/>
               </a:spcAft>
             </a:pPr>
             <a:r>
-              <a:rPr sz="1700" b="1" i="0">
+              <a:rPr sz="1500" b="1" i="0">
                 <a:solidFill>
                   <a:srgbClr val="333333"/>
                 </a:solidFill>
                 <a:latin typeface="Calibri"/>
               </a:rPr>
-              <a:t>4 worked instantiations so far: 2 Reports, 2 Orders, 0 Initialization.</a:t>
+              <a:t>Start: 4 worked instances (2 Reports, 2 Orders, 0 Initialization) - Elizabeth's baseline. This review drafted ~29 more, to ~33 across Init / Order / Report (on the branch, pending group review).</a:t>
             </a:r>
           </a:p>
           <a:p>
@@ -7715,17 +8389,17 @@
                 <a:spcPts val="200"/>
               </a:spcBef>
               <a:spcAft>
-                <a:spcPts val="1200"/>
+                <a:spcPts val="900"/>
               </a:spcAft>
             </a:pPr>
             <a:r>
-              <a:rPr sz="1700" b="0" i="0">
+              <a:rPr sz="1500" b="0" i="0">
                 <a:solidFill>
                   <a:srgbClr val="333333"/>
                 </a:solidFill>
                 <a:latin typeface="Calibri"/>
               </a:rPr>
-              <a:t>      -  Reports are the mature track (Video Detection Report); Orders are partial; every Initialization sheet is still a stub.</a:t>
+              <a:t>      -  Initialization   0 -&gt; 6   (the 3 named scenarios + CASEVAC / MCM / SubT) - was the least-developed; now seeded.</a:t>
             </a:r>
           </a:p>
           <a:p>
@@ -7734,17 +8408,36 @@
                 <a:spcPts val="200"/>
               </a:spcBef>
               <a:spcAft>
-                <a:spcPts val="1200"/>
+                <a:spcPts val="900"/>
               </a:spcAft>
             </a:pPr>
             <a:r>
-              <a:rPr sz="1700" b="0" i="0">
+              <a:rPr sz="1500" b="0" i="0">
                 <a:solidFill>
                   <a:srgbClr val="333333"/>
                 </a:solidFill>
                 <a:latin typeface="Calibri"/>
               </a:rPr>
-              <a:t>      -  Coverage is concentrated on a single UAV video-surveillance thread plus one UGV transport order.</a:t>
+              <a:t>      -  Orders   2 -&gt; 14   (CASEVAC, swarm, fire support, logistics / engineering / rescue, route clearance, MCM, explore, resupply, MUM-T).</a:t>
+            </a:r>
+          </a:p>
+          <a:p>
+            <a:pPr lvl="1">
+              <a:spcBef>
+                <a:spcPts val="200"/>
+              </a:spcBef>
+              <a:spcAft>
+                <a:spcPts val="900"/>
+              </a:spcAft>
+            </a:pPr>
+            <a:r>
+              <a:rPr sz="1500" b="0" i="0">
+                <a:solidFill>
+                  <a:srgbClr val="333333"/>
+                </a:solidFill>
+                <a:latin typeface="Calibri"/>
+              </a:rPr>
+              <a:t>      -  Reports   2 -&gt; 13   (swarm, CASEVAC status / explainable, CBRN / EW / GPR, BDA, delivery, naval mine, generic detection, hazard area).</a:t>
             </a:r>
           </a:p>
           <a:p>
@@ -7753,17 +8446,17 @@
                 <a:spcPts val="200"/>
               </a:spcBef>
               <a:spcAft>
-                <a:spcPts val="1200"/>
+                <a:spcPts val="900"/>
               </a:spcAft>
             </a:pPr>
             <a:r>
-              <a:rPr sz="1700" b="1" i="0">
+              <a:rPr sz="1500" b="1" i="0">
                 <a:solidFill>
                   <a:srgbClr val="333333"/>
                 </a:solidFill>
                 <a:latin typeface="Calibri"/>
               </a:rPr>
-              <a:t>CASEVAC - the one human-authored contributed scenario - had no messages of any type (now walked in this review).</a:t>
+              <a:t>CASEVAC - the one contributed scenario - had no messages; now walked end-to-end (Init + Orders + Reports).</a:t>
             </a:r>
           </a:p>
           <a:p>
@@ -7772,24 +8465,24 @@
                 <a:spcPts val="200"/>
               </a:spcBef>
               <a:spcAft>
-                <a:spcPts val="1200"/>
+                <a:spcPts val="900"/>
               </a:spcAft>
             </a:pPr>
             <a:r>
-              <a:rPr sz="1700" b="0" i="0">
+              <a:rPr sz="1500" b="0" i="0">
                 <a:solidFill>
                   <a:srgbClr val="333333"/>
                 </a:solidFill>
                 <a:latin typeface="Calibri"/>
               </a:rPr>
-              <a:t>      -  Initialization is the biggest hole and the highest-signal place to test the model (drafted in this review).</a:t>
-            </a:r>
-          </a:p>
-        </p:txBody>
-      </p:sp>
-      <p:sp>
-        <p:nvSpPr>
-          <p:cNvPr id="5" name="TextBox 4"/>
+              <a:t>      -  The breadth is the point: each new instance exercises a proposed element and surfaces what is still to define.</a:t>
+            </a:r>
+          </a:p>
+        </p:txBody>
+      </p:sp>
+      <p:sp>
+        <p:nvSpPr>
+          <p:cNvPr id="6" name="TextBox 5"/>
           <p:cNvSpPr txBox="1"/>
           <p:nvPr/>
         </p:nvSpPr>
@@ -7823,7 +8516,7 @@
       </p:sp>
       <p:sp>
         <p:nvSpPr>
-          <p:cNvPr id="6" name="TextBox 5"/>
+          <p:cNvPr id="7" name="TextBox 6"/>
           <p:cNvSpPr txBox="1"/>
           <p:nvPr/>
         </p:nvSpPr>
@@ -7946,162 +8639,55 @@
                 </a:solidFill>
                 <a:latin typeface="Calibri"/>
               </a:rPr>
-              <a:t>Two tracks have drifted apart</a:t>
-            </a:r>
-          </a:p>
-        </p:txBody>
-      </p:sp>
-      <p:sp>
-        <p:nvSpPr>
-          <p:cNvPr id="4" name="Rounded Rectangle 3"/>
-          <p:cNvSpPr/>
-          <p:nvPr/>
-        </p:nvSpPr>
-        <p:spPr>
-          <a:xfrm>
-            <a:off x="731520" y="1737360"/>
-            <a:ext cx="5029200" cy="1371600"/>
-          </a:xfrm>
-          <a:prstGeom prst="roundRect">
-            <a:avLst/>
-          </a:prstGeom>
-          <a:solidFill>
-            <a:srgbClr val="1F3A5F"/>
-          </a:solidFill>
-          <a:ln>
-            <a:noFill/>
-          </a:ln>
-        </p:spPr>
-        <p:style>
-          <a:lnRef idx="1">
-            <a:schemeClr val="accent1"/>
-          </a:lnRef>
-          <a:fillRef idx="3">
-            <a:schemeClr val="accent1"/>
-          </a:fillRef>
-          <a:effectRef idx="2">
-            <a:schemeClr val="accent1"/>
-          </a:effectRef>
-          <a:fontRef idx="minor">
-            <a:schemeClr val="lt1"/>
-          </a:fontRef>
-        </p:style>
-        <p:txBody>
-          <a:bodyPr rtlCol="0" anchor="ctr" wrap="square"/>
-          <a:lstStyle/>
-          <a:p>
-            <a:pPr algn="ctr"/>
-            <a:r>
-              <a:rPr sz="1500" b="1" i="0">
-                <a:solidFill>
-                  <a:srgbClr val="FFFFFF"/>
-                </a:solidFill>
-                <a:latin typeface="Calibri"/>
-              </a:rPr>
-              <a:t>OWL model  (CSIM_ASX.rdf)
-last updated  Jan 2026</a:t>
-            </a:r>
-          </a:p>
-        </p:txBody>
-      </p:sp>
-      <p:sp>
-        <p:nvSpPr>
-          <p:cNvPr id="5" name="Rounded Rectangle 4"/>
-          <p:cNvSpPr/>
-          <p:nvPr/>
-        </p:nvSpPr>
-        <p:spPr>
-          <a:xfrm>
-            <a:off x="6400800" y="1737360"/>
-            <a:ext cx="5029200" cy="1371600"/>
-          </a:xfrm>
-          <a:prstGeom prst="roundRect">
-            <a:avLst/>
-          </a:prstGeom>
-          <a:solidFill>
-            <a:srgbClr val="2E869A"/>
-          </a:solidFill>
-          <a:ln>
-            <a:noFill/>
-          </a:ln>
-        </p:spPr>
-        <p:style>
-          <a:lnRef idx="1">
-            <a:schemeClr val="accent1"/>
-          </a:lnRef>
-          <a:fillRef idx="3">
-            <a:schemeClr val="accent1"/>
-          </a:fillRef>
-          <a:effectRef idx="2">
-            <a:schemeClr val="accent1"/>
-          </a:effectRef>
-          <a:fontRef idx="minor">
-            <a:schemeClr val="lt1"/>
-          </a:fontRef>
-        </p:style>
-        <p:txBody>
-          <a:bodyPr rtlCol="0" anchor="ctr" wrap="square"/>
-          <a:lstStyle/>
-          <a:p>
-            <a:pPr algn="ctr"/>
-            <a:r>
-              <a:rPr sz="1500" b="1" i="0">
-                <a:solidFill>
-                  <a:srgbClr val="FFFFFF"/>
-                </a:solidFill>
-                <a:latin typeface="Calibri"/>
-              </a:rPr>
-              <a:t>Spreadsheets  (Concept Mapping,
-sample messages)  updated  Jun 2026</a:t>
-            </a:r>
-          </a:p>
-        </p:txBody>
-      </p:sp>
-      <p:cxnSp>
-        <p:nvCxnSpPr>
-          <p:cNvPr id="6" name="Connector 5"/>
-          <p:cNvCxnSpPr/>
-          <p:nvPr/>
-        </p:nvCxnSpPr>
-        <p:spPr>
-          <a:xfrm>
-            <a:off x="5760720" y="2423160"/>
-            <a:ext cx="640080" cy="0"/>
-          </a:xfrm>
-          <a:prstGeom prst="line">
-            <a:avLst/>
-          </a:prstGeom>
-          <a:ln w="19050">
-            <a:solidFill>
-              <a:srgbClr val="C0392B"/>
-            </a:solidFill>
-          </a:ln>
-        </p:spPr>
-        <p:style>
-          <a:lnRef idx="2">
-            <a:schemeClr val="accent1"/>
-          </a:lnRef>
-          <a:fillRef idx="0">
-            <a:schemeClr val="accent1"/>
-          </a:fillRef>
-          <a:effectRef idx="1">
-            <a:schemeClr val="accent1"/>
-          </a:effectRef>
-          <a:fontRef idx="minor">
-            <a:schemeClr val="tx1"/>
-          </a:fontRef>
-        </p:style>
-      </p:cxnSp>
-      <p:sp>
-        <p:nvSpPr>
-          <p:cNvPr id="7" name="TextBox 6"/>
+              <a:t>Scenarios analyzed</a:t>
+            </a:r>
+          </a:p>
+        </p:txBody>
+      </p:sp>
+      <p:sp>
+        <p:nvSpPr>
+          <p:cNvPr id="4" name="TextBox 3"/>
           <p:cNvSpPr txBox="1"/>
           <p:nvPr/>
         </p:nvSpPr>
         <p:spPr>
           <a:xfrm>
-            <a:off x="640080" y="3474720"/>
-            <a:ext cx="10972800" cy="2880360"/>
+            <a:off x="548640" y="914400"/>
+            <a:ext cx="10972800" cy="320040"/>
+          </a:xfrm>
+          <a:prstGeom prst="rect">
+            <a:avLst/>
+          </a:prstGeom>
+          <a:noFill/>
+        </p:spPr>
+        <p:txBody>
+          <a:bodyPr wrap="square">
+            <a:spAutoFit/>
+          </a:bodyPr>
+          <a:lstStyle/>
+          <a:p>
+            <a:r>
+              <a:rPr sz="1300" b="0" i="1">
+                <a:solidFill>
+                  <a:srgbClr val="2E869A"/>
+                </a:solidFill>
+                <a:latin typeface="Calibri"/>
+              </a:rPr>
+              <a:t>20+ scenarios walked into ~33 message instances - Init / Order / Report</a:t>
+            </a:r>
+          </a:p>
+        </p:txBody>
+      </p:sp>
+      <p:sp>
+        <p:nvSpPr>
+          <p:cNvPr id="5" name="TextBox 4"/>
+          <p:cNvSpPr txBox="1"/>
+          <p:nvPr/>
+        </p:nvSpPr>
+        <p:spPr>
+          <a:xfrm>
+            <a:off x="640080" y="1554480"/>
+            <a:ext cx="10972800" cy="4754880"/>
           </a:xfrm>
           <a:prstGeom prst="rect">
             <a:avLst/>
@@ -8119,26 +8705,17 @@
                 <a:spcPts val="200"/>
               </a:spcBef>
               <a:spcAft>
-                <a:spcPts val="1000"/>
+                <a:spcPts val="700"/>
               </a:spcAft>
             </a:pPr>
             <a:r>
-              <a:rPr sz="1600" b="1" i="0">
-                <a:solidFill>
-                  <a:srgbClr val="C0392B"/>
-                </a:solidFill>
-                <a:latin typeface="Calibri"/>
-              </a:rPr>
-              <a:t>Consequence:  </a:t>
-            </a:r>
-            <a:r>
-              <a:rPr sz="1600" b="0" i="0">
+              <a:rPr sz="1300" b="1" i="0">
                 <a:solidFill>
                   <a:srgbClr val="333333"/>
                 </a:solidFill>
                 <a:latin typeface="Calibri"/>
               </a:rPr>
-              <a:t>the model does not reflect ~5 months of attribute decisions made in the spreadsheets.</a:t>
+              <a:t>Named + contributed - instantiated end-to-end:</a:t>
             </a:r>
           </a:p>
           <a:p>
@@ -8147,17 +8724,36 @@
                 <a:spcPts val="200"/>
               </a:spcBef>
               <a:spcAft>
-                <a:spcPts val="1000"/>
+                <a:spcPts val="700"/>
               </a:spcAft>
             </a:pPr>
             <a:r>
-              <a:rPr sz="1600" b="0" i="0">
+              <a:rPr sz="1300" b="0" i="0">
                 <a:solidFill>
                   <a:srgbClr val="333333"/>
                 </a:solidFill>
                 <a:latin typeface="Calibri"/>
               </a:rPr>
-              <a:t>      -  Autonomy is defined three different ways across the two tracks.</a:t>
+              <a:t>      -  the 3 named Init scenarios (UAV video, UAV patrol, swarm) + CASEVAC, the one human-authored contributed scenario - walked Init -&gt; tasking Order -&gt; robot-to-robot hand-off -&gt; status/threat + explainable Reports.</a:t>
+            </a:r>
+          </a:p>
+          <a:p>
+            <a:pPr>
+              <a:spcBef>
+                <a:spcPts val="200"/>
+              </a:spcBef>
+              <a:spcAft>
+                <a:spcPts val="700"/>
+              </a:spcAft>
+            </a:pPr>
+            <a:r>
+              <a:rPr sz="1300" b="1" i="0">
+                <a:solidFill>
+                  <a:srgbClr val="333333"/>
+                </a:solidFill>
+                <a:latin typeface="Calibri"/>
+              </a:rPr>
+              <a:t>Capability stress-tests - instantiated:</a:t>
             </a:r>
           </a:p>
           <a:p>
@@ -8166,17 +8762,36 @@
                 <a:spcPts val="200"/>
               </a:spcBef>
               <a:spcAft>
-                <a:spcPts val="1000"/>
+                <a:spcPts val="700"/>
               </a:spcAft>
             </a:pPr>
             <a:r>
-              <a:rPr sz="1600" b="0" i="0">
+              <a:rPr sz="1300" b="0" i="0">
                 <a:solidFill>
                   <a:srgbClr val="333333"/>
                 </a:solidFill>
                 <a:latin typeface="Calibri"/>
               </a:rPr>
-              <a:t>      -  Sensors are defined three different ways.</a:t>
+              <a:t>      -  non-video sensing (CBRN, EW emitter, GPR mine); swarm detect + coordinate; the task/effect axis (fire support + BDA, logistics delivery, engineering, USV rescue, route clearance).</a:t>
+            </a:r>
+          </a:p>
+          <a:p>
+            <a:pPr>
+              <a:spcBef>
+                <a:spcPts val="200"/>
+              </a:spcBef>
+              <a:spcAft>
+                <a:spcPts val="700"/>
+              </a:spcAft>
+            </a:pPr>
+            <a:r>
+              <a:rPr sz="1300" b="1" i="0">
+                <a:solidFill>
+                  <a:srgbClr val="333333"/>
+                </a:solidFill>
+                <a:latin typeface="Calibri"/>
+              </a:rPr>
+              <a:t>Newly sourced from real missions, then analyzed:</a:t>
             </a:r>
           </a:p>
           <a:p>
@@ -8185,24 +8800,62 @@
                 <a:spcPts val="200"/>
               </a:spcBef>
               <a:spcAft>
-                <a:spcPts val="1000"/>
+                <a:spcPts val="700"/>
               </a:spcAft>
             </a:pPr>
             <a:r>
-              <a:rPr sz="1600" b="0" i="0">
+              <a:rPr sz="1300" b="0" i="0">
                 <a:solidFill>
                   <a:srgbClr val="333333"/>
                 </a:solidFill>
                 <a:latin typeface="Calibri"/>
               </a:rPr>
-              <a:t>      -  The whole attribute layer (Payload, Mobility, VehicleType, ...) exists only in the spreadsheets, not the OWL.</a:t>
-            </a:r>
-          </a:p>
-        </p:txBody>
-      </p:sp>
-      <p:sp>
-        <p:nvSpPr>
-          <p:cNvPr id="8" name="TextBox 7"/>
+              <a:t>      -  Cooperative MCM (maritime), Subterranean SubT, contested sustainment - plus nine documented missions that grounded the validation holes: explainability (DroneResponse), CBRN (UGV), EW geolocation, persistence (MDARS), counter-UAS, human-machine teaming (MUM-T), SAR, formation, robotic breach.</a:t>
+            </a:r>
+          </a:p>
+          <a:p>
+            <a:pPr>
+              <a:spcBef>
+                <a:spcPts val="200"/>
+              </a:spcBef>
+              <a:spcAft>
+                <a:spcPts val="700"/>
+              </a:spcAft>
+            </a:pPr>
+            <a:r>
+              <a:rPr sz="1300" b="1" i="0">
+                <a:solidFill>
+                  <a:srgbClr val="333333"/>
+                </a:solidFill>
+                <a:latin typeface="Calibri"/>
+              </a:rPr>
+              <a:t>Screened for redundancy:</a:t>
+            </a:r>
+          </a:p>
+          <a:p>
+            <a:pPr lvl="1">
+              <a:spcBef>
+                <a:spcPts val="200"/>
+              </a:spcBef>
+              <a:spcAft>
+                <a:spcPts val="700"/>
+              </a:spcAft>
+            </a:pPr>
+            <a:r>
+              <a:rPr sz="1300" b="0" i="0">
+                <a:solidFill>
+                  <a:srgbClr val="333333"/>
+                </a:solidFill>
+                <a:latin typeface="Calibri"/>
+              </a:rPr>
+              <a:t>      -  route-clearance / companion / urban - confirmed ~80% redundant, but still yielded N1 (an area as the subject of a task/report).</a:t>
+            </a:r>
+          </a:p>
+        </p:txBody>
+      </p:sp>
+      <p:sp>
+        <p:nvSpPr>
+          <p:cNvPr id="6" name="TextBox 5"/>
           <p:cNvSpPr txBox="1"/>
           <p:nvPr/>
         </p:nvSpPr>
@@ -8236,7 +8889,7 @@
       </p:sp>
       <p:sp>
         <p:nvSpPr>
-          <p:cNvPr id="9" name="TextBox 8"/>
+          <p:cNvPr id="7" name="TextBox 6"/>
           <p:cNvSpPr txBox="1"/>
           <p:nvPr/>
         </p:nvSpPr>
@@ -8359,7 +9012,7 @@
                 </a:solidFill>
                 <a:latin typeface="Calibri"/>
               </a:rPr>
-              <a:t>Instantiating one entity hits three blockers</a:t>
+              <a:t>The OWL and the spreadsheets are at different stages</a:t>
             </a:r>
           </a:p>
         </p:txBody>
@@ -8372,14 +9025,14 @@
         </p:nvSpPr>
         <p:spPr>
           <a:xfrm>
-            <a:off x="731520" y="1828800"/>
-            <a:ext cx="3474720" cy="2011680"/>
+            <a:off x="731520" y="1737360"/>
+            <a:ext cx="5029200" cy="1371600"/>
           </a:xfrm>
           <a:prstGeom prst="roundRect">
             <a:avLst/>
           </a:prstGeom>
           <a:solidFill>
-            <a:srgbClr val="C0392B"/>
+            <a:srgbClr val="1F3A5F"/>
           </a:solidFill>
           <a:ln>
             <a:noFill/>
@@ -8405,15 +9058,14 @@
           <a:p>
             <a:pPr algn="ctr"/>
             <a:r>
-              <a:rPr sz="1600" b="1" i="0">
+              <a:rPr sz="1500" b="1" i="0">
                 <a:solidFill>
                   <a:srgbClr val="FFFFFF"/>
                 </a:solidFill>
                 <a:latin typeface="Calibri"/>
               </a:rPr>
-              <a:t>P1
-A UAV is typed two
-incompatible ways</a:t>
+              <a:t>OWL model  (CSIM_ASX.rdf)
+last updated  Jan 2026</a:t>
             </a:r>
           </a:p>
         </p:txBody>
@@ -8426,14 +9078,14 @@
         </p:nvSpPr>
         <p:spPr>
           <a:xfrm>
-            <a:off x="4434840" y="1828800"/>
-            <a:ext cx="3474720" cy="2011680"/>
+            <a:off x="6400800" y="1737360"/>
+            <a:ext cx="5029200" cy="1371600"/>
           </a:xfrm>
           <a:prstGeom prst="roundRect">
             <a:avLst/>
           </a:prstGeom>
           <a:solidFill>
-            <a:srgbClr val="C0392B"/>
+            <a:srgbClr val="2E869A"/>
           </a:solidFill>
           <a:ln>
             <a:noFill/>
@@ -8459,73 +9111,53 @@
           <a:p>
             <a:pPr algn="ctr"/>
             <a:r>
-              <a:rPr sz="1600" b="1" i="0">
+              <a:rPr sz="1500" b="1" i="0">
                 <a:solidFill>
                   <a:srgbClr val="FFFFFF"/>
                 </a:solidFill>
                 <a:latin typeface="Calibri"/>
               </a:rPr>
-              <a:t>P2
-A sensor has no
-agreed representation</a:t>
-            </a:r>
-          </a:p>
-        </p:txBody>
-      </p:sp>
-      <p:sp>
-        <p:nvSpPr>
-          <p:cNvPr id="6" name="Rounded Rectangle 5"/>
-          <p:cNvSpPr/>
-          <p:nvPr/>
-        </p:nvSpPr>
-        <p:spPr>
-          <a:xfrm>
-            <a:off x="8138160" y="1828800"/>
-            <a:ext cx="3337560" cy="2011680"/>
-          </a:xfrm>
-          <a:prstGeom prst="roundRect">
-            <a:avLst/>
-          </a:prstGeom>
-          <a:solidFill>
-            <a:srgbClr val="C0392B"/>
-          </a:solidFill>
-          <a:ln>
-            <a:noFill/>
+              <a:t>Spreadsheets  (Concept Mapping,
+sample messages)  updated  Jun 2026</a:t>
+            </a:r>
+          </a:p>
+        </p:txBody>
+      </p:sp>
+      <p:cxnSp>
+        <p:nvCxnSpPr>
+          <p:cNvPr id="6" name="Connector 5"/>
+          <p:cNvCxnSpPr/>
+          <p:nvPr/>
+        </p:nvCxnSpPr>
+        <p:spPr>
+          <a:xfrm>
+            <a:off x="5760720" y="2423160"/>
+            <a:ext cx="640080" cy="0"/>
+          </a:xfrm>
+          <a:prstGeom prst="line">
+            <a:avLst/>
+          </a:prstGeom>
+          <a:ln w="19050">
+            <a:solidFill>
+              <a:srgbClr val="C87F0A"/>
+            </a:solidFill>
           </a:ln>
         </p:spPr>
         <p:style>
-          <a:lnRef idx="1">
+          <a:lnRef idx="2">
             <a:schemeClr val="accent1"/>
           </a:lnRef>
-          <a:fillRef idx="3">
+          <a:fillRef idx="0">
             <a:schemeClr val="accent1"/>
           </a:fillRef>
-          <a:effectRef idx="2">
+          <a:effectRef idx="1">
             <a:schemeClr val="accent1"/>
           </a:effectRef>
           <a:fontRef idx="minor">
-            <a:schemeClr val="lt1"/>
+            <a:schemeClr val="tx1"/>
           </a:fontRef>
         </p:style>
-        <p:txBody>
-          <a:bodyPr rtlCol="0" anchor="ctr" wrap="square"/>
-          <a:lstStyle/>
-          <a:p>
-            <a:pPr algn="ctr"/>
-            <a:r>
-              <a:rPr sz="1600" b="1" i="0">
-                <a:solidFill>
-                  <a:srgbClr val="FFFFFF"/>
-                </a:solidFill>
-                <a:latin typeface="Calibri"/>
-              </a:rPr>
-              <a:t>P7
-A swarm cannot be
-tasked as modeled</a:t>
-            </a:r>
-          </a:p>
-        </p:txBody>
-      </p:sp>
+      </p:cxnSp>
       <p:sp>
         <p:nvSpPr>
           <p:cNvPr id="7" name="TextBox 6"/>
@@ -8534,8 +9166,8 @@
         </p:nvSpPr>
         <p:spPr>
           <a:xfrm>
-            <a:off x="640080" y="4297680"/>
-            <a:ext cx="10972800" cy="2057400"/>
+            <a:off x="640080" y="3474720"/>
+            <a:ext cx="10972800" cy="2880360"/>
           </a:xfrm>
           <a:prstGeom prst="rect">
             <a:avLst/>
@@ -8553,17 +9185,83 @@
                 <a:spcPts val="200"/>
               </a:spcBef>
               <a:spcAft>
-                <a:spcPts val="600"/>
+                <a:spcPts val="1000"/>
               </a:spcAft>
             </a:pPr>
             <a:r>
-              <a:rPr sz="1700" b="1" i="0">
+              <a:rPr sz="1600" b="1" i="0">
+                <a:solidFill>
+                  <a:srgbClr val="C87F0A"/>
+                </a:solidFill>
+                <a:latin typeface="Calibri"/>
+              </a:rPr>
+              <a:t>Where things stand:  </a:t>
+            </a:r>
+            <a:r>
+              <a:rPr sz="1600" b="0" i="0">
                 <a:solidFill>
                   <a:srgbClr val="333333"/>
                 </a:solidFill>
                 <a:latin typeface="Calibri"/>
               </a:rPr>
-              <a:t>All three are entity-typing decisions - so Initialization, not Reports, is where the proposed model must be exercised and settled.</a:t>
+              <a:t>the OWL has not yet caught up to ~5 months of attribute work in the spreadsheets - expected for a v0.0.x model that is still being built.</a:t>
+            </a:r>
+          </a:p>
+          <a:p>
+            <a:pPr lvl="1">
+              <a:spcBef>
+                <a:spcPts val="200"/>
+              </a:spcBef>
+              <a:spcAft>
+                <a:spcPts val="1000"/>
+              </a:spcAft>
+            </a:pPr>
+            <a:r>
+              <a:rPr sz="1600" b="0" i="0">
+                <a:solidFill>
+                  <a:srgbClr val="333333"/>
+                </a:solidFill>
+                <a:latin typeface="Calibri"/>
+              </a:rPr>
+              <a:t>      -  Autonomy is currently described three different ways across the two tracks - to reconcile.</a:t>
+            </a:r>
+          </a:p>
+          <a:p>
+            <a:pPr lvl="1">
+              <a:spcBef>
+                <a:spcPts val="200"/>
+              </a:spcBef>
+              <a:spcAft>
+                <a:spcPts val="1000"/>
+              </a:spcAft>
+            </a:pPr>
+            <a:r>
+              <a:rPr sz="1600" b="0" i="0">
+                <a:solidFill>
+                  <a:srgbClr val="333333"/>
+                </a:solidFill>
+                <a:latin typeface="Calibri"/>
+              </a:rPr>
+              <a:t>      -  Sensors are described three different ways - to reconcile.</a:t>
+            </a:r>
+          </a:p>
+          <a:p>
+            <a:pPr lvl="1">
+              <a:spcBef>
+                <a:spcPts val="200"/>
+              </a:spcBef>
+              <a:spcAft>
+                <a:spcPts val="1000"/>
+              </a:spcAft>
+            </a:pPr>
+            <a:r>
+              <a:rPr sz="1600" b="0" i="0">
+                <a:solidFill>
+                  <a:srgbClr val="333333"/>
+                </a:solidFill>
+                <a:latin typeface="Calibri"/>
+              </a:rPr>
+              <a:t>      -  The attribute layer (Payload, Mobility, VehicleType, ...) is in the spreadsheets, not yet in the OWL.</a:t>
             </a:r>
           </a:p>
         </p:txBody>
@@ -8727,211 +9425,21 @@
                 </a:solidFill>
                 <a:latin typeface="Calibri"/>
               </a:rPr>
-              <a:t>P1  -  A UAV is typed twice</a:t>
-            </a:r>
-          </a:p>
-        </p:txBody>
-      </p:sp>
-      <p:sp>
-        <p:nvSpPr>
-          <p:cNvPr id="4" name="TextBox 3"/>
-          <p:cNvSpPr txBox="1"/>
-          <p:nvPr/>
-        </p:nvSpPr>
-        <p:spPr>
-          <a:xfrm>
-            <a:off x="548640" y="914400"/>
-            <a:ext cx="10972800" cy="320040"/>
-          </a:xfrm>
-          <a:prstGeom prst="rect">
-            <a:avLst/>
-          </a:prstGeom>
-          <a:noFill/>
-        </p:spPr>
-        <p:txBody>
-          <a:bodyPr wrap="square">
-            <a:spAutoFit/>
-          </a:bodyPr>
-          <a:lstStyle/>
-          <a:p>
-            <a:r>
-              <a:rPr sz="1300" b="0" i="1">
-                <a:solidFill>
-                  <a:srgbClr val="2E869A"/>
-                </a:solidFill>
-                <a:latin typeface="Calibri"/>
-              </a:rPr>
-              <a:t>BLOCKER</a:t>
-            </a:r>
-          </a:p>
-        </p:txBody>
-      </p:sp>
-      <p:sp>
-        <p:nvSpPr>
-          <p:cNvPr id="5" name="Rounded Rectangle 4"/>
+              <a:t>First to settle: three structural typing decisions</a:t>
+            </a:r>
+          </a:p>
+        </p:txBody>
+      </p:sp>
+      <p:sp>
+        <p:nvSpPr>
+          <p:cNvPr id="4" name="Rounded Rectangle 3"/>
           <p:cNvSpPr/>
           <p:nvPr/>
         </p:nvSpPr>
         <p:spPr>
           <a:xfrm>
-            <a:off x="4754880" y="1554480"/>
-            <a:ext cx="2743200" cy="685800"/>
-          </a:xfrm>
-          <a:prstGeom prst="roundRect">
-            <a:avLst/>
-          </a:prstGeom>
-          <a:solidFill>
-            <a:srgbClr val="1F3A5F"/>
-          </a:solidFill>
-          <a:ln>
-            <a:noFill/>
-          </a:ln>
-        </p:spPr>
-        <p:style>
-          <a:lnRef idx="1">
-            <a:schemeClr val="accent1"/>
-          </a:lnRef>
-          <a:fillRef idx="3">
-            <a:schemeClr val="accent1"/>
-          </a:fillRef>
-          <a:effectRef idx="2">
-            <a:schemeClr val="accent1"/>
-          </a:effectRef>
-          <a:fontRef idx="minor">
-            <a:schemeClr val="lt1"/>
-          </a:fontRef>
-        </p:style>
-        <p:txBody>
-          <a:bodyPr rtlCol="0" anchor="ctr" wrap="square"/>
-          <a:lstStyle/>
-          <a:p>
-            <a:pPr algn="ctr"/>
-            <a:r>
-              <a:rPr sz="1400" b="1" i="0">
-                <a:solidFill>
-                  <a:srgbClr val="FFFFFF"/>
-                </a:solidFill>
-                <a:latin typeface="Calibri"/>
-              </a:rPr>
-              <a:t>ActorEntity</a:t>
-            </a:r>
-          </a:p>
-        </p:txBody>
-      </p:sp>
-      <p:sp>
-        <p:nvSpPr>
-          <p:cNvPr id="6" name="Rounded Rectangle 5"/>
-          <p:cNvSpPr/>
-          <p:nvPr/>
-        </p:nvSpPr>
-        <p:spPr>
-          <a:xfrm>
-            <a:off x="2194560" y="2743200"/>
-            <a:ext cx="2743200" cy="685800"/>
-          </a:xfrm>
-          <a:prstGeom prst="roundRect">
-            <a:avLst/>
-          </a:prstGeom>
-          <a:solidFill>
-            <a:srgbClr val="2E869A"/>
-          </a:solidFill>
-          <a:ln>
-            <a:noFill/>
-          </a:ln>
-        </p:spPr>
-        <p:style>
-          <a:lnRef idx="1">
-            <a:schemeClr val="accent1"/>
-          </a:lnRef>
-          <a:fillRef idx="3">
-            <a:schemeClr val="accent1"/>
-          </a:fillRef>
-          <a:effectRef idx="2">
-            <a:schemeClr val="accent1"/>
-          </a:effectRef>
-          <a:fontRef idx="minor">
-            <a:schemeClr val="lt1"/>
-          </a:fontRef>
-        </p:style>
-        <p:txBody>
-          <a:bodyPr rtlCol="0" anchor="ctr" wrap="square"/>
-          <a:lstStyle/>
-          <a:p>
-            <a:pPr algn="ctr"/>
-            <a:r>
-              <a:rPr sz="1300" b="1" i="0">
-                <a:solidFill>
-                  <a:srgbClr val="FFFFFF"/>
-                </a:solidFill>
-                <a:latin typeface="Calibri"/>
-              </a:rPr>
-              <a:t>Platform  (SMX)</a:t>
-            </a:r>
-          </a:p>
-        </p:txBody>
-      </p:sp>
-      <p:sp>
-        <p:nvSpPr>
-          <p:cNvPr id="7" name="Rounded Rectangle 6"/>
-          <p:cNvSpPr/>
-          <p:nvPr/>
-        </p:nvSpPr>
-        <p:spPr>
-          <a:xfrm>
-            <a:off x="2194560" y="3840480"/>
-            <a:ext cx="2743200" cy="685800"/>
-          </a:xfrm>
-          <a:prstGeom prst="roundRect">
-            <a:avLst/>
-          </a:prstGeom>
-          <a:solidFill>
-            <a:srgbClr val="2E869A"/>
-          </a:solidFill>
-          <a:ln>
-            <a:noFill/>
-          </a:ln>
-        </p:spPr>
-        <p:style>
-          <a:lnRef idx="1">
-            <a:schemeClr val="accent1"/>
-          </a:lnRef>
-          <a:fillRef idx="3">
-            <a:schemeClr val="accent1"/>
-          </a:fillRef>
-          <a:effectRef idx="2">
-            <a:schemeClr val="accent1"/>
-          </a:effectRef>
-          <a:fontRef idx="minor">
-            <a:schemeClr val="lt1"/>
-          </a:fontRef>
-        </p:style>
-        <p:txBody>
-          <a:bodyPr rtlCol="0" anchor="ctr" wrap="square"/>
-          <a:lstStyle/>
-          <a:p>
-            <a:pPr algn="ctr"/>
-            <a:r>
-              <a:rPr sz="1300" b="1" i="0">
-                <a:solidFill>
-                  <a:srgbClr val="FFFFFF"/>
-                </a:solidFill>
-                <a:latin typeface="Calibri"/>
-              </a:rPr>
-              <a:t>Aircraft  (SMX)</a:t>
-            </a:r>
-          </a:p>
-        </p:txBody>
-      </p:sp>
-      <p:sp>
-        <p:nvSpPr>
-          <p:cNvPr id="8" name="Rounded Rectangle 7"/>
-          <p:cNvSpPr/>
-          <p:nvPr/>
-        </p:nvSpPr>
-        <p:spPr>
-          <a:xfrm>
-            <a:off x="7315200" y="2743200"/>
-            <a:ext cx="2743200" cy="685800"/>
+            <a:off x="731520" y="1828800"/>
+            <a:ext cx="3474720" cy="2011680"/>
           </a:xfrm>
           <a:prstGeom prst="roundRect">
             <a:avLst/>
@@ -8963,27 +9471,29 @@
           <a:p>
             <a:pPr algn="ctr"/>
             <a:r>
-              <a:rPr sz="1300" b="1" i="0">
+              <a:rPr sz="1600" b="1" i="0">
                 <a:solidFill>
                   <a:srgbClr val="FFFFFF"/>
                 </a:solidFill>
                 <a:latin typeface="Calibri"/>
               </a:rPr>
-              <a:t>Robot  (ASX)</a:t>
-            </a:r>
-          </a:p>
-        </p:txBody>
-      </p:sp>
-      <p:sp>
-        <p:nvSpPr>
-          <p:cNvPr id="9" name="Rounded Rectangle 8"/>
+              <a:t>P1
+UAV typing: Robot
+tree vs SMX Platform</a:t>
+            </a:r>
+          </a:p>
+        </p:txBody>
+      </p:sp>
+      <p:sp>
+        <p:nvSpPr>
+          <p:cNvPr id="5" name="Rounded Rectangle 4"/>
           <p:cNvSpPr/>
           <p:nvPr/>
         </p:nvSpPr>
         <p:spPr>
           <a:xfrm>
-            <a:off x="7315200" y="3840480"/>
-            <a:ext cx="2743200" cy="685800"/>
+            <a:off x="4434840" y="1828800"/>
+            <a:ext cx="3474720" cy="2011680"/>
           </a:xfrm>
           <a:prstGeom prst="roundRect">
             <a:avLst/>
@@ -9015,167 +9525,83 @@
           <a:p>
             <a:pPr algn="ctr"/>
             <a:r>
-              <a:rPr sz="1300" b="1" i="0">
+              <a:rPr sz="1600" b="1" i="0">
                 <a:solidFill>
                   <a:srgbClr val="FFFFFF"/>
                 </a:solidFill>
                 <a:latin typeface="Calibri"/>
               </a:rPr>
-              <a:t>UAV  (ASX)</a:t>
-            </a:r>
-          </a:p>
-        </p:txBody>
-      </p:sp>
-      <p:cxnSp>
-        <p:nvCxnSpPr>
-          <p:cNvPr id="10" name="Connector 9"/>
-          <p:cNvCxnSpPr/>
-          <p:nvPr/>
-        </p:nvCxnSpPr>
-        <p:spPr>
-          <a:xfrm flipH="1">
-            <a:off x="3566160" y="2240280"/>
-            <a:ext cx="2103120" cy="502920"/>
-          </a:xfrm>
-          <a:prstGeom prst="line">
-            <a:avLst/>
-          </a:prstGeom>
-          <a:ln w="19050">
-            <a:solidFill>
-              <a:srgbClr val="1F3A5F"/>
-            </a:solidFill>
+              <a:t>P2
+Sensor: one
+representation to pick</a:t>
+            </a:r>
+          </a:p>
+        </p:txBody>
+      </p:sp>
+      <p:sp>
+        <p:nvSpPr>
+          <p:cNvPr id="6" name="Rounded Rectangle 5"/>
+          <p:cNvSpPr/>
+          <p:nvPr/>
+        </p:nvSpPr>
+        <p:spPr>
+          <a:xfrm>
+            <a:off x="8138160" y="1828800"/>
+            <a:ext cx="3337560" cy="2011680"/>
+          </a:xfrm>
+          <a:prstGeom prst="roundRect">
+            <a:avLst/>
+          </a:prstGeom>
+          <a:solidFill>
+            <a:srgbClr val="C87F0A"/>
+          </a:solidFill>
+          <a:ln>
+            <a:noFill/>
           </a:ln>
         </p:spPr>
         <p:style>
-          <a:lnRef idx="2">
+          <a:lnRef idx="1">
             <a:schemeClr val="accent1"/>
           </a:lnRef>
-          <a:fillRef idx="0">
+          <a:fillRef idx="3">
             <a:schemeClr val="accent1"/>
           </a:fillRef>
-          <a:effectRef idx="1">
+          <a:effectRef idx="2">
             <a:schemeClr val="accent1"/>
           </a:effectRef>
           <a:fontRef idx="minor">
-            <a:schemeClr val="tx1"/>
+            <a:schemeClr val="lt1"/>
           </a:fontRef>
         </p:style>
-      </p:cxnSp>
-      <p:cxnSp>
-        <p:nvCxnSpPr>
-          <p:cNvPr id="11" name="Connector 10"/>
-          <p:cNvCxnSpPr/>
-          <p:nvPr/>
-        </p:nvCxnSpPr>
-        <p:spPr>
-          <a:xfrm>
-            <a:off x="3566160" y="3429000"/>
-            <a:ext cx="0" cy="411480"/>
-          </a:xfrm>
-          <a:prstGeom prst="line">
-            <a:avLst/>
-          </a:prstGeom>
-          <a:ln w="19050">
-            <a:solidFill>
-              <a:srgbClr val="1F3A5F"/>
-            </a:solidFill>
-          </a:ln>
-        </p:spPr>
-        <p:style>
-          <a:lnRef idx="2">
-            <a:schemeClr val="accent1"/>
-          </a:lnRef>
-          <a:fillRef idx="0">
-            <a:schemeClr val="accent1"/>
-          </a:fillRef>
-          <a:effectRef idx="1">
-            <a:schemeClr val="accent1"/>
-          </a:effectRef>
-          <a:fontRef idx="minor">
-            <a:schemeClr val="tx1"/>
-          </a:fontRef>
-        </p:style>
-      </p:cxnSp>
-      <p:cxnSp>
-        <p:nvCxnSpPr>
-          <p:cNvPr id="12" name="Connector 11"/>
-          <p:cNvCxnSpPr/>
-          <p:nvPr/>
-        </p:nvCxnSpPr>
-        <p:spPr>
-          <a:xfrm>
-            <a:off x="6583680" y="2240280"/>
-            <a:ext cx="2103120" cy="502920"/>
-          </a:xfrm>
-          <a:prstGeom prst="line">
-            <a:avLst/>
-          </a:prstGeom>
-          <a:ln w="19050">
-            <a:solidFill>
-              <a:srgbClr val="1F3A5F"/>
-            </a:solidFill>
-          </a:ln>
-        </p:spPr>
-        <p:style>
-          <a:lnRef idx="2">
-            <a:schemeClr val="accent1"/>
-          </a:lnRef>
-          <a:fillRef idx="0">
-            <a:schemeClr val="accent1"/>
-          </a:fillRef>
-          <a:effectRef idx="1">
-            <a:schemeClr val="accent1"/>
-          </a:effectRef>
-          <a:fontRef idx="minor">
-            <a:schemeClr val="tx1"/>
-          </a:fontRef>
-        </p:style>
-      </p:cxnSp>
-      <p:cxnSp>
-        <p:nvCxnSpPr>
-          <p:cNvPr id="13" name="Connector 12"/>
-          <p:cNvCxnSpPr/>
-          <p:nvPr/>
-        </p:nvCxnSpPr>
-        <p:spPr>
-          <a:xfrm>
-            <a:off x="8686800" y="3429000"/>
-            <a:ext cx="0" cy="411480"/>
-          </a:xfrm>
-          <a:prstGeom prst="line">
-            <a:avLst/>
-          </a:prstGeom>
-          <a:ln w="19050">
-            <a:solidFill>
-              <a:srgbClr val="1F3A5F"/>
-            </a:solidFill>
-          </a:ln>
-        </p:spPr>
-        <p:style>
-          <a:lnRef idx="2">
-            <a:schemeClr val="accent1"/>
-          </a:lnRef>
-          <a:fillRef idx="0">
-            <a:schemeClr val="accent1"/>
-          </a:fillRef>
-          <a:effectRef idx="1">
-            <a:schemeClr val="accent1"/>
-          </a:effectRef>
-          <a:fontRef idx="minor">
-            <a:schemeClr val="tx1"/>
-          </a:fontRef>
-        </p:style>
-      </p:cxnSp>
-      <p:sp>
-        <p:nvSpPr>
-          <p:cNvPr id="14" name="TextBox 13"/>
+        <p:txBody>
+          <a:bodyPr rtlCol="0" anchor="ctr" wrap="square"/>
+          <a:lstStyle/>
+          <a:p>
+            <a:pPr algn="ctr"/>
+            <a:r>
+              <a:rPr sz="1600" b="1" i="0">
+                <a:solidFill>
+                  <a:srgbClr val="FFFFFF"/>
+                </a:solidFill>
+                <a:latin typeface="Calibri"/>
+              </a:rPr>
+              <a:t>P7
+Swarm: make it
+taskable (ActorEntity)</a:t>
+            </a:r>
+          </a:p>
+        </p:txBody>
+      </p:sp>
+      <p:sp>
+        <p:nvSpPr>
+          <p:cNvPr id="7" name="TextBox 6"/>
           <p:cNvSpPr txBox="1"/>
           <p:nvPr/>
         </p:nvSpPr>
         <p:spPr>
           <a:xfrm>
-            <a:off x="640080" y="4617720"/>
-            <a:ext cx="10972800" cy="1737360"/>
+            <a:off x="640080" y="4297680"/>
+            <a:ext cx="10972800" cy="2057400"/>
           </a:xfrm>
           <a:prstGeom prst="rect">
             <a:avLst/>
@@ -9197,86 +9623,20 @@
               </a:spcAft>
             </a:pPr>
             <a:r>
-              <a:rPr sz="1400" b="0" i="0">
+              <a:rPr sz="1700" b="1" i="0">
                 <a:solidFill>
                   <a:srgbClr val="333333"/>
                 </a:solidFill>
                 <a:latin typeface="Calibri"/>
               </a:rPr>
-              <a:t>Two parallel sibling trees under ActorEntity model the same real drone.</a:t>
-            </a:r>
-          </a:p>
-          <a:p>
-            <a:pPr lvl="1">
-              <a:spcBef>
-                <a:spcPts val="200"/>
-              </a:spcBef>
-              <a:spcAft>
-                <a:spcPts val="600"/>
-              </a:spcAft>
-            </a:pPr>
-            <a:r>
-              <a:rPr sz="1400" b="0" i="0">
-                <a:solidFill>
-                  <a:srgbClr val="333333"/>
-                </a:solidFill>
-                <a:latin typeface="Calibri"/>
-              </a:rPr>
-              <a:t>      -  Type it as Robot -&gt; it loses all existing SMX Platform / LOX machinery.</a:t>
-            </a:r>
-          </a:p>
-          <a:p>
-            <a:pPr lvl="1">
-              <a:spcBef>
-                <a:spcPts val="200"/>
-              </a:spcBef>
-              <a:spcAft>
-                <a:spcPts val="600"/>
-              </a:spcAft>
-            </a:pPr>
-            <a:r>
-              <a:rPr sz="1400" b="0" i="0">
-                <a:solidFill>
-                  <a:srgbClr val="333333"/>
-                </a:solidFill>
-                <a:latin typeface="Calibri"/>
-              </a:rPr>
-              <a:t>      -  Type it as Aircraft -&gt; the ASX Robot / UAV classes go unused.</a:t>
-            </a:r>
-          </a:p>
-          <a:p>
-            <a:pPr>
-              <a:spcBef>
-                <a:spcPts val="200"/>
-              </a:spcBef>
-              <a:spcAft>
-                <a:spcPts val="600"/>
-              </a:spcAft>
-            </a:pPr>
-            <a:r>
-              <a:rPr sz="1400" b="1" i="0">
-                <a:solidFill>
-                  <a:srgbClr val="2E869A"/>
-                </a:solidFill>
-                <a:latin typeface="Calibri"/>
-              </a:rPr>
-              <a:t>Decision (Q-A):  </a:t>
-            </a:r>
-            <a:r>
-              <a:rPr sz="1400" b="0" i="0">
-                <a:solidFill>
-                  <a:srgbClr val="333333"/>
-                </a:solidFill>
-                <a:latin typeface="Calibri"/>
-              </a:rPr>
-              <a:t>make ASX autonomy a role/facet on the existing Platform subtree instead of a parallel Robot tree?</a:t>
-            </a:r>
-          </a:p>
-        </p:txBody>
-      </p:sp>
-      <p:sp>
-        <p:nvSpPr>
-          <p:cNvPr id="15" name="TextBox 14"/>
+              <a:t>P1 and P7 are entity-typing (what a drone / a swarm IS); P2 is how a sensor is represented. All three are structural choices not yet settled - so Initialization, not Reports, is where the model gets exercised and pinned down first.</a:t>
+            </a:r>
+          </a:p>
+        </p:txBody>
+      </p:sp>
+      <p:sp>
+        <p:nvSpPr>
+          <p:cNvPr id="8" name="TextBox 7"/>
           <p:cNvSpPr txBox="1"/>
           <p:nvPr/>
         </p:nvSpPr>
@@ -9310,7 +9670,7 @@
       </p:sp>
       <p:sp>
         <p:nvSpPr>
-          <p:cNvPr id="16" name="TextBox 15"/>
+          <p:cNvPr id="9" name="TextBox 8"/>
           <p:cNvSpPr txBox="1"/>
           <p:nvPr/>
         </p:nvSpPr>
@@ -9433,7 +9793,7 @@
                 </a:solidFill>
                 <a:latin typeface="Calibri"/>
               </a:rPr>
-              <a:t>P7  -  A swarm cannot receive orders</a:t>
+              <a:t>P1  -  A UAV is typed twice</a:t>
             </a:r>
           </a:p>
         </p:txBody>
@@ -9467,7 +9827,7 @@
                 </a:solidFill>
                 <a:latin typeface="Calibri"/>
               </a:rPr>
-              <a:t>BLOCKER</a:t>
+              <a:t>Entity-typing decision</a:t>
             </a:r>
           </a:p>
         </p:txBody>
@@ -9480,8 +9840,164 @@
         </p:nvSpPr>
         <p:spPr>
           <a:xfrm>
-            <a:off x="822960" y="1828800"/>
-            <a:ext cx="2834640" cy="640080"/>
+            <a:off x="4754880" y="1554480"/>
+            <a:ext cx="2743200" cy="685800"/>
+          </a:xfrm>
+          <a:prstGeom prst="roundRect">
+            <a:avLst/>
+          </a:prstGeom>
+          <a:solidFill>
+            <a:srgbClr val="1F3A5F"/>
+          </a:solidFill>
+          <a:ln>
+            <a:noFill/>
+          </a:ln>
+        </p:spPr>
+        <p:style>
+          <a:lnRef idx="1">
+            <a:schemeClr val="accent1"/>
+          </a:lnRef>
+          <a:fillRef idx="3">
+            <a:schemeClr val="accent1"/>
+          </a:fillRef>
+          <a:effectRef idx="2">
+            <a:schemeClr val="accent1"/>
+          </a:effectRef>
+          <a:fontRef idx="minor">
+            <a:schemeClr val="lt1"/>
+          </a:fontRef>
+        </p:style>
+        <p:txBody>
+          <a:bodyPr rtlCol="0" anchor="ctr" wrap="square"/>
+          <a:lstStyle/>
+          <a:p>
+            <a:pPr algn="ctr"/>
+            <a:r>
+              <a:rPr sz="1400" b="1" i="0">
+                <a:solidFill>
+                  <a:srgbClr val="FFFFFF"/>
+                </a:solidFill>
+                <a:latin typeface="Calibri"/>
+              </a:rPr>
+              <a:t>ActorEntity</a:t>
+            </a:r>
+          </a:p>
+        </p:txBody>
+      </p:sp>
+      <p:sp>
+        <p:nvSpPr>
+          <p:cNvPr id="6" name="Rounded Rectangle 5"/>
+          <p:cNvSpPr/>
+          <p:nvPr/>
+        </p:nvSpPr>
+        <p:spPr>
+          <a:xfrm>
+            <a:off x="2194560" y="2743200"/>
+            <a:ext cx="2743200" cy="685800"/>
+          </a:xfrm>
+          <a:prstGeom prst="roundRect">
+            <a:avLst/>
+          </a:prstGeom>
+          <a:solidFill>
+            <a:srgbClr val="2E869A"/>
+          </a:solidFill>
+          <a:ln>
+            <a:noFill/>
+          </a:ln>
+        </p:spPr>
+        <p:style>
+          <a:lnRef idx="1">
+            <a:schemeClr val="accent1"/>
+          </a:lnRef>
+          <a:fillRef idx="3">
+            <a:schemeClr val="accent1"/>
+          </a:fillRef>
+          <a:effectRef idx="2">
+            <a:schemeClr val="accent1"/>
+          </a:effectRef>
+          <a:fontRef idx="minor">
+            <a:schemeClr val="lt1"/>
+          </a:fontRef>
+        </p:style>
+        <p:txBody>
+          <a:bodyPr rtlCol="0" anchor="ctr" wrap="square"/>
+          <a:lstStyle/>
+          <a:p>
+            <a:pPr algn="ctr"/>
+            <a:r>
+              <a:rPr sz="1300" b="1" i="0">
+                <a:solidFill>
+                  <a:srgbClr val="FFFFFF"/>
+                </a:solidFill>
+                <a:latin typeface="Calibri"/>
+              </a:rPr>
+              <a:t>Platform  (SMX)</a:t>
+            </a:r>
+          </a:p>
+        </p:txBody>
+      </p:sp>
+      <p:sp>
+        <p:nvSpPr>
+          <p:cNvPr id="7" name="Rounded Rectangle 6"/>
+          <p:cNvSpPr/>
+          <p:nvPr/>
+        </p:nvSpPr>
+        <p:spPr>
+          <a:xfrm>
+            <a:off x="2194560" y="3840480"/>
+            <a:ext cx="2743200" cy="685800"/>
+          </a:xfrm>
+          <a:prstGeom prst="roundRect">
+            <a:avLst/>
+          </a:prstGeom>
+          <a:solidFill>
+            <a:srgbClr val="2E869A"/>
+          </a:solidFill>
+          <a:ln>
+            <a:noFill/>
+          </a:ln>
+        </p:spPr>
+        <p:style>
+          <a:lnRef idx="1">
+            <a:schemeClr val="accent1"/>
+          </a:lnRef>
+          <a:fillRef idx="3">
+            <a:schemeClr val="accent1"/>
+          </a:fillRef>
+          <a:effectRef idx="2">
+            <a:schemeClr val="accent1"/>
+          </a:effectRef>
+          <a:fontRef idx="minor">
+            <a:schemeClr val="lt1"/>
+          </a:fontRef>
+        </p:style>
+        <p:txBody>
+          <a:bodyPr rtlCol="0" anchor="ctr" wrap="square"/>
+          <a:lstStyle/>
+          <a:p>
+            <a:pPr algn="ctr"/>
+            <a:r>
+              <a:rPr sz="1300" b="1" i="0">
+                <a:solidFill>
+                  <a:srgbClr val="FFFFFF"/>
+                </a:solidFill>
+                <a:latin typeface="Calibri"/>
+              </a:rPr>
+              <a:t>Aircraft  (SMX)</a:t>
+            </a:r>
+          </a:p>
+        </p:txBody>
+      </p:sp>
+      <p:sp>
+        <p:nvSpPr>
+          <p:cNvPr id="8" name="Rounded Rectangle 7"/>
+          <p:cNvSpPr/>
+          <p:nvPr/>
+        </p:nvSpPr>
+        <p:spPr>
+          <a:xfrm>
+            <a:off x="7315200" y="2743200"/>
+            <a:ext cx="2743200" cy="685800"/>
           </a:xfrm>
           <a:prstGeom prst="roundRect">
             <a:avLst/>
@@ -9519,21 +10035,21 @@
                 </a:solidFill>
                 <a:latin typeface="Calibri"/>
               </a:rPr>
-              <a:t>Swarm  (ASX)</a:t>
-            </a:r>
-          </a:p>
-        </p:txBody>
-      </p:sp>
-      <p:sp>
-        <p:nvSpPr>
-          <p:cNvPr id="6" name="Rounded Rectangle 5"/>
+              <a:t>Robot  (ASX)</a:t>
+            </a:r>
+          </a:p>
+        </p:txBody>
+      </p:sp>
+      <p:sp>
+        <p:nvSpPr>
+          <p:cNvPr id="9" name="Rounded Rectangle 8"/>
           <p:cNvSpPr/>
           <p:nvPr/>
         </p:nvSpPr>
         <p:spPr>
           <a:xfrm>
-            <a:off x="3931920" y="1828800"/>
-            <a:ext cx="3291840" cy="640080"/>
+            <a:off x="7315200" y="3840480"/>
+            <a:ext cx="2743200" cy="685800"/>
           </a:xfrm>
           <a:prstGeom prst="roundRect">
             <a:avLst/>
@@ -9565,86 +10081,34 @@
           <a:p>
             <a:pPr algn="ctr"/>
             <a:r>
-              <a:rPr sz="1200" b="1" i="0">
+              <a:rPr sz="1300" b="1" i="0">
                 <a:solidFill>
                   <a:srgbClr val="FFFFFF"/>
                 </a:solidFill>
                 <a:latin typeface="Calibri"/>
               </a:rPr>
-              <a:t>CollecticeRoboticSystem</a:t>
-            </a:r>
-          </a:p>
-        </p:txBody>
-      </p:sp>
-      <p:sp>
-        <p:nvSpPr>
-          <p:cNvPr id="7" name="Rounded Rectangle 6"/>
-          <p:cNvSpPr/>
-          <p:nvPr/>
-        </p:nvSpPr>
-        <p:spPr>
-          <a:xfrm>
-            <a:off x="7498079" y="1828800"/>
-            <a:ext cx="3108960" cy="640080"/>
-          </a:xfrm>
-          <a:prstGeom prst="roundRect">
-            <a:avLst/>
-          </a:prstGeom>
-          <a:solidFill>
-            <a:srgbClr val="C0392B"/>
-          </a:solidFill>
-          <a:ln>
-            <a:noFill/>
-          </a:ln>
-        </p:spPr>
-        <p:style>
-          <a:lnRef idx="1">
-            <a:schemeClr val="accent1"/>
-          </a:lnRef>
-          <a:fillRef idx="3">
-            <a:schemeClr val="accent1"/>
-          </a:fillRef>
-          <a:effectRef idx="2">
-            <a:schemeClr val="accent1"/>
-          </a:effectRef>
-          <a:fontRef idx="minor">
-            <a:schemeClr val="lt1"/>
-          </a:fontRef>
-        </p:style>
-        <p:txBody>
-          <a:bodyPr rtlCol="0" anchor="ctr" wrap="square"/>
-          <a:lstStyle/>
-          <a:p>
-            <a:pPr algn="ctr"/>
-            <a:r>
-              <a:rPr sz="1300" b="1" i="0">
-                <a:solidFill>
-                  <a:srgbClr val="FFFFFF"/>
-                </a:solidFill>
-                <a:latin typeface="Calibri"/>
-              </a:rPr>
-              <a:t>... PhysicalEntity</a:t>
+              <a:t>UAV  (ASX)</a:t>
             </a:r>
           </a:p>
         </p:txBody>
       </p:sp>
       <p:cxnSp>
         <p:nvCxnSpPr>
-          <p:cNvPr id="8" name="Connector 7"/>
+          <p:cNvPr id="10" name="Connector 9"/>
           <p:cNvCxnSpPr/>
           <p:nvPr/>
         </p:nvCxnSpPr>
         <p:spPr>
-          <a:xfrm>
-            <a:off x="3657600" y="2148840"/>
-            <a:ext cx="274320" cy="0"/>
+          <a:xfrm flipH="1">
+            <a:off x="3566160" y="2240280"/>
+            <a:ext cx="2103120" cy="502920"/>
           </a:xfrm>
           <a:prstGeom prst="line">
             <a:avLst/>
           </a:prstGeom>
           <a:ln w="19050">
             <a:solidFill>
-              <a:srgbClr val="C0392B"/>
+              <a:srgbClr val="1F3A5F"/>
             </a:solidFill>
           </a:ln>
         </p:spPr>
@@ -9665,246 +10129,21 @@
       </p:cxnSp>
       <p:cxnSp>
         <p:nvCxnSpPr>
-          <p:cNvPr id="9" name="Connector 8"/>
+          <p:cNvPr id="11" name="Connector 10"/>
           <p:cNvCxnSpPr/>
           <p:nvPr/>
         </p:nvCxnSpPr>
         <p:spPr>
           <a:xfrm>
-            <a:off x="7223760" y="2148840"/>
-            <a:ext cx="274319" cy="0"/>
+            <a:off x="3566160" y="3429000"/>
+            <a:ext cx="0" cy="411480"/>
           </a:xfrm>
           <a:prstGeom prst="line">
             <a:avLst/>
           </a:prstGeom>
           <a:ln w="19050">
             <a:solidFill>
-              <a:srgbClr val="C0392B"/>
-            </a:solidFill>
-          </a:ln>
-        </p:spPr>
-        <p:style>
-          <a:lnRef idx="2">
-            <a:schemeClr val="accent1"/>
-          </a:lnRef>
-          <a:fillRef idx="0">
-            <a:schemeClr val="accent1"/>
-          </a:fillRef>
-          <a:effectRef idx="1">
-            <a:schemeClr val="accent1"/>
-          </a:effectRef>
-          <a:fontRef idx="minor">
-            <a:schemeClr val="tx1"/>
-          </a:fontRef>
-        </p:style>
-      </p:cxnSp>
-      <p:sp>
-        <p:nvSpPr>
-          <p:cNvPr id="10" name="TextBox 9"/>
-          <p:cNvSpPr txBox="1"/>
-          <p:nvPr/>
-        </p:nvSpPr>
-        <p:spPr>
-          <a:xfrm>
-            <a:off x="7498079" y="2514600"/>
-            <a:ext cx="3291840" cy="365760"/>
-          </a:xfrm>
-          <a:prstGeom prst="rect">
-            <a:avLst/>
-          </a:prstGeom>
-          <a:noFill/>
-        </p:spPr>
-        <p:txBody>
-          <a:bodyPr wrap="square">
-            <a:spAutoFit/>
-          </a:bodyPr>
-          <a:lstStyle/>
-          <a:p>
-            <a:r>
-              <a:rPr sz="1200" b="0" i="1">
-                <a:solidFill>
-                  <a:srgbClr val="C0392B"/>
-                </a:solidFill>
-                <a:latin typeface="Calibri"/>
-              </a:rPr>
-              <a:t>inert object - cannot be tasked</a:t>
-            </a:r>
-          </a:p>
-        </p:txBody>
-      </p:sp>
-      <p:sp>
-        <p:nvSpPr>
-          <p:cNvPr id="11" name="Rounded Rectangle 10"/>
-          <p:cNvSpPr/>
-          <p:nvPr/>
-        </p:nvSpPr>
-        <p:spPr>
-          <a:xfrm>
-            <a:off x="822960" y="3657600"/>
-            <a:ext cx="2834640" cy="640080"/>
-          </a:xfrm>
-          <a:prstGeom prst="roundRect">
-            <a:avLst/>
-          </a:prstGeom>
-          <a:solidFill>
-            <a:srgbClr val="2E7D32"/>
-          </a:solidFill>
-          <a:ln>
-            <a:noFill/>
-          </a:ln>
-        </p:spPr>
-        <p:style>
-          <a:lnRef idx="1">
-            <a:schemeClr val="accent1"/>
-          </a:lnRef>
-          <a:fillRef idx="3">
-            <a:schemeClr val="accent1"/>
-          </a:fillRef>
-          <a:effectRef idx="2">
-            <a:schemeClr val="accent1"/>
-          </a:effectRef>
-          <a:fontRef idx="minor">
-            <a:schemeClr val="lt1"/>
-          </a:fontRef>
-        </p:style>
-        <p:txBody>
-          <a:bodyPr rtlCol="0" anchor="ctr" wrap="square"/>
-          <a:lstStyle/>
-          <a:p>
-            <a:pPr algn="ctr"/>
-            <a:r>
-              <a:rPr sz="1300" b="1" i="0">
-                <a:solidFill>
-                  <a:srgbClr val="FFFFFF"/>
-                </a:solidFill>
-                <a:latin typeface="Calibri"/>
-              </a:rPr>
-              <a:t>Swarm  (proposed)</a:t>
-            </a:r>
-          </a:p>
-        </p:txBody>
-      </p:sp>
-      <p:sp>
-        <p:nvSpPr>
-          <p:cNvPr id="12" name="Rounded Rectangle 11"/>
-          <p:cNvSpPr/>
-          <p:nvPr/>
-        </p:nvSpPr>
-        <p:spPr>
-          <a:xfrm>
-            <a:off x="3931920" y="3657600"/>
-            <a:ext cx="3291840" cy="640080"/>
-          </a:xfrm>
-          <a:prstGeom prst="roundRect">
-            <a:avLst/>
-          </a:prstGeom>
-          <a:solidFill>
-            <a:srgbClr val="2E7D32"/>
-          </a:solidFill>
-          <a:ln>
-            <a:noFill/>
-          </a:ln>
-        </p:spPr>
-        <p:style>
-          <a:lnRef idx="1">
-            <a:schemeClr val="accent1"/>
-          </a:lnRef>
-          <a:fillRef idx="3">
-            <a:schemeClr val="accent1"/>
-          </a:fillRef>
-          <a:effectRef idx="2">
-            <a:schemeClr val="accent1"/>
-          </a:effectRef>
-          <a:fontRef idx="minor">
-            <a:schemeClr val="lt1"/>
-          </a:fontRef>
-        </p:style>
-        <p:txBody>
-          <a:bodyPr rtlCol="0" anchor="ctr" wrap="square"/>
-          <a:lstStyle/>
-          <a:p>
-            <a:pPr algn="ctr"/>
-            <a:r>
-              <a:rPr sz="1200" b="1" i="0">
-                <a:solidFill>
-                  <a:srgbClr val="FFFFFF"/>
-                </a:solidFill>
-                <a:latin typeface="Calibri"/>
-              </a:rPr>
-              <a:t>CollectiveEntity  (C2SIM)</a:t>
-            </a:r>
-          </a:p>
-        </p:txBody>
-      </p:sp>
-      <p:sp>
-        <p:nvSpPr>
-          <p:cNvPr id="13" name="Rounded Rectangle 12"/>
-          <p:cNvSpPr/>
-          <p:nvPr/>
-        </p:nvSpPr>
-        <p:spPr>
-          <a:xfrm>
-            <a:off x="7498079" y="3657600"/>
-            <a:ext cx="3108960" cy="640080"/>
-          </a:xfrm>
-          <a:prstGeom prst="roundRect">
-            <a:avLst/>
-          </a:prstGeom>
-          <a:solidFill>
-            <a:srgbClr val="2E7D32"/>
-          </a:solidFill>
-          <a:ln>
-            <a:noFill/>
-          </a:ln>
-        </p:spPr>
-        <p:style>
-          <a:lnRef idx="1">
-            <a:schemeClr val="accent1"/>
-          </a:lnRef>
-          <a:fillRef idx="3">
-            <a:schemeClr val="accent1"/>
-          </a:fillRef>
-          <a:effectRef idx="2">
-            <a:schemeClr val="accent1"/>
-          </a:effectRef>
-          <a:fontRef idx="minor">
-            <a:schemeClr val="lt1"/>
-          </a:fontRef>
-        </p:style>
-        <p:txBody>
-          <a:bodyPr rtlCol="0" anchor="ctr" wrap="square"/>
-          <a:lstStyle/>
-          <a:p>
-            <a:pPr algn="ctr"/>
-            <a:r>
-              <a:rPr sz="1300" b="1" i="0">
-                <a:solidFill>
-                  <a:srgbClr val="FFFFFF"/>
-                </a:solidFill>
-                <a:latin typeface="Calibri"/>
-              </a:rPr>
-              <a:t>ActorEntity</a:t>
-            </a:r>
-          </a:p>
-        </p:txBody>
-      </p:sp>
-      <p:cxnSp>
-        <p:nvCxnSpPr>
-          <p:cNvPr id="14" name="Connector 13"/>
-          <p:cNvCxnSpPr/>
-          <p:nvPr/>
-        </p:nvCxnSpPr>
-        <p:spPr>
-          <a:xfrm>
-            <a:off x="3657600" y="3977639"/>
-            <a:ext cx="274320" cy="0"/>
-          </a:xfrm>
-          <a:prstGeom prst="line">
-            <a:avLst/>
-          </a:prstGeom>
-          <a:ln w="19050">
-            <a:solidFill>
-              <a:srgbClr val="2E7D32"/>
+              <a:srgbClr val="1F3A5F"/>
             </a:solidFill>
           </a:ln>
         </p:spPr>
@@ -9925,21 +10164,21 @@
       </p:cxnSp>
       <p:cxnSp>
         <p:nvCxnSpPr>
-          <p:cNvPr id="15" name="Connector 14"/>
+          <p:cNvPr id="12" name="Connector 11"/>
           <p:cNvCxnSpPr/>
           <p:nvPr/>
         </p:nvCxnSpPr>
         <p:spPr>
           <a:xfrm>
-            <a:off x="7223760" y="3977639"/>
-            <a:ext cx="274319" cy="0"/>
+            <a:off x="6583680" y="2240280"/>
+            <a:ext cx="2103120" cy="502920"/>
           </a:xfrm>
           <a:prstGeom prst="line">
             <a:avLst/>
           </a:prstGeom>
           <a:ln w="19050">
             <a:solidFill>
-              <a:srgbClr val="2E7D32"/>
+              <a:srgbClr val="1F3A5F"/>
             </a:solidFill>
           </a:ln>
         </p:spPr>
@@ -9958,50 +10197,51 @@
           </a:fontRef>
         </p:style>
       </p:cxnSp>
-      <p:sp>
-        <p:nvSpPr>
-          <p:cNvPr id="16" name="TextBox 15"/>
+      <p:cxnSp>
+        <p:nvCxnSpPr>
+          <p:cNvPr id="13" name="Connector 12"/>
+          <p:cNvCxnSpPr/>
+          <p:nvPr/>
+        </p:nvCxnSpPr>
+        <p:spPr>
+          <a:xfrm>
+            <a:off x="8686800" y="3429000"/>
+            <a:ext cx="0" cy="411480"/>
+          </a:xfrm>
+          <a:prstGeom prst="line">
+            <a:avLst/>
+          </a:prstGeom>
+          <a:ln w="19050">
+            <a:solidFill>
+              <a:srgbClr val="1F3A5F"/>
+            </a:solidFill>
+          </a:ln>
+        </p:spPr>
+        <p:style>
+          <a:lnRef idx="2">
+            <a:schemeClr val="accent1"/>
+          </a:lnRef>
+          <a:fillRef idx="0">
+            <a:schemeClr val="accent1"/>
+          </a:fillRef>
+          <a:effectRef idx="1">
+            <a:schemeClr val="accent1"/>
+          </a:effectRef>
+          <a:fontRef idx="minor">
+            <a:schemeClr val="tx1"/>
+          </a:fontRef>
+        </p:style>
+      </p:cxnSp>
+      <p:sp>
+        <p:nvSpPr>
+          <p:cNvPr id="14" name="TextBox 13"/>
           <p:cNvSpPr txBox="1"/>
           <p:nvPr/>
         </p:nvSpPr>
         <p:spPr>
           <a:xfrm>
-            <a:off x="7498079" y="4343400"/>
-            <a:ext cx="3291840" cy="365760"/>
-          </a:xfrm>
-          <a:prstGeom prst="rect">
-            <a:avLst/>
-          </a:prstGeom>
-          <a:noFill/>
-        </p:spPr>
-        <p:txBody>
-          <a:bodyPr wrap="square">
-            <a:spAutoFit/>
-          </a:bodyPr>
-          <a:lstStyle/>
-          <a:p>
-            <a:r>
-              <a:rPr sz="1200" b="0" i="1">
-                <a:solidFill>
-                  <a:srgbClr val="2E7D32"/>
-                </a:solidFill>
-                <a:latin typeface="Calibri"/>
-              </a:rPr>
-              <a:t>taskable - receives orders, reports</a:t>
-            </a:r>
-          </a:p>
-        </p:txBody>
-      </p:sp>
-      <p:sp>
-        <p:nvSpPr>
-          <p:cNvPr id="17" name="TextBox 16"/>
-          <p:cNvSpPr txBox="1"/>
-          <p:nvPr/>
-        </p:nvSpPr>
-        <p:spPr>
-          <a:xfrm>
-            <a:off x="640080" y="4846320"/>
-            <a:ext cx="10972800" cy="1508760"/>
+            <a:off x="640080" y="4434840"/>
+            <a:ext cx="10972800" cy="1920240"/>
           </a:xfrm>
           <a:prstGeom prst="rect">
             <a:avLst/>
@@ -10019,17 +10259,17 @@
                 <a:spcPts val="200"/>
               </a:spcBef>
               <a:spcAft>
-                <a:spcPts val="600"/>
+                <a:spcPts val="500"/>
               </a:spcAft>
             </a:pPr>
             <a:r>
-              <a:rPr sz="1350" b="0" i="0">
+              <a:rPr sz="1300" b="0" i="0">
                 <a:solidFill>
                   <a:srgbClr val="333333"/>
                 </a:solidFill>
                 <a:latin typeface="Calibri"/>
               </a:rPr>
-              <a:t>A swarm is exactly what orders are addressed to and what sends reports - it must be an ActorEntity.</a:t>
+              <a:t>Two parallel sibling trees under ActorEntity model the same real drone.</a:t>
             </a:r>
           </a:p>
           <a:p>
@@ -10038,17 +10278,36 @@
                 <a:spcPts val="200"/>
               </a:spcBef>
               <a:spcAft>
-                <a:spcPts val="600"/>
+                <a:spcPts val="500"/>
               </a:spcAft>
             </a:pPr>
             <a:r>
-              <a:rPr sz="1350" b="0" i="0">
+              <a:rPr sz="1300" b="0" i="0">
                 <a:solidFill>
                   <a:srgbClr val="333333"/>
                 </a:solidFill>
                 <a:latin typeface="Calibri"/>
               </a:rPr>
-              <a:t>      -  Once fixed, membership and command already exist in the base standard (C2SIM hasSubordinate, SMX hasCommandRelation); the residual swarm needs are small.</a:t>
+              <a:t>      -  Type it as Robot -&gt; it loses all existing SMX Platform / LOX machinery.</a:t>
+            </a:r>
+          </a:p>
+          <a:p>
+            <a:pPr lvl="1">
+              <a:spcBef>
+                <a:spcPts val="200"/>
+              </a:spcBef>
+              <a:spcAft>
+                <a:spcPts val="500"/>
+              </a:spcAft>
+            </a:pPr>
+            <a:r>
+              <a:rPr sz="1300" b="0" i="0">
+                <a:solidFill>
+                  <a:srgbClr val="333333"/>
+                </a:solidFill>
+                <a:latin typeface="Calibri"/>
+              </a:rPr>
+              <a:t>      -  Type it as Aircraft -&gt; the ASX Robot / UAV classes go unused.</a:t>
             </a:r>
           </a:p>
           <a:p>
@@ -10057,33 +10316,61 @@
                 <a:spcPts val="200"/>
               </a:spcBef>
               <a:spcAft>
-                <a:spcPts val="600"/>
+                <a:spcPts val="500"/>
               </a:spcAft>
             </a:pPr>
             <a:r>
-              <a:rPr sz="1350" b="1" i="0">
+              <a:rPr sz="1300" b="1" i="0">
+                <a:solidFill>
+                  <a:srgbClr val="C87F0A"/>
+                </a:solidFill>
+                <a:latin typeface="Calibri"/>
+              </a:rPr>
+              <a:t>Now live in v0.0.3:  </a:t>
+            </a:r>
+            <a:r>
+              <a:rPr sz="1300" b="0" i="0">
+                <a:solidFill>
+                  <a:srgbClr val="333333"/>
+                </a:solidFill>
+                <a:latin typeface="Calibri"/>
+              </a:rPr>
+              <a:t>v0.0.3 declares both - UAV/UGV under Robot AND UnmannedAerial/Ground/Maritime/UnderwaterVehicle under SMX Vehicle - so this choice is now in the model to settle.</a:t>
+            </a:r>
+          </a:p>
+          <a:p>
+            <a:pPr>
+              <a:spcBef>
+                <a:spcPts val="200"/>
+              </a:spcBef>
+              <a:spcAft>
+                <a:spcPts val="500"/>
+              </a:spcAft>
+            </a:pPr>
+            <a:r>
+              <a:rPr sz="1300" b="1" i="0">
                 <a:solidFill>
                   <a:srgbClr val="2E869A"/>
                 </a:solidFill>
                 <a:latin typeface="Calibri"/>
               </a:rPr>
-              <a:t>Decision (Q-B):  </a:t>
-            </a:r>
-            <a:r>
-              <a:rPr sz="1350" b="0" i="0">
+              <a:t>Decision (Q-A):  </a:t>
+            </a:r>
+            <a:r>
+              <a:rPr sz="1300" b="0" i="0">
                 <a:solidFill>
                   <a:srgbClr val="333333"/>
                 </a:solidFill>
                 <a:latin typeface="Calibri"/>
               </a:rPr>
-              <a:t>derive Swarm from CollectiveEntity (already an ActorEntity) rather than from the device/artifact tree.</a:t>
-            </a:r>
-          </a:p>
-        </p:txBody>
-      </p:sp>
-      <p:sp>
-        <p:nvSpPr>
-          <p:cNvPr id="18" name="TextBox 17"/>
+              <a:t>make ASX autonomy a role/facet on the existing Platform subtree instead of a parallel Robot tree?</a:t>
+            </a:r>
+          </a:p>
+        </p:txBody>
+      </p:sp>
+      <p:sp>
+        <p:nvSpPr>
+          <p:cNvPr id="15" name="TextBox 14"/>
           <p:cNvSpPr txBox="1"/>
           <p:nvPr/>
         </p:nvSpPr>
@@ -10117,7 +10404,7 @@
       </p:sp>
       <p:sp>
         <p:nvSpPr>
-          <p:cNvPr id="19" name="TextBox 18"/>
+          <p:cNvPr id="16" name="TextBox 15"/>
           <p:cNvSpPr txBox="1"/>
           <p:nvPr/>
         </p:nvSpPr>
@@ -10240,7 +10527,7 @@
                 </a:solidFill>
                 <a:latin typeface="Calibri"/>
               </a:rPr>
-              <a:t>The model lags the spreadsheets</a:t>
+              <a:t>P7  -  A swarm is not yet taskable</a:t>
             </a:r>
           </a:p>
         </p:txBody>
@@ -10253,8 +10540,562 @@
         </p:nvSpPr>
         <p:spPr>
           <a:xfrm>
-            <a:off x="640080" y="1645920"/>
-            <a:ext cx="10972800" cy="4709160"/>
+            <a:off x="548640" y="914400"/>
+            <a:ext cx="10972800" cy="320040"/>
+          </a:xfrm>
+          <a:prstGeom prst="rect">
+            <a:avLst/>
+          </a:prstGeom>
+          <a:noFill/>
+        </p:spPr>
+        <p:txBody>
+          <a:bodyPr wrap="square">
+            <a:spAutoFit/>
+          </a:bodyPr>
+          <a:lstStyle/>
+          <a:p>
+            <a:r>
+              <a:rPr sz="1300" b="0" i="1">
+                <a:solidFill>
+                  <a:srgbClr val="2E869A"/>
+                </a:solidFill>
+                <a:latin typeface="Calibri"/>
+              </a:rPr>
+              <a:t>Entity-typing decision</a:t>
+            </a:r>
+          </a:p>
+        </p:txBody>
+      </p:sp>
+      <p:sp>
+        <p:nvSpPr>
+          <p:cNvPr id="5" name="Rounded Rectangle 4"/>
+          <p:cNvSpPr/>
+          <p:nvPr/>
+        </p:nvSpPr>
+        <p:spPr>
+          <a:xfrm>
+            <a:off x="822960" y="1828800"/>
+            <a:ext cx="2834640" cy="640080"/>
+          </a:xfrm>
+          <a:prstGeom prst="roundRect">
+            <a:avLst/>
+          </a:prstGeom>
+          <a:solidFill>
+            <a:srgbClr val="C87F0A"/>
+          </a:solidFill>
+          <a:ln>
+            <a:noFill/>
+          </a:ln>
+        </p:spPr>
+        <p:style>
+          <a:lnRef idx="1">
+            <a:schemeClr val="accent1"/>
+          </a:lnRef>
+          <a:fillRef idx="3">
+            <a:schemeClr val="accent1"/>
+          </a:fillRef>
+          <a:effectRef idx="2">
+            <a:schemeClr val="accent1"/>
+          </a:effectRef>
+          <a:fontRef idx="minor">
+            <a:schemeClr val="lt1"/>
+          </a:fontRef>
+        </p:style>
+        <p:txBody>
+          <a:bodyPr rtlCol="0" anchor="ctr" wrap="square"/>
+          <a:lstStyle/>
+          <a:p>
+            <a:pPr algn="ctr"/>
+            <a:r>
+              <a:rPr sz="1300" b="1" i="0">
+                <a:solidFill>
+                  <a:srgbClr val="FFFFFF"/>
+                </a:solidFill>
+                <a:latin typeface="Calibri"/>
+              </a:rPr>
+              <a:t>Swarm  (ASX)</a:t>
+            </a:r>
+          </a:p>
+        </p:txBody>
+      </p:sp>
+      <p:sp>
+        <p:nvSpPr>
+          <p:cNvPr id="6" name="Rounded Rectangle 5"/>
+          <p:cNvSpPr/>
+          <p:nvPr/>
+        </p:nvSpPr>
+        <p:spPr>
+          <a:xfrm>
+            <a:off x="3931920" y="1828800"/>
+            <a:ext cx="3291840" cy="640080"/>
+          </a:xfrm>
+          <a:prstGeom prst="roundRect">
+            <a:avLst/>
+          </a:prstGeom>
+          <a:solidFill>
+            <a:srgbClr val="C87F0A"/>
+          </a:solidFill>
+          <a:ln>
+            <a:noFill/>
+          </a:ln>
+        </p:spPr>
+        <p:style>
+          <a:lnRef idx="1">
+            <a:schemeClr val="accent1"/>
+          </a:lnRef>
+          <a:fillRef idx="3">
+            <a:schemeClr val="accent1"/>
+          </a:fillRef>
+          <a:effectRef idx="2">
+            <a:schemeClr val="accent1"/>
+          </a:effectRef>
+          <a:fontRef idx="minor">
+            <a:schemeClr val="lt1"/>
+          </a:fontRef>
+        </p:style>
+        <p:txBody>
+          <a:bodyPr rtlCol="0" anchor="ctr" wrap="square"/>
+          <a:lstStyle/>
+          <a:p>
+            <a:pPr algn="ctr"/>
+            <a:r>
+              <a:rPr sz="1200" b="1" i="0">
+                <a:solidFill>
+                  <a:srgbClr val="FFFFFF"/>
+                </a:solidFill>
+                <a:latin typeface="Calibri"/>
+              </a:rPr>
+              <a:t>CollecticeRoboticSystem</a:t>
+            </a:r>
+          </a:p>
+        </p:txBody>
+      </p:sp>
+      <p:sp>
+        <p:nvSpPr>
+          <p:cNvPr id="7" name="Rounded Rectangle 6"/>
+          <p:cNvSpPr/>
+          <p:nvPr/>
+        </p:nvSpPr>
+        <p:spPr>
+          <a:xfrm>
+            <a:off x="7498079" y="1828800"/>
+            <a:ext cx="3108960" cy="640080"/>
+          </a:xfrm>
+          <a:prstGeom prst="roundRect">
+            <a:avLst/>
+          </a:prstGeom>
+          <a:solidFill>
+            <a:srgbClr val="C0392B"/>
+          </a:solidFill>
+          <a:ln>
+            <a:noFill/>
+          </a:ln>
+        </p:spPr>
+        <p:style>
+          <a:lnRef idx="1">
+            <a:schemeClr val="accent1"/>
+          </a:lnRef>
+          <a:fillRef idx="3">
+            <a:schemeClr val="accent1"/>
+          </a:fillRef>
+          <a:effectRef idx="2">
+            <a:schemeClr val="accent1"/>
+          </a:effectRef>
+          <a:fontRef idx="minor">
+            <a:schemeClr val="lt1"/>
+          </a:fontRef>
+        </p:style>
+        <p:txBody>
+          <a:bodyPr rtlCol="0" anchor="ctr" wrap="square"/>
+          <a:lstStyle/>
+          <a:p>
+            <a:pPr algn="ctr"/>
+            <a:r>
+              <a:rPr sz="1300" b="1" i="0">
+                <a:solidFill>
+                  <a:srgbClr val="FFFFFF"/>
+                </a:solidFill>
+                <a:latin typeface="Calibri"/>
+              </a:rPr>
+              <a:t>... PhysicalEntity</a:t>
+            </a:r>
+          </a:p>
+        </p:txBody>
+      </p:sp>
+      <p:cxnSp>
+        <p:nvCxnSpPr>
+          <p:cNvPr id="8" name="Connector 7"/>
+          <p:cNvCxnSpPr/>
+          <p:nvPr/>
+        </p:nvCxnSpPr>
+        <p:spPr>
+          <a:xfrm>
+            <a:off x="3657600" y="2148840"/>
+            <a:ext cx="274320" cy="0"/>
+          </a:xfrm>
+          <a:prstGeom prst="line">
+            <a:avLst/>
+          </a:prstGeom>
+          <a:ln w="19050">
+            <a:solidFill>
+              <a:srgbClr val="C0392B"/>
+            </a:solidFill>
+          </a:ln>
+        </p:spPr>
+        <p:style>
+          <a:lnRef idx="2">
+            <a:schemeClr val="accent1"/>
+          </a:lnRef>
+          <a:fillRef idx="0">
+            <a:schemeClr val="accent1"/>
+          </a:fillRef>
+          <a:effectRef idx="1">
+            <a:schemeClr val="accent1"/>
+          </a:effectRef>
+          <a:fontRef idx="minor">
+            <a:schemeClr val="tx1"/>
+          </a:fontRef>
+        </p:style>
+      </p:cxnSp>
+      <p:cxnSp>
+        <p:nvCxnSpPr>
+          <p:cNvPr id="9" name="Connector 8"/>
+          <p:cNvCxnSpPr/>
+          <p:nvPr/>
+        </p:nvCxnSpPr>
+        <p:spPr>
+          <a:xfrm>
+            <a:off x="7223760" y="2148840"/>
+            <a:ext cx="274319" cy="0"/>
+          </a:xfrm>
+          <a:prstGeom prst="line">
+            <a:avLst/>
+          </a:prstGeom>
+          <a:ln w="19050">
+            <a:solidFill>
+              <a:srgbClr val="C0392B"/>
+            </a:solidFill>
+          </a:ln>
+        </p:spPr>
+        <p:style>
+          <a:lnRef idx="2">
+            <a:schemeClr val="accent1"/>
+          </a:lnRef>
+          <a:fillRef idx="0">
+            <a:schemeClr val="accent1"/>
+          </a:fillRef>
+          <a:effectRef idx="1">
+            <a:schemeClr val="accent1"/>
+          </a:effectRef>
+          <a:fontRef idx="minor">
+            <a:schemeClr val="tx1"/>
+          </a:fontRef>
+        </p:style>
+      </p:cxnSp>
+      <p:sp>
+        <p:nvSpPr>
+          <p:cNvPr id="10" name="TextBox 9"/>
+          <p:cNvSpPr txBox="1"/>
+          <p:nvPr/>
+        </p:nvSpPr>
+        <p:spPr>
+          <a:xfrm>
+            <a:off x="7498079" y="2514600"/>
+            <a:ext cx="3291840" cy="365760"/>
+          </a:xfrm>
+          <a:prstGeom prst="rect">
+            <a:avLst/>
+          </a:prstGeom>
+          <a:noFill/>
+        </p:spPr>
+        <p:txBody>
+          <a:bodyPr wrap="square">
+            <a:spAutoFit/>
+          </a:bodyPr>
+          <a:lstStyle/>
+          <a:p>
+            <a:r>
+              <a:rPr sz="1200" b="0" i="1">
+                <a:solidFill>
+                  <a:srgbClr val="C87F0A"/>
+                </a:solidFill>
+                <a:latin typeface="Calibri"/>
+              </a:rPr>
+              <a:t>not yet taskable (under PhysicalEntity)</a:t>
+            </a:r>
+          </a:p>
+        </p:txBody>
+      </p:sp>
+      <p:sp>
+        <p:nvSpPr>
+          <p:cNvPr id="11" name="Rounded Rectangle 10"/>
+          <p:cNvSpPr/>
+          <p:nvPr/>
+        </p:nvSpPr>
+        <p:spPr>
+          <a:xfrm>
+            <a:off x="822960" y="3657600"/>
+            <a:ext cx="2834640" cy="640080"/>
+          </a:xfrm>
+          <a:prstGeom prst="roundRect">
+            <a:avLst/>
+          </a:prstGeom>
+          <a:solidFill>
+            <a:srgbClr val="2E7D32"/>
+          </a:solidFill>
+          <a:ln>
+            <a:noFill/>
+          </a:ln>
+        </p:spPr>
+        <p:style>
+          <a:lnRef idx="1">
+            <a:schemeClr val="accent1"/>
+          </a:lnRef>
+          <a:fillRef idx="3">
+            <a:schemeClr val="accent1"/>
+          </a:fillRef>
+          <a:effectRef idx="2">
+            <a:schemeClr val="accent1"/>
+          </a:effectRef>
+          <a:fontRef idx="minor">
+            <a:schemeClr val="lt1"/>
+          </a:fontRef>
+        </p:style>
+        <p:txBody>
+          <a:bodyPr rtlCol="0" anchor="ctr" wrap="square"/>
+          <a:lstStyle/>
+          <a:p>
+            <a:pPr algn="ctr"/>
+            <a:r>
+              <a:rPr sz="1300" b="1" i="0">
+                <a:solidFill>
+                  <a:srgbClr val="FFFFFF"/>
+                </a:solidFill>
+                <a:latin typeface="Calibri"/>
+              </a:rPr>
+              <a:t>Swarm  (proposed)</a:t>
+            </a:r>
+          </a:p>
+        </p:txBody>
+      </p:sp>
+      <p:sp>
+        <p:nvSpPr>
+          <p:cNvPr id="12" name="Rounded Rectangle 11"/>
+          <p:cNvSpPr/>
+          <p:nvPr/>
+        </p:nvSpPr>
+        <p:spPr>
+          <a:xfrm>
+            <a:off x="3931920" y="3657600"/>
+            <a:ext cx="3291840" cy="640080"/>
+          </a:xfrm>
+          <a:prstGeom prst="roundRect">
+            <a:avLst/>
+          </a:prstGeom>
+          <a:solidFill>
+            <a:srgbClr val="2E7D32"/>
+          </a:solidFill>
+          <a:ln>
+            <a:noFill/>
+          </a:ln>
+        </p:spPr>
+        <p:style>
+          <a:lnRef idx="1">
+            <a:schemeClr val="accent1"/>
+          </a:lnRef>
+          <a:fillRef idx="3">
+            <a:schemeClr val="accent1"/>
+          </a:fillRef>
+          <a:effectRef idx="2">
+            <a:schemeClr val="accent1"/>
+          </a:effectRef>
+          <a:fontRef idx="minor">
+            <a:schemeClr val="lt1"/>
+          </a:fontRef>
+        </p:style>
+        <p:txBody>
+          <a:bodyPr rtlCol="0" anchor="ctr" wrap="square"/>
+          <a:lstStyle/>
+          <a:p>
+            <a:pPr algn="ctr"/>
+            <a:r>
+              <a:rPr sz="1200" b="1" i="0">
+                <a:solidFill>
+                  <a:srgbClr val="FFFFFF"/>
+                </a:solidFill>
+                <a:latin typeface="Calibri"/>
+              </a:rPr>
+              <a:t>CollectiveEntity  (C2SIM)</a:t>
+            </a:r>
+          </a:p>
+        </p:txBody>
+      </p:sp>
+      <p:sp>
+        <p:nvSpPr>
+          <p:cNvPr id="13" name="Rounded Rectangle 12"/>
+          <p:cNvSpPr/>
+          <p:nvPr/>
+        </p:nvSpPr>
+        <p:spPr>
+          <a:xfrm>
+            <a:off x="7498079" y="3657600"/>
+            <a:ext cx="3108960" cy="640080"/>
+          </a:xfrm>
+          <a:prstGeom prst="roundRect">
+            <a:avLst/>
+          </a:prstGeom>
+          <a:solidFill>
+            <a:srgbClr val="2E7D32"/>
+          </a:solidFill>
+          <a:ln>
+            <a:noFill/>
+          </a:ln>
+        </p:spPr>
+        <p:style>
+          <a:lnRef idx="1">
+            <a:schemeClr val="accent1"/>
+          </a:lnRef>
+          <a:fillRef idx="3">
+            <a:schemeClr val="accent1"/>
+          </a:fillRef>
+          <a:effectRef idx="2">
+            <a:schemeClr val="accent1"/>
+          </a:effectRef>
+          <a:fontRef idx="minor">
+            <a:schemeClr val="lt1"/>
+          </a:fontRef>
+        </p:style>
+        <p:txBody>
+          <a:bodyPr rtlCol="0" anchor="ctr" wrap="square"/>
+          <a:lstStyle/>
+          <a:p>
+            <a:pPr algn="ctr"/>
+            <a:r>
+              <a:rPr sz="1300" b="1" i="0">
+                <a:solidFill>
+                  <a:srgbClr val="FFFFFF"/>
+                </a:solidFill>
+                <a:latin typeface="Calibri"/>
+              </a:rPr>
+              <a:t>ActorEntity</a:t>
+            </a:r>
+          </a:p>
+        </p:txBody>
+      </p:sp>
+      <p:cxnSp>
+        <p:nvCxnSpPr>
+          <p:cNvPr id="14" name="Connector 13"/>
+          <p:cNvCxnSpPr/>
+          <p:nvPr/>
+        </p:nvCxnSpPr>
+        <p:spPr>
+          <a:xfrm>
+            <a:off x="3657600" y="3977639"/>
+            <a:ext cx="274320" cy="0"/>
+          </a:xfrm>
+          <a:prstGeom prst="line">
+            <a:avLst/>
+          </a:prstGeom>
+          <a:ln w="19050">
+            <a:solidFill>
+              <a:srgbClr val="2E7D32"/>
+            </a:solidFill>
+          </a:ln>
+        </p:spPr>
+        <p:style>
+          <a:lnRef idx="2">
+            <a:schemeClr val="accent1"/>
+          </a:lnRef>
+          <a:fillRef idx="0">
+            <a:schemeClr val="accent1"/>
+          </a:fillRef>
+          <a:effectRef idx="1">
+            <a:schemeClr val="accent1"/>
+          </a:effectRef>
+          <a:fontRef idx="minor">
+            <a:schemeClr val="tx1"/>
+          </a:fontRef>
+        </p:style>
+      </p:cxnSp>
+      <p:cxnSp>
+        <p:nvCxnSpPr>
+          <p:cNvPr id="15" name="Connector 14"/>
+          <p:cNvCxnSpPr/>
+          <p:nvPr/>
+        </p:nvCxnSpPr>
+        <p:spPr>
+          <a:xfrm>
+            <a:off x="7223760" y="3977639"/>
+            <a:ext cx="274319" cy="0"/>
+          </a:xfrm>
+          <a:prstGeom prst="line">
+            <a:avLst/>
+          </a:prstGeom>
+          <a:ln w="19050">
+            <a:solidFill>
+              <a:srgbClr val="2E7D32"/>
+            </a:solidFill>
+          </a:ln>
+        </p:spPr>
+        <p:style>
+          <a:lnRef idx="2">
+            <a:schemeClr val="accent1"/>
+          </a:lnRef>
+          <a:fillRef idx="0">
+            <a:schemeClr val="accent1"/>
+          </a:fillRef>
+          <a:effectRef idx="1">
+            <a:schemeClr val="accent1"/>
+          </a:effectRef>
+          <a:fontRef idx="minor">
+            <a:schemeClr val="tx1"/>
+          </a:fontRef>
+        </p:style>
+      </p:cxnSp>
+      <p:sp>
+        <p:nvSpPr>
+          <p:cNvPr id="16" name="TextBox 15"/>
+          <p:cNvSpPr txBox="1"/>
+          <p:nvPr/>
+        </p:nvSpPr>
+        <p:spPr>
+          <a:xfrm>
+            <a:off x="7498079" y="4343400"/>
+            <a:ext cx="3291840" cy="365760"/>
+          </a:xfrm>
+          <a:prstGeom prst="rect">
+            <a:avLst/>
+          </a:prstGeom>
+          <a:noFill/>
+        </p:spPr>
+        <p:txBody>
+          <a:bodyPr wrap="square">
+            <a:spAutoFit/>
+          </a:bodyPr>
+          <a:lstStyle/>
+          <a:p>
+            <a:r>
+              <a:rPr sz="1200" b="0" i="1">
+                <a:solidFill>
+                  <a:srgbClr val="2E7D32"/>
+                </a:solidFill>
+                <a:latin typeface="Calibri"/>
+              </a:rPr>
+              <a:t>taskable - receives orders, reports</a:t>
+            </a:r>
+          </a:p>
+        </p:txBody>
+      </p:sp>
+      <p:sp>
+        <p:nvSpPr>
+          <p:cNvPr id="17" name="TextBox 16"/>
+          <p:cNvSpPr txBox="1"/>
+          <p:nvPr/>
+        </p:nvSpPr>
+        <p:spPr>
+          <a:xfrm>
+            <a:off x="640080" y="4846320"/>
+            <a:ext cx="10972800" cy="1508760"/>
           </a:xfrm>
           <a:prstGeom prst="rect">
             <a:avLst/>
@@ -10272,26 +11113,36 @@
                 <a:spcPts val="200"/>
               </a:spcBef>
               <a:spcAft>
-                <a:spcPts val="1400"/>
+                <a:spcPts val="500"/>
               </a:spcAft>
             </a:pPr>
             <a:r>
-              <a:rPr sz="1550" b="1" i="0">
-                <a:solidFill>
-                  <a:srgbClr val="C87F0A"/>
-                </a:solidFill>
-                <a:latin typeface="Calibri"/>
-              </a:rPr>
-              <a:t>Autonomy - 3 vocabularies:  </a:t>
-            </a:r>
-            <a:r>
-              <a:rPr sz="1550" b="0" i="0">
+              <a:rPr sz="1300" b="0" i="0">
                 <a:solidFill>
                   <a:srgbClr val="333333"/>
                 </a:solidFill>
                 <a:latin typeface="Calibri"/>
               </a:rPr>
-              <a:t>OWL {Automated, FullAuto, ReCont, Teleop}  vs  ControlMode {Piloted, Unpiloted-Autonomous, Swarm}  vs  NavigationAutonomy {FPV, Autonomous, RemoteControl}.</a:t>
+              <a:t>A swarm is what orders are addressed to and what sends reports - so it needs to be an ActorEntity.</a:t>
+            </a:r>
+          </a:p>
+          <a:p>
+            <a:pPr lvl="1">
+              <a:spcBef>
+                <a:spcPts val="200"/>
+              </a:spcBef>
+              <a:spcAft>
+                <a:spcPts val="500"/>
+              </a:spcAft>
+            </a:pPr>
+            <a:r>
+              <a:rPr sz="1300" b="0" i="0">
+                <a:solidFill>
+                  <a:srgbClr val="333333"/>
+                </a:solidFill>
+                <a:latin typeface="Calibri"/>
+              </a:rPr>
+              <a:t>      -  Membership and command already exist in the base standard (C2SIM hasSubordinate, SMX hasCommandRelation), so the residual swarm work is small. (v0.0.3 dropped the Swarm class; CollecticeRoboticSystem is still under PhysicalEntity.)</a:t>
             </a:r>
           </a:p>
           <a:p>
@@ -10300,89 +11151,33 @@
                 <a:spcPts val="200"/>
               </a:spcBef>
               <a:spcAft>
-                <a:spcPts val="1400"/>
+                <a:spcPts val="500"/>
               </a:spcAft>
             </a:pPr>
             <a:r>
-              <a:rPr sz="1550" b="1" i="0">
-                <a:solidFill>
-                  <a:srgbClr val="C87F0A"/>
-                </a:solidFill>
-                <a:latin typeface="Calibri"/>
-              </a:rPr>
-              <a:t>Sensor - 3 models:  </a:t>
-            </a:r>
-            <a:r>
-              <a:rPr sz="1550" b="0" i="0">
+              <a:rPr sz="1300" b="1" i="0">
+                <a:solidFill>
+                  <a:srgbClr val="2E869A"/>
+                </a:solidFill>
+                <a:latin typeface="Calibri"/>
+              </a:rPr>
+              <a:t>Decision (Q-B):  </a:t>
+            </a:r>
+            <a:r>
+              <a:rPr sz="1300" b="0" i="0">
                 <a:solidFill>
                   <a:srgbClr val="333333"/>
                 </a:solidFill>
                 <a:latin typeface="Calibri"/>
               </a:rPr>
-              <a:t>OWL Sensor class  vs  SensorType enum  vs  SensorCapability as associated equipment.</a:t>
-            </a:r>
-          </a:p>
-          <a:p>
-            <a:pPr>
-              <a:spcBef>
-                <a:spcPts val="200"/>
-              </a:spcBef>
-              <a:spcAft>
-                <a:spcPts val="1400"/>
-              </a:spcAft>
-            </a:pPr>
-            <a:r>
-              <a:rPr sz="1550" b="1" i="0">
-                <a:solidFill>
-                  <a:srgbClr val="C87F0A"/>
-                </a:solidFill>
-                <a:latin typeface="Calibri"/>
-              </a:rPr>
-              <a:t>Missing from OWL:  </a:t>
-            </a:r>
-            <a:r>
-              <a:rPr sz="1550" b="0" i="0">
-                <a:solidFill>
-                  <a:srgbClr val="333333"/>
-                </a:solidFill>
-                <a:latin typeface="Calibri"/>
-              </a:rPr>
-              <a:t>Payload, PayloadCapability, Mobility/Propulsion, VehicleType, PassengerCapability, SwarmParameters. The OWL has 0 datatype properties.</a:t>
-            </a:r>
-          </a:p>
-          <a:p>
-            <a:pPr>
-              <a:spcBef>
-                <a:spcPts val="200"/>
-              </a:spcBef>
-              <a:spcAft>
-                <a:spcPts val="1400"/>
-              </a:spcAft>
-            </a:pPr>
-            <a:r>
-              <a:rPr sz="1550" b="1" i="0">
-                <a:solidFill>
-                  <a:srgbClr val="2E869A"/>
-                </a:solidFill>
-                <a:latin typeface="Calibri"/>
-              </a:rPr>
-              <a:t>Decisions (Q-C, Q-D):  </a:t>
-            </a:r>
-            <a:r>
-              <a:rPr sz="1550" b="0" i="0">
-                <a:solidFill>
-                  <a:srgbClr val="333333"/>
-                </a:solidFill>
-                <a:latin typeface="Calibri"/>
-              </a:rPr>
-              <a:t>pick one normative sensor model and one normative autonomy vocabulary; express the rest as derived.</a:t>
-            </a:r>
-          </a:p>
-        </p:txBody>
-      </p:sp>
-      <p:sp>
-        <p:nvSpPr>
-          <p:cNvPr id="5" name="TextBox 4"/>
+              <a:t>derive the collective/Swarm from CollectiveEntity (already an ActorEntity) rather than the device/artifact tree.</a:t>
+            </a:r>
+          </a:p>
+        </p:txBody>
+      </p:sp>
+      <p:sp>
+        <p:nvSpPr>
+          <p:cNvPr id="18" name="TextBox 17"/>
           <p:cNvSpPr txBox="1"/>
           <p:nvPr/>
         </p:nvSpPr>
@@ -10416,7 +11211,7 @@
       </p:sp>
       <p:sp>
         <p:nvSpPr>
-          <p:cNvPr id="6" name="TextBox 5"/>
+          <p:cNvPr id="19" name="TextBox 18"/>
           <p:cNvSpPr txBox="1"/>
           <p:nvPr/>
         </p:nvSpPr>
@@ -10539,7 +11334,7 @@
                 </a:solidFill>
                 <a:latin typeface="Calibri"/>
               </a:rPr>
-              <a:t>Defects in the existing instantiations</a:t>
+              <a:t>The OWL is still catching up to the spreadsheets</a:t>
             </a:r>
           </a:p>
         </p:txBody>
@@ -10547,6 +11342,40 @@
       <p:sp>
         <p:nvSpPr>
           <p:cNvPr id="4" name="TextBox 3"/>
+          <p:cNvSpPr txBox="1"/>
+          <p:nvPr/>
+        </p:nvSpPr>
+        <p:spPr>
+          <a:xfrm>
+            <a:off x="548640" y="914400"/>
+            <a:ext cx="10972800" cy="320040"/>
+          </a:xfrm>
+          <a:prstGeom prst="rect">
+            <a:avLst/>
+          </a:prstGeom>
+          <a:noFill/>
+        </p:spPr>
+        <p:txBody>
+          <a:bodyPr wrap="square">
+            <a:spAutoFit/>
+          </a:bodyPr>
+          <a:lstStyle/>
+          <a:p>
+            <a:r>
+              <a:rPr sz="1300" b="0" i="1">
+                <a:solidFill>
+                  <a:srgbClr val="2E869A"/>
+                </a:solidFill>
+                <a:latin typeface="Calibri"/>
+              </a:rPr>
+              <a:t>v0.0.x - expected at this stage</a:t>
+            </a:r>
+          </a:p>
+        </p:txBody>
+      </p:sp>
+      <p:sp>
+        <p:nvSpPr>
+          <p:cNvPr id="5" name="TextBox 4"/>
           <p:cNvSpPr txBox="1"/>
           <p:nvPr/>
         </p:nvSpPr>
@@ -10575,22 +11404,22 @@
               </a:spcAft>
             </a:pPr>
             <a:r>
-              <a:rPr sz="1550" b="1" i="0">
+              <a:rPr sz="1500" b="1" i="0">
                 <a:solidFill>
                   <a:srgbClr val="C87F0A"/>
                 </a:solidFill>
                 <a:latin typeface="Calibri"/>
               </a:rPr>
-              <a:t>M1 (HIGH):  </a:t>
-            </a:r>
-            <a:r>
-              <a:rPr sz="1550" b="0" i="0">
+              <a:t>Autonomy - 3 vocabularies to reconcile:  </a:t>
+            </a:r>
+            <a:r>
+              <a:rPr sz="1500" b="0" i="0">
                 <a:solidFill>
                   <a:srgbClr val="333333"/>
                 </a:solidFill>
                 <a:latin typeface="Calibri"/>
               </a:rPr>
-              <a:t>actorReference is a string, but it must define an entity not yet in the database - no inline entity-definition mechanism exists for observed (uncooperative) entities.</a:t>
+              <a:t>OWL {Automated, FullAuto, ReCont, Teleop}  vs  ControlMode {Piloted, Unpiloted-Autonomous, Swarm}  vs  NavigationAutonomy {FPV, Autonomous, RemoteControl}.</a:t>
             </a:r>
           </a:p>
           <a:p>
@@ -10603,22 +11432,22 @@
               </a:spcAft>
             </a:pPr>
             <a:r>
-              <a:rPr sz="1550" b="1" i="0">
+              <a:rPr sz="1500" b="1" i="0">
                 <a:solidFill>
                   <a:srgbClr val="C87F0A"/>
                 </a:solidFill>
                 <a:latin typeface="Calibri"/>
               </a:rPr>
-              <a:t>M5 (MED):  </a:t>
-            </a:r>
-            <a:r>
-              <a:rPr sz="1550" b="0" i="0">
+              <a:t>Sensor - 3 models to reconcile:  </a:t>
+            </a:r>
+            <a:r>
+              <a:rPr sz="1500" b="0" i="0">
                 <a:solidFill>
                   <a:srgbClr val="333333"/>
                 </a:solidFill>
                 <a:latin typeface="Calibri"/>
               </a:rPr>
-              <a:t>MediaTypeEnum conflates media format (Video/Audio/Image/Document) with sensor modality (a note asks it to also cover 'thermal scan').</a:t>
+              <a:t>OWL Sensor class  vs  SensorType enum  vs  SensorCapability as associated equipment.</a:t>
             </a:r>
           </a:p>
           <a:p>
@@ -10631,22 +11460,22 @@
               </a:spcAft>
             </a:pPr>
             <a:r>
-              <a:rPr sz="1550" b="1" i="0">
+              <a:rPr sz="1500" b="1" i="0">
                 <a:solidFill>
                   <a:srgbClr val="C87F0A"/>
                 </a:solidFill>
                 <a:latin typeface="Calibri"/>
               </a:rPr>
-              <a:t>M7 (HIGH):  </a:t>
-            </a:r>
-            <a:r>
-              <a:rPr sz="1550" b="0" i="0">
+              <a:t>Not yet in the OWL:  </a:t>
+            </a:r>
+            <a:r>
+              <a:rPr sz="1500" b="0" i="0">
                 <a:solidFill>
                   <a:srgbClr val="333333"/>
                 </a:solidFill>
                 <a:latin typeface="Calibri"/>
               </a:rPr>
-              <a:t>hasStartTime is typed UUIDBase while hasEndTime is TimeInstant - almost certainly a copy/paste error.</a:t>
+              <a:t>Payload, PayloadCapability, Mobility/Propulsion, VehicleType, PassengerCapability, SwarmParameters. (v0.0.1 had 0 datatype properties; v0.0.3 begins the layer, for the Video Detection Report only.)</a:t>
             </a:r>
           </a:p>
           <a:p>
@@ -10659,29 +11488,29 @@
               </a:spcAft>
             </a:pPr>
             <a:r>
-              <a:rPr sz="1550" b="1" i="0">
-                <a:solidFill>
-                  <a:srgbClr val="C0392B"/>
-                </a:solidFill>
-                <a:latin typeface="Calibri"/>
-              </a:rPr>
-              <a:t>Typos:  </a:t>
-            </a:r>
-            <a:r>
-              <a:rPr sz="1550" b="0" i="0">
+              <a:rPr sz="1500" b="1" i="0">
+                <a:solidFill>
+                  <a:srgbClr val="2E869A"/>
+                </a:solidFill>
+                <a:latin typeface="Calibri"/>
+              </a:rPr>
+              <a:t>Decisions (Q-C, Q-D):  </a:t>
+            </a:r>
+            <a:r>
+              <a:rPr sz="1500" b="0" i="0">
                 <a:solidFill>
                   <a:srgbClr val="333333"/>
                 </a:solidFill>
                 <a:latin typeface="Calibri"/>
               </a:rPr>
-              <a:t>class 'CollecticeRoboticSystem' (should be Collective) and versionInfo 'Extrension' - cheap to fix now, painful after messages exist.</a:t>
-            </a:r>
-          </a:p>
-        </p:txBody>
-      </p:sp>
-      <p:sp>
-        <p:nvSpPr>
-          <p:cNvPr id="5" name="TextBox 4"/>
+              <a:t>pick one normative sensor model and one normative autonomy vocabulary; express the rest as derived.</a:t>
+            </a:r>
+          </a:p>
+        </p:txBody>
+      </p:sp>
+      <p:sp>
+        <p:nvSpPr>
+          <p:cNvPr id="6" name="TextBox 5"/>
           <p:cNvSpPr txBox="1"/>
           <p:nvPr/>
         </p:nvSpPr>
@@ -10715,7 +11544,7 @@
       </p:sp>
       <p:sp>
         <p:nvSpPr>
-          <p:cNvPr id="6" name="TextBox 5"/>
+          <p:cNvPr id="7" name="TextBox 6"/>
           <p:cNvSpPr txBox="1"/>
           <p:nvPr/>
         </p:nvSpPr>

--- a/Subgroups/ASX/InstantiationReview/ASX-Instantiation-Findings.pptx
+++ b/Subgroups/ASX/InstantiationReview/ASX-Instantiation-Findings.pptx
@@ -27,6 +27,7 @@
     <p:sldId id="275" r:id="rId26"/>
     <p:sldId id="276" r:id="rId27"/>
     <p:sldId id="277" r:id="rId28"/>
+    <p:sldId id="278" r:id="rId29"/>
   </p:sldIdLst>
   <p:sldSz cx="12191695" cy="6858000" type="screen4x3"/>
   <p:notesSz cx="6858000" cy="9144000"/>
@@ -6237,6 +6238,40 @@
         </p:nvSpPr>
         <p:spPr>
           <a:xfrm>
+            <a:off x="548640" y="914400"/>
+            <a:ext cx="10972800" cy="320040"/>
+          </a:xfrm>
+          <a:prstGeom prst="rect">
+            <a:avLst/>
+          </a:prstGeom>
+          <a:noFill/>
+        </p:spPr>
+        <p:txBody>
+          <a:bodyPr wrap="square">
+            <a:spAutoFit/>
+          </a:bodyPr>
+          <a:lstStyle/>
+          <a:p>
+            <a:r>
+              <a:rPr sz="1300" b="0" i="1">
+                <a:solidFill>
+                  <a:srgbClr val="2E869A"/>
+                </a:solidFill>
+                <a:latin typeface="Calibri"/>
+              </a:rPr>
+              <a:t>Full register - all 22, with what each resolves: log section 7</a:t>
+            </a:r>
+          </a:p>
+        </p:txBody>
+      </p:sp>
+      <p:sp>
+        <p:nvSpPr>
+          <p:cNvPr id="5" name="TextBox 4"/>
+          <p:cNvSpPr txBox="1"/>
+          <p:nvPr/>
+        </p:nvSpPr>
+        <p:spPr>
+          <a:xfrm>
             <a:off x="640080" y="1737360"/>
             <a:ext cx="10972800" cy="4617720"/>
           </a:xfrm>
@@ -6366,7 +6401,7 @@
       </p:sp>
       <p:sp>
         <p:nvSpPr>
-          <p:cNvPr id="5" name="TextBox 4"/>
+          <p:cNvPr id="6" name="TextBox 5"/>
           <p:cNvSpPr txBox="1"/>
           <p:nvPr/>
         </p:nvSpPr>
@@ -6400,7 +6435,7 @@
       </p:sp>
       <p:sp>
         <p:nvSpPr>
-          <p:cNvPr id="6" name="TextBox 5"/>
+          <p:cNvPr id="7" name="TextBox 6"/>
           <p:cNvSpPr txBox="1"/>
           <p:nvPr/>
         </p:nvSpPr>
@@ -6536,6 +6571,40 @@
         </p:nvSpPr>
         <p:spPr>
           <a:xfrm>
+            <a:off x="548640" y="914400"/>
+            <a:ext cx="10972800" cy="320040"/>
+          </a:xfrm>
+          <a:prstGeom prst="rect">
+            <a:avLst/>
+          </a:prstGeom>
+          <a:noFill/>
+        </p:spPr>
+        <p:txBody>
+          <a:bodyPr wrap="square">
+            <a:spAutoFit/>
+          </a:bodyPr>
+          <a:lstStyle/>
+          <a:p>
+            <a:r>
+              <a:rPr sz="1300" b="0" i="1">
+                <a:solidFill>
+                  <a:srgbClr val="2E869A"/>
+                </a:solidFill>
+                <a:latin typeface="Calibri"/>
+              </a:rPr>
+              <a:t>continued - full text + grounding in log section 7</a:t>
+            </a:r>
+          </a:p>
+        </p:txBody>
+      </p:sp>
+      <p:sp>
+        <p:nvSpPr>
+          <p:cNvPr id="5" name="TextBox 4"/>
+          <p:cNvSpPr txBox="1"/>
+          <p:nvPr/>
+        </p:nvSpPr>
+        <p:spPr>
+          <a:xfrm>
             <a:off x="640080" y="1463040"/>
             <a:ext cx="10972800" cy="4754880"/>
           </a:xfrm>
@@ -6805,7 +6874,7 @@
       </p:sp>
       <p:sp>
         <p:nvSpPr>
-          <p:cNvPr id="5" name="TextBox 4"/>
+          <p:cNvPr id="6" name="TextBox 5"/>
           <p:cNvSpPr txBox="1"/>
           <p:nvPr/>
         </p:nvSpPr>
@@ -6839,7 +6908,7 @@
       </p:sp>
       <p:sp>
         <p:nvSpPr>
-          <p:cNvPr id="6" name="TextBox 5"/>
+          <p:cNvPr id="7" name="TextBox 6"/>
           <p:cNvSpPr txBox="1"/>
           <p:nvPr/>
         </p:nvSpPr>
@@ -7272,6 +7341,40 @@
         </p:nvSpPr>
         <p:spPr>
           <a:xfrm>
+            <a:off x="548640" y="914400"/>
+            <a:ext cx="10972800" cy="320040"/>
+          </a:xfrm>
+          <a:prstGeom prst="rect">
+            <a:avLst/>
+          </a:prstGeom>
+          <a:noFill/>
+        </p:spPr>
+        <p:txBody>
+          <a:bodyPr wrap="square">
+            <a:spAutoFit/>
+          </a:bodyPr>
+          <a:lstStyle/>
+          <a:p>
+            <a:r>
+              <a:rPr sz="1300" b="0" i="1">
+                <a:solidFill>
+                  <a:srgbClr val="2E869A"/>
+                </a:solidFill>
+                <a:latin typeface="Calibri"/>
+              </a:rPr>
+              <a:t>continued - full text + grounding in log section 7</a:t>
+            </a:r>
+          </a:p>
+        </p:txBody>
+      </p:sp>
+      <p:sp>
+        <p:nvSpPr>
+          <p:cNvPr id="5" name="TextBox 4"/>
+          <p:cNvSpPr txBox="1"/>
+          <p:nvPr/>
+        </p:nvSpPr>
+        <p:spPr>
+          <a:xfrm>
             <a:off x="640080" y="1417320"/>
             <a:ext cx="10972800" cy="4754880"/>
           </a:xfrm>
@@ -7541,7 +7644,7 @@
       </p:sp>
       <p:sp>
         <p:nvSpPr>
-          <p:cNvPr id="5" name="TextBox 4"/>
+          <p:cNvPr id="6" name="TextBox 5"/>
           <p:cNvSpPr txBox="1"/>
           <p:nvPr/>
         </p:nvSpPr>
@@ -7575,7 +7678,7 @@
       </p:sp>
       <p:sp>
         <p:nvSpPr>
-          <p:cNvPr id="6" name="TextBox 5"/>
+          <p:cNvPr id="7" name="TextBox 6"/>
           <p:cNvSpPr txBox="1"/>
           <p:nvPr/>
         </p:nvSpPr>
@@ -8210,6 +8313,479 @@
                 <a:latin typeface="Calibri"/>
               </a:rPr>
               <a:t>22</a:t>
+            </a:r>
+          </a:p>
+        </p:txBody>
+      </p:sp>
+    </p:spTree>
+  </p:cSld>
+  <p:clrMapOvr>
+    <a:masterClrMapping/>
+  </p:clrMapOvr>
+</p:sld>
+</file>
+
+<file path=ppt/slides/slide23.xml><?xml version="1.0" encoding="utf-8"?>
+<p:sld xmlns:a="http://schemas.openxmlformats.org/drawingml/2006/main" xmlns:p="http://schemas.openxmlformats.org/presentationml/2006/main" xmlns:r="http://schemas.openxmlformats.org/officeDocument/2006/relationships">
+  <p:cSld>
+    <p:spTree>
+      <p:nvGrpSpPr>
+        <p:cNvPr id="1" name=""/>
+        <p:cNvGrpSpPr/>
+        <p:nvPr/>
+      </p:nvGrpSpPr>
+      <p:grpSpPr/>
+      <p:sp>
+        <p:nvSpPr>
+          <p:cNvPr id="2" name="Rectangle 1"/>
+          <p:cNvSpPr/>
+          <p:nvPr/>
+        </p:nvSpPr>
+        <p:spPr>
+          <a:xfrm>
+            <a:off x="548640" y="1170432"/>
+            <a:ext cx="2011680" cy="38100"/>
+          </a:xfrm>
+          <a:prstGeom prst="rect">
+            <a:avLst/>
+          </a:prstGeom>
+          <a:solidFill>
+            <a:srgbClr val="2E869A"/>
+          </a:solidFill>
+          <a:ln>
+            <a:noFill/>
+          </a:ln>
+        </p:spPr>
+        <p:style>
+          <a:lnRef idx="1">
+            <a:schemeClr val="accent1"/>
+          </a:lnRef>
+          <a:fillRef idx="3">
+            <a:schemeClr val="accent1"/>
+          </a:fillRef>
+          <a:effectRef idx="2">
+            <a:schemeClr val="accent1"/>
+          </a:effectRef>
+          <a:fontRef idx="minor">
+            <a:schemeClr val="lt1"/>
+          </a:fontRef>
+        </p:style>
+        <p:txBody>
+          <a:bodyPr rtlCol="0" anchor="ctr"/>
+          <a:lstStyle/>
+          <a:p>
+            <a:pPr algn="ctr"/>
+          </a:p>
+        </p:txBody>
+      </p:sp>
+      <p:sp>
+        <p:nvSpPr>
+          <p:cNvPr id="3" name="TextBox 2"/>
+          <p:cNvSpPr txBox="1"/>
+          <p:nvPr/>
+        </p:nvSpPr>
+        <p:spPr>
+          <a:xfrm>
+            <a:off x="502920" y="411480"/>
+            <a:ext cx="11155680" cy="822960"/>
+          </a:xfrm>
+          <a:prstGeom prst="rect">
+            <a:avLst/>
+          </a:prstGeom>
+          <a:noFill/>
+        </p:spPr>
+        <p:txBody>
+          <a:bodyPr wrap="square">
+            <a:spAutoFit/>
+          </a:bodyPr>
+          <a:lstStyle/>
+          <a:p>
+            <a:r>
+              <a:rPr sz="3000" b="1" i="0">
+                <a:solidFill>
+                  <a:srgbClr val="1F3A5F"/>
+                </a:solidFill>
+                <a:latin typeface="Calibri"/>
+              </a:rPr>
+              <a:t>Where to dig deeper</a:t>
+            </a:r>
+          </a:p>
+        </p:txBody>
+      </p:sp>
+      <p:sp>
+        <p:nvSpPr>
+          <p:cNvPr id="4" name="TextBox 3"/>
+          <p:cNvSpPr txBox="1"/>
+          <p:nvPr/>
+        </p:nvSpPr>
+        <p:spPr>
+          <a:xfrm>
+            <a:off x="548640" y="914400"/>
+            <a:ext cx="10972800" cy="320040"/>
+          </a:xfrm>
+          <a:prstGeom prst="rect">
+            <a:avLst/>
+          </a:prstGeom>
+          <a:noFill/>
+        </p:spPr>
+        <p:txBody>
+          <a:bodyPr wrap="square">
+            <a:spAutoFit/>
+          </a:bodyPr>
+          <a:lstStyle/>
+          <a:p>
+            <a:r>
+              <a:rPr sz="1300" b="0" i="1">
+                <a:solidFill>
+                  <a:srgbClr val="2E869A"/>
+                </a:solidFill>
+                <a:latin typeface="Calibri"/>
+              </a:rPr>
+              <a:t>Branch asx-diffable-spreadsheets: docs in ASX/InstantiationReview, workbooks in ASX/Proposed Extension Working Materials</a:t>
+            </a:r>
+          </a:p>
+        </p:txBody>
+      </p:sp>
+      <p:sp>
+        <p:nvSpPr>
+          <p:cNvPr id="5" name="TextBox 4"/>
+          <p:cNvSpPr txBox="1"/>
+          <p:nvPr/>
+        </p:nvSpPr>
+        <p:spPr>
+          <a:xfrm>
+            <a:off x="640080" y="1508760"/>
+            <a:ext cx="10972800" cy="4754880"/>
+          </a:xfrm>
+          <a:prstGeom prst="rect">
+            <a:avLst/>
+          </a:prstGeom>
+          <a:noFill/>
+        </p:spPr>
+        <p:txBody>
+          <a:bodyPr wrap="square">
+            <a:spAutoFit/>
+          </a:bodyPr>
+          <a:lstStyle/>
+          <a:p>
+            <a:pPr>
+              <a:spcBef>
+                <a:spcPts val="200"/>
+              </a:spcBef>
+              <a:spcAft>
+                <a:spcPts val="600"/>
+              </a:spcAft>
+            </a:pPr>
+            <a:r>
+              <a:rPr sz="1250" b="1" i="0">
+                <a:solidFill>
+                  <a:srgbClr val="1F3A5F"/>
+                </a:solidFill>
+                <a:latin typeface="Calibri"/>
+              </a:rPr>
+              <a:t>Master evidence log:  </a:t>
+            </a:r>
+            <a:r>
+              <a:rPr sz="1250" b="0" i="0">
+                <a:solidFill>
+                  <a:srgbClr val="333333"/>
+                </a:solidFill>
+                <a:latin typeface="Calibri"/>
+              </a:rPr>
+              <a:t>Issues-And-Comments-Log.md - every finding, the 22 decisions (sec 7), v0.0.3 reconciliation (sec 9), why gaps remain (sec 8).</a:t>
+            </a:r>
+          </a:p>
+          <a:p>
+            <a:pPr>
+              <a:spcBef>
+                <a:spcPts val="200"/>
+              </a:spcBef>
+              <a:spcAft>
+                <a:spcPts val="600"/>
+              </a:spcAft>
+            </a:pPr>
+            <a:r>
+              <a:rPr sz="1250" b="1" i="0">
+                <a:solidFill>
+                  <a:srgbClr val="1F3A5F"/>
+                </a:solidFill>
+                <a:latin typeface="Calibri"/>
+              </a:rPr>
+              <a:t>Briefing / Q&amp;A / talk track:  </a:t>
+            </a:r>
+            <a:r>
+              <a:rPr sz="1250" b="0" i="0">
+                <a:solidFill>
+                  <a:srgbClr val="333333"/>
+                </a:solidFill>
+                <a:latin typeface="Calibri"/>
+              </a:rPr>
+              <a:t>Group-Briefing.md (one page); Anticipated-QA.md; Presenter-Notes.md.</a:t>
+            </a:r>
+          </a:p>
+          <a:p>
+            <a:pPr>
+              <a:spcBef>
+                <a:spcPts val="200"/>
+              </a:spcBef>
+              <a:spcAft>
+                <a:spcPts val="600"/>
+              </a:spcAft>
+            </a:pPr>
+            <a:r>
+              <a:rPr sz="1250" b="1" i="0">
+                <a:solidFill>
+                  <a:srgbClr val="1F3A5F"/>
+                </a:solidFill>
+                <a:latin typeface="Calibri"/>
+              </a:rPr>
+              <a:t>Coverage + the actual messages:  </a:t>
+            </a:r>
+            <a:r>
+              <a:rPr sz="1250" b="0" i="0">
+                <a:solidFill>
+                  <a:srgbClr val="333333"/>
+                </a:solidFill>
+                <a:latin typeface="Calibri"/>
+              </a:rPr>
+              <a:t>Message-Instantiation-Coverage.md; the three 'ASX Sample *.xml' workbooks (the ~33 instantiations, diff-able).</a:t>
+            </a:r>
+          </a:p>
+          <a:p>
+            <a:pPr>
+              <a:spcBef>
+                <a:spcPts val="200"/>
+              </a:spcBef>
+              <a:spcAft>
+                <a:spcPts val="600"/>
+              </a:spcAft>
+            </a:pPr>
+            <a:r>
+              <a:rPr sz="1250" b="1" i="0">
+                <a:solidFill>
+                  <a:srgbClr val="1F3A5F"/>
+                </a:solidFill>
+                <a:latin typeface="Calibri"/>
+              </a:rPr>
+              <a:t>Initialization &amp; entity typing (P1/P2/P7):  </a:t>
+            </a:r>
+            <a:r>
+              <a:rPr sz="1250" b="0" i="0">
+                <a:solidFill>
+                  <a:srgbClr val="333333"/>
+                </a:solidFill>
+                <a:latin typeface="Calibri"/>
+              </a:rPr>
+              <a:t>Initialization-Walk.md; log sec 5.</a:t>
+            </a:r>
+          </a:p>
+          <a:p>
+            <a:pPr>
+              <a:spcBef>
+                <a:spcPts val="200"/>
+              </a:spcBef>
+              <a:spcAft>
+                <a:spcPts val="600"/>
+              </a:spcAft>
+            </a:pPr>
+            <a:r>
+              <a:rPr sz="1250" b="1" i="0">
+                <a:solidFill>
+                  <a:srgbClr val="1F3A5F"/>
+                </a:solidFill>
+                <a:latin typeface="Calibri"/>
+              </a:rPr>
+              <a:t>CASEVAC (X1/X2 -&gt; Q-G/Q-H):  </a:t>
+            </a:r>
+            <a:r>
+              <a:rPr sz="1250" b="0" i="0">
+                <a:solidFill>
+                  <a:srgbClr val="333333"/>
+                </a:solidFill>
+                <a:latin typeface="Calibri"/>
+              </a:rPr>
+              <a:t>CASEVAC-Walk.md; log sec 6b.</a:t>
+            </a:r>
+          </a:p>
+          <a:p>
+            <a:pPr>
+              <a:spcBef>
+                <a:spcPts val="200"/>
+              </a:spcBef>
+              <a:spcAft>
+                <a:spcPts val="600"/>
+              </a:spcAft>
+            </a:pPr>
+            <a:r>
+              <a:rPr sz="1250" b="1" i="0">
+                <a:solidFill>
+                  <a:srgbClr val="1F3A5F"/>
+                </a:solidFill>
+                <a:latin typeface="Calibri"/>
+              </a:rPr>
+              <a:t>Sensors &amp; swarm (Y / Z series):  </a:t>
+            </a:r>
+            <a:r>
+              <a:rPr sz="1250" b="0" i="0">
+                <a:solidFill>
+                  <a:srgbClr val="333333"/>
+                </a:solidFill>
+                <a:latin typeface="Calibri"/>
+              </a:rPr>
+              <a:t>NonVideoSensors-Walk.md; Swarm-Walk.md; log sec 6c / 6d.</a:t>
+            </a:r>
+          </a:p>
+          <a:p>
+            <a:pPr>
+              <a:spcBef>
+                <a:spcPts val="200"/>
+              </a:spcBef>
+              <a:spcAft>
+                <a:spcPts val="600"/>
+              </a:spcAft>
+            </a:pPr>
+            <a:r>
+              <a:rPr sz="1250" b="1" i="0">
+                <a:solidFill>
+                  <a:srgbClr val="1F3A5F"/>
+                </a:solidFill>
+                <a:latin typeface="Calibri"/>
+              </a:rPr>
+              <a:t>Task / effect &amp; engagement (W / L, Q-K/Q-L):  </a:t>
+            </a:r>
+            <a:r>
+              <a:rPr sz="1250" b="0" i="0">
+                <a:solidFill>
+                  <a:srgbClr val="333333"/>
+                </a:solidFill>
+                <a:latin typeface="Calibri"/>
+              </a:rPr>
+              <a:t>FireSupport-Walk.md; TaskEffect-Batch-Walk.md; log sec 6e / 6f.</a:t>
+            </a:r>
+          </a:p>
+          <a:p>
+            <a:pPr>
+              <a:spcBef>
+                <a:spcPts val="200"/>
+              </a:spcBef>
+              <a:spcAft>
+                <a:spcPts val="600"/>
+              </a:spcAft>
+            </a:pPr>
+            <a:r>
+              <a:rPr sz="1250" b="1" i="0">
+                <a:solidFill>
+                  <a:srgbClr val="1F3A5F"/>
+                </a:solidFill>
+                <a:latin typeface="Calibri"/>
+              </a:rPr>
+              <a:t>Sourced &amp; validation missions:  </a:t>
+            </a:r>
+            <a:r>
+              <a:rPr sz="1250" b="0" i="0">
+                <a:solidFill>
+                  <a:srgbClr val="333333"/>
+                </a:solidFill>
+                <a:latin typeface="Calibri"/>
+              </a:rPr>
+              <a:t>SourcedScenarios-Walk.md; ValidationEvidence-Walk.md; Documents-Found.md; log sec 6h / 6j.</a:t>
+            </a:r>
+          </a:p>
+          <a:p>
+            <a:pPr>
+              <a:spcBef>
+                <a:spcPts val="200"/>
+              </a:spcBef>
+              <a:spcAft>
+                <a:spcPts val="600"/>
+              </a:spcAft>
+            </a:pPr>
+            <a:r>
+              <a:rPr sz="1250" b="1" i="0">
+                <a:solidFill>
+                  <a:srgbClr val="1F3A5F"/>
+                </a:solidFill>
+                <a:latin typeface="Calibri"/>
+              </a:rPr>
+              <a:t>Redundancy screen (N1):  </a:t>
+            </a:r>
+            <a:r>
+              <a:rPr sz="1250" b="0" i="0">
+                <a:solidFill>
+                  <a:srgbClr val="333333"/>
+                </a:solidFill>
+                <a:latin typeface="Calibri"/>
+              </a:rPr>
+              <a:t>RedundancyPass-Walk.md; log sec 6g.</a:t>
+            </a:r>
+          </a:p>
+        </p:txBody>
+      </p:sp>
+      <p:sp>
+        <p:nvSpPr>
+          <p:cNvPr id="6" name="TextBox 5"/>
+          <p:cNvSpPr txBox="1"/>
+          <p:nvPr/>
+        </p:nvSpPr>
+        <p:spPr>
+          <a:xfrm>
+            <a:off x="502920" y="6419088"/>
+            <a:ext cx="11155680" cy="320040"/>
+          </a:xfrm>
+          <a:prstGeom prst="rect">
+            <a:avLst/>
+          </a:prstGeom>
+          <a:noFill/>
+        </p:spPr>
+        <p:txBody>
+          <a:bodyPr wrap="square">
+            <a:spAutoFit/>
+          </a:bodyPr>
+          <a:lstStyle/>
+          <a:p>
+            <a:r>
+              <a:rPr sz="900" b="0" i="0">
+                <a:solidFill>
+                  <a:srgbClr val="666666"/>
+                </a:solidFill>
+                <a:latin typeface="Calibri"/>
+              </a:rPr>
+              <a:t>C2SIM ASX Sub-group   |   Hyssos   |   July 2026</a:t>
+            </a:r>
+          </a:p>
+        </p:txBody>
+      </p:sp>
+      <p:sp>
+        <p:nvSpPr>
+          <p:cNvPr id="7" name="TextBox 6"/>
+          <p:cNvSpPr txBox="1"/>
+          <p:nvPr/>
+        </p:nvSpPr>
+        <p:spPr>
+          <a:xfrm>
+            <a:off x="11338560" y="6419088"/>
+            <a:ext cx="640080" cy="320040"/>
+          </a:xfrm>
+          <a:prstGeom prst="rect">
+            <a:avLst/>
+          </a:prstGeom>
+          <a:noFill/>
+        </p:spPr>
+        <p:txBody>
+          <a:bodyPr wrap="square">
+            <a:spAutoFit/>
+          </a:bodyPr>
+          <a:lstStyle/>
+          <a:p>
+            <a:pPr algn="r"/>
+            <a:r>
+              <a:rPr sz="900" b="0" i="0">
+                <a:solidFill>
+                  <a:srgbClr val="666666"/>
+                </a:solidFill>
+                <a:latin typeface="Calibri"/>
+              </a:rPr>
+              <a:t>23</a:t>
             </a:r>
           </a:p>
         </p:txBody>

--- a/Subgroups/ASX/InstantiationReview/ASX-Instantiation-Findings.pptx
+++ b/Subgroups/ASX/InstantiationReview/ASX-Instantiation-Findings.pptx
@@ -33,7 +33,6 @@
     <p:sldId id="281" r:id="rId33"/>
     <p:sldId id="282" r:id="rId34"/>
     <p:sldId id="283" r:id="rId35"/>
-    <p:sldId id="284" r:id="rId36"/>
   </p:sldIdLst>
   <p:sldSz cx="12191695" cy="6858000" type="screen4x3"/>
   <p:notesSz cx="6858000" cy="9144000"/>
@@ -1740,12 +1739,12 @@
           <a:lstStyle/>
           <a:p>
             <a:r>
-              <a:t>An independent pass compared the base standard's plan machinery with ten robotic/agent standards (BT/Nav2, PDDL, FlexBE, MAVLink, IEEE 1872.1-2024, JAUS AS6062, STANAG 4586, 4D/RCS, HTN, FIPA/BDI); every C2SIM-side claim was verified in the RDF. Result: a strong classical-planning core, and an absent autonomy-execution half - failure, state conditions, goals, loops, authority.</a:t>
-            </a:r>
-          </a:p>
-          <a:p>
-            <a:r>
-              <a:t>The plan-semantics module draft (branch asx-plan-semantics) already covers the core of that half, and the standards pass independently re-derived the same construct set - corroboration, not invention. Findings PL1-PL11 in log sec 6k; decisions Q-W..Q-Z.</a:t>
+              <a:t>Section budget: slides 25-26, about 1 minute - the close.</a:t>
+            </a:r>
+          </a:p>
+          <a:p>
+            <a:r>
+              <a:t>The same decisions, grouped by commitment level: safe corrections (typos, the UUIDBase slip) are unambiguous; structural decisions need the group; content types need design. Nothing has been applied to the model or the workbooks - all items are proposals pending buy-in.</a:t>
             </a:r>
           </a:p>
         </p:txBody>
@@ -1815,12 +1814,12 @@
           <a:lstStyle/>
           <a:p>
             <a:r>
-              <a:t>Section budget: slides 25-26, about 1 minute - the close.</a:t>
-            </a:r>
-          </a:p>
-          <a:p>
-            <a:r>
-              <a:t>The same decisions, grouped by commitment level: safe corrections (typos, the UUIDBase slip) are unambiguous; structural decisions need the group; content types need design. Nothing has been applied to the model or the workbooks - all items are proposals pending buy-in.</a:t>
+              <a:t>The recommended order: settle Q-A / Q-B first (they unblock Initialization), complete the Initialization instantiations, add the two CASEVAC content types, reconcile the two tracks and fix the typos, and optionally adopt the diff-able workbooks so message edits can be reviewed in git.</a:t>
+            </a:r>
+          </a:p>
+          <a:p>
+            <a:r>
+              <a:t>Where the ball is: sourcing is essentially complete - every gap this review raised is grounded in a real mission (one nice-to-have left: a dedicated autonomous-CASEVAC mission). The remaining work - the attribute layer, the reconciliation, the 22 decisions - is modeling work; more scenarios will not fill it.</a:t>
             </a:r>
           </a:p>
         </p:txBody>
@@ -1890,12 +1889,12 @@
           <a:lstStyle/>
           <a:p>
             <a:r>
-              <a:t>The recommended order: settle Q-A / Q-B first (they unblock Initialization), complete the Initialization instantiations, add the two CASEVAC content types, reconcile the two tracks and fix the typos, and optionally adopt the diff-able workbooks so message edits can be reviewed in git.</a:t>
-            </a:r>
-          </a:p>
-          <a:p>
-            <a:r>
-              <a:t>Where the ball is: sourcing is essentially complete - every gap this review raised is grounded in a real mission (one nice-to-have left: a dedicated autonomous-CASEVAC mission). The remaining work - the attribute layer, the reconciliation, the 22 decisions - is modeling work; more scenarios will not fill it.</a:t>
+              <a:t>Reading paths by time budget. The 5-minute path (Group-Briefing.md) is the default pointer for anyone who missed the meeting; the half-day path is for reviewers who want to challenge the evidence.</a:t>
+            </a:r>
+          </a:p>
+          <a:p>
+            <a:r>
+              <a:t>Every ID on these slides resolves to exactly one log row - the decoder ring on the next slide maps each family.</a:t>
             </a:r>
           </a:p>
         </p:txBody>
@@ -1965,12 +1964,12 @@
           <a:lstStyle/>
           <a:p>
             <a:r>
-              <a:t>Reading paths by time budget. The 5-minute path (Group-Briefing.md) is the default pointer for anyone who missed the meeting; the half-day path is for reviewers who want to challenge the evidence.</a:t>
-            </a:r>
-          </a:p>
-          <a:p>
-            <a:r>
-              <a:t>Every ID on these slides resolves to exactly one log row - the decoder ring on the next slide maps each family.</a:t>
+              <a:t>Every ID family, what it names, and where it resolves. An unfamiliar ID in any document is a pointer, not jargon - each one lands on a definition, its evidence, and its current status.</a:t>
+            </a:r>
+          </a:p>
+          <a:p>
+            <a:r>
+              <a:t>This slide plus the next one are the handout scaffolding: leave them with the group.</a:t>
             </a:r>
           </a:p>
         </p:txBody>
@@ -2040,87 +2039,7 @@
           <a:lstStyle/>
           <a:p>
             <a:r>
-              <a:t>Every ID family, what it names, and where it resolves. An unfamiliar ID in any document is a pointer, not jargon - each one lands on a definition, its evidence, and its current status.</a:t>
-            </a:r>
-          </a:p>
-          <a:p>
-            <a:r>
-              <a:t>This slide plus the next one are the handout scaffolding: leave them with the group.</a:t>
-            </a:r>
-          </a:p>
-        </p:txBody>
-      </p:sp>
-      <p:sp>
-        <p:nvSpPr>
-          <p:cNvPr id="4" name="Slide Number Placeholder 3"/>
-          <p:cNvSpPr>
-            <a:spLocks noGrp="1"/>
-          </p:cNvSpPr>
-          <p:nvPr>
-            <p:ph type="sldNum" idx="5" sz="quarter"/>
-          </p:nvPr>
-        </p:nvSpPr>
-        <p:spPr/>
-      </p:sp>
-    </p:spTree>
-  </p:cSld>
-  <p:clrMapOvr>
-    <a:masterClrMapping/>
-  </p:clrMapOvr>
-</p:notes>
-</file>
-
-<file path=ppt/notesSlides/notesSlide29.xml><?xml version="1.0" encoding="utf-8"?>
-<p:notes xmlns:a="http://schemas.openxmlformats.org/drawingml/2006/main" xmlns:p="http://schemas.openxmlformats.org/presentationml/2006/main" xmlns:r="http://schemas.openxmlformats.org/officeDocument/2006/relationships">
-  <p:cSld>
-    <p:spTree>
-      <p:nvGrpSpPr>
-        <p:cNvPr id="1" name=""/>
-        <p:cNvGrpSpPr/>
-        <p:nvPr/>
-      </p:nvGrpSpPr>
-      <p:grpSpPr>
-        <a:xfrm>
-          <a:off x="0" y="0"/>
-          <a:ext cx="0" cy="0"/>
-          <a:chOff x="0" y="0"/>
-          <a:chExt cx="0" cy="0"/>
-        </a:xfrm>
-      </p:grpSpPr>
-      <p:sp>
-        <p:nvSpPr>
-          <p:cNvPr id="2" name="Slide Image Placeholder 1"/>
-          <p:cNvSpPr>
-            <a:spLocks noGrp="1"/>
-          </p:cNvSpPr>
-          <p:nvPr>
-            <p:ph type="sldImg" idx="2"/>
-          </p:nvPr>
-        </p:nvSpPr>
-        <p:spPr/>
-      </p:sp>
-      <p:sp>
-        <p:nvSpPr>
-          <p:cNvPr id="3" name="Notes Placeholder 2"/>
-          <p:cNvSpPr>
-            <a:spLocks noGrp="1"/>
-          </p:cNvSpPr>
-          <p:nvPr>
-            <p:ph type="body" idx="3" sz="quarter"/>
-          </p:nvPr>
-        </p:nvSpPr>
-        <p:spPr/>
-        <p:txBody>
-          <a:bodyPr/>
-          <a:lstStyle/>
-          <a:p>
-            <a:r>
               <a:t>The topic-to-doc map. Everything is on branch asx-diffable-spreadsheets: review docs in Subgroups/ASX/InstantiationReview, workbooks in Subgroups/ASX/Proposed Extension Working Materials. The .md files render directly on GitHub - switch branch and browse; no tooling needed.</a:t>
-            </a:r>
-          </a:p>
-          <a:p>
-            <a:r>
-              <a:t>The plan-semantics module itself (TTL draft, analysis, validation walks) lives on branch asx-plan-semantics; PlanSemantics-Walk.md here is the independent standards pass that checked it.</a:t>
             </a:r>
           </a:p>
         </p:txBody>
@@ -10978,7 +10897,7 @@
                 </a:solidFill>
                 <a:latin typeface="Calibri"/>
               </a:rPr>
-              <a:t>22 concrete decisions (Q-A..Q-V, log sec 7), plus four plan-semantics decisions (Q-W..Q-Z) from the standards pass - settle the four structural ones (Q-A..Q-D) first; they unblock Initialization.</a:t>
+              <a:t>22 concrete decisions (Q-A..Q-V, log sec 7) - settle the four structural ones (Q-A..Q-D) first; they unblock Initialization.</a:t>
             </a:r>
           </a:p>
           <a:p>
@@ -12868,7 +12787,7 @@
                 </a:solidFill>
                 <a:latin typeface="Calibri"/>
               </a:rPr>
-              <a:t>Plan semantics vs robotic behavior standards (6k)</a:t>
+              <a:t>Proposed refinements</a:t>
             </a:r>
           </a:p>
         </p:txBody>
@@ -12902,7 +12821,7 @@
                 </a:solidFill>
                 <a:latin typeface="Calibri"/>
               </a:rPr>
-              <a:t>Independent standards pass + module verification - decisions Q-W..Q-Z</a:t>
+              <a:t>Pending group buy-in - nothing applied to the model</a:t>
             </a:r>
           </a:p>
         </p:txBody>
@@ -12915,8 +12834,8 @@
         </p:nvSpPr>
         <p:spPr>
           <a:xfrm>
-            <a:off x="640080" y="1645920"/>
-            <a:ext cx="10972800" cy="4709160"/>
+            <a:off x="640080" y="1554480"/>
+            <a:ext cx="10972800" cy="4754880"/>
           </a:xfrm>
           <a:prstGeom prst="rect">
             <a:avLst/>
@@ -12934,17 +12853,17 @@
                 <a:spcPts val="200"/>
               </a:spcBef>
               <a:spcAft>
-                <a:spcPts val="1100"/>
+                <a:spcPts val="1300"/>
               </a:spcAft>
             </a:pPr>
             <a:r>
               <a:rPr sz="1400" b="1" i="0">
                 <a:solidFill>
-                  <a:srgbClr val="1F3A5F"/>
-                </a:solidFill>
-                <a:latin typeface="Calibri"/>
-              </a:rPr>
-              <a:t>•  Compared:  </a:t>
+                  <a:srgbClr val="2E7D32"/>
+                </a:solidFill>
+                <a:latin typeface="Calibri"/>
+              </a:rPr>
+              <a:t>•  Safe corrections (unambiguous):  </a:t>
             </a:r>
             <a:r>
               <a:rPr sz="1400" b="0" i="0">
@@ -12953,7 +12872,7 @@
                 </a:solidFill>
                 <a:latin typeface="Calibri"/>
               </a:rPr>
-              <a:t>base C2SIM plan machinery vs BT/Nav2, PDDL, FlexBE, MAVLink, IEEE 1872.1-2024, JAUS AS6062, STANAG 4586 - every C2SIM-side claim verified against the RDF.</a:t>
+              <a:t>class typo CollecticeRoboticSystem -&gt; CollectiveRoboticSystem (O1); versionInfo Extrension -&gt; Extension (O2); file CSIM_ASX -&gt; C2SIM_ASX (O3); hasStartTime UUIDBase -&gt; TimeInstant (M7); unify namespace label ASX / C2SIM_ASX (M8).</a:t>
             </a:r>
           </a:p>
           <a:p>
@@ -12962,17 +12881,17 @@
                 <a:spcPts val="200"/>
               </a:spcBef>
               <a:spcAft>
-                <a:spcPts val="1100"/>
+                <a:spcPts val="1300"/>
               </a:spcAft>
             </a:pPr>
             <a:r>
               <a:rPr sz="1400" b="1" i="0">
                 <a:solidFill>
-                  <a:srgbClr val="2E7D32"/>
-                </a:solidFill>
-                <a:latin typeface="Calibri"/>
-              </a:rPr>
-              <a:t>•  Base standard:  </a:t>
+                  <a:srgbClr val="C87F0A"/>
+                </a:solidFill>
+                <a:latin typeface="Calibri"/>
+              </a:rPr>
+              <a:t>•  Structural (decide first):  </a:t>
             </a:r>
             <a:r>
               <a:rPr sz="1400" b="0" i="0">
@@ -12981,7 +12900,7 @@
                 </a:solidFill>
                 <a:latin typeface="Calibri"/>
               </a:rPr>
-              <a:t>strong on classical planning (sequencing, hierarchy, an 18-code temporal algebra incl. 6 concurrency codes) - absent on the autonomy-execution half (failure, state conditions, goals, loops, authority).</a:t>
+              <a:t>UAV/robot typing (Q-A); Swarm -&gt; CollectiveEntity so it is taskable (Q-B); one sensor model (Q-C); one autonomy vocabulary (Q-D).</a:t>
             </a:r>
           </a:p>
           <a:p>
@@ -12990,17 +12909,17 @@
                 <a:spcPts val="200"/>
               </a:spcBef>
               <a:spcAft>
-                <a:spcPts val="1100"/>
+                <a:spcPts val="1300"/>
               </a:spcAft>
             </a:pPr>
             <a:r>
               <a:rPr sz="1400" b="1" i="0">
                 <a:solidFill>
-                  <a:srgbClr val="2E7D32"/>
-                </a:solidFill>
-                <a:latin typeface="Calibri"/>
-              </a:rPr>
-              <a:t>•  Module draft:  </a:t>
+                  <a:srgbClr val="2E869A"/>
+                </a:solidFill>
+                <a:latin typeface="Calibri"/>
+              </a:rPr>
+              <a:t>•  New content (design):  </a:t>
             </a:r>
             <a:r>
               <a:rPr sz="1400" b="0" i="0">
@@ -13009,7 +12928,7 @@
                 </a:solidFill>
                 <a:latin typeface="Calibri"/>
               </a:rPr>
-              <a:t>already covers the core of that half (fallback, state conditions, goals, repetition, authority gate) - the standards pass independently re-derived the same construct set (corroboration, not invention).</a:t>
+              <a:t>inline entity def (Q-E), MediaReference (Q-F), robot-to-robot + cross-cue (Q-G/Q-P), rationale report (Q-H), generic detection report (Q-I/Q-Q), swarm residuals (Q-J), engagement authority (Q-K), payload/effector/weapon typing (Q-L), area subject (Q-M), explore order (Q-N), denied-comms/relay (Q-O), locomotion subtypes (Q-R), decoy/threat-aware (Q-S), environment conditions (Q-T), formation geometry (Q-U).</a:t>
             </a:r>
           </a:p>
           <a:p>
@@ -13018,54 +12937,17 @@
                 <a:spcPts val="200"/>
               </a:spcBef>
               <a:spcAft>
-                <a:spcPts val="1100"/>
+                <a:spcPts val="1300"/>
               </a:spcAft>
             </a:pPr>
             <a:r>
               <a:rPr sz="1400" b="1" i="0">
                 <a:solidFill>
-                  <a:srgbClr val="2E869A"/>
-                </a:solidFill>
-                <a:latin typeface="Calibri"/>
-              </a:rPr>
-              <a:t>•  v0.0.3 adds:  </a:t>
-            </a:r>
-            <a:r>
-              <a:rPr sz="1400" b="0" i="0">
-                <a:solidFill>
                   <a:srgbClr val="333333"/>
                 </a:solidFill>
                 <a:latin typeface="Calibri"/>
               </a:rPr>
-              <a:t>plan identity/supersession, suspension state, task accept/reject, lost-link failsafe, keep-in/keep-out areas, structured waypoints - each with JAUS / STANAG / MAVLink prior art.</a:t>
-            </a:r>
-          </a:p>
-          <a:p>
-            <a:pPr>
-              <a:spcBef>
-                <a:spcPts val="200"/>
-              </a:spcBef>
-              <a:spcAft>
-                <a:spcPts val="1100"/>
-              </a:spcAft>
-            </a:pPr>
-            <a:r>
-              <a:rPr sz="1400" b="1" i="0">
-                <a:solidFill>
-                  <a:srgbClr val="2E869A"/>
-                </a:solidFill>
-                <a:latin typeface="Calibri"/>
-              </a:rPr>
-              <a:t>•  Decisions:  </a:t>
-            </a:r>
-            <a:r>
-              <a:rPr sz="1400" b="0" i="0">
-                <a:solidFill>
-                  <a:srgbClr val="333333"/>
-                </a:solidFill>
-                <a:latin typeface="Calibri"/>
-              </a:rPr>
-              <a:t>Q-W review/adopt the module (resolves PL1-PL4, PL6); Q-X plan-lifecycle v-next deltas; Q-Y failsafe/geofence binding; Q-Z STANAG-grade waypoints - plus a consolidated PDG errata package (PL11 + the module's core errata).</a:t>
+              <a:t>•  Nothing here is applied to the model - all items are proposals for group buy-in.</a:t>
             </a:r>
           </a:p>
         </p:txBody>
@@ -13108,7 +12990,7 @@
                 </a:solidFill>
                 <a:latin typeface="Calibri"/>
               </a:rPr>
-              <a:t>PlanSemantics-Walk.md  -  log sec 6k (PL1-PL11)  -  decisions Q-W..Q-Z (log sec 7)</a:t>
+              <a:t>log secs 3-4 (the safe corrections)  -  sec 7 (every decision, with what it resolves)</a:t>
             </a:r>
           </a:p>
         </p:txBody>
@@ -13272,7 +13154,7 @@
                 </a:solidFill>
                 <a:latin typeface="Calibri"/>
               </a:rPr>
-              <a:t>Proposed refinements</a:t>
+              <a:t>Recommended next steps</a:t>
             </a:r>
           </a:p>
         </p:txBody>
@@ -13285,42 +13167,8 @@
         </p:nvSpPr>
         <p:spPr>
           <a:xfrm>
-            <a:off x="548640" y="914400"/>
-            <a:ext cx="10972800" cy="320040"/>
-          </a:xfrm>
-          <a:prstGeom prst="rect">
-            <a:avLst/>
-          </a:prstGeom>
-          <a:noFill/>
-        </p:spPr>
-        <p:txBody>
-          <a:bodyPr wrap="square">
-            <a:spAutoFit/>
-          </a:bodyPr>
-          <a:lstStyle/>
-          <a:p>
-            <a:r>
-              <a:rPr sz="1300" b="0" i="1">
-                <a:solidFill>
-                  <a:srgbClr val="2E869A"/>
-                </a:solidFill>
-                <a:latin typeface="Calibri"/>
-              </a:rPr>
-              <a:t>Pending group buy-in - nothing applied to the model</a:t>
-            </a:r>
-          </a:p>
-        </p:txBody>
-      </p:sp>
-      <p:sp>
-        <p:nvSpPr>
-          <p:cNvPr id="5" name="TextBox 4"/>
-          <p:cNvSpPr txBox="1"/>
-          <p:nvPr/>
-        </p:nvSpPr>
-        <p:spPr>
-          <a:xfrm>
-            <a:off x="640080" y="1554480"/>
-            <a:ext cx="10972800" cy="4754880"/>
+            <a:off x="640080" y="1645920"/>
+            <a:ext cx="10972800" cy="4709160"/>
           </a:xfrm>
           <a:prstGeom prst="rect">
             <a:avLst/>
@@ -13338,26 +13186,17 @@
                 <a:spcPts val="200"/>
               </a:spcBef>
               <a:spcAft>
-                <a:spcPts val="1300"/>
+                <a:spcPts val="1200"/>
               </a:spcAft>
             </a:pPr>
             <a:r>
-              <a:rPr sz="1400" b="1" i="0">
-                <a:solidFill>
-                  <a:srgbClr val="2E7D32"/>
-                </a:solidFill>
-                <a:latin typeface="Calibri"/>
-              </a:rPr>
-              <a:t>•  Safe corrections (unambiguous):  </a:t>
-            </a:r>
-            <a:r>
-              <a:rPr sz="1400" b="0" i="0">
+              <a:rPr sz="1650" b="1" i="0">
                 <a:solidFill>
                   <a:srgbClr val="333333"/>
                 </a:solidFill>
                 <a:latin typeface="Calibri"/>
               </a:rPr>
-              <a:t>class typo CollecticeRoboticSystem -&gt; CollectiveRoboticSystem (O1); versionInfo Extrension -&gt; Extension (O2); file CSIM_ASX -&gt; C2SIM_ASX (O3); hasStartTime UUIDBase -&gt; TimeInstant (M7); unify namespace label ASX / C2SIM_ASX (M8).</a:t>
+              <a:t>•  Settle the two entity-typing decisions (Q-A, Q-B) - this unblocks Initialization.</a:t>
             </a:r>
           </a:p>
           <a:p>
@@ -13366,26 +13205,17 @@
                 <a:spcPts val="200"/>
               </a:spcBef>
               <a:spcAft>
-                <a:spcPts val="1300"/>
+                <a:spcPts val="1200"/>
               </a:spcAft>
             </a:pPr>
             <a:r>
-              <a:rPr sz="1400" b="1" i="0">
-                <a:solidFill>
-                  <a:srgbClr val="C87F0A"/>
-                </a:solidFill>
-                <a:latin typeface="Calibri"/>
-              </a:rPr>
-              <a:t>•  Structural (decide first):  </a:t>
-            </a:r>
-            <a:r>
-              <a:rPr sz="1400" b="0" i="0">
+              <a:rPr sz="1650" b="0" i="0">
                 <a:solidFill>
                   <a:srgbClr val="333333"/>
                 </a:solidFill>
                 <a:latin typeface="Calibri"/>
               </a:rPr>
-              <a:t>UAV/robot typing (Q-A); Swarm -&gt; CollectiveEntity so it is taskable (Q-B); one sensor model (Q-C); one autonomy vocabulary (Q-D).</a:t>
+              <a:t>•  Complete the Initialization instantiations (drafts provided for the 3 named scenarios).</a:t>
             </a:r>
           </a:p>
           <a:p>
@@ -13394,26 +13224,17 @@
                 <a:spcPts val="200"/>
               </a:spcBef>
               <a:spcAft>
-                <a:spcPts val="1300"/>
+                <a:spcPts val="1200"/>
               </a:spcAft>
             </a:pPr>
             <a:r>
-              <a:rPr sz="1400" b="1" i="0">
-                <a:solidFill>
-                  <a:srgbClr val="2E869A"/>
-                </a:solidFill>
-                <a:latin typeface="Calibri"/>
-              </a:rPr>
-              <a:t>•  New content (design):  </a:t>
-            </a:r>
-            <a:r>
-              <a:rPr sz="1400" b="0" i="0">
+              <a:rPr sz="1650" b="0" i="0">
                 <a:solidFill>
                   <a:srgbClr val="333333"/>
                 </a:solidFill>
                 <a:latin typeface="Calibri"/>
               </a:rPr>
-              <a:t>inline entity def (Q-E), MediaReference (Q-F), robot-to-robot + cross-cue (Q-G/Q-P), rationale report (Q-H), generic detection report (Q-I/Q-Q), swarm residuals (Q-J), engagement authority (Q-K), payload/effector/weapon typing (Q-L), area subject (Q-M), explore order (Q-N), denied-comms/relay (Q-O), locomotion subtypes (Q-R), decoy/threat-aware (Q-S), environment conditions (Q-T), formation geometry (Q-U).</a:t>
+              <a:t>•  Add the two CASEVAC content types (Q-G robot-to-robot, Q-H rationale) - both are explicit scenario requirements.</a:t>
             </a:r>
           </a:p>
           <a:p>
@@ -13422,24 +13243,43 @@
                 <a:spcPts val="200"/>
               </a:spcBef>
               <a:spcAft>
-                <a:spcPts val="1300"/>
+                <a:spcPts val="1200"/>
               </a:spcAft>
             </a:pPr>
             <a:r>
-              <a:rPr sz="1400" b="1" i="0">
+              <a:rPr sz="1650" b="0" i="0">
                 <a:solidFill>
                   <a:srgbClr val="333333"/>
                 </a:solidFill>
                 <a:latin typeface="Calibri"/>
               </a:rPr>
-              <a:t>•  Nothing here is applied to the model - all items are proposals for group buy-in.</a:t>
-            </a:r>
-          </a:p>
-        </p:txBody>
-      </p:sp>
-      <p:sp>
-        <p:nvSpPr>
-          <p:cNvPr id="6" name="TextBox 5"/>
+              <a:t>•  Reconcile the OWL model with the June spreadsheet decisions; fix the typos.</a:t>
+            </a:r>
+          </a:p>
+          <a:p>
+            <a:pPr>
+              <a:spcBef>
+                <a:spcPts val="200"/>
+              </a:spcBef>
+              <a:spcAft>
+                <a:spcPts val="1200"/>
+              </a:spcAft>
+            </a:pPr>
+            <a:r>
+              <a:rPr sz="1650" b="0" i="0">
+                <a:solidFill>
+                  <a:srgbClr val="333333"/>
+                </a:solidFill>
+                <a:latin typeface="Calibri"/>
+              </a:rPr>
+              <a:t>•  Optional: adopt the diff-able (.xml) workbooks so edits can be reviewed and merged in git.</a:t>
+            </a:r>
+          </a:p>
+        </p:txBody>
+      </p:sp>
+      <p:sp>
+        <p:nvSpPr>
+          <p:cNvPr id="5" name="TextBox 4"/>
           <p:cNvSpPr txBox="1"/>
           <p:nvPr/>
         </p:nvSpPr>
@@ -13475,14 +13315,14 @@
                 </a:solidFill>
                 <a:latin typeface="Calibri"/>
               </a:rPr>
-              <a:t>log secs 3-4 (the safe corrections)  -  sec 7 (every decision, with what it resolves)</a:t>
-            </a:r>
-          </a:p>
-        </p:txBody>
-      </p:sp>
-      <p:sp>
-        <p:nvSpPr>
-          <p:cNvPr id="7" name="TextBox 6"/>
+              <a:t>Group-Briefing.md ('Status and next step')  -  log sec 7 for the full decision register</a:t>
+            </a:r>
+          </a:p>
+        </p:txBody>
+      </p:sp>
+      <p:sp>
+        <p:nvSpPr>
+          <p:cNvPr id="6" name="TextBox 5"/>
           <p:cNvSpPr txBox="1"/>
           <p:nvPr/>
         </p:nvSpPr>
@@ -13516,7 +13356,7 @@
       </p:sp>
       <p:sp>
         <p:nvSpPr>
-          <p:cNvPr id="8" name="TextBox 7"/>
+          <p:cNvPr id="7" name="TextBox 6"/>
           <p:cNvSpPr txBox="1"/>
           <p:nvPr/>
         </p:nvSpPr>
@@ -13558,331 +13398,6 @@
 </file>
 
 <file path=ppt/slides/slide26.xml><?xml version="1.0" encoding="utf-8"?>
-<p:sld xmlns:a="http://schemas.openxmlformats.org/drawingml/2006/main" xmlns:p="http://schemas.openxmlformats.org/presentationml/2006/main" xmlns:r="http://schemas.openxmlformats.org/officeDocument/2006/relationships">
-  <p:cSld>
-    <p:spTree>
-      <p:nvGrpSpPr>
-        <p:cNvPr id="1" name=""/>
-        <p:cNvGrpSpPr/>
-        <p:nvPr/>
-      </p:nvGrpSpPr>
-      <p:grpSpPr/>
-      <p:sp>
-        <p:nvSpPr>
-          <p:cNvPr id="2" name="Rectangle 1"/>
-          <p:cNvSpPr/>
-          <p:nvPr/>
-        </p:nvSpPr>
-        <p:spPr>
-          <a:xfrm>
-            <a:off x="548640" y="1170432"/>
-            <a:ext cx="2011680" cy="38100"/>
-          </a:xfrm>
-          <a:prstGeom prst="rect">
-            <a:avLst/>
-          </a:prstGeom>
-          <a:solidFill>
-            <a:srgbClr val="2E869A"/>
-          </a:solidFill>
-          <a:ln>
-            <a:noFill/>
-          </a:ln>
-        </p:spPr>
-        <p:style>
-          <a:lnRef idx="1">
-            <a:schemeClr val="accent1"/>
-          </a:lnRef>
-          <a:fillRef idx="3">
-            <a:schemeClr val="accent1"/>
-          </a:fillRef>
-          <a:effectRef idx="2">
-            <a:schemeClr val="accent1"/>
-          </a:effectRef>
-          <a:fontRef idx="minor">
-            <a:schemeClr val="lt1"/>
-          </a:fontRef>
-        </p:style>
-        <p:txBody>
-          <a:bodyPr rtlCol="0" anchor="ctr"/>
-          <a:lstStyle/>
-          <a:p>
-            <a:pPr algn="ctr"/>
-          </a:p>
-        </p:txBody>
-      </p:sp>
-      <p:sp>
-        <p:nvSpPr>
-          <p:cNvPr id="3" name="TextBox 2"/>
-          <p:cNvSpPr txBox="1"/>
-          <p:nvPr/>
-        </p:nvSpPr>
-        <p:spPr>
-          <a:xfrm>
-            <a:off x="502920" y="411480"/>
-            <a:ext cx="11155680" cy="822960"/>
-          </a:xfrm>
-          <a:prstGeom prst="rect">
-            <a:avLst/>
-          </a:prstGeom>
-          <a:noFill/>
-        </p:spPr>
-        <p:txBody>
-          <a:bodyPr wrap="square">
-            <a:spAutoFit/>
-          </a:bodyPr>
-          <a:lstStyle/>
-          <a:p>
-            <a:r>
-              <a:rPr sz="3000" b="1" i="0">
-                <a:solidFill>
-                  <a:srgbClr val="1F3A5F"/>
-                </a:solidFill>
-                <a:latin typeface="Calibri"/>
-              </a:rPr>
-              <a:t>Recommended next steps</a:t>
-            </a:r>
-          </a:p>
-        </p:txBody>
-      </p:sp>
-      <p:sp>
-        <p:nvSpPr>
-          <p:cNvPr id="4" name="TextBox 3"/>
-          <p:cNvSpPr txBox="1"/>
-          <p:nvPr/>
-        </p:nvSpPr>
-        <p:spPr>
-          <a:xfrm>
-            <a:off x="640080" y="1645920"/>
-            <a:ext cx="10972800" cy="4709160"/>
-          </a:xfrm>
-          <a:prstGeom prst="rect">
-            <a:avLst/>
-          </a:prstGeom>
-          <a:noFill/>
-        </p:spPr>
-        <p:txBody>
-          <a:bodyPr wrap="square">
-            <a:spAutoFit/>
-          </a:bodyPr>
-          <a:lstStyle/>
-          <a:p>
-            <a:pPr>
-              <a:spcBef>
-                <a:spcPts val="200"/>
-              </a:spcBef>
-              <a:spcAft>
-                <a:spcPts val="1200"/>
-              </a:spcAft>
-            </a:pPr>
-            <a:r>
-              <a:rPr sz="1650" b="1" i="0">
-                <a:solidFill>
-                  <a:srgbClr val="333333"/>
-                </a:solidFill>
-                <a:latin typeface="Calibri"/>
-              </a:rPr>
-              <a:t>•  Settle the two entity-typing decisions (Q-A, Q-B) - this unblocks Initialization.</a:t>
-            </a:r>
-          </a:p>
-          <a:p>
-            <a:pPr>
-              <a:spcBef>
-                <a:spcPts val="200"/>
-              </a:spcBef>
-              <a:spcAft>
-                <a:spcPts val="1200"/>
-              </a:spcAft>
-            </a:pPr>
-            <a:r>
-              <a:rPr sz="1650" b="0" i="0">
-                <a:solidFill>
-                  <a:srgbClr val="333333"/>
-                </a:solidFill>
-                <a:latin typeface="Calibri"/>
-              </a:rPr>
-              <a:t>•  Complete the Initialization instantiations (drafts provided for the 3 named scenarios).</a:t>
-            </a:r>
-          </a:p>
-          <a:p>
-            <a:pPr>
-              <a:spcBef>
-                <a:spcPts val="200"/>
-              </a:spcBef>
-              <a:spcAft>
-                <a:spcPts val="1200"/>
-              </a:spcAft>
-            </a:pPr>
-            <a:r>
-              <a:rPr sz="1650" b="0" i="0">
-                <a:solidFill>
-                  <a:srgbClr val="333333"/>
-                </a:solidFill>
-                <a:latin typeface="Calibri"/>
-              </a:rPr>
-              <a:t>•  Add the two CASEVAC content types (Q-G robot-to-robot, Q-H rationale) - both are explicit scenario requirements.</a:t>
-            </a:r>
-          </a:p>
-          <a:p>
-            <a:pPr>
-              <a:spcBef>
-                <a:spcPts val="200"/>
-              </a:spcBef>
-              <a:spcAft>
-                <a:spcPts val="1200"/>
-              </a:spcAft>
-            </a:pPr>
-            <a:r>
-              <a:rPr sz="1650" b="0" i="0">
-                <a:solidFill>
-                  <a:srgbClr val="333333"/>
-                </a:solidFill>
-                <a:latin typeface="Calibri"/>
-              </a:rPr>
-              <a:t>•  Reconcile the OWL model with the June spreadsheet decisions; fix the typos.</a:t>
-            </a:r>
-          </a:p>
-          <a:p>
-            <a:pPr>
-              <a:spcBef>
-                <a:spcPts val="200"/>
-              </a:spcBef>
-              <a:spcAft>
-                <a:spcPts val="1200"/>
-              </a:spcAft>
-            </a:pPr>
-            <a:r>
-              <a:rPr sz="1650" b="0" i="0">
-                <a:solidFill>
-                  <a:srgbClr val="333333"/>
-                </a:solidFill>
-                <a:latin typeface="Calibri"/>
-              </a:rPr>
-              <a:t>•  Optional: adopt the diff-able (.xml) workbooks so edits can be reviewed and merged in git.</a:t>
-            </a:r>
-          </a:p>
-        </p:txBody>
-      </p:sp>
-      <p:sp>
-        <p:nvSpPr>
-          <p:cNvPr id="5" name="TextBox 4"/>
-          <p:cNvSpPr txBox="1"/>
-          <p:nvPr/>
-        </p:nvSpPr>
-        <p:spPr>
-          <a:xfrm>
-            <a:off x="502920" y="6126480"/>
-            <a:ext cx="11155680" cy="274320"/>
-          </a:xfrm>
-          <a:prstGeom prst="rect">
-            <a:avLst/>
-          </a:prstGeom>
-          <a:noFill/>
-        </p:spPr>
-        <p:txBody>
-          <a:bodyPr wrap="square">
-            <a:spAutoFit/>
-          </a:bodyPr>
-          <a:lstStyle/>
-          <a:p>
-            <a:r>
-              <a:rPr sz="1000" b="1" i="1">
-                <a:solidFill>
-                  <a:srgbClr val="2E869A"/>
-                </a:solidFill>
-                <a:latin typeface="Calibri"/>
-              </a:rPr>
-              <a:t>Dig deeper:  </a:t>
-            </a:r>
-            <a:r>
-              <a:rPr sz="1000" b="0" i="1">
-                <a:solidFill>
-                  <a:srgbClr val="666666"/>
-                </a:solidFill>
-                <a:latin typeface="Calibri"/>
-              </a:rPr>
-              <a:t>Group-Briefing.md ('Status and next step')  -  log sec 7 for the full decision register</a:t>
-            </a:r>
-          </a:p>
-        </p:txBody>
-      </p:sp>
-      <p:sp>
-        <p:nvSpPr>
-          <p:cNvPr id="6" name="TextBox 5"/>
-          <p:cNvSpPr txBox="1"/>
-          <p:nvPr/>
-        </p:nvSpPr>
-        <p:spPr>
-          <a:xfrm>
-            <a:off x="502920" y="6419088"/>
-            <a:ext cx="11155680" cy="320040"/>
-          </a:xfrm>
-          <a:prstGeom prst="rect">
-            <a:avLst/>
-          </a:prstGeom>
-          <a:noFill/>
-        </p:spPr>
-        <p:txBody>
-          <a:bodyPr wrap="square">
-            <a:spAutoFit/>
-          </a:bodyPr>
-          <a:lstStyle/>
-          <a:p>
-            <a:r>
-              <a:rPr sz="900" b="0" i="0">
-                <a:solidFill>
-                  <a:srgbClr val="666666"/>
-                </a:solidFill>
-                <a:latin typeface="Calibri"/>
-              </a:rPr>
-              <a:t>C2SIM ASX Sub-group   |   Hyssos   |   July 2026</a:t>
-            </a:r>
-          </a:p>
-        </p:txBody>
-      </p:sp>
-      <p:sp>
-        <p:nvSpPr>
-          <p:cNvPr id="7" name="TextBox 6"/>
-          <p:cNvSpPr txBox="1"/>
-          <p:nvPr/>
-        </p:nvSpPr>
-        <p:spPr>
-          <a:xfrm>
-            <a:off x="11338560" y="6419088"/>
-            <a:ext cx="640080" cy="320040"/>
-          </a:xfrm>
-          <a:prstGeom prst="rect">
-            <a:avLst/>
-          </a:prstGeom>
-          <a:noFill/>
-        </p:spPr>
-        <p:txBody>
-          <a:bodyPr wrap="square">
-            <a:spAutoFit/>
-          </a:bodyPr>
-          <a:lstStyle/>
-          <a:p>
-            <a:pPr algn="r"/>
-            <a:r>
-              <a:rPr sz="900" b="0" i="0">
-                <a:solidFill>
-                  <a:srgbClr val="666666"/>
-                </a:solidFill>
-                <a:latin typeface="Calibri"/>
-              </a:rPr>
-              <a:t>26</a:t>
-            </a:r>
-          </a:p>
-        </p:txBody>
-      </p:sp>
-    </p:spTree>
-  </p:cSld>
-  <p:clrMapOvr>
-    <a:masterClrMapping/>
-  </p:clrMapOvr>
-</p:sld>
-</file>
-
-<file path=ppt/slides/slide27.xml><?xml version="1.0" encoding="utf-8"?>
 <p:sld xmlns:a="http://schemas.openxmlformats.org/drawingml/2006/main" xmlns:p="http://schemas.openxmlformats.org/presentationml/2006/main" xmlns:r="http://schemas.openxmlformats.org/officeDocument/2006/relationships">
   <p:cSld>
     <p:spTree>
@@ -14513,7 +14028,7 @@
                 </a:solidFill>
                 <a:latin typeface="Calibri"/>
               </a:rPr>
-              <a:t>27</a:t>
+              <a:t>26</a:t>
             </a:r>
           </a:p>
         </p:txBody>
@@ -14526,7 +14041,7 @@
 </p:sld>
 </file>
 
-<file path=ppt/slides/slide28.xml><?xml version="1.0" encoding="utf-8"?>
+<file path=ppt/slides/slide27.xml><?xml version="1.0" encoding="utf-8"?>
 <p:sld xmlns:a="http://schemas.openxmlformats.org/drawingml/2006/main" xmlns:p="http://schemas.openxmlformats.org/presentationml/2006/main" xmlns:r="http://schemas.openxmlformats.org/officeDocument/2006/relationships">
   <p:cSld>
     <p:spTree>
@@ -14657,7 +14172,7 @@
         </p:nvGraphicFramePr>
         <p:xfrm>
           <a:off x="640080" y="1463040"/>
-          <a:ext cx="10972800" cy="4576572"/>
+          <a:ext cx="10972800" cy="3872484"/>
         </p:xfrm>
         <a:graphic>
           <a:graphicData uri="http://schemas.openxmlformats.org/drawingml/2006/table">
@@ -15363,7 +14878,7 @@
                           </a:solidFill>
                           <a:latin typeface="Calibri"/>
                         </a:rPr>
-                        <a:t>PL1 - PL11</a:t>
+                        <a:t>Q-A .. Q-V</a:t>
                       </a:r>
                     </a:p>
                   </a:txBody>
@@ -15385,7 +14900,7 @@
                           </a:solidFill>
                           <a:latin typeface="Calibri"/>
                         </a:rPr>
-                        <a:t>plan-semantics standards findings</a:t>
+                        <a:t>the 22 decisions this review puts to the group</a:t>
                       </a:r>
                     </a:p>
                   </a:txBody>
@@ -15407,143 +14922,7 @@
                           </a:solidFill>
                           <a:latin typeface="Calibri"/>
                         </a:rPr>
-                        <a:t>log sec 6k; PlanSemantics-Walk.md</a:t>
-                      </a:r>
-                    </a:p>
-                  </a:txBody>
-                  <a:tcPr marT="18288" marB="18288" marL="54864" marR="54864">
-                    <a:solidFill>
-                      <a:srgbClr val="EEF1F5"/>
-                    </a:solidFill>
-                  </a:tcPr>
-                </a:tc>
-              </a:tr>
-              <a:tr h="352044">
-                <a:tc>
-                  <a:txBody>
-                    <a:bodyPr wrap="square"/>
-                    <a:lstStyle/>
-                    <a:p>
-                      <a:r>
-                        <a:rPr sz="1150" b="0" i="0">
-                          <a:solidFill>
-                            <a:srgbClr val="333333"/>
-                          </a:solidFill>
-                          <a:latin typeface="Calibri"/>
-                        </a:rPr>
-                        <a:t>Q-A .. Q-V</a:t>
-                      </a:r>
-                    </a:p>
-                  </a:txBody>
-                  <a:tcPr marT="18288" marB="18288" marL="54864" marR="54864">
-                    <a:solidFill>
-                      <a:srgbClr val="FFFFFF"/>
-                    </a:solidFill>
-                  </a:tcPr>
-                </a:tc>
-                <a:tc>
-                  <a:txBody>
-                    <a:bodyPr wrap="square"/>
-                    <a:lstStyle/>
-                    <a:p>
-                      <a:r>
-                        <a:rPr sz="1150" b="0" i="0">
-                          <a:solidFill>
-                            <a:srgbClr val="333333"/>
-                          </a:solidFill>
-                          <a:latin typeface="Calibri"/>
-                        </a:rPr>
-                        <a:t>the 22 decisions this review puts to the group</a:t>
-                      </a:r>
-                    </a:p>
-                  </a:txBody>
-                  <a:tcPr marT="18288" marB="18288" marL="54864" marR="54864">
-                    <a:solidFill>
-                      <a:srgbClr val="FFFFFF"/>
-                    </a:solidFill>
-                  </a:tcPr>
-                </a:tc>
-                <a:tc>
-                  <a:txBody>
-                    <a:bodyPr wrap="square"/>
-                    <a:lstStyle/>
-                    <a:p>
-                      <a:r>
-                        <a:rPr sz="1150" b="0" i="0">
-                          <a:solidFill>
-                            <a:srgbClr val="333333"/>
-                          </a:solidFill>
-                          <a:latin typeface="Calibri"/>
-                        </a:rPr>
                         <a:t>log sec 7 - full text + what each resolves</a:t>
-                      </a:r>
-                    </a:p>
-                  </a:txBody>
-                  <a:tcPr marT="18288" marB="18288" marL="54864" marR="54864">
-                    <a:solidFill>
-                      <a:srgbClr val="FFFFFF"/>
-                    </a:solidFill>
-                  </a:tcPr>
-                </a:tc>
-              </a:tr>
-              <a:tr h="352044">
-                <a:tc>
-                  <a:txBody>
-                    <a:bodyPr wrap="square"/>
-                    <a:lstStyle/>
-                    <a:p>
-                      <a:r>
-                        <a:rPr sz="1150" b="0" i="0">
-                          <a:solidFill>
-                            <a:srgbClr val="333333"/>
-                          </a:solidFill>
-                          <a:latin typeface="Calibri"/>
-                        </a:rPr>
-                        <a:t>Q-W .. Q-Z</a:t>
-                      </a:r>
-                    </a:p>
-                  </a:txBody>
-                  <a:tcPr marT="18288" marB="18288" marL="54864" marR="54864">
-                    <a:solidFill>
-                      <a:srgbClr val="EEF1F5"/>
-                    </a:solidFill>
-                  </a:tcPr>
-                </a:tc>
-                <a:tc>
-                  <a:txBody>
-                    <a:bodyPr wrap="square"/>
-                    <a:lstStyle/>
-                    <a:p>
-                      <a:r>
-                        <a:rPr sz="1150" b="0" i="0">
-                          <a:solidFill>
-                            <a:srgbClr val="333333"/>
-                          </a:solidFill>
-                          <a:latin typeface="Calibri"/>
-                        </a:rPr>
-                        <a:t>plan-semantics decisions (module, lifecycle, failsafe, routes)</a:t>
-                      </a:r>
-                    </a:p>
-                  </a:txBody>
-                  <a:tcPr marT="18288" marB="18288" marL="54864" marR="54864">
-                    <a:solidFill>
-                      <a:srgbClr val="EEF1F5"/>
-                    </a:solidFill>
-                  </a:tcPr>
-                </a:tc>
-                <a:tc>
-                  <a:txBody>
-                    <a:bodyPr wrap="square"/>
-                    <a:lstStyle/>
-                    <a:p>
-                      <a:r>
-                        <a:rPr sz="1150" b="0" i="0">
-                          <a:solidFill>
-                            <a:srgbClr val="333333"/>
-                          </a:solidFill>
-                          <a:latin typeface="Calibri"/>
-                        </a:rPr>
-                        <a:t>log sec 7</a:t>
                       </a:r>
                     </a:p>
                   </a:txBody>
@@ -15664,7 +15043,7 @@
                 </a:solidFill>
                 <a:latin typeface="Calibri"/>
               </a:rPr>
-              <a:t>28</a:t>
+              <a:t>27</a:t>
             </a:r>
           </a:p>
         </p:txBody>
@@ -15677,7 +15056,7 @@
 </p:sld>
 </file>
 
-<file path=ppt/slides/slide29.xml><?xml version="1.0" encoding="utf-8"?>
+<file path=ppt/slides/slide28.xml><?xml version="1.0" encoding="utf-8"?>
 <p:sld xmlns:a="http://schemas.openxmlformats.org/drawingml/2006/main" xmlns:p="http://schemas.openxmlformats.org/presentationml/2006/main" xmlns:r="http://schemas.openxmlformats.org/officeDocument/2006/relationships">
   <p:cSld>
     <p:spTree>
@@ -16059,34 +15438,6 @@
                 </a:solidFill>
                 <a:latin typeface="Calibri"/>
               </a:rPr>
-              <a:t>•  Plan semantics (PL series, Q-W..Q-Z):  </a:t>
-            </a:r>
-            <a:r>
-              <a:rPr sz="1200" b="0" i="0">
-                <a:solidFill>
-                  <a:srgbClr val="333333"/>
-                </a:solidFill>
-                <a:latin typeface="Calibri"/>
-              </a:rPr>
-              <a:t>PlanSemantics-Walk.md; log sec 6k.</a:t>
-            </a:r>
-          </a:p>
-          <a:p>
-            <a:pPr>
-              <a:spcBef>
-                <a:spcPts val="200"/>
-              </a:spcBef>
-              <a:spcAft>
-                <a:spcPts val="500"/>
-              </a:spcAft>
-            </a:pPr>
-            <a:r>
-              <a:rPr sz="1200" b="1" i="0">
-                <a:solidFill>
-                  <a:srgbClr val="1F3A5F"/>
-                </a:solidFill>
-                <a:latin typeface="Calibri"/>
-              </a:rPr>
               <a:t>•  Redundancy screen (N1):  </a:t>
             </a:r>
             <a:r>
@@ -16165,7 +15516,7 @@
                 </a:solidFill>
                 <a:latin typeface="Calibri"/>
               </a:rPr>
-              <a:t>29</a:t>
+              <a:t>28</a:t>
             </a:r>
           </a:p>
         </p:txBody>

--- a/Subgroups/ASX/InstantiationReview/ASX-Instantiation-Findings.pptx
+++ b/Subgroups/ASX/InstantiationReview/ASX-Instantiation-Findings.pptx
@@ -534,12 +534,12 @@
           </a:p>
           <a:p>
             <a:r>
-              <a:t>Time plan for a 30-minute slot: opening (slides 1-2) ~3 min; method and deliverables (3-5) ~5 min; where the instantiation stands (6-7) ~4 min; the structural block (8-12) ~7 min; findings by domain (13-19) ~6 min; v0.0.3 and the decision register (20-24) ~4 min; close (25-26) ~1 min. Slides 27-29 are the reading guide - point at them, do not present them.</a:t>
-            </a:r>
-          </a:p>
-          <a:p>
-            <a:r>
-              <a:t>If the slot is 20 minutes: slides 1-2, 5, 8-12, the decisions grouping (21), and next steps (26); everything else is handout material.</a:t>
+              <a:t>Time plan for a 30-minute slot: opening (slides 1-2) ~3 min; method and deliverables (3-5) ~5 min; where the instantiation stands (6-7) ~4 min; the structural block (8-12) ~7 min; findings by domain (13-19) ~6 min; v0.0.3 and the decision register (20-24) ~4 min; close (25) ~1 min. Slides 26-28 are the reading guide - point at them, do not present them.</a:t>
+            </a:r>
+          </a:p>
+          <a:p>
+            <a:r>
+              <a:t>If the slot is 20 minutes: slides 1-2, 5, 8-12, the decisions grouping (21), and next steps (25); everything else is handout material.</a:t>
             </a:r>
           </a:p>
         </p:txBody>
@@ -1067,6 +1067,11 @@
               <a:t>Also W2 (weapon/munition not typed) and W3 (no battle-damage / effect-achieved report - TaskStatus says the task ran, not that the target was destroyed). Decision Q-K: engagement authority as a function of autonomy level.</a:t>
             </a:r>
           </a:p>
+          <a:p>
+            <a:r>
+              <a:t>Candidate answer (Q-W): the SME drone-warfare thread's LIRC scenario supplies a concrete model from real doctrine - a weapons-control status (hold/tight/free) plus a kill box, an authorization-bearing area gated by geography, a time window, a civilian-clearance state, and permitted target types. That construct (G14) is what W1 was missing, and it unifies engagement authority (Q-K) with area-as-subject (N1/Q-M).</a:t>
+            </a:r>
+          </a:p>
         </p:txBody>
       </p:sp>
       <p:sp>
@@ -1364,7 +1369,7 @@
           </a:p>
           <a:p>
             <a:r>
-              <a:t>Grounding for the numbers: the counts are the coverage rows in log sec 6 (C1-C8). The re-adopt items were verified against the RDF, not recalled: WhoMeasuredType is in C2SIM's BML lineage; LOX carries 446 TaskActionCode verbs; ROE, routes, resources, and a neutral hostility value (smx#NEUTRL) exist in the base standard.</a:t>
+              <a:t>Grounding for the numbers: the counts are the coverage rows in log sec 6 (C1-C9). The re-adopt items were verified against the RDF, not recalled: WhoMeasuredType is in C2SIM's BML lineage; LOX carries 446 TaskActionCode verbs; ROE, routes, resources, and a neutral hostility value (smx#NEUTRL) exist in the base standard.</a:t>
             </a:r>
           </a:p>
         </p:txBody>
@@ -1519,7 +1524,7 @@
           </a:p>
           <a:p>
             <a:r>
-              <a:t>The full text of all 22 decisions, each with what it resolves, is log sec 7 - present the grouping and point at the log rather than reading the register out.</a:t>
+              <a:t>The full text of all 24 decisions, each with what it resolves, is log sec 7 - present the grouping and point at the log rather than reading the register out.</a:t>
             </a:r>
           </a:p>
         </p:txBody>
@@ -1664,7 +1669,7 @@
           <a:lstStyle/>
           <a:p>
             <a:r>
-              <a:t>Part 3 - decisions raised by the sourced scenarios: exploration goals, denied-comms relay, cross-cueing, the generic detection report, locomotion subtypes, decoy/deception, environment conditions, formation geometry, capability self-report.</a:t>
+              <a:t>Part 3 - decisions raised by the sourced scenarios: exploration goals, denied-comms relay, cross-cueing, the generic detection report, locomotion subtypes, decoy/deception, environment conditions, formation geometry, capability self-report, plus the SME drone-warfare thread - Q-W (weapons-control/kill-box engagement authority, the headline answer to W1) and Q-X (loitering-munition/counter-UAS typing).</a:t>
             </a:r>
           </a:p>
           <a:p>
@@ -1739,7 +1744,7 @@
           <a:lstStyle/>
           <a:p>
             <a:r>
-              <a:t>Section budget: slides 25-26, about 1 minute - the close.</a:t>
+              <a:t>Section budget: slides 24-25, about 1 minute - the close.</a:t>
             </a:r>
           </a:p>
           <a:p>
@@ -1819,7 +1824,7 @@
           </a:p>
           <a:p>
             <a:r>
-              <a:t>Where the ball is: sourcing is essentially complete - every gap this review raised is grounded in a real mission (one nice-to-have left: a dedicated autonomous-CASEVAC mission). The remaining work - the attribute layer, the reconciliation, the 22 decisions - is modeling work; more scenarios will not fill it.</a:t>
+              <a:t>Where the ball is: sourcing is essentially complete - every gap this review raised is grounded in a real mission (one nice-to-have left: a dedicated autonomous-CASEVAC mission). The remaining work - the attribute layer, the reconciliation, the 24 decisions - is modeling work; more scenarios will not fill it.</a:t>
             </a:r>
           </a:p>
         </p:txBody>
@@ -2264,7 +2269,7 @@
           <a:lstStyle/>
           <a:p>
             <a:r>
-              <a:t>Five deliverables: ~29 new message instantiations in diff-able workbooks; a 12-record sourced scenario corpus; a findings log distilled into 22 decisions; a finding-by-finding reconciliation with v0.0.3; and the prior-art discoveries (BML WhoMeasuredType first among them). All proposal-only.</a:t>
+              <a:t>Five deliverables: ~34 new message instantiations in diff-able workbooks; a 15-record sourced scenario corpus; a findings log distilled into 24 decisions; a finding-by-finding reconciliation with v0.0.3; and the prior-art discoveries (BML WhoMeasuredType first among them). All proposal-only.</a:t>
             </a:r>
           </a:p>
           <a:p>
@@ -2344,7 +2349,7 @@
           </a:p>
           <a:p>
             <a:r>
-              <a:t>The baseline was 4 worked instances (2 Reports, 2 Orders, 0 Initialization) - Elizabeth's sample-message workbooks. This review drafted ~29 more, to ~33: Initialization 0 -&gt; 6, Orders 2 -&gt; 14, Reports 2 -&gt; 13. The breadth - not any single message - is what surfaced the to-define items.</a:t>
+              <a:t>The baseline was 4 worked instances (2 Reports, 2 Orders, 0 Initialization) - Elizabeth's sample-message workbooks. This review drafted ~34 more, to ~38: Initialization 0 -&gt; 7, Orders 2 -&gt; 17, Reports 2 -&gt; 14. The breadth - not any single message - is what surfaced the to-define items.</a:t>
             </a:r>
           </a:p>
           <a:p>
@@ -8451,7 +8456,7 @@
                 </a:solidFill>
                 <a:latin typeface="Calibri"/>
               </a:rPr>
-              <a:t>log sec 6 (C1-C8) - each coverage row names the walk doc and tabs behind it</a:t>
+              <a:t>log sec 6 (C1-C9) - each coverage row names the walk doc and tabs behind it</a:t>
             </a:r>
           </a:p>
         </p:txBody>
@@ -9211,8 +9216,8 @@
         </p:nvSpPr>
         <p:spPr>
           <a:xfrm>
-            <a:off x="640080" y="3474720"/>
-            <a:ext cx="10972800" cy="2880360"/>
+            <a:off x="640080" y="3383280"/>
+            <a:ext cx="10972800" cy="2971800"/>
           </a:xfrm>
           <a:prstGeom prst="rect">
             <a:avLst/>
@@ -9230,11 +9235,11 @@
                 <a:spcPts val="200"/>
               </a:spcBef>
               <a:spcAft>
-                <a:spcPts val="1100"/>
+                <a:spcPts val="800"/>
               </a:spcAft>
             </a:pPr>
             <a:r>
-              <a:rPr sz="1450" b="1" i="0">
+              <a:rPr sz="1300" b="1" i="0">
                 <a:solidFill>
                   <a:srgbClr val="2E7D32"/>
                 </a:solidFill>
@@ -9243,7 +9248,7 @@
               <a:t>•  Checked - already exist (not gaps):  </a:t>
             </a:r>
             <a:r>
-              <a:rPr sz="1450" b="0" i="0">
+              <a:rPr sz="1300" b="0" i="0">
                 <a:solidFill>
                   <a:srgbClr val="333333"/>
                 </a:solidFill>
@@ -9258,11 +9263,11 @@
                 <a:spcPts val="200"/>
               </a:spcBef>
               <a:spcAft>
-                <a:spcPts val="1100"/>
+                <a:spcPts val="800"/>
               </a:spcAft>
             </a:pPr>
             <a:r>
-              <a:rPr sz="1450" b="1" i="0">
+              <a:rPr sz="1300" b="1" i="0">
                 <a:solidFill>
                   <a:srgbClr val="C87F0A"/>
                 </a:solidFill>
@@ -9271,7 +9276,7 @@
               <a:t>•  Note:  </a:t>
             </a:r>
             <a:r>
-              <a:rPr sz="1450" b="0" i="0">
+              <a:rPr sz="1300" b="0" i="0">
                 <a:solidFill>
                   <a:srgbClr val="333333"/>
                 </a:solidFill>
@@ -9286,11 +9291,11 @@
                 <a:spcPts val="200"/>
               </a:spcBef>
               <a:spcAft>
-                <a:spcPts val="1100"/>
+                <a:spcPts val="800"/>
               </a:spcAft>
             </a:pPr>
             <a:r>
-              <a:rPr sz="1450" b="1" i="0">
+              <a:rPr sz="1300" b="1" i="0">
                 <a:solidFill>
                   <a:srgbClr val="C87F0A"/>
                 </a:solidFill>
@@ -9299,7 +9304,7 @@
               <a:t>•  Also gaps:  </a:t>
             </a:r>
             <a:r>
-              <a:rPr sz="1450" b="0" i="0">
+              <a:rPr sz="1300" b="0" i="0">
                 <a:solidFill>
                   <a:srgbClr val="333333"/>
                 </a:solidFill>
@@ -9314,11 +9319,11 @@
                 <a:spcPts val="200"/>
               </a:spcBef>
               <a:spcAft>
-                <a:spcPts val="1100"/>
+                <a:spcPts val="800"/>
               </a:spcAft>
             </a:pPr>
             <a:r>
-              <a:rPr sz="1450" b="1" i="0">
+              <a:rPr sz="1300" b="1" i="0">
                 <a:solidFill>
                   <a:srgbClr val="2E869A"/>
                 </a:solidFill>
@@ -9327,13 +9332,41 @@
               <a:t>•  Decision (Q-K):  </a:t>
             </a:r>
             <a:r>
-              <a:rPr sz="1450" b="0" i="0">
+              <a:rPr sz="1300" b="0" i="0">
                 <a:solidFill>
                   <a:srgbClr val="333333"/>
                 </a:solidFill>
                 <a:latin typeface="Calibri"/>
               </a:rPr>
               <a:t>model engagement authority as a function of autonomy level - may this system take this action unsupervised?</a:t>
+            </a:r>
+          </a:p>
+          <a:p>
+            <a:pPr>
+              <a:spcBef>
+                <a:spcPts val="200"/>
+              </a:spcBef>
+              <a:spcAft>
+                <a:spcPts val="800"/>
+              </a:spcAft>
+            </a:pPr>
+            <a:r>
+              <a:rPr sz="1300" b="1" i="0">
+                <a:solidFill>
+                  <a:srgbClr val="2E7D32"/>
+                </a:solidFill>
+                <a:latin typeface="Calibri"/>
+              </a:rPr>
+              <a:t>•  Candidate answer (Q-W):  </a:t>
+            </a:r>
+            <a:r>
+              <a:rPr sz="1300" b="0" i="0">
+                <a:solidFill>
+                  <a:srgbClr val="333333"/>
+                </a:solidFill>
+                <a:latin typeface="Calibri"/>
+              </a:rPr>
+              <a:t>the SME LIRC scenario supplies a concrete model - a weapons-control status + kill-box (an authorization-bearing area: geo + time window + civilian-clearance + target type) that gates autonomous lethal action (G14). Unifies W1 with area-as-subject (N1/Q-M).</a:t>
             </a:r>
           </a:p>
         </p:txBody>
@@ -9376,7 +9409,7 @@
                 </a:solidFill>
                 <a:latin typeface="Calibri"/>
               </a:rPr>
-              <a:t>FireSupport-Walk.md  -  log sec 6e (W1-W3)  -  Fire Support Order + BDA Report tabs</a:t>
+              <a:t>FireSupport-Walk.md + DroneWarfare-LIRC-OPFOR-Walk.md  -  log sec 6e (W1-W3) / 6k (G14, Q-W)  -  Fire Support Order + LIRC Kill-Box Engagement Order tabs</a:t>
             </a:r>
           </a:p>
         </p:txBody>
@@ -10564,7 +10597,7 @@
                 </a:solidFill>
                 <a:latin typeface="Calibri"/>
               </a:rPr>
-              <a:t>ValidationEvidence-Walk.md  -  Documents-Needed/Found.md  -  log sec 6j  -  the 12 records in V2Extractions/</a:t>
+              <a:t>ValidationEvidence-Walk.md  -  Documents-Needed/Found.md  -  log sec 6j  -  the 15 records in V2Extractions/</a:t>
             </a:r>
           </a:p>
         </p:txBody>
@@ -10813,7 +10846,7 @@
                 </a:solidFill>
                 <a:latin typeface="Calibri"/>
               </a:rPr>
-              <a:t>walked 20+ scenarios into ~29 new worked messages (4 -&gt; ~33) using C2SIM + the proposed ASX elements, in diff-able workbooks - Initialization 0 -&gt; 6, Orders 2 -&gt; 14, Reports 2 -&gt; 13.</a:t>
+              <a:t>walked 20+ scenarios into ~34 new worked messages (4 -&gt; ~38) using C2SIM + the proposed ASX elements, in diff-able workbooks - Initialization 0 -&gt; 7, Orders 2 -&gt; 17, Reports 2 -&gt; 14.</a:t>
             </a:r>
           </a:p>
           <a:p>
@@ -10897,7 +10930,7 @@
                 </a:solidFill>
                 <a:latin typeface="Calibri"/>
               </a:rPr>
-              <a:t>22 concrete decisions (Q-A..Q-V, log sec 7) - settle the four structural ones (Q-A..Q-D) first; they unblock Initialization.</a:t>
+              <a:t>24 concrete decisions (Q-A..Q-X, log sec 7) - settle the four structural ones (Q-A..Q-D) first; they unblock Initialization.</a:t>
             </a:r>
           </a:p>
           <a:p>
@@ -11542,7 +11575,7 @@
                 </a:solidFill>
                 <a:latin typeface="Calibri"/>
               </a:rPr>
-              <a:t>Full register - all 22, with what each resolves: log section 7</a:t>
+              <a:t>Full register - all 24, with what each resolves: log section 7</a:t>
             </a:r>
           </a:p>
         </p:txBody>
@@ -12361,7 +12394,7 @@
         </p:nvSpPr>
         <p:spPr>
           <a:xfrm>
-            <a:off x="640080" y="1417320"/>
+            <a:off x="640080" y="1371600"/>
             <a:ext cx="10972800" cy="4754880"/>
           </a:xfrm>
           <a:prstGeom prst="rect">
@@ -12380,11 +12413,11 @@
                 <a:spcPts val="200"/>
               </a:spcBef>
               <a:spcAft>
-                <a:spcPts val="700"/>
+                <a:spcPts val="600"/>
               </a:spcAft>
             </a:pPr>
             <a:r>
-              <a:rPr sz="1300" b="1" i="0">
+              <a:rPr sz="1200" b="1" i="0">
                 <a:solidFill>
                   <a:srgbClr val="2E869A"/>
                 </a:solidFill>
@@ -12393,7 +12426,7 @@
               <a:t>•  Q-N  </a:t>
             </a:r>
             <a:r>
-              <a:rPr sz="1300" b="0" i="0">
+              <a:rPr sz="1200" b="0" i="0">
                 <a:solidFill>
                   <a:srgbClr val="333333"/>
                 </a:solidFill>
@@ -12408,11 +12441,11 @@
                 <a:spcPts val="200"/>
               </a:spcBef>
               <a:spcAft>
-                <a:spcPts val="700"/>
+                <a:spcPts val="600"/>
               </a:spcAft>
             </a:pPr>
             <a:r>
-              <a:rPr sz="1300" b="1" i="0">
+              <a:rPr sz="1200" b="1" i="0">
                 <a:solidFill>
                   <a:srgbClr val="2E869A"/>
                 </a:solidFill>
@@ -12421,7 +12454,7 @@
               <a:t>•  Q-O  </a:t>
             </a:r>
             <a:r>
-              <a:rPr sz="1300" b="0" i="0">
+              <a:rPr sz="1200" b="0" i="0">
                 <a:solidFill>
                   <a:srgbClr val="333333"/>
                 </a:solidFill>
@@ -12436,11 +12469,11 @@
                 <a:spcPts val="200"/>
               </a:spcBef>
               <a:spcAft>
-                <a:spcPts val="700"/>
+                <a:spcPts val="600"/>
               </a:spcAft>
             </a:pPr>
             <a:r>
-              <a:rPr sz="1300" b="1" i="0">
+              <a:rPr sz="1200" b="1" i="0">
                 <a:solidFill>
                   <a:srgbClr val="2E869A"/>
                 </a:solidFill>
@@ -12449,7 +12482,7 @@
               <a:t>•  Q-P  </a:t>
             </a:r>
             <a:r>
-              <a:rPr sz="1300" b="0" i="0">
+              <a:rPr sz="1200" b="0" i="0">
                 <a:solidFill>
                   <a:srgbClr val="333333"/>
                 </a:solidFill>
@@ -12464,11 +12497,11 @@
                 <a:spcPts val="200"/>
               </a:spcBef>
               <a:spcAft>
-                <a:spcPts val="700"/>
+                <a:spcPts val="600"/>
               </a:spcAft>
             </a:pPr>
             <a:r>
-              <a:rPr sz="1300" b="1" i="0">
+              <a:rPr sz="1200" b="1" i="0">
                 <a:solidFill>
                   <a:srgbClr val="2E869A"/>
                 </a:solidFill>
@@ -12477,7 +12510,7 @@
               <a:t>•  Q-Q  </a:t>
             </a:r>
             <a:r>
-              <a:rPr sz="1300" b="0" i="0">
+              <a:rPr sz="1200" b="0" i="0">
                 <a:solidFill>
                   <a:srgbClr val="333333"/>
                 </a:solidFill>
@@ -12492,11 +12525,11 @@
                 <a:spcPts val="200"/>
               </a:spcBef>
               <a:spcAft>
-                <a:spcPts val="700"/>
+                <a:spcPts val="600"/>
               </a:spcAft>
             </a:pPr>
             <a:r>
-              <a:rPr sz="1300" b="1" i="0">
+              <a:rPr sz="1200" b="1" i="0">
                 <a:solidFill>
                   <a:srgbClr val="2E869A"/>
                 </a:solidFill>
@@ -12505,7 +12538,7 @@
               <a:t>•  Q-R  </a:t>
             </a:r>
             <a:r>
-              <a:rPr sz="1300" b="0" i="0">
+              <a:rPr sz="1200" b="0" i="0">
                 <a:solidFill>
                   <a:srgbClr val="333333"/>
                 </a:solidFill>
@@ -12520,11 +12553,11 @@
                 <a:spcPts val="200"/>
               </a:spcBef>
               <a:spcAft>
-                <a:spcPts val="700"/>
+                <a:spcPts val="600"/>
               </a:spcAft>
             </a:pPr>
             <a:r>
-              <a:rPr sz="1300" b="1" i="0">
+              <a:rPr sz="1200" b="1" i="0">
                 <a:solidFill>
                   <a:srgbClr val="2E869A"/>
                 </a:solidFill>
@@ -12533,7 +12566,7 @@
               <a:t>•  Q-S  </a:t>
             </a:r>
             <a:r>
-              <a:rPr sz="1300" b="0" i="0">
+              <a:rPr sz="1200" b="0" i="0">
                 <a:solidFill>
                   <a:srgbClr val="333333"/>
                 </a:solidFill>
@@ -12548,11 +12581,11 @@
                 <a:spcPts val="200"/>
               </a:spcBef>
               <a:spcAft>
-                <a:spcPts val="700"/>
+                <a:spcPts val="600"/>
               </a:spcAft>
             </a:pPr>
             <a:r>
-              <a:rPr sz="1300" b="1" i="0">
+              <a:rPr sz="1200" b="1" i="0">
                 <a:solidFill>
                   <a:srgbClr val="2E869A"/>
                 </a:solidFill>
@@ -12561,7 +12594,7 @@
               <a:t>•  Q-T  </a:t>
             </a:r>
             <a:r>
-              <a:rPr sz="1300" b="0" i="0">
+              <a:rPr sz="1200" b="0" i="0">
                 <a:solidFill>
                   <a:srgbClr val="333333"/>
                 </a:solidFill>
@@ -12576,11 +12609,11 @@
                 <a:spcPts val="200"/>
               </a:spcBef>
               <a:spcAft>
-                <a:spcPts val="700"/>
+                <a:spcPts val="600"/>
               </a:spcAft>
             </a:pPr>
             <a:r>
-              <a:rPr sz="1300" b="1" i="0">
+              <a:rPr sz="1200" b="1" i="0">
                 <a:solidFill>
                   <a:srgbClr val="2E869A"/>
                 </a:solidFill>
@@ -12589,7 +12622,7 @@
               <a:t>•  Q-U  </a:t>
             </a:r>
             <a:r>
-              <a:rPr sz="1300" b="0" i="0">
+              <a:rPr sz="1200" b="0" i="0">
                 <a:solidFill>
                   <a:srgbClr val="333333"/>
                 </a:solidFill>
@@ -12604,11 +12637,11 @@
                 <a:spcPts val="200"/>
               </a:spcBef>
               <a:spcAft>
-                <a:spcPts val="700"/>
+                <a:spcPts val="600"/>
               </a:spcAft>
             </a:pPr>
             <a:r>
-              <a:rPr sz="1300" b="1" i="0">
+              <a:rPr sz="1200" b="1" i="0">
                 <a:solidFill>
                   <a:srgbClr val="2E869A"/>
                 </a:solidFill>
@@ -12617,13 +12650,69 @@
               <a:t>•  Q-V  </a:t>
             </a:r>
             <a:r>
-              <a:rPr sz="1300" b="0" i="0">
+              <a:rPr sz="1200" b="0" i="0">
                 <a:solidFill>
                   <a:srgbClr val="333333"/>
                 </a:solidFill>
                 <a:latin typeface="Calibri"/>
               </a:rPr>
               <a:t>Capability self-report (robot declares mounted equipment; assign by capability) - BML WhoHoldingType.</a:t>
+            </a:r>
+          </a:p>
+          <a:p>
+            <a:pPr>
+              <a:spcBef>
+                <a:spcPts val="200"/>
+              </a:spcBef>
+              <a:spcAft>
+                <a:spcPts val="600"/>
+              </a:spcAft>
+            </a:pPr>
+            <a:r>
+              <a:rPr sz="1200" b="1" i="0">
+                <a:solidFill>
+                  <a:srgbClr val="2E869A"/>
+                </a:solidFill>
+                <a:latin typeface="Calibri"/>
+              </a:rPr>
+              <a:t>•  Q-W  </a:t>
+            </a:r>
+            <a:r>
+              <a:rPr sz="1200" b="0" i="0">
+                <a:solidFill>
+                  <a:srgbClr val="333333"/>
+                </a:solidFill>
+                <a:latin typeface="Calibri"/>
+              </a:rPr>
+              <a:t>Weapons-control-status + kill-box authorization area gating autonomous lethal action - unifies Q-K + Q-M (the drone-warfare headline, G14).</a:t>
+            </a:r>
+          </a:p>
+          <a:p>
+            <a:pPr>
+              <a:spcBef>
+                <a:spcPts val="200"/>
+              </a:spcBef>
+              <a:spcAft>
+                <a:spcPts val="600"/>
+              </a:spcAft>
+            </a:pPr>
+            <a:r>
+              <a:rPr sz="1200" b="1" i="0">
+                <a:solidFill>
+                  <a:srgbClr val="2E869A"/>
+                </a:solidFill>
+                <a:latin typeface="Calibri"/>
+              </a:rPr>
+              <a:t>•  Q-X  </a:t>
+            </a:r>
+            <a:r>
+              <a:rPr sz="1200" b="0" i="0">
+                <a:solidFill>
+                  <a:srgbClr val="333333"/>
+                </a:solidFill>
+                <a:latin typeface="Calibri"/>
+              </a:rPr>
+              <a:t>Loitering-munition/FPV platform-munition typing + counter-UAS (detect-&gt;defeat over existing air-defense verbs) + EW-vulnerability annotation.</a:t>
             </a:r>
           </a:p>
         </p:txBody>
@@ -12928,7 +13017,7 @@
                 </a:solidFill>
                 <a:latin typeface="Calibri"/>
               </a:rPr>
-              <a:t>inline entity def (Q-E), MediaReference (Q-F), robot-to-robot + cross-cue (Q-G/Q-P), rationale report (Q-H), generic detection report (Q-I/Q-Q), swarm residuals (Q-J), engagement authority (Q-K), payload/effector/weapon typing (Q-L), area subject (Q-M), explore order (Q-N), denied-comms/relay (Q-O), locomotion subtypes (Q-R), decoy/threat-aware (Q-S), environment conditions (Q-T), formation geometry (Q-U).</a:t>
+              <a:t>inline entity def (Q-E), MediaReference (Q-F), robot-to-robot + cross-cue (Q-G/Q-P), rationale report (Q-H), generic detection report (Q-I/Q-Q), swarm residuals (Q-J), engagement authority (Q-K), payload/effector/weapon typing (Q-L), area subject (Q-M), explore order (Q-N), denied-comms/relay (Q-O), locomotion subtypes (Q-R), decoy/threat-aware (Q-S), environment conditions (Q-T), formation geometry (Q-U), weapons-control/kill-box authority (Q-W), loitering-munition + counter-UAS typing (Q-X).</a:t>
             </a:r>
           </a:p>
           <a:p>
@@ -13666,7 +13755,7 @@
                           </a:solidFill>
                           <a:latin typeface="Calibri"/>
                         </a:rPr>
-                        <a:t>what this is, what was found, the ~22 decisions, where the ball is</a:t>
+                        <a:t>what this is, what was found, the ~24 decisions, where the ball is</a:t>
                       </a:r>
                     </a:p>
                   </a:txBody>
@@ -14470,7 +14559,7 @@
                           </a:solidFill>
                           <a:latin typeface="Calibri"/>
                         </a:rPr>
-                        <a:t>C1 - C8</a:t>
+                        <a:t>C1 - C9</a:t>
                       </a:r>
                     </a:p>
                   </a:txBody>
@@ -14832,7 +14921,7 @@
                           </a:solidFill>
                           <a:latin typeface="Calibri"/>
                         </a:rPr>
-                        <a:t>sourced-scenario + validation findings</a:t>
+                        <a:t>sourced-scenario + validation + drone-warfare findings</a:t>
                       </a:r>
                     </a:p>
                   </a:txBody>
@@ -14854,7 +14943,7 @@
                           </a:solidFill>
                           <a:latin typeface="Calibri"/>
                         </a:rPr>
-                        <a:t>log secs 6h-6j; SourcedScenarios- / ValidationEvidence-Walk.md</a:t>
+                        <a:t>log secs 6h-6k; SourcedScenarios- / ValidationEvidence- / DroneWarfare-LIRC-OPFOR-Walk.md</a:t>
                       </a:r>
                     </a:p>
                   </a:txBody>
@@ -14878,7 +14967,7 @@
                           </a:solidFill>
                           <a:latin typeface="Calibri"/>
                         </a:rPr>
-                        <a:t>Q-A .. Q-V</a:t>
+                        <a:t>Q-A .. Q-X</a:t>
                       </a:r>
                     </a:p>
                   </a:txBody>
@@ -14900,7 +14989,7 @@
                           </a:solidFill>
                           <a:latin typeface="Calibri"/>
                         </a:rPr>
-                        <a:t>the 22 decisions this review puts to the group</a:t>
+                        <a:t>the 24 decisions this review puts to the group</a:t>
                       </a:r>
                     </a:p>
                   </a:txBody>
@@ -15223,7 +15312,7 @@
                 </a:solidFill>
                 <a:latin typeface="Calibri"/>
               </a:rPr>
-              <a:t>Issues-And-Comments-Log.md - every finding, the 22 decisions (sec 7), v0.0.3 reconciliation (sec 9), why gaps remain (sec 8).</a:t>
+              <a:t>Issues-And-Comments-Log.md - every finding, the 24 decisions (sec 7), v0.0.3 reconciliation (sec 9), why gaps remain (sec 8).</a:t>
             </a:r>
           </a:p>
           <a:p>
@@ -15279,7 +15368,7 @@
                 </a:solidFill>
                 <a:latin typeface="Calibri"/>
               </a:rPr>
-              <a:t>Message-Instantiation-Coverage.md; the three 'ASX Sample *.xml' workbooks (the ~33 instantiations, diff-able).</a:t>
+              <a:t>Message-Instantiation-Coverage.md; the three 'ASX Sample *.xml' workbooks (the ~38 instantiations, diff-able).</a:t>
             </a:r>
           </a:p>
           <a:p>
@@ -15410,7 +15499,7 @@
                 </a:solidFill>
                 <a:latin typeface="Calibri"/>
               </a:rPr>
-              <a:t>•  Sourced &amp; validation missions:  </a:t>
+              <a:t>•  Sourced, validation &amp; drone-warfare missions:  </a:t>
             </a:r>
             <a:r>
               <a:rPr sz="1200" b="0" i="0">
@@ -15419,7 +15508,7 @@
                 </a:solidFill>
                 <a:latin typeface="Calibri"/>
               </a:rPr>
-              <a:t>SourcedScenarios-Walk.md; ValidationEvidence-Walk.md; Documents-Found.md; log sec 6h / 6j.</a:t>
+              <a:t>SourcedScenarios-Walk.md; ValidationEvidence-Walk.md; DroneWarfare-LIRC-OPFOR-Walk.md; Documents-Found.md; log sec 6h / 6j / 6k.</a:t>
             </a:r>
           </a:p>
           <a:p>
@@ -16048,7 +16137,7 @@
                 <a:latin typeface="Calibri"/>
               </a:rPr>
               <a:t>2  -  Scenario extraction
-A locked v2.2 prompt distills each document into a standardized scenario record (12 records)</a:t>
+A locked v2.2 prompt distills each document into a standardized scenario record (15 records)</a:t>
             </a:r>
           </a:p>
         </p:txBody>
@@ -16576,7 +16665,7 @@
                 </a:solidFill>
                 <a:latin typeface="Calibri"/>
               </a:rPr>
-              <a:t>~29 new worked messages (4 -&gt; ~33; Initialization 0 -&gt; 6) in diff-able .xml workbooks - one tab per message, with open items flagged [!]/[Q] in the Notes column, keyed to log IDs.</a:t>
+              <a:t>~34 new worked messages (4 -&gt; ~38; Initialization 0 -&gt; 7) in diff-able .xml workbooks - one tab per message, with open items flagged [!]/[Q] in the Notes column, keyed to log IDs.</a:t>
             </a:r>
           </a:p>
           <a:p>
@@ -16604,7 +16693,7 @@
                 </a:solidFill>
                 <a:latin typeface="Calibri"/>
               </a:rPr>
-              <a:t>12 standardized extraction records from real missions (subterranean, maritime MCM, sustainment, explainability, CBRN, EW, persistence, counter-UAS, MUM-T, SAR, formation, breach) + the source PDFs - every gap this review raised is grounded in a documented mission.</a:t>
+              <a:t>15 standardized extraction records from real missions (subterranean, maritime MCM, sustainment, explainability, CBRN, EW, persistence, counter-UAS, MUM-T, SAR, formation, breach, + the SME drone-warfare thread: LIRC baseline / update / OPFOR targeting) + the source PDFs - every gap this review raised is grounded in a documented mission.</a:t>
             </a:r>
           </a:p>
           <a:p>
@@ -16632,7 +16721,7 @@
                 </a:solidFill>
                 <a:latin typeface="Calibri"/>
               </a:rPr>
-              <a:t>a consolidated issues log (severity / status / RDF-verified evidence per finding) distilled into 22 concrete decisions for the group (Q-A..Q-V).</a:t>
+              <a:t>a consolidated issues log (severity / status / RDF-verified evidence per finding) distilled into 24 concrete decisions for the group (Q-A..Q-X).</a:t>
             </a:r>
           </a:p>
           <a:p>
@@ -16929,7 +17018,7 @@
                 </a:solidFill>
                 <a:latin typeface="Calibri"/>
               </a:rPr>
-              <a:t>From 4 worked messages to ~33 - this review is the bulk of that</a:t>
+              <a:t>From 4 worked messages to ~38 - this review is the bulk of that</a:t>
             </a:r>
           </a:p>
         </p:txBody>
@@ -16971,7 +17060,7 @@
                 </a:solidFill>
                 <a:latin typeface="Calibri"/>
               </a:rPr>
-              <a:t>•  Start: 4 worked instances (2 Reports, 2 Orders, 0 Initialization) - Elizabeth's baseline. This review drafted ~29 more, to ~33 across Init / Order / Report (on the branch, pending group review).</a:t>
+              <a:t>•  Start: 4 worked instances (2 Reports, 2 Orders, 0 Initialization) - Elizabeth's baseline. This review drafted ~34 more, to ~38 across Init / Order / Report (on the branch, pending group review).</a:t>
             </a:r>
           </a:p>
           <a:p>
@@ -16990,7 +17079,7 @@
                 </a:solidFill>
                 <a:latin typeface="Calibri"/>
               </a:rPr>
-              <a:t>–  Initialization   0 -&gt; 6   (the 3 named scenarios + CASEVAC / MCM / SubT) - was the least-developed; now seeded.</a:t>
+              <a:t>–  Initialization   0 -&gt; 7   (the 3 named scenarios + CASEVAC / MCM / SubT / LIRC) - was the least-developed; now seeded.</a:t>
             </a:r>
           </a:p>
           <a:p>
@@ -17009,7 +17098,7 @@
                 </a:solidFill>
                 <a:latin typeface="Calibri"/>
               </a:rPr>
-              <a:t>–  Orders   2 -&gt; 14   (CASEVAC, swarm, fire support, logistics / engineering / rescue, route clearance, MCM, explore, resupply, MUM-T).</a:t>
+              <a:t>–  Orders   2 -&gt; 17   (CASEVAC, swarm, fire support, logistics / engineering / rescue, route clearance, MCM, explore, resupply, MUM-T, kill-box engagement, counter-UAS, OPFOR targeting).</a:t>
             </a:r>
           </a:p>
           <a:p>
@@ -17028,7 +17117,7 @@
                 </a:solidFill>
                 <a:latin typeface="Calibri"/>
               </a:rPr>
-              <a:t>–  Reports   2 -&gt; 13   (swarm, CASEVAC status / explainable, CBRN / EW / GPR, BDA, delivery, naval mine, generic detection, hazard area).</a:t>
+              <a:t>–  Reports   2 -&gt; 14   (swarm, CASEVAC status / explainable, CBRN / EW / GPR, BDA, delivery, naval mine, generic detection, hazard area, LIRC strike BDA).</a:t>
             </a:r>
           </a:p>
           <a:p>
@@ -17109,7 +17198,7 @@
                 </a:solidFill>
                 <a:latin typeface="Calibri"/>
               </a:rPr>
-              <a:t>Message-Instantiation-Coverage.md (the pre-walk baseline)  -  log sec 6 rows C1-C8 (current state)  -  the three ASX Sample *.xml workbooks (the messages themselves)</a:t>
+              <a:t>Message-Instantiation-Coverage.md (the pre-walk baseline)  -  log sec 6 rows C1-C9 (current state)  -  the three ASX Sample *.xml workbooks (the messages themselves)</a:t>
             </a:r>
           </a:p>
         </p:txBody>
@@ -17307,7 +17396,7 @@
                 </a:solidFill>
                 <a:latin typeface="Calibri"/>
               </a:rPr>
-              <a:t>20+ scenarios walked into ~33 message instances - Init / Order / Report</a:t>
+              <a:t>20+ scenarios walked into ~38 message instances - Init / Order / Report</a:t>
             </a:r>
           </a:p>
         </p:txBody>
@@ -17525,7 +17614,7 @@
                 </a:solidFill>
                 <a:latin typeface="Calibri"/>
               </a:rPr>
-              <a:t>one walk doc per scenario family (see final slide)  -  the 12 sourced records: LLMExperiments/PaperSummaries/V2Extractions/</a:t>
+              <a:t>one walk doc per scenario family (see final slide)  -  the 15 sourced records: LLMExperiments/PaperSummaries/V2Extractions/</a:t>
             </a:r>
           </a:p>
         </p:txBody>

--- a/Subgroups/ASX/InstantiationReview/ASX-Instantiation-Findings.pptx
+++ b/Subgroups/ASX/InstantiationReview/ASX-Instantiation-Findings.pptx
@@ -28,11 +28,6 @@
     <p:sldId id="276" r:id="rId28"/>
     <p:sldId id="277" r:id="rId29"/>
     <p:sldId id="278" r:id="rId30"/>
-    <p:sldId id="279" r:id="rId31"/>
-    <p:sldId id="280" r:id="rId32"/>
-    <p:sldId id="281" r:id="rId33"/>
-    <p:sldId id="282" r:id="rId34"/>
-    <p:sldId id="283" r:id="rId35"/>
   </p:sldIdLst>
   <p:sldSz cx="12191695" cy="6858000" type="screen4x3"/>
   <p:notesSz cx="6858000" cy="9144000"/>
@@ -534,12 +529,12 @@
           </a:p>
           <a:p>
             <a:r>
-              <a:t>Time plan for a 30-minute slot: opening (slides 1-2) ~3 min; method and deliverables (3-5) ~5 min; where the instantiation stands (6-7) ~4 min; the structural block (8-12) ~7 min; findings by domain (13-19) ~6 min; v0.0.3 and the decision register (20-24) ~4 min; close (25) ~1 min. Slides 26-28 are the reading guide - point at them, do not present them.</a:t>
-            </a:r>
-          </a:p>
-          <a:p>
-            <a:r>
-              <a:t>If the slot is 20 minutes: slides 1-2, 5, 8-12, the decisions grouping (21), and next steps (25); everything else is handout material.</a:t>
+              <a:t>Time plan for a 30-minute slot: opening (slides 1-2) ~3 min; how it was produced + deliverables (3-4) ~4 min; where the instantiation stands (5-6) ~4 min; model state + the structural block (7-11) ~7 min; findings by theme (12-15) ~6 min; the decision register (16-19) ~4 min; close (20) ~1 min. Slides 21-23 are the reading guide - point at them, do not present them.</a:t>
+            </a:r>
+          </a:p>
+          <a:p>
+            <a:r>
+              <a:t>If the slot is 20 minutes: slides 1-2, 4, 7-11, the decisions grouping (16), and next steps (20); everything else is handout material.</a:t>
             </a:r>
           </a:p>
         </p:txBody>
@@ -609,12 +604,12 @@
           <a:lstStyle/>
           <a:p>
             <a:r>
-              <a:t>The proposed Robot class tree runs parallel to the existing SMX Platform tree, both under ActorEntity - two incompatible types for the same real drone. Type it as Robot and it loses the Platform machinery; type it as Aircraft or Vehicle and the ASX classes go unused.</a:t>
-            </a:r>
-          </a:p>
-          <a:p>
-            <a:r>
-              <a:t>v0.0.3 declares both trees, so the choice is now concretely in the model to settle. Decision Q-A proposes autonomy as a role/facet on the existing Platform subtree.</a:t>
+              <a:t>The sensor has no agreed representation: an OWL Sensor class, a SensorType enum, and SensorCapability as associated equipment - three incompatible models of the same physical device (D2).</a:t>
+            </a:r>
+          </a:p>
+          <a:p>
+            <a:r>
+              <a:t>Initialization is what forces the choice: an Init message must declare what a platform carries, so it has to pick one representation; the Report side only consumes sensor output (log P2). The same carried-equipment pattern returns in weapon / manipulator / cargo typing (W2/E2/L1 -&gt; Q-L) and in non-imaging sensor reports (Y1 -&gt; Q-I/Q-Q). Decision Q-C: pick one model and apply it everywhere.</a:t>
             </a:r>
           </a:p>
         </p:txBody>
@@ -759,12 +754,17 @@
           <a:lstStyle/>
           <a:p>
             <a:r>
-              <a:t>The concrete reconciliation list: three autonomy vocabularies, three sensor models, and the attribute layer (Payload, Mobility, VehicleType, ...) that exists in the spreadsheets but not yet in the OWL.</a:t>
-            </a:r>
-          </a:p>
-          <a:p>
-            <a:r>
-              <a:t>Why so much is still to define: the v0.0.1 baseline is 15 classes, 1 object property, 0 datatype properties - a taxonomy of things; the layer that says what you actually send had not been built yet. v0.0.3 begins it (datatype properties for the Video Detection Report). Most gaps are simply not-yet-built - which is why writing messages surfaces them. Decisions Q-C / Q-D: pick one normative sensor model and one autonomy vocabulary, express the rest as derived.</a:t>
+              <a:t>Section budget: slides 12-15, about 6 minutes - one beat per theme: re-adopt, missing content types, missing typing, missing authority. Each slide's Dig deeper line names the walk docs and log sections with the full detail.</a:t>
+            </a:r>
+          </a:p>
+          <a:p>
+            <a:r>
+              <a:t>Open the findings block with the good news, aggregated: the measurement report flagged as missing already exists in C2SIM's own BML lineage (WhoMeasuredType); LOX already carries 446 task verbs; effects, targets, ROE, resources, routes, phased planning, and position reporting all exist; membership and command relations exist; a neutral hostility value exists (smx#NEUTRL; an untyped NeutralSide individual too); and the capability-declaration pattern exists (WhoHoldingType). All verified in the RDF, not recalled.</a:t>
+            </a:r>
+          </a:p>
+          <a:p>
+            <a:r>
+              <a:t>The framing to land: the gap list is shorter than it looks - a large share of the 24 decisions is re-adopt / where-to-hang, not invent.</a:t>
             </a:r>
           </a:p>
         </p:txBody>
@@ -834,12 +834,12 @@
           <a:lstStyle/>
           <a:p>
             <a:r>
-              <a:t>Section budget: slides 13-19, about 6 minutes - one beat per domain; each slide's Dig deeper line names the walk doc and log section with the full detail.</a:t>
-            </a:r>
-          </a:p>
-          <a:p>
-            <a:r>
-              <a:t>M-series: small instantiation-level items - inline entity definition for observed entities (M1), media format vs sensor modality (M5), a UUIDBase/TimeInstant copy-paste slip (M7), and two typos still in v0.0.3 (CollecticeRoboticSystem, Extrension). All cheapest to fix before messages are built on them.</a:t>
+              <a:t>The content-type gaps, each named by every scenario that hit it rather than by the scenario that happened to surface it first. The generic detection report carries the most evidence - five sensor modalities converge on it. The rationale report and robot-to-robot coordination each carry two independent sources (CASEVAC plus a documented mission).</a:t>
+            </a:r>
+          </a:p>
+          <a:p>
+            <a:r>
+              <a:t>Also from MUM-T: collective-task decomposition and report aggregation (Z1 -&gt; Q-J). The CASEVAC end-to-end story itself is on slides 5-6 and in CASEVAC-Walk.md - here it appears as two evidence citations (X1, X2).</a:t>
             </a:r>
           </a:p>
         </p:txBody>
@@ -909,12 +909,12 @@
           <a:lstStyle/>
           <a:p>
             <a:r>
-              <a:t>The coverage map: what was still to instantiate, and what this review drafted for each row. Initialization had 0 of 3 named scenarios instantiated - now drafted. Non-video sensors show the media-based report model does not generalize (Y1/Y5). The task/effect gap is mainly payload/effector/weapon typing - the verbs already exist. The redundancy pass confirmed ~80% overlap but still yielded N1 (an area as the subject of a task/report).</a:t>
-            </a:r>
-          </a:p>
-          <a:p>
-            <a:r>
-              <a:t>Each row on this slide resolves to a C-row in log sec 6, which names the walk doc and the workbook tabs behind it.</a:t>
+              <a:t>The typing gaps share one pattern: the model can name the action (the verbs exist) but not the thing - what is carried or wielded (Q-L), what a hybrid platform-munition is (Q-X), what subtype of platform (Q-R), or an area as the object of tasking (Q-M). Environment and formation attributes (Q-T/Q-U) round it out.</a:t>
+            </a:r>
+          </a:p>
+          <a:p>
+            <a:r>
+              <a:t>This slide is the counterpart of the re-adopt slide: the verbs and order machinery exist; the typed nouns do not. The validation pass also supplied a concrete schema here: an area map with per-cell value + variance (Q-M/Q-Q).</a:t>
             </a:r>
           </a:p>
         </p:txBody>
@@ -984,12 +984,17 @@
           <a:lstStyle/>
           <a:p>
             <a:r>
-              <a:t>The flagship contributed scenario, walked end to end. Two gaps have no element at all: X1 - no content type for one robot to hand a verified safe route to another (envelope addressing exists; the content does not); X2 - systems can report WHAT (TaskStatus) but not WHY a route changed or a mission failed. Decisions Q-G / Q-H.</a:t>
-            </a:r>
-          </a:p>
-          <a:p>
-            <a:r>
-              <a:t>Also checked, and not gaps: Route, phased planning (PlanBody/PlanPhase), and position reporting already exist in the base standard.</a:t>
+              <a:t>The authority block: W1 is the safety-critical gap - the standard cannot express who authorized an engagement, or whether a FullAuto system may act unsupervised. AuthorizationHeader was checked: it is message-sender authentication, not command authorization of fires - so who-approved-the-engagement is part of the gap, not covered.</a:t>
+            </a:r>
+          </a:p>
+          <a:p>
+            <a:r>
+              <a:t>The answer came from doctrine, not invention: the SME drone-warfare thread's LIRC scenario supplies a weapons-control status (hold/tight/free) plus the kill box - an authorization-bearing area gated by geography, a time window, a civilian-clearance state, and permitted target types (G14 -&gt; Q-W). It unifies engagement authority (Q-K) with area-as-subject (Q-M).</a:t>
+            </a:r>
+          </a:p>
+          <a:p>
+            <a:r>
+              <a:t>Around it: on-the-loop supervision verbs (configure / suspend / acknowledge / override), the denied-comms operating mode + relay entity, and the decoy / threat-aware annotations.</a:t>
             </a:r>
           </a:p>
         </p:txBody>
@@ -1059,17 +1064,17 @@
           <a:lstStyle/>
           <a:p>
             <a:r>
-              <a:t>W1: the standard can express WHAT effect and WHICH ROE, but not WHO authorized an engagement, nor whether a FullAuto system may take a lethal action without a human in or on the loop. AuthorizationHeader was checked: it is message-sender authentication, not command authorization of fires - so who-approved-the-engagement is part of the gap.</a:t>
-            </a:r>
-          </a:p>
-          <a:p>
-            <a:r>
-              <a:t>Also W2 (weapon/munition not typed) and W3 (no battle-damage / effect-achieved report - TaskStatus says the task ran, not that the target was destroyed). Decision Q-K: engagement authority as a function of autonomy level.</a:t>
-            </a:r>
-          </a:p>
-          <a:p>
-            <a:r>
-              <a:t>Candidate answer (Q-W): the SME drone-warfare thread's LIRC scenario supplies a concrete model from real doctrine - a weapons-control status (hold/tight/free) plus a kill box, an authorization-bearing area gated by geography, a time window, a civilian-clearance state, and permitted target types. That construct (G14) is what W1 was missing, and it unifies engagement authority (Q-K) with area-as-subject (N1/Q-M).</a:t>
+              <a:t>Section budget: slides 16-19, about 4 minutes; the decision slides are presented as a grouping, not read row by row.</a:t>
+            </a:r>
+          </a:p>
+          <a:p>
+            <a:r>
+              <a:t>The ask, part 1 - structure: Q-A UAV/robot typing, Q-B a taskable swarm, Q-C one sensor model, Q-D one autonomy vocabulary. These four settle the shape of the model and unblock Initialization.</a:t>
+            </a:r>
+          </a:p>
+          <a:p>
+            <a:r>
+              <a:t>The full text of all 24 decisions, each with what it resolves, is log sec 7 - present the grouping and point at the log rather than reading the register out.</a:t>
             </a:r>
           </a:p>
         </p:txBody>
@@ -1139,12 +1144,12 @@
           <a:lstStyle/>
           <a:p>
             <a:r>
-              <a:t>The counterweight slide of the domain block: LOX already carries 446 task verbs (ENGAGE, BREACH, RESUPL, RESCUE, ...), plus effects, targets, resources, and ROE - all verified in the RDF. The task/effect work is not invent-verbs.</a:t>
-            </a:r>
-          </a:p>
-          <a:p>
-            <a:r>
-              <a:t>The real gap is one pattern: nothing typed for what a platform carries or wields - cargo (L1), manipulator (E2), weapon (W2) are the same missing piece. Decision Q-L. Small residuals: area as task subject (N1/Q-M), area-coverage goal (G2), a general tow/salvage verb, a decoy role.</a:t>
+              <a:t>Part 2 - new content types, mostly report and order payloads: inline entity definition, media identity, robot-to-robot coordination, rationale reports, media-independent sensor readings, swarm residuals, engagement authority, payload/effector/weapon typing, area as subject.</a:t>
+            </a:r>
+          </a:p>
+          <a:p>
+            <a:r>
+              <a:t>Each of these traces back to a walk finding on an earlier slide - the CASEVAC pair (Q-G, Q-H) and the sensor pair (Q-I with Q-Q) carry the most scenario evidence.</a:t>
             </a:r>
           </a:p>
         </p:txBody>
@@ -1214,12 +1219,12 @@
           <a:lstStyle/>
           <a:p>
             <a:r>
-              <a:t>The parallel sourcing effort grounded this review's gaps in real missions and added its own findings (the G-series). Best contribution: one generic Detection Report (confidence + error bound + false positive) that subsumes the video / CBRN / EW / GPR / naval-mine reports - it resolves Y1 and folds into Q-I / Q-Q.</a:t>
-            </a:r>
-          </a:p>
-          <a:p>
-            <a:r>
-              <a:t>New gaps from fresh domains: area-coverage goal, denied-comms mode + relay entity, decoy role, maritime cross-cueing with a shared track, environment conditions, formation geometry. Several re-use existing verbs (search verbs, lox#COMREL) - the gap is the surrounding structure, not the vocabulary.</a:t>
+              <a:t>Part 3 - decisions raised by the sourced scenarios: exploration goals, denied-comms relay, cross-cueing, the generic detection report, locomotion subtypes, decoy/deception, environment conditions, formation geometry, capability self-report, plus the SME drone-warfare thread - Q-W (weapons-control/kill-box engagement authority, the headline answer to W1) and Q-X (loitering-munition/counter-UAS typing).</a:t>
+            </a:r>
+          </a:p>
+          <a:p>
+            <a:r>
+              <a:t>Several of these re-adopt existing vocabulary (search verbs, lox#COMREL, BML WhoHoldingType) rather than invent - the decision is where to hang the structure, not whether the words exist.</a:t>
             </a:r>
           </a:p>
         </p:txBody>
@@ -1289,12 +1294,17 @@
           <a:lstStyle/>
           <a:p>
             <a:r>
-              <a:t>The validation holes are now evidenced: explainability (DroneResponse), CBRN, EW geolocation, and persistence (MDARS) are each grounded in a documented mission rather than asserted.</a:t>
-            </a:r>
-          </a:p>
-          <a:p>
-            <a:r>
-              <a:t>The headline discovery is prior art: WhoMeasuredType, in C2SIM's own BML lineage, already defines the measurement report this review flagged as missing - value, unit, phenomenon, sensor, time, place. Re-adopt rather than invent (Q-Q).</a:t>
+              <a:t>Section budget: slides 19-20, about 1 minute - the close.</a:t>
+            </a:r>
+          </a:p>
+          <a:p>
+            <a:r>
+              <a:t>The same decisions, grouped by commitment level: safe corrections (typos, the UUIDBase slip) are unambiguous; structural decisions need the group; content types need design. Nothing has been applied to the model or the workbooks - all items are proposals pending buy-in.</a:t>
+            </a:r>
+          </a:p>
+          <a:p>
+            <a:r>
+              <a:t>The M-series instantiation items fold in here and into the decisions: the typos and the UUIDBase slip (M7) are safe corrections; M1 and M2/M5 resolve via Q-E and Q-F. All cheapest to fix before messages are built on them.</a:t>
             </a:r>
           </a:p>
         </p:txBody>
@@ -1364,7 +1374,7 @@
           <a:lstStyle/>
           <a:p>
             <a:r>
-              <a:t>The one-slide version of the talk. If discussion takes over later, this slide plus the decision register (slides 21-23) is the minimum to land.</a:t>
+              <a:t>The one-slide version of the talk. If discussion takes over later, this slide plus the decision register (slides 16-18) is the minimum to land.</a:t>
             </a:r>
           </a:p>
           <a:p>
@@ -1439,17 +1449,12 @@
           <a:lstStyle/>
           <a:p>
             <a:r>
-              <a:t>Section budget: slides 20-24, about 4 minutes; the decision slides are presented as a grouping, not read row by row.</a:t>
-            </a:r>
-          </a:p>
-          <a:p>
-            <a:r>
-              <a:t>v0.0.3 moves the model: first datatype properties, the Video Detection Report folded into the OWL, an AutonomyLevelCode model. It also brings P1 to a head by declaring both trees - the group still picks one.</a:t>
-            </a:r>
-          </a:p>
-          <a:p>
-            <a:r>
-              <a:t>Coordination notes worth a deliberate decision: the branch adds owl:imports smx/lox to base C2SIM.rdf (a circular import C2SIM &lt;-&gt; smx), and AutonomyLevelCode is not yet wired as the range of hasAutonomousRoleCode. The full finding-by-finding reconciliation is log sec 9.</a:t>
+              <a:t>The recommended order: settle Q-A / Q-B first (they unblock Initialization), complete the Initialization instantiations, add the two CASEVAC content types, reconcile the two tracks and fix the typos, and optionally adopt the diff-able workbooks so message edits can be reviewed in git.</a:t>
+            </a:r>
+          </a:p>
+          <a:p>
+            <a:r>
+              <a:t>Where the ball is: sourcing is essentially complete - every gap this review raised is grounded in a real mission (one nice-to-have left: a dedicated autonomous-CASEVAC mission). The remaining work - the attribute layer, the reconciliation, the 24 decisions - is modeling work; more scenarios will not fill it.</a:t>
             </a:r>
           </a:p>
         </p:txBody>
@@ -1519,12 +1524,12 @@
           <a:lstStyle/>
           <a:p>
             <a:r>
-              <a:t>The ask, part 1 - structure: Q-A UAV/robot typing, Q-B a taskable swarm, Q-C one sensor model, Q-D one autonomy vocabulary. These four settle the shape of the model and unblock Initialization.</a:t>
-            </a:r>
-          </a:p>
-          <a:p>
-            <a:r>
-              <a:t>The full text of all 24 decisions, each with what it resolves, is log sec 7 - present the grouping and point at the log rather than reading the register out.</a:t>
+              <a:t>Reading paths by time budget. The 5-minute path (Group-Briefing.md) is the default pointer for anyone who missed the meeting; the half-day path is for reviewers who want to challenge the evidence.</a:t>
+            </a:r>
+          </a:p>
+          <a:p>
+            <a:r>
+              <a:t>Every ID on these slides resolves to exactly one log row - the decoder ring on the next slide maps each family.</a:t>
             </a:r>
           </a:p>
         </p:txBody>
@@ -1594,12 +1599,12 @@
           <a:lstStyle/>
           <a:p>
             <a:r>
-              <a:t>Part 2 - new content types, mostly report and order payloads: inline entity definition, media identity, robot-to-robot coordination, rationale reports, media-independent sensor readings, swarm residuals, engagement authority, payload/effector/weapon typing, area as subject.</a:t>
-            </a:r>
-          </a:p>
-          <a:p>
-            <a:r>
-              <a:t>Each of these traces back to a walk finding on an earlier slide - the CASEVAC pair (Q-G, Q-H) and the sensor pair (Q-I with Q-Q) carry the most scenario evidence.</a:t>
+              <a:t>Every ID family, what it names, and where it resolves. An unfamiliar ID in any document is a pointer, not jargon - each one lands on a definition, its evidence, and its current status.</a:t>
+            </a:r>
+          </a:p>
+          <a:p>
+            <a:r>
+              <a:t>This slide plus the next one are the handout scaffolding: leave them with the group.</a:t>
             </a:r>
           </a:p>
         </p:txBody>
@@ -1669,381 +1674,6 @@
           <a:lstStyle/>
           <a:p>
             <a:r>
-              <a:t>Part 3 - decisions raised by the sourced scenarios: exploration goals, denied-comms relay, cross-cueing, the generic detection report, locomotion subtypes, decoy/deception, environment conditions, formation geometry, capability self-report, plus the SME drone-warfare thread - Q-W (weapons-control/kill-box engagement authority, the headline answer to W1) and Q-X (loitering-munition/counter-UAS typing).</a:t>
-            </a:r>
-          </a:p>
-          <a:p>
-            <a:r>
-              <a:t>Several of these re-adopt existing vocabulary (search verbs, lox#COMREL, BML WhoHoldingType) rather than invent - the decision is where to hang the structure, not whether the words exist.</a:t>
-            </a:r>
-          </a:p>
-        </p:txBody>
-      </p:sp>
-      <p:sp>
-        <p:nvSpPr>
-          <p:cNvPr id="4" name="Slide Number Placeholder 3"/>
-          <p:cNvSpPr>
-            <a:spLocks noGrp="1"/>
-          </p:cNvSpPr>
-          <p:nvPr>
-            <p:ph type="sldNum" idx="5" sz="quarter"/>
-          </p:nvPr>
-        </p:nvSpPr>
-        <p:spPr/>
-      </p:sp>
-    </p:spTree>
-  </p:cSld>
-  <p:clrMapOvr>
-    <a:masterClrMapping/>
-  </p:clrMapOvr>
-</p:notes>
-</file>
-
-<file path=ppt/notesSlides/notesSlide24.xml><?xml version="1.0" encoding="utf-8"?>
-<p:notes xmlns:a="http://schemas.openxmlformats.org/drawingml/2006/main" xmlns:p="http://schemas.openxmlformats.org/presentationml/2006/main" xmlns:r="http://schemas.openxmlformats.org/officeDocument/2006/relationships">
-  <p:cSld>
-    <p:spTree>
-      <p:nvGrpSpPr>
-        <p:cNvPr id="1" name=""/>
-        <p:cNvGrpSpPr/>
-        <p:nvPr/>
-      </p:nvGrpSpPr>
-      <p:grpSpPr>
-        <a:xfrm>
-          <a:off x="0" y="0"/>
-          <a:ext cx="0" cy="0"/>
-          <a:chOff x="0" y="0"/>
-          <a:chExt cx="0" cy="0"/>
-        </a:xfrm>
-      </p:grpSpPr>
-      <p:sp>
-        <p:nvSpPr>
-          <p:cNvPr id="2" name="Slide Image Placeholder 1"/>
-          <p:cNvSpPr>
-            <a:spLocks noGrp="1"/>
-          </p:cNvSpPr>
-          <p:nvPr>
-            <p:ph type="sldImg" idx="2"/>
-          </p:nvPr>
-        </p:nvSpPr>
-        <p:spPr/>
-      </p:sp>
-      <p:sp>
-        <p:nvSpPr>
-          <p:cNvPr id="3" name="Notes Placeholder 2"/>
-          <p:cNvSpPr>
-            <a:spLocks noGrp="1"/>
-          </p:cNvSpPr>
-          <p:nvPr>
-            <p:ph type="body" idx="3" sz="quarter"/>
-          </p:nvPr>
-        </p:nvSpPr>
-        <p:spPr/>
-        <p:txBody>
-          <a:bodyPr/>
-          <a:lstStyle/>
-          <a:p>
-            <a:r>
-              <a:t>Section budget: slides 24-25, about 1 minute - the close.</a:t>
-            </a:r>
-          </a:p>
-          <a:p>
-            <a:r>
-              <a:t>The same decisions, grouped by commitment level: safe corrections (typos, the UUIDBase slip) are unambiguous; structural decisions need the group; content types need design. Nothing has been applied to the model or the workbooks - all items are proposals pending buy-in.</a:t>
-            </a:r>
-          </a:p>
-        </p:txBody>
-      </p:sp>
-      <p:sp>
-        <p:nvSpPr>
-          <p:cNvPr id="4" name="Slide Number Placeholder 3"/>
-          <p:cNvSpPr>
-            <a:spLocks noGrp="1"/>
-          </p:cNvSpPr>
-          <p:nvPr>
-            <p:ph type="sldNum" idx="5" sz="quarter"/>
-          </p:nvPr>
-        </p:nvSpPr>
-        <p:spPr/>
-      </p:sp>
-    </p:spTree>
-  </p:cSld>
-  <p:clrMapOvr>
-    <a:masterClrMapping/>
-  </p:clrMapOvr>
-</p:notes>
-</file>
-
-<file path=ppt/notesSlides/notesSlide25.xml><?xml version="1.0" encoding="utf-8"?>
-<p:notes xmlns:a="http://schemas.openxmlformats.org/drawingml/2006/main" xmlns:p="http://schemas.openxmlformats.org/presentationml/2006/main" xmlns:r="http://schemas.openxmlformats.org/officeDocument/2006/relationships">
-  <p:cSld>
-    <p:spTree>
-      <p:nvGrpSpPr>
-        <p:cNvPr id="1" name=""/>
-        <p:cNvGrpSpPr/>
-        <p:nvPr/>
-      </p:nvGrpSpPr>
-      <p:grpSpPr>
-        <a:xfrm>
-          <a:off x="0" y="0"/>
-          <a:ext cx="0" cy="0"/>
-          <a:chOff x="0" y="0"/>
-          <a:chExt cx="0" cy="0"/>
-        </a:xfrm>
-      </p:grpSpPr>
-      <p:sp>
-        <p:nvSpPr>
-          <p:cNvPr id="2" name="Slide Image Placeholder 1"/>
-          <p:cNvSpPr>
-            <a:spLocks noGrp="1"/>
-          </p:cNvSpPr>
-          <p:nvPr>
-            <p:ph type="sldImg" idx="2"/>
-          </p:nvPr>
-        </p:nvSpPr>
-        <p:spPr/>
-      </p:sp>
-      <p:sp>
-        <p:nvSpPr>
-          <p:cNvPr id="3" name="Notes Placeholder 2"/>
-          <p:cNvSpPr>
-            <a:spLocks noGrp="1"/>
-          </p:cNvSpPr>
-          <p:nvPr>
-            <p:ph type="body" idx="3" sz="quarter"/>
-          </p:nvPr>
-        </p:nvSpPr>
-        <p:spPr/>
-        <p:txBody>
-          <a:bodyPr/>
-          <a:lstStyle/>
-          <a:p>
-            <a:r>
-              <a:t>The recommended order: settle Q-A / Q-B first (they unblock Initialization), complete the Initialization instantiations, add the two CASEVAC content types, reconcile the two tracks and fix the typos, and optionally adopt the diff-able workbooks so message edits can be reviewed in git.</a:t>
-            </a:r>
-          </a:p>
-          <a:p>
-            <a:r>
-              <a:t>Where the ball is: sourcing is essentially complete - every gap this review raised is grounded in a real mission (one nice-to-have left: a dedicated autonomous-CASEVAC mission). The remaining work - the attribute layer, the reconciliation, the 24 decisions - is modeling work; more scenarios will not fill it.</a:t>
-            </a:r>
-          </a:p>
-        </p:txBody>
-      </p:sp>
-      <p:sp>
-        <p:nvSpPr>
-          <p:cNvPr id="4" name="Slide Number Placeholder 3"/>
-          <p:cNvSpPr>
-            <a:spLocks noGrp="1"/>
-          </p:cNvSpPr>
-          <p:nvPr>
-            <p:ph type="sldNum" idx="5" sz="quarter"/>
-          </p:nvPr>
-        </p:nvSpPr>
-        <p:spPr/>
-      </p:sp>
-    </p:spTree>
-  </p:cSld>
-  <p:clrMapOvr>
-    <a:masterClrMapping/>
-  </p:clrMapOvr>
-</p:notes>
-</file>
-
-<file path=ppt/notesSlides/notesSlide26.xml><?xml version="1.0" encoding="utf-8"?>
-<p:notes xmlns:a="http://schemas.openxmlformats.org/drawingml/2006/main" xmlns:p="http://schemas.openxmlformats.org/presentationml/2006/main" xmlns:r="http://schemas.openxmlformats.org/officeDocument/2006/relationships">
-  <p:cSld>
-    <p:spTree>
-      <p:nvGrpSpPr>
-        <p:cNvPr id="1" name=""/>
-        <p:cNvGrpSpPr/>
-        <p:nvPr/>
-      </p:nvGrpSpPr>
-      <p:grpSpPr>
-        <a:xfrm>
-          <a:off x="0" y="0"/>
-          <a:ext cx="0" cy="0"/>
-          <a:chOff x="0" y="0"/>
-          <a:chExt cx="0" cy="0"/>
-        </a:xfrm>
-      </p:grpSpPr>
-      <p:sp>
-        <p:nvSpPr>
-          <p:cNvPr id="2" name="Slide Image Placeholder 1"/>
-          <p:cNvSpPr>
-            <a:spLocks noGrp="1"/>
-          </p:cNvSpPr>
-          <p:nvPr>
-            <p:ph type="sldImg" idx="2"/>
-          </p:nvPr>
-        </p:nvSpPr>
-        <p:spPr/>
-      </p:sp>
-      <p:sp>
-        <p:nvSpPr>
-          <p:cNvPr id="3" name="Notes Placeholder 2"/>
-          <p:cNvSpPr>
-            <a:spLocks noGrp="1"/>
-          </p:cNvSpPr>
-          <p:nvPr>
-            <p:ph type="body" idx="3" sz="quarter"/>
-          </p:nvPr>
-        </p:nvSpPr>
-        <p:spPr/>
-        <p:txBody>
-          <a:bodyPr/>
-          <a:lstStyle/>
-          <a:p>
-            <a:r>
-              <a:t>Reading paths by time budget. The 5-minute path (Group-Briefing.md) is the default pointer for anyone who missed the meeting; the half-day path is for reviewers who want to challenge the evidence.</a:t>
-            </a:r>
-          </a:p>
-          <a:p>
-            <a:r>
-              <a:t>Every ID on these slides resolves to exactly one log row - the decoder ring on the next slide maps each family.</a:t>
-            </a:r>
-          </a:p>
-        </p:txBody>
-      </p:sp>
-      <p:sp>
-        <p:nvSpPr>
-          <p:cNvPr id="4" name="Slide Number Placeholder 3"/>
-          <p:cNvSpPr>
-            <a:spLocks noGrp="1"/>
-          </p:cNvSpPr>
-          <p:nvPr>
-            <p:ph type="sldNum" idx="5" sz="quarter"/>
-          </p:nvPr>
-        </p:nvSpPr>
-        <p:spPr/>
-      </p:sp>
-    </p:spTree>
-  </p:cSld>
-  <p:clrMapOvr>
-    <a:masterClrMapping/>
-  </p:clrMapOvr>
-</p:notes>
-</file>
-
-<file path=ppt/notesSlides/notesSlide27.xml><?xml version="1.0" encoding="utf-8"?>
-<p:notes xmlns:a="http://schemas.openxmlformats.org/drawingml/2006/main" xmlns:p="http://schemas.openxmlformats.org/presentationml/2006/main" xmlns:r="http://schemas.openxmlformats.org/officeDocument/2006/relationships">
-  <p:cSld>
-    <p:spTree>
-      <p:nvGrpSpPr>
-        <p:cNvPr id="1" name=""/>
-        <p:cNvGrpSpPr/>
-        <p:nvPr/>
-      </p:nvGrpSpPr>
-      <p:grpSpPr>
-        <a:xfrm>
-          <a:off x="0" y="0"/>
-          <a:ext cx="0" cy="0"/>
-          <a:chOff x="0" y="0"/>
-          <a:chExt cx="0" cy="0"/>
-        </a:xfrm>
-      </p:grpSpPr>
-      <p:sp>
-        <p:nvSpPr>
-          <p:cNvPr id="2" name="Slide Image Placeholder 1"/>
-          <p:cNvSpPr>
-            <a:spLocks noGrp="1"/>
-          </p:cNvSpPr>
-          <p:nvPr>
-            <p:ph type="sldImg" idx="2"/>
-          </p:nvPr>
-        </p:nvSpPr>
-        <p:spPr/>
-      </p:sp>
-      <p:sp>
-        <p:nvSpPr>
-          <p:cNvPr id="3" name="Notes Placeholder 2"/>
-          <p:cNvSpPr>
-            <a:spLocks noGrp="1"/>
-          </p:cNvSpPr>
-          <p:nvPr>
-            <p:ph type="body" idx="3" sz="quarter"/>
-          </p:nvPr>
-        </p:nvSpPr>
-        <p:spPr/>
-        <p:txBody>
-          <a:bodyPr/>
-          <a:lstStyle/>
-          <a:p>
-            <a:r>
-              <a:t>Every ID family, what it names, and where it resolves. An unfamiliar ID in any document is a pointer, not jargon - each one lands on a definition, its evidence, and its current status.</a:t>
-            </a:r>
-          </a:p>
-          <a:p>
-            <a:r>
-              <a:t>This slide plus the next one are the handout scaffolding: leave them with the group.</a:t>
-            </a:r>
-          </a:p>
-        </p:txBody>
-      </p:sp>
-      <p:sp>
-        <p:nvSpPr>
-          <p:cNvPr id="4" name="Slide Number Placeholder 3"/>
-          <p:cNvSpPr>
-            <a:spLocks noGrp="1"/>
-          </p:cNvSpPr>
-          <p:nvPr>
-            <p:ph type="sldNum" idx="5" sz="quarter"/>
-          </p:nvPr>
-        </p:nvSpPr>
-        <p:spPr/>
-      </p:sp>
-    </p:spTree>
-  </p:cSld>
-  <p:clrMapOvr>
-    <a:masterClrMapping/>
-  </p:clrMapOvr>
-</p:notes>
-</file>
-
-<file path=ppt/notesSlides/notesSlide28.xml><?xml version="1.0" encoding="utf-8"?>
-<p:notes xmlns:a="http://schemas.openxmlformats.org/drawingml/2006/main" xmlns:p="http://schemas.openxmlformats.org/presentationml/2006/main" xmlns:r="http://schemas.openxmlformats.org/officeDocument/2006/relationships">
-  <p:cSld>
-    <p:spTree>
-      <p:nvGrpSpPr>
-        <p:cNvPr id="1" name=""/>
-        <p:cNvGrpSpPr/>
-        <p:nvPr/>
-      </p:nvGrpSpPr>
-      <p:grpSpPr>
-        <a:xfrm>
-          <a:off x="0" y="0"/>
-          <a:ext cx="0" cy="0"/>
-          <a:chOff x="0" y="0"/>
-          <a:chExt cx="0" cy="0"/>
-        </a:xfrm>
-      </p:grpSpPr>
-      <p:sp>
-        <p:nvSpPr>
-          <p:cNvPr id="2" name="Slide Image Placeholder 1"/>
-          <p:cNvSpPr>
-            <a:spLocks noGrp="1"/>
-          </p:cNvSpPr>
-          <p:nvPr>
-            <p:ph type="sldImg" idx="2"/>
-          </p:nvPr>
-        </p:nvSpPr>
-        <p:spPr/>
-      </p:sp>
-      <p:sp>
-        <p:nvSpPr>
-          <p:cNvPr id="3" name="Notes Placeholder 2"/>
-          <p:cNvSpPr>
-            <a:spLocks noGrp="1"/>
-          </p:cNvSpPr>
-          <p:nvPr>
-            <p:ph type="body" idx="3" sz="quarter"/>
-          </p:nvPr>
-        </p:nvSpPr>
-        <p:spPr/>
-        <p:txBody>
-          <a:bodyPr/>
-          <a:lstStyle/>
-          <a:p>
-            <a:r>
               <a:t>The topic-to-doc map. Everything is on branch asx-diffable-spreadsheets: review docs in Subgroups/ASX/InstantiationReview, workbooks in Subgroups/ASX/Proposed Extension Working Materials. The .md files render directly on GitHub - switch branch and browse; no tooling needed.</a:t>
             </a:r>
           </a:p>
@@ -2114,17 +1744,22 @@
           <a:lstStyle/>
           <a:p>
             <a:r>
-              <a:t>Section budget: slides 3-5, about 5 minutes.</a:t>
-            </a:r>
-          </a:p>
-          <a:p>
-            <a:r>
-              <a:t>The method in one sentence: write the messages each scenario actually needs; where an element is not yet defined enough to instantiate cleanly, that marks a concrete thing to specify next - not a defect. The model is early (v0.0.x) and the message layer is still being built; instantiation is how those instances get built and how the to-define list surfaces.</a:t>
-            </a:r>
-          </a:p>
-          <a:p>
-            <a:r>
-              <a:t>Scope note: the sample-message workbooks were converted to a diff-able .xml format so instantiations can be reviewed in git; the original .xlsx are untouched.</a:t>
+              <a:t>Section budget: slides 3-4, about 4 minutes.</a:t>
+            </a:r>
+          </a:p>
+          <a:p>
+            <a:r>
+              <a:t>The method in one sentence (the dedicated method slide was dropped as familiar ground): write the messages each scenario actually needs; where an element is not yet defined enough to instantiate cleanly, that marks a concrete thing to specify next - not a defect. Scope note: the sample-message workbooks were converted to a diff-able .xml format so instantiations can be reviewed in git; the original .xlsx are untouched.</a:t>
+            </a:r>
+          </a:p>
+          <a:p>
+            <a:r>
+              <a:t>Three coordinated sessions plus an independent check: document mining hunts primary mission documents; scenario extraction distills each into a standardized record with the locked v2.2 prompt; ontology application walks each scenario into concrete messages against the proposed elements. The verification pass then re-checked every RDF-grounded claim, the workbook fidelity, and the citations, with corrections logged (issues log change log, 2026-07-12).</a:t>
+            </a:r>
+          </a:p>
+          <a:p>
+            <a:r>
+              <a:t>The stages iterate: the walk writes the sourcing brief (Documents-Needed), mining answers it (Documents-Found), extraction feeds the walk. Nothing rests on an LLM's memory - every claim is grounded in the RDF, the workbooks, or a named source, and was independently re-verified.</a:t>
             </a:r>
           </a:p>
         </p:txBody>
@@ -2194,12 +1829,12 @@
           <a:lstStyle/>
           <a:p>
             <a:r>
-              <a:t>Three coordinated sessions plus an independent check: document mining hunts primary mission documents; scenario extraction distills each into a standardized record with the locked v2.2 prompt; ontology application walks each scenario into concrete messages against the proposed elements. The verification pass then re-checked every RDF-grounded claim, the workbook fidelity, and the citations, with corrections logged (issues log change log, 2026-07-12).</a:t>
-            </a:r>
-          </a:p>
-          <a:p>
-            <a:r>
-              <a:t>The stages iterate: the walk writes the sourcing brief (Documents-Needed), mining answers it (Documents-Found), extraction feeds the walk. Nothing rests on an LLM's memory - every claim is grounded in the RDF, the workbooks, or a named source, and was independently re-verified.</a:t>
+              <a:t>Five deliverables: ~34 new message instantiations in diff-able workbooks; a 15-record sourced scenario corpus; a findings log distilled into 24 decisions; a finding-by-finding reconciliation with v0.0.3; and the prior-art discoveries (BML WhoMeasuredType first among them). All proposal-only.</a:t>
+            </a:r>
+          </a:p>
+          <a:p>
+            <a:r>
+              <a:t>This slide frames the rest of the talk: each later section shows where one of these deliverables came from.</a:t>
             </a:r>
           </a:p>
         </p:txBody>
@@ -2269,12 +1904,17 @@
           <a:lstStyle/>
           <a:p>
             <a:r>
-              <a:t>Five deliverables: ~34 new message instantiations in diff-able workbooks; a 15-record sourced scenario corpus; a findings log distilled into 24 decisions; a finding-by-finding reconciliation with v0.0.3; and the prior-art discoveries (BML WhoMeasuredType first among them). All proposal-only.</a:t>
-            </a:r>
-          </a:p>
-          <a:p>
-            <a:r>
-              <a:t>This slide frames the rest of the talk: each later section shows where one of these deliverables came from.</a:t>
+              <a:t>Section budget: slides 5-6, about 4 minutes.</a:t>
+            </a:r>
+          </a:p>
+          <a:p>
+            <a:r>
+              <a:t>The baseline was 4 worked instances (2 Reports, 2 Orders, 0 Initialization) - Elizabeth's sample-message workbooks. This review drafted ~34 more, to ~38: Initialization 0 -&gt; 7, Orders 2 -&gt; 17, Reports 2 -&gt; 14. The breadth - not any single message - is what surfaced the to-define items.</a:t>
+            </a:r>
+          </a:p>
+          <a:p>
+            <a:r>
+              <a:t>CASEVAC, the one contributed (human-authored) scenario, had no messages; it is now walked end to end: Init -&gt; tasking Order -&gt; robot-to-robot hand-off -&gt; status / threat / explainable Reports.</a:t>
             </a:r>
           </a:p>
         </p:txBody>
@@ -2344,17 +1984,17 @@
           <a:lstStyle/>
           <a:p>
             <a:r>
-              <a:t>Section budget: slides 6-7, about 4 minutes.</a:t>
-            </a:r>
-          </a:p>
-          <a:p>
-            <a:r>
-              <a:t>The baseline was 4 worked instances (2 Reports, 2 Orders, 0 Initialization) - Elizabeth's sample-message workbooks. This review drafted ~34 more, to ~38: Initialization 0 -&gt; 7, Orders 2 -&gt; 17, Reports 2 -&gt; 14. The breadth - not any single message - is what surfaced the to-define items.</a:t>
-            </a:r>
-          </a:p>
-          <a:p>
-            <a:r>
-              <a:t>CASEVAC, the one contributed (human-authored) scenario, had no messages; it is now walked end to end: Init -&gt; tasking Order -&gt; robot-to-robot hand-off -&gt; status / threat / explainable Reports.</a:t>
+              <a:t>Four groups: named + contributed scenarios instantiated end to end; capability stress-tests (non-video sensors, swarm, task/effect); missions sourced from real documents by the parallel sourcing effort (Cooperative MCM, SubT, sustainment, plus nine documented missions that closed the validation holes); and a redundancy screen that still yielded one new finding (N1).</a:t>
+            </a:r>
+          </a:p>
+          <a:p>
+            <a:r>
+              <a:t>The pedigree line matters: every gap the findings slides raise is grounded in a documented mission - the 15 sourced extraction records - and the validation pass turned the asserted-but-untested holes (explainability via DroneResponse, CBRN, EW geolocation, persistence via MDARS) into evidenced ones.</a:t>
+            </a:r>
+          </a:p>
+          <a:p>
+            <a:r>
+              <a:t>Provenance, stated precisely: the MUTT-derived scenarios are LLM-generated; CASEVAC is human-authored; the sourced missions come from real papers - two carry fidelity caveats (EW and the robotic breach), noted in their extraction records.</a:t>
             </a:r>
           </a:p>
         </p:txBody>
@@ -2424,12 +2064,17 @@
           <a:lstStyle/>
           <a:p>
             <a:r>
-              <a:t>Four groups: named + contributed scenarios instantiated end to end; capability stress-tests (non-video sensors, swarm, task/effect); missions sourced from real documents by the parallel sourcing effort (Cooperative MCM, SubT, sustainment, plus nine documented missions that closed the validation holes); and a redundancy screen that still yielded one new finding (N1).</a:t>
-            </a:r>
-          </a:p>
-          <a:p>
-            <a:r>
-              <a:t>Provenance, stated precisely: the MUTT-derived scenarios are LLM-generated; CASEVAC is human-authored; the sourced missions come from real papers - two carry fidelity caveats (EW and the robotic breach), noted in their extraction records.</a:t>
+              <a:t>Section budget: slides 7-11, about 7 minutes - the core of the talk.</a:t>
+            </a:r>
+          </a:p>
+          <a:p>
+            <a:r>
+              <a:t>The outlook in one line: the OWL (v0.0.1, January) and the spreadsheets (June) evolved separately, so several findings look like drift rather than gaps; v0.0.3 (July) shows the model moving - first datatype properties (v0.0.1 had none), the Video Detection Report folded into the OWL, an AutonomyLevelCode model - and brings P1 concretely into the model by declaring both typing trees.</a:t>
+            </a:r>
+          </a:p>
+          <a:p>
+            <a:r>
+              <a:t>The catch-up list is short and known: the attribute layer, one autonomy vocabulary (three today), one sensor model (three today - that is P2, next section), and two wiring items (the hasAutonomousRoleCode range, the circular owl:imports). Everything else v0.0.3 still lacks - taskable collective, generic Detection Report, rationale / robot-to-robot / area content, the two typos - appears on its own slide later. Full finding-by-finding reconciliation: log sec 9.</a:t>
             </a:r>
           </a:p>
         </p:txBody>
@@ -2499,12 +2144,12 @@
           <a:lstStyle/>
           <a:p>
             <a:r>
-              <a:t>Section budget: slides 8-12, about 7 minutes - the core of the talk.</a:t>
-            </a:r>
-          </a:p>
-          <a:p>
-            <a:r>
-              <a:t>Why several findings look like drift rather than gaps: the OWL model (last updated January) and the spreadsheets (updated June) evolved separately, so autonomy and sensors are each currently described three different ways. Reconciling the two tracks is one of the first decisions. Worth establishing early - it explains a lot of the later slides.</a:t>
+              <a:t>The three foundational decisions, all entity-typing: P1 - a UAV/UGV is typed two incompatible ways (ASX Robot tree vs SMX Platform tree); P2 - a sensor has no agreed representation (class vs enum vs equipment); P7 - a swarm is not yet taskable as modeled.</a:t>
+            </a:r>
+          </a:p>
+          <a:p>
+            <a:r>
+              <a:t>The point to land: because all three are typing decisions, Initialization - not Reports - is where the model has to be settled first. The next three slides take P1, P2, and P7 one at a time.</a:t>
             </a:r>
           </a:p>
         </p:txBody>
@@ -2574,12 +2219,12 @@
           <a:lstStyle/>
           <a:p>
             <a:r>
-              <a:t>The three foundational decisions, all entity-typing: P1 - a UAV/UGV is typed two incompatible ways (ASX Robot tree vs SMX Platform tree); P2 - a sensor has no agreed representation (class vs enum vs equipment); P7 - a swarm is not yet taskable as modeled.</a:t>
-            </a:r>
-          </a:p>
-          <a:p>
-            <a:r>
-              <a:t>The point to land: because all three are typing decisions, Initialization - not Reports - is where the model has to be settled first. The next two slides take P1 and P7 one at a time.</a:t>
+              <a:t>The proposed Robot class tree runs parallel to the existing SMX Platform tree, both under ActorEntity - two incompatible types for the same real drone. Type it as Robot and it loses the Platform machinery; type it as Aircraft or Vehicle and the ASX classes go unused.</a:t>
+            </a:r>
+          </a:p>
+          <a:p>
+            <a:r>
+              <a:t>v0.0.3 declares both trees, so the choice is now concretely in the model to settle (note: its maritime classes sit under Vehicle rather than SurfaceVessel/SubsurfaceVessel). Decision Q-A proposes autonomy as a role/facet on the existing Platform subtree.</a:t>
             </a:r>
           </a:p>
         </p:txBody>
@@ -5897,7 +5542,7 @@
                 </a:solidFill>
                 <a:latin typeface="Calibri"/>
               </a:rPr>
-              <a:t>P1  -  A UAV is typed twice</a:t>
+              <a:t>P2  -  A sensor is modeled three ways</a:t>
             </a:r>
           </a:p>
         </p:txBody>
@@ -5931,7 +5576,7 @@
                 </a:solidFill>
                 <a:latin typeface="Calibri"/>
               </a:rPr>
-              <a:t>Entity-typing decision</a:t>
+              <a:t>Representation decision</a:t>
             </a:r>
           </a:p>
         </p:txBody>
@@ -5944,8 +5589,8 @@
         </p:nvSpPr>
         <p:spPr>
           <a:xfrm>
-            <a:off x="4754880" y="1554480"/>
-            <a:ext cx="2743200" cy="685800"/>
+            <a:off x="4023360" y="1554480"/>
+            <a:ext cx="4114800" cy="685800"/>
           </a:xfrm>
           <a:prstGeom prst="roundRect">
             <a:avLst/>
@@ -5977,13 +5622,14 @@
           <a:p>
             <a:pPr algn="ctr"/>
             <a:r>
-              <a:rPr sz="1400" b="1" i="0">
+              <a:rPr sz="1200" b="1" i="0">
                 <a:solidFill>
                   <a:srgbClr val="FFFFFF"/>
                 </a:solidFill>
                 <a:latin typeface="Calibri"/>
               </a:rPr>
-              <a:t>ActorEntity</a:t>
+              <a:t>the same physical sensor
+(EO camera, CBRN sniffer, GPR)</a:t>
             </a:r>
           </a:p>
         </p:txBody>
@@ -5996,112 +5642,8 @@
         </p:nvSpPr>
         <p:spPr>
           <a:xfrm>
-            <a:off x="2194560" y="2743200"/>
-            <a:ext cx="2743200" cy="685800"/>
-          </a:xfrm>
-          <a:prstGeom prst="roundRect">
-            <a:avLst/>
-          </a:prstGeom>
-          <a:solidFill>
-            <a:srgbClr val="2E869A"/>
-          </a:solidFill>
-          <a:ln>
-            <a:noFill/>
-          </a:ln>
-        </p:spPr>
-        <p:style>
-          <a:lnRef idx="1">
-            <a:schemeClr val="accent1"/>
-          </a:lnRef>
-          <a:fillRef idx="3">
-            <a:schemeClr val="accent1"/>
-          </a:fillRef>
-          <a:effectRef idx="2">
-            <a:schemeClr val="accent1"/>
-          </a:effectRef>
-          <a:fontRef idx="minor">
-            <a:schemeClr val="lt1"/>
-          </a:fontRef>
-        </p:style>
-        <p:txBody>
-          <a:bodyPr rtlCol="0" anchor="ctr" wrap="square"/>
-          <a:lstStyle/>
-          <a:p>
-            <a:pPr algn="ctr"/>
-            <a:r>
-              <a:rPr sz="1300" b="1" i="0">
-                <a:solidFill>
-                  <a:srgbClr val="FFFFFF"/>
-                </a:solidFill>
-                <a:latin typeface="Calibri"/>
-              </a:rPr>
-              <a:t>Platform  (SMX)</a:t>
-            </a:r>
-          </a:p>
-        </p:txBody>
-      </p:sp>
-      <p:sp>
-        <p:nvSpPr>
-          <p:cNvPr id="7" name="Rounded Rectangle 6"/>
-          <p:cNvSpPr/>
-          <p:nvPr/>
-        </p:nvSpPr>
-        <p:spPr>
-          <a:xfrm>
-            <a:off x="2194560" y="3840480"/>
-            <a:ext cx="2743200" cy="685800"/>
-          </a:xfrm>
-          <a:prstGeom prst="roundRect">
-            <a:avLst/>
-          </a:prstGeom>
-          <a:solidFill>
-            <a:srgbClr val="2E869A"/>
-          </a:solidFill>
-          <a:ln>
-            <a:noFill/>
-          </a:ln>
-        </p:spPr>
-        <p:style>
-          <a:lnRef idx="1">
-            <a:schemeClr val="accent1"/>
-          </a:lnRef>
-          <a:fillRef idx="3">
-            <a:schemeClr val="accent1"/>
-          </a:fillRef>
-          <a:effectRef idx="2">
-            <a:schemeClr val="accent1"/>
-          </a:effectRef>
-          <a:fontRef idx="minor">
-            <a:schemeClr val="lt1"/>
-          </a:fontRef>
-        </p:style>
-        <p:txBody>
-          <a:bodyPr rtlCol="0" anchor="ctr" wrap="square"/>
-          <a:lstStyle/>
-          <a:p>
-            <a:pPr algn="ctr"/>
-            <a:r>
-              <a:rPr sz="1300" b="1" i="0">
-                <a:solidFill>
-                  <a:srgbClr val="FFFFFF"/>
-                </a:solidFill>
-                <a:latin typeface="Calibri"/>
-              </a:rPr>
-              <a:t>Aircraft  (SMX)</a:t>
-            </a:r>
-          </a:p>
-        </p:txBody>
-      </p:sp>
-      <p:sp>
-        <p:nvSpPr>
-          <p:cNvPr id="8" name="Rounded Rectangle 7"/>
-          <p:cNvSpPr/>
-          <p:nvPr/>
-        </p:nvSpPr>
-        <p:spPr>
-          <a:xfrm>
-            <a:off x="7315200" y="2743200"/>
-            <a:ext cx="2743200" cy="685800"/>
+            <a:off x="822960" y="3017520"/>
+            <a:ext cx="3291840" cy="777240"/>
           </a:xfrm>
           <a:prstGeom prst="roundRect">
             <a:avLst/>
@@ -6139,21 +5681,22 @@
                 </a:solidFill>
                 <a:latin typeface="Calibri"/>
               </a:rPr>
-              <a:t>Robot  (ASX)</a:t>
-            </a:r>
-          </a:p>
-        </p:txBody>
-      </p:sp>
-      <p:sp>
-        <p:nvSpPr>
-          <p:cNvPr id="9" name="Rounded Rectangle 8"/>
+              <a:t>Sensor class
+(OWL)</a:t>
+            </a:r>
+          </a:p>
+        </p:txBody>
+      </p:sp>
+      <p:sp>
+        <p:nvSpPr>
+          <p:cNvPr id="7" name="Rounded Rectangle 6"/>
           <p:cNvSpPr/>
           <p:nvPr/>
         </p:nvSpPr>
         <p:spPr>
           <a:xfrm>
-            <a:off x="7315200" y="3840480"/>
-            <a:ext cx="2743200" cy="685800"/>
+            <a:off x="4434840" y="3017520"/>
+            <a:ext cx="3291840" cy="777240"/>
           </a:xfrm>
           <a:prstGeom prst="roundRect">
             <a:avLst/>
@@ -6191,11 +5734,100 @@
                 </a:solidFill>
                 <a:latin typeface="Calibri"/>
               </a:rPr>
-              <a:t>UAV  (ASX)</a:t>
-            </a:r>
-          </a:p>
-        </p:txBody>
-      </p:sp>
+              <a:t>SensorType enum
+(Concept Mapping)</a:t>
+            </a:r>
+          </a:p>
+        </p:txBody>
+      </p:sp>
+      <p:sp>
+        <p:nvSpPr>
+          <p:cNvPr id="8" name="Rounded Rectangle 7"/>
+          <p:cNvSpPr/>
+          <p:nvPr/>
+        </p:nvSpPr>
+        <p:spPr>
+          <a:xfrm>
+            <a:off x="8046720" y="3017520"/>
+            <a:ext cx="3291840" cy="777240"/>
+          </a:xfrm>
+          <a:prstGeom prst="roundRect">
+            <a:avLst/>
+          </a:prstGeom>
+          <a:solidFill>
+            <a:srgbClr val="C87F0A"/>
+          </a:solidFill>
+          <a:ln>
+            <a:noFill/>
+          </a:ln>
+        </p:spPr>
+        <p:style>
+          <a:lnRef idx="1">
+            <a:schemeClr val="accent1"/>
+          </a:lnRef>
+          <a:fillRef idx="3">
+            <a:schemeClr val="accent1"/>
+          </a:fillRef>
+          <a:effectRef idx="2">
+            <a:schemeClr val="accent1"/>
+          </a:effectRef>
+          <a:fontRef idx="minor">
+            <a:schemeClr val="lt1"/>
+          </a:fontRef>
+        </p:style>
+        <p:txBody>
+          <a:bodyPr rtlCol="0" anchor="ctr" wrap="square"/>
+          <a:lstStyle/>
+          <a:p>
+            <a:pPr algn="ctr"/>
+            <a:r>
+              <a:rPr sz="1200" b="1" i="0">
+                <a:solidFill>
+                  <a:srgbClr val="FFFFFF"/>
+                </a:solidFill>
+                <a:latin typeface="Calibri"/>
+              </a:rPr>
+              <a:t>SensorCapability as equipment
+(Concept Mapping)</a:t>
+            </a:r>
+          </a:p>
+        </p:txBody>
+      </p:sp>
+      <p:cxnSp>
+        <p:nvCxnSpPr>
+          <p:cNvPr id="9" name="Connector 8"/>
+          <p:cNvCxnSpPr/>
+          <p:nvPr/>
+        </p:nvCxnSpPr>
+        <p:spPr>
+          <a:xfrm flipH="1">
+            <a:off x="2468880" y="2240280"/>
+            <a:ext cx="2651760" cy="777240"/>
+          </a:xfrm>
+          <a:prstGeom prst="line">
+            <a:avLst/>
+          </a:prstGeom>
+          <a:ln w="19050">
+            <a:solidFill>
+              <a:srgbClr val="1F3A5F"/>
+            </a:solidFill>
+          </a:ln>
+        </p:spPr>
+        <p:style>
+          <a:lnRef idx="2">
+            <a:schemeClr val="accent1"/>
+          </a:lnRef>
+          <a:fillRef idx="0">
+            <a:schemeClr val="accent1"/>
+          </a:fillRef>
+          <a:effectRef idx="1">
+            <a:schemeClr val="accent1"/>
+          </a:effectRef>
+          <a:fontRef idx="minor">
+            <a:schemeClr val="tx1"/>
+          </a:fontRef>
+        </p:style>
+      </p:cxnSp>
       <p:cxnSp>
         <p:nvCxnSpPr>
           <p:cNvPr id="10" name="Connector 9"/>
@@ -6203,9 +5835,9 @@
           <p:nvPr/>
         </p:nvCxnSpPr>
         <p:spPr>
-          <a:xfrm flipH="1">
-            <a:off x="3566160" y="2240280"/>
-            <a:ext cx="2103120" cy="502920"/>
+          <a:xfrm>
+            <a:off x="6080760" y="2240280"/>
+            <a:ext cx="0" cy="777240"/>
           </a:xfrm>
           <a:prstGeom prst="line">
             <a:avLst/>
@@ -6239,8 +5871,8 @@
         </p:nvCxnSpPr>
         <p:spPr>
           <a:xfrm>
-            <a:off x="3566160" y="3429000"/>
-            <a:ext cx="0" cy="411480"/>
+            <a:off x="7040880" y="2240280"/>
+            <a:ext cx="2651760" cy="777240"/>
           </a:xfrm>
           <a:prstGeom prst="line">
             <a:avLst/>
@@ -6266,79 +5898,9 @@
           </a:fontRef>
         </p:style>
       </p:cxnSp>
-      <p:cxnSp>
-        <p:nvCxnSpPr>
-          <p:cNvPr id="12" name="Connector 11"/>
-          <p:cNvCxnSpPr/>
-          <p:nvPr/>
-        </p:nvCxnSpPr>
-        <p:spPr>
-          <a:xfrm>
-            <a:off x="6583680" y="2240280"/>
-            <a:ext cx="2103120" cy="502920"/>
-          </a:xfrm>
-          <a:prstGeom prst="line">
-            <a:avLst/>
-          </a:prstGeom>
-          <a:ln w="19050">
-            <a:solidFill>
-              <a:srgbClr val="1F3A5F"/>
-            </a:solidFill>
-          </a:ln>
-        </p:spPr>
-        <p:style>
-          <a:lnRef idx="2">
-            <a:schemeClr val="accent1"/>
-          </a:lnRef>
-          <a:fillRef idx="0">
-            <a:schemeClr val="accent1"/>
-          </a:fillRef>
-          <a:effectRef idx="1">
-            <a:schemeClr val="accent1"/>
-          </a:effectRef>
-          <a:fontRef idx="minor">
-            <a:schemeClr val="tx1"/>
-          </a:fontRef>
-        </p:style>
-      </p:cxnSp>
-      <p:cxnSp>
-        <p:nvCxnSpPr>
-          <p:cNvPr id="13" name="Connector 12"/>
-          <p:cNvCxnSpPr/>
-          <p:nvPr/>
-        </p:nvCxnSpPr>
-        <p:spPr>
-          <a:xfrm>
-            <a:off x="8686800" y="3429000"/>
-            <a:ext cx="0" cy="411480"/>
-          </a:xfrm>
-          <a:prstGeom prst="line">
-            <a:avLst/>
-          </a:prstGeom>
-          <a:ln w="19050">
-            <a:solidFill>
-              <a:srgbClr val="1F3A5F"/>
-            </a:solidFill>
-          </a:ln>
-        </p:spPr>
-        <p:style>
-          <a:lnRef idx="2">
-            <a:schemeClr val="accent1"/>
-          </a:lnRef>
-          <a:fillRef idx="0">
-            <a:schemeClr val="accent1"/>
-          </a:fillRef>
-          <a:effectRef idx="1">
-            <a:schemeClr val="accent1"/>
-          </a:effectRef>
-          <a:fontRef idx="minor">
-            <a:schemeClr val="tx1"/>
-          </a:fontRef>
-        </p:style>
-      </p:cxnSp>
-      <p:sp>
-        <p:nvSpPr>
-          <p:cNvPr id="14" name="TextBox 13"/>
+      <p:sp>
+        <p:nvSpPr>
+          <p:cNvPr id="12" name="TextBox 11"/>
           <p:cNvSpPr txBox="1"/>
           <p:nvPr/>
         </p:nvSpPr>
@@ -6363,7 +5925,7 @@
                 <a:spcPts val="200"/>
               </a:spcBef>
               <a:spcAft>
-                <a:spcPts val="500"/>
+                <a:spcPts val="600"/>
               </a:spcAft>
             </a:pPr>
             <a:r>
@@ -6373,7 +5935,7 @@
                 </a:solidFill>
                 <a:latin typeface="Calibri"/>
               </a:rPr>
-              <a:t>•  Two parallel sibling trees under ActorEntity model the same real drone.</a:t>
+              <a:t>•  Three incompatible representations of the same device across the two tracks (D2).</a:t>
             </a:r>
           </a:p>
           <a:p>
@@ -6382,7 +5944,7 @@
                 <a:spcPts val="200"/>
               </a:spcBef>
               <a:spcAft>
-                <a:spcPts val="500"/>
+                <a:spcPts val="600"/>
               </a:spcAft>
             </a:pPr>
             <a:r>
@@ -6392,26 +5954,7 @@
                 </a:solidFill>
                 <a:latin typeface="Calibri"/>
               </a:rPr>
-              <a:t>–  Type it as Robot -&gt; it loses all existing SMX Platform / LOX machinery.</a:t>
-            </a:r>
-          </a:p>
-          <a:p>
-            <a:pPr lvl="1">
-              <a:spcBef>
-                <a:spcPts val="200"/>
-              </a:spcBef>
-              <a:spcAft>
-                <a:spcPts val="500"/>
-              </a:spcAft>
-            </a:pPr>
-            <a:r>
-              <a:rPr sz="1300" b="0" i="0">
-                <a:solidFill>
-                  <a:srgbClr val="333333"/>
-                </a:solidFill>
-                <a:latin typeface="Calibri"/>
-              </a:rPr>
-              <a:t>–  Type it as Aircraft -&gt; the ASX Robot / UAV classes go unused.</a:t>
+              <a:t>–  An Initialization message must declare what a platform carries - it has to pick one representation; the Report side only consumes sensor output (log P2).</a:t>
             </a:r>
           </a:p>
           <a:p>
@@ -6420,7 +5963,7 @@
                 <a:spcPts val="200"/>
               </a:spcBef>
               <a:spcAft>
-                <a:spcPts val="500"/>
+                <a:spcPts val="600"/>
               </a:spcAft>
             </a:pPr>
             <a:r>
@@ -6430,7 +5973,7 @@
                 </a:solidFill>
                 <a:latin typeface="Calibri"/>
               </a:rPr>
-              <a:t>•  Now live in v0.0.3:  </a:t>
+              <a:t>•  Same pattern downstream:  </a:t>
             </a:r>
             <a:r>
               <a:rPr sz="1300" b="0" i="0">
@@ -6439,7 +5982,7 @@
                 </a:solidFill>
                 <a:latin typeface="Calibri"/>
               </a:rPr>
-              <a:t>v0.0.3 declares both - UAV/UGV under Robot AND UnmannedAerial/Ground/Maritime/UnderwaterVehicle under SMX Vehicle - so this choice is now in the model to settle.</a:t>
+              <a:t>weapon (W2), manipulator (E2), cargo (L1) hang off the same carried-equipment choice (Q-L); non-imaging sensor reports (Y1) need the sensor typed to say what measured (Q-I/Q-Q).</a:t>
             </a:r>
           </a:p>
           <a:p>
@@ -6448,7 +5991,7 @@
                 <a:spcPts val="200"/>
               </a:spcBef>
               <a:spcAft>
-                <a:spcPts val="500"/>
+                <a:spcPts val="600"/>
               </a:spcAft>
             </a:pPr>
             <a:r>
@@ -6458,7 +6001,7 @@
                 </a:solidFill>
                 <a:latin typeface="Calibri"/>
               </a:rPr>
-              <a:t>•  Decision (Q-A):  </a:t>
+              <a:t>•  Decision (Q-C):  </a:t>
             </a:r>
             <a:r>
               <a:rPr sz="1300" b="0" i="0">
@@ -6467,14 +6010,14 @@
                 </a:solidFill>
                 <a:latin typeface="Calibri"/>
               </a:rPr>
-              <a:t>make ASX autonomy a role/facet on the existing Platform subtree instead of a parallel Robot tree?</a:t>
-            </a:r>
-          </a:p>
-        </p:txBody>
-      </p:sp>
-      <p:sp>
-        <p:nvSpPr>
-          <p:cNvPr id="15" name="TextBox 14"/>
+              <a:t>is a sensor a first-class entity/equipment, a class, or an attribute? Pick one model and apply it in Init, Report, and Concept Mapping.</a:t>
+            </a:r>
+          </a:p>
+        </p:txBody>
+      </p:sp>
+      <p:sp>
+        <p:nvSpPr>
+          <p:cNvPr id="13" name="TextBox 12"/>
           <p:cNvSpPr txBox="1"/>
           <p:nvPr/>
         </p:nvSpPr>
@@ -6510,14 +6053,14 @@
                 </a:solidFill>
                 <a:latin typeface="Calibri"/>
               </a:rPr>
-              <a:t>Initialization-Walk.md  -  log P1 (sec 5) + sec 9 (v0.0.3 makes it concrete)  -  decision Q-A (log sec 7)</a:t>
-            </a:r>
-          </a:p>
-        </p:txBody>
-      </p:sp>
-      <p:sp>
-        <p:nvSpPr>
-          <p:cNvPr id="16" name="TextBox 15"/>
+              <a:t>Initialization-Walk.md + NonVideoSensors-Walk.md  -  log P2 (sec 5) + D2 (sec 2)  -  decision Q-C (log sec 7)</a:t>
+            </a:r>
+          </a:p>
+        </p:txBody>
+      </p:sp>
+      <p:sp>
+        <p:nvSpPr>
+          <p:cNvPr id="14" name="TextBox 13"/>
           <p:cNvSpPr txBox="1"/>
           <p:nvPr/>
         </p:nvSpPr>
@@ -6551,7 +6094,7 @@
       </p:sp>
       <p:sp>
         <p:nvSpPr>
-          <p:cNvPr id="17" name="TextBox 16"/>
+          <p:cNvPr id="15" name="TextBox 14"/>
           <p:cNvSpPr txBox="1"/>
           <p:nvPr/>
         </p:nvSpPr>
@@ -6981,7 +6524,7 @@
         </p:nvSpPr>
         <p:spPr>
           <a:xfrm>
-            <a:off x="822960" y="3657600"/>
+            <a:off x="822960" y="3246120"/>
             <a:ext cx="2834640" cy="640080"/>
           </a:xfrm>
           <a:prstGeom prst="roundRect">
@@ -7033,7 +6576,7 @@
         </p:nvSpPr>
         <p:spPr>
           <a:xfrm>
-            <a:off x="3931920" y="3657600"/>
+            <a:off x="3931920" y="3246120"/>
             <a:ext cx="3291840" cy="640080"/>
           </a:xfrm>
           <a:prstGeom prst="roundRect">
@@ -7085,7 +6628,7 @@
         </p:nvSpPr>
         <p:spPr>
           <a:xfrm>
-            <a:off x="7498079" y="3657600"/>
+            <a:off x="7498079" y="3246120"/>
             <a:ext cx="3108960" cy="640080"/>
           </a:xfrm>
           <a:prstGeom prst="roundRect">
@@ -7137,7 +6680,7 @@
         </p:nvCxnSpPr>
         <p:spPr>
           <a:xfrm>
-            <a:off x="3657600" y="3977639"/>
+            <a:off x="3657600" y="3566160"/>
             <a:ext cx="274320" cy="0"/>
           </a:xfrm>
           <a:prstGeom prst="line">
@@ -7172,7 +6715,7 @@
         </p:nvCxnSpPr>
         <p:spPr>
           <a:xfrm>
-            <a:off x="7223760" y="3977639"/>
+            <a:off x="7223760" y="3566160"/>
             <a:ext cx="274319" cy="0"/>
           </a:xfrm>
           <a:prstGeom prst="line">
@@ -7207,7 +6750,7 @@
         </p:nvSpPr>
         <p:spPr>
           <a:xfrm>
-            <a:off x="7498079" y="4343400"/>
+            <a:off x="7498079" y="3931920"/>
             <a:ext cx="3291840" cy="365760"/>
           </a:xfrm>
           <a:prstGeom prst="rect">
@@ -7241,8 +6784,8 @@
         </p:nvSpPr>
         <p:spPr>
           <a:xfrm>
-            <a:off x="640080" y="4846320"/>
-            <a:ext cx="10972800" cy="1508760"/>
+            <a:off x="640080" y="4434840"/>
+            <a:ext cx="10972800" cy="1920240"/>
           </a:xfrm>
           <a:prstGeom prst="rect">
             <a:avLst/>
@@ -7260,7 +6803,7 @@
                 <a:spcPts val="200"/>
               </a:spcBef>
               <a:spcAft>
-                <a:spcPts val="500"/>
+                <a:spcPts val="600"/>
               </a:spcAft>
             </a:pPr>
             <a:r>
@@ -7279,7 +6822,7 @@
                 <a:spcPts val="200"/>
               </a:spcBef>
               <a:spcAft>
-                <a:spcPts val="500"/>
+                <a:spcPts val="600"/>
               </a:spcAft>
             </a:pPr>
             <a:r>
@@ -7289,7 +6832,7 @@
                 </a:solidFill>
                 <a:latin typeface="Calibri"/>
               </a:rPr>
-              <a:t>–  Membership and command already exist in the base standard (C2SIM hasSubordinate, SMX hasCommandRelation), so the residual swarm work is small. (v0.0.3 dropped the Swarm class; CollecticeRoboticSystem is still under PhysicalEntity.)</a:t>
+              <a:t>–  Membership and command already exist in the base standard (C2SIM hasSubordinate, SMX hasCommandRelation), so the residual swarm work is small.</a:t>
             </a:r>
           </a:p>
           <a:p>
@@ -7298,7 +6841,35 @@
                 <a:spcPts val="200"/>
               </a:spcBef>
               <a:spcAft>
-                <a:spcPts val="500"/>
+                <a:spcPts val="600"/>
+              </a:spcAft>
+            </a:pPr>
+            <a:r>
+              <a:rPr sz="1300" b="1" i="0">
+                <a:solidFill>
+                  <a:srgbClr val="C87F0A"/>
+                </a:solidFill>
+                <a:latin typeface="Calibri"/>
+              </a:rPr>
+              <a:t>•  Now in v0.0.3:  </a:t>
+            </a:r>
+            <a:r>
+              <a:rPr sz="1300" b="0" i="0">
+                <a:solidFill>
+                  <a:srgbClr val="333333"/>
+                </a:solidFill>
+                <a:latin typeface="Calibri"/>
+              </a:rPr>
+              <a:t>the Swarm class was dropped; CollecticeRoboticSystem (sic) remains under PhysicalEntity - still not taskable.</a:t>
+            </a:r>
+          </a:p>
+          <a:p>
+            <a:pPr>
+              <a:spcBef>
+                <a:spcPts val="200"/>
+              </a:spcBef>
+              <a:spcAft>
+                <a:spcPts val="600"/>
               </a:spcAft>
             </a:pPr>
             <a:r>
@@ -7524,7 +7095,7 @@
                 </a:solidFill>
                 <a:latin typeface="Calibri"/>
               </a:rPr>
-              <a:t>The OWL is still catching up to the spreadsheets</a:t>
+              <a:t>Already in the standard - re-adopt, not invent</a:t>
             </a:r>
           </a:p>
         </p:txBody>
@@ -7558,21 +7129,74 @@
                 </a:solidFill>
                 <a:latin typeface="Calibri"/>
               </a:rPr>
-              <a:t>v0.0.x - expected at this stage</a:t>
-            </a:r>
-          </a:p>
-        </p:txBody>
-      </p:sp>
-      <p:sp>
-        <p:nvSpPr>
-          <p:cNvPr id="5" name="TextBox 4"/>
+              <a:t>Verified in the RDF - the gap list is shorter than it looks</a:t>
+            </a:r>
+          </a:p>
+        </p:txBody>
+      </p:sp>
+      <p:sp>
+        <p:nvSpPr>
+          <p:cNvPr id="5" name="Rounded Rectangle 4"/>
+          <p:cNvSpPr/>
+          <p:nvPr/>
+        </p:nvSpPr>
+        <p:spPr>
+          <a:xfrm>
+            <a:off x="731520" y="1691640"/>
+            <a:ext cx="10744200" cy="1280160"/>
+          </a:xfrm>
+          <a:prstGeom prst="roundRect">
+            <a:avLst/>
+          </a:prstGeom>
+          <a:solidFill>
+            <a:srgbClr val="2E7D32"/>
+          </a:solidFill>
+          <a:ln>
+            <a:noFill/>
+          </a:ln>
+        </p:spPr>
+        <p:style>
+          <a:lnRef idx="1">
+            <a:schemeClr val="accent1"/>
+          </a:lnRef>
+          <a:fillRef idx="3">
+            <a:schemeClr val="accent1"/>
+          </a:fillRef>
+          <a:effectRef idx="2">
+            <a:schemeClr val="accent1"/>
+          </a:effectRef>
+          <a:fontRef idx="minor">
+            <a:schemeClr val="lt1"/>
+          </a:fontRef>
+        </p:style>
+        <p:txBody>
+          <a:bodyPr rtlCol="0" anchor="ctr" wrap="square"/>
+          <a:lstStyle/>
+          <a:p>
+            <a:pPr algn="ctr"/>
+            <a:r>
+              <a:rPr sz="1300" b="1" i="0">
+                <a:solidFill>
+                  <a:srgbClr val="FFFFFF"/>
+                </a:solidFill>
+                <a:latin typeface="Calibri"/>
+              </a:rPr>
+              <a:t>The headline discovery: the measurement report already exists
+BML lineage WhoMeasuredType {value, unit, phenomenon, sensor, time, place} - flagged as missing, found in C2SIM's own lineage. Re-adopt, not invent (Q-Q).</a:t>
+            </a:r>
+          </a:p>
+        </p:txBody>
+      </p:sp>
+      <p:sp>
+        <p:nvSpPr>
+          <p:cNvPr id="6" name="TextBox 5"/>
           <p:cNvSpPr txBox="1"/>
           <p:nvPr/>
         </p:nvSpPr>
         <p:spPr>
           <a:xfrm>
-            <a:off x="640080" y="1645920"/>
-            <a:ext cx="10972800" cy="4709160"/>
+            <a:off x="640080" y="3154680"/>
+            <a:ext cx="10972800" cy="3200400"/>
           </a:xfrm>
           <a:prstGeom prst="rect">
             <a:avLst/>
@@ -7590,26 +7214,26 @@
                 <a:spcPts val="200"/>
               </a:spcBef>
               <a:spcAft>
-                <a:spcPts val="1300"/>
+                <a:spcPts val="800"/>
               </a:spcAft>
             </a:pPr>
             <a:r>
-              <a:rPr sz="1500" b="1" i="0">
-                <a:solidFill>
-                  <a:srgbClr val="C87F0A"/>
-                </a:solidFill>
-                <a:latin typeface="Calibri"/>
-              </a:rPr>
-              <a:t>•  Autonomy - 3 vocabularies to reconcile:  </a:t>
-            </a:r>
-            <a:r>
-              <a:rPr sz="1500" b="0" i="0">
+              <a:rPr sz="1300" b="1" i="0">
+                <a:solidFill>
+                  <a:srgbClr val="2E7D32"/>
+                </a:solidFill>
+                <a:latin typeface="Calibri"/>
+              </a:rPr>
+              <a:t>•  Task verbs:  </a:t>
+            </a:r>
+            <a:r>
+              <a:rPr sz="1300" b="0" i="0">
                 <a:solidFill>
                   <a:srgbClr val="333333"/>
                 </a:solidFill>
                 <a:latin typeface="Calibri"/>
               </a:rPr>
-              <a:t>OWL {Automated, FullAuto, ReCont, Teleop}  vs  ControlMode {Piloted, Unpiloted-Autonomous, Swarm}  vs  NavigationAutonomy {FPV, Autonomous, RemoteControl}.</a:t>
+              <a:t>LOX already carries 446 TaskActionCode verbs - ENGAGE, ATTACK, BREACH, CONSTR, CLROBS, MINLAY, TRANS, RESUPL, RESCUE, RECOVR, ESCRT, RECCE, PATROL, COMREL + search verbs. Not a missing-verb problem.</a:t>
             </a:r>
           </a:p>
           <a:p>
@@ -7618,26 +7242,26 @@
                 <a:spcPts val="200"/>
               </a:spcBef>
               <a:spcAft>
-                <a:spcPts val="1300"/>
+                <a:spcPts val="800"/>
               </a:spcAft>
             </a:pPr>
             <a:r>
-              <a:rPr sz="1500" b="1" i="0">
-                <a:solidFill>
-                  <a:srgbClr val="C87F0A"/>
-                </a:solidFill>
-                <a:latin typeface="Calibri"/>
-              </a:rPr>
-              <a:t>•  Sensor - 3 models to reconcile:  </a:t>
-            </a:r>
-            <a:r>
-              <a:rPr sz="1500" b="0" i="0">
+              <a:rPr sz="1300" b="1" i="0">
+                <a:solidFill>
+                  <a:srgbClr val="2E7D32"/>
+                </a:solidFill>
+                <a:latin typeface="Calibri"/>
+              </a:rPr>
+              <a:t>•  Order machinery:  </a:t>
+            </a:r>
+            <a:r>
+              <a:rPr sz="1300" b="0" i="0">
                 <a:solidFill>
                   <a:srgbClr val="333333"/>
                 </a:solidFill>
                 <a:latin typeface="Calibri"/>
               </a:rPr>
-              <a:t>OWL Sensor class  vs  SensorType enum  vs  SensorCapability as associated equipment.</a:t>
+              <a:t>effects (DesiredEffectCode), targets (hasAffectedEntity), ROE (RuleOfEngagement, WeaponRuleOfEngagementCode), resources + quantities, routes + phased planning (PlanBody/PlanPhase), position reporting.</a:t>
             </a:r>
           </a:p>
           <a:p>
@@ -7646,26 +7270,26 @@
                 <a:spcPts val="200"/>
               </a:spcBef>
               <a:spcAft>
-                <a:spcPts val="1300"/>
+                <a:spcPts val="800"/>
               </a:spcAft>
             </a:pPr>
             <a:r>
-              <a:rPr sz="1500" b="1" i="0">
-                <a:solidFill>
-                  <a:srgbClr val="C87F0A"/>
-                </a:solidFill>
-                <a:latin typeface="Calibri"/>
-              </a:rPr>
-              <a:t>•  Not yet in the OWL:  </a:t>
-            </a:r>
-            <a:r>
-              <a:rPr sz="1500" b="0" i="0">
+              <a:rPr sz="1300" b="1" i="0">
+                <a:solidFill>
+                  <a:srgbClr val="2E7D32"/>
+                </a:solidFill>
+                <a:latin typeface="Calibri"/>
+              </a:rPr>
+              <a:t>•  Structure:  </a:t>
+            </a:r>
+            <a:r>
+              <a:rPr sz="1300" b="0" i="0">
                 <a:solidFill>
                   <a:srgbClr val="333333"/>
                 </a:solidFill>
                 <a:latin typeface="Calibri"/>
               </a:rPr>
-              <a:t>Payload, PayloadCapability, Mobility/Propulsion, VehicleType, PassengerCapability, AutonomousMissionFunction/Parameters, SwarmParameters. (v0.0.1 had 0 datatype properties; v0.0.3 begins the layer, for the Video Detection Report only.)</a:t>
+              <a:t>membership + command exist (C2SIM hasSubordinate, SMX hasCommandRelation) - the swarm residual is small; platform types (Vehicle / Aircraft / SurfaceVessel); a neutral hostility value (smx#NEUTRL).</a:t>
             </a:r>
           </a:p>
           <a:p>
@@ -7674,33 +7298,61 @@
                 <a:spcPts val="200"/>
               </a:spcBef>
               <a:spcAft>
-                <a:spcPts val="1300"/>
+                <a:spcPts val="800"/>
               </a:spcAft>
             </a:pPr>
             <a:r>
-              <a:rPr sz="1500" b="1" i="0">
-                <a:solidFill>
-                  <a:srgbClr val="2E869A"/>
-                </a:solidFill>
-                <a:latin typeface="Calibri"/>
-              </a:rPr>
-              <a:t>•  Decisions (Q-C, Q-D):  </a:t>
-            </a:r>
-            <a:r>
-              <a:rPr sz="1500" b="0" i="0">
+              <a:rPr sz="1300" b="1" i="0">
+                <a:solidFill>
+                  <a:srgbClr val="2E7D32"/>
+                </a:solidFill>
+                <a:latin typeface="Calibri"/>
+              </a:rPr>
+              <a:t>•  Capability declaration:  </a:t>
+            </a:r>
+            <a:r>
+              <a:rPr sz="1300" b="0" i="0">
                 <a:solidFill>
                   <a:srgbClr val="333333"/>
                 </a:solidFill>
                 <a:latin typeface="Calibri"/>
               </a:rPr>
-              <a:t>pick one normative sensor model and one normative autonomy vocabulary; express the rest as derived.</a:t>
-            </a:r>
-          </a:p>
-        </p:txBody>
-      </p:sp>
-      <p:sp>
-        <p:nvSpPr>
-          <p:cNvPr id="6" name="TextBox 5"/>
+              <a:t>BML WhoHoldingType already covers the capability self-report pattern (Q-V).</a:t>
+            </a:r>
+          </a:p>
+          <a:p>
+            <a:pPr>
+              <a:spcBef>
+                <a:spcPts val="200"/>
+              </a:spcBef>
+              <a:spcAft>
+                <a:spcPts val="800"/>
+              </a:spcAft>
+            </a:pPr>
+            <a:r>
+              <a:rPr sz="1300" b="1" i="0">
+                <a:solidFill>
+                  <a:srgbClr val="1F3A5F"/>
+                </a:solidFill>
+                <a:latin typeface="Calibri"/>
+              </a:rPr>
+              <a:t>•  What this means:  </a:t>
+            </a:r>
+            <a:r>
+              <a:rPr sz="1300" b="0" i="0">
+                <a:solidFill>
+                  <a:srgbClr val="333333"/>
+                </a:solidFill>
+                <a:latin typeface="Calibri"/>
+              </a:rPr>
+              <a:t>a large share of the 24 decisions is where to hang existing vocabulary, not what to invent.</a:t>
+            </a:r>
+          </a:p>
+        </p:txBody>
+      </p:sp>
+      <p:sp>
+        <p:nvSpPr>
+          <p:cNvPr id="7" name="TextBox 6"/>
           <p:cNvSpPr txBox="1"/>
           <p:nvPr/>
         </p:nvSpPr>
@@ -7736,14 +7388,14 @@
                 </a:solidFill>
                 <a:latin typeface="Calibri"/>
               </a:rPr>
-              <a:t>log sec 2 (D1-D3)  -  ASX Concept Mapping.xlsx (the spreadsheet-side vocabularies)</a:t>
-            </a:r>
-          </a:p>
-        </p:txBody>
-      </p:sp>
-      <p:sp>
-        <p:nvSpPr>
-          <p:cNvPr id="7" name="TextBox 6"/>
+              <a:t>verified against the RDF, not recalled (log change log 2026-07-12)  -  the 'checked - already exist' rows across log sec 6  -  OntologyConceptCoverage.md</a:t>
+            </a:r>
+          </a:p>
+        </p:txBody>
+      </p:sp>
+      <p:sp>
+        <p:nvSpPr>
+          <p:cNvPr id="8" name="TextBox 7"/>
           <p:cNvSpPr txBox="1"/>
           <p:nvPr/>
         </p:nvSpPr>
@@ -7777,7 +7429,7 @@
       </p:sp>
       <p:sp>
         <p:nvSpPr>
-          <p:cNvPr id="8" name="TextBox 7"/>
+          <p:cNvPr id="9" name="TextBox 8"/>
           <p:cNvSpPr txBox="1"/>
           <p:nvPr/>
         </p:nvSpPr>
@@ -7900,7 +7552,7 @@
                 </a:solidFill>
                 <a:latin typeface="Calibri"/>
               </a:rPr>
-              <a:t>Open items in the current instantiations</a:t>
+              <a:t>Missing content types - what a message cannot yet say</a:t>
             </a:r>
           </a:p>
         </p:txBody>
@@ -7934,21 +7586,74 @@
                 </a:solidFill>
                 <a:latin typeface="Calibri"/>
               </a:rPr>
-              <a:t>small things to tidy as the model firms up</a:t>
-            </a:r>
-          </a:p>
-        </p:txBody>
-      </p:sp>
-      <p:sp>
-        <p:nvSpPr>
-          <p:cNvPr id="5" name="TextBox 4"/>
+              <a:t>Each gap named by every scenario that hit it</a:t>
+            </a:r>
+          </a:p>
+        </p:txBody>
+      </p:sp>
+      <p:sp>
+        <p:nvSpPr>
+          <p:cNvPr id="5" name="Rounded Rectangle 4"/>
+          <p:cNvSpPr/>
+          <p:nvPr/>
+        </p:nvSpPr>
+        <p:spPr>
+          <a:xfrm>
+            <a:off x="731520" y="1691640"/>
+            <a:ext cx="10744200" cy="1280160"/>
+          </a:xfrm>
+          <a:prstGeom prst="roundRect">
+            <a:avLst/>
+          </a:prstGeom>
+          <a:solidFill>
+            <a:srgbClr val="C0392B"/>
+          </a:solidFill>
+          <a:ln>
+            <a:noFill/>
+          </a:ln>
+        </p:spPr>
+        <p:style>
+          <a:lnRef idx="1">
+            <a:schemeClr val="accent1"/>
+          </a:lnRef>
+          <a:fillRef idx="3">
+            <a:schemeClr val="accent1"/>
+          </a:fillRef>
+          <a:effectRef idx="2">
+            <a:schemeClr val="accent1"/>
+          </a:effectRef>
+          <a:fontRef idx="minor">
+            <a:schemeClr val="lt1"/>
+          </a:fontRef>
+        </p:style>
+        <p:txBody>
+          <a:bodyPr rtlCol="0" anchor="ctr" wrap="square"/>
+          <a:lstStyle/>
+          <a:p>
+            <a:pPr algn="ctr"/>
+            <a:r>
+              <a:rPr sz="1300" b="1" i="0">
+                <a:solidFill>
+                  <a:srgbClr val="FFFFFF"/>
+                </a:solidFill>
+                <a:latin typeface="Calibri"/>
+              </a:rPr>
+              <a:t>The biggest content gap: one generic Detection Report
+confidence + error-bound + false-positive - needed by the video, CBRN, EW, GPR, and naval-mine walks (Y1/M3/M4/G4); one report subsumes all five (Q-I/Q-Q).</a:t>
+            </a:r>
+          </a:p>
+        </p:txBody>
+      </p:sp>
+      <p:sp>
+        <p:nvSpPr>
+          <p:cNvPr id="6" name="TextBox 5"/>
           <p:cNvSpPr txBox="1"/>
           <p:nvPr/>
         </p:nvSpPr>
         <p:spPr>
           <a:xfrm>
-            <a:off x="640080" y="1645920"/>
-            <a:ext cx="10972800" cy="4709160"/>
+            <a:off x="640080" y="3154680"/>
+            <a:ext cx="10972800" cy="3200400"/>
           </a:xfrm>
           <a:prstGeom prst="rect">
             <a:avLst/>
@@ -7966,26 +7671,26 @@
                 <a:spcPts val="200"/>
               </a:spcBef>
               <a:spcAft>
-                <a:spcPts val="1300"/>
+                <a:spcPts val="600"/>
               </a:spcAft>
             </a:pPr>
             <a:r>
-              <a:rPr sz="1500" b="1" i="0">
-                <a:solidFill>
-                  <a:srgbClr val="C87F0A"/>
-                </a:solidFill>
-                <a:latin typeface="Calibri"/>
-              </a:rPr>
-              <a:t>•  M1:  </a:t>
-            </a:r>
-            <a:r>
-              <a:rPr sz="1500" b="0" i="0">
+              <a:rPr sz="1250" b="1" i="0">
+                <a:solidFill>
+                  <a:srgbClr val="C0392B"/>
+                </a:solidFill>
+                <a:latin typeface="Calibri"/>
+              </a:rPr>
+              <a:t>•  Rationale / explanation report:  </a:t>
+            </a:r>
+            <a:r>
+              <a:rPr sz="1250" b="0" i="0">
                 <a:solidFill>
                   <a:srgbClr val="333333"/>
                 </a:solidFill>
                 <a:latin typeface="Calibri"/>
               </a:rPr>
-              <a:t>actorReference is a string, but it needs to define an entity not yet in the database - an inline entity-definition mechanism for observed entities is still to be added.</a:t>
+              <a:t>systems report WHAT (TaskStatus) but not WHY a route changed or a mission failed - CASEVAC (X2) + the DroneResponse explainability mission; schema in hand {event, action, reasoning, change, confidence} (Q-H).</a:t>
             </a:r>
           </a:p>
           <a:p>
@@ -7994,26 +7699,26 @@
                 <a:spcPts val="200"/>
               </a:spcBef>
               <a:spcAft>
-                <a:spcPts val="1300"/>
+                <a:spcPts val="600"/>
               </a:spcAft>
             </a:pPr>
             <a:r>
-              <a:rPr sz="1500" b="1" i="0">
-                <a:solidFill>
-                  <a:srgbClr val="C87F0A"/>
-                </a:solidFill>
-                <a:latin typeface="Calibri"/>
-              </a:rPr>
-              <a:t>•  M5:  </a:t>
-            </a:r>
-            <a:r>
-              <a:rPr sz="1500" b="0" i="0">
+              <a:rPr sz="1250" b="1" i="0">
+                <a:solidFill>
+                  <a:srgbClr val="C0392B"/>
+                </a:solidFill>
+                <a:latin typeface="Calibri"/>
+              </a:rPr>
+              <a:t>•  Robot-to-robot coordination:  </a:t>
+            </a:r>
+            <a:r>
+              <a:rPr sz="1250" b="0" i="0">
                 <a:solidFill>
                   <a:srgbClr val="333333"/>
                 </a:solidFill>
                 <a:latin typeface="Calibri"/>
               </a:rPr>
-              <a:t>MediaTypeCode {VID/AUD/IMG/DOC/TXT/NOS} mixes media format with sensor modality - the sample sheets' MediaTypeEnum already used its 'Not Otherwise Specified' value for 'thermal scan' (a sensor type) - worth separating.</a:t>
+              <a:t>no content type for one robot to hand a verified safe route to another (envelope addressing exists; the content does not) - CASEVAC (X1) + maritime cross-cue with a shared track (G3) + MUM-T; extends to system-to-system tasking (Q-G/Q-P).</a:t>
             </a:r>
           </a:p>
           <a:p>
@@ -8022,26 +7727,26 @@
                 <a:spcPts val="200"/>
               </a:spcBef>
               <a:spcAft>
-                <a:spcPts val="1300"/>
+                <a:spcPts val="600"/>
               </a:spcAft>
             </a:pPr>
             <a:r>
-              <a:rPr sz="1500" b="1" i="0">
-                <a:solidFill>
-                  <a:srgbClr val="C87F0A"/>
-                </a:solidFill>
-                <a:latin typeface="Calibri"/>
-              </a:rPr>
-              <a:t>•  M7:  </a:t>
-            </a:r>
-            <a:r>
-              <a:rPr sz="1500" b="0" i="0">
+              <a:rPr sz="1250" b="1" i="0">
+                <a:solidFill>
+                  <a:srgbClr val="C0392B"/>
+                </a:solidFill>
+                <a:latin typeface="Calibri"/>
+              </a:rPr>
+              <a:t>•  Effect-achieved / BDA report:  </a:t>
+            </a:r>
+            <a:r>
+              <a:rPr sz="1250" b="0" i="0">
                 <a:solidFill>
                   <a:srgbClr val="333333"/>
                 </a:solidFill>
                 <a:latin typeface="Calibri"/>
               </a:rPr>
-              <a:t>in an Order sheet hasStartTime is typed UUIDBase while hasEndTime is TimeInstant - looks like a copy/paste slip.</a:t>
+              <a:t>TaskStatus says the task ran, not that the target was destroyed - fire support (W3) + LIRC strike BDA.</a:t>
             </a:r>
           </a:p>
           <a:p>
@@ -8050,33 +7755,89 @@
                 <a:spcPts val="200"/>
               </a:spcBef>
               <a:spcAft>
-                <a:spcPts val="1300"/>
+                <a:spcPts val="600"/>
               </a:spcAft>
             </a:pPr>
             <a:r>
-              <a:rPr sz="1500" b="1" i="0">
-                <a:solidFill>
-                  <a:srgbClr val="C87F0A"/>
-                </a:solidFill>
-                <a:latin typeface="Calibri"/>
-              </a:rPr>
-              <a:t>•  Typos:  </a:t>
-            </a:r>
-            <a:r>
-              <a:rPr sz="1500" b="0" i="0">
+              <a:rPr sz="1250" b="1" i="0">
+                <a:solidFill>
+                  <a:srgbClr val="C0392B"/>
+                </a:solidFill>
+                <a:latin typeface="Calibri"/>
+              </a:rPr>
+              <a:t>•  Capability self-report:  </a:t>
+            </a:r>
+            <a:r>
+              <a:rPr sz="1250" b="0" i="0">
                 <a:solidFill>
                   <a:srgbClr val="333333"/>
                 </a:solidFill>
                 <a:latin typeface="Calibri"/>
               </a:rPr>
-              <a:t>class 'CollecticeRoboticSystem' (should be 'CollectiveRoboticSystem') and versionInfo 'Extrension' - both still in v0.0.3; easiest to fix before messages are built on them.</a:t>
-            </a:r>
-          </a:p>
-        </p:txBody>
-      </p:sp>
-      <p:sp>
-        <p:nvSpPr>
-          <p:cNvPr id="6" name="TextBox 5"/>
+              <a:t>a robot declares its mounted equipment so tasks can be assigned by capability - MUM-T (G13 -&gt; Q-V).</a:t>
+            </a:r>
+          </a:p>
+          <a:p>
+            <a:pPr>
+              <a:spcBef>
+                <a:spcPts val="200"/>
+              </a:spcBef>
+              <a:spcAft>
+                <a:spcPts val="600"/>
+              </a:spcAft>
+            </a:pPr>
+            <a:r>
+              <a:rPr sz="1250" b="1" i="0">
+                <a:solidFill>
+                  <a:srgbClr val="C0392B"/>
+                </a:solidFill>
+                <a:latin typeface="Calibri"/>
+              </a:rPr>
+              <a:t>•  Inline entity definition:  </a:t>
+            </a:r>
+            <a:r>
+              <a:rPr sz="1250" b="0" i="0">
+                <a:solidFill>
+                  <a:srgbClr val="333333"/>
+                </a:solidFill>
+                <a:latin typeface="Calibri"/>
+              </a:rPr>
+              <a:t>a report cannot introduce a newly-observed (uncooperative) entity it references (M1 -&gt; Q-E).</a:t>
+            </a:r>
+          </a:p>
+          <a:p>
+            <a:pPr>
+              <a:spcBef>
+                <a:spcPts val="200"/>
+              </a:spcBef>
+              <a:spcAft>
+                <a:spcPts val="600"/>
+              </a:spcAft>
+            </a:pPr>
+            <a:r>
+              <a:rPr sz="1250" b="1" i="0">
+                <a:solidFill>
+                  <a:srgbClr val="C0392B"/>
+                </a:solidFill>
+                <a:latin typeface="Calibri"/>
+              </a:rPr>
+              <a:t>•  Media identity / modality split:  </a:t>
+            </a:r>
+            <a:r>
+              <a:rPr sz="1250" b="0" i="0">
+                <a:solidFill>
+                  <a:srgbClr val="333333"/>
+                </a:solidFill>
+                <a:latin typeface="Calibri"/>
+              </a:rPr>
+              <a:t>MediaReference identity is undecided, and MediaTypeCode mixes media format with sensor modality - a 'thermal scan' rode the NOS value (M2/M5 -&gt; Q-F).</a:t>
+            </a:r>
+          </a:p>
+        </p:txBody>
+      </p:sp>
+      <p:sp>
+        <p:nvSpPr>
+          <p:cNvPr id="7" name="TextBox 6"/>
           <p:cNvSpPr txBox="1"/>
           <p:nvPr/>
         </p:nvSpPr>
@@ -8112,14 +7873,14 @@
                 </a:solidFill>
                 <a:latin typeface="Calibri"/>
               </a:rPr>
-              <a:t>log sec 4 (M-series, sample messages)  -  sec 3 (typos &amp; naming)</a:t>
-            </a:r>
-          </a:p>
-        </p:txBody>
-      </p:sp>
-      <p:sp>
-        <p:nvSpPr>
-          <p:cNvPr id="7" name="TextBox 6"/>
+              <a:t>CASEVAC-Walk.md, NonVideoSensors-Walk.md, FireSupport-Walk.md, SourcedScenarios-Walk.md, ValidationEvidence-Walk.md  -  log secs 6b/6c/6e/6h/6j  -  decisions Q-E/G/H/I/P/Q/V</a:t>
+            </a:r>
+          </a:p>
+        </p:txBody>
+      </p:sp>
+      <p:sp>
+        <p:nvSpPr>
+          <p:cNvPr id="8" name="TextBox 7"/>
           <p:cNvSpPr txBox="1"/>
           <p:nvPr/>
         </p:nvSpPr>
@@ -8153,7 +7914,7 @@
       </p:sp>
       <p:sp>
         <p:nvSpPr>
-          <p:cNvPr id="8" name="TextBox 7"/>
+          <p:cNvPr id="9" name="TextBox 8"/>
           <p:cNvSpPr txBox="1"/>
           <p:nvPr/>
         </p:nvSpPr>
@@ -8276,7 +8037,7 @@
                 </a:solidFill>
                 <a:latin typeface="Calibri"/>
               </a:rPr>
-              <a:t>Coverage: what is still to instantiate</a:t>
+              <a:t>Missing typing - what a platform is and carries</a:t>
             </a:r>
           </a:p>
         </p:txBody>
@@ -8289,8 +8050,95 @@
         </p:nvSpPr>
         <p:spPr>
           <a:xfrm>
-            <a:off x="640080" y="1463040"/>
-            <a:ext cx="10972800" cy="4754880"/>
+            <a:off x="548640" y="914400"/>
+            <a:ext cx="10972800" cy="320040"/>
+          </a:xfrm>
+          <a:prstGeom prst="rect">
+            <a:avLst/>
+          </a:prstGeom>
+          <a:noFill/>
+        </p:spPr>
+        <p:txBody>
+          <a:bodyPr wrap="square">
+            <a:spAutoFit/>
+          </a:bodyPr>
+          <a:lstStyle/>
+          <a:p>
+            <a:r>
+              <a:rPr sz="1300" b="0" i="1">
+                <a:solidFill>
+                  <a:srgbClr val="2E869A"/>
+                </a:solidFill>
+                <a:latin typeface="Calibri"/>
+              </a:rPr>
+              <a:t>One pattern, several instances</a:t>
+            </a:r>
+          </a:p>
+        </p:txBody>
+      </p:sp>
+      <p:sp>
+        <p:nvSpPr>
+          <p:cNvPr id="5" name="Rounded Rectangle 4"/>
+          <p:cNvSpPr/>
+          <p:nvPr/>
+        </p:nvSpPr>
+        <p:spPr>
+          <a:xfrm>
+            <a:off x="731520" y="1691640"/>
+            <a:ext cx="10744200" cy="1280160"/>
+          </a:xfrm>
+          <a:prstGeom prst="roundRect">
+            <a:avLst/>
+          </a:prstGeom>
+          <a:solidFill>
+            <a:srgbClr val="C0392B"/>
+          </a:solidFill>
+          <a:ln>
+            <a:noFill/>
+          </a:ln>
+        </p:spPr>
+        <p:style>
+          <a:lnRef idx="1">
+            <a:schemeClr val="accent1"/>
+          </a:lnRef>
+          <a:fillRef idx="3">
+            <a:schemeClr val="accent1"/>
+          </a:fillRef>
+          <a:effectRef idx="2">
+            <a:schemeClr val="accent1"/>
+          </a:effectRef>
+          <a:fontRef idx="minor">
+            <a:schemeClr val="lt1"/>
+          </a:fontRef>
+        </p:style>
+        <p:txBody>
+          <a:bodyPr rtlCol="0" anchor="ctr" wrap="square"/>
+          <a:lstStyle/>
+          <a:p>
+            <a:pPr algn="ctr"/>
+            <a:r>
+              <a:rPr sz="1300" b="1" i="0">
+                <a:solidFill>
+                  <a:srgbClr val="FFFFFF"/>
+                </a:solidFill>
+                <a:latin typeface="Calibri"/>
+              </a:rPr>
+              <a:t>The core gap: nothing typed for what a platform carries or wields
+Cargo (L1), manipulator (E2), weapon/munition (W2) are one missing piece - the typed payload / effector / weapon (Q-L). The verbs already exist in LOX.</a:t>
+            </a:r>
+          </a:p>
+        </p:txBody>
+      </p:sp>
+      <p:sp>
+        <p:nvSpPr>
+          <p:cNvPr id="6" name="TextBox 5"/>
+          <p:cNvSpPr txBox="1"/>
+          <p:nvPr/>
+        </p:nvSpPr>
+        <p:spPr>
+          <a:xfrm>
+            <a:off x="640080" y="3154680"/>
+            <a:ext cx="10972800" cy="3200400"/>
           </a:xfrm>
           <a:prstGeom prst="rect">
             <a:avLst/>
@@ -8312,13 +8160,22 @@
               </a:spcAft>
             </a:pPr>
             <a:r>
-              <a:rPr sz="1450" b="1" i="0">
+              <a:rPr sz="1300" b="1" i="0">
+                <a:solidFill>
+                  <a:srgbClr val="C87F0A"/>
+                </a:solidFill>
+                <a:latin typeface="Calibri"/>
+              </a:rPr>
+              <a:t>•  Platform-munition hybrids:  </a:t>
+            </a:r>
+            <a:r>
+              <a:rPr sz="1300" b="0" i="0">
                 <a:solidFill>
                   <a:srgbClr val="333333"/>
                 </a:solidFill>
                 <a:latin typeface="Calibri"/>
               </a:rPr>
-              <a:t>•  Initialization: 0 of 3 named scenarios were instantiated (now drafted in this review).</a:t>
+              <a:t>a loitering munition / FPV is platform + munition at once; counter-UAS needs the detect-&gt;defeat chain over existing air-defense verbs + an EW-vulnerability annotation (Q-X).</a:t>
             </a:r>
           </a:p>
           <a:p>
@@ -8331,13 +8188,22 @@
               </a:spcAft>
             </a:pPr>
             <a:r>
-              <a:rPr sz="1450" b="1" i="0">
+              <a:rPr sz="1300" b="1" i="0">
+                <a:solidFill>
+                  <a:srgbClr val="C87F0A"/>
+                </a:solidFill>
+                <a:latin typeface="Calibri"/>
+              </a:rPr>
+              <a:t>•  Locomotion / role subtypes:  </a:t>
+            </a:r>
+            <a:r>
+              <a:rPr sz="1300" b="0" i="0">
                 <a:solidFill>
                   <a:srgbClr val="333333"/>
                 </a:solidFill>
                 <a:latin typeface="Calibri"/>
               </a:rPr>
-              <a:t>•  CASEVAC: walked end-to-end in this review - surfaces two gaps with no element (next slide).</a:t>
+              <a:t>wheeled / tracked / legged UGV; detector / neutralizer USV (Q-R, extends Q-A).</a:t>
             </a:r>
           </a:p>
           <a:p>
@@ -8350,13 +8216,22 @@
               </a:spcAft>
             </a:pPr>
             <a:r>
-              <a:rPr sz="1450" b="1" i="0">
+              <a:rPr sz="1300" b="1" i="0">
+                <a:solidFill>
+                  <a:srgbClr val="C87F0A"/>
+                </a:solidFill>
+                <a:latin typeface="Calibri"/>
+              </a:rPr>
+              <a:t>•  Area as a subject:  </a:t>
+            </a:r>
+            <a:r>
+              <a:rPr sz="1300" b="0" i="0">
                 <a:solidFill>
                   <a:srgbClr val="333333"/>
                 </a:solidFill>
                 <a:latin typeface="Calibri"/>
               </a:rPr>
-              <a:t>•  Non-video sensors (CBRN, EW, GPR): walked - the media-based report model does not generalize; non-imaging sensors have no measurement type (Y1/Y5).</a:t>
+              <a:t>an area cannot yet be the subject of a task or report (N1 -&gt; Q-M) - surfaced by the redundancy screen, needed by the hazard-area, kill-box, and area-coverage walks; plus an explore-until-covered goal (G2 -&gt; Q-N, search verbs exist).</a:t>
             </a:r>
           </a:p>
           <a:p>
@@ -8369,13 +8244,22 @@
               </a:spcAft>
             </a:pPr>
             <a:r>
-              <a:rPr sz="1450" b="0" i="0">
+              <a:rPr sz="1300" b="1" i="0">
+                <a:solidFill>
+                  <a:srgbClr val="C87F0A"/>
+                </a:solidFill>
+                <a:latin typeface="Calibri"/>
+              </a:rPr>
+              <a:t>•  Environment + geometry:  </a:t>
+            </a:r>
+            <a:r>
+              <a:rPr sz="1300" b="0" i="0">
                 <a:solidFill>
                   <a:srgbClr val="333333"/>
                 </a:solidFill>
                 <a:latin typeface="Calibri"/>
               </a:rPr>
-              <a:t>•  Task/effect scenarios: engagement, delivery, manipulation, rescue walked - the gap is mainly payload/effector/weapon typing (most task verbs already exist in LOX).</a:t>
+              <a:t>operating-environment conditions (GPS-denied, illumination, sea-state, terrain - G11 -&gt; Q-T); formation / relative geometry beyond a single RelativeLocation (G12 -&gt; Q-U).</a:t>
             </a:r>
           </a:p>
           <a:p>
@@ -8388,39 +8272,29 @@
               </a:spcAft>
             </a:pPr>
             <a:r>
-              <a:rPr sz="1450" b="0" i="0">
+              <a:rPr sz="1300" b="1" i="0">
+                <a:solidFill>
+                  <a:srgbClr val="666666"/>
+                </a:solidFill>
+                <a:latin typeface="Calibri"/>
+              </a:rPr>
+              <a:t>•  Small residual:  </a:t>
+            </a:r>
+            <a:r>
+              <a:rPr sz="1300" b="0" i="0">
                 <a:solidFill>
                   <a:srgbClr val="333333"/>
                 </a:solidFill>
                 <a:latin typeface="Calibri"/>
               </a:rPr>
-              <a:t>•  Redundancy pass (route-clearance, companion, urban): confirmed - plus one new finding, N1 (an area is not yet able to be the subject of a task/report).</a:t>
-            </a:r>
-          </a:p>
-          <a:p>
-            <a:pPr>
-              <a:spcBef>
-                <a:spcPts val="200"/>
-              </a:spcBef>
-              <a:spcAft>
-                <a:spcPts val="800"/>
-              </a:spcAft>
-            </a:pPr>
-            <a:r>
-              <a:rPr sz="1450" b="0" i="0">
-                <a:solidFill>
-                  <a:srgbClr val="333333"/>
-                </a:solidFill>
-                <a:latin typeface="Calibri"/>
-              </a:rPr>
-              <a:t>•  Sourced scenarios (subterranean, maritime MCM, sustainment): integrated from the parallel scenario-sourcing effort - corroborate P1/X1/N2/Y and add G1-G10 (incl. a generic Detection Report).</a:t>
-            </a:r>
-          </a:p>
-        </p:txBody>
-      </p:sp>
-      <p:sp>
-        <p:nvSpPr>
-          <p:cNvPr id="5" name="TextBox 4"/>
+              <a:t>a general-purpose tow/salvage verb (TOWTGT covers gunnery targets only).</a:t>
+            </a:r>
+          </a:p>
+        </p:txBody>
+      </p:sp>
+      <p:sp>
+        <p:nvSpPr>
+          <p:cNvPr id="7" name="TextBox 6"/>
           <p:cNvSpPr txBox="1"/>
           <p:nvPr/>
         </p:nvSpPr>
@@ -8456,14 +8330,14 @@
                 </a:solidFill>
                 <a:latin typeface="Calibri"/>
               </a:rPr>
-              <a:t>log sec 6 (C1-C9) - each coverage row names the walk doc and tabs behind it</a:t>
-            </a:r>
-          </a:p>
-        </p:txBody>
-      </p:sp>
-      <p:sp>
-        <p:nvSpPr>
-          <p:cNvPr id="6" name="TextBox 5"/>
+              <a:t>TaskEffect-Batch-Walk.md, RedundancyPass-Walk.md, SourcedScenarios-Walk.md  -  log secs 6f/6g/6h/6k  -  decisions Q-L/M/N/R/T/U/X</a:t>
+            </a:r>
+          </a:p>
+        </p:txBody>
+      </p:sp>
+      <p:sp>
+        <p:nvSpPr>
+          <p:cNvPr id="8" name="TextBox 7"/>
           <p:cNvSpPr txBox="1"/>
           <p:nvPr/>
         </p:nvSpPr>
@@ -8497,7 +8371,7 @@
       </p:sp>
       <p:sp>
         <p:nvSpPr>
-          <p:cNvPr id="7" name="TextBox 6"/>
+          <p:cNvPr id="9" name="TextBox 8"/>
           <p:cNvSpPr txBox="1"/>
           <p:nvPr/>
         </p:nvSpPr>
@@ -8620,7 +8494,7 @@
                 </a:solidFill>
                 <a:latin typeface="Calibri"/>
               </a:rPr>
-              <a:t>CASEVAC walk: two gaps with no element</a:t>
+              <a:t>Missing authority semantics - who may do what</a:t>
             </a:r>
           </a:p>
         </p:txBody>
@@ -8654,63 +8528,21 @@
                 </a:solidFill>
                 <a:latin typeface="Calibri"/>
               </a:rPr>
-              <a:t>The flagship contributed scenario</a:t>
-            </a:r>
-          </a:p>
-        </p:txBody>
-      </p:sp>
-      <p:sp>
-        <p:nvSpPr>
-          <p:cNvPr id="5" name="TextBox 4"/>
-          <p:cNvSpPr txBox="1"/>
-          <p:nvPr/>
-        </p:nvSpPr>
-        <p:spPr>
-          <a:xfrm>
-            <a:off x="640080" y="1417320"/>
-            <a:ext cx="10972800" cy="777240"/>
-          </a:xfrm>
-          <a:prstGeom prst="rect">
-            <a:avLst/>
-          </a:prstGeom>
-          <a:noFill/>
-        </p:spPr>
-        <p:txBody>
-          <a:bodyPr wrap="square">
-            <a:spAutoFit/>
-          </a:bodyPr>
-          <a:lstStyle/>
-          <a:p>
-            <a:pPr>
-              <a:spcBef>
-                <a:spcPts val="200"/>
-              </a:spcBef>
-              <a:spcAft>
-                <a:spcPts val="600"/>
-              </a:spcAft>
-            </a:pPr>
-            <a:r>
-              <a:rPr sz="1400" b="0" i="0">
-                <a:solidFill>
-                  <a:srgbClr val="333333"/>
-                </a:solidFill>
-                <a:latin typeface="Calibri"/>
-              </a:rPr>
-              <a:t>•  Walked end-to-end: Initialization -&gt; tasking Order -&gt; robot-to-robot route hand-off -&gt; status/threat Reports -&gt; explainable-reasons Report.</a:t>
-            </a:r>
-          </a:p>
-        </p:txBody>
-      </p:sp>
-      <p:sp>
-        <p:nvSpPr>
-          <p:cNvPr id="6" name="Rounded Rectangle 5"/>
+              <a:t>The safety-critical block - and doctrine already supplies the answer</a:t>
+            </a:r>
+          </a:p>
+        </p:txBody>
+      </p:sp>
+      <p:sp>
+        <p:nvSpPr>
+          <p:cNvPr id="5" name="Rounded Rectangle 4"/>
           <p:cNvSpPr/>
           <p:nvPr/>
         </p:nvSpPr>
         <p:spPr>
           <a:xfrm>
-            <a:off x="731520" y="2240280"/>
-            <a:ext cx="5257800" cy="1600200"/>
+            <a:off x="731520" y="1691640"/>
+            <a:ext cx="10744200" cy="1280160"/>
           </a:xfrm>
           <a:prstGeom prst="roundRect">
             <a:avLst/>
@@ -8748,75 +8580,22 @@
                 </a:solidFill>
                 <a:latin typeface="Calibri"/>
               </a:rPr>
-              <a:t>X1  -  No robot-to-robot content
-Scout has no content type yet to hand a verified safe Route to the transport UGV (envelope addressing exists; a content type does not)</a:t>
-            </a:r>
-          </a:p>
-        </p:txBody>
-      </p:sp>
-      <p:sp>
-        <p:nvSpPr>
-          <p:cNvPr id="7" name="Rounded Rectangle 6"/>
-          <p:cNvSpPr/>
-          <p:nvPr/>
-        </p:nvSpPr>
-        <p:spPr>
-          <a:xfrm>
-            <a:off x="6217920" y="2240280"/>
-            <a:ext cx="5257800" cy="1600200"/>
-          </a:xfrm>
-          <a:prstGeom prst="roundRect">
-            <a:avLst/>
-          </a:prstGeom>
-          <a:solidFill>
-            <a:srgbClr val="C0392B"/>
-          </a:solidFill>
-          <a:ln>
-            <a:noFill/>
-          </a:ln>
-        </p:spPr>
-        <p:style>
-          <a:lnRef idx="1">
-            <a:schemeClr val="accent1"/>
-          </a:lnRef>
-          <a:fillRef idx="3">
-            <a:schemeClr val="accent1"/>
-          </a:fillRef>
-          <a:effectRef idx="2">
-            <a:schemeClr val="accent1"/>
-          </a:effectRef>
-          <a:fontRef idx="minor">
-            <a:schemeClr val="lt1"/>
-          </a:fontRef>
-        </p:style>
-        <p:txBody>
-          <a:bodyPr rtlCol="0" anchor="ctr" wrap="square"/>
-          <a:lstStyle/>
-          <a:p>
-            <a:pPr algn="ctr"/>
-            <a:r>
-              <a:rPr sz="1300" b="1" i="0">
-                <a:solidFill>
-                  <a:srgbClr val="FFFFFF"/>
-                </a:solidFill>
-                <a:latin typeface="Calibri"/>
-              </a:rPr>
-              <a:t>X2  -  No rationale report
-Systems can report WHAT (TaskStatus) but not WHY a route changed or a mission failed</a:t>
-            </a:r>
-          </a:p>
-        </p:txBody>
-      </p:sp>
-      <p:sp>
-        <p:nvSpPr>
-          <p:cNvPr id="8" name="TextBox 7"/>
+              <a:t>W1  -  No link between autonomy level and permission to engage
+The standard can say WHAT effect and WHICH ROE - but not WHO authorized the engagement, nor whether a FullAuto system may take lethal action unsupervised (AuthorizationHeader is sender authentication, not command authorization of fires).</a:t>
+            </a:r>
+          </a:p>
+        </p:txBody>
+      </p:sp>
+      <p:sp>
+        <p:nvSpPr>
+          <p:cNvPr id="6" name="TextBox 5"/>
           <p:cNvSpPr txBox="1"/>
           <p:nvPr/>
         </p:nvSpPr>
         <p:spPr>
           <a:xfrm>
-            <a:off x="640080" y="4114800"/>
-            <a:ext cx="10972800" cy="2240280"/>
+            <a:off x="640080" y="3154680"/>
+            <a:ext cx="10972800" cy="3200400"/>
           </a:xfrm>
           <a:prstGeom prst="rect">
             <a:avLst/>
@@ -8834,26 +8613,26 @@
                 <a:spcPts val="200"/>
               </a:spcBef>
               <a:spcAft>
-                <a:spcPts val="900"/>
+                <a:spcPts val="800"/>
               </a:spcAft>
             </a:pPr>
             <a:r>
-              <a:rPr sz="1400" b="1" i="0">
-                <a:solidFill>
-                  <a:srgbClr val="2E869A"/>
-                </a:solidFill>
-                <a:latin typeface="Calibri"/>
-              </a:rPr>
-              <a:t>•  Decision (Q-G):  </a:t>
-            </a:r>
-            <a:r>
-              <a:rPr sz="1400" b="0" i="0">
+              <a:rPr sz="1300" b="1" i="0">
+                <a:solidFill>
+                  <a:srgbClr val="2E7D32"/>
+                </a:solidFill>
+                <a:latin typeface="Calibri"/>
+              </a:rPr>
+              <a:t>•  The doctrine-grounded answer (Q-W):  </a:t>
+            </a:r>
+            <a:r>
+              <a:rPr sz="1300" b="0" i="0">
                 <a:solidFill>
                   <a:srgbClr val="333333"/>
                 </a:solidFill>
                 <a:latin typeface="Calibri"/>
               </a:rPr>
-              <a:t>define a robot-to-robot coordination content type (safe-route advertisement) and the issuing-authority model.</a:t>
+              <a:t>weapons-control status (hold / tight / free) + kill-box - an authorization-bearing area (geo + time window + civilian-clearance + permitted target types) gating autonomous lethal action; from the SME LIRC scenario (G14). Unifies Q-K with area-as-subject (Q-M).</a:t>
             </a:r>
           </a:p>
           <a:p>
@@ -8862,26 +8641,26 @@
                 <a:spcPts val="200"/>
               </a:spcBef>
               <a:spcAft>
-                <a:spcPts val="900"/>
+                <a:spcPts val="800"/>
               </a:spcAft>
             </a:pPr>
             <a:r>
-              <a:rPr sz="1400" b="1" i="0">
-                <a:solidFill>
-                  <a:srgbClr val="2E869A"/>
-                </a:solidFill>
-                <a:latin typeface="Calibri"/>
-              </a:rPr>
-              <a:t>•  Decision (Q-H):  </a:t>
-            </a:r>
-            <a:r>
-              <a:rPr sz="1400" b="0" i="0">
+              <a:rPr sz="1300" b="1" i="0">
+                <a:solidFill>
+                  <a:srgbClr val="C87F0A"/>
+                </a:solidFill>
+                <a:latin typeface="Calibri"/>
+              </a:rPr>
+              <a:t>•  On-the-loop control:  </a:t>
+            </a:r>
+            <a:r>
+              <a:rPr sz="1300" b="0" i="0">
                 <a:solidFill>
                   <a:srgbClr val="333333"/>
                 </a:solidFill>
                 <a:latin typeface="Calibri"/>
               </a:rPr>
-              <a:t>add a rationale/explanation ReportContent so systems can report why, not just what.</a:t>
+              <a:t>supervision verbs - configure / suspend / acknowledge / override - as engagement authority becomes a function of autonomy level (Q-K).</a:t>
             </a:r>
           </a:p>
           <a:p>
@@ -8890,33 +8669,61 @@
                 <a:spcPts val="200"/>
               </a:spcBef>
               <a:spcAft>
-                <a:spcPts val="900"/>
+                <a:spcPts val="800"/>
               </a:spcAft>
             </a:pPr>
             <a:r>
-              <a:rPr sz="1400" b="1" i="0">
-                <a:solidFill>
-                  <a:srgbClr val="2E7D32"/>
-                </a:solidFill>
-                <a:latin typeface="Calibri"/>
-              </a:rPr>
-              <a:t>•  Checked:  </a:t>
-            </a:r>
-            <a:r>
-              <a:rPr sz="1400" b="0" i="0">
+              <a:rPr sz="1300" b="1" i="0">
+                <a:solidFill>
+                  <a:srgbClr val="C87F0A"/>
+                </a:solidFill>
+                <a:latin typeface="Calibri"/>
+              </a:rPr>
+              <a:t>•  Denied-comms operation:  </a:t>
+            </a:r>
+            <a:r>
+              <a:rPr sz="1300" b="0" i="0">
                 <a:solidFill>
                   <a:srgbClr val="333333"/>
                 </a:solidFill>
                 <a:latin typeface="Calibri"/>
               </a:rPr>
-              <a:t>Route, phased planning (PlanBody/PlanPhase), and position reporting already exist - not gaps.</a:t>
-            </a:r>
-          </a:p>
-        </p:txBody>
-      </p:sp>
-      <p:sp>
-        <p:nvSpPr>
-          <p:cNvPr id="9" name="TextBox 8"/>
+              <a:t>an operating mode + deployable relay entity for comms-denied autonomy - SubT + sustainment (G1 -&gt; Q-O; the relay verb lox#COMREL exists).</a:t>
+            </a:r>
+          </a:p>
+          <a:p>
+            <a:pPr>
+              <a:spcBef>
+                <a:spcPts val="200"/>
+              </a:spcBef>
+              <a:spcAft>
+                <a:spcPts val="800"/>
+              </a:spcAft>
+            </a:pPr>
+            <a:r>
+              <a:rPr sz="1300" b="1" i="0">
+                <a:solidFill>
+                  <a:srgbClr val="C87F0A"/>
+                </a:solidFill>
+                <a:latin typeface="Calibri"/>
+              </a:rPr>
+              <a:t>•  Deception:  </a:t>
+            </a:r>
+            <a:r>
+              <a:rPr sz="1300" b="0" i="0">
+                <a:solidFill>
+                  <a:srgbClr val="333333"/>
+                </a:solidFill>
+                <a:latin typeface="Calibri"/>
+              </a:rPr>
+              <a:t>decoy role + threat-aware order annotations - sustainment + OPFOR targeting (G8 -&gt; Q-S; deception verbs exist).</a:t>
+            </a:r>
+          </a:p>
+        </p:txBody>
+      </p:sp>
+      <p:sp>
+        <p:nvSpPr>
+          <p:cNvPr id="7" name="TextBox 6"/>
           <p:cNvSpPr txBox="1"/>
           <p:nvPr/>
         </p:nvSpPr>
@@ -8952,14 +8759,14 @@
                 </a:solidFill>
                 <a:latin typeface="Calibri"/>
               </a:rPr>
-              <a:t>CASEVAC-Walk.md  -  log sec 6b (X1-X6)  -  5 CASEVAC tabs in the .xml workbooks</a:t>
-            </a:r>
-          </a:p>
-        </p:txBody>
-      </p:sp>
-      <p:sp>
-        <p:nvSpPr>
-          <p:cNvPr id="10" name="TextBox 9"/>
+              <a:t>FireSupport-Walk.md + DroneWarfare-LIRC-OPFOR-Walk.md  -  log secs 6e (W1-W3) / 6k (G14)  -  decisions Q-K/O/S/W  -  Fire Support Order + LIRC Kill-Box Engagement Order tabs</a:t>
+            </a:r>
+          </a:p>
+        </p:txBody>
+      </p:sp>
+      <p:sp>
+        <p:nvSpPr>
+          <p:cNvPr id="8" name="TextBox 7"/>
           <p:cNvSpPr txBox="1"/>
           <p:nvPr/>
         </p:nvSpPr>
@@ -8993,7 +8800,7 @@
       </p:sp>
       <p:sp>
         <p:nvSpPr>
-          <p:cNvPr id="11" name="TextBox 10"/>
+          <p:cNvPr id="9" name="TextBox 8"/>
           <p:cNvSpPr txBox="1"/>
           <p:nvPr/>
         </p:nvSpPr>
@@ -9116,7 +8923,7 @@
                 </a:solidFill>
                 <a:latin typeface="Calibri"/>
               </a:rPr>
-              <a:t>Fire Support: autonomous engagement authority</a:t>
+              <a:t>Decisions (1/3): model structure</a:t>
             </a:r>
           </a:p>
         </p:txBody>
@@ -9150,74 +8957,21 @@
                 </a:solidFill>
                 <a:latin typeface="Calibri"/>
               </a:rPr>
-              <a:t>The task/effect axis</a:t>
-            </a:r>
-          </a:p>
-        </p:txBody>
-      </p:sp>
-      <p:sp>
-        <p:nvSpPr>
-          <p:cNvPr id="5" name="Rounded Rectangle 4"/>
-          <p:cNvSpPr/>
-          <p:nvPr/>
-        </p:nvSpPr>
-        <p:spPr>
-          <a:xfrm>
-            <a:off x="731520" y="1783080"/>
-            <a:ext cx="10744200" cy="1463040"/>
-          </a:xfrm>
-          <a:prstGeom prst="roundRect">
-            <a:avLst/>
-          </a:prstGeom>
-          <a:solidFill>
-            <a:srgbClr val="C0392B"/>
-          </a:solidFill>
-          <a:ln>
-            <a:noFill/>
-          </a:ln>
-        </p:spPr>
-        <p:style>
-          <a:lnRef idx="1">
-            <a:schemeClr val="accent1"/>
-          </a:lnRef>
-          <a:fillRef idx="3">
-            <a:schemeClr val="accent1"/>
-          </a:fillRef>
-          <a:effectRef idx="2">
-            <a:schemeClr val="accent1"/>
-          </a:effectRef>
-          <a:fontRef idx="minor">
-            <a:schemeClr val="lt1"/>
-          </a:fontRef>
-        </p:style>
-        <p:txBody>
-          <a:bodyPr rtlCol="0" anchor="ctr" wrap="square"/>
-          <a:lstStyle/>
-          <a:p>
-            <a:pPr algn="ctr"/>
-            <a:r>
-              <a:rPr sz="1500" b="1" i="0">
-                <a:solidFill>
-                  <a:srgbClr val="FFFFFF"/>
-                </a:solidFill>
-                <a:latin typeface="Calibri"/>
-              </a:rPr>
-              <a:t>W1  -  No link between autonomy level and permission to engage
-The standard can say WHAT effect and WHICH ROE - but not WHO (which commander) authorized the engagement, nor whether a FullAuto system may take a lethal action without a human in / on the loop.</a:t>
-            </a:r>
-          </a:p>
-        </p:txBody>
-      </p:sp>
-      <p:sp>
-        <p:nvSpPr>
-          <p:cNvPr id="6" name="TextBox 5"/>
+              <a:t>Full register - all 24, with what each resolves: log section 7</a:t>
+            </a:r>
+          </a:p>
+        </p:txBody>
+      </p:sp>
+      <p:sp>
+        <p:nvSpPr>
+          <p:cNvPr id="5" name="TextBox 4"/>
           <p:cNvSpPr txBox="1"/>
           <p:nvPr/>
         </p:nvSpPr>
         <p:spPr>
           <a:xfrm>
-            <a:off x="640080" y="3383280"/>
-            <a:ext cx="10972800" cy="2971800"/>
+            <a:off x="640080" y="1737360"/>
+            <a:ext cx="10972800" cy="4617720"/>
           </a:xfrm>
           <a:prstGeom prst="rect">
             <a:avLst/>
@@ -9235,26 +8989,26 @@
                 <a:spcPts val="200"/>
               </a:spcBef>
               <a:spcAft>
-                <a:spcPts val="800"/>
+                <a:spcPts val="1800"/>
               </a:spcAft>
             </a:pPr>
             <a:r>
-              <a:rPr sz="1300" b="1" i="0">
-                <a:solidFill>
-                  <a:srgbClr val="2E7D32"/>
-                </a:solidFill>
-                <a:latin typeface="Calibri"/>
-              </a:rPr>
-              <a:t>•  Checked - already exist (not gaps):  </a:t>
-            </a:r>
-            <a:r>
-              <a:rPr sz="1300" b="0" i="0">
+              <a:rPr sz="1800" b="1" i="0">
+                <a:solidFill>
+                  <a:srgbClr val="2E869A"/>
+                </a:solidFill>
+                <a:latin typeface="Calibri"/>
+              </a:rPr>
+              <a:t>•  Q-A  </a:t>
+            </a:r>
+            <a:r>
+              <a:rPr sz="1800" b="0" i="0">
                 <a:solidFill>
                   <a:srgbClr val="333333"/>
                 </a:solidFill>
                 <a:latin typeface="Calibri"/>
               </a:rPr>
-              <a:t>rules of engagement (RuleOfEngagement, WeaponRuleOfEngagementCode - LOX), desired effect (DesiredEffectCode), target (hasAffectedEntity), and the engage/attack verbs (lox#ENGAGE / lox#ATTACK).</a:t>
+              <a:t>UAV/robot typing: a role on the existing Platform tree, or a parallel Robot tree?</a:t>
             </a:r>
           </a:p>
           <a:p>
@@ -9263,26 +9017,26 @@
                 <a:spcPts val="200"/>
               </a:spcBef>
               <a:spcAft>
-                <a:spcPts val="800"/>
+                <a:spcPts val="1800"/>
               </a:spcAft>
             </a:pPr>
             <a:r>
-              <a:rPr sz="1300" b="1" i="0">
-                <a:solidFill>
-                  <a:srgbClr val="C87F0A"/>
-                </a:solidFill>
-                <a:latin typeface="Calibri"/>
-              </a:rPr>
-              <a:t>•  Note:  </a:t>
-            </a:r>
-            <a:r>
-              <a:rPr sz="1300" b="0" i="0">
+              <a:rPr sz="1800" b="1" i="0">
+                <a:solidFill>
+                  <a:srgbClr val="2E869A"/>
+                </a:solidFill>
+                <a:latin typeface="Calibri"/>
+              </a:rPr>
+              <a:t>•  Q-B  </a:t>
+            </a:r>
+            <a:r>
+              <a:rPr sz="1800" b="0" i="0">
                 <a:solidFill>
                   <a:srgbClr val="333333"/>
                 </a:solidFill>
                 <a:latin typeface="Calibri"/>
               </a:rPr>
-              <a:t>AuthorizationHeader is message-sender authentication, not command authorization of fires - so who-approved-the-engagement is part of W1, not covered.</a:t>
+              <a:t>Swarm: derive from CollectiveEntity (ActorEntity) so it can be tasked.</a:t>
             </a:r>
           </a:p>
           <a:p>
@@ -9291,26 +9045,26 @@
                 <a:spcPts val="200"/>
               </a:spcBef>
               <a:spcAft>
-                <a:spcPts val="800"/>
+                <a:spcPts val="1800"/>
               </a:spcAft>
             </a:pPr>
             <a:r>
-              <a:rPr sz="1300" b="1" i="0">
-                <a:solidFill>
-                  <a:srgbClr val="C87F0A"/>
-                </a:solidFill>
-                <a:latin typeface="Calibri"/>
-              </a:rPr>
-              <a:t>•  Also gaps:  </a:t>
-            </a:r>
-            <a:r>
-              <a:rPr sz="1300" b="0" i="0">
+              <a:rPr sz="1800" b="1" i="0">
+                <a:solidFill>
+                  <a:srgbClr val="2E869A"/>
+                </a:solidFill>
+                <a:latin typeface="Calibri"/>
+              </a:rPr>
+              <a:t>•  Q-C  </a:t>
+            </a:r>
+            <a:r>
+              <a:rPr sz="1800" b="0" i="0">
                 <a:solidFill>
                   <a:srgbClr val="333333"/>
                 </a:solidFill>
                 <a:latin typeface="Calibri"/>
               </a:rPr>
-              <a:t>W2 weapon/munition not typed; W3 no battle-damage / effect-achieved report (TaskStatus = the task ran, not the target destroyed).</a:t>
+              <a:t>Sensor: entity, class, or attribute - choose one model and apply it everywhere.</a:t>
             </a:r>
           </a:p>
           <a:p>
@@ -9319,68 +9073,40 @@
                 <a:spcPts val="200"/>
               </a:spcBef>
               <a:spcAft>
-                <a:spcPts val="800"/>
+                <a:spcPts val="1800"/>
               </a:spcAft>
             </a:pPr>
             <a:r>
-              <a:rPr sz="1300" b="1" i="0">
+              <a:rPr sz="1800" b="1" i="0">
                 <a:solidFill>
                   <a:srgbClr val="2E869A"/>
                 </a:solidFill>
                 <a:latin typeface="Calibri"/>
               </a:rPr>
-              <a:t>•  Decision (Q-K):  </a:t>
-            </a:r>
-            <a:r>
-              <a:rPr sz="1300" b="0" i="0">
+              <a:t>•  Q-D  </a:t>
+            </a:r>
+            <a:r>
+              <a:rPr sz="1800" b="0" i="0">
                 <a:solidFill>
                   <a:srgbClr val="333333"/>
                 </a:solidFill>
                 <a:latin typeface="Calibri"/>
               </a:rPr>
-              <a:t>model engagement authority as a function of autonomy level - may this system take this action unsupervised?</a:t>
-            </a:r>
-          </a:p>
-          <a:p>
-            <a:pPr>
-              <a:spcBef>
-                <a:spcPts val="200"/>
-              </a:spcBef>
-              <a:spcAft>
-                <a:spcPts val="800"/>
-              </a:spcAft>
-            </a:pPr>
-            <a:r>
-              <a:rPr sz="1300" b="1" i="0">
-                <a:solidFill>
-                  <a:srgbClr val="2E7D32"/>
-                </a:solidFill>
-                <a:latin typeface="Calibri"/>
-              </a:rPr>
-              <a:t>•  Candidate answer (Q-W):  </a:t>
-            </a:r>
-            <a:r>
-              <a:rPr sz="1300" b="0" i="0">
-                <a:solidFill>
-                  <a:srgbClr val="333333"/>
-                </a:solidFill>
-                <a:latin typeface="Calibri"/>
-              </a:rPr>
-              <a:t>the SME LIRC scenario supplies a concrete model - a weapons-control status + kill-box (an authorization-bearing area: geo + time window + civilian-clearance + target type) that gates autonomous lethal action (G14). Unifies W1 with area-as-subject (N1/Q-M).</a:t>
-            </a:r>
-          </a:p>
-        </p:txBody>
-      </p:sp>
-      <p:sp>
-        <p:nvSpPr>
-          <p:cNvPr id="7" name="TextBox 6"/>
+              <a:t>Autonomy: choose one normative vocabulary.</a:t>
+            </a:r>
+          </a:p>
+        </p:txBody>
+      </p:sp>
+      <p:sp>
+        <p:nvSpPr>
+          <p:cNvPr id="6" name="TextBox 5"/>
           <p:cNvSpPr txBox="1"/>
           <p:nvPr/>
         </p:nvSpPr>
         <p:spPr>
           <a:xfrm>
-            <a:off x="502920" y="6126480"/>
-            <a:ext cx="11155680" cy="274320"/>
+            <a:off x="502920" y="6419088"/>
+            <a:ext cx="11155680" cy="320040"/>
           </a:xfrm>
           <a:prstGeom prst="rect">
             <a:avLst/>
@@ -9394,55 +9120,12 @@
           <a:lstStyle/>
           <a:p>
             <a:r>
-              <a:rPr sz="1000" b="1" i="1">
-                <a:solidFill>
-                  <a:srgbClr val="2E869A"/>
-                </a:solidFill>
-                <a:latin typeface="Calibri"/>
-              </a:rPr>
-              <a:t>Dig deeper:  </a:t>
-            </a:r>
-            <a:r>
-              <a:rPr sz="1000" b="0" i="1">
+              <a:rPr sz="900" b="0" i="0">
                 <a:solidFill>
                   <a:srgbClr val="666666"/>
                 </a:solidFill>
                 <a:latin typeface="Calibri"/>
               </a:rPr>
-              <a:t>FireSupport-Walk.md + DroneWarfare-LIRC-OPFOR-Walk.md  -  log sec 6e (W1-W3) / 6k (G14, Q-W)  -  Fire Support Order + LIRC Kill-Box Engagement Order tabs</a:t>
-            </a:r>
-          </a:p>
-        </p:txBody>
-      </p:sp>
-      <p:sp>
-        <p:nvSpPr>
-          <p:cNvPr id="8" name="TextBox 7"/>
-          <p:cNvSpPr txBox="1"/>
-          <p:nvPr/>
-        </p:nvSpPr>
-        <p:spPr>
-          <a:xfrm>
-            <a:off x="502920" y="6419088"/>
-            <a:ext cx="11155680" cy="320040"/>
-          </a:xfrm>
-          <a:prstGeom prst="rect">
-            <a:avLst/>
-          </a:prstGeom>
-          <a:noFill/>
-        </p:spPr>
-        <p:txBody>
-          <a:bodyPr wrap="square">
-            <a:spAutoFit/>
-          </a:bodyPr>
-          <a:lstStyle/>
-          <a:p>
-            <a:r>
-              <a:rPr sz="900" b="0" i="0">
-                <a:solidFill>
-                  <a:srgbClr val="666666"/>
-                </a:solidFill>
-                <a:latin typeface="Calibri"/>
-              </a:rPr>
               <a:t>C2SIM ASX Sub-group   |   Hyssos   |   July 2026</a:t>
             </a:r>
           </a:p>
@@ -9450,7 +9133,7 @@
       </p:sp>
       <p:sp>
         <p:nvSpPr>
-          <p:cNvPr id="9" name="TextBox 8"/>
+          <p:cNvPr id="7" name="TextBox 6"/>
           <p:cNvSpPr txBox="1"/>
           <p:nvPr/>
         </p:nvSpPr>
@@ -9573,7 +9256,7 @@
                 </a:solidFill>
                 <a:latin typeface="Calibri"/>
               </a:rPr>
-              <a:t>The task/effect axis is mostly already there</a:t>
+              <a:t>Decisions (2/3): new content types needed</a:t>
             </a:r>
           </a:p>
         </p:txBody>
@@ -9607,127 +9290,21 @@
                 </a:solidFill>
                 <a:latin typeface="Calibri"/>
               </a:rPr>
-              <a:t>Across engagement, delivery, manipulation, rescue, search</a:t>
-            </a:r>
-          </a:p>
-        </p:txBody>
-      </p:sp>
-      <p:sp>
-        <p:nvSpPr>
-          <p:cNvPr id="5" name="Rounded Rectangle 4"/>
-          <p:cNvSpPr/>
-          <p:nvPr/>
-        </p:nvSpPr>
-        <p:spPr>
-          <a:xfrm>
-            <a:off x="731520" y="1828800"/>
-            <a:ext cx="5257800" cy="1600200"/>
-          </a:xfrm>
-          <a:prstGeom prst="roundRect">
-            <a:avLst/>
-          </a:prstGeom>
-          <a:solidFill>
-            <a:srgbClr val="2E7D32"/>
-          </a:solidFill>
-          <a:ln>
-            <a:noFill/>
-          </a:ln>
-        </p:spPr>
-        <p:style>
-          <a:lnRef idx="1">
-            <a:schemeClr val="accent1"/>
-          </a:lnRef>
-          <a:fillRef idx="3">
-            <a:schemeClr val="accent1"/>
-          </a:fillRef>
-          <a:effectRef idx="2">
-            <a:schemeClr val="accent1"/>
-          </a:effectRef>
-          <a:fontRef idx="minor">
-            <a:schemeClr val="lt1"/>
-          </a:fontRef>
-        </p:style>
-        <p:txBody>
-          <a:bodyPr rtlCol="0" anchor="ctr" wrap="square"/>
-          <a:lstStyle/>
-          <a:p>
-            <a:pPr algn="ctr"/>
-            <a:r>
-              <a:rPr sz="1300" b="1" i="0">
-                <a:solidFill>
-                  <a:srgbClr val="FFFFFF"/>
-                </a:solidFill>
-                <a:latin typeface="Calibri"/>
-              </a:rPr>
-              <a:t>Action verbs already exist
-LOX has 446 TaskActionCode verbs - ENGAGE, ATTACK, BREACH, CONSTR, CLROBS, MINLAY, TRANS, RESUPL, RESCUE, RECOVR, NTRCOM, ESCRT, RECCE, PATROL. Not a missing-verb problem.</a:t>
-            </a:r>
-          </a:p>
-        </p:txBody>
-      </p:sp>
-      <p:sp>
-        <p:nvSpPr>
-          <p:cNvPr id="6" name="Rounded Rectangle 5"/>
-          <p:cNvSpPr/>
-          <p:nvPr/>
-        </p:nvSpPr>
-        <p:spPr>
-          <a:xfrm>
-            <a:off x="6217920" y="1828800"/>
-            <a:ext cx="5257800" cy="1600200"/>
-          </a:xfrm>
-          <a:prstGeom prst="roundRect">
-            <a:avLst/>
-          </a:prstGeom>
-          <a:solidFill>
-            <a:srgbClr val="1F3A5F"/>
-          </a:solidFill>
-          <a:ln>
-            <a:noFill/>
-          </a:ln>
-        </p:spPr>
-        <p:style>
-          <a:lnRef idx="1">
-            <a:schemeClr val="accent1"/>
-          </a:lnRef>
-          <a:fillRef idx="3">
-            <a:schemeClr val="accent1"/>
-          </a:fillRef>
-          <a:effectRef idx="2">
-            <a:schemeClr val="accent1"/>
-          </a:effectRef>
-          <a:fontRef idx="minor">
-            <a:schemeClr val="lt1"/>
-          </a:fontRef>
-        </p:style>
-        <p:txBody>
-          <a:bodyPr rtlCol="0" anchor="ctr" wrap="square"/>
-          <a:lstStyle/>
-          <a:p>
-            <a:pPr algn="ctr"/>
-            <a:r>
-              <a:rPr sz="1300" b="1" i="0">
-                <a:solidFill>
-                  <a:srgbClr val="FFFFFF"/>
-                </a:solidFill>
-                <a:latin typeface="Calibri"/>
-              </a:rPr>
-              <a:t>The real gap: payload / effector / weapon typing
-Cargo (L1), manipulator (E2), weapon (W2) are one gap: no typed thing carried or wielded.</a:t>
-            </a:r>
-          </a:p>
-        </p:txBody>
-      </p:sp>
-      <p:sp>
-        <p:nvSpPr>
-          <p:cNvPr id="7" name="TextBox 6"/>
+              <a:t>continued - full text + grounding in log section 7</a:t>
+            </a:r>
+          </a:p>
+        </p:txBody>
+      </p:sp>
+      <p:sp>
+        <p:nvSpPr>
+          <p:cNvPr id="5" name="TextBox 4"/>
           <p:cNvSpPr txBox="1"/>
           <p:nvPr/>
         </p:nvSpPr>
         <p:spPr>
           <a:xfrm>
-            <a:off x="640080" y="3657600"/>
-            <a:ext cx="10972800" cy="2697480"/>
+            <a:off x="640080" y="1463040"/>
+            <a:ext cx="10972800" cy="4754880"/>
           </a:xfrm>
           <a:prstGeom prst="rect">
             <a:avLst/>
@@ -9745,26 +9322,26 @@
                 <a:spcPts val="200"/>
               </a:spcBef>
               <a:spcAft>
-                <a:spcPts val="900"/>
+                <a:spcPts val="800"/>
               </a:spcAft>
             </a:pPr>
             <a:r>
-              <a:rPr sz="1400" b="1" i="0">
-                <a:solidFill>
-                  <a:srgbClr val="2E7D32"/>
-                </a:solidFill>
-                <a:latin typeface="Calibri"/>
-              </a:rPr>
-              <a:t>•  Also already there (checked):  </a:t>
-            </a:r>
-            <a:r>
-              <a:rPr sz="1400" b="0" i="0">
+              <a:rPr sz="1350" b="1" i="0">
+                <a:solidFill>
+                  <a:srgbClr val="2E869A"/>
+                </a:solidFill>
+                <a:latin typeface="Calibri"/>
+              </a:rPr>
+              <a:t>•  Q-E  </a:t>
+            </a:r>
+            <a:r>
+              <a:rPr sz="1350" b="0" i="0">
                 <a:solidFill>
                   <a:srgbClr val="333333"/>
                 </a:solidFill>
                 <a:latin typeface="Calibri"/>
               </a:rPr>
-              <a:t>effects (DesiredEffectCode), targets (hasAffectedEntity), resources + quantities, ROE, platform types (Vehicle / Aircraft / SurfaceVessel).</a:t>
+              <a:t>Inline entity definition for newly-observed entities in reports.</a:t>
             </a:r>
           </a:p>
           <a:p>
@@ -9773,26 +9350,26 @@
                 <a:spcPts val="200"/>
               </a:spcBef>
               <a:spcAft>
-                <a:spcPts val="900"/>
+                <a:spcPts val="800"/>
               </a:spcAft>
             </a:pPr>
             <a:r>
-              <a:rPr sz="1400" b="1" i="0">
-                <a:solidFill>
-                  <a:srgbClr val="C87F0A"/>
-                </a:solidFill>
-                <a:latin typeface="Calibri"/>
-              </a:rPr>
-              <a:t>•  Small residuals:  </a:t>
-            </a:r>
-            <a:r>
-              <a:rPr sz="1400" b="0" i="0">
+              <a:rPr sz="1350" b="1" i="0">
+                <a:solidFill>
+                  <a:srgbClr val="2E869A"/>
+                </a:solidFill>
+                <a:latin typeface="Calibri"/>
+              </a:rPr>
+              <a:t>•  Q-F  </a:t>
+            </a:r>
+            <a:r>
+              <a:rPr sz="1350" b="0" i="0">
                 <a:solidFill>
                   <a:srgbClr val="333333"/>
                 </a:solidFill>
                 <a:latin typeface="Calibri"/>
               </a:rPr>
-              <a:t>an area is not yet a possible task/report subject (N1 / Q-M); an area-coverage exploration goal (G2); a general-purpose tow/salvage verb (TOWTGT covers gunnery targets only); a decoy role.</a:t>
+              <a:t>MediaReference identity; separate media-format from sensor-modality.</a:t>
             </a:r>
           </a:p>
           <a:p>
@@ -9801,40 +9378,208 @@
                 <a:spcPts val="200"/>
               </a:spcBef>
               <a:spcAft>
-                <a:spcPts val="900"/>
+                <a:spcPts val="800"/>
               </a:spcAft>
             </a:pPr>
             <a:r>
-              <a:rPr sz="1400" b="1" i="0">
+              <a:rPr sz="1350" b="1" i="0">
                 <a:solidFill>
                   <a:srgbClr val="2E869A"/>
                 </a:solidFill>
                 <a:latin typeface="Calibri"/>
               </a:rPr>
-              <a:t>•  Decision (Q-L):  </a:t>
-            </a:r>
-            <a:r>
-              <a:rPr sz="1400" b="0" i="0">
+              <a:t>•  Q-G  </a:t>
+            </a:r>
+            <a:r>
+              <a:rPr sz="1350" b="0" i="0">
                 <a:solidFill>
                   <a:srgbClr val="333333"/>
                 </a:solidFill>
                 <a:latin typeface="Calibri"/>
               </a:rPr>
-              <a:t>add the typed payload / effector / weapon - the verbs are already in LOX.</a:t>
-            </a:r>
-          </a:p>
-        </p:txBody>
-      </p:sp>
-      <p:sp>
-        <p:nvSpPr>
-          <p:cNvPr id="8" name="TextBox 7"/>
+              <a:t>Robot-to-robot coordination content type + issuing authority (CASEVAC).</a:t>
+            </a:r>
+          </a:p>
+          <a:p>
+            <a:pPr>
+              <a:spcBef>
+                <a:spcPts val="200"/>
+              </a:spcBef>
+              <a:spcAft>
+                <a:spcPts val="800"/>
+              </a:spcAft>
+            </a:pPr>
+            <a:r>
+              <a:rPr sz="1350" b="1" i="0">
+                <a:solidFill>
+                  <a:srgbClr val="2E869A"/>
+                </a:solidFill>
+                <a:latin typeface="Calibri"/>
+              </a:rPr>
+              <a:t>•  Q-H  </a:t>
+            </a:r>
+            <a:r>
+              <a:rPr sz="1350" b="0" i="0">
+                <a:solidFill>
+                  <a:srgbClr val="333333"/>
+                </a:solidFill>
+                <a:latin typeface="Calibri"/>
+              </a:rPr>
+              <a:t>Rationale/explanation ReportContent - report why, not just what (CASEVAC).</a:t>
+            </a:r>
+          </a:p>
+          <a:p>
+            <a:pPr>
+              <a:spcBef>
+                <a:spcPts val="200"/>
+              </a:spcBef>
+              <a:spcAft>
+                <a:spcPts val="800"/>
+              </a:spcAft>
+            </a:pPr>
+            <a:r>
+              <a:rPr sz="1350" b="1" i="0">
+                <a:solidFill>
+                  <a:srgbClr val="2E869A"/>
+                </a:solidFill>
+                <a:latin typeface="Calibri"/>
+              </a:rPr>
+              <a:t>•  Q-I  </a:t>
+            </a:r>
+            <a:r>
+              <a:rPr sz="1350" b="0" i="0">
+                <a:solidFill>
+                  <a:srgbClr val="333333"/>
+                </a:solidFill>
+                <a:latin typeface="Calibri"/>
+              </a:rPr>
+              <a:t>Media-independent sensor-reading (value+unit+modality) + full SensorType taxonomy.</a:t>
+            </a:r>
+          </a:p>
+          <a:p>
+            <a:pPr>
+              <a:spcBef>
+                <a:spcPts val="200"/>
+              </a:spcBef>
+              <a:spcAft>
+                <a:spcPts val="800"/>
+              </a:spcAft>
+            </a:pPr>
+            <a:r>
+              <a:rPr sz="1350" b="1" i="0">
+                <a:solidFill>
+                  <a:srgbClr val="2E869A"/>
+                </a:solidFill>
+                <a:latin typeface="Calibri"/>
+              </a:rPr>
+              <a:t>•  Q-J  </a:t>
+            </a:r>
+            <a:r>
+              <a:rPr sz="1350" b="0" i="0">
+                <a:solidFill>
+                  <a:srgbClr val="333333"/>
+                </a:solidFill>
+                <a:latin typeface="Calibri"/>
+              </a:rPr>
+              <a:t>Swarm residuals: network params, leader role, aggregation, member lifecycle.</a:t>
+            </a:r>
+          </a:p>
+          <a:p>
+            <a:pPr>
+              <a:spcBef>
+                <a:spcPts val="200"/>
+              </a:spcBef>
+              <a:spcAft>
+                <a:spcPts val="800"/>
+              </a:spcAft>
+            </a:pPr>
+            <a:r>
+              <a:rPr sz="1350" b="1" i="0">
+                <a:solidFill>
+                  <a:srgbClr val="2E869A"/>
+                </a:solidFill>
+                <a:latin typeface="Calibri"/>
+              </a:rPr>
+              <a:t>•  Q-K  </a:t>
+            </a:r>
+            <a:r>
+              <a:rPr sz="1350" b="0" i="0">
+                <a:solidFill>
+                  <a:srgbClr val="333333"/>
+                </a:solidFill>
+                <a:latin typeface="Calibri"/>
+              </a:rPr>
+              <a:t>Engagement authority as a function of autonomy level (Fire Support).</a:t>
+            </a:r>
+          </a:p>
+          <a:p>
+            <a:pPr>
+              <a:spcBef>
+                <a:spcPts val="200"/>
+              </a:spcBef>
+              <a:spcAft>
+                <a:spcPts val="800"/>
+              </a:spcAft>
+            </a:pPr>
+            <a:r>
+              <a:rPr sz="1350" b="1" i="0">
+                <a:solidFill>
+                  <a:srgbClr val="2E869A"/>
+                </a:solidFill>
+                <a:latin typeface="Calibri"/>
+              </a:rPr>
+              <a:t>•  Q-L  </a:t>
+            </a:r>
+            <a:r>
+              <a:rPr sz="1350" b="0" i="0">
+                <a:solidFill>
+                  <a:srgbClr val="333333"/>
+                </a:solidFill>
+                <a:latin typeface="Calibri"/>
+              </a:rPr>
+              <a:t>Typed payload/effector/weapon (the action verbs already exist in LOX; only tow/salvage is a residual).</a:t>
+            </a:r>
+          </a:p>
+          <a:p>
+            <a:pPr>
+              <a:spcBef>
+                <a:spcPts val="200"/>
+              </a:spcBef>
+              <a:spcAft>
+                <a:spcPts val="800"/>
+              </a:spcAft>
+            </a:pPr>
+            <a:r>
+              <a:rPr sz="1350" b="1" i="0">
+                <a:solidFill>
+                  <a:srgbClr val="2E869A"/>
+                </a:solidFill>
+                <a:latin typeface="Calibri"/>
+              </a:rPr>
+              <a:t>•  Q-M  </a:t>
+            </a:r>
+            <a:r>
+              <a:rPr sz="1350" b="0" i="0">
+                <a:solidFill>
+                  <a:srgbClr val="333333"/>
+                </a:solidFill>
+                <a:latin typeface="Calibri"/>
+              </a:rPr>
+              <a:t>Let an area be the subject of a task/report (hasAffectedArea + area-state).</a:t>
+            </a:r>
+          </a:p>
+        </p:txBody>
+      </p:sp>
+      <p:sp>
+        <p:nvSpPr>
+          <p:cNvPr id="6" name="TextBox 5"/>
           <p:cNvSpPr txBox="1"/>
           <p:nvPr/>
         </p:nvSpPr>
         <p:spPr>
           <a:xfrm>
-            <a:off x="502920" y="6126480"/>
-            <a:ext cx="11155680" cy="274320"/>
+            <a:off x="502920" y="6419088"/>
+            <a:ext cx="11155680" cy="320040"/>
           </a:xfrm>
           <a:prstGeom prst="rect">
             <a:avLst/>
@@ -9848,55 +9593,12 @@
           <a:lstStyle/>
           <a:p>
             <a:r>
-              <a:rPr sz="1000" b="1" i="1">
-                <a:solidFill>
-                  <a:srgbClr val="2E869A"/>
-                </a:solidFill>
-                <a:latin typeface="Calibri"/>
-              </a:rPr>
-              <a:t>Dig deeper:  </a:t>
-            </a:r>
-            <a:r>
-              <a:rPr sz="1000" b="0" i="1">
+              <a:rPr sz="900" b="0" i="0">
                 <a:solidFill>
                   <a:srgbClr val="666666"/>
                 </a:solidFill>
                 <a:latin typeface="Calibri"/>
               </a:rPr>
-              <a:t>TaskEffect-Batch-Walk.md  -  RedundancyPass-Walk.md  -  log secs 6f / 6g (L, E, R, N series)</a:t>
-            </a:r>
-          </a:p>
-        </p:txBody>
-      </p:sp>
-      <p:sp>
-        <p:nvSpPr>
-          <p:cNvPr id="9" name="TextBox 8"/>
-          <p:cNvSpPr txBox="1"/>
-          <p:nvPr/>
-        </p:nvSpPr>
-        <p:spPr>
-          <a:xfrm>
-            <a:off x="502920" y="6419088"/>
-            <a:ext cx="11155680" cy="320040"/>
-          </a:xfrm>
-          <a:prstGeom prst="rect">
-            <a:avLst/>
-          </a:prstGeom>
-          <a:noFill/>
-        </p:spPr>
-        <p:txBody>
-          <a:bodyPr wrap="square">
-            <a:spAutoFit/>
-          </a:bodyPr>
-          <a:lstStyle/>
-          <a:p>
-            <a:r>
-              <a:rPr sz="900" b="0" i="0">
-                <a:solidFill>
-                  <a:srgbClr val="666666"/>
-                </a:solidFill>
-                <a:latin typeface="Calibri"/>
-              </a:rPr>
               <a:t>C2SIM ASX Sub-group   |   Hyssos   |   July 2026</a:t>
             </a:r>
           </a:p>
@@ -9904,7 +9606,7 @@
       </p:sp>
       <p:sp>
         <p:nvSpPr>
-          <p:cNvPr id="10" name="TextBox 9"/>
+          <p:cNvPr id="7" name="TextBox 6"/>
           <p:cNvSpPr txBox="1"/>
           <p:nvPr/>
         </p:nvSpPr>
@@ -10027,7 +9729,7 @@
                 </a:solidFill>
                 <a:latin typeface="Calibri"/>
               </a:rPr>
-              <a:t>Integrated from the parallel scenario-sourcing effort</a:t>
+              <a:t>Decisions (3/3): from the sourced scenarios</a:t>
             </a:r>
           </a:p>
         </p:txBody>
@@ -10061,7 +9763,7 @@
                 </a:solidFill>
                 <a:latin typeface="Calibri"/>
               </a:rPr>
-              <a:t>SubT (subterranean) + Cooperative MCM (maritime) + Sustainment</a:t>
+              <a:t>continued - full text + grounding in log section 7</a:t>
             </a:r>
           </a:p>
         </p:txBody>
@@ -10074,7 +9776,7 @@
         </p:nvSpPr>
         <p:spPr>
           <a:xfrm>
-            <a:off x="640080" y="1600200"/>
+            <a:off x="640080" y="1371600"/>
             <a:ext cx="10972800" cy="4754880"/>
           </a:xfrm>
           <a:prstGeom prst="rect">
@@ -10093,26 +9795,26 @@
                 <a:spcPts val="200"/>
               </a:spcBef>
               <a:spcAft>
-                <a:spcPts val="1300"/>
+                <a:spcPts val="600"/>
               </a:spcAft>
             </a:pPr>
             <a:r>
-              <a:rPr sz="1500" b="1" i="0">
-                <a:solidFill>
-                  <a:srgbClr val="2E7D32"/>
-                </a:solidFill>
-                <a:latin typeface="Calibri"/>
-              </a:rPr>
-              <a:t>•  Corroborated (fresh domains):  </a:t>
-            </a:r>
-            <a:r>
-              <a:rPr sz="1500" b="0" i="0">
+              <a:rPr sz="1200" b="1" i="0">
+                <a:solidFill>
+                  <a:srgbClr val="2E869A"/>
+                </a:solidFill>
+                <a:latin typeface="Calibri"/>
+              </a:rPr>
+              <a:t>•  Q-N  </a:t>
+            </a:r>
+            <a:r>
+              <a:rPr sz="1200" b="0" i="0">
                 <a:solidFill>
                   <a:srgbClr val="333333"/>
                 </a:solidFill>
                 <a:latin typeface="Calibri"/>
               </a:rPr>
-              <a:t>platform typing P1, robot-to-robot X1 (-&gt; cross-cueing), persistent tasking N2, and the sensor-report problem Y1.</a:t>
+              <a:t>Area-coverage / exploration goal (explore-until-covered) - search verbs already exist.</a:t>
             </a:r>
           </a:p>
           <a:p>
@@ -10121,26 +9823,26 @@
                 <a:spcPts val="200"/>
               </a:spcBef>
               <a:spcAft>
-                <a:spcPts val="1300"/>
+                <a:spcPts val="600"/>
               </a:spcAft>
             </a:pPr>
             <a:r>
-              <a:rPr sz="1500" b="1" i="0">
+              <a:rPr sz="1200" b="1" i="0">
                 <a:solidFill>
                   <a:srgbClr val="2E869A"/>
                 </a:solidFill>
                 <a:latin typeface="Calibri"/>
               </a:rPr>
-              <a:t>•  Best contribution (G4):  </a:t>
-            </a:r>
-            <a:r>
-              <a:rPr sz="1500" b="0" i="0">
+              <a:t>•  Q-O  </a:t>
+            </a:r>
+            <a:r>
+              <a:rPr sz="1200" b="0" i="0">
                 <a:solidFill>
                   <a:srgbClr val="333333"/>
                 </a:solidFill>
                 <a:latin typeface="Calibri"/>
               </a:rPr>
-              <a:t>one generic Detection Report (confidence + error-bound + false-positive) subsumes Video/CBRN/EW/GPR/naval-mine - resolves Y1 (and M3/M4); the measurement/taxonomy side (Y2/Y5) folds into Q-I.</a:t>
+              <a:t>Denied-comms operating mode + deployable relay entity (the relay verb lox#COMREL already exists).</a:t>
             </a:r>
           </a:p>
           <a:p>
@@ -10149,26 +9851,26 @@
                 <a:spcPts val="200"/>
               </a:spcBef>
               <a:spcAft>
-                <a:spcPts val="1300"/>
+                <a:spcPts val="600"/>
               </a:spcAft>
             </a:pPr>
             <a:r>
-              <a:rPr sz="1500" b="1" i="0">
-                <a:solidFill>
-                  <a:srgbClr val="C87F0A"/>
-                </a:solidFill>
-                <a:latin typeface="Calibri"/>
-              </a:rPr>
-              <a:t>•  New gaps:  </a:t>
-            </a:r>
-            <a:r>
-              <a:rPr sz="1500" b="0" i="0">
+              <a:rPr sz="1200" b="1" i="0">
+                <a:solidFill>
+                  <a:srgbClr val="2E869A"/>
+                </a:solidFill>
+                <a:latin typeface="Calibri"/>
+              </a:rPr>
+              <a:t>•  Q-P  </a:t>
+            </a:r>
+            <a:r>
+              <a:rPr sz="1200" b="0" i="0">
                 <a:solidFill>
                   <a:srgbClr val="333333"/>
                 </a:solidFill>
                 <a:latin typeface="Calibri"/>
               </a:rPr>
-              <a:t>area-coverage/exploration goal (G2, search verbs exist); denied-comms mode + relay entity (G1, the relay verb COMREL exists); decoy role (G8, deception verbs exist); maritime cross-cue with a shared track (G3); environment conditions (G11); formation geometry (G12).</a:t>
+              <a:t>Cross-cueing: system-to-system tasking + shared classified track/contact (extends Q-G).</a:t>
             </a:r>
           </a:p>
           <a:p>
@@ -10177,17 +9879,222 @@
                 <a:spcPts val="200"/>
               </a:spcBef>
               <a:spcAft>
-                <a:spcPts val="1300"/>
+                <a:spcPts val="600"/>
               </a:spcAft>
             </a:pPr>
             <a:r>
-              <a:rPr sz="1500" b="0" i="0">
-                <a:solidFill>
-                  <a:srgbClr val="666666"/>
-                </a:solidFill>
-                <a:latin typeface="Calibri"/>
-              </a:rPr>
-              <a:t>•  Neutral-actor framing is mostly covered (smx#NEUTRL hostility value; an untyped NeutralSide individual also exists). Counter-UAS, human-machine teaming, and SAR were all extracted in the later validation pass.</a:t>
+              <a:rPr sz="1200" b="1" i="0">
+                <a:solidFill>
+                  <a:srgbClr val="2E869A"/>
+                </a:solidFill>
+                <a:latin typeface="Calibri"/>
+              </a:rPr>
+              <a:t>•  Q-Q  </a:t>
+            </a:r>
+            <a:r>
+              <a:rPr sz="1200" b="0" i="0">
+                <a:solidFill>
+                  <a:srgbClr val="333333"/>
+                </a:solidFill>
+                <a:latin typeface="Calibri"/>
+              </a:rPr>
+              <a:t>One generic Detection Report (confidence + error-bound + false-positive) - resolves Y1/M3/M4 (extends Q-I).</a:t>
+            </a:r>
+          </a:p>
+          <a:p>
+            <a:pPr>
+              <a:spcBef>
+                <a:spcPts val="200"/>
+              </a:spcBef>
+              <a:spcAft>
+                <a:spcPts val="600"/>
+              </a:spcAft>
+            </a:pPr>
+            <a:r>
+              <a:rPr sz="1200" b="1" i="0">
+                <a:solidFill>
+                  <a:srgbClr val="2E869A"/>
+                </a:solidFill>
+                <a:latin typeface="Calibri"/>
+              </a:rPr>
+              <a:t>•  Q-R  </a:t>
+            </a:r>
+            <a:r>
+              <a:rPr sz="1200" b="0" i="0">
+                <a:solidFill>
+                  <a:srgbClr val="333333"/>
+                </a:solidFill>
+                <a:latin typeface="Calibri"/>
+              </a:rPr>
+              <a:t>Platform locomotion/role subtypes: wheeled/tracked/legged UGV; detector/neutralizer USV (extends Q-A).</a:t>
+            </a:r>
+          </a:p>
+          <a:p>
+            <a:pPr>
+              <a:spcBef>
+                <a:spcPts val="200"/>
+              </a:spcBef>
+              <a:spcAft>
+                <a:spcPts val="600"/>
+              </a:spcAft>
+            </a:pPr>
+            <a:r>
+              <a:rPr sz="1200" b="1" i="0">
+                <a:solidFill>
+                  <a:srgbClr val="2E869A"/>
+                </a:solidFill>
+                <a:latin typeface="Calibri"/>
+              </a:rPr>
+              <a:t>•  Q-S  </a:t>
+            </a:r>
+            <a:r>
+              <a:rPr sz="1200" b="0" i="0">
+                <a:solidFill>
+                  <a:srgbClr val="333333"/>
+                </a:solidFill>
+                <a:latin typeface="Calibri"/>
+              </a:rPr>
+              <a:t>Decoy/deception behavior + threat-aware order annotations.</a:t>
+            </a:r>
+          </a:p>
+          <a:p>
+            <a:pPr>
+              <a:spcBef>
+                <a:spcPts val="200"/>
+              </a:spcBef>
+              <a:spcAft>
+                <a:spcPts val="600"/>
+              </a:spcAft>
+            </a:pPr>
+            <a:r>
+              <a:rPr sz="1200" b="1" i="0">
+                <a:solidFill>
+                  <a:srgbClr val="2E869A"/>
+                </a:solidFill>
+                <a:latin typeface="Calibri"/>
+              </a:rPr>
+              <a:t>•  Q-T  </a:t>
+            </a:r>
+            <a:r>
+              <a:rPr sz="1200" b="0" i="0">
+                <a:solidFill>
+                  <a:srgbClr val="333333"/>
+                </a:solidFill>
+                <a:latin typeface="Calibri"/>
+              </a:rPr>
+              <a:t>Operating-environment condition attributes (GPS-denied, illumination, sea-state, terrain).</a:t>
+            </a:r>
+          </a:p>
+          <a:p>
+            <a:pPr>
+              <a:spcBef>
+                <a:spcPts val="200"/>
+              </a:spcBef>
+              <a:spcAft>
+                <a:spcPts val="600"/>
+              </a:spcAft>
+            </a:pPr>
+            <a:r>
+              <a:rPr sz="1200" b="1" i="0">
+                <a:solidFill>
+                  <a:srgbClr val="2E869A"/>
+                </a:solidFill>
+                <a:latin typeface="Calibri"/>
+              </a:rPr>
+              <a:t>•  Q-U  </a:t>
+            </a:r>
+            <a:r>
+              <a:rPr sz="1200" b="0" i="0">
+                <a:solidFill>
+                  <a:srgbClr val="333333"/>
+                </a:solidFill>
+                <a:latin typeface="Calibri"/>
+              </a:rPr>
+              <a:t>Formation / relative-geometry construct (orbit, convoy spacing) beyond single RelativeLocation.</a:t>
+            </a:r>
+          </a:p>
+          <a:p>
+            <a:pPr>
+              <a:spcBef>
+                <a:spcPts val="200"/>
+              </a:spcBef>
+              <a:spcAft>
+                <a:spcPts val="600"/>
+              </a:spcAft>
+            </a:pPr>
+            <a:r>
+              <a:rPr sz="1200" b="1" i="0">
+                <a:solidFill>
+                  <a:srgbClr val="2E869A"/>
+                </a:solidFill>
+                <a:latin typeface="Calibri"/>
+              </a:rPr>
+              <a:t>•  Q-V  </a:t>
+            </a:r>
+            <a:r>
+              <a:rPr sz="1200" b="0" i="0">
+                <a:solidFill>
+                  <a:srgbClr val="333333"/>
+                </a:solidFill>
+                <a:latin typeface="Calibri"/>
+              </a:rPr>
+              <a:t>Capability self-report (robot declares mounted equipment; assign by capability) - BML WhoHoldingType.</a:t>
+            </a:r>
+          </a:p>
+          <a:p>
+            <a:pPr>
+              <a:spcBef>
+                <a:spcPts val="200"/>
+              </a:spcBef>
+              <a:spcAft>
+                <a:spcPts val="600"/>
+              </a:spcAft>
+            </a:pPr>
+            <a:r>
+              <a:rPr sz="1200" b="1" i="0">
+                <a:solidFill>
+                  <a:srgbClr val="2E869A"/>
+                </a:solidFill>
+                <a:latin typeface="Calibri"/>
+              </a:rPr>
+              <a:t>•  Q-W  </a:t>
+            </a:r>
+            <a:r>
+              <a:rPr sz="1200" b="0" i="0">
+                <a:solidFill>
+                  <a:srgbClr val="333333"/>
+                </a:solidFill>
+                <a:latin typeface="Calibri"/>
+              </a:rPr>
+              <a:t>Weapons-control-status + kill-box authorization area gating autonomous lethal action - unifies Q-K + Q-M (the drone-warfare headline, G14).</a:t>
+            </a:r>
+          </a:p>
+          <a:p>
+            <a:pPr>
+              <a:spcBef>
+                <a:spcPts val="200"/>
+              </a:spcBef>
+              <a:spcAft>
+                <a:spcPts val="600"/>
+              </a:spcAft>
+            </a:pPr>
+            <a:r>
+              <a:rPr sz="1200" b="1" i="0">
+                <a:solidFill>
+                  <a:srgbClr val="2E869A"/>
+                </a:solidFill>
+                <a:latin typeface="Calibri"/>
+              </a:rPr>
+              <a:t>•  Q-X  </a:t>
+            </a:r>
+            <a:r>
+              <a:rPr sz="1200" b="0" i="0">
+                <a:solidFill>
+                  <a:srgbClr val="333333"/>
+                </a:solidFill>
+                <a:latin typeface="Calibri"/>
+              </a:rPr>
+              <a:t>Loitering-munition/FPV platform-munition typing + counter-UAS (detect-&gt;defeat over existing air-defense verbs) + EW-vulnerability annotation.</a:t>
             </a:r>
           </a:p>
         </p:txBody>
@@ -10200,8 +10107,8 @@
         </p:nvSpPr>
         <p:spPr>
           <a:xfrm>
-            <a:off x="502920" y="6126480"/>
-            <a:ext cx="11155680" cy="274320"/>
+            <a:off x="502920" y="6419088"/>
+            <a:ext cx="11155680" cy="320040"/>
           </a:xfrm>
           <a:prstGeom prst="rect">
             <a:avLst/>
@@ -10215,22 +10122,13 @@
           <a:lstStyle/>
           <a:p>
             <a:r>
-              <a:rPr sz="1000" b="1" i="1">
-                <a:solidFill>
-                  <a:srgbClr val="2E869A"/>
-                </a:solidFill>
-                <a:latin typeface="Calibri"/>
-              </a:rPr>
-              <a:t>Dig deeper:  </a:t>
-            </a:r>
-            <a:r>
-              <a:rPr sz="1000" b="0" i="1">
+              <a:rPr sz="900" b="0" i="0">
                 <a:solidFill>
                   <a:srgbClr val="666666"/>
                 </a:solidFill>
                 <a:latin typeface="Calibri"/>
               </a:rPr>
-              <a:t>SourcedScenarios-Walk.md  -  OntologyConceptCoverage.md  -  log secs 6h / 6i (G-series)  -  7 tabs in the .xml workbooks</a:t>
+              <a:t>C2SIM ASX Sub-group   |   Hyssos   |   July 2026</a:t>
             </a:r>
           </a:p>
         </p:txBody>
@@ -10238,40 +10136,6 @@
       <p:sp>
         <p:nvSpPr>
           <p:cNvPr id="7" name="TextBox 6"/>
-          <p:cNvSpPr txBox="1"/>
-          <p:nvPr/>
-        </p:nvSpPr>
-        <p:spPr>
-          <a:xfrm>
-            <a:off x="502920" y="6419088"/>
-            <a:ext cx="11155680" cy="320040"/>
-          </a:xfrm>
-          <a:prstGeom prst="rect">
-            <a:avLst/>
-          </a:prstGeom>
-          <a:noFill/>
-        </p:spPr>
-        <p:txBody>
-          <a:bodyPr wrap="square">
-            <a:spAutoFit/>
-          </a:bodyPr>
-          <a:lstStyle/>
-          <a:p>
-            <a:r>
-              <a:rPr sz="900" b="0" i="0">
-                <a:solidFill>
-                  <a:srgbClr val="666666"/>
-                </a:solidFill>
-                <a:latin typeface="Calibri"/>
-              </a:rPr>
-              <a:t>C2SIM ASX Sub-group   |   Hyssos   |   July 2026</a:t>
-            </a:r>
-          </a:p>
-        </p:txBody>
-      </p:sp>
-      <p:sp>
-        <p:nvSpPr>
-          <p:cNvPr id="8" name="TextBox 7"/>
           <p:cNvSpPr txBox="1"/>
           <p:nvPr/>
         </p:nvSpPr>
@@ -10394,7 +10258,7 @@
                 </a:solidFill>
                 <a:latin typeface="Calibri"/>
               </a:rPr>
-              <a:t>Validation: the gaps are now evidenced</a:t>
+              <a:t>Proposed refinements</a:t>
             </a:r>
           </a:p>
         </p:txBody>
@@ -10428,7 +10292,7 @@
                 </a:solidFill>
                 <a:latin typeface="Calibri"/>
               </a:rPr>
-              <a:t>Nine sourced missions closed the document holes</a:t>
+              <a:t>Pending group buy-in - nothing applied to the model</a:t>
             </a:r>
           </a:p>
         </p:txBody>
@@ -10441,7 +10305,7 @@
         </p:nvSpPr>
         <p:spPr>
           <a:xfrm>
-            <a:off x="640080" y="1600200"/>
+            <a:off x="640080" y="1554480"/>
             <a:ext cx="10972800" cy="4754880"/>
           </a:xfrm>
           <a:prstGeom prst="rect">
@@ -10460,26 +10324,26 @@
                 <a:spcPts val="200"/>
               </a:spcBef>
               <a:spcAft>
-                <a:spcPts val="1200"/>
+                <a:spcPts val="1300"/>
               </a:spcAft>
             </a:pPr>
             <a:r>
-              <a:rPr sz="1450" b="1" i="0">
+              <a:rPr sz="1400" b="1" i="0">
                 <a:solidFill>
                   <a:srgbClr val="2E7D32"/>
                 </a:solidFill>
                 <a:latin typeface="Calibri"/>
               </a:rPr>
-              <a:t>•  Now grounded by a real mission:  </a:t>
-            </a:r>
-            <a:r>
-              <a:rPr sz="1450" b="0" i="0">
+              <a:t>•  Safe corrections (unambiguous):  </a:t>
+            </a:r>
+            <a:r>
+              <a:rPr sz="1400" b="0" i="0">
                 <a:solidFill>
                   <a:srgbClr val="333333"/>
                 </a:solidFill>
                 <a:latin typeface="Calibri"/>
               </a:rPr>
-              <a:t>explainability (Agrawal DroneResponse), CBRN (UGV-CBRN), EW (UAV emitter geolocation), persistence (MDARS) - all previously asserted-but-untested.</a:t>
+              <a:t>class typo CollecticeRoboticSystem -&gt; CollectiveRoboticSystem (O1); versionInfo Extrension -&gt; Extension (O2); file CSIM_ASX -&gt; C2SIM_ASX (O3); hasStartTime UUIDBase -&gt; TimeInstant (M7); unify namespace label ASX / C2SIM_ASX (M8).</a:t>
             </a:r>
           </a:p>
           <a:p>
@@ -10488,26 +10352,26 @@
                 <a:spcPts val="200"/>
               </a:spcBef>
               <a:spcAft>
-                <a:spcPts val="1200"/>
+                <a:spcPts val="1300"/>
               </a:spcAft>
             </a:pPr>
             <a:r>
-              <a:rPr sz="1450" b="1" i="0">
-                <a:solidFill>
-                  <a:srgbClr val="2E869A"/>
-                </a:solidFill>
-                <a:latin typeface="Calibri"/>
-              </a:rPr>
-              <a:t>•  Prior art, not invention (Q-Q):  </a:t>
-            </a:r>
-            <a:r>
-              <a:rPr sz="1450" b="0" i="0">
+              <a:rPr sz="1400" b="1" i="0">
+                <a:solidFill>
+                  <a:srgbClr val="C87F0A"/>
+                </a:solidFill>
+                <a:latin typeface="Calibri"/>
+              </a:rPr>
+              <a:t>•  Structural (decide first):  </a:t>
+            </a:r>
+            <a:r>
+              <a:rPr sz="1400" b="0" i="0">
                 <a:solidFill>
                   <a:srgbClr val="333333"/>
                 </a:solidFill>
                 <a:latin typeface="Calibri"/>
               </a:rPr>
-              <a:t>the measurement report flagged as missing already existed in C2SIM's BML lineage - WhoMeasuredType {value, unit, phenomenon, sensor, time, place}. Re-adopt it.</a:t>
+              <a:t>UAV/robot typing (Q-A); Swarm -&gt; CollectiveEntity so it is taskable (Q-B); one sensor model (Q-C); one autonomy vocabulary (Q-D).</a:t>
             </a:r>
           </a:p>
           <a:p>
@@ -10516,26 +10380,26 @@
                 <a:spcPts val="200"/>
               </a:spcBef>
               <a:spcAft>
-                <a:spcPts val="1200"/>
+                <a:spcPts val="1300"/>
               </a:spcAft>
             </a:pPr>
             <a:r>
-              <a:rPr sz="1450" b="1" i="0">
-                <a:solidFill>
-                  <a:srgbClr val="C87F0A"/>
-                </a:solidFill>
-                <a:latin typeface="Calibri"/>
-              </a:rPr>
-              <a:t>•  Concrete schemas:  </a:t>
-            </a:r>
-            <a:r>
-              <a:rPr sz="1450" b="0" i="0">
+              <a:rPr sz="1400" b="1" i="0">
+                <a:solidFill>
+                  <a:srgbClr val="2E869A"/>
+                </a:solidFill>
+                <a:latin typeface="Calibri"/>
+              </a:rPr>
+              <a:t>•  New content (design):  </a:t>
+            </a:r>
+            <a:r>
+              <a:rPr sz="1400" b="0" i="0">
                 <a:solidFill>
                   <a:srgbClr val="333333"/>
                 </a:solidFill>
                 <a:latin typeface="Calibri"/>
               </a:rPr>
-              <a:t>explanation report {event, action, reasoning, change, confidence} (Q-H); area map w/ per-cell value+variance (Q-M/Q-Q); on-the-loop verbs configure/suspend/ack/override (Q-K).</a:t>
+              <a:t>inline entity def (Q-E), MediaReference (Q-F), robot-to-robot + cross-cue (Q-G/Q-P), rationale report (Q-H), generic detection report (Q-I/Q-Q), swarm residuals (Q-J), engagement authority (Q-K), payload/effector/weapon typing (Q-L), area subject (Q-M), explore order (Q-N), denied-comms/relay (Q-O), locomotion subtypes (Q-R), decoy/threat-aware (Q-S), environment conditions (Q-T), formation geometry (Q-U), weapons-control/kill-box authority (Q-W), loitering-munition + counter-UAS typing (Q-X).</a:t>
             </a:r>
           </a:p>
           <a:p>
@@ -10544,17 +10408,17 @@
                 <a:spcPts val="200"/>
               </a:spcBef>
               <a:spcAft>
-                <a:spcPts val="1200"/>
+                <a:spcPts val="1300"/>
               </a:spcAft>
             </a:pPr>
             <a:r>
-              <a:rPr sz="1450" b="0" i="0">
-                <a:solidFill>
-                  <a:srgbClr val="666666"/>
-                </a:solidFill>
-                <a:latin typeface="Calibri"/>
-              </a:rPr>
-              <a:t>•  New: capability self-report (G13/Q-V) and collective-task decomposition + report aggregation (Z1), from BML MUM-T tasking.</a:t>
+              <a:rPr sz="1400" b="1" i="0">
+                <a:solidFill>
+                  <a:srgbClr val="333333"/>
+                </a:solidFill>
+                <a:latin typeface="Calibri"/>
+              </a:rPr>
+              <a:t>•  Nothing here is applied to the model - all items are proposals for group buy-in.</a:t>
             </a:r>
           </a:p>
         </p:txBody>
@@ -10597,7 +10461,7 @@
                 </a:solidFill>
                 <a:latin typeface="Calibri"/>
               </a:rPr>
-              <a:t>ValidationEvidence-Walk.md  -  Documents-Needed/Found.md  -  log sec 6j  -  the 15 records in V2Extractions/</a:t>
+              <a:t>log secs 3-4 (the safe corrections)  -  sec 7 (every decision, with what it resolves)</a:t>
             </a:r>
           </a:p>
         </p:txBody>
@@ -11165,7 +11029,7 @@
                 </a:solidFill>
                 <a:latin typeface="Calibri"/>
               </a:rPr>
-              <a:t>Where the OWL is now (v0.0.3)</a:t>
+              <a:t>Recommended next steps</a:t>
             </a:r>
           </a:p>
         </p:txBody>
@@ -11173,40 +11037,6 @@
       <p:sp>
         <p:nvSpPr>
           <p:cNvPr id="4" name="TextBox 3"/>
-          <p:cNvSpPr txBox="1"/>
-          <p:nvPr/>
-        </p:nvSpPr>
-        <p:spPr>
-          <a:xfrm>
-            <a:off x="548640" y="914400"/>
-            <a:ext cx="10972800" cy="320040"/>
-          </a:xfrm>
-          <a:prstGeom prst="rect">
-            <a:avLst/>
-          </a:prstGeom>
-          <a:noFill/>
-        </p:spPr>
-        <p:txBody>
-          <a:bodyPr wrap="square">
-            <a:spAutoFit/>
-          </a:bodyPr>
-          <a:lstStyle/>
-          <a:p>
-            <a:r>
-              <a:rPr sz="1300" b="0" i="1">
-                <a:solidFill>
-                  <a:srgbClr val="2E869A"/>
-                </a:solidFill>
-                <a:latin typeface="Calibri"/>
-              </a:rPr>
-              <a:t>Michael's update - the model is moving</a:t>
-            </a:r>
-          </a:p>
-        </p:txBody>
-      </p:sp>
-      <p:sp>
-        <p:nvSpPr>
-          <p:cNvPr id="5" name="TextBox 4"/>
           <p:cNvSpPr txBox="1"/>
           <p:nvPr/>
         </p:nvSpPr>
@@ -11231,26 +11061,17 @@
                 <a:spcPts val="200"/>
               </a:spcBef>
               <a:spcAft>
-                <a:spcPts val="1100"/>
+                <a:spcPts val="1200"/>
               </a:spcAft>
             </a:pPr>
             <a:r>
-              <a:rPr sz="1400" b="1" i="0">
-                <a:solidFill>
-                  <a:srgbClr val="2E7D32"/>
-                </a:solidFill>
-                <a:latin typeface="Calibri"/>
-              </a:rPr>
-              <a:t>•  Started (good):  </a:t>
-            </a:r>
-            <a:r>
-              <a:rPr sz="1400" b="0" i="0">
+              <a:rPr sz="1650" b="1" i="0">
                 <a:solidFill>
                   <a:srgbClr val="333333"/>
                 </a:solidFill>
                 <a:latin typeface="Calibri"/>
               </a:rPr>
-              <a:t>v0.0.3 begins the attribute layer (first datatype properties - v0.0.1 had none; plus further object properties) and folds the Video Detection Report into the OWL (MediaReference, MediaTypeCode, SensorObservation, VideoDetectionReportContent) + an AutonomyLevelCode model.</a:t>
+              <a:t>•  Settle the two entity-typing decisions (Q-A, Q-B) - this unblocks Initialization.</a:t>
             </a:r>
           </a:p>
           <a:p>
@@ -11259,26 +11080,17 @@
                 <a:spcPts val="200"/>
               </a:spcBef>
               <a:spcAft>
-                <a:spcPts val="1100"/>
+                <a:spcPts val="1200"/>
               </a:spcAft>
             </a:pPr>
             <a:r>
-              <a:rPr sz="1400" b="1" i="0">
-                <a:solidFill>
-                  <a:srgbClr val="C87F0A"/>
-                </a:solidFill>
-                <a:latin typeface="Calibri"/>
-              </a:rPr>
-              <a:t>•  Brings a decision to a head:  </a:t>
-            </a:r>
-            <a:r>
-              <a:rPr sz="1400" b="0" i="0">
+              <a:rPr sz="1650" b="0" i="0">
                 <a:solidFill>
                   <a:srgbClr val="333333"/>
                 </a:solidFill>
                 <a:latin typeface="Calibri"/>
               </a:rPr>
-              <a:t>P1 is now in the model, not yet settled - v0.0.3 declares both UAV/UGV (under Robot) and UnmannedAerial/Ground/Maritime/UnderwaterVehicle (under SMX Vehicle), so the group still picks one; the maritime ones sit under Vehicle rather than SurfaceVessel/SubsurfaceVessel.</a:t>
+              <a:t>•  Complete the Initialization instantiations (drafts provided for the 3 named scenarios).</a:t>
             </a:r>
           </a:p>
           <a:p>
@@ -11287,26 +11099,17 @@
                 <a:spcPts val="200"/>
               </a:spcBef>
               <a:spcAft>
-                <a:spcPts val="1100"/>
+                <a:spcPts val="1200"/>
               </a:spcAft>
             </a:pPr>
             <a:r>
-              <a:rPr sz="1400" b="1" i="0">
-                <a:solidFill>
-                  <a:srgbClr val="2E869A"/>
-                </a:solidFill>
-                <a:latin typeface="Calibri"/>
-              </a:rPr>
-              <a:t>•  Still to define:  </a:t>
-            </a:r>
-            <a:r>
-              <a:rPr sz="1400" b="0" i="0">
+              <a:rPr sz="1650" b="0" i="0">
                 <a:solidFill>
                   <a:srgbClr val="333333"/>
                 </a:solidFill>
                 <a:latin typeface="Calibri"/>
               </a:rPr>
-              <a:t>the broader attribute set, a taskable collective (Swarm was removed; CollecticeRoboticSystem still non-actor), the generic Detection Report, and the rationale / robot-to-robot / area content - plus the two typos.</a:t>
+              <a:t>•  Add the two CASEVAC content types (Q-G robot-to-robot, Q-H rationale) - both are explicit scenario requirements.</a:t>
             </a:r>
           </a:p>
           <a:p>
@@ -11315,33 +11118,43 @@
                 <a:spcPts val="200"/>
               </a:spcBef>
               <a:spcAft>
-                <a:spcPts val="1100"/>
+                <a:spcPts val="1200"/>
               </a:spcAft>
             </a:pPr>
             <a:r>
-              <a:rPr sz="1400" b="1" i="0">
-                <a:solidFill>
-                  <a:srgbClr val="C87F0A"/>
-                </a:solidFill>
-                <a:latin typeface="Calibri"/>
-              </a:rPr>
-              <a:t>•  Coordination notes:  </a:t>
-            </a:r>
-            <a:r>
-              <a:rPr sz="1400" b="0" i="0">
+              <a:rPr sz="1650" b="0" i="0">
                 <a:solidFill>
                   <a:srgbClr val="333333"/>
                 </a:solidFill>
                 <a:latin typeface="Calibri"/>
               </a:rPr>
-              <a:t>the branch also adds owl:imports smx/lox to base C2SIM.rdf - a circular import (C2SIM &lt;-&gt; smx) worth a deliberate decision; and AutonomyLevelCode is not yet wired as the range of hasAutonomousRoleCode (still generic Code).</a:t>
-            </a:r>
-          </a:p>
-        </p:txBody>
-      </p:sp>
-      <p:sp>
-        <p:nvSpPr>
-          <p:cNvPr id="6" name="TextBox 5"/>
+              <a:t>•  Reconcile the OWL model with the June spreadsheet decisions; fix the typos.</a:t>
+            </a:r>
+          </a:p>
+          <a:p>
+            <a:pPr>
+              <a:spcBef>
+                <a:spcPts val="200"/>
+              </a:spcBef>
+              <a:spcAft>
+                <a:spcPts val="1200"/>
+              </a:spcAft>
+            </a:pPr>
+            <a:r>
+              <a:rPr sz="1650" b="0" i="0">
+                <a:solidFill>
+                  <a:srgbClr val="333333"/>
+                </a:solidFill>
+                <a:latin typeface="Calibri"/>
+              </a:rPr>
+              <a:t>•  Optional: adopt the diff-able (.xml) workbooks so edits can be reviewed and merged in git.</a:t>
+            </a:r>
+          </a:p>
+        </p:txBody>
+      </p:sp>
+      <p:sp>
+        <p:nvSpPr>
+          <p:cNvPr id="5" name="TextBox 4"/>
           <p:cNvSpPr txBox="1"/>
           <p:nvPr/>
         </p:nvSpPr>
@@ -11377,14 +11190,14 @@
                 </a:solidFill>
                 <a:latin typeface="Calibri"/>
               </a:rPr>
-              <a:t>log sec 9 (full reconciliation, finding by finding)  -  Ontology/C2SIM_ASX-v003.rdf on branch michael_d</a:t>
-            </a:r>
-          </a:p>
-        </p:txBody>
-      </p:sp>
-      <p:sp>
-        <p:nvSpPr>
-          <p:cNvPr id="7" name="TextBox 6"/>
+              <a:t>Group-Briefing.md ('Status and next step')  -  log sec 7 for the full decision register</a:t>
+            </a:r>
+          </a:p>
+        </p:txBody>
+      </p:sp>
+      <p:sp>
+        <p:nvSpPr>
+          <p:cNvPr id="6" name="TextBox 5"/>
           <p:cNvSpPr txBox="1"/>
           <p:nvPr/>
         </p:nvSpPr>
@@ -11418,7 +11231,7 @@
       </p:sp>
       <p:sp>
         <p:nvSpPr>
-          <p:cNvPr id="8" name="TextBox 7"/>
+          <p:cNvPr id="7" name="TextBox 6"/>
           <p:cNvSpPr txBox="1"/>
           <p:nvPr/>
         </p:nvSpPr>
@@ -11460,2033 +11273,6 @@
 </file>
 
 <file path=ppt/slides/slide21.xml><?xml version="1.0" encoding="utf-8"?>
-<p:sld xmlns:a="http://schemas.openxmlformats.org/drawingml/2006/main" xmlns:p="http://schemas.openxmlformats.org/presentationml/2006/main" xmlns:r="http://schemas.openxmlformats.org/officeDocument/2006/relationships">
-  <p:cSld>
-    <p:spTree>
-      <p:nvGrpSpPr>
-        <p:cNvPr id="1" name=""/>
-        <p:cNvGrpSpPr/>
-        <p:nvPr/>
-      </p:nvGrpSpPr>
-      <p:grpSpPr/>
-      <p:sp>
-        <p:nvSpPr>
-          <p:cNvPr id="2" name="Rectangle 1"/>
-          <p:cNvSpPr/>
-          <p:nvPr/>
-        </p:nvSpPr>
-        <p:spPr>
-          <a:xfrm>
-            <a:off x="548640" y="1170432"/>
-            <a:ext cx="2011680" cy="38100"/>
-          </a:xfrm>
-          <a:prstGeom prst="rect">
-            <a:avLst/>
-          </a:prstGeom>
-          <a:solidFill>
-            <a:srgbClr val="2E869A"/>
-          </a:solidFill>
-          <a:ln>
-            <a:noFill/>
-          </a:ln>
-        </p:spPr>
-        <p:style>
-          <a:lnRef idx="1">
-            <a:schemeClr val="accent1"/>
-          </a:lnRef>
-          <a:fillRef idx="3">
-            <a:schemeClr val="accent1"/>
-          </a:fillRef>
-          <a:effectRef idx="2">
-            <a:schemeClr val="accent1"/>
-          </a:effectRef>
-          <a:fontRef idx="minor">
-            <a:schemeClr val="lt1"/>
-          </a:fontRef>
-        </p:style>
-        <p:txBody>
-          <a:bodyPr rtlCol="0" anchor="ctr"/>
-          <a:lstStyle/>
-          <a:p>
-            <a:pPr algn="ctr"/>
-          </a:p>
-        </p:txBody>
-      </p:sp>
-      <p:sp>
-        <p:nvSpPr>
-          <p:cNvPr id="3" name="TextBox 2"/>
-          <p:cNvSpPr txBox="1"/>
-          <p:nvPr/>
-        </p:nvSpPr>
-        <p:spPr>
-          <a:xfrm>
-            <a:off x="502920" y="411480"/>
-            <a:ext cx="11155680" cy="822960"/>
-          </a:xfrm>
-          <a:prstGeom prst="rect">
-            <a:avLst/>
-          </a:prstGeom>
-          <a:noFill/>
-        </p:spPr>
-        <p:txBody>
-          <a:bodyPr wrap="square">
-            <a:spAutoFit/>
-          </a:bodyPr>
-          <a:lstStyle/>
-          <a:p>
-            <a:r>
-              <a:rPr sz="3000" b="1" i="0">
-                <a:solidFill>
-                  <a:srgbClr val="1F3A5F"/>
-                </a:solidFill>
-                <a:latin typeface="Calibri"/>
-              </a:rPr>
-              <a:t>Decisions (1/3): model structure</a:t>
-            </a:r>
-          </a:p>
-        </p:txBody>
-      </p:sp>
-      <p:sp>
-        <p:nvSpPr>
-          <p:cNvPr id="4" name="TextBox 3"/>
-          <p:cNvSpPr txBox="1"/>
-          <p:nvPr/>
-        </p:nvSpPr>
-        <p:spPr>
-          <a:xfrm>
-            <a:off x="548640" y="914400"/>
-            <a:ext cx="10972800" cy="320040"/>
-          </a:xfrm>
-          <a:prstGeom prst="rect">
-            <a:avLst/>
-          </a:prstGeom>
-          <a:noFill/>
-        </p:spPr>
-        <p:txBody>
-          <a:bodyPr wrap="square">
-            <a:spAutoFit/>
-          </a:bodyPr>
-          <a:lstStyle/>
-          <a:p>
-            <a:r>
-              <a:rPr sz="1300" b="0" i="1">
-                <a:solidFill>
-                  <a:srgbClr val="2E869A"/>
-                </a:solidFill>
-                <a:latin typeface="Calibri"/>
-              </a:rPr>
-              <a:t>Full register - all 24, with what each resolves: log section 7</a:t>
-            </a:r>
-          </a:p>
-        </p:txBody>
-      </p:sp>
-      <p:sp>
-        <p:nvSpPr>
-          <p:cNvPr id="5" name="TextBox 4"/>
-          <p:cNvSpPr txBox="1"/>
-          <p:nvPr/>
-        </p:nvSpPr>
-        <p:spPr>
-          <a:xfrm>
-            <a:off x="640080" y="1737360"/>
-            <a:ext cx="10972800" cy="4617720"/>
-          </a:xfrm>
-          <a:prstGeom prst="rect">
-            <a:avLst/>
-          </a:prstGeom>
-          <a:noFill/>
-        </p:spPr>
-        <p:txBody>
-          <a:bodyPr wrap="square">
-            <a:spAutoFit/>
-          </a:bodyPr>
-          <a:lstStyle/>
-          <a:p>
-            <a:pPr>
-              <a:spcBef>
-                <a:spcPts val="200"/>
-              </a:spcBef>
-              <a:spcAft>
-                <a:spcPts val="1800"/>
-              </a:spcAft>
-            </a:pPr>
-            <a:r>
-              <a:rPr sz="1800" b="1" i="0">
-                <a:solidFill>
-                  <a:srgbClr val="2E869A"/>
-                </a:solidFill>
-                <a:latin typeface="Calibri"/>
-              </a:rPr>
-              <a:t>•  Q-A  </a:t>
-            </a:r>
-            <a:r>
-              <a:rPr sz="1800" b="0" i="0">
-                <a:solidFill>
-                  <a:srgbClr val="333333"/>
-                </a:solidFill>
-                <a:latin typeface="Calibri"/>
-              </a:rPr>
-              <a:t>UAV/robot typing: a role on the existing Platform tree, or a parallel Robot tree?</a:t>
-            </a:r>
-          </a:p>
-          <a:p>
-            <a:pPr>
-              <a:spcBef>
-                <a:spcPts val="200"/>
-              </a:spcBef>
-              <a:spcAft>
-                <a:spcPts val="1800"/>
-              </a:spcAft>
-            </a:pPr>
-            <a:r>
-              <a:rPr sz="1800" b="1" i="0">
-                <a:solidFill>
-                  <a:srgbClr val="2E869A"/>
-                </a:solidFill>
-                <a:latin typeface="Calibri"/>
-              </a:rPr>
-              <a:t>•  Q-B  </a:t>
-            </a:r>
-            <a:r>
-              <a:rPr sz="1800" b="0" i="0">
-                <a:solidFill>
-                  <a:srgbClr val="333333"/>
-                </a:solidFill>
-                <a:latin typeface="Calibri"/>
-              </a:rPr>
-              <a:t>Swarm: derive from CollectiveEntity (ActorEntity) so it can be tasked.</a:t>
-            </a:r>
-          </a:p>
-          <a:p>
-            <a:pPr>
-              <a:spcBef>
-                <a:spcPts val="200"/>
-              </a:spcBef>
-              <a:spcAft>
-                <a:spcPts val="1800"/>
-              </a:spcAft>
-            </a:pPr>
-            <a:r>
-              <a:rPr sz="1800" b="1" i="0">
-                <a:solidFill>
-                  <a:srgbClr val="2E869A"/>
-                </a:solidFill>
-                <a:latin typeface="Calibri"/>
-              </a:rPr>
-              <a:t>•  Q-C  </a:t>
-            </a:r>
-            <a:r>
-              <a:rPr sz="1800" b="0" i="0">
-                <a:solidFill>
-                  <a:srgbClr val="333333"/>
-                </a:solidFill>
-                <a:latin typeface="Calibri"/>
-              </a:rPr>
-              <a:t>Sensor: entity, class, or attribute - choose one model and apply it everywhere.</a:t>
-            </a:r>
-          </a:p>
-          <a:p>
-            <a:pPr>
-              <a:spcBef>
-                <a:spcPts val="200"/>
-              </a:spcBef>
-              <a:spcAft>
-                <a:spcPts val="1800"/>
-              </a:spcAft>
-            </a:pPr>
-            <a:r>
-              <a:rPr sz="1800" b="1" i="0">
-                <a:solidFill>
-                  <a:srgbClr val="2E869A"/>
-                </a:solidFill>
-                <a:latin typeface="Calibri"/>
-              </a:rPr>
-              <a:t>•  Q-D  </a:t>
-            </a:r>
-            <a:r>
-              <a:rPr sz="1800" b="0" i="0">
-                <a:solidFill>
-                  <a:srgbClr val="333333"/>
-                </a:solidFill>
-                <a:latin typeface="Calibri"/>
-              </a:rPr>
-              <a:t>Autonomy: choose one normative vocabulary.</a:t>
-            </a:r>
-          </a:p>
-        </p:txBody>
-      </p:sp>
-      <p:sp>
-        <p:nvSpPr>
-          <p:cNvPr id="6" name="TextBox 5"/>
-          <p:cNvSpPr txBox="1"/>
-          <p:nvPr/>
-        </p:nvSpPr>
-        <p:spPr>
-          <a:xfrm>
-            <a:off x="502920" y="6419088"/>
-            <a:ext cx="11155680" cy="320040"/>
-          </a:xfrm>
-          <a:prstGeom prst="rect">
-            <a:avLst/>
-          </a:prstGeom>
-          <a:noFill/>
-        </p:spPr>
-        <p:txBody>
-          <a:bodyPr wrap="square">
-            <a:spAutoFit/>
-          </a:bodyPr>
-          <a:lstStyle/>
-          <a:p>
-            <a:r>
-              <a:rPr sz="900" b="0" i="0">
-                <a:solidFill>
-                  <a:srgbClr val="666666"/>
-                </a:solidFill>
-                <a:latin typeface="Calibri"/>
-              </a:rPr>
-              <a:t>C2SIM ASX Sub-group   |   Hyssos   |   July 2026</a:t>
-            </a:r>
-          </a:p>
-        </p:txBody>
-      </p:sp>
-      <p:sp>
-        <p:nvSpPr>
-          <p:cNvPr id="7" name="TextBox 6"/>
-          <p:cNvSpPr txBox="1"/>
-          <p:nvPr/>
-        </p:nvSpPr>
-        <p:spPr>
-          <a:xfrm>
-            <a:off x="11338560" y="6419088"/>
-            <a:ext cx="640080" cy="320040"/>
-          </a:xfrm>
-          <a:prstGeom prst="rect">
-            <a:avLst/>
-          </a:prstGeom>
-          <a:noFill/>
-        </p:spPr>
-        <p:txBody>
-          <a:bodyPr wrap="square">
-            <a:spAutoFit/>
-          </a:bodyPr>
-          <a:lstStyle/>
-          <a:p>
-            <a:pPr algn="r"/>
-            <a:r>
-              <a:rPr sz="900" b="0" i="0">
-                <a:solidFill>
-                  <a:srgbClr val="666666"/>
-                </a:solidFill>
-                <a:latin typeface="Calibri"/>
-              </a:rPr>
-              <a:t>21</a:t>
-            </a:r>
-          </a:p>
-        </p:txBody>
-      </p:sp>
-    </p:spTree>
-  </p:cSld>
-  <p:clrMapOvr>
-    <a:masterClrMapping/>
-  </p:clrMapOvr>
-</p:sld>
-</file>
-
-<file path=ppt/slides/slide22.xml><?xml version="1.0" encoding="utf-8"?>
-<p:sld xmlns:a="http://schemas.openxmlformats.org/drawingml/2006/main" xmlns:p="http://schemas.openxmlformats.org/presentationml/2006/main" xmlns:r="http://schemas.openxmlformats.org/officeDocument/2006/relationships">
-  <p:cSld>
-    <p:spTree>
-      <p:nvGrpSpPr>
-        <p:cNvPr id="1" name=""/>
-        <p:cNvGrpSpPr/>
-        <p:nvPr/>
-      </p:nvGrpSpPr>
-      <p:grpSpPr/>
-      <p:sp>
-        <p:nvSpPr>
-          <p:cNvPr id="2" name="Rectangle 1"/>
-          <p:cNvSpPr/>
-          <p:nvPr/>
-        </p:nvSpPr>
-        <p:spPr>
-          <a:xfrm>
-            <a:off x="548640" y="1170432"/>
-            <a:ext cx="2011680" cy="38100"/>
-          </a:xfrm>
-          <a:prstGeom prst="rect">
-            <a:avLst/>
-          </a:prstGeom>
-          <a:solidFill>
-            <a:srgbClr val="2E869A"/>
-          </a:solidFill>
-          <a:ln>
-            <a:noFill/>
-          </a:ln>
-        </p:spPr>
-        <p:style>
-          <a:lnRef idx="1">
-            <a:schemeClr val="accent1"/>
-          </a:lnRef>
-          <a:fillRef idx="3">
-            <a:schemeClr val="accent1"/>
-          </a:fillRef>
-          <a:effectRef idx="2">
-            <a:schemeClr val="accent1"/>
-          </a:effectRef>
-          <a:fontRef idx="minor">
-            <a:schemeClr val="lt1"/>
-          </a:fontRef>
-        </p:style>
-        <p:txBody>
-          <a:bodyPr rtlCol="0" anchor="ctr"/>
-          <a:lstStyle/>
-          <a:p>
-            <a:pPr algn="ctr"/>
-          </a:p>
-        </p:txBody>
-      </p:sp>
-      <p:sp>
-        <p:nvSpPr>
-          <p:cNvPr id="3" name="TextBox 2"/>
-          <p:cNvSpPr txBox="1"/>
-          <p:nvPr/>
-        </p:nvSpPr>
-        <p:spPr>
-          <a:xfrm>
-            <a:off x="502920" y="411480"/>
-            <a:ext cx="11155680" cy="822960"/>
-          </a:xfrm>
-          <a:prstGeom prst="rect">
-            <a:avLst/>
-          </a:prstGeom>
-          <a:noFill/>
-        </p:spPr>
-        <p:txBody>
-          <a:bodyPr wrap="square">
-            <a:spAutoFit/>
-          </a:bodyPr>
-          <a:lstStyle/>
-          <a:p>
-            <a:r>
-              <a:rPr sz="3000" b="1" i="0">
-                <a:solidFill>
-                  <a:srgbClr val="1F3A5F"/>
-                </a:solidFill>
-                <a:latin typeface="Calibri"/>
-              </a:rPr>
-              <a:t>Decisions (2/3): new content types needed</a:t>
-            </a:r>
-          </a:p>
-        </p:txBody>
-      </p:sp>
-      <p:sp>
-        <p:nvSpPr>
-          <p:cNvPr id="4" name="TextBox 3"/>
-          <p:cNvSpPr txBox="1"/>
-          <p:nvPr/>
-        </p:nvSpPr>
-        <p:spPr>
-          <a:xfrm>
-            <a:off x="548640" y="914400"/>
-            <a:ext cx="10972800" cy="320040"/>
-          </a:xfrm>
-          <a:prstGeom prst="rect">
-            <a:avLst/>
-          </a:prstGeom>
-          <a:noFill/>
-        </p:spPr>
-        <p:txBody>
-          <a:bodyPr wrap="square">
-            <a:spAutoFit/>
-          </a:bodyPr>
-          <a:lstStyle/>
-          <a:p>
-            <a:r>
-              <a:rPr sz="1300" b="0" i="1">
-                <a:solidFill>
-                  <a:srgbClr val="2E869A"/>
-                </a:solidFill>
-                <a:latin typeface="Calibri"/>
-              </a:rPr>
-              <a:t>continued - full text + grounding in log section 7</a:t>
-            </a:r>
-          </a:p>
-        </p:txBody>
-      </p:sp>
-      <p:sp>
-        <p:nvSpPr>
-          <p:cNvPr id="5" name="TextBox 4"/>
-          <p:cNvSpPr txBox="1"/>
-          <p:nvPr/>
-        </p:nvSpPr>
-        <p:spPr>
-          <a:xfrm>
-            <a:off x="640080" y="1463040"/>
-            <a:ext cx="10972800" cy="4754880"/>
-          </a:xfrm>
-          <a:prstGeom prst="rect">
-            <a:avLst/>
-          </a:prstGeom>
-          <a:noFill/>
-        </p:spPr>
-        <p:txBody>
-          <a:bodyPr wrap="square">
-            <a:spAutoFit/>
-          </a:bodyPr>
-          <a:lstStyle/>
-          <a:p>
-            <a:pPr>
-              <a:spcBef>
-                <a:spcPts val="200"/>
-              </a:spcBef>
-              <a:spcAft>
-                <a:spcPts val="800"/>
-              </a:spcAft>
-            </a:pPr>
-            <a:r>
-              <a:rPr sz="1350" b="1" i="0">
-                <a:solidFill>
-                  <a:srgbClr val="2E869A"/>
-                </a:solidFill>
-                <a:latin typeface="Calibri"/>
-              </a:rPr>
-              <a:t>•  Q-E  </a:t>
-            </a:r>
-            <a:r>
-              <a:rPr sz="1350" b="0" i="0">
-                <a:solidFill>
-                  <a:srgbClr val="333333"/>
-                </a:solidFill>
-                <a:latin typeface="Calibri"/>
-              </a:rPr>
-              <a:t>Inline entity definition for newly-observed entities in reports.</a:t>
-            </a:r>
-          </a:p>
-          <a:p>
-            <a:pPr>
-              <a:spcBef>
-                <a:spcPts val="200"/>
-              </a:spcBef>
-              <a:spcAft>
-                <a:spcPts val="800"/>
-              </a:spcAft>
-            </a:pPr>
-            <a:r>
-              <a:rPr sz="1350" b="1" i="0">
-                <a:solidFill>
-                  <a:srgbClr val="2E869A"/>
-                </a:solidFill>
-                <a:latin typeface="Calibri"/>
-              </a:rPr>
-              <a:t>•  Q-F  </a:t>
-            </a:r>
-            <a:r>
-              <a:rPr sz="1350" b="0" i="0">
-                <a:solidFill>
-                  <a:srgbClr val="333333"/>
-                </a:solidFill>
-                <a:latin typeface="Calibri"/>
-              </a:rPr>
-              <a:t>MediaReference identity; separate media-format from sensor-modality.</a:t>
-            </a:r>
-          </a:p>
-          <a:p>
-            <a:pPr>
-              <a:spcBef>
-                <a:spcPts val="200"/>
-              </a:spcBef>
-              <a:spcAft>
-                <a:spcPts val="800"/>
-              </a:spcAft>
-            </a:pPr>
-            <a:r>
-              <a:rPr sz="1350" b="1" i="0">
-                <a:solidFill>
-                  <a:srgbClr val="2E869A"/>
-                </a:solidFill>
-                <a:latin typeface="Calibri"/>
-              </a:rPr>
-              <a:t>•  Q-G  </a:t>
-            </a:r>
-            <a:r>
-              <a:rPr sz="1350" b="0" i="0">
-                <a:solidFill>
-                  <a:srgbClr val="333333"/>
-                </a:solidFill>
-                <a:latin typeface="Calibri"/>
-              </a:rPr>
-              <a:t>Robot-to-robot coordination content type + issuing authority (CASEVAC).</a:t>
-            </a:r>
-          </a:p>
-          <a:p>
-            <a:pPr>
-              <a:spcBef>
-                <a:spcPts val="200"/>
-              </a:spcBef>
-              <a:spcAft>
-                <a:spcPts val="800"/>
-              </a:spcAft>
-            </a:pPr>
-            <a:r>
-              <a:rPr sz="1350" b="1" i="0">
-                <a:solidFill>
-                  <a:srgbClr val="2E869A"/>
-                </a:solidFill>
-                <a:latin typeface="Calibri"/>
-              </a:rPr>
-              <a:t>•  Q-H  </a:t>
-            </a:r>
-            <a:r>
-              <a:rPr sz="1350" b="0" i="0">
-                <a:solidFill>
-                  <a:srgbClr val="333333"/>
-                </a:solidFill>
-                <a:latin typeface="Calibri"/>
-              </a:rPr>
-              <a:t>Rationale/explanation ReportContent - report why, not just what (CASEVAC).</a:t>
-            </a:r>
-          </a:p>
-          <a:p>
-            <a:pPr>
-              <a:spcBef>
-                <a:spcPts val="200"/>
-              </a:spcBef>
-              <a:spcAft>
-                <a:spcPts val="800"/>
-              </a:spcAft>
-            </a:pPr>
-            <a:r>
-              <a:rPr sz="1350" b="1" i="0">
-                <a:solidFill>
-                  <a:srgbClr val="2E869A"/>
-                </a:solidFill>
-                <a:latin typeface="Calibri"/>
-              </a:rPr>
-              <a:t>•  Q-I  </a:t>
-            </a:r>
-            <a:r>
-              <a:rPr sz="1350" b="0" i="0">
-                <a:solidFill>
-                  <a:srgbClr val="333333"/>
-                </a:solidFill>
-                <a:latin typeface="Calibri"/>
-              </a:rPr>
-              <a:t>Media-independent sensor-reading (value+unit+modality) + full SensorType taxonomy.</a:t>
-            </a:r>
-          </a:p>
-          <a:p>
-            <a:pPr>
-              <a:spcBef>
-                <a:spcPts val="200"/>
-              </a:spcBef>
-              <a:spcAft>
-                <a:spcPts val="800"/>
-              </a:spcAft>
-            </a:pPr>
-            <a:r>
-              <a:rPr sz="1350" b="1" i="0">
-                <a:solidFill>
-                  <a:srgbClr val="2E869A"/>
-                </a:solidFill>
-                <a:latin typeface="Calibri"/>
-              </a:rPr>
-              <a:t>•  Q-J  </a:t>
-            </a:r>
-            <a:r>
-              <a:rPr sz="1350" b="0" i="0">
-                <a:solidFill>
-                  <a:srgbClr val="333333"/>
-                </a:solidFill>
-                <a:latin typeface="Calibri"/>
-              </a:rPr>
-              <a:t>Swarm residuals: network params, leader role, aggregation, member lifecycle.</a:t>
-            </a:r>
-          </a:p>
-          <a:p>
-            <a:pPr>
-              <a:spcBef>
-                <a:spcPts val="200"/>
-              </a:spcBef>
-              <a:spcAft>
-                <a:spcPts val="800"/>
-              </a:spcAft>
-            </a:pPr>
-            <a:r>
-              <a:rPr sz="1350" b="1" i="0">
-                <a:solidFill>
-                  <a:srgbClr val="2E869A"/>
-                </a:solidFill>
-                <a:latin typeface="Calibri"/>
-              </a:rPr>
-              <a:t>•  Q-K  </a:t>
-            </a:r>
-            <a:r>
-              <a:rPr sz="1350" b="0" i="0">
-                <a:solidFill>
-                  <a:srgbClr val="333333"/>
-                </a:solidFill>
-                <a:latin typeface="Calibri"/>
-              </a:rPr>
-              <a:t>Engagement authority as a function of autonomy level (Fire Support).</a:t>
-            </a:r>
-          </a:p>
-          <a:p>
-            <a:pPr>
-              <a:spcBef>
-                <a:spcPts val="200"/>
-              </a:spcBef>
-              <a:spcAft>
-                <a:spcPts val="800"/>
-              </a:spcAft>
-            </a:pPr>
-            <a:r>
-              <a:rPr sz="1350" b="1" i="0">
-                <a:solidFill>
-                  <a:srgbClr val="2E869A"/>
-                </a:solidFill>
-                <a:latin typeface="Calibri"/>
-              </a:rPr>
-              <a:t>•  Q-L  </a:t>
-            </a:r>
-            <a:r>
-              <a:rPr sz="1350" b="0" i="0">
-                <a:solidFill>
-                  <a:srgbClr val="333333"/>
-                </a:solidFill>
-                <a:latin typeface="Calibri"/>
-              </a:rPr>
-              <a:t>Typed payload/effector/weapon (the action verbs already exist in LOX; only tow/salvage is a residual).</a:t>
-            </a:r>
-          </a:p>
-          <a:p>
-            <a:pPr>
-              <a:spcBef>
-                <a:spcPts val="200"/>
-              </a:spcBef>
-              <a:spcAft>
-                <a:spcPts val="800"/>
-              </a:spcAft>
-            </a:pPr>
-            <a:r>
-              <a:rPr sz="1350" b="1" i="0">
-                <a:solidFill>
-                  <a:srgbClr val="2E869A"/>
-                </a:solidFill>
-                <a:latin typeface="Calibri"/>
-              </a:rPr>
-              <a:t>•  Q-M  </a:t>
-            </a:r>
-            <a:r>
-              <a:rPr sz="1350" b="0" i="0">
-                <a:solidFill>
-                  <a:srgbClr val="333333"/>
-                </a:solidFill>
-                <a:latin typeface="Calibri"/>
-              </a:rPr>
-              <a:t>Let an area be the subject of a task/report (hasAffectedArea + area-state).</a:t>
-            </a:r>
-          </a:p>
-        </p:txBody>
-      </p:sp>
-      <p:sp>
-        <p:nvSpPr>
-          <p:cNvPr id="6" name="TextBox 5"/>
-          <p:cNvSpPr txBox="1"/>
-          <p:nvPr/>
-        </p:nvSpPr>
-        <p:spPr>
-          <a:xfrm>
-            <a:off x="502920" y="6419088"/>
-            <a:ext cx="11155680" cy="320040"/>
-          </a:xfrm>
-          <a:prstGeom prst="rect">
-            <a:avLst/>
-          </a:prstGeom>
-          <a:noFill/>
-        </p:spPr>
-        <p:txBody>
-          <a:bodyPr wrap="square">
-            <a:spAutoFit/>
-          </a:bodyPr>
-          <a:lstStyle/>
-          <a:p>
-            <a:r>
-              <a:rPr sz="900" b="0" i="0">
-                <a:solidFill>
-                  <a:srgbClr val="666666"/>
-                </a:solidFill>
-                <a:latin typeface="Calibri"/>
-              </a:rPr>
-              <a:t>C2SIM ASX Sub-group   |   Hyssos   |   July 2026</a:t>
-            </a:r>
-          </a:p>
-        </p:txBody>
-      </p:sp>
-      <p:sp>
-        <p:nvSpPr>
-          <p:cNvPr id="7" name="TextBox 6"/>
-          <p:cNvSpPr txBox="1"/>
-          <p:nvPr/>
-        </p:nvSpPr>
-        <p:spPr>
-          <a:xfrm>
-            <a:off x="11338560" y="6419088"/>
-            <a:ext cx="640080" cy="320040"/>
-          </a:xfrm>
-          <a:prstGeom prst="rect">
-            <a:avLst/>
-          </a:prstGeom>
-          <a:noFill/>
-        </p:spPr>
-        <p:txBody>
-          <a:bodyPr wrap="square">
-            <a:spAutoFit/>
-          </a:bodyPr>
-          <a:lstStyle/>
-          <a:p>
-            <a:pPr algn="r"/>
-            <a:r>
-              <a:rPr sz="900" b="0" i="0">
-                <a:solidFill>
-                  <a:srgbClr val="666666"/>
-                </a:solidFill>
-                <a:latin typeface="Calibri"/>
-              </a:rPr>
-              <a:t>22</a:t>
-            </a:r>
-          </a:p>
-        </p:txBody>
-      </p:sp>
-    </p:spTree>
-  </p:cSld>
-  <p:clrMapOvr>
-    <a:masterClrMapping/>
-  </p:clrMapOvr>
-</p:sld>
-</file>
-
-<file path=ppt/slides/slide23.xml><?xml version="1.0" encoding="utf-8"?>
-<p:sld xmlns:a="http://schemas.openxmlformats.org/drawingml/2006/main" xmlns:p="http://schemas.openxmlformats.org/presentationml/2006/main" xmlns:r="http://schemas.openxmlformats.org/officeDocument/2006/relationships">
-  <p:cSld>
-    <p:spTree>
-      <p:nvGrpSpPr>
-        <p:cNvPr id="1" name=""/>
-        <p:cNvGrpSpPr/>
-        <p:nvPr/>
-      </p:nvGrpSpPr>
-      <p:grpSpPr/>
-      <p:sp>
-        <p:nvSpPr>
-          <p:cNvPr id="2" name="Rectangle 1"/>
-          <p:cNvSpPr/>
-          <p:nvPr/>
-        </p:nvSpPr>
-        <p:spPr>
-          <a:xfrm>
-            <a:off x="548640" y="1170432"/>
-            <a:ext cx="2011680" cy="38100"/>
-          </a:xfrm>
-          <a:prstGeom prst="rect">
-            <a:avLst/>
-          </a:prstGeom>
-          <a:solidFill>
-            <a:srgbClr val="2E869A"/>
-          </a:solidFill>
-          <a:ln>
-            <a:noFill/>
-          </a:ln>
-        </p:spPr>
-        <p:style>
-          <a:lnRef idx="1">
-            <a:schemeClr val="accent1"/>
-          </a:lnRef>
-          <a:fillRef idx="3">
-            <a:schemeClr val="accent1"/>
-          </a:fillRef>
-          <a:effectRef idx="2">
-            <a:schemeClr val="accent1"/>
-          </a:effectRef>
-          <a:fontRef idx="minor">
-            <a:schemeClr val="lt1"/>
-          </a:fontRef>
-        </p:style>
-        <p:txBody>
-          <a:bodyPr rtlCol="0" anchor="ctr"/>
-          <a:lstStyle/>
-          <a:p>
-            <a:pPr algn="ctr"/>
-          </a:p>
-        </p:txBody>
-      </p:sp>
-      <p:sp>
-        <p:nvSpPr>
-          <p:cNvPr id="3" name="TextBox 2"/>
-          <p:cNvSpPr txBox="1"/>
-          <p:nvPr/>
-        </p:nvSpPr>
-        <p:spPr>
-          <a:xfrm>
-            <a:off x="502920" y="411480"/>
-            <a:ext cx="11155680" cy="822960"/>
-          </a:xfrm>
-          <a:prstGeom prst="rect">
-            <a:avLst/>
-          </a:prstGeom>
-          <a:noFill/>
-        </p:spPr>
-        <p:txBody>
-          <a:bodyPr wrap="square">
-            <a:spAutoFit/>
-          </a:bodyPr>
-          <a:lstStyle/>
-          <a:p>
-            <a:r>
-              <a:rPr sz="3000" b="1" i="0">
-                <a:solidFill>
-                  <a:srgbClr val="1F3A5F"/>
-                </a:solidFill>
-                <a:latin typeface="Calibri"/>
-              </a:rPr>
-              <a:t>Decisions (3/3): from the sourced scenarios</a:t>
-            </a:r>
-          </a:p>
-        </p:txBody>
-      </p:sp>
-      <p:sp>
-        <p:nvSpPr>
-          <p:cNvPr id="4" name="TextBox 3"/>
-          <p:cNvSpPr txBox="1"/>
-          <p:nvPr/>
-        </p:nvSpPr>
-        <p:spPr>
-          <a:xfrm>
-            <a:off x="548640" y="914400"/>
-            <a:ext cx="10972800" cy="320040"/>
-          </a:xfrm>
-          <a:prstGeom prst="rect">
-            <a:avLst/>
-          </a:prstGeom>
-          <a:noFill/>
-        </p:spPr>
-        <p:txBody>
-          <a:bodyPr wrap="square">
-            <a:spAutoFit/>
-          </a:bodyPr>
-          <a:lstStyle/>
-          <a:p>
-            <a:r>
-              <a:rPr sz="1300" b="0" i="1">
-                <a:solidFill>
-                  <a:srgbClr val="2E869A"/>
-                </a:solidFill>
-                <a:latin typeface="Calibri"/>
-              </a:rPr>
-              <a:t>continued - full text + grounding in log section 7</a:t>
-            </a:r>
-          </a:p>
-        </p:txBody>
-      </p:sp>
-      <p:sp>
-        <p:nvSpPr>
-          <p:cNvPr id="5" name="TextBox 4"/>
-          <p:cNvSpPr txBox="1"/>
-          <p:nvPr/>
-        </p:nvSpPr>
-        <p:spPr>
-          <a:xfrm>
-            <a:off x="640080" y="1371600"/>
-            <a:ext cx="10972800" cy="4754880"/>
-          </a:xfrm>
-          <a:prstGeom prst="rect">
-            <a:avLst/>
-          </a:prstGeom>
-          <a:noFill/>
-        </p:spPr>
-        <p:txBody>
-          <a:bodyPr wrap="square">
-            <a:spAutoFit/>
-          </a:bodyPr>
-          <a:lstStyle/>
-          <a:p>
-            <a:pPr>
-              <a:spcBef>
-                <a:spcPts val="200"/>
-              </a:spcBef>
-              <a:spcAft>
-                <a:spcPts val="600"/>
-              </a:spcAft>
-            </a:pPr>
-            <a:r>
-              <a:rPr sz="1200" b="1" i="0">
-                <a:solidFill>
-                  <a:srgbClr val="2E869A"/>
-                </a:solidFill>
-                <a:latin typeface="Calibri"/>
-              </a:rPr>
-              <a:t>•  Q-N  </a:t>
-            </a:r>
-            <a:r>
-              <a:rPr sz="1200" b="0" i="0">
-                <a:solidFill>
-                  <a:srgbClr val="333333"/>
-                </a:solidFill>
-                <a:latin typeface="Calibri"/>
-              </a:rPr>
-              <a:t>Area-coverage / exploration goal (explore-until-covered) - search verbs already exist.</a:t>
-            </a:r>
-          </a:p>
-          <a:p>
-            <a:pPr>
-              <a:spcBef>
-                <a:spcPts val="200"/>
-              </a:spcBef>
-              <a:spcAft>
-                <a:spcPts val="600"/>
-              </a:spcAft>
-            </a:pPr>
-            <a:r>
-              <a:rPr sz="1200" b="1" i="0">
-                <a:solidFill>
-                  <a:srgbClr val="2E869A"/>
-                </a:solidFill>
-                <a:latin typeface="Calibri"/>
-              </a:rPr>
-              <a:t>•  Q-O  </a:t>
-            </a:r>
-            <a:r>
-              <a:rPr sz="1200" b="0" i="0">
-                <a:solidFill>
-                  <a:srgbClr val="333333"/>
-                </a:solidFill>
-                <a:latin typeface="Calibri"/>
-              </a:rPr>
-              <a:t>Denied-comms operating mode + deployable relay entity (the relay verb lox#COMREL already exists).</a:t>
-            </a:r>
-          </a:p>
-          <a:p>
-            <a:pPr>
-              <a:spcBef>
-                <a:spcPts val="200"/>
-              </a:spcBef>
-              <a:spcAft>
-                <a:spcPts val="600"/>
-              </a:spcAft>
-            </a:pPr>
-            <a:r>
-              <a:rPr sz="1200" b="1" i="0">
-                <a:solidFill>
-                  <a:srgbClr val="2E869A"/>
-                </a:solidFill>
-                <a:latin typeface="Calibri"/>
-              </a:rPr>
-              <a:t>•  Q-P  </a:t>
-            </a:r>
-            <a:r>
-              <a:rPr sz="1200" b="0" i="0">
-                <a:solidFill>
-                  <a:srgbClr val="333333"/>
-                </a:solidFill>
-                <a:latin typeface="Calibri"/>
-              </a:rPr>
-              <a:t>Cross-cueing: system-to-system tasking + shared classified track/contact (extends Q-G).</a:t>
-            </a:r>
-          </a:p>
-          <a:p>
-            <a:pPr>
-              <a:spcBef>
-                <a:spcPts val="200"/>
-              </a:spcBef>
-              <a:spcAft>
-                <a:spcPts val="600"/>
-              </a:spcAft>
-            </a:pPr>
-            <a:r>
-              <a:rPr sz="1200" b="1" i="0">
-                <a:solidFill>
-                  <a:srgbClr val="2E869A"/>
-                </a:solidFill>
-                <a:latin typeface="Calibri"/>
-              </a:rPr>
-              <a:t>•  Q-Q  </a:t>
-            </a:r>
-            <a:r>
-              <a:rPr sz="1200" b="0" i="0">
-                <a:solidFill>
-                  <a:srgbClr val="333333"/>
-                </a:solidFill>
-                <a:latin typeface="Calibri"/>
-              </a:rPr>
-              <a:t>One generic Detection Report (confidence + error-bound + false-positive) - resolves Y1/M3/M4 (extends Q-I).</a:t>
-            </a:r>
-          </a:p>
-          <a:p>
-            <a:pPr>
-              <a:spcBef>
-                <a:spcPts val="200"/>
-              </a:spcBef>
-              <a:spcAft>
-                <a:spcPts val="600"/>
-              </a:spcAft>
-            </a:pPr>
-            <a:r>
-              <a:rPr sz="1200" b="1" i="0">
-                <a:solidFill>
-                  <a:srgbClr val="2E869A"/>
-                </a:solidFill>
-                <a:latin typeface="Calibri"/>
-              </a:rPr>
-              <a:t>•  Q-R  </a:t>
-            </a:r>
-            <a:r>
-              <a:rPr sz="1200" b="0" i="0">
-                <a:solidFill>
-                  <a:srgbClr val="333333"/>
-                </a:solidFill>
-                <a:latin typeface="Calibri"/>
-              </a:rPr>
-              <a:t>Platform locomotion/role subtypes: wheeled/tracked/legged UGV; detector/neutralizer USV (extends Q-A).</a:t>
-            </a:r>
-          </a:p>
-          <a:p>
-            <a:pPr>
-              <a:spcBef>
-                <a:spcPts val="200"/>
-              </a:spcBef>
-              <a:spcAft>
-                <a:spcPts val="600"/>
-              </a:spcAft>
-            </a:pPr>
-            <a:r>
-              <a:rPr sz="1200" b="1" i="0">
-                <a:solidFill>
-                  <a:srgbClr val="2E869A"/>
-                </a:solidFill>
-                <a:latin typeface="Calibri"/>
-              </a:rPr>
-              <a:t>•  Q-S  </a:t>
-            </a:r>
-            <a:r>
-              <a:rPr sz="1200" b="0" i="0">
-                <a:solidFill>
-                  <a:srgbClr val="333333"/>
-                </a:solidFill>
-                <a:latin typeface="Calibri"/>
-              </a:rPr>
-              <a:t>Decoy/deception behavior + threat-aware order annotations.</a:t>
-            </a:r>
-          </a:p>
-          <a:p>
-            <a:pPr>
-              <a:spcBef>
-                <a:spcPts val="200"/>
-              </a:spcBef>
-              <a:spcAft>
-                <a:spcPts val="600"/>
-              </a:spcAft>
-            </a:pPr>
-            <a:r>
-              <a:rPr sz="1200" b="1" i="0">
-                <a:solidFill>
-                  <a:srgbClr val="2E869A"/>
-                </a:solidFill>
-                <a:latin typeface="Calibri"/>
-              </a:rPr>
-              <a:t>•  Q-T  </a:t>
-            </a:r>
-            <a:r>
-              <a:rPr sz="1200" b="0" i="0">
-                <a:solidFill>
-                  <a:srgbClr val="333333"/>
-                </a:solidFill>
-                <a:latin typeface="Calibri"/>
-              </a:rPr>
-              <a:t>Operating-environment condition attributes (GPS-denied, illumination, sea-state, terrain).</a:t>
-            </a:r>
-          </a:p>
-          <a:p>
-            <a:pPr>
-              <a:spcBef>
-                <a:spcPts val="200"/>
-              </a:spcBef>
-              <a:spcAft>
-                <a:spcPts val="600"/>
-              </a:spcAft>
-            </a:pPr>
-            <a:r>
-              <a:rPr sz="1200" b="1" i="0">
-                <a:solidFill>
-                  <a:srgbClr val="2E869A"/>
-                </a:solidFill>
-                <a:latin typeface="Calibri"/>
-              </a:rPr>
-              <a:t>•  Q-U  </a:t>
-            </a:r>
-            <a:r>
-              <a:rPr sz="1200" b="0" i="0">
-                <a:solidFill>
-                  <a:srgbClr val="333333"/>
-                </a:solidFill>
-                <a:latin typeface="Calibri"/>
-              </a:rPr>
-              <a:t>Formation / relative-geometry construct (orbit, convoy spacing) beyond single RelativeLocation.</a:t>
-            </a:r>
-          </a:p>
-          <a:p>
-            <a:pPr>
-              <a:spcBef>
-                <a:spcPts val="200"/>
-              </a:spcBef>
-              <a:spcAft>
-                <a:spcPts val="600"/>
-              </a:spcAft>
-            </a:pPr>
-            <a:r>
-              <a:rPr sz="1200" b="1" i="0">
-                <a:solidFill>
-                  <a:srgbClr val="2E869A"/>
-                </a:solidFill>
-                <a:latin typeface="Calibri"/>
-              </a:rPr>
-              <a:t>•  Q-V  </a:t>
-            </a:r>
-            <a:r>
-              <a:rPr sz="1200" b="0" i="0">
-                <a:solidFill>
-                  <a:srgbClr val="333333"/>
-                </a:solidFill>
-                <a:latin typeface="Calibri"/>
-              </a:rPr>
-              <a:t>Capability self-report (robot declares mounted equipment; assign by capability) - BML WhoHoldingType.</a:t>
-            </a:r>
-          </a:p>
-          <a:p>
-            <a:pPr>
-              <a:spcBef>
-                <a:spcPts val="200"/>
-              </a:spcBef>
-              <a:spcAft>
-                <a:spcPts val="600"/>
-              </a:spcAft>
-            </a:pPr>
-            <a:r>
-              <a:rPr sz="1200" b="1" i="0">
-                <a:solidFill>
-                  <a:srgbClr val="2E869A"/>
-                </a:solidFill>
-                <a:latin typeface="Calibri"/>
-              </a:rPr>
-              <a:t>•  Q-W  </a:t>
-            </a:r>
-            <a:r>
-              <a:rPr sz="1200" b="0" i="0">
-                <a:solidFill>
-                  <a:srgbClr val="333333"/>
-                </a:solidFill>
-                <a:latin typeface="Calibri"/>
-              </a:rPr>
-              <a:t>Weapons-control-status + kill-box authorization area gating autonomous lethal action - unifies Q-K + Q-M (the drone-warfare headline, G14).</a:t>
-            </a:r>
-          </a:p>
-          <a:p>
-            <a:pPr>
-              <a:spcBef>
-                <a:spcPts val="200"/>
-              </a:spcBef>
-              <a:spcAft>
-                <a:spcPts val="600"/>
-              </a:spcAft>
-            </a:pPr>
-            <a:r>
-              <a:rPr sz="1200" b="1" i="0">
-                <a:solidFill>
-                  <a:srgbClr val="2E869A"/>
-                </a:solidFill>
-                <a:latin typeface="Calibri"/>
-              </a:rPr>
-              <a:t>•  Q-X  </a:t>
-            </a:r>
-            <a:r>
-              <a:rPr sz="1200" b="0" i="0">
-                <a:solidFill>
-                  <a:srgbClr val="333333"/>
-                </a:solidFill>
-                <a:latin typeface="Calibri"/>
-              </a:rPr>
-              <a:t>Loitering-munition/FPV platform-munition typing + counter-UAS (detect-&gt;defeat over existing air-defense verbs) + EW-vulnerability annotation.</a:t>
-            </a:r>
-          </a:p>
-        </p:txBody>
-      </p:sp>
-      <p:sp>
-        <p:nvSpPr>
-          <p:cNvPr id="6" name="TextBox 5"/>
-          <p:cNvSpPr txBox="1"/>
-          <p:nvPr/>
-        </p:nvSpPr>
-        <p:spPr>
-          <a:xfrm>
-            <a:off x="502920" y="6419088"/>
-            <a:ext cx="11155680" cy="320040"/>
-          </a:xfrm>
-          <a:prstGeom prst="rect">
-            <a:avLst/>
-          </a:prstGeom>
-          <a:noFill/>
-        </p:spPr>
-        <p:txBody>
-          <a:bodyPr wrap="square">
-            <a:spAutoFit/>
-          </a:bodyPr>
-          <a:lstStyle/>
-          <a:p>
-            <a:r>
-              <a:rPr sz="900" b="0" i="0">
-                <a:solidFill>
-                  <a:srgbClr val="666666"/>
-                </a:solidFill>
-                <a:latin typeface="Calibri"/>
-              </a:rPr>
-              <a:t>C2SIM ASX Sub-group   |   Hyssos   |   July 2026</a:t>
-            </a:r>
-          </a:p>
-        </p:txBody>
-      </p:sp>
-      <p:sp>
-        <p:nvSpPr>
-          <p:cNvPr id="7" name="TextBox 6"/>
-          <p:cNvSpPr txBox="1"/>
-          <p:nvPr/>
-        </p:nvSpPr>
-        <p:spPr>
-          <a:xfrm>
-            <a:off x="11338560" y="6419088"/>
-            <a:ext cx="640080" cy="320040"/>
-          </a:xfrm>
-          <a:prstGeom prst="rect">
-            <a:avLst/>
-          </a:prstGeom>
-          <a:noFill/>
-        </p:spPr>
-        <p:txBody>
-          <a:bodyPr wrap="square">
-            <a:spAutoFit/>
-          </a:bodyPr>
-          <a:lstStyle/>
-          <a:p>
-            <a:pPr algn="r"/>
-            <a:r>
-              <a:rPr sz="900" b="0" i="0">
-                <a:solidFill>
-                  <a:srgbClr val="666666"/>
-                </a:solidFill>
-                <a:latin typeface="Calibri"/>
-              </a:rPr>
-              <a:t>23</a:t>
-            </a:r>
-          </a:p>
-        </p:txBody>
-      </p:sp>
-    </p:spTree>
-  </p:cSld>
-  <p:clrMapOvr>
-    <a:masterClrMapping/>
-  </p:clrMapOvr>
-</p:sld>
-</file>
-
-<file path=ppt/slides/slide24.xml><?xml version="1.0" encoding="utf-8"?>
-<p:sld xmlns:a="http://schemas.openxmlformats.org/drawingml/2006/main" xmlns:p="http://schemas.openxmlformats.org/presentationml/2006/main" xmlns:r="http://schemas.openxmlformats.org/officeDocument/2006/relationships">
-  <p:cSld>
-    <p:spTree>
-      <p:nvGrpSpPr>
-        <p:cNvPr id="1" name=""/>
-        <p:cNvGrpSpPr/>
-        <p:nvPr/>
-      </p:nvGrpSpPr>
-      <p:grpSpPr/>
-      <p:sp>
-        <p:nvSpPr>
-          <p:cNvPr id="2" name="Rectangle 1"/>
-          <p:cNvSpPr/>
-          <p:nvPr/>
-        </p:nvSpPr>
-        <p:spPr>
-          <a:xfrm>
-            <a:off x="548640" y="1170432"/>
-            <a:ext cx="2011680" cy="38100"/>
-          </a:xfrm>
-          <a:prstGeom prst="rect">
-            <a:avLst/>
-          </a:prstGeom>
-          <a:solidFill>
-            <a:srgbClr val="2E869A"/>
-          </a:solidFill>
-          <a:ln>
-            <a:noFill/>
-          </a:ln>
-        </p:spPr>
-        <p:style>
-          <a:lnRef idx="1">
-            <a:schemeClr val="accent1"/>
-          </a:lnRef>
-          <a:fillRef idx="3">
-            <a:schemeClr val="accent1"/>
-          </a:fillRef>
-          <a:effectRef idx="2">
-            <a:schemeClr val="accent1"/>
-          </a:effectRef>
-          <a:fontRef idx="minor">
-            <a:schemeClr val="lt1"/>
-          </a:fontRef>
-        </p:style>
-        <p:txBody>
-          <a:bodyPr rtlCol="0" anchor="ctr"/>
-          <a:lstStyle/>
-          <a:p>
-            <a:pPr algn="ctr"/>
-          </a:p>
-        </p:txBody>
-      </p:sp>
-      <p:sp>
-        <p:nvSpPr>
-          <p:cNvPr id="3" name="TextBox 2"/>
-          <p:cNvSpPr txBox="1"/>
-          <p:nvPr/>
-        </p:nvSpPr>
-        <p:spPr>
-          <a:xfrm>
-            <a:off x="502920" y="411480"/>
-            <a:ext cx="11155680" cy="822960"/>
-          </a:xfrm>
-          <a:prstGeom prst="rect">
-            <a:avLst/>
-          </a:prstGeom>
-          <a:noFill/>
-        </p:spPr>
-        <p:txBody>
-          <a:bodyPr wrap="square">
-            <a:spAutoFit/>
-          </a:bodyPr>
-          <a:lstStyle/>
-          <a:p>
-            <a:r>
-              <a:rPr sz="3000" b="1" i="0">
-                <a:solidFill>
-                  <a:srgbClr val="1F3A5F"/>
-                </a:solidFill>
-                <a:latin typeface="Calibri"/>
-              </a:rPr>
-              <a:t>Proposed refinements</a:t>
-            </a:r>
-          </a:p>
-        </p:txBody>
-      </p:sp>
-      <p:sp>
-        <p:nvSpPr>
-          <p:cNvPr id="4" name="TextBox 3"/>
-          <p:cNvSpPr txBox="1"/>
-          <p:nvPr/>
-        </p:nvSpPr>
-        <p:spPr>
-          <a:xfrm>
-            <a:off x="548640" y="914400"/>
-            <a:ext cx="10972800" cy="320040"/>
-          </a:xfrm>
-          <a:prstGeom prst="rect">
-            <a:avLst/>
-          </a:prstGeom>
-          <a:noFill/>
-        </p:spPr>
-        <p:txBody>
-          <a:bodyPr wrap="square">
-            <a:spAutoFit/>
-          </a:bodyPr>
-          <a:lstStyle/>
-          <a:p>
-            <a:r>
-              <a:rPr sz="1300" b="0" i="1">
-                <a:solidFill>
-                  <a:srgbClr val="2E869A"/>
-                </a:solidFill>
-                <a:latin typeface="Calibri"/>
-              </a:rPr>
-              <a:t>Pending group buy-in - nothing applied to the model</a:t>
-            </a:r>
-          </a:p>
-        </p:txBody>
-      </p:sp>
-      <p:sp>
-        <p:nvSpPr>
-          <p:cNvPr id="5" name="TextBox 4"/>
-          <p:cNvSpPr txBox="1"/>
-          <p:nvPr/>
-        </p:nvSpPr>
-        <p:spPr>
-          <a:xfrm>
-            <a:off x="640080" y="1554480"/>
-            <a:ext cx="10972800" cy="4754880"/>
-          </a:xfrm>
-          <a:prstGeom prst="rect">
-            <a:avLst/>
-          </a:prstGeom>
-          <a:noFill/>
-        </p:spPr>
-        <p:txBody>
-          <a:bodyPr wrap="square">
-            <a:spAutoFit/>
-          </a:bodyPr>
-          <a:lstStyle/>
-          <a:p>
-            <a:pPr>
-              <a:spcBef>
-                <a:spcPts val="200"/>
-              </a:spcBef>
-              <a:spcAft>
-                <a:spcPts val="1300"/>
-              </a:spcAft>
-            </a:pPr>
-            <a:r>
-              <a:rPr sz="1400" b="1" i="0">
-                <a:solidFill>
-                  <a:srgbClr val="2E7D32"/>
-                </a:solidFill>
-                <a:latin typeface="Calibri"/>
-              </a:rPr>
-              <a:t>•  Safe corrections (unambiguous):  </a:t>
-            </a:r>
-            <a:r>
-              <a:rPr sz="1400" b="0" i="0">
-                <a:solidFill>
-                  <a:srgbClr val="333333"/>
-                </a:solidFill>
-                <a:latin typeface="Calibri"/>
-              </a:rPr>
-              <a:t>class typo CollecticeRoboticSystem -&gt; CollectiveRoboticSystem (O1); versionInfo Extrension -&gt; Extension (O2); file CSIM_ASX -&gt; C2SIM_ASX (O3); hasStartTime UUIDBase -&gt; TimeInstant (M7); unify namespace label ASX / C2SIM_ASX (M8).</a:t>
-            </a:r>
-          </a:p>
-          <a:p>
-            <a:pPr>
-              <a:spcBef>
-                <a:spcPts val="200"/>
-              </a:spcBef>
-              <a:spcAft>
-                <a:spcPts val="1300"/>
-              </a:spcAft>
-            </a:pPr>
-            <a:r>
-              <a:rPr sz="1400" b="1" i="0">
-                <a:solidFill>
-                  <a:srgbClr val="C87F0A"/>
-                </a:solidFill>
-                <a:latin typeface="Calibri"/>
-              </a:rPr>
-              <a:t>•  Structural (decide first):  </a:t>
-            </a:r>
-            <a:r>
-              <a:rPr sz="1400" b="0" i="0">
-                <a:solidFill>
-                  <a:srgbClr val="333333"/>
-                </a:solidFill>
-                <a:latin typeface="Calibri"/>
-              </a:rPr>
-              <a:t>UAV/robot typing (Q-A); Swarm -&gt; CollectiveEntity so it is taskable (Q-B); one sensor model (Q-C); one autonomy vocabulary (Q-D).</a:t>
-            </a:r>
-          </a:p>
-          <a:p>
-            <a:pPr>
-              <a:spcBef>
-                <a:spcPts val="200"/>
-              </a:spcBef>
-              <a:spcAft>
-                <a:spcPts val="1300"/>
-              </a:spcAft>
-            </a:pPr>
-            <a:r>
-              <a:rPr sz="1400" b="1" i="0">
-                <a:solidFill>
-                  <a:srgbClr val="2E869A"/>
-                </a:solidFill>
-                <a:latin typeface="Calibri"/>
-              </a:rPr>
-              <a:t>•  New content (design):  </a:t>
-            </a:r>
-            <a:r>
-              <a:rPr sz="1400" b="0" i="0">
-                <a:solidFill>
-                  <a:srgbClr val="333333"/>
-                </a:solidFill>
-                <a:latin typeface="Calibri"/>
-              </a:rPr>
-              <a:t>inline entity def (Q-E), MediaReference (Q-F), robot-to-robot + cross-cue (Q-G/Q-P), rationale report (Q-H), generic detection report (Q-I/Q-Q), swarm residuals (Q-J), engagement authority (Q-K), payload/effector/weapon typing (Q-L), area subject (Q-M), explore order (Q-N), denied-comms/relay (Q-O), locomotion subtypes (Q-R), decoy/threat-aware (Q-S), environment conditions (Q-T), formation geometry (Q-U), weapons-control/kill-box authority (Q-W), loitering-munition + counter-UAS typing (Q-X).</a:t>
-            </a:r>
-          </a:p>
-          <a:p>
-            <a:pPr>
-              <a:spcBef>
-                <a:spcPts val="200"/>
-              </a:spcBef>
-              <a:spcAft>
-                <a:spcPts val="1300"/>
-              </a:spcAft>
-            </a:pPr>
-            <a:r>
-              <a:rPr sz="1400" b="1" i="0">
-                <a:solidFill>
-                  <a:srgbClr val="333333"/>
-                </a:solidFill>
-                <a:latin typeface="Calibri"/>
-              </a:rPr>
-              <a:t>•  Nothing here is applied to the model - all items are proposals for group buy-in.</a:t>
-            </a:r>
-          </a:p>
-        </p:txBody>
-      </p:sp>
-      <p:sp>
-        <p:nvSpPr>
-          <p:cNvPr id="6" name="TextBox 5"/>
-          <p:cNvSpPr txBox="1"/>
-          <p:nvPr/>
-        </p:nvSpPr>
-        <p:spPr>
-          <a:xfrm>
-            <a:off x="502920" y="6126480"/>
-            <a:ext cx="11155680" cy="274320"/>
-          </a:xfrm>
-          <a:prstGeom prst="rect">
-            <a:avLst/>
-          </a:prstGeom>
-          <a:noFill/>
-        </p:spPr>
-        <p:txBody>
-          <a:bodyPr wrap="square">
-            <a:spAutoFit/>
-          </a:bodyPr>
-          <a:lstStyle/>
-          <a:p>
-            <a:r>
-              <a:rPr sz="1000" b="1" i="1">
-                <a:solidFill>
-                  <a:srgbClr val="2E869A"/>
-                </a:solidFill>
-                <a:latin typeface="Calibri"/>
-              </a:rPr>
-              <a:t>Dig deeper:  </a:t>
-            </a:r>
-            <a:r>
-              <a:rPr sz="1000" b="0" i="1">
-                <a:solidFill>
-                  <a:srgbClr val="666666"/>
-                </a:solidFill>
-                <a:latin typeface="Calibri"/>
-              </a:rPr>
-              <a:t>log secs 3-4 (the safe corrections)  -  sec 7 (every decision, with what it resolves)</a:t>
-            </a:r>
-          </a:p>
-        </p:txBody>
-      </p:sp>
-      <p:sp>
-        <p:nvSpPr>
-          <p:cNvPr id="7" name="TextBox 6"/>
-          <p:cNvSpPr txBox="1"/>
-          <p:nvPr/>
-        </p:nvSpPr>
-        <p:spPr>
-          <a:xfrm>
-            <a:off x="502920" y="6419088"/>
-            <a:ext cx="11155680" cy="320040"/>
-          </a:xfrm>
-          <a:prstGeom prst="rect">
-            <a:avLst/>
-          </a:prstGeom>
-          <a:noFill/>
-        </p:spPr>
-        <p:txBody>
-          <a:bodyPr wrap="square">
-            <a:spAutoFit/>
-          </a:bodyPr>
-          <a:lstStyle/>
-          <a:p>
-            <a:r>
-              <a:rPr sz="900" b="0" i="0">
-                <a:solidFill>
-                  <a:srgbClr val="666666"/>
-                </a:solidFill>
-                <a:latin typeface="Calibri"/>
-              </a:rPr>
-              <a:t>C2SIM ASX Sub-group   |   Hyssos   |   July 2026</a:t>
-            </a:r>
-          </a:p>
-        </p:txBody>
-      </p:sp>
-      <p:sp>
-        <p:nvSpPr>
-          <p:cNvPr id="8" name="TextBox 7"/>
-          <p:cNvSpPr txBox="1"/>
-          <p:nvPr/>
-        </p:nvSpPr>
-        <p:spPr>
-          <a:xfrm>
-            <a:off x="11338560" y="6419088"/>
-            <a:ext cx="640080" cy="320040"/>
-          </a:xfrm>
-          <a:prstGeom prst="rect">
-            <a:avLst/>
-          </a:prstGeom>
-          <a:noFill/>
-        </p:spPr>
-        <p:txBody>
-          <a:bodyPr wrap="square">
-            <a:spAutoFit/>
-          </a:bodyPr>
-          <a:lstStyle/>
-          <a:p>
-            <a:pPr algn="r"/>
-            <a:r>
-              <a:rPr sz="900" b="0" i="0">
-                <a:solidFill>
-                  <a:srgbClr val="666666"/>
-                </a:solidFill>
-                <a:latin typeface="Calibri"/>
-              </a:rPr>
-              <a:t>24</a:t>
-            </a:r>
-          </a:p>
-        </p:txBody>
-      </p:sp>
-    </p:spTree>
-  </p:cSld>
-  <p:clrMapOvr>
-    <a:masterClrMapping/>
-  </p:clrMapOvr>
-</p:sld>
-</file>
-
-<file path=ppt/slides/slide25.xml><?xml version="1.0" encoding="utf-8"?>
-<p:sld xmlns:a="http://schemas.openxmlformats.org/drawingml/2006/main" xmlns:p="http://schemas.openxmlformats.org/presentationml/2006/main" xmlns:r="http://schemas.openxmlformats.org/officeDocument/2006/relationships">
-  <p:cSld>
-    <p:spTree>
-      <p:nvGrpSpPr>
-        <p:cNvPr id="1" name=""/>
-        <p:cNvGrpSpPr/>
-        <p:nvPr/>
-      </p:nvGrpSpPr>
-      <p:grpSpPr/>
-      <p:sp>
-        <p:nvSpPr>
-          <p:cNvPr id="2" name="Rectangle 1"/>
-          <p:cNvSpPr/>
-          <p:nvPr/>
-        </p:nvSpPr>
-        <p:spPr>
-          <a:xfrm>
-            <a:off x="548640" y="1170432"/>
-            <a:ext cx="2011680" cy="38100"/>
-          </a:xfrm>
-          <a:prstGeom prst="rect">
-            <a:avLst/>
-          </a:prstGeom>
-          <a:solidFill>
-            <a:srgbClr val="2E869A"/>
-          </a:solidFill>
-          <a:ln>
-            <a:noFill/>
-          </a:ln>
-        </p:spPr>
-        <p:style>
-          <a:lnRef idx="1">
-            <a:schemeClr val="accent1"/>
-          </a:lnRef>
-          <a:fillRef idx="3">
-            <a:schemeClr val="accent1"/>
-          </a:fillRef>
-          <a:effectRef idx="2">
-            <a:schemeClr val="accent1"/>
-          </a:effectRef>
-          <a:fontRef idx="minor">
-            <a:schemeClr val="lt1"/>
-          </a:fontRef>
-        </p:style>
-        <p:txBody>
-          <a:bodyPr rtlCol="0" anchor="ctr"/>
-          <a:lstStyle/>
-          <a:p>
-            <a:pPr algn="ctr"/>
-          </a:p>
-        </p:txBody>
-      </p:sp>
-      <p:sp>
-        <p:nvSpPr>
-          <p:cNvPr id="3" name="TextBox 2"/>
-          <p:cNvSpPr txBox="1"/>
-          <p:nvPr/>
-        </p:nvSpPr>
-        <p:spPr>
-          <a:xfrm>
-            <a:off x="502920" y="411480"/>
-            <a:ext cx="11155680" cy="822960"/>
-          </a:xfrm>
-          <a:prstGeom prst="rect">
-            <a:avLst/>
-          </a:prstGeom>
-          <a:noFill/>
-        </p:spPr>
-        <p:txBody>
-          <a:bodyPr wrap="square">
-            <a:spAutoFit/>
-          </a:bodyPr>
-          <a:lstStyle/>
-          <a:p>
-            <a:r>
-              <a:rPr sz="3000" b="1" i="0">
-                <a:solidFill>
-                  <a:srgbClr val="1F3A5F"/>
-                </a:solidFill>
-                <a:latin typeface="Calibri"/>
-              </a:rPr>
-              <a:t>Recommended next steps</a:t>
-            </a:r>
-          </a:p>
-        </p:txBody>
-      </p:sp>
-      <p:sp>
-        <p:nvSpPr>
-          <p:cNvPr id="4" name="TextBox 3"/>
-          <p:cNvSpPr txBox="1"/>
-          <p:nvPr/>
-        </p:nvSpPr>
-        <p:spPr>
-          <a:xfrm>
-            <a:off x="640080" y="1645920"/>
-            <a:ext cx="10972800" cy="4709160"/>
-          </a:xfrm>
-          <a:prstGeom prst="rect">
-            <a:avLst/>
-          </a:prstGeom>
-          <a:noFill/>
-        </p:spPr>
-        <p:txBody>
-          <a:bodyPr wrap="square">
-            <a:spAutoFit/>
-          </a:bodyPr>
-          <a:lstStyle/>
-          <a:p>
-            <a:pPr>
-              <a:spcBef>
-                <a:spcPts val="200"/>
-              </a:spcBef>
-              <a:spcAft>
-                <a:spcPts val="1200"/>
-              </a:spcAft>
-            </a:pPr>
-            <a:r>
-              <a:rPr sz="1650" b="1" i="0">
-                <a:solidFill>
-                  <a:srgbClr val="333333"/>
-                </a:solidFill>
-                <a:latin typeface="Calibri"/>
-              </a:rPr>
-              <a:t>•  Settle the two entity-typing decisions (Q-A, Q-B) - this unblocks Initialization.</a:t>
-            </a:r>
-          </a:p>
-          <a:p>
-            <a:pPr>
-              <a:spcBef>
-                <a:spcPts val="200"/>
-              </a:spcBef>
-              <a:spcAft>
-                <a:spcPts val="1200"/>
-              </a:spcAft>
-            </a:pPr>
-            <a:r>
-              <a:rPr sz="1650" b="0" i="0">
-                <a:solidFill>
-                  <a:srgbClr val="333333"/>
-                </a:solidFill>
-                <a:latin typeface="Calibri"/>
-              </a:rPr>
-              <a:t>•  Complete the Initialization instantiations (drafts provided for the 3 named scenarios).</a:t>
-            </a:r>
-          </a:p>
-          <a:p>
-            <a:pPr>
-              <a:spcBef>
-                <a:spcPts val="200"/>
-              </a:spcBef>
-              <a:spcAft>
-                <a:spcPts val="1200"/>
-              </a:spcAft>
-            </a:pPr>
-            <a:r>
-              <a:rPr sz="1650" b="0" i="0">
-                <a:solidFill>
-                  <a:srgbClr val="333333"/>
-                </a:solidFill>
-                <a:latin typeface="Calibri"/>
-              </a:rPr>
-              <a:t>•  Add the two CASEVAC content types (Q-G robot-to-robot, Q-H rationale) - both are explicit scenario requirements.</a:t>
-            </a:r>
-          </a:p>
-          <a:p>
-            <a:pPr>
-              <a:spcBef>
-                <a:spcPts val="200"/>
-              </a:spcBef>
-              <a:spcAft>
-                <a:spcPts val="1200"/>
-              </a:spcAft>
-            </a:pPr>
-            <a:r>
-              <a:rPr sz="1650" b="0" i="0">
-                <a:solidFill>
-                  <a:srgbClr val="333333"/>
-                </a:solidFill>
-                <a:latin typeface="Calibri"/>
-              </a:rPr>
-              <a:t>•  Reconcile the OWL model with the June spreadsheet decisions; fix the typos.</a:t>
-            </a:r>
-          </a:p>
-          <a:p>
-            <a:pPr>
-              <a:spcBef>
-                <a:spcPts val="200"/>
-              </a:spcBef>
-              <a:spcAft>
-                <a:spcPts val="1200"/>
-              </a:spcAft>
-            </a:pPr>
-            <a:r>
-              <a:rPr sz="1650" b="0" i="0">
-                <a:solidFill>
-                  <a:srgbClr val="333333"/>
-                </a:solidFill>
-                <a:latin typeface="Calibri"/>
-              </a:rPr>
-              <a:t>•  Optional: adopt the diff-able (.xml) workbooks so edits can be reviewed and merged in git.</a:t>
-            </a:r>
-          </a:p>
-        </p:txBody>
-      </p:sp>
-      <p:sp>
-        <p:nvSpPr>
-          <p:cNvPr id="5" name="TextBox 4"/>
-          <p:cNvSpPr txBox="1"/>
-          <p:nvPr/>
-        </p:nvSpPr>
-        <p:spPr>
-          <a:xfrm>
-            <a:off x="502920" y="6126480"/>
-            <a:ext cx="11155680" cy="274320"/>
-          </a:xfrm>
-          <a:prstGeom prst="rect">
-            <a:avLst/>
-          </a:prstGeom>
-          <a:noFill/>
-        </p:spPr>
-        <p:txBody>
-          <a:bodyPr wrap="square">
-            <a:spAutoFit/>
-          </a:bodyPr>
-          <a:lstStyle/>
-          <a:p>
-            <a:r>
-              <a:rPr sz="1000" b="1" i="1">
-                <a:solidFill>
-                  <a:srgbClr val="2E869A"/>
-                </a:solidFill>
-                <a:latin typeface="Calibri"/>
-              </a:rPr>
-              <a:t>Dig deeper:  </a:t>
-            </a:r>
-            <a:r>
-              <a:rPr sz="1000" b="0" i="1">
-                <a:solidFill>
-                  <a:srgbClr val="666666"/>
-                </a:solidFill>
-                <a:latin typeface="Calibri"/>
-              </a:rPr>
-              <a:t>Group-Briefing.md ('Status and next step')  -  log sec 7 for the full decision register</a:t>
-            </a:r>
-          </a:p>
-        </p:txBody>
-      </p:sp>
-      <p:sp>
-        <p:nvSpPr>
-          <p:cNvPr id="6" name="TextBox 5"/>
-          <p:cNvSpPr txBox="1"/>
-          <p:nvPr/>
-        </p:nvSpPr>
-        <p:spPr>
-          <a:xfrm>
-            <a:off x="502920" y="6419088"/>
-            <a:ext cx="11155680" cy="320040"/>
-          </a:xfrm>
-          <a:prstGeom prst="rect">
-            <a:avLst/>
-          </a:prstGeom>
-          <a:noFill/>
-        </p:spPr>
-        <p:txBody>
-          <a:bodyPr wrap="square">
-            <a:spAutoFit/>
-          </a:bodyPr>
-          <a:lstStyle/>
-          <a:p>
-            <a:r>
-              <a:rPr sz="900" b="0" i="0">
-                <a:solidFill>
-                  <a:srgbClr val="666666"/>
-                </a:solidFill>
-                <a:latin typeface="Calibri"/>
-              </a:rPr>
-              <a:t>C2SIM ASX Sub-group   |   Hyssos   |   July 2026</a:t>
-            </a:r>
-          </a:p>
-        </p:txBody>
-      </p:sp>
-      <p:sp>
-        <p:nvSpPr>
-          <p:cNvPr id="7" name="TextBox 6"/>
-          <p:cNvSpPr txBox="1"/>
-          <p:nvPr/>
-        </p:nvSpPr>
-        <p:spPr>
-          <a:xfrm>
-            <a:off x="11338560" y="6419088"/>
-            <a:ext cx="640080" cy="320040"/>
-          </a:xfrm>
-          <a:prstGeom prst="rect">
-            <a:avLst/>
-          </a:prstGeom>
-          <a:noFill/>
-        </p:spPr>
-        <p:txBody>
-          <a:bodyPr wrap="square">
-            <a:spAutoFit/>
-          </a:bodyPr>
-          <a:lstStyle/>
-          <a:p>
-            <a:pPr algn="r"/>
-            <a:r>
-              <a:rPr sz="900" b="0" i="0">
-                <a:solidFill>
-                  <a:srgbClr val="666666"/>
-                </a:solidFill>
-                <a:latin typeface="Calibri"/>
-              </a:rPr>
-              <a:t>25</a:t>
-            </a:r>
-          </a:p>
-        </p:txBody>
-      </p:sp>
-    </p:spTree>
-  </p:cSld>
-  <p:clrMapOvr>
-    <a:masterClrMapping/>
-  </p:clrMapOvr>
-</p:sld>
-</file>
-
-<file path=ppt/slides/slide26.xml><?xml version="1.0" encoding="utf-8"?>
 <p:sld xmlns:a="http://schemas.openxmlformats.org/drawingml/2006/main" xmlns:p="http://schemas.openxmlformats.org/presentationml/2006/main" xmlns:r="http://schemas.openxmlformats.org/officeDocument/2006/relationships">
   <p:cSld>
     <p:spTree>
@@ -14117,7 +11903,7 @@
                 </a:solidFill>
                 <a:latin typeface="Calibri"/>
               </a:rPr>
-              <a:t>26</a:t>
+              <a:t>21</a:t>
             </a:r>
           </a:p>
         </p:txBody>
@@ -14130,7 +11916,7 @@
 </p:sld>
 </file>
 
-<file path=ppt/slides/slide27.xml><?xml version="1.0" encoding="utf-8"?>
+<file path=ppt/slides/slide22.xml><?xml version="1.0" encoding="utf-8"?>
 <p:sld xmlns:a="http://schemas.openxmlformats.org/drawingml/2006/main" xmlns:p="http://schemas.openxmlformats.org/presentationml/2006/main" xmlns:r="http://schemas.openxmlformats.org/officeDocument/2006/relationships">
   <p:cSld>
     <p:spTree>
@@ -14212,7 +11998,7 @@
                 </a:solidFill>
                 <a:latin typeface="Calibri"/>
               </a:rPr>
-              <a:t>Finding-ID decoder ring</a:t>
+              <a:t>Finding-ID decoder ring - Issues-And-Comments-Log.md</a:t>
             </a:r>
           </a:p>
         </p:txBody>
@@ -15132,7 +12918,7 @@
                 </a:solidFill>
                 <a:latin typeface="Calibri"/>
               </a:rPr>
-              <a:t>27</a:t>
+              <a:t>22</a:t>
             </a:r>
           </a:p>
         </p:txBody>
@@ -15145,7 +12931,7 @@
 </p:sld>
 </file>
 
-<file path=ppt/slides/slide28.xml><?xml version="1.0" encoding="utf-8"?>
+<file path=ppt/slides/slide23.xml><?xml version="1.0" encoding="utf-8"?>
 <p:sld xmlns:a="http://schemas.openxmlformats.org/drawingml/2006/main" xmlns:p="http://schemas.openxmlformats.org/presentationml/2006/main" xmlns:r="http://schemas.openxmlformats.org/officeDocument/2006/relationships">
   <p:cSld>
     <p:spTree>
@@ -15605,7 +13391,7 @@
                 </a:solidFill>
                 <a:latin typeface="Calibri"/>
               </a:rPr>
-              <a:t>28</a:t>
+              <a:t>23</a:t>
             </a:r>
           </a:p>
         </p:txBody>
@@ -15700,7 +13486,7 @@
                 </a:solidFill>
                 <a:latin typeface="Calibri"/>
               </a:rPr>
-              <a:t>The method</a:t>
+              <a:t>How this was produced: three sessions + a verification pass</a:t>
             </a:r>
           </a:p>
         </p:txBody>
@@ -15734,21 +13520,302 @@
                 </a:solidFill>
                 <a:latin typeface="Calibri"/>
               </a:rPr>
-              <a:t>Building on the sample-message work</a:t>
-            </a:r>
-          </a:p>
-        </p:txBody>
-      </p:sp>
-      <p:sp>
-        <p:nvSpPr>
-          <p:cNvPr id="5" name="TextBox 4"/>
+              <a:t>LLM-assisted, human-directed - each stage grounded in the artifacts, not memory</a:t>
+            </a:r>
+          </a:p>
+        </p:txBody>
+      </p:sp>
+      <p:sp>
+        <p:nvSpPr>
+          <p:cNvPr id="5" name="Rounded Rectangle 4"/>
+          <p:cNvSpPr/>
+          <p:nvPr/>
+        </p:nvSpPr>
+        <p:spPr>
+          <a:xfrm>
+            <a:off x="640080" y="1737360"/>
+            <a:ext cx="3383280" cy="1554480"/>
+          </a:xfrm>
+          <a:prstGeom prst="roundRect">
+            <a:avLst/>
+          </a:prstGeom>
+          <a:solidFill>
+            <a:srgbClr val="1F3A5F"/>
+          </a:solidFill>
+          <a:ln>
+            <a:noFill/>
+          </a:ln>
+        </p:spPr>
+        <p:style>
+          <a:lnRef idx="1">
+            <a:schemeClr val="accent1"/>
+          </a:lnRef>
+          <a:fillRef idx="3">
+            <a:schemeClr val="accent1"/>
+          </a:fillRef>
+          <a:effectRef idx="2">
+            <a:schemeClr val="accent1"/>
+          </a:effectRef>
+          <a:fontRef idx="minor">
+            <a:schemeClr val="lt1"/>
+          </a:fontRef>
+        </p:style>
+        <p:txBody>
+          <a:bodyPr rtlCol="0" anchor="ctr" wrap="square"/>
+          <a:lstStyle/>
+          <a:p>
+            <a:pPr algn="ctr"/>
+            <a:r>
+              <a:rPr sz="1250" b="1" i="0">
+                <a:solidFill>
+                  <a:srgbClr val="FFFFFF"/>
+                </a:solidFill>
+                <a:latin typeface="Calibri"/>
+              </a:rPr>
+              <a:t>1  -  Document mining
+Hunt primary mission documents (theses, tech reports, AARs) for missing domains + validation holes</a:t>
+            </a:r>
+          </a:p>
+        </p:txBody>
+      </p:sp>
+      <p:sp>
+        <p:nvSpPr>
+          <p:cNvPr id="6" name="Rounded Rectangle 5"/>
+          <p:cNvSpPr/>
+          <p:nvPr/>
+        </p:nvSpPr>
+        <p:spPr>
+          <a:xfrm>
+            <a:off x="4389120" y="1737360"/>
+            <a:ext cx="3383280" cy="1554480"/>
+          </a:xfrm>
+          <a:prstGeom prst="roundRect">
+            <a:avLst/>
+          </a:prstGeom>
+          <a:solidFill>
+            <a:srgbClr val="1F3A5F"/>
+          </a:solidFill>
+          <a:ln>
+            <a:noFill/>
+          </a:ln>
+        </p:spPr>
+        <p:style>
+          <a:lnRef idx="1">
+            <a:schemeClr val="accent1"/>
+          </a:lnRef>
+          <a:fillRef idx="3">
+            <a:schemeClr val="accent1"/>
+          </a:fillRef>
+          <a:effectRef idx="2">
+            <a:schemeClr val="accent1"/>
+          </a:effectRef>
+          <a:fontRef idx="minor">
+            <a:schemeClr val="lt1"/>
+          </a:fontRef>
+        </p:style>
+        <p:txBody>
+          <a:bodyPr rtlCol="0" anchor="ctr" wrap="square"/>
+          <a:lstStyle/>
+          <a:p>
+            <a:pPr algn="ctr"/>
+            <a:r>
+              <a:rPr sz="1250" b="1" i="0">
+                <a:solidFill>
+                  <a:srgbClr val="FFFFFF"/>
+                </a:solidFill>
+                <a:latin typeface="Calibri"/>
+              </a:rPr>
+              <a:t>2  -  Scenario extraction
+A locked v2.2 prompt distills each document into a standardized scenario record (15 records)</a:t>
+            </a:r>
+          </a:p>
+        </p:txBody>
+      </p:sp>
+      <p:sp>
+        <p:nvSpPr>
+          <p:cNvPr id="7" name="Rounded Rectangle 6"/>
+          <p:cNvSpPr/>
+          <p:nvPr/>
+        </p:nvSpPr>
+        <p:spPr>
+          <a:xfrm>
+            <a:off x="8138160" y="1737360"/>
+            <a:ext cx="3383280" cy="1554480"/>
+          </a:xfrm>
+          <a:prstGeom prst="roundRect">
+            <a:avLst/>
+          </a:prstGeom>
+          <a:solidFill>
+            <a:srgbClr val="1F3A5F"/>
+          </a:solidFill>
+          <a:ln>
+            <a:noFill/>
+          </a:ln>
+        </p:spPr>
+        <p:style>
+          <a:lnRef idx="1">
+            <a:schemeClr val="accent1"/>
+          </a:lnRef>
+          <a:fillRef idx="3">
+            <a:schemeClr val="accent1"/>
+          </a:fillRef>
+          <a:effectRef idx="2">
+            <a:schemeClr val="accent1"/>
+          </a:effectRef>
+          <a:fontRef idx="minor">
+            <a:schemeClr val="lt1"/>
+          </a:fontRef>
+        </p:style>
+        <p:txBody>
+          <a:bodyPr rtlCol="0" anchor="ctr" wrap="square"/>
+          <a:lstStyle/>
+          <a:p>
+            <a:pPr algn="ctr"/>
+            <a:r>
+              <a:rPr sz="1250" b="1" i="0">
+                <a:solidFill>
+                  <a:srgbClr val="FFFFFF"/>
+                </a:solidFill>
+                <a:latin typeface="Calibri"/>
+              </a:rPr>
+              <a:t>3  -  Ontology application
+Walk each scenario into concrete Init / Order / Report messages using the proposed ASX elements</a:t>
+            </a:r>
+          </a:p>
+        </p:txBody>
+      </p:sp>
+      <p:cxnSp>
+        <p:nvCxnSpPr>
+          <p:cNvPr id="8" name="Connector 7"/>
+          <p:cNvCxnSpPr/>
+          <p:nvPr/>
+        </p:nvCxnSpPr>
+        <p:spPr>
+          <a:xfrm>
+            <a:off x="4023360" y="2514600"/>
+            <a:ext cx="365760" cy="0"/>
+          </a:xfrm>
+          <a:prstGeom prst="line">
+            <a:avLst/>
+          </a:prstGeom>
+          <a:ln w="19050">
+            <a:solidFill>
+              <a:srgbClr val="2E869A"/>
+            </a:solidFill>
+          </a:ln>
+        </p:spPr>
+        <p:style>
+          <a:lnRef idx="2">
+            <a:schemeClr val="accent1"/>
+          </a:lnRef>
+          <a:fillRef idx="0">
+            <a:schemeClr val="accent1"/>
+          </a:fillRef>
+          <a:effectRef idx="1">
+            <a:schemeClr val="accent1"/>
+          </a:effectRef>
+          <a:fontRef idx="minor">
+            <a:schemeClr val="tx1"/>
+          </a:fontRef>
+        </p:style>
+      </p:cxnSp>
+      <p:cxnSp>
+        <p:nvCxnSpPr>
+          <p:cNvPr id="9" name="Connector 8"/>
+          <p:cNvCxnSpPr/>
+          <p:nvPr/>
+        </p:nvCxnSpPr>
+        <p:spPr>
+          <a:xfrm>
+            <a:off x="7772400" y="2514600"/>
+            <a:ext cx="365760" cy="0"/>
+          </a:xfrm>
+          <a:prstGeom prst="line">
+            <a:avLst/>
+          </a:prstGeom>
+          <a:ln w="19050">
+            <a:solidFill>
+              <a:srgbClr val="2E869A"/>
+            </a:solidFill>
+          </a:ln>
+        </p:spPr>
+        <p:style>
+          <a:lnRef idx="2">
+            <a:schemeClr val="accent1"/>
+          </a:lnRef>
+          <a:fillRef idx="0">
+            <a:schemeClr val="accent1"/>
+          </a:fillRef>
+          <a:effectRef idx="1">
+            <a:schemeClr val="accent1"/>
+          </a:effectRef>
+          <a:fontRef idx="minor">
+            <a:schemeClr val="tx1"/>
+          </a:fontRef>
+        </p:style>
+      </p:cxnSp>
+      <p:sp>
+        <p:nvSpPr>
+          <p:cNvPr id="10" name="Rounded Rectangle 9"/>
+          <p:cNvSpPr/>
+          <p:nvPr/>
+        </p:nvSpPr>
+        <p:spPr>
+          <a:xfrm>
+            <a:off x="640080" y="3611880"/>
+            <a:ext cx="10881360" cy="960120"/>
+          </a:xfrm>
+          <a:prstGeom prst="roundRect">
+            <a:avLst/>
+          </a:prstGeom>
+          <a:solidFill>
+            <a:srgbClr val="2E7D32"/>
+          </a:solidFill>
+          <a:ln>
+            <a:noFill/>
+          </a:ln>
+        </p:spPr>
+        <p:style>
+          <a:lnRef idx="1">
+            <a:schemeClr val="accent1"/>
+          </a:lnRef>
+          <a:fillRef idx="3">
+            <a:schemeClr val="accent1"/>
+          </a:fillRef>
+          <a:effectRef idx="2">
+            <a:schemeClr val="accent1"/>
+          </a:effectRef>
+          <a:fontRef idx="minor">
+            <a:schemeClr val="lt1"/>
+          </a:fontRef>
+        </p:style>
+        <p:txBody>
+          <a:bodyPr rtlCol="0" anchor="ctr" wrap="square"/>
+          <a:lstStyle/>
+          <a:p>
+            <a:pPr algn="ctr"/>
+            <a:r>
+              <a:rPr sz="1300" b="1" i="0">
+                <a:solidFill>
+                  <a:srgbClr val="FFFFFF"/>
+                </a:solidFill>
+                <a:latin typeface="Calibri"/>
+              </a:rPr>
+              <a:t>4  -  Independent verification pass: every RDF-grounded claim re-checked against C2SIM / SMX / LOX and v0.0.3; workbooks re-compared cell-for-cell; citations traced; deck regenerated. Corrections logged (issues log, 2026-07-12).</a:t>
+            </a:r>
+          </a:p>
+        </p:txBody>
+      </p:sp>
+      <p:sp>
+        <p:nvSpPr>
+          <p:cNvPr id="11" name="TextBox 10"/>
           <p:cNvSpPr txBox="1"/>
           <p:nvPr/>
         </p:nvSpPr>
         <p:spPr>
           <a:xfrm>
-            <a:off x="640080" y="1554480"/>
-            <a:ext cx="10972800" cy="4754880"/>
+            <a:off x="640080" y="4800600"/>
+            <a:ext cx="10972800" cy="1554480"/>
           </a:xfrm>
           <a:prstGeom prst="rect">
             <a:avLst/>
@@ -15766,17 +13833,17 @@
                 <a:spcPts val="200"/>
               </a:spcBef>
               <a:spcAft>
-                <a:spcPts val="1300"/>
+                <a:spcPts val="700"/>
               </a:spcAft>
             </a:pPr>
             <a:r>
-              <a:rPr sz="1700" b="0" i="0">
+              <a:rPr sz="1300" b="0" i="0">
                 <a:solidFill>
                   <a:srgbClr val="333333"/>
                 </a:solidFill>
                 <a:latin typeface="Calibri"/>
               </a:rPr>
-              <a:t>•  Walk each scenario and instantiate real Initialization / Order / Report messages using C2SIM + the proposed ASX elements.</a:t>
+              <a:t>•  The loop iterates: the ontology walk (3) writes the sourcing brief (Documents-Needed), mining (1) answers it (Documents-Found), extraction (2) turns the finds into records, and the walk integrates them - until every raised gap is grounded in a real mission.</a:t>
             </a:r>
           </a:p>
           <a:p>
@@ -15785,69 +13852,31 @@
                 <a:spcPts val="200"/>
               </a:spcBef>
               <a:spcAft>
-                <a:spcPts val="1300"/>
+                <a:spcPts val="700"/>
               </a:spcAft>
             </a:pPr>
             <a:r>
-              <a:rPr sz="1700" b="0" i="0">
-                <a:solidFill>
-                  <a:srgbClr val="333333"/>
-                </a:solidFill>
-                <a:latin typeface="Calibri"/>
-              </a:rPr>
-              <a:t>•  The ASX model is an early work-in-progress (v0.0.x) and the message instances are still being put in place - instantiation is how we build those instances and surface what is still to be defined.</a:t>
-            </a:r>
-          </a:p>
-          <a:p>
-            <a:pPr>
-              <a:spcBef>
-                <a:spcPts val="200"/>
-              </a:spcBef>
-              <a:spcAft>
-                <a:spcPts val="1300"/>
-              </a:spcAft>
-            </a:pPr>
-            <a:r>
-              <a:rPr sz="1700" b="0" i="0">
-                <a:solidFill>
-                  <a:srgbClr val="333333"/>
-                </a:solidFill>
-                <a:latin typeface="Calibri"/>
-              </a:rPr>
-              <a:t>•  Where a proposed element is not yet defined enough to instantiate cleanly, that marks a concrete thing to specify next - not a defect.</a:t>
-            </a:r>
-          </a:p>
-          <a:p>
-            <a:pPr>
-              <a:spcBef>
-                <a:spcPts val="200"/>
-              </a:spcBef>
-              <a:spcAft>
-                <a:spcPts val="1300"/>
-              </a:spcAft>
-            </a:pPr>
-            <a:r>
-              <a:rPr sz="1700" b="0" i="0">
-                <a:solidFill>
-                  <a:srgbClr val="333333"/>
-                </a:solidFill>
-                <a:latin typeface="Calibri"/>
-              </a:rPr>
-              <a:t>•  Everything here is decisions and to-define items for the group; the approach is working.</a:t>
-            </a:r>
-          </a:p>
-        </p:txBody>
-      </p:sp>
-      <p:sp>
-        <p:nvSpPr>
-          <p:cNvPr id="6" name="TextBox 5"/>
+              <a:rPr sz="1300" b="0" i="0">
+                <a:solidFill>
+                  <a:srgbClr val="666666"/>
+                </a:solidFill>
+                <a:latin typeface="Calibri"/>
+              </a:rPr>
+              <a:t>•  Artifacts per stage: References corpus + Documents-Needed/Found (1); PromptV2 + V2Extractions (2); the .xml workbooks, walk docs, and issues log (3).</a:t>
+            </a:r>
+          </a:p>
+        </p:txBody>
+      </p:sp>
+      <p:sp>
+        <p:nvSpPr>
+          <p:cNvPr id="12" name="TextBox 11"/>
           <p:cNvSpPr txBox="1"/>
           <p:nvPr/>
         </p:nvSpPr>
         <p:spPr>
           <a:xfrm>
-            <a:off x="502920" y="6419088"/>
-            <a:ext cx="11155680" cy="320040"/>
+            <a:off x="502920" y="6126480"/>
+            <a:ext cx="11155680" cy="274320"/>
           </a:xfrm>
           <a:prstGeom prst="rect">
             <a:avLst/>
@@ -15861,6 +13890,49 @@
           <a:lstStyle/>
           <a:p>
             <a:r>
+              <a:rPr sz="1000" b="1" i="1">
+                <a:solidFill>
+                  <a:srgbClr val="2E869A"/>
+                </a:solidFill>
+                <a:latin typeface="Calibri"/>
+              </a:rPr>
+              <a:t>Dig deeper:  </a:t>
+            </a:r>
+            <a:r>
+              <a:rPr sz="1000" b="0" i="1">
+                <a:solidFill>
+                  <a:srgbClr val="666666"/>
+                </a:solidFill>
+                <a:latin typeface="Calibri"/>
+              </a:rPr>
+              <a:t>Documents-Needed/Found.md (mining)  -  PromptV2.md + V2-HeadToHead.md (extraction)  -  the walk docs (application)  -  log change-log 2026-07-12 (verification)</a:t>
+            </a:r>
+          </a:p>
+        </p:txBody>
+      </p:sp>
+      <p:sp>
+        <p:nvSpPr>
+          <p:cNvPr id="13" name="TextBox 12"/>
+          <p:cNvSpPr txBox="1"/>
+          <p:nvPr/>
+        </p:nvSpPr>
+        <p:spPr>
+          <a:xfrm>
+            <a:off x="502920" y="6419088"/>
+            <a:ext cx="11155680" cy="320040"/>
+          </a:xfrm>
+          <a:prstGeom prst="rect">
+            <a:avLst/>
+          </a:prstGeom>
+          <a:noFill/>
+        </p:spPr>
+        <p:txBody>
+          <a:bodyPr wrap="square">
+            <a:spAutoFit/>
+          </a:bodyPr>
+          <a:lstStyle/>
+          <a:p>
+            <a:r>
               <a:rPr sz="900" b="0" i="0">
                 <a:solidFill>
                   <a:srgbClr val="666666"/>
@@ -15874,7 +13946,7 @@
       </p:sp>
       <p:sp>
         <p:nvSpPr>
-          <p:cNvPr id="7" name="TextBox 6"/>
+          <p:cNvPr id="14" name="TextBox 13"/>
           <p:cNvSpPr txBox="1"/>
           <p:nvPr/>
         </p:nvSpPr>
@@ -15997,7 +14069,7 @@
                 </a:solidFill>
                 <a:latin typeface="Calibri"/>
               </a:rPr>
-              <a:t>How this was produced: three sessions + a verification pass</a:t>
+              <a:t>What this review contributes</a:t>
             </a:r>
           </a:p>
         </p:txBody>
@@ -16031,302 +14103,21 @@
                 </a:solidFill>
                 <a:latin typeface="Calibri"/>
               </a:rPr>
-              <a:t>LLM-assisted, human-directed - each stage grounded in the artifacts, not memory</a:t>
-            </a:r>
-          </a:p>
-        </p:txBody>
-      </p:sp>
-      <p:sp>
-        <p:nvSpPr>
-          <p:cNvPr id="5" name="Rounded Rectangle 4"/>
-          <p:cNvSpPr/>
-          <p:nvPr/>
-        </p:nvSpPr>
-        <p:spPr>
-          <a:xfrm>
-            <a:off x="640080" y="1737360"/>
-            <a:ext cx="3383280" cy="1554480"/>
-          </a:xfrm>
-          <a:prstGeom prst="roundRect">
-            <a:avLst/>
-          </a:prstGeom>
-          <a:solidFill>
-            <a:srgbClr val="1F3A5F"/>
-          </a:solidFill>
-          <a:ln>
-            <a:noFill/>
-          </a:ln>
-        </p:spPr>
-        <p:style>
-          <a:lnRef idx="1">
-            <a:schemeClr val="accent1"/>
-          </a:lnRef>
-          <a:fillRef idx="3">
-            <a:schemeClr val="accent1"/>
-          </a:fillRef>
-          <a:effectRef idx="2">
-            <a:schemeClr val="accent1"/>
-          </a:effectRef>
-          <a:fontRef idx="minor">
-            <a:schemeClr val="lt1"/>
-          </a:fontRef>
-        </p:style>
-        <p:txBody>
-          <a:bodyPr rtlCol="0" anchor="ctr" wrap="square"/>
-          <a:lstStyle/>
-          <a:p>
-            <a:pPr algn="ctr"/>
-            <a:r>
-              <a:rPr sz="1250" b="1" i="0">
-                <a:solidFill>
-                  <a:srgbClr val="FFFFFF"/>
-                </a:solidFill>
-                <a:latin typeface="Calibri"/>
-              </a:rPr>
-              <a:t>1  -  Document mining
-Hunt primary mission documents (theses, tech reports, AARs) for missing domains + validation holes</a:t>
-            </a:r>
-          </a:p>
-        </p:txBody>
-      </p:sp>
-      <p:sp>
-        <p:nvSpPr>
-          <p:cNvPr id="6" name="Rounded Rectangle 5"/>
-          <p:cNvSpPr/>
-          <p:nvPr/>
-        </p:nvSpPr>
-        <p:spPr>
-          <a:xfrm>
-            <a:off x="4389120" y="1737360"/>
-            <a:ext cx="3383280" cy="1554480"/>
-          </a:xfrm>
-          <a:prstGeom prst="roundRect">
-            <a:avLst/>
-          </a:prstGeom>
-          <a:solidFill>
-            <a:srgbClr val="1F3A5F"/>
-          </a:solidFill>
-          <a:ln>
-            <a:noFill/>
-          </a:ln>
-        </p:spPr>
-        <p:style>
-          <a:lnRef idx="1">
-            <a:schemeClr val="accent1"/>
-          </a:lnRef>
-          <a:fillRef idx="3">
-            <a:schemeClr val="accent1"/>
-          </a:fillRef>
-          <a:effectRef idx="2">
-            <a:schemeClr val="accent1"/>
-          </a:effectRef>
-          <a:fontRef idx="minor">
-            <a:schemeClr val="lt1"/>
-          </a:fontRef>
-        </p:style>
-        <p:txBody>
-          <a:bodyPr rtlCol="0" anchor="ctr" wrap="square"/>
-          <a:lstStyle/>
-          <a:p>
-            <a:pPr algn="ctr"/>
-            <a:r>
-              <a:rPr sz="1250" b="1" i="0">
-                <a:solidFill>
-                  <a:srgbClr val="FFFFFF"/>
-                </a:solidFill>
-                <a:latin typeface="Calibri"/>
-              </a:rPr>
-              <a:t>2  -  Scenario extraction
-A locked v2.2 prompt distills each document into a standardized scenario record (15 records)</a:t>
-            </a:r>
-          </a:p>
-        </p:txBody>
-      </p:sp>
-      <p:sp>
-        <p:nvSpPr>
-          <p:cNvPr id="7" name="Rounded Rectangle 6"/>
-          <p:cNvSpPr/>
-          <p:nvPr/>
-        </p:nvSpPr>
-        <p:spPr>
-          <a:xfrm>
-            <a:off x="8138160" y="1737360"/>
-            <a:ext cx="3383280" cy="1554480"/>
-          </a:xfrm>
-          <a:prstGeom prst="roundRect">
-            <a:avLst/>
-          </a:prstGeom>
-          <a:solidFill>
-            <a:srgbClr val="1F3A5F"/>
-          </a:solidFill>
-          <a:ln>
-            <a:noFill/>
-          </a:ln>
-        </p:spPr>
-        <p:style>
-          <a:lnRef idx="1">
-            <a:schemeClr val="accent1"/>
-          </a:lnRef>
-          <a:fillRef idx="3">
-            <a:schemeClr val="accent1"/>
-          </a:fillRef>
-          <a:effectRef idx="2">
-            <a:schemeClr val="accent1"/>
-          </a:effectRef>
-          <a:fontRef idx="minor">
-            <a:schemeClr val="lt1"/>
-          </a:fontRef>
-        </p:style>
-        <p:txBody>
-          <a:bodyPr rtlCol="0" anchor="ctr" wrap="square"/>
-          <a:lstStyle/>
-          <a:p>
-            <a:pPr algn="ctr"/>
-            <a:r>
-              <a:rPr sz="1250" b="1" i="0">
-                <a:solidFill>
-                  <a:srgbClr val="FFFFFF"/>
-                </a:solidFill>
-                <a:latin typeface="Calibri"/>
-              </a:rPr>
-              <a:t>3  -  Ontology application
-Walk each scenario into concrete Init / Order / Report messages using the proposed ASX elements</a:t>
-            </a:r>
-          </a:p>
-        </p:txBody>
-      </p:sp>
-      <p:cxnSp>
-        <p:nvCxnSpPr>
-          <p:cNvPr id="8" name="Connector 7"/>
-          <p:cNvCxnSpPr/>
-          <p:nvPr/>
-        </p:nvCxnSpPr>
-        <p:spPr>
-          <a:xfrm>
-            <a:off x="4023360" y="2514600"/>
-            <a:ext cx="365760" cy="0"/>
-          </a:xfrm>
-          <a:prstGeom prst="line">
-            <a:avLst/>
-          </a:prstGeom>
-          <a:ln w="19050">
-            <a:solidFill>
-              <a:srgbClr val="2E869A"/>
-            </a:solidFill>
-          </a:ln>
-        </p:spPr>
-        <p:style>
-          <a:lnRef idx="2">
-            <a:schemeClr val="accent1"/>
-          </a:lnRef>
-          <a:fillRef idx="0">
-            <a:schemeClr val="accent1"/>
-          </a:fillRef>
-          <a:effectRef idx="1">
-            <a:schemeClr val="accent1"/>
-          </a:effectRef>
-          <a:fontRef idx="minor">
-            <a:schemeClr val="tx1"/>
-          </a:fontRef>
-        </p:style>
-      </p:cxnSp>
-      <p:cxnSp>
-        <p:nvCxnSpPr>
-          <p:cNvPr id="9" name="Connector 8"/>
-          <p:cNvCxnSpPr/>
-          <p:nvPr/>
-        </p:nvCxnSpPr>
-        <p:spPr>
-          <a:xfrm>
-            <a:off x="7772400" y="2514600"/>
-            <a:ext cx="365760" cy="0"/>
-          </a:xfrm>
-          <a:prstGeom prst="line">
-            <a:avLst/>
-          </a:prstGeom>
-          <a:ln w="19050">
-            <a:solidFill>
-              <a:srgbClr val="2E869A"/>
-            </a:solidFill>
-          </a:ln>
-        </p:spPr>
-        <p:style>
-          <a:lnRef idx="2">
-            <a:schemeClr val="accent1"/>
-          </a:lnRef>
-          <a:fillRef idx="0">
-            <a:schemeClr val="accent1"/>
-          </a:fillRef>
-          <a:effectRef idx="1">
-            <a:schemeClr val="accent1"/>
-          </a:effectRef>
-          <a:fontRef idx="minor">
-            <a:schemeClr val="tx1"/>
-          </a:fontRef>
-        </p:style>
-      </p:cxnSp>
-      <p:sp>
-        <p:nvSpPr>
-          <p:cNvPr id="10" name="Rounded Rectangle 9"/>
-          <p:cNvSpPr/>
-          <p:nvPr/>
-        </p:nvSpPr>
-        <p:spPr>
-          <a:xfrm>
-            <a:off x="640080" y="3611880"/>
-            <a:ext cx="10881360" cy="960120"/>
-          </a:xfrm>
-          <a:prstGeom prst="roundRect">
-            <a:avLst/>
-          </a:prstGeom>
-          <a:solidFill>
-            <a:srgbClr val="2E7D32"/>
-          </a:solidFill>
-          <a:ln>
-            <a:noFill/>
-          </a:ln>
-        </p:spPr>
-        <p:style>
-          <a:lnRef idx="1">
-            <a:schemeClr val="accent1"/>
-          </a:lnRef>
-          <a:fillRef idx="3">
-            <a:schemeClr val="accent1"/>
-          </a:fillRef>
-          <a:effectRef idx="2">
-            <a:schemeClr val="accent1"/>
-          </a:effectRef>
-          <a:fontRef idx="minor">
-            <a:schemeClr val="lt1"/>
-          </a:fontRef>
-        </p:style>
-        <p:txBody>
-          <a:bodyPr rtlCol="0" anchor="ctr" wrap="square"/>
-          <a:lstStyle/>
-          <a:p>
-            <a:pPr algn="ctr"/>
-            <a:r>
-              <a:rPr sz="1300" b="1" i="0">
-                <a:solidFill>
-                  <a:srgbClr val="FFFFFF"/>
-                </a:solidFill>
-                <a:latin typeface="Calibri"/>
-              </a:rPr>
-              <a:t>4  -  Independent verification pass: every RDF-grounded claim re-checked against C2SIM / SMX / LOX and v0.0.3; workbooks re-compared cell-for-cell; citations traced; deck regenerated. Corrections logged (issues log, 2026-07-12).</a:t>
-            </a:r>
-          </a:p>
-        </p:txBody>
-      </p:sp>
-      <p:sp>
-        <p:nvSpPr>
-          <p:cNvPr id="11" name="TextBox 10"/>
+              <a:t>Five deliverables - all proposals, nothing applied to the OWL or the .xlsx</a:t>
+            </a:r>
+          </a:p>
+        </p:txBody>
+      </p:sp>
+      <p:sp>
+        <p:nvSpPr>
+          <p:cNvPr id="5" name="TextBox 4"/>
           <p:cNvSpPr txBox="1"/>
           <p:nvPr/>
         </p:nvSpPr>
         <p:spPr>
           <a:xfrm>
-            <a:off x="640080" y="4800600"/>
-            <a:ext cx="10972800" cy="1554480"/>
+            <a:off x="640080" y="1554480"/>
+            <a:ext cx="10972800" cy="4754880"/>
           </a:xfrm>
           <a:prstGeom prst="rect">
             <a:avLst/>
@@ -16344,17 +14135,26 @@
                 <a:spcPts val="200"/>
               </a:spcBef>
               <a:spcAft>
-                <a:spcPts val="700"/>
+                <a:spcPts val="1200"/>
               </a:spcAft>
             </a:pPr>
             <a:r>
-              <a:rPr sz="1300" b="0" i="0">
+              <a:rPr sz="1450" b="1" i="0">
+                <a:solidFill>
+                  <a:srgbClr val="1F3A5F"/>
+                </a:solidFill>
+                <a:latin typeface="Calibri"/>
+              </a:rPr>
+              <a:t>•  1  Message instantiations:  </a:t>
+            </a:r>
+            <a:r>
+              <a:rPr sz="1450" b="0" i="0">
                 <a:solidFill>
                   <a:srgbClr val="333333"/>
                 </a:solidFill>
                 <a:latin typeface="Calibri"/>
               </a:rPr>
-              <a:t>•  The loop iterates: the ontology walk (3) writes the sourcing brief (Documents-Needed), mining (1) answers it (Documents-Found), extraction (2) turns the finds into records, and the walk integrates them - until every raised gap is grounded in a real mission.</a:t>
+              <a:t>~34 new worked messages (4 -&gt; ~38; Initialization 0 -&gt; 7) in diff-able .xml workbooks - one tab per message, with open items flagged [!]/[Q] in the Notes column, keyed to log IDs.</a:t>
             </a:r>
           </a:p>
           <a:p>
@@ -16363,24 +14163,117 @@
                 <a:spcPts val="200"/>
               </a:spcBef>
               <a:spcAft>
-                <a:spcPts val="700"/>
+                <a:spcPts val="1200"/>
               </a:spcAft>
             </a:pPr>
             <a:r>
-              <a:rPr sz="1300" b="0" i="0">
-                <a:solidFill>
-                  <a:srgbClr val="666666"/>
-                </a:solidFill>
-                <a:latin typeface="Calibri"/>
-              </a:rPr>
-              <a:t>•  Artifacts per stage: References corpus + Documents-Needed/Found (1); PromptV2 + V2Extractions (2); the .xml workbooks, walk docs, and issues log (3).</a:t>
-            </a:r>
-          </a:p>
-        </p:txBody>
-      </p:sp>
-      <p:sp>
-        <p:nvSpPr>
-          <p:cNvPr id="12" name="TextBox 11"/>
+              <a:rPr sz="1450" b="1" i="0">
+                <a:solidFill>
+                  <a:srgbClr val="1F3A5F"/>
+                </a:solidFill>
+                <a:latin typeface="Calibri"/>
+              </a:rPr>
+              <a:t>•  2  Sourced scenario corpus:  </a:t>
+            </a:r>
+            <a:r>
+              <a:rPr sz="1450" b="0" i="0">
+                <a:solidFill>
+                  <a:srgbClr val="333333"/>
+                </a:solidFill>
+                <a:latin typeface="Calibri"/>
+              </a:rPr>
+              <a:t>15 standardized extraction records from real missions (subterranean, maritime MCM, sustainment, explainability, CBRN, EW, persistence, counter-UAS, MUM-T, SAR, formation, breach, + the SME drone-warfare thread: LIRC baseline / update / OPFOR targeting) + the source PDFs - every gap this review raised is grounded in a documented mission.</a:t>
+            </a:r>
+          </a:p>
+          <a:p>
+            <a:pPr>
+              <a:spcBef>
+                <a:spcPts val="200"/>
+              </a:spcBef>
+              <a:spcAft>
+                <a:spcPts val="1200"/>
+              </a:spcAft>
+            </a:pPr>
+            <a:r>
+              <a:rPr sz="1450" b="1" i="0">
+                <a:solidFill>
+                  <a:srgbClr val="1F3A5F"/>
+                </a:solidFill>
+                <a:latin typeface="Calibri"/>
+              </a:rPr>
+              <a:t>•  3  Findings -&gt; decisions:  </a:t>
+            </a:r>
+            <a:r>
+              <a:rPr sz="1450" b="0" i="0">
+                <a:solidFill>
+                  <a:srgbClr val="333333"/>
+                </a:solidFill>
+                <a:latin typeface="Calibri"/>
+              </a:rPr>
+              <a:t>a consolidated issues log (severity / status / RDF-verified evidence per finding) distilled into 24 concrete decisions for the group (Q-A..Q-X).</a:t>
+            </a:r>
+          </a:p>
+          <a:p>
+            <a:pPr>
+              <a:spcBef>
+                <a:spcPts val="200"/>
+              </a:spcBef>
+              <a:spcAft>
+                <a:spcPts val="1200"/>
+              </a:spcAft>
+            </a:pPr>
+            <a:r>
+              <a:rPr sz="1450" b="1" i="0">
+                <a:solidFill>
+                  <a:srgbClr val="1F3A5F"/>
+                </a:solidFill>
+                <a:latin typeface="Calibri"/>
+              </a:rPr>
+              <a:t>•  4  v0.0.3 reconciliation:  </a:t>
+            </a:r>
+            <a:r>
+              <a:rPr sz="1450" b="0" i="0">
+                <a:solidFill>
+                  <a:srgbClr val="333333"/>
+                </a:solidFill>
+                <a:latin typeface="Calibri"/>
+              </a:rPr>
+              <a:t>how each finding moves against Michael's update - what it adopts, what it makes concrete, what remains - plus coordination notes (two ASX files, import layering).</a:t>
+            </a:r>
+          </a:p>
+          <a:p>
+            <a:pPr>
+              <a:spcBef>
+                <a:spcPts val="200"/>
+              </a:spcBef>
+              <a:spcAft>
+                <a:spcPts val="1200"/>
+              </a:spcAft>
+            </a:pPr>
+            <a:r>
+              <a:rPr sz="1450" b="1" i="0">
+                <a:solidFill>
+                  <a:srgbClr val="1F3A5F"/>
+                </a:solidFill>
+                <a:latin typeface="Calibri"/>
+              </a:rPr>
+              <a:t>•  5  Prior art to re-adopt:  </a:t>
+            </a:r>
+            <a:r>
+              <a:rPr sz="1450" b="0" i="0">
+                <a:solidFill>
+                  <a:srgbClr val="333333"/>
+                </a:solidFill>
+                <a:latin typeface="Calibri"/>
+              </a:rPr>
+              <a:t>the measurement report exists in C2SIM's own BML lineage (WhoMeasuredType); ROE, routes, resources, membership/command, maritime vessels, and 446 task verbs already exist in the base standard - several decisions are re-adopt, not invent.</a:t>
+            </a:r>
+          </a:p>
+        </p:txBody>
+      </p:sp>
+      <p:sp>
+        <p:nvSpPr>
+          <p:cNvPr id="6" name="TextBox 5"/>
           <p:cNvSpPr txBox="1"/>
           <p:nvPr/>
         </p:nvSpPr>
@@ -16416,14 +14309,14 @@
                 </a:solidFill>
                 <a:latin typeface="Calibri"/>
               </a:rPr>
-              <a:t>Documents-Needed/Found.md (mining)  -  PromptV2.md + V2-HeadToHead.md (extraction)  -  the walk docs (application)  -  log change-log 2026-07-12 (verification)</a:t>
-            </a:r>
-          </a:p>
-        </p:txBody>
-      </p:sp>
-      <p:sp>
-        <p:nvSpPr>
-          <p:cNvPr id="13" name="TextBox 12"/>
+              <a:t>the full artifact map is on the final three slides ('How to use this material' / decoder ring / 'Where to dig deeper')</a:t>
+            </a:r>
+          </a:p>
+        </p:txBody>
+      </p:sp>
+      <p:sp>
+        <p:nvSpPr>
+          <p:cNvPr id="7" name="TextBox 6"/>
           <p:cNvSpPr txBox="1"/>
           <p:nvPr/>
         </p:nvSpPr>
@@ -16457,7 +14350,7 @@
       </p:sp>
       <p:sp>
         <p:nvSpPr>
-          <p:cNvPr id="14" name="TextBox 13"/>
+          <p:cNvPr id="8" name="TextBox 7"/>
           <p:cNvSpPr txBox="1"/>
           <p:nvPr/>
         </p:nvSpPr>
@@ -16580,7 +14473,7 @@
                 </a:solidFill>
                 <a:latin typeface="Calibri"/>
               </a:rPr>
-              <a:t>What this review contributes</a:t>
+              <a:t>Where the instantiation stands</a:t>
             </a:r>
           </a:p>
         </p:txBody>
@@ -16614,7 +14507,7 @@
                 </a:solidFill>
                 <a:latin typeface="Calibri"/>
               </a:rPr>
-              <a:t>Five deliverables - all proposals, nothing applied to the OWL or the .xlsx</a:t>
+              <a:t>From 4 worked messages to ~38 - this review is the bulk of that</a:t>
             </a:r>
           </a:p>
         </p:txBody>
@@ -16627,7 +14520,7 @@
         </p:nvSpPr>
         <p:spPr>
           <a:xfrm>
-            <a:off x="640080" y="1554480"/>
+            <a:off x="640080" y="1600200"/>
             <a:ext cx="10972800" cy="4754880"/>
           </a:xfrm>
           <a:prstGeom prst="rect">
@@ -16646,26 +14539,74 @@
                 <a:spcPts val="200"/>
               </a:spcBef>
               <a:spcAft>
-                <a:spcPts val="1200"/>
+                <a:spcPts val="900"/>
               </a:spcAft>
             </a:pPr>
             <a:r>
-              <a:rPr sz="1450" b="1" i="0">
-                <a:solidFill>
-                  <a:srgbClr val="1F3A5F"/>
-                </a:solidFill>
-                <a:latin typeface="Calibri"/>
-              </a:rPr>
-              <a:t>•  1  Message instantiations:  </a:t>
-            </a:r>
-            <a:r>
-              <a:rPr sz="1450" b="0" i="0">
+              <a:rPr sz="1500" b="1" i="0">
                 <a:solidFill>
                   <a:srgbClr val="333333"/>
                 </a:solidFill>
                 <a:latin typeface="Calibri"/>
               </a:rPr>
-              <a:t>~34 new worked messages (4 -&gt; ~38; Initialization 0 -&gt; 7) in diff-able .xml workbooks - one tab per message, with open items flagged [!]/[Q] in the Notes column, keyed to log IDs.</a:t>
+              <a:t>•  Start: 4 worked instances (2 Reports, 2 Orders, 0 Initialization) - Elizabeth's baseline. This review drafted ~34 more, to ~38 across Init / Order / Report (on the branch, pending group review).</a:t>
+            </a:r>
+          </a:p>
+          <a:p>
+            <a:pPr lvl="1">
+              <a:spcBef>
+                <a:spcPts val="200"/>
+              </a:spcBef>
+              <a:spcAft>
+                <a:spcPts val="900"/>
+              </a:spcAft>
+            </a:pPr>
+            <a:r>
+              <a:rPr sz="1500" b="0" i="0">
+                <a:solidFill>
+                  <a:srgbClr val="333333"/>
+                </a:solidFill>
+                <a:latin typeface="Calibri"/>
+              </a:rPr>
+              <a:t>–  Initialization   0 -&gt; 7   (the 3 named scenarios + CASEVAC / MCM / SubT / LIRC) - was the least-developed; now seeded.</a:t>
+            </a:r>
+          </a:p>
+          <a:p>
+            <a:pPr lvl="1">
+              <a:spcBef>
+                <a:spcPts val="200"/>
+              </a:spcBef>
+              <a:spcAft>
+                <a:spcPts val="900"/>
+              </a:spcAft>
+            </a:pPr>
+            <a:r>
+              <a:rPr sz="1500" b="0" i="0">
+                <a:solidFill>
+                  <a:srgbClr val="333333"/>
+                </a:solidFill>
+                <a:latin typeface="Calibri"/>
+              </a:rPr>
+              <a:t>–  Orders   2 -&gt; 17   (CASEVAC, swarm, fire support, logistics / engineering / rescue, route clearance, MCM, explore, resupply, MUM-T, kill-box engagement, counter-UAS, OPFOR targeting).</a:t>
+            </a:r>
+          </a:p>
+          <a:p>
+            <a:pPr lvl="1">
+              <a:spcBef>
+                <a:spcPts val="200"/>
+              </a:spcBef>
+              <a:spcAft>
+                <a:spcPts val="900"/>
+              </a:spcAft>
+            </a:pPr>
+            <a:r>
+              <a:rPr sz="1500" b="0" i="0">
+                <a:solidFill>
+                  <a:srgbClr val="333333"/>
+                </a:solidFill>
+                <a:latin typeface="Calibri"/>
+              </a:rPr>
+              <a:t>–  Reports   2 -&gt; 14   (swarm, CASEVAC status / explainable, CBRN / EW / GPR, BDA, delivery, naval mine, generic detection, hazard area, LIRC strike BDA).</a:t>
             </a:r>
           </a:p>
           <a:p>
@@ -16674,110 +14615,36 @@
                 <a:spcPts val="200"/>
               </a:spcBef>
               <a:spcAft>
-                <a:spcPts val="1200"/>
+                <a:spcPts val="900"/>
               </a:spcAft>
             </a:pPr>
             <a:r>
-              <a:rPr sz="1450" b="1" i="0">
-                <a:solidFill>
-                  <a:srgbClr val="1F3A5F"/>
-                </a:solidFill>
-                <a:latin typeface="Calibri"/>
-              </a:rPr>
-              <a:t>•  2  Sourced scenario corpus:  </a:t>
-            </a:r>
-            <a:r>
-              <a:rPr sz="1450" b="0" i="0">
+              <a:rPr sz="1500" b="1" i="0">
                 <a:solidFill>
                   <a:srgbClr val="333333"/>
                 </a:solidFill>
                 <a:latin typeface="Calibri"/>
               </a:rPr>
-              <a:t>15 standardized extraction records from real missions (subterranean, maritime MCM, sustainment, explainability, CBRN, EW, persistence, counter-UAS, MUM-T, SAR, formation, breach, + the SME drone-warfare thread: LIRC baseline / update / OPFOR targeting) + the source PDFs - every gap this review raised is grounded in a documented mission.</a:t>
-            </a:r>
-          </a:p>
-          <a:p>
-            <a:pPr>
+              <a:t>•  CASEVAC - the one contributed scenario - had no messages; now walked end-to-end (Init + Orders + Reports).</a:t>
+            </a:r>
+          </a:p>
+          <a:p>
+            <a:pPr lvl="1">
               <a:spcBef>
                 <a:spcPts val="200"/>
               </a:spcBef>
               <a:spcAft>
-                <a:spcPts val="1200"/>
+                <a:spcPts val="900"/>
               </a:spcAft>
             </a:pPr>
             <a:r>
-              <a:rPr sz="1450" b="1" i="0">
-                <a:solidFill>
-                  <a:srgbClr val="1F3A5F"/>
-                </a:solidFill>
-                <a:latin typeface="Calibri"/>
-              </a:rPr>
-              <a:t>•  3  Findings -&gt; decisions:  </a:t>
-            </a:r>
-            <a:r>
-              <a:rPr sz="1450" b="0" i="0">
+              <a:rPr sz="1500" b="0" i="0">
                 <a:solidFill>
                   <a:srgbClr val="333333"/>
                 </a:solidFill>
                 <a:latin typeface="Calibri"/>
               </a:rPr>
-              <a:t>a consolidated issues log (severity / status / RDF-verified evidence per finding) distilled into 24 concrete decisions for the group (Q-A..Q-X).</a:t>
-            </a:r>
-          </a:p>
-          <a:p>
-            <a:pPr>
-              <a:spcBef>
-                <a:spcPts val="200"/>
-              </a:spcBef>
-              <a:spcAft>
-                <a:spcPts val="1200"/>
-              </a:spcAft>
-            </a:pPr>
-            <a:r>
-              <a:rPr sz="1450" b="1" i="0">
-                <a:solidFill>
-                  <a:srgbClr val="1F3A5F"/>
-                </a:solidFill>
-                <a:latin typeface="Calibri"/>
-              </a:rPr>
-              <a:t>•  4  v0.0.3 reconciliation:  </a:t>
-            </a:r>
-            <a:r>
-              <a:rPr sz="1450" b="0" i="0">
-                <a:solidFill>
-                  <a:srgbClr val="333333"/>
-                </a:solidFill>
-                <a:latin typeface="Calibri"/>
-              </a:rPr>
-              <a:t>how each finding moves against Michael's update - what it adopts, what it makes concrete, what remains - plus coordination notes (two ASX files, import layering).</a:t>
-            </a:r>
-          </a:p>
-          <a:p>
-            <a:pPr>
-              <a:spcBef>
-                <a:spcPts val="200"/>
-              </a:spcBef>
-              <a:spcAft>
-                <a:spcPts val="1200"/>
-              </a:spcAft>
-            </a:pPr>
-            <a:r>
-              <a:rPr sz="1450" b="1" i="0">
-                <a:solidFill>
-                  <a:srgbClr val="1F3A5F"/>
-                </a:solidFill>
-                <a:latin typeface="Calibri"/>
-              </a:rPr>
-              <a:t>•  5  Prior art to re-adopt:  </a:t>
-            </a:r>
-            <a:r>
-              <a:rPr sz="1450" b="0" i="0">
-                <a:solidFill>
-                  <a:srgbClr val="333333"/>
-                </a:solidFill>
-                <a:latin typeface="Calibri"/>
-              </a:rPr>
-              <a:t>the measurement report exists in C2SIM's own BML lineage (WhoMeasuredType); ROE, routes, resources, membership/command, maritime vessels, and 446 task verbs already exist in the base standard - several decisions are re-adopt, not invent.</a:t>
+              <a:t>–  The breadth is the point: each new instance exercises a proposed element and surfaces what is still to define.</a:t>
             </a:r>
           </a:p>
         </p:txBody>
@@ -16820,7 +14687,7 @@
                 </a:solidFill>
                 <a:latin typeface="Calibri"/>
               </a:rPr>
-              <a:t>the full artifact map is on the final three slides ('How to use this material' / decoder ring / 'Where to dig deeper')</a:t>
+              <a:t>Message-Instantiation-Coverage.md (the pre-walk baseline)  -  log sec 6 rows C1-C9 (current state)  -  the three ASX Sample *.xml workbooks (the messages themselves)</a:t>
             </a:r>
           </a:p>
         </p:txBody>
@@ -16984,7 +14851,7 @@
                 </a:solidFill>
                 <a:latin typeface="Calibri"/>
               </a:rPr>
-              <a:t>Where the instantiation stands</a:t>
+              <a:t>Scenarios analyzed</a:t>
             </a:r>
           </a:p>
         </p:txBody>
@@ -17018,7 +14885,7 @@
                 </a:solidFill>
                 <a:latin typeface="Calibri"/>
               </a:rPr>
-              <a:t>From 4 worked messages to ~38 - this review is the bulk of that</a:t>
+              <a:t>20+ scenarios walked into ~38 message instances - Init / Order / Report</a:t>
             </a:r>
           </a:p>
         </p:txBody>
@@ -17031,7 +14898,7 @@
         </p:nvSpPr>
         <p:spPr>
           <a:xfrm>
-            <a:off x="640080" y="1600200"/>
+            <a:off x="640080" y="1554480"/>
             <a:ext cx="10972800" cy="4754880"/>
           </a:xfrm>
           <a:prstGeom prst="rect">
@@ -17050,17 +14917,17 @@
                 <a:spcPts val="200"/>
               </a:spcBef>
               <a:spcAft>
-                <a:spcPts val="900"/>
+                <a:spcPts val="700"/>
               </a:spcAft>
             </a:pPr>
             <a:r>
-              <a:rPr sz="1500" b="1" i="0">
+              <a:rPr sz="1300" b="1" i="0">
                 <a:solidFill>
                   <a:srgbClr val="333333"/>
                 </a:solidFill>
                 <a:latin typeface="Calibri"/>
               </a:rPr>
-              <a:t>•  Start: 4 worked instances (2 Reports, 2 Orders, 0 Initialization) - Elizabeth's baseline. This review drafted ~34 more, to ~38 across Init / Order / Report (on the branch, pending group review).</a:t>
+              <a:t>•  Named + contributed - instantiated end-to-end:</a:t>
             </a:r>
           </a:p>
           <a:p>
@@ -17069,17 +14936,36 @@
                 <a:spcPts val="200"/>
               </a:spcBef>
               <a:spcAft>
-                <a:spcPts val="900"/>
+                <a:spcPts val="700"/>
               </a:spcAft>
             </a:pPr>
             <a:r>
-              <a:rPr sz="1500" b="0" i="0">
+              <a:rPr sz="1300" b="0" i="0">
                 <a:solidFill>
                   <a:srgbClr val="333333"/>
                 </a:solidFill>
                 <a:latin typeface="Calibri"/>
               </a:rPr>
-              <a:t>–  Initialization   0 -&gt; 7   (the 3 named scenarios + CASEVAC / MCM / SubT / LIRC) - was the least-developed; now seeded.</a:t>
+              <a:t>–  the 3 named Init scenarios (UAV video, UAV patrol, swarm) + CASEVAC, the one human-authored contributed scenario - walked Init -&gt; tasking Order -&gt; robot-to-robot hand-off -&gt; status/threat + explainable Reports.</a:t>
+            </a:r>
+          </a:p>
+          <a:p>
+            <a:pPr>
+              <a:spcBef>
+                <a:spcPts val="200"/>
+              </a:spcBef>
+              <a:spcAft>
+                <a:spcPts val="700"/>
+              </a:spcAft>
+            </a:pPr>
+            <a:r>
+              <a:rPr sz="1300" b="1" i="0">
+                <a:solidFill>
+                  <a:srgbClr val="333333"/>
+                </a:solidFill>
+                <a:latin typeface="Calibri"/>
+              </a:rPr>
+              <a:t>•  Capability stress-tests - instantiated:</a:t>
             </a:r>
           </a:p>
           <a:p>
@@ -17088,17 +14974,36 @@
                 <a:spcPts val="200"/>
               </a:spcBef>
               <a:spcAft>
-                <a:spcPts val="900"/>
+                <a:spcPts val="700"/>
               </a:spcAft>
             </a:pPr>
             <a:r>
-              <a:rPr sz="1500" b="0" i="0">
+              <a:rPr sz="1300" b="0" i="0">
                 <a:solidFill>
                   <a:srgbClr val="333333"/>
                 </a:solidFill>
                 <a:latin typeface="Calibri"/>
               </a:rPr>
-              <a:t>–  Orders   2 -&gt; 17   (CASEVAC, swarm, fire support, logistics / engineering / rescue, route clearance, MCM, explore, resupply, MUM-T, kill-box engagement, counter-UAS, OPFOR targeting).</a:t>
+              <a:t>–  non-video sensing (CBRN, EW emitter, GPR mine); swarm detect + coordinate; the task/effect axis (fire support + BDA, logistics delivery, engineering, USV rescue, route clearance).</a:t>
+            </a:r>
+          </a:p>
+          <a:p>
+            <a:pPr>
+              <a:spcBef>
+                <a:spcPts val="200"/>
+              </a:spcBef>
+              <a:spcAft>
+                <a:spcPts val="700"/>
+              </a:spcAft>
+            </a:pPr>
+            <a:r>
+              <a:rPr sz="1300" b="1" i="0">
+                <a:solidFill>
+                  <a:srgbClr val="333333"/>
+                </a:solidFill>
+                <a:latin typeface="Calibri"/>
+              </a:rPr>
+              <a:t>•  Newly sourced from real missions, then analyzed:</a:t>
             </a:r>
           </a:p>
           <a:p>
@@ -17107,17 +15012,17 @@
                 <a:spcPts val="200"/>
               </a:spcBef>
               <a:spcAft>
-                <a:spcPts val="900"/>
+                <a:spcPts val="700"/>
               </a:spcAft>
             </a:pPr>
             <a:r>
-              <a:rPr sz="1500" b="0" i="0">
+              <a:rPr sz="1300" b="0" i="0">
                 <a:solidFill>
                   <a:srgbClr val="333333"/>
                 </a:solidFill>
                 <a:latin typeface="Calibri"/>
               </a:rPr>
-              <a:t>–  Reports   2 -&gt; 14   (swarm, CASEVAC status / explainable, CBRN / EW / GPR, BDA, delivery, naval mine, generic detection, hazard area, LIRC strike BDA).</a:t>
+              <a:t>–  Cooperative MCM (maritime), Subterranean SubT, contested sustainment - plus nine documented missions that grounded the validation holes: explainability (DroneResponse), CBRN (UGV), EW geolocation, persistence (MDARS), counter-UAS, human-machine teaming (MUM-T), SAR, formation, robotic breach.</a:t>
             </a:r>
           </a:p>
           <a:p>
@@ -17126,17 +15031,17 @@
                 <a:spcPts val="200"/>
               </a:spcBef>
               <a:spcAft>
-                <a:spcPts val="900"/>
+                <a:spcPts val="700"/>
               </a:spcAft>
             </a:pPr>
             <a:r>
-              <a:rPr sz="1500" b="1" i="0">
+              <a:rPr sz="1300" b="1" i="0">
                 <a:solidFill>
                   <a:srgbClr val="333333"/>
                 </a:solidFill>
                 <a:latin typeface="Calibri"/>
               </a:rPr>
-              <a:t>•  CASEVAC - the one contributed scenario - had no messages; now walked end-to-end (Init + Orders + Reports).</a:t>
+              <a:t>•  Screened for redundancy:</a:t>
             </a:r>
           </a:p>
           <a:p>
@@ -17145,17 +15050,45 @@
                 <a:spcPts val="200"/>
               </a:spcBef>
               <a:spcAft>
-                <a:spcPts val="900"/>
+                <a:spcPts val="700"/>
               </a:spcAft>
             </a:pPr>
             <a:r>
-              <a:rPr sz="1500" b="0" i="0">
+              <a:rPr sz="1300" b="0" i="0">
                 <a:solidFill>
                   <a:srgbClr val="333333"/>
                 </a:solidFill>
                 <a:latin typeface="Calibri"/>
               </a:rPr>
-              <a:t>–  The breadth is the point: each new instance exercises a proposed element and surfaces what is still to define.</a:t>
+              <a:t>–  route-clearance / companion / urban - confirmed ~80% redundant, but still yielded N1 (an area as the subject of a task/report).</a:t>
+            </a:r>
+          </a:p>
+          <a:p>
+            <a:pPr>
+              <a:spcBef>
+                <a:spcPts val="200"/>
+              </a:spcBef>
+              <a:spcAft>
+                <a:spcPts val="700"/>
+              </a:spcAft>
+            </a:pPr>
+            <a:r>
+              <a:rPr sz="1300" b="1" i="0">
+                <a:solidFill>
+                  <a:srgbClr val="2E7D32"/>
+                </a:solidFill>
+                <a:latin typeface="Calibri"/>
+              </a:rPr>
+              <a:t>•  Evidence pedigree:  </a:t>
+            </a:r>
+            <a:r>
+              <a:rPr sz="1300" b="0" i="0">
+                <a:solidFill>
+                  <a:srgbClr val="333333"/>
+                </a:solidFill>
+                <a:latin typeface="Calibri"/>
+              </a:rPr>
+              <a:t>every gap raised is grounded in a documented real mission - 15 sourced extraction records; the validation pass closed the asserted-but-untested holes (explainability, CBRN, EW, persistence).</a:t>
             </a:r>
           </a:p>
         </p:txBody>
@@ -17198,7 +15131,7 @@
                 </a:solidFill>
                 <a:latin typeface="Calibri"/>
               </a:rPr>
-              <a:t>Message-Instantiation-Coverage.md (the pre-walk baseline)  -  log sec 6 rows C1-C9 (current state)  -  the three ASX Sample *.xml workbooks (the messages themselves)</a:t>
+              <a:t>one walk doc per scenario family (see final slide)  -  the 15 sourced records: LLMExperiments/PaperSummaries/V2Extractions/  -  ValidationEvidence-Walk.md</a:t>
             </a:r>
           </a:p>
         </p:txBody>
@@ -17362,7 +15295,7 @@
                 </a:solidFill>
                 <a:latin typeface="Calibri"/>
               </a:rPr>
-              <a:t>Scenarios analyzed</a:t>
+              <a:t>Where the model stands</a:t>
             </a:r>
           </a:p>
         </p:txBody>
@@ -17396,21 +15329,253 @@
                 </a:solidFill>
                 <a:latin typeface="Calibri"/>
               </a:rPr>
-              <a:t>20+ scenarios walked into ~38 message instances - Init / Order / Report</a:t>
-            </a:r>
-          </a:p>
-        </p:txBody>
-      </p:sp>
-      <p:sp>
-        <p:nvSpPr>
-          <p:cNvPr id="5" name="TextBox 4"/>
+              <a:t>Two tracks, one early model - moving, with a known catch-up list</a:t>
+            </a:r>
+          </a:p>
+        </p:txBody>
+      </p:sp>
+      <p:sp>
+        <p:nvSpPr>
+          <p:cNvPr id="5" name="Rounded Rectangle 4"/>
+          <p:cNvSpPr/>
+          <p:nvPr/>
+        </p:nvSpPr>
+        <p:spPr>
+          <a:xfrm>
+            <a:off x="640080" y="1600200"/>
+            <a:ext cx="3383280" cy="1234440"/>
+          </a:xfrm>
+          <a:prstGeom prst="roundRect">
+            <a:avLst/>
+          </a:prstGeom>
+          <a:solidFill>
+            <a:srgbClr val="1F3A5F"/>
+          </a:solidFill>
+          <a:ln>
+            <a:noFill/>
+          </a:ln>
+        </p:spPr>
+        <p:style>
+          <a:lnRef idx="1">
+            <a:schemeClr val="accent1"/>
+          </a:lnRef>
+          <a:fillRef idx="3">
+            <a:schemeClr val="accent1"/>
+          </a:fillRef>
+          <a:effectRef idx="2">
+            <a:schemeClr val="accent1"/>
+          </a:effectRef>
+          <a:fontRef idx="minor">
+            <a:schemeClr val="lt1"/>
+          </a:fontRef>
+        </p:style>
+        <p:txBody>
+          <a:bodyPr rtlCol="0" anchor="ctr" wrap="square"/>
+          <a:lstStyle/>
+          <a:p>
+            <a:pPr algn="ctr"/>
+            <a:r>
+              <a:rPr sz="1200" b="1" i="0">
+                <a:solidFill>
+                  <a:srgbClr val="FFFFFF"/>
+                </a:solidFill>
+                <a:latin typeface="Calibri"/>
+              </a:rPr>
+              <a:t>OWL v0.0.1  (Jan 2026)
+15 classes, 1 object property,
+0 datatype properties</a:t>
+            </a:r>
+          </a:p>
+        </p:txBody>
+      </p:sp>
+      <p:sp>
+        <p:nvSpPr>
+          <p:cNvPr id="6" name="Rounded Rectangle 5"/>
+          <p:cNvSpPr/>
+          <p:nvPr/>
+        </p:nvSpPr>
+        <p:spPr>
+          <a:xfrm>
+            <a:off x="4389120" y="1600200"/>
+            <a:ext cx="3383280" cy="1234440"/>
+          </a:xfrm>
+          <a:prstGeom prst="roundRect">
+            <a:avLst/>
+          </a:prstGeom>
+          <a:solidFill>
+            <a:srgbClr val="2E869A"/>
+          </a:solidFill>
+          <a:ln>
+            <a:noFill/>
+          </a:ln>
+        </p:spPr>
+        <p:style>
+          <a:lnRef idx="1">
+            <a:schemeClr val="accent1"/>
+          </a:lnRef>
+          <a:fillRef idx="3">
+            <a:schemeClr val="accent1"/>
+          </a:fillRef>
+          <a:effectRef idx="2">
+            <a:schemeClr val="accent1"/>
+          </a:effectRef>
+          <a:fontRef idx="minor">
+            <a:schemeClr val="lt1"/>
+          </a:fontRef>
+        </p:style>
+        <p:txBody>
+          <a:bodyPr rtlCol="0" anchor="ctr" wrap="square"/>
+          <a:lstStyle/>
+          <a:p>
+            <a:pPr algn="ctr"/>
+            <a:r>
+              <a:rPr sz="1200" b="1" i="0">
+                <a:solidFill>
+                  <a:srgbClr val="FFFFFF"/>
+                </a:solidFill>
+                <a:latin typeface="Calibri"/>
+              </a:rPr>
+              <a:t>Spreadsheets  (Feb-Jun 2026)
+the attribute layer: Payload,
+Mobility, VehicleType, ...</a:t>
+            </a:r>
+          </a:p>
+        </p:txBody>
+      </p:sp>
+      <p:sp>
+        <p:nvSpPr>
+          <p:cNvPr id="7" name="Rounded Rectangle 6"/>
+          <p:cNvSpPr/>
+          <p:nvPr/>
+        </p:nvSpPr>
+        <p:spPr>
+          <a:xfrm>
+            <a:off x="8138160" y="1600200"/>
+            <a:ext cx="3383280" cy="1234440"/>
+          </a:xfrm>
+          <a:prstGeom prst="roundRect">
+            <a:avLst/>
+          </a:prstGeom>
+          <a:solidFill>
+            <a:srgbClr val="2E7D32"/>
+          </a:solidFill>
+          <a:ln>
+            <a:noFill/>
+          </a:ln>
+        </p:spPr>
+        <p:style>
+          <a:lnRef idx="1">
+            <a:schemeClr val="accent1"/>
+          </a:lnRef>
+          <a:fillRef idx="3">
+            <a:schemeClr val="accent1"/>
+          </a:fillRef>
+          <a:effectRef idx="2">
+            <a:schemeClr val="accent1"/>
+          </a:effectRef>
+          <a:fontRef idx="minor">
+            <a:schemeClr val="lt1"/>
+          </a:fontRef>
+        </p:style>
+        <p:txBody>
+          <a:bodyPr rtlCol="0" anchor="ctr" wrap="square"/>
+          <a:lstStyle/>
+          <a:p>
+            <a:pPr algn="ctr"/>
+            <a:r>
+              <a:rPr sz="1200" b="1" i="0">
+                <a:solidFill>
+                  <a:srgbClr val="FFFFFF"/>
+                </a:solidFill>
+                <a:latin typeface="Calibri"/>
+              </a:rPr>
+              <a:t>OWL v0.0.3  (Jul 2026, Michael)
+first datatype properties, Video
+Detection Report, AutonomyLevelCode</a:t>
+            </a:r>
+          </a:p>
+        </p:txBody>
+      </p:sp>
+      <p:cxnSp>
+        <p:nvCxnSpPr>
+          <p:cNvPr id="8" name="Connector 7"/>
+          <p:cNvCxnSpPr/>
+          <p:nvPr/>
+        </p:nvCxnSpPr>
+        <p:spPr>
+          <a:xfrm>
+            <a:off x="4023360" y="2194560"/>
+            <a:ext cx="365760" cy="0"/>
+          </a:xfrm>
+          <a:prstGeom prst="line">
+            <a:avLst/>
+          </a:prstGeom>
+          <a:ln w="19050">
+            <a:solidFill>
+              <a:srgbClr val="C87F0A"/>
+            </a:solidFill>
+          </a:ln>
+        </p:spPr>
+        <p:style>
+          <a:lnRef idx="2">
+            <a:schemeClr val="accent1"/>
+          </a:lnRef>
+          <a:fillRef idx="0">
+            <a:schemeClr val="accent1"/>
+          </a:fillRef>
+          <a:effectRef idx="1">
+            <a:schemeClr val="accent1"/>
+          </a:effectRef>
+          <a:fontRef idx="minor">
+            <a:schemeClr val="tx1"/>
+          </a:fontRef>
+        </p:style>
+      </p:cxnSp>
+      <p:cxnSp>
+        <p:nvCxnSpPr>
+          <p:cNvPr id="9" name="Connector 8"/>
+          <p:cNvCxnSpPr/>
+          <p:nvPr/>
+        </p:nvCxnSpPr>
+        <p:spPr>
+          <a:xfrm>
+            <a:off x="7772400" y="2194560"/>
+            <a:ext cx="365760" cy="0"/>
+          </a:xfrm>
+          <a:prstGeom prst="line">
+            <a:avLst/>
+          </a:prstGeom>
+          <a:ln w="19050">
+            <a:solidFill>
+              <a:srgbClr val="2E7D32"/>
+            </a:solidFill>
+          </a:ln>
+        </p:spPr>
+        <p:style>
+          <a:lnRef idx="2">
+            <a:schemeClr val="accent1"/>
+          </a:lnRef>
+          <a:fillRef idx="0">
+            <a:schemeClr val="accent1"/>
+          </a:fillRef>
+          <a:effectRef idx="1">
+            <a:schemeClr val="accent1"/>
+          </a:effectRef>
+          <a:fontRef idx="minor">
+            <a:schemeClr val="tx1"/>
+          </a:fontRef>
+        </p:style>
+      </p:cxnSp>
+      <p:sp>
+        <p:nvSpPr>
+          <p:cNvPr id="10" name="TextBox 9"/>
           <p:cNvSpPr txBox="1"/>
           <p:nvPr/>
         </p:nvSpPr>
         <p:spPr>
           <a:xfrm>
-            <a:off x="640080" y="1554480"/>
-            <a:ext cx="10972800" cy="4754880"/>
+            <a:off x="640080" y="3063240"/>
+            <a:ext cx="10972800" cy="3291840"/>
           </a:xfrm>
           <a:prstGeom prst="rect">
             <a:avLst/>
@@ -17428,36 +15593,26 @@
                 <a:spcPts val="200"/>
               </a:spcBef>
               <a:spcAft>
-                <a:spcPts val="700"/>
+                <a:spcPts val="800"/>
               </a:spcAft>
             </a:pPr>
             <a:r>
               <a:rPr sz="1300" b="1" i="0">
                 <a:solidFill>
+                  <a:srgbClr val="2E7D32"/>
+                </a:solidFill>
+                <a:latin typeface="Calibri"/>
+              </a:rPr>
+              <a:t>•  Outlook:  </a:t>
+            </a:r>
+            <a:r>
+              <a:rPr sz="1300" b="0" i="0">
+                <a:solidFill>
                   <a:srgbClr val="333333"/>
                 </a:solidFill>
                 <a:latin typeface="Calibri"/>
               </a:rPr>
-              <a:t>•  Named + contributed - instantiated end-to-end:</a:t>
-            </a:r>
-          </a:p>
-          <a:p>
-            <a:pPr lvl="1">
-              <a:spcBef>
-                <a:spcPts val="200"/>
-              </a:spcBef>
-              <a:spcAft>
-                <a:spcPts val="700"/>
-              </a:spcAft>
-            </a:pPr>
-            <a:r>
-              <a:rPr sz="1300" b="0" i="0">
-                <a:solidFill>
-                  <a:srgbClr val="333333"/>
-                </a:solidFill>
-                <a:latin typeface="Calibri"/>
-              </a:rPr>
-              <a:t>–  the 3 named Init scenarios (UAV video, UAV patrol, swarm) + CASEVAC, the one human-authored contributed scenario - walked Init -&gt; tasking Order -&gt; robot-to-robot hand-off -&gt; status/threat + explainable Reports.</a:t>
+              <a:t>an early (v0.0.x) model whose two tracks evolved separately for ~5 months - expected at this stage. v0.0.3 shows the OWL moving, and puts the key typing choice (P1) concretely in the model to settle.</a:t>
             </a:r>
           </a:p>
           <a:p>
@@ -17466,36 +15621,26 @@
                 <a:spcPts val="200"/>
               </a:spcBef>
               <a:spcAft>
-                <a:spcPts val="700"/>
+                <a:spcPts val="800"/>
               </a:spcAft>
             </a:pPr>
             <a:r>
               <a:rPr sz="1300" b="1" i="0">
                 <a:solidFill>
+                  <a:srgbClr val="C87F0A"/>
+                </a:solidFill>
+                <a:latin typeface="Calibri"/>
+              </a:rPr>
+              <a:t>•  Catching up - attribute layer:  </a:t>
+            </a:r>
+            <a:r>
+              <a:rPr sz="1300" b="0" i="0">
+                <a:solidFill>
                   <a:srgbClr val="333333"/>
                 </a:solidFill>
                 <a:latin typeface="Calibri"/>
               </a:rPr>
-              <a:t>•  Capability stress-tests - instantiated:</a:t>
-            </a:r>
-          </a:p>
-          <a:p>
-            <a:pPr lvl="1">
-              <a:spcBef>
-                <a:spcPts val="200"/>
-              </a:spcBef>
-              <a:spcAft>
-                <a:spcPts val="700"/>
-              </a:spcAft>
-            </a:pPr>
-            <a:r>
-              <a:rPr sz="1300" b="0" i="0">
-                <a:solidFill>
-                  <a:srgbClr val="333333"/>
-                </a:solidFill>
-                <a:latin typeface="Calibri"/>
-              </a:rPr>
-              <a:t>–  non-video sensing (CBRN, EW emitter, GPR mine); swarm detect + coordinate; the task/effect axis (fire support + BDA, logistics delivery, engineering, USV rescue, route clearance).</a:t>
+              <a:t>Payload, PayloadCapability, Mobility/Propulsion, VehicleType, PassengerCapability, mission/swarm parameters are in the spreadsheets, not yet in the OWL (D3); v0.0.3 begins the layer, for the Video Detection Report only.</a:t>
             </a:r>
           </a:p>
           <a:p>
@@ -17504,36 +15649,26 @@
                 <a:spcPts val="200"/>
               </a:spcBef>
               <a:spcAft>
-                <a:spcPts val="700"/>
+                <a:spcPts val="800"/>
               </a:spcAft>
             </a:pPr>
             <a:r>
               <a:rPr sz="1300" b="1" i="0">
                 <a:solidFill>
+                  <a:srgbClr val="C87F0A"/>
+                </a:solidFill>
+                <a:latin typeface="Calibri"/>
+              </a:rPr>
+              <a:t>•  Catching up - one autonomy vocabulary:  </a:t>
+            </a:r>
+            <a:r>
+              <a:rPr sz="1300" b="0" i="0">
+                <a:solidFill>
                   <a:srgbClr val="333333"/>
                 </a:solidFill>
                 <a:latin typeface="Calibri"/>
               </a:rPr>
-              <a:t>•  Newly sourced from real missions, then analyzed:</a:t>
-            </a:r>
-          </a:p>
-          <a:p>
-            <a:pPr lvl="1">
-              <a:spcBef>
-                <a:spcPts val="200"/>
-              </a:spcBef>
-              <a:spcAft>
-                <a:spcPts val="700"/>
-              </a:spcAft>
-            </a:pPr>
-            <a:r>
-              <a:rPr sz="1300" b="0" i="0">
-                <a:solidFill>
-                  <a:srgbClr val="333333"/>
-                </a:solidFill>
-                <a:latin typeface="Calibri"/>
-              </a:rPr>
-              <a:t>–  Cooperative MCM (maritime), Subterranean SubT, contested sustainment - plus nine documented missions that grounded the validation holes: explainability (DroneResponse), CBRN (UGV), EW geolocation, persistence (MDARS), counter-UAS, human-machine teaming (MUM-T), SAR, formation, robotic breach.</a:t>
+              <a:t>three today - OWL {Automated, FullAuto, ReCont, Teleop} vs ControlMode {Piloted, Unpiloted-Autonomous, Swarm} vs NavigationAutonomy {FPV, Autonomous, RemoteControl} (D1 -&gt; Q-D).</a:t>
             </a:r>
           </a:p>
           <a:p>
@@ -17542,43 +15677,61 @@
                 <a:spcPts val="200"/>
               </a:spcBef>
               <a:spcAft>
-                <a:spcPts val="700"/>
+                <a:spcPts val="800"/>
               </a:spcAft>
             </a:pPr>
             <a:r>
               <a:rPr sz="1300" b="1" i="0">
                 <a:solidFill>
+                  <a:srgbClr val="C87F0A"/>
+                </a:solidFill>
+                <a:latin typeface="Calibri"/>
+              </a:rPr>
+              <a:t>•  Catching up - one sensor model:  </a:t>
+            </a:r>
+            <a:r>
+              <a:rPr sz="1300" b="0" i="0">
+                <a:solidFill>
                   <a:srgbClr val="333333"/>
                 </a:solidFill>
                 <a:latin typeface="Calibri"/>
               </a:rPr>
-              <a:t>•  Screened for redundancy:</a:t>
-            </a:r>
-          </a:p>
-          <a:p>
-            <a:pPr lvl="1">
+              <a:t>three today - Sensor class vs SensorType enum vs SensorCapability equipment (D2 -&gt; Q-C); this is structural decision P2, next section.</a:t>
+            </a:r>
+          </a:p>
+          <a:p>
+            <a:pPr>
               <a:spcBef>
                 <a:spcPts val="200"/>
               </a:spcBef>
               <a:spcAft>
-                <a:spcPts val="700"/>
+                <a:spcPts val="800"/>
               </a:spcAft>
             </a:pPr>
             <a:r>
+              <a:rPr sz="1300" b="1" i="0">
+                <a:solidFill>
+                  <a:srgbClr val="666666"/>
+                </a:solidFill>
+                <a:latin typeface="Calibri"/>
+              </a:rPr>
+              <a:t>•  Wiring to settle deliberately:  </a:t>
+            </a:r>
+            <a:r>
               <a:rPr sz="1300" b="0" i="0">
                 <a:solidFill>
                   <a:srgbClr val="333333"/>
                 </a:solidFill>
                 <a:latin typeface="Calibri"/>
               </a:rPr>
-              <a:t>–  route-clearance / companion / urban - confirmed ~80% redundant, but still yielded N1 (an area as the subject of a task/report).</a:t>
-            </a:r>
-          </a:p>
-        </p:txBody>
-      </p:sp>
-      <p:sp>
-        <p:nvSpPr>
-          <p:cNvPr id="6" name="TextBox 5"/>
+              <a:t>AutonomyLevelCode is not yet the range of hasAutonomousRoleCode (still generic Code); the v0.0.3 branch adds owl:imports smx/lox to base C2SIM.rdf - a circular import (C2SIM &lt;-&gt; smx).</a:t>
+            </a:r>
+          </a:p>
+        </p:txBody>
+      </p:sp>
+      <p:sp>
+        <p:nvSpPr>
+          <p:cNvPr id="11" name="TextBox 10"/>
           <p:cNvSpPr txBox="1"/>
           <p:nvPr/>
         </p:nvSpPr>
@@ -17614,14 +15767,14 @@
                 </a:solidFill>
                 <a:latin typeface="Calibri"/>
               </a:rPr>
-              <a:t>one walk doc per scenario family (see final slide)  -  the 15 sourced records: LLMExperiments/PaperSummaries/V2Extractions/</a:t>
-            </a:r>
-          </a:p>
-        </p:txBody>
-      </p:sp>
-      <p:sp>
-        <p:nvSpPr>
-          <p:cNvPr id="7" name="TextBox 6"/>
+              <a:t>log secs 1-2 (S2, D1-D5)  -  sec 9 (v0.0.3 reconciliation, finding by finding)  -  Ontology/C2SIM_ASX-v003.rdf on branch michael_d</a:t>
+            </a:r>
+          </a:p>
+        </p:txBody>
+      </p:sp>
+      <p:sp>
+        <p:nvSpPr>
+          <p:cNvPr id="12" name="TextBox 11"/>
           <p:cNvSpPr txBox="1"/>
           <p:nvPr/>
         </p:nvSpPr>
@@ -17655,7 +15808,7 @@
       </p:sp>
       <p:sp>
         <p:nvSpPr>
-          <p:cNvPr id="8" name="TextBox 7"/>
+          <p:cNvPr id="13" name="TextBox 12"/>
           <p:cNvSpPr txBox="1"/>
           <p:nvPr/>
         </p:nvSpPr>
@@ -17778,7 +15931,7 @@
                 </a:solidFill>
                 <a:latin typeface="Calibri"/>
               </a:rPr>
-              <a:t>The OWL and the spreadsheets are at different stages</a:t>
+              <a:t>First to settle: three structural typing decisions</a:t>
             </a:r>
           </a:p>
         </p:txBody>
@@ -17791,14 +15944,14 @@
         </p:nvSpPr>
         <p:spPr>
           <a:xfrm>
-            <a:off x="731520" y="1737360"/>
-            <a:ext cx="5029200" cy="1371600"/>
+            <a:off x="731520" y="1828800"/>
+            <a:ext cx="3474720" cy="2011680"/>
           </a:xfrm>
           <a:prstGeom prst="roundRect">
             <a:avLst/>
           </a:prstGeom>
           <a:solidFill>
-            <a:srgbClr val="1F3A5F"/>
+            <a:srgbClr val="C87F0A"/>
           </a:solidFill>
           <a:ln>
             <a:noFill/>
@@ -17824,14 +15977,15 @@
           <a:p>
             <a:pPr algn="ctr"/>
             <a:r>
-              <a:rPr sz="1500" b="1" i="0">
+              <a:rPr sz="1600" b="1" i="0">
                 <a:solidFill>
                   <a:srgbClr val="FFFFFF"/>
                 </a:solidFill>
                 <a:latin typeface="Calibri"/>
               </a:rPr>
-              <a:t>OWL model  (CSIM_ASX.rdf)
-last updated  Jan 2026</a:t>
+              <a:t>P1
+UAV typing: Robot
+tree vs SMX Platform</a:t>
             </a:r>
           </a:p>
         </p:txBody>
@@ -17844,14 +15998,14 @@
         </p:nvSpPr>
         <p:spPr>
           <a:xfrm>
-            <a:off x="6400800" y="1737360"/>
-            <a:ext cx="5029200" cy="1371600"/>
+            <a:off x="4434840" y="1828800"/>
+            <a:ext cx="3474720" cy="2011680"/>
           </a:xfrm>
           <a:prstGeom prst="roundRect">
             <a:avLst/>
           </a:prstGeom>
           <a:solidFill>
-            <a:srgbClr val="2E869A"/>
+            <a:srgbClr val="C87F0A"/>
           </a:solidFill>
           <a:ln>
             <a:noFill/>
@@ -17877,53 +16031,73 @@
           <a:p>
             <a:pPr algn="ctr"/>
             <a:r>
-              <a:rPr sz="1500" b="1" i="0">
+              <a:rPr sz="1600" b="1" i="0">
                 <a:solidFill>
                   <a:srgbClr val="FFFFFF"/>
                 </a:solidFill>
                 <a:latin typeface="Calibri"/>
               </a:rPr>
-              <a:t>Spreadsheets  (Concept Mapping,
-sample messages)  updated  Jun 2026</a:t>
-            </a:r>
-          </a:p>
-        </p:txBody>
-      </p:sp>
-      <p:cxnSp>
-        <p:nvCxnSpPr>
-          <p:cNvPr id="6" name="Connector 5"/>
-          <p:cNvCxnSpPr/>
-          <p:nvPr/>
-        </p:nvCxnSpPr>
-        <p:spPr>
-          <a:xfrm>
-            <a:off x="5760720" y="2423160"/>
-            <a:ext cx="640080" cy="0"/>
-          </a:xfrm>
-          <a:prstGeom prst="line">
-            <a:avLst/>
-          </a:prstGeom>
-          <a:ln w="19050">
-            <a:solidFill>
-              <a:srgbClr val="C87F0A"/>
-            </a:solidFill>
+              <a:t>P2
+Sensor: one
+representation to pick</a:t>
+            </a:r>
+          </a:p>
+        </p:txBody>
+      </p:sp>
+      <p:sp>
+        <p:nvSpPr>
+          <p:cNvPr id="6" name="Rounded Rectangle 5"/>
+          <p:cNvSpPr/>
+          <p:nvPr/>
+        </p:nvSpPr>
+        <p:spPr>
+          <a:xfrm>
+            <a:off x="8138160" y="1828800"/>
+            <a:ext cx="3337560" cy="2011680"/>
+          </a:xfrm>
+          <a:prstGeom prst="roundRect">
+            <a:avLst/>
+          </a:prstGeom>
+          <a:solidFill>
+            <a:srgbClr val="C87F0A"/>
+          </a:solidFill>
+          <a:ln>
+            <a:noFill/>
           </a:ln>
         </p:spPr>
         <p:style>
-          <a:lnRef idx="2">
+          <a:lnRef idx="1">
             <a:schemeClr val="accent1"/>
           </a:lnRef>
-          <a:fillRef idx="0">
+          <a:fillRef idx="3">
             <a:schemeClr val="accent1"/>
           </a:fillRef>
-          <a:effectRef idx="1">
+          <a:effectRef idx="2">
             <a:schemeClr val="accent1"/>
           </a:effectRef>
           <a:fontRef idx="minor">
-            <a:schemeClr val="tx1"/>
+            <a:schemeClr val="lt1"/>
           </a:fontRef>
         </p:style>
-      </p:cxnSp>
+        <p:txBody>
+          <a:bodyPr rtlCol="0" anchor="ctr" wrap="square"/>
+          <a:lstStyle/>
+          <a:p>
+            <a:pPr algn="ctr"/>
+            <a:r>
+              <a:rPr sz="1600" b="1" i="0">
+                <a:solidFill>
+                  <a:srgbClr val="FFFFFF"/>
+                </a:solidFill>
+                <a:latin typeface="Calibri"/>
+              </a:rPr>
+              <a:t>P7
+Swarm: make it
+taskable (ActorEntity)</a:t>
+            </a:r>
+          </a:p>
+        </p:txBody>
+      </p:sp>
       <p:sp>
         <p:nvSpPr>
           <p:cNvPr id="7" name="TextBox 6"/>
@@ -17932,8 +16106,8 @@
         </p:nvSpPr>
         <p:spPr>
           <a:xfrm>
-            <a:off x="640080" y="3474720"/>
-            <a:ext cx="10972800" cy="2880360"/>
+            <a:off x="640080" y="4297680"/>
+            <a:ext cx="10972800" cy="2057400"/>
           </a:xfrm>
           <a:prstGeom prst="rect">
             <a:avLst/>
@@ -17951,83 +16125,17 @@
                 <a:spcPts val="200"/>
               </a:spcBef>
               <a:spcAft>
-                <a:spcPts val="1000"/>
+                <a:spcPts val="600"/>
               </a:spcAft>
             </a:pPr>
             <a:r>
-              <a:rPr sz="1600" b="1" i="0">
-                <a:solidFill>
-                  <a:srgbClr val="C87F0A"/>
-                </a:solidFill>
-                <a:latin typeface="Calibri"/>
-              </a:rPr>
-              <a:t>•  Where things stand:  </a:t>
-            </a:r>
-            <a:r>
-              <a:rPr sz="1600" b="0" i="0">
+              <a:rPr sz="1700" b="1" i="0">
                 <a:solidFill>
                   <a:srgbClr val="333333"/>
                 </a:solidFill>
                 <a:latin typeface="Calibri"/>
               </a:rPr>
-              <a:t>the OWL has not yet caught up to ~5 months of attribute work in the spreadsheets - expected for a v0.0.x model that is still being built.</a:t>
-            </a:r>
-          </a:p>
-          <a:p>
-            <a:pPr lvl="1">
-              <a:spcBef>
-                <a:spcPts val="200"/>
-              </a:spcBef>
-              <a:spcAft>
-                <a:spcPts val="1000"/>
-              </a:spcAft>
-            </a:pPr>
-            <a:r>
-              <a:rPr sz="1600" b="0" i="0">
-                <a:solidFill>
-                  <a:srgbClr val="333333"/>
-                </a:solidFill>
-                <a:latin typeface="Calibri"/>
-              </a:rPr>
-              <a:t>–  Autonomy is currently described three different ways across the two tracks - to reconcile.</a:t>
-            </a:r>
-          </a:p>
-          <a:p>
-            <a:pPr lvl="1">
-              <a:spcBef>
-                <a:spcPts val="200"/>
-              </a:spcBef>
-              <a:spcAft>
-                <a:spcPts val="1000"/>
-              </a:spcAft>
-            </a:pPr>
-            <a:r>
-              <a:rPr sz="1600" b="0" i="0">
-                <a:solidFill>
-                  <a:srgbClr val="333333"/>
-                </a:solidFill>
-                <a:latin typeface="Calibri"/>
-              </a:rPr>
-              <a:t>–  Sensors are described three different ways - to reconcile.</a:t>
-            </a:r>
-          </a:p>
-          <a:p>
-            <a:pPr lvl="1">
-              <a:spcBef>
-                <a:spcPts val="200"/>
-              </a:spcBef>
-              <a:spcAft>
-                <a:spcPts val="1000"/>
-              </a:spcAft>
-            </a:pPr>
-            <a:r>
-              <a:rPr sz="1600" b="0" i="0">
-                <a:solidFill>
-                  <a:srgbClr val="333333"/>
-                </a:solidFill>
-                <a:latin typeface="Calibri"/>
-              </a:rPr>
-              <a:t>–  The attribute layer (Payload, Mobility, VehicleType, ...) is in the spreadsheets, not yet in the OWL.</a:t>
+              <a:t>•  P1 and P7 are entity-typing (what a drone / a swarm IS); P2 is how a sensor is represented. All three are structural choices not yet settled - so Initialization, not Reports, is where the model gets exercised and pinned down first.</a:t>
             </a:r>
           </a:p>
         </p:txBody>
@@ -18070,7 +16178,7 @@
                 </a:solidFill>
                 <a:latin typeface="Calibri"/>
               </a:rPr>
-              <a:t>log sec 1-2 (S2, D1-D5)</a:t>
+              <a:t>Initialization-Walk.md  -  log sec 5 (P-series)</a:t>
             </a:r>
           </a:p>
         </p:txBody>
@@ -18234,21 +16342,211 @@
                 </a:solidFill>
                 <a:latin typeface="Calibri"/>
               </a:rPr>
-              <a:t>First to settle: three structural typing decisions</a:t>
-            </a:r>
-          </a:p>
-        </p:txBody>
-      </p:sp>
-      <p:sp>
-        <p:nvSpPr>
-          <p:cNvPr id="4" name="Rounded Rectangle 3"/>
+              <a:t>P1  -  A UAV is typed twice</a:t>
+            </a:r>
+          </a:p>
+        </p:txBody>
+      </p:sp>
+      <p:sp>
+        <p:nvSpPr>
+          <p:cNvPr id="4" name="TextBox 3"/>
+          <p:cNvSpPr txBox="1"/>
+          <p:nvPr/>
+        </p:nvSpPr>
+        <p:spPr>
+          <a:xfrm>
+            <a:off x="548640" y="914400"/>
+            <a:ext cx="10972800" cy="320040"/>
+          </a:xfrm>
+          <a:prstGeom prst="rect">
+            <a:avLst/>
+          </a:prstGeom>
+          <a:noFill/>
+        </p:spPr>
+        <p:txBody>
+          <a:bodyPr wrap="square">
+            <a:spAutoFit/>
+          </a:bodyPr>
+          <a:lstStyle/>
+          <a:p>
+            <a:r>
+              <a:rPr sz="1300" b="0" i="1">
+                <a:solidFill>
+                  <a:srgbClr val="2E869A"/>
+                </a:solidFill>
+                <a:latin typeface="Calibri"/>
+              </a:rPr>
+              <a:t>Entity-typing decision</a:t>
+            </a:r>
+          </a:p>
+        </p:txBody>
+      </p:sp>
+      <p:sp>
+        <p:nvSpPr>
+          <p:cNvPr id="5" name="Rounded Rectangle 4"/>
           <p:cNvSpPr/>
           <p:nvPr/>
         </p:nvSpPr>
         <p:spPr>
           <a:xfrm>
-            <a:off x="731520" y="1828800"/>
-            <a:ext cx="3474720" cy="2011680"/>
+            <a:off x="4754880" y="1554480"/>
+            <a:ext cx="2743200" cy="685800"/>
+          </a:xfrm>
+          <a:prstGeom prst="roundRect">
+            <a:avLst/>
+          </a:prstGeom>
+          <a:solidFill>
+            <a:srgbClr val="1F3A5F"/>
+          </a:solidFill>
+          <a:ln>
+            <a:noFill/>
+          </a:ln>
+        </p:spPr>
+        <p:style>
+          <a:lnRef idx="1">
+            <a:schemeClr val="accent1"/>
+          </a:lnRef>
+          <a:fillRef idx="3">
+            <a:schemeClr val="accent1"/>
+          </a:fillRef>
+          <a:effectRef idx="2">
+            <a:schemeClr val="accent1"/>
+          </a:effectRef>
+          <a:fontRef idx="minor">
+            <a:schemeClr val="lt1"/>
+          </a:fontRef>
+        </p:style>
+        <p:txBody>
+          <a:bodyPr rtlCol="0" anchor="ctr" wrap="square"/>
+          <a:lstStyle/>
+          <a:p>
+            <a:pPr algn="ctr"/>
+            <a:r>
+              <a:rPr sz="1400" b="1" i="0">
+                <a:solidFill>
+                  <a:srgbClr val="FFFFFF"/>
+                </a:solidFill>
+                <a:latin typeface="Calibri"/>
+              </a:rPr>
+              <a:t>ActorEntity</a:t>
+            </a:r>
+          </a:p>
+        </p:txBody>
+      </p:sp>
+      <p:sp>
+        <p:nvSpPr>
+          <p:cNvPr id="6" name="Rounded Rectangle 5"/>
+          <p:cNvSpPr/>
+          <p:nvPr/>
+        </p:nvSpPr>
+        <p:spPr>
+          <a:xfrm>
+            <a:off x="2194560" y="2743200"/>
+            <a:ext cx="2743200" cy="685800"/>
+          </a:xfrm>
+          <a:prstGeom prst="roundRect">
+            <a:avLst/>
+          </a:prstGeom>
+          <a:solidFill>
+            <a:srgbClr val="2E869A"/>
+          </a:solidFill>
+          <a:ln>
+            <a:noFill/>
+          </a:ln>
+        </p:spPr>
+        <p:style>
+          <a:lnRef idx="1">
+            <a:schemeClr val="accent1"/>
+          </a:lnRef>
+          <a:fillRef idx="3">
+            <a:schemeClr val="accent1"/>
+          </a:fillRef>
+          <a:effectRef idx="2">
+            <a:schemeClr val="accent1"/>
+          </a:effectRef>
+          <a:fontRef idx="minor">
+            <a:schemeClr val="lt1"/>
+          </a:fontRef>
+        </p:style>
+        <p:txBody>
+          <a:bodyPr rtlCol="0" anchor="ctr" wrap="square"/>
+          <a:lstStyle/>
+          <a:p>
+            <a:pPr algn="ctr"/>
+            <a:r>
+              <a:rPr sz="1300" b="1" i="0">
+                <a:solidFill>
+                  <a:srgbClr val="FFFFFF"/>
+                </a:solidFill>
+                <a:latin typeface="Calibri"/>
+              </a:rPr>
+              <a:t>Platform  (SMX)</a:t>
+            </a:r>
+          </a:p>
+        </p:txBody>
+      </p:sp>
+      <p:sp>
+        <p:nvSpPr>
+          <p:cNvPr id="7" name="Rounded Rectangle 6"/>
+          <p:cNvSpPr/>
+          <p:nvPr/>
+        </p:nvSpPr>
+        <p:spPr>
+          <a:xfrm>
+            <a:off x="2194560" y="3840480"/>
+            <a:ext cx="2743200" cy="685800"/>
+          </a:xfrm>
+          <a:prstGeom prst="roundRect">
+            <a:avLst/>
+          </a:prstGeom>
+          <a:solidFill>
+            <a:srgbClr val="2E869A"/>
+          </a:solidFill>
+          <a:ln>
+            <a:noFill/>
+          </a:ln>
+        </p:spPr>
+        <p:style>
+          <a:lnRef idx="1">
+            <a:schemeClr val="accent1"/>
+          </a:lnRef>
+          <a:fillRef idx="3">
+            <a:schemeClr val="accent1"/>
+          </a:fillRef>
+          <a:effectRef idx="2">
+            <a:schemeClr val="accent1"/>
+          </a:effectRef>
+          <a:fontRef idx="minor">
+            <a:schemeClr val="lt1"/>
+          </a:fontRef>
+        </p:style>
+        <p:txBody>
+          <a:bodyPr rtlCol="0" anchor="ctr" wrap="square"/>
+          <a:lstStyle/>
+          <a:p>
+            <a:pPr algn="ctr"/>
+            <a:r>
+              <a:rPr sz="1300" b="1" i="0">
+                <a:solidFill>
+                  <a:srgbClr val="FFFFFF"/>
+                </a:solidFill>
+                <a:latin typeface="Calibri"/>
+              </a:rPr>
+              <a:t>Aircraft  (SMX)</a:t>
+            </a:r>
+          </a:p>
+        </p:txBody>
+      </p:sp>
+      <p:sp>
+        <p:nvSpPr>
+          <p:cNvPr id="8" name="Rounded Rectangle 7"/>
+          <p:cNvSpPr/>
+          <p:nvPr/>
+        </p:nvSpPr>
+        <p:spPr>
+          <a:xfrm>
+            <a:off x="7315200" y="2743200"/>
+            <a:ext cx="2743200" cy="685800"/>
           </a:xfrm>
           <a:prstGeom prst="roundRect">
             <a:avLst/>
@@ -18280,29 +16578,27 @@
           <a:p>
             <a:pPr algn="ctr"/>
             <a:r>
-              <a:rPr sz="1600" b="1" i="0">
+              <a:rPr sz="1300" b="1" i="0">
                 <a:solidFill>
                   <a:srgbClr val="FFFFFF"/>
                 </a:solidFill>
                 <a:latin typeface="Calibri"/>
               </a:rPr>
-              <a:t>P1
-UAV typing: Robot
-tree vs SMX Platform</a:t>
-            </a:r>
-          </a:p>
-        </p:txBody>
-      </p:sp>
-      <p:sp>
-        <p:nvSpPr>
-          <p:cNvPr id="5" name="Rounded Rectangle 4"/>
+              <a:t>Robot  (ASX)</a:t>
+            </a:r>
+          </a:p>
+        </p:txBody>
+      </p:sp>
+      <p:sp>
+        <p:nvSpPr>
+          <p:cNvPr id="9" name="Rounded Rectangle 8"/>
           <p:cNvSpPr/>
           <p:nvPr/>
         </p:nvSpPr>
         <p:spPr>
           <a:xfrm>
-            <a:off x="4434840" y="1828800"/>
-            <a:ext cx="3474720" cy="2011680"/>
+            <a:off x="7315200" y="3840480"/>
+            <a:ext cx="2743200" cy="685800"/>
           </a:xfrm>
           <a:prstGeom prst="roundRect">
             <a:avLst/>
@@ -18334,83 +16630,167 @@
           <a:p>
             <a:pPr algn="ctr"/>
             <a:r>
-              <a:rPr sz="1600" b="1" i="0">
+              <a:rPr sz="1300" b="1" i="0">
                 <a:solidFill>
                   <a:srgbClr val="FFFFFF"/>
                 </a:solidFill>
                 <a:latin typeface="Calibri"/>
               </a:rPr>
-              <a:t>P2
-Sensor: one
-representation to pick</a:t>
-            </a:r>
-          </a:p>
-        </p:txBody>
-      </p:sp>
-      <p:sp>
-        <p:nvSpPr>
-          <p:cNvPr id="6" name="Rounded Rectangle 5"/>
-          <p:cNvSpPr/>
-          <p:nvPr/>
-        </p:nvSpPr>
-        <p:spPr>
-          <a:xfrm>
-            <a:off x="8138160" y="1828800"/>
-            <a:ext cx="3337560" cy="2011680"/>
-          </a:xfrm>
-          <a:prstGeom prst="roundRect">
-            <a:avLst/>
-          </a:prstGeom>
-          <a:solidFill>
-            <a:srgbClr val="C87F0A"/>
-          </a:solidFill>
-          <a:ln>
-            <a:noFill/>
+              <a:t>UAV  (ASX)</a:t>
+            </a:r>
+          </a:p>
+        </p:txBody>
+      </p:sp>
+      <p:cxnSp>
+        <p:nvCxnSpPr>
+          <p:cNvPr id="10" name="Connector 9"/>
+          <p:cNvCxnSpPr/>
+          <p:nvPr/>
+        </p:nvCxnSpPr>
+        <p:spPr>
+          <a:xfrm flipH="1">
+            <a:off x="3566160" y="2240280"/>
+            <a:ext cx="2103120" cy="502920"/>
+          </a:xfrm>
+          <a:prstGeom prst="line">
+            <a:avLst/>
+          </a:prstGeom>
+          <a:ln w="19050">
+            <a:solidFill>
+              <a:srgbClr val="1F3A5F"/>
+            </a:solidFill>
           </a:ln>
         </p:spPr>
         <p:style>
-          <a:lnRef idx="1">
+          <a:lnRef idx="2">
             <a:schemeClr val="accent1"/>
           </a:lnRef>
-          <a:fillRef idx="3">
+          <a:fillRef idx="0">
             <a:schemeClr val="accent1"/>
           </a:fillRef>
-          <a:effectRef idx="2">
+          <a:effectRef idx="1">
             <a:schemeClr val="accent1"/>
           </a:effectRef>
           <a:fontRef idx="minor">
-            <a:schemeClr val="lt1"/>
+            <a:schemeClr val="tx1"/>
           </a:fontRef>
         </p:style>
-        <p:txBody>
-          <a:bodyPr rtlCol="0" anchor="ctr" wrap="square"/>
-          <a:lstStyle/>
-          <a:p>
-            <a:pPr algn="ctr"/>
-            <a:r>
-              <a:rPr sz="1600" b="1" i="0">
-                <a:solidFill>
-                  <a:srgbClr val="FFFFFF"/>
-                </a:solidFill>
-                <a:latin typeface="Calibri"/>
-              </a:rPr>
-              <a:t>P7
-Swarm: make it
-taskable (ActorEntity)</a:t>
-            </a:r>
-          </a:p>
-        </p:txBody>
-      </p:sp>
-      <p:sp>
-        <p:nvSpPr>
-          <p:cNvPr id="7" name="TextBox 6"/>
+      </p:cxnSp>
+      <p:cxnSp>
+        <p:nvCxnSpPr>
+          <p:cNvPr id="11" name="Connector 10"/>
+          <p:cNvCxnSpPr/>
+          <p:nvPr/>
+        </p:nvCxnSpPr>
+        <p:spPr>
+          <a:xfrm>
+            <a:off x="3566160" y="3429000"/>
+            <a:ext cx="0" cy="411480"/>
+          </a:xfrm>
+          <a:prstGeom prst="line">
+            <a:avLst/>
+          </a:prstGeom>
+          <a:ln w="19050">
+            <a:solidFill>
+              <a:srgbClr val="1F3A5F"/>
+            </a:solidFill>
+          </a:ln>
+        </p:spPr>
+        <p:style>
+          <a:lnRef idx="2">
+            <a:schemeClr val="accent1"/>
+          </a:lnRef>
+          <a:fillRef idx="0">
+            <a:schemeClr val="accent1"/>
+          </a:fillRef>
+          <a:effectRef idx="1">
+            <a:schemeClr val="accent1"/>
+          </a:effectRef>
+          <a:fontRef idx="minor">
+            <a:schemeClr val="tx1"/>
+          </a:fontRef>
+        </p:style>
+      </p:cxnSp>
+      <p:cxnSp>
+        <p:nvCxnSpPr>
+          <p:cNvPr id="12" name="Connector 11"/>
+          <p:cNvCxnSpPr/>
+          <p:nvPr/>
+        </p:nvCxnSpPr>
+        <p:spPr>
+          <a:xfrm>
+            <a:off x="6583680" y="2240280"/>
+            <a:ext cx="2103120" cy="502920"/>
+          </a:xfrm>
+          <a:prstGeom prst="line">
+            <a:avLst/>
+          </a:prstGeom>
+          <a:ln w="19050">
+            <a:solidFill>
+              <a:srgbClr val="1F3A5F"/>
+            </a:solidFill>
+          </a:ln>
+        </p:spPr>
+        <p:style>
+          <a:lnRef idx="2">
+            <a:schemeClr val="accent1"/>
+          </a:lnRef>
+          <a:fillRef idx="0">
+            <a:schemeClr val="accent1"/>
+          </a:fillRef>
+          <a:effectRef idx="1">
+            <a:schemeClr val="accent1"/>
+          </a:effectRef>
+          <a:fontRef idx="minor">
+            <a:schemeClr val="tx1"/>
+          </a:fontRef>
+        </p:style>
+      </p:cxnSp>
+      <p:cxnSp>
+        <p:nvCxnSpPr>
+          <p:cNvPr id="13" name="Connector 12"/>
+          <p:cNvCxnSpPr/>
+          <p:nvPr/>
+        </p:nvCxnSpPr>
+        <p:spPr>
+          <a:xfrm>
+            <a:off x="8686800" y="3429000"/>
+            <a:ext cx="0" cy="411480"/>
+          </a:xfrm>
+          <a:prstGeom prst="line">
+            <a:avLst/>
+          </a:prstGeom>
+          <a:ln w="19050">
+            <a:solidFill>
+              <a:srgbClr val="1F3A5F"/>
+            </a:solidFill>
+          </a:ln>
+        </p:spPr>
+        <p:style>
+          <a:lnRef idx="2">
+            <a:schemeClr val="accent1"/>
+          </a:lnRef>
+          <a:fillRef idx="0">
+            <a:schemeClr val="accent1"/>
+          </a:fillRef>
+          <a:effectRef idx="1">
+            <a:schemeClr val="accent1"/>
+          </a:effectRef>
+          <a:fontRef idx="minor">
+            <a:schemeClr val="tx1"/>
+          </a:fontRef>
+        </p:style>
+      </p:cxnSp>
+      <p:sp>
+        <p:nvSpPr>
+          <p:cNvPr id="14" name="TextBox 13"/>
           <p:cNvSpPr txBox="1"/>
           <p:nvPr/>
         </p:nvSpPr>
         <p:spPr>
           <a:xfrm>
-            <a:off x="640080" y="4297680"/>
-            <a:ext cx="10972800" cy="2057400"/>
+            <a:off x="640080" y="4434840"/>
+            <a:ext cx="10972800" cy="1920240"/>
           </a:xfrm>
           <a:prstGeom prst="rect">
             <a:avLst/>
@@ -18432,20 +16812,95 @@
               </a:spcAft>
             </a:pPr>
             <a:r>
-              <a:rPr sz="1700" b="1" i="0">
+              <a:rPr sz="1300" b="0" i="0">
                 <a:solidFill>
                   <a:srgbClr val="333333"/>
                 </a:solidFill>
                 <a:latin typeface="Calibri"/>
               </a:rPr>
-              <a:t>•  P1 and P7 are entity-typing (what a drone / a swarm IS); P2 is how a sensor is represented. All three are structural choices not yet settled - so Initialization, not Reports, is where the model gets exercised and pinned down first.</a:t>
-            </a:r>
-          </a:p>
-        </p:txBody>
-      </p:sp>
-      <p:sp>
-        <p:nvSpPr>
-          <p:cNvPr id="8" name="TextBox 7"/>
+              <a:t>•  Two parallel sibling trees under ActorEntity model the same real drone.</a:t>
+            </a:r>
+          </a:p>
+          <a:p>
+            <a:pPr lvl="1">
+              <a:spcBef>
+                <a:spcPts val="200"/>
+              </a:spcBef>
+              <a:spcAft>
+                <a:spcPts val="600"/>
+              </a:spcAft>
+            </a:pPr>
+            <a:r>
+              <a:rPr sz="1300" b="0" i="0">
+                <a:solidFill>
+                  <a:srgbClr val="333333"/>
+                </a:solidFill>
+                <a:latin typeface="Calibri"/>
+              </a:rPr>
+              <a:t>–  Type it as Robot and it loses all existing SMX Platform / LOX machinery; type it as Aircraft and the ASX Robot / UAV classes go unused.</a:t>
+            </a:r>
+          </a:p>
+          <a:p>
+            <a:pPr>
+              <a:spcBef>
+                <a:spcPts val="200"/>
+              </a:spcBef>
+              <a:spcAft>
+                <a:spcPts val="600"/>
+              </a:spcAft>
+            </a:pPr>
+            <a:r>
+              <a:rPr sz="1300" b="1" i="0">
+                <a:solidFill>
+                  <a:srgbClr val="C87F0A"/>
+                </a:solidFill>
+                <a:latin typeface="Calibri"/>
+              </a:rPr>
+              <a:t>•  Now in v0.0.3:  </a:t>
+            </a:r>
+            <a:r>
+              <a:rPr sz="1300" b="0" i="0">
+                <a:solidFill>
+                  <a:srgbClr val="333333"/>
+                </a:solidFill>
+                <a:latin typeface="Calibri"/>
+              </a:rPr>
+              <a:t>both trees are declared - UAV/UGV under Robot AND UnmannedAerial/Ground/Maritime/UnderwaterVehicle under SMX Vehicle - so this choice is now in the model to settle.</a:t>
+            </a:r>
+          </a:p>
+          <a:p>
+            <a:pPr>
+              <a:spcBef>
+                <a:spcPts val="200"/>
+              </a:spcBef>
+              <a:spcAft>
+                <a:spcPts val="600"/>
+              </a:spcAft>
+            </a:pPr>
+            <a:r>
+              <a:rPr sz="1300" b="1" i="0">
+                <a:solidFill>
+                  <a:srgbClr val="2E869A"/>
+                </a:solidFill>
+                <a:latin typeface="Calibri"/>
+              </a:rPr>
+              <a:t>•  Decision (Q-A):  </a:t>
+            </a:r>
+            <a:r>
+              <a:rPr sz="1300" b="0" i="0">
+                <a:solidFill>
+                  <a:srgbClr val="333333"/>
+                </a:solidFill>
+                <a:latin typeface="Calibri"/>
+              </a:rPr>
+              <a:t>make ASX autonomy a role/facet on the existing Platform subtree instead of a parallel Robot tree?</a:t>
+            </a:r>
+          </a:p>
+        </p:txBody>
+      </p:sp>
+      <p:sp>
+        <p:nvSpPr>
+          <p:cNvPr id="15" name="TextBox 14"/>
           <p:cNvSpPr txBox="1"/>
           <p:nvPr/>
         </p:nvSpPr>
@@ -18481,14 +16936,14 @@
                 </a:solidFill>
                 <a:latin typeface="Calibri"/>
               </a:rPr>
-              <a:t>Initialization-Walk.md  -  log sec 5 (P-series)</a:t>
-            </a:r>
-          </a:p>
-        </p:txBody>
-      </p:sp>
-      <p:sp>
-        <p:nvSpPr>
-          <p:cNvPr id="9" name="TextBox 8"/>
+              <a:t>Initialization-Walk.md  -  log P1 (sec 5) + sec 9 (v0.0.3 makes it concrete)  -  decision Q-A (log sec 7)</a:t>
+            </a:r>
+          </a:p>
+        </p:txBody>
+      </p:sp>
+      <p:sp>
+        <p:nvSpPr>
+          <p:cNvPr id="16" name="TextBox 15"/>
           <p:cNvSpPr txBox="1"/>
           <p:nvPr/>
         </p:nvSpPr>
@@ -18522,7 +16977,7 @@
       </p:sp>
       <p:sp>
         <p:nvSpPr>
-          <p:cNvPr id="10" name="TextBox 9"/>
+          <p:cNvPr id="17" name="TextBox 16"/>
           <p:cNvSpPr txBox="1"/>
           <p:nvPr/>
         </p:nvSpPr>
